--- a/disciplina-01-estado-governo-mercado/materiais/01_Unidade_1_Introducao_a_Economia_Estado_Governo_Mercado.pptx
+++ b/disciplina-01-estado-governo-mercado/materiais/01_Unidade_1_Introducao_a_Economia_Estado_Governo_Mercado.pptx
@@ -1852,8 +1852,8 @@
         </p:nvSpPr>
         <p:spPr>
           <a:xfrm>
-            <a:off x="1188720" y="1828800"/>
-            <a:ext cx="7223760" cy="1463040"/>
+            <a:off x="1188720" y="1810512"/>
+            <a:ext cx="7223760" cy="365760"/>
           </a:xfrm>
           <a:prstGeom prst="rect">
             <a:avLst/>
@@ -1872,37 +1872,17 @@
               <a:buNone/>
             </a:pPr>
             <a:r>
-              <a:rPr lang="en-US" sz="4600" b="1" dirty="0">
-                <a:solidFill>
-                  <a:srgbClr val="13294B"/>
-                </a:solidFill>
-                <a:latin typeface="Calibri" pitchFamily="34" charset="0"/>
-                <a:ea typeface="Calibri" pitchFamily="34" charset="-122"/>
-                <a:cs typeface="Calibri" pitchFamily="34" charset="-120"/>
-              </a:rPr>
-              <a:t>Especialização em</a:t>
-            </a:r>
-            <a:endParaRPr lang="en-US" sz="4600" dirty="0"/>
-          </a:p>
-          <a:p>
-            <a:pPr algn="l" indent="0" marL="0">
-              <a:lnSpc>
-                <a:spcPct val="100000"/>
-              </a:lnSpc>
-              <a:buNone/>
-            </a:pPr>
-            <a:r>
-              <a:rPr lang="en-US" sz="4600" b="1" dirty="0">
-                <a:solidFill>
-                  <a:srgbClr val="13294B"/>
-                </a:solidFill>
-                <a:latin typeface="Calibri" pitchFamily="34" charset="0"/>
-                <a:ea typeface="Calibri" pitchFamily="34" charset="-122"/>
-                <a:cs typeface="Calibri" pitchFamily="34" charset="-120"/>
-              </a:rPr>
-              <a:t>Gestão Pública</a:t>
-            </a:r>
-            <a:endParaRPr lang="en-US" sz="4600" dirty="0"/>
+              <a:rPr lang="en-US" sz="2000" b="1" dirty="0">
+                <a:solidFill>
+                  <a:srgbClr val="2A8C85"/>
+                </a:solidFill>
+                <a:latin typeface="Calibri" pitchFamily="34" charset="0"/>
+                <a:ea typeface="Calibri" pitchFamily="34" charset="-122"/>
+                <a:cs typeface="Calibri" pitchFamily="34" charset="-120"/>
+              </a:rPr>
+              <a:t>Especialização em Gestão Pública</a:t>
+            </a:r>
+            <a:endParaRPr lang="en-US" sz="2000" dirty="0"/>
           </a:p>
         </p:txBody>
       </p:sp>
@@ -1914,8 +1894,92 @@
         </p:nvSpPr>
         <p:spPr>
           <a:xfrm>
-            <a:off x="1243584" y="3456432"/>
-            <a:ext cx="3017520" cy="420624"/>
+            <a:off x="1188720" y="2157984"/>
+            <a:ext cx="7223760" cy="786384"/>
+          </a:xfrm>
+          <a:prstGeom prst="rect">
+            <a:avLst/>
+          </a:prstGeom>
+          <a:noFill/>
+          <a:ln/>
+        </p:spPr>
+        <p:txBody>
+          <a:bodyPr wrap="square" lIns="0" tIns="0" rIns="0" bIns="0" rtlCol="0" anchor="ctr"/>
+          <a:lstStyle/>
+          <a:p>
+            <a:pPr algn="l" indent="0" marL="0">
+              <a:lnSpc>
+                <a:spcPct val="100000"/>
+              </a:lnSpc>
+              <a:buNone/>
+            </a:pPr>
+            <a:r>
+              <a:rPr lang="en-US" sz="4800" b="1" dirty="0">
+                <a:solidFill>
+                  <a:srgbClr val="13294B"/>
+                </a:solidFill>
+                <a:latin typeface="Calibri" pitchFamily="34" charset="0"/>
+                <a:ea typeface="Calibri" pitchFamily="34" charset="-122"/>
+                <a:cs typeface="Calibri" pitchFamily="34" charset="-120"/>
+              </a:rPr>
+              <a:t>Estado, Governo e Mercado</a:t>
+            </a:r>
+            <a:endParaRPr lang="en-US" sz="4800" dirty="0"/>
+          </a:p>
+        </p:txBody>
+      </p:sp>
+      <p:sp>
+        <p:nvSpPr>
+          <p:cNvPr id="7" name="Text 2"/>
+          <p:cNvSpPr txBox="1"/>
+          <p:nvPr/>
+        </p:nvSpPr>
+        <p:spPr>
+          <a:xfrm>
+            <a:off x="1188720" y="2926080"/>
+            <a:ext cx="7223760" cy="384048"/>
+          </a:xfrm>
+          <a:prstGeom prst="rect">
+            <a:avLst/>
+          </a:prstGeom>
+          <a:noFill/>
+          <a:ln/>
+        </p:spPr>
+        <p:txBody>
+          <a:bodyPr wrap="square" lIns="0" tIns="0" rIns="0" bIns="0" rtlCol="0" anchor="ctr"/>
+          <a:lstStyle/>
+          <a:p>
+            <a:pPr algn="l" indent="0" marL="0">
+              <a:lnSpc>
+                <a:spcPct val="100000"/>
+              </a:lnSpc>
+              <a:buNone/>
+            </a:pPr>
+            <a:r>
+              <a:rPr lang="en-US" sz="1900" dirty="0">
+                <a:solidFill>
+                  <a:srgbClr val="1F2A37"/>
+                </a:solidFill>
+                <a:latin typeface="Calibri" pitchFamily="34" charset="0"/>
+                <a:ea typeface="Calibri" pitchFamily="34" charset="-122"/>
+                <a:cs typeface="Calibri" pitchFamily="34" charset="-120"/>
+              </a:rPr>
+              <a:t>Unidade 1 · Introdução à economia; Estado, governo e mercado</a:t>
+            </a:r>
+            <a:endParaRPr lang="en-US" sz="1900" dirty="0"/>
+          </a:p>
+        </p:txBody>
+      </p:sp>
+      <p:sp>
+        <p:nvSpPr>
+          <p:cNvPr id="8" name="Text 3"/>
+          <p:cNvSpPr txBox="1"/>
+          <p:nvPr/>
+        </p:nvSpPr>
+        <p:spPr>
+          <a:xfrm>
+            <a:off x="1243584" y="3474720"/>
+            <a:ext cx="4572000" cy="420624"/>
           </a:xfrm>
           <a:prstGeom prst="roundRect">
             <a:avLst>
@@ -1946,7 +2010,7 @@
                 <a:ea typeface="Calibri" pitchFamily="34" charset="-122"/>
                 <a:cs typeface="Calibri" pitchFamily="34" charset="-120"/>
               </a:rPr>
-              <a:t>DEAD · UAB · Turma 2026/2</a:t>
+              <a:t>DEAD · UAB · Turma 2026/2 · Prof. Dr. Cleiton Franco</a:t>
             </a:r>
             <a:endParaRPr lang="en-US" sz="1500" dirty="0"/>
           </a:p>
@@ -2486,6 +2550,48 @@
               <a:t>Emprego, preços estáveis e crescimento, por meio das políticas fiscal e monetária.</a:t>
             </a:r>
             <a:endParaRPr lang="en-US" sz="1600" dirty="0"/>
+          </a:p>
+        </p:txBody>
+      </p:sp>
+      <p:sp>
+        <p:nvSpPr>
+          <p:cNvPr id="16" name="Text 11"/>
+          <p:cNvSpPr txBox="1"/>
+          <p:nvPr/>
+        </p:nvSpPr>
+        <p:spPr>
+          <a:xfrm>
+            <a:off x="4206240" y="36576"/>
+            <a:ext cx="4800600" cy="219456"/>
+          </a:xfrm>
+          <a:prstGeom prst="rect">
+            <a:avLst/>
+          </a:prstGeom>
+          <a:noFill/>
+          <a:ln/>
+        </p:spPr>
+        <p:txBody>
+          <a:bodyPr wrap="square" lIns="0" tIns="0" rIns="0" bIns="0" rtlCol="0" anchor="ctr"/>
+          <a:lstStyle/>
+          <a:p>
+            <a:pPr algn="r" indent="0" marL="0">
+              <a:lnSpc>
+                <a:spcPct val="100000"/>
+              </a:lnSpc>
+              <a:buNone/>
+            </a:pPr>
+            <a:r>
+              <a:rPr lang="en-US" sz="950" dirty="0">
+                <a:solidFill>
+                  <a:srgbClr val="5B6770"/>
+                </a:solidFill>
+                <a:latin typeface="Calibri" pitchFamily="34" charset="0"/>
+                <a:ea typeface="Calibri" pitchFamily="34" charset="-122"/>
+                <a:cs typeface="Calibri" pitchFamily="34" charset="-120"/>
+              </a:rPr>
+              <a:t>Estado, Governo e Mercado · Unidade 1</a:t>
+            </a:r>
+            <a:endParaRPr lang="en-US" sz="950" dirty="0"/>
           </a:p>
         </p:txBody>
       </p:sp>
@@ -3378,6 +3484,48 @@
           </a:p>
         </p:txBody>
       </p:sp>
+      <p:sp>
+        <p:nvSpPr>
+          <p:cNvPr id="6" name="Text 3"/>
+          <p:cNvSpPr txBox="1"/>
+          <p:nvPr/>
+        </p:nvSpPr>
+        <p:spPr>
+          <a:xfrm>
+            <a:off x="4206240" y="36576"/>
+            <a:ext cx="4800600" cy="219456"/>
+          </a:xfrm>
+          <a:prstGeom prst="rect">
+            <a:avLst/>
+          </a:prstGeom>
+          <a:noFill/>
+          <a:ln/>
+        </p:spPr>
+        <p:txBody>
+          <a:bodyPr wrap="square" lIns="0" tIns="0" rIns="0" bIns="0" rtlCol="0" anchor="ctr"/>
+          <a:lstStyle/>
+          <a:p>
+            <a:pPr algn="r" indent="0" marL="0">
+              <a:lnSpc>
+                <a:spcPct val="100000"/>
+              </a:lnSpc>
+              <a:buNone/>
+            </a:pPr>
+            <a:r>
+              <a:rPr lang="en-US" sz="950" dirty="0">
+                <a:solidFill>
+                  <a:srgbClr val="5B6770"/>
+                </a:solidFill>
+                <a:latin typeface="Calibri" pitchFamily="34" charset="0"/>
+                <a:ea typeface="Calibri" pitchFamily="34" charset="-122"/>
+                <a:cs typeface="Calibri" pitchFamily="34" charset="-120"/>
+              </a:rPr>
+              <a:t>Estado, Governo e Mercado · Unidade 1</a:t>
+            </a:r>
+            <a:endParaRPr lang="en-US" sz="950" dirty="0"/>
+          </a:p>
+        </p:txBody>
+      </p:sp>
     </p:spTree>
   </p:cSld>
   <p:clrMapOvr>
@@ -3453,7 +3601,7 @@
                 <a:ea typeface="Calibri" pitchFamily="34" charset="-122"/>
                 <a:cs typeface="Calibri" pitchFamily="34" charset="-120"/>
               </a:rPr>
-              <a:t>Unidade 1</a:t>
+              <a:t>Estado, Governo e Mercado</a:t>
             </a:r>
             <a:endParaRPr lang="en-US" sz="3200" dirty="0"/>
           </a:p>
@@ -3467,8 +3615,8 @@
         </p:nvSpPr>
         <p:spPr>
           <a:xfrm>
-            <a:off x="1920240" y="969264"/>
-            <a:ext cx="5303520" cy="402336"/>
+            <a:off x="1371600" y="969264"/>
+            <a:ext cx="6400800" cy="402336"/>
           </a:xfrm>
           <a:prstGeom prst="roundRect">
             <a:avLst>
@@ -3499,7 +3647,7 @@
                 <a:ea typeface="Calibri" pitchFamily="34" charset="-122"/>
                 <a:cs typeface="Calibri" pitchFamily="34" charset="-120"/>
               </a:rPr>
-              <a:t>Introdução à economia; Estado, governo e mercado</a:t>
+              <a:t>Unidade 1 · Introdução à economia; Estado, governo e mercado</a:t>
             </a:r>
             <a:endParaRPr lang="en-US" sz="1500" dirty="0"/>
           </a:p>
@@ -4573,6 +4721,48 @@
           </a:p>
         </p:txBody>
       </p:sp>
+      <p:sp>
+        <p:nvSpPr>
+          <p:cNvPr id="13" name="Text 9"/>
+          <p:cNvSpPr txBox="1"/>
+          <p:nvPr/>
+        </p:nvSpPr>
+        <p:spPr>
+          <a:xfrm>
+            <a:off x="4206240" y="36576"/>
+            <a:ext cx="4800600" cy="219456"/>
+          </a:xfrm>
+          <a:prstGeom prst="rect">
+            <a:avLst/>
+          </a:prstGeom>
+          <a:noFill/>
+          <a:ln/>
+        </p:spPr>
+        <p:txBody>
+          <a:bodyPr wrap="square" lIns="0" tIns="0" rIns="0" bIns="0" rtlCol="0" anchor="ctr"/>
+          <a:lstStyle/>
+          <a:p>
+            <a:pPr algn="r" indent="0" marL="0">
+              <a:lnSpc>
+                <a:spcPct val="100000"/>
+              </a:lnSpc>
+              <a:buNone/>
+            </a:pPr>
+            <a:r>
+              <a:rPr lang="en-US" sz="950" dirty="0">
+                <a:solidFill>
+                  <a:srgbClr val="5B6770"/>
+                </a:solidFill>
+                <a:latin typeface="Calibri" pitchFamily="34" charset="0"/>
+                <a:ea typeface="Calibri" pitchFamily="34" charset="-122"/>
+                <a:cs typeface="Calibri" pitchFamily="34" charset="-120"/>
+              </a:rPr>
+              <a:t>Estado, Governo e Mercado · Unidade 1</a:t>
+            </a:r>
+            <a:endParaRPr lang="en-US" sz="950" dirty="0"/>
+          </a:p>
+        </p:txBody>
+      </p:sp>
     </p:spTree>
   </p:cSld>
   <p:clrMapOvr>
@@ -5027,6 +5217,48 @@
               <a:t>A forma de responder a essas perguntas define o sistema econômico.</a:t>
             </a:r>
             <a:endParaRPr lang="en-US" sz="1700" dirty="0"/>
+          </a:p>
+        </p:txBody>
+      </p:sp>
+      <p:sp>
+        <p:nvSpPr>
+          <p:cNvPr id="8" name="Text 6"/>
+          <p:cNvSpPr txBox="1"/>
+          <p:nvPr/>
+        </p:nvSpPr>
+        <p:spPr>
+          <a:xfrm>
+            <a:off x="4206240" y="36576"/>
+            <a:ext cx="4800600" cy="219456"/>
+          </a:xfrm>
+          <a:prstGeom prst="rect">
+            <a:avLst/>
+          </a:prstGeom>
+          <a:noFill/>
+          <a:ln/>
+        </p:spPr>
+        <p:txBody>
+          <a:bodyPr wrap="square" lIns="0" tIns="0" rIns="0" bIns="0" rtlCol="0" anchor="ctr"/>
+          <a:lstStyle/>
+          <a:p>
+            <a:pPr algn="r" indent="0" marL="0">
+              <a:lnSpc>
+                <a:spcPct val="100000"/>
+              </a:lnSpc>
+              <a:buNone/>
+            </a:pPr>
+            <a:r>
+              <a:rPr lang="en-US" sz="950" dirty="0">
+                <a:solidFill>
+                  <a:srgbClr val="5B6770"/>
+                </a:solidFill>
+                <a:latin typeface="Calibri" pitchFamily="34" charset="0"/>
+                <a:ea typeface="Calibri" pitchFamily="34" charset="-122"/>
+                <a:cs typeface="Calibri" pitchFamily="34" charset="-120"/>
+              </a:rPr>
+              <a:t>Estado, Governo e Mercado · Unidade 1</a:t>
+            </a:r>
+            <a:endParaRPr lang="en-US" sz="950" dirty="0"/>
           </a:p>
         </p:txBody>
       </p:sp>
@@ -6383,6 +6615,48 @@
           </a:p>
         </p:txBody>
       </p:sp>
+      <p:sp>
+        <p:nvSpPr>
+          <p:cNvPr id="20" name="Text 13"/>
+          <p:cNvSpPr txBox="1"/>
+          <p:nvPr/>
+        </p:nvSpPr>
+        <p:spPr>
+          <a:xfrm>
+            <a:off x="4206240" y="36576"/>
+            <a:ext cx="4800600" cy="219456"/>
+          </a:xfrm>
+          <a:prstGeom prst="rect">
+            <a:avLst/>
+          </a:prstGeom>
+          <a:noFill/>
+          <a:ln/>
+        </p:spPr>
+        <p:txBody>
+          <a:bodyPr wrap="square" lIns="0" tIns="0" rIns="0" bIns="0" rtlCol="0" anchor="ctr"/>
+          <a:lstStyle/>
+          <a:p>
+            <a:pPr algn="r" indent="0" marL="0">
+              <a:lnSpc>
+                <a:spcPct val="100000"/>
+              </a:lnSpc>
+              <a:buNone/>
+            </a:pPr>
+            <a:r>
+              <a:rPr lang="en-US" sz="950" dirty="0">
+                <a:solidFill>
+                  <a:srgbClr val="5B6770"/>
+                </a:solidFill>
+                <a:latin typeface="Calibri" pitchFamily="34" charset="0"/>
+                <a:ea typeface="Calibri" pitchFamily="34" charset="-122"/>
+                <a:cs typeface="Calibri" pitchFamily="34" charset="-120"/>
+              </a:rPr>
+              <a:t>Estado, Governo e Mercado · Unidade 1</a:t>
+            </a:r>
+            <a:endParaRPr lang="en-US" sz="950" dirty="0"/>
+          </a:p>
+        </p:txBody>
+      </p:sp>
     </p:spTree>
   </p:cSld>
   <p:clrMapOvr>
@@ -6966,6 +7240,48 @@
           </a:p>
         </p:txBody>
       </p:sp>
+      <p:sp>
+        <p:nvSpPr>
+          <p:cNvPr id="17" name="Text 12"/>
+          <p:cNvSpPr txBox="1"/>
+          <p:nvPr/>
+        </p:nvSpPr>
+        <p:spPr>
+          <a:xfrm>
+            <a:off x="4206240" y="36576"/>
+            <a:ext cx="4800600" cy="219456"/>
+          </a:xfrm>
+          <a:prstGeom prst="rect">
+            <a:avLst/>
+          </a:prstGeom>
+          <a:noFill/>
+          <a:ln/>
+        </p:spPr>
+        <p:txBody>
+          <a:bodyPr wrap="square" lIns="0" tIns="0" rIns="0" bIns="0" rtlCol="0" anchor="ctr"/>
+          <a:lstStyle/>
+          <a:p>
+            <a:pPr algn="r" indent="0" marL="0">
+              <a:lnSpc>
+                <a:spcPct val="100000"/>
+              </a:lnSpc>
+              <a:buNone/>
+            </a:pPr>
+            <a:r>
+              <a:rPr lang="en-US" sz="950" dirty="0">
+                <a:solidFill>
+                  <a:srgbClr val="5B6770"/>
+                </a:solidFill>
+                <a:latin typeface="Calibri" pitchFamily="34" charset="0"/>
+                <a:ea typeface="Calibri" pitchFamily="34" charset="-122"/>
+                <a:cs typeface="Calibri" pitchFamily="34" charset="-120"/>
+              </a:rPr>
+              <a:t>Estado, Governo e Mercado · Unidade 1</a:t>
+            </a:r>
+            <a:endParaRPr lang="en-US" sz="950" dirty="0"/>
+          </a:p>
+        </p:txBody>
+      </p:sp>
     </p:spTree>
   </p:cSld>
   <p:clrMapOvr>
@@ -7273,6 +7589,48 @@
           </a:prstGeom>
         </p:spPr>
       </p:pic>
+      <p:sp>
+        <p:nvSpPr>
+          <p:cNvPr id="5" name="Text 2"/>
+          <p:cNvSpPr txBox="1"/>
+          <p:nvPr/>
+        </p:nvSpPr>
+        <p:spPr>
+          <a:xfrm>
+            <a:off x="4206240" y="36576"/>
+            <a:ext cx="4800600" cy="219456"/>
+          </a:xfrm>
+          <a:prstGeom prst="rect">
+            <a:avLst/>
+          </a:prstGeom>
+          <a:noFill/>
+          <a:ln/>
+        </p:spPr>
+        <p:txBody>
+          <a:bodyPr wrap="square" lIns="0" tIns="0" rIns="0" bIns="0" rtlCol="0" anchor="ctr"/>
+          <a:lstStyle/>
+          <a:p>
+            <a:pPr algn="r" indent="0" marL="0">
+              <a:lnSpc>
+                <a:spcPct val="100000"/>
+              </a:lnSpc>
+              <a:buNone/>
+            </a:pPr>
+            <a:r>
+              <a:rPr lang="en-US" sz="950" dirty="0">
+                <a:solidFill>
+                  <a:srgbClr val="5B6770"/>
+                </a:solidFill>
+                <a:latin typeface="Calibri" pitchFamily="34" charset="0"/>
+                <a:ea typeface="Calibri" pitchFamily="34" charset="-122"/>
+                <a:cs typeface="Calibri" pitchFamily="34" charset="-120"/>
+              </a:rPr>
+              <a:t>Estado, Governo e Mercado · Unidade 1</a:t>
+            </a:r>
+            <a:endParaRPr lang="en-US" sz="950" dirty="0"/>
+          </a:p>
+        </p:txBody>
+      </p:sp>
     </p:spTree>
   </p:cSld>
   <p:clrMapOvr>
@@ -7948,6 +8306,48 @@
           </a:p>
         </p:txBody>
       </p:sp>
+      <p:sp>
+        <p:nvSpPr>
+          <p:cNvPr id="20" name="Text 14"/>
+          <p:cNvSpPr txBox="1"/>
+          <p:nvPr/>
+        </p:nvSpPr>
+        <p:spPr>
+          <a:xfrm>
+            <a:off x="4206240" y="36576"/>
+            <a:ext cx="4800600" cy="219456"/>
+          </a:xfrm>
+          <a:prstGeom prst="rect">
+            <a:avLst/>
+          </a:prstGeom>
+          <a:noFill/>
+          <a:ln/>
+        </p:spPr>
+        <p:txBody>
+          <a:bodyPr wrap="square" lIns="0" tIns="0" rIns="0" bIns="0" rtlCol="0" anchor="ctr"/>
+          <a:lstStyle/>
+          <a:p>
+            <a:pPr algn="r" indent="0" marL="0">
+              <a:lnSpc>
+                <a:spcPct val="100000"/>
+              </a:lnSpc>
+              <a:buNone/>
+            </a:pPr>
+            <a:r>
+              <a:rPr lang="en-US" sz="950" dirty="0">
+                <a:solidFill>
+                  <a:srgbClr val="5B6770"/>
+                </a:solidFill>
+                <a:latin typeface="Calibri" pitchFamily="34" charset="0"/>
+                <a:ea typeface="Calibri" pitchFamily="34" charset="-122"/>
+                <a:cs typeface="Calibri" pitchFamily="34" charset="-120"/>
+              </a:rPr>
+              <a:t>Estado, Governo e Mercado · Unidade 1</a:t>
+            </a:r>
+            <a:endParaRPr lang="en-US" sz="950" dirty="0"/>
+          </a:p>
+        </p:txBody>
+      </p:sp>
     </p:spTree>
   </p:cSld>
   <p:clrMapOvr>
@@ -8510,6 +8910,48 @@
               <a:t>Também existem falhas de governo: captura, ineficiência, corrupção e rigidez burocrática.</a:t>
             </a:r>
             <a:endParaRPr lang="en-US" sz="1400" dirty="0"/>
+          </a:p>
+        </p:txBody>
+      </p:sp>
+      <p:sp>
+        <p:nvSpPr>
+          <p:cNvPr id="10" name="Text 8"/>
+          <p:cNvSpPr txBox="1"/>
+          <p:nvPr/>
+        </p:nvSpPr>
+        <p:spPr>
+          <a:xfrm>
+            <a:off x="4206240" y="36576"/>
+            <a:ext cx="4800600" cy="219456"/>
+          </a:xfrm>
+          <a:prstGeom prst="rect">
+            <a:avLst/>
+          </a:prstGeom>
+          <a:noFill/>
+          <a:ln/>
+        </p:spPr>
+        <p:txBody>
+          <a:bodyPr wrap="square" lIns="0" tIns="0" rIns="0" bIns="0" rtlCol="0" anchor="ctr"/>
+          <a:lstStyle/>
+          <a:p>
+            <a:pPr algn="r" indent="0" marL="0">
+              <a:lnSpc>
+                <a:spcPct val="100000"/>
+              </a:lnSpc>
+              <a:buNone/>
+            </a:pPr>
+            <a:r>
+              <a:rPr lang="en-US" sz="950" dirty="0">
+                <a:solidFill>
+                  <a:srgbClr val="5B6770"/>
+                </a:solidFill>
+                <a:latin typeface="Calibri" pitchFamily="34" charset="0"/>
+                <a:ea typeface="Calibri" pitchFamily="34" charset="-122"/>
+                <a:cs typeface="Calibri" pitchFamily="34" charset="-120"/>
+              </a:rPr>
+              <a:t>Estado, Governo e Mercado · Unidade 1</a:t>
+            </a:r>
+            <a:endParaRPr lang="en-US" sz="950" dirty="0"/>
           </a:p>
         </p:txBody>
       </p:sp>

--- a/disciplina-01-estado-governo-mercado/materiais/01_Unidade_1_Introducao_a_Economia_Estado_Governo_Mercado.pptx
+++ b/disciplina-01-estado-governo-mercado/materiais/01_Unidade_1_Introducao_a_Economia_Estado_Governo_Mercado.pptx
@@ -11046,7 +11046,7 @@
                 <a:ea typeface="Calibri" pitchFamily="34" charset="-122"/>
                 <a:cs typeface="Calibri" pitchFamily="34" charset="-120"/>
               </a:rPr>
-              <a:t>Página de conteúdos: Unidades 1 e 2 · Webaula: 14/10, 19h</a:t>
+              <a:t>Página de conteúdos: Unidades 1 e 2 · Fóruns até 18/10</a:t>
             </a:r>
             <a:endParaRPr lang="en-US" sz="1500" dirty="0"/>
           </a:p>
@@ -13098,7 +13098,7 @@
                           <a:ea typeface="Calibri" pitchFamily="34" charset="-122"/>
                           <a:cs typeface="Calibri" pitchFamily="34" charset="-120"/>
                         </a:rPr>
-                        <a:t>14/10 (qua)</a:t>
+                        <a:t>até 18/10</a:t>
                       </a:r>
                       <a:endParaRPr lang="en-US" sz="1350" dirty="0">
                         <a:latin typeface="Calibri" charset="0"/>
@@ -13166,7 +13166,7 @@
                           <a:ea typeface="Calibri" pitchFamily="34" charset="-122"/>
                           <a:cs typeface="Calibri" pitchFamily="34" charset="-120"/>
                         </a:rPr>
-                        <a:t>1ª webaula (aula inaugural), às 19h</a:t>
+                        <a:t>Fórum de apresentação</a:t>
                       </a:r>
                       <a:endParaRPr lang="en-US" sz="1350" dirty="0">
                         <a:latin typeface="Calibri" charset="0"/>
@@ -13304,7 +13304,7 @@
                           <a:ea typeface="Calibri" pitchFamily="34" charset="-122"/>
                           <a:cs typeface="Calibri" pitchFamily="34" charset="-120"/>
                         </a:rPr>
-                        <a:t>Fórum de apresentação</a:t>
+                        <a:t>Fórum temático 1: que falha de mercado uma política pública do seu município procura corrigir?</a:t>
                       </a:r>
                       <a:endParaRPr lang="en-US" sz="1350" dirty="0">
                         <a:latin typeface="Calibri" charset="0"/>
@@ -13352,144 +13352,6 @@
                     </a:lnB>
                     <a:solidFill>
                       <a:srgbClr val="FFFFFF"/>
-                    </a:solidFill>
-                  </a:tcPr>
-                </a:tc>
-              </a:tr>
-              <a:tr h="0">
-                <a:tc>
-                  <a:txBody>
-                    <a:bodyPr/>
-                    <a:lstStyle/>
-                    <a:p>
-                      <a:pPr indent="0" marL="0">
-                        <a:buNone/>
-                      </a:pPr>
-                      <a:r>
-                        <a:rPr lang="en-US" sz="1350" dirty="0">
-                          <a:solidFill>
-                            <a:srgbClr val="1F2A37"/>
-                          </a:solidFill>
-                          <a:latin typeface="Calibri" pitchFamily="34" charset="0"/>
-                          <a:ea typeface="Calibri" pitchFamily="34" charset="-122"/>
-                          <a:cs typeface="Calibri" pitchFamily="34" charset="-120"/>
-                        </a:rPr>
-                        <a:t>até 18/10</a:t>
-                      </a:r>
-                      <a:endParaRPr lang="en-US" sz="1350" dirty="0">
-                        <a:latin typeface="Calibri" charset="0"/>
-                        <a:ea typeface="Calibri" charset="0"/>
-                        <a:cs typeface="Calibri" charset="0"/>
-                      </a:endParaRPr>
-                    </a:p>
-                  </a:txBody>
-                  <a:tcPr marL="50800" marR="50800" marT="50800" marB="50800" anchor="ctr">
-                    <a:lnL w="9525" cap="flat" cmpd="sng" algn="ctr">
-                      <a:solidFill>
-                        <a:srgbClr val="DCD5C1"/>
-                      </a:solidFill>
-                      <a:prstDash val="solid"/>
-                      <a:round/>
-                      <a:headEnd type="none" w="med" len="med"/>
-                      <a:tailEnd type="none" w="med" len="med"/>
-                    </a:lnL>
-                    <a:lnR w="9525" cap="flat" cmpd="sng" algn="ctr">
-                      <a:solidFill>
-                        <a:srgbClr val="DCD5C1"/>
-                      </a:solidFill>
-                      <a:prstDash val="solid"/>
-                      <a:round/>
-                      <a:headEnd type="none" w="med" len="med"/>
-                      <a:tailEnd type="none" w="med" len="med"/>
-                    </a:lnR>
-                    <a:lnT w="9525" cap="flat" cmpd="sng" algn="ctr">
-                      <a:solidFill>
-                        <a:srgbClr val="DCD5C1"/>
-                      </a:solidFill>
-                      <a:prstDash val="solid"/>
-                      <a:round/>
-                      <a:headEnd type="none" w="med" len="med"/>
-                      <a:tailEnd type="none" w="med" len="med"/>
-                    </a:lnT>
-                    <a:lnB w="9525" cap="flat" cmpd="sng" algn="ctr">
-                      <a:solidFill>
-                        <a:srgbClr val="DCD5C1"/>
-                      </a:solidFill>
-                      <a:prstDash val="solid"/>
-                      <a:round/>
-                      <a:headEnd type="none" w="med" len="med"/>
-                      <a:tailEnd type="none" w="med" len="med"/>
-                    </a:lnB>
-                    <a:solidFill>
-                      <a:srgbClr val="F4F7F8"/>
-                    </a:solidFill>
-                  </a:tcPr>
-                </a:tc>
-                <a:tc>
-                  <a:txBody>
-                    <a:bodyPr/>
-                    <a:lstStyle/>
-                    <a:p>
-                      <a:pPr indent="0" marL="0">
-                        <a:buNone/>
-                      </a:pPr>
-                      <a:r>
-                        <a:rPr lang="en-US" sz="1350" dirty="0">
-                          <a:solidFill>
-                            <a:srgbClr val="1F2A37"/>
-                          </a:solidFill>
-                          <a:latin typeface="Calibri" pitchFamily="34" charset="0"/>
-                          <a:ea typeface="Calibri" pitchFamily="34" charset="-122"/>
-                          <a:cs typeface="Calibri" pitchFamily="34" charset="-120"/>
-                        </a:rPr>
-                        <a:t>Fórum temático 1: que falha de mercado uma política pública do seu município procura corrigir?</a:t>
-                      </a:r>
-                      <a:endParaRPr lang="en-US" sz="1350" dirty="0">
-                        <a:latin typeface="Calibri" charset="0"/>
-                        <a:ea typeface="Calibri" charset="0"/>
-                        <a:cs typeface="Calibri" charset="0"/>
-                      </a:endParaRPr>
-                    </a:p>
-                  </a:txBody>
-                  <a:tcPr marL="50800" marR="50800" marT="50800" marB="50800" anchor="ctr">
-                    <a:lnL w="9525" cap="flat" cmpd="sng" algn="ctr">
-                      <a:solidFill>
-                        <a:srgbClr val="DCD5C1"/>
-                      </a:solidFill>
-                      <a:prstDash val="solid"/>
-                      <a:round/>
-                      <a:headEnd type="none" w="med" len="med"/>
-                      <a:tailEnd type="none" w="med" len="med"/>
-                    </a:lnL>
-                    <a:lnR w="9525" cap="flat" cmpd="sng" algn="ctr">
-                      <a:solidFill>
-                        <a:srgbClr val="DCD5C1"/>
-                      </a:solidFill>
-                      <a:prstDash val="solid"/>
-                      <a:round/>
-                      <a:headEnd type="none" w="med" len="med"/>
-                      <a:tailEnd type="none" w="med" len="med"/>
-                    </a:lnR>
-                    <a:lnT w="9525" cap="flat" cmpd="sng" algn="ctr">
-                      <a:solidFill>
-                        <a:srgbClr val="DCD5C1"/>
-                      </a:solidFill>
-                      <a:prstDash val="solid"/>
-                      <a:round/>
-                      <a:headEnd type="none" w="med" len="med"/>
-                      <a:tailEnd type="none" w="med" len="med"/>
-                    </a:lnT>
-                    <a:lnB w="9525" cap="flat" cmpd="sng" algn="ctr">
-                      <a:solidFill>
-                        <a:srgbClr val="DCD5C1"/>
-                      </a:solidFill>
-                      <a:prstDash val="solid"/>
-                      <a:round/>
-                      <a:headEnd type="none" w="med" len="med"/>
-                      <a:tailEnd type="none" w="med" len="med"/>
-                    </a:lnB>
-                    <a:solidFill>
-                      <a:srgbClr val="F4F7F8"/>
                     </a:solidFill>
                   </a:tcPr>
                 </a:tc>

--- a/disciplina-01-estado-governo-mercado/materiais/01_Unidade_1_Introducao_a_Economia_Estado_Governo_Mercado.pptx
+++ b/disciplina-01-estado-governo-mercado/materiais/01_Unidade_1_Introducao_a_Economia_Estado_Governo_Mercado.pptx
@@ -1601,7 +1601,7 @@
           <a:p>
             <a:r>
               <a:rPr lang="en-US" dirty="0"/>
-              <a:t/>
+              <a:t>Olá, turma! Sejam bem-vindos e bem-vindas à Unidade 1 da disciplina Estado, Governo e Mercado. Eu sou o Prof. Dr. Cleiton Franco. Nesta videoaula, vamos construir a base de toda a disciplina: alguns conceitos fundamentais de economia e a diferença entre Estado, governo e mercado. Tenha papel e caneta por perto, porque esses conceitos vão aparecer nos fóruns e nas avaliações.</a:t>
             </a:r>
             <a:endParaRPr lang="en-US" dirty="0"/>
           </a:p>
@@ -1689,7 +1689,7 @@
           <a:p>
             <a:r>
               <a:rPr lang="en-US" dirty="0"/>
-              <a:t/>
+              <a:t>Como o mercado coordena as decisões? Pelos preços. A lei da demanda diz que, quando o preço sobe, a quantidade demandada cai. A lei da oferta diz que, quando o preço sobe, a quantidade ofertada aumenta. O equilíbrio acontece no preço em que a quantidade que as pessoas querem comprar é igual à que as empresas querem vender. Fora do equilíbrio, um preço acima gera sobra, e um preço abaixo gera falta.</a:t>
             </a:r>
             <a:endParaRPr lang="en-US" dirty="0"/>
           </a:p>
@@ -1777,7 +1777,7 @@
           <a:p>
             <a:r>
               <a:rPr lang="en-US" dirty="0"/>
-              <a:t/>
+              <a:t>E quando o governo fixa o preço? Pense numa tarifa de ônibus congelada abaixo do custo por passageiro, sem nenhum subsídio. A empresa tende a reduzir a frota: os ônibus lotam e os intervalos aumentam. É exatamente o excesso de demanda que o modelo prevê. Um preço máximo, ou teto, abaixo do equilíbrio gera falta, filas e perda de qualidade. Um preço mínimo, ou piso, acima do equilíbrio gera sobra. Uma alternativa é o subsídio: o poder público cobre parte do custo e mantém a oferta. Nenhuma dessas escolhas é neutra; cada uma tem custos e beneficiários.</a:t>
             </a:r>
             <a:endParaRPr lang="en-US" dirty="0"/>
           </a:p>
@@ -1865,7 +1865,7 @@
           <a:p>
             <a:r>
               <a:rPr lang="en-US" dirty="0"/>
-              <a:t/>
+              <a:t>Vamos ver esse caso no gráfico. [Apontar para o cruzamento das linhas.] A linha vermelha é a demanda dos passageiros e a verde, a oferta da empresa. Elas se cruzam em 4 reais e 50 centavos, com 100 mil viagens por dia: esse é o equilíbrio. Se a tarifa for congelada em 3 reais, os passageiros querem 130 mil viagens, mas a empresa só oferece 60 mil. Faltam 70 mil viagens por dia, que aparecem como ônibus lotados e filas. As saídas são um subsídio ou uma tarifa que cubra o custo. São dados hipotéticos, para ilustrar o modelo.</a:t>
             </a:r>
             <a:endParaRPr lang="en-US" dirty="0"/>
           </a:p>
@@ -1953,7 +1953,7 @@
           <a:p>
             <a:r>
               <a:rPr lang="en-US" dirty="0"/>
-              <a:t/>
+              <a:t>Agora, a Parte 2: os conceitos básicos da disciplina, Estado, governo e mercado. Parecem óbvios, mas são confundidos com frequência, inclusive no noticiário.</a:t>
             </a:r>
             <a:endParaRPr lang="en-US" dirty="0"/>
           </a:p>
@@ -2041,7 +2041,7 @@
           <a:p>
             <a:r>
               <a:rPr lang="en-US" dirty="0"/>
-              <a:t/>
+              <a:t>O Estado tem três elementos constitutivos. O povo: o conjunto de pessoas vinculadas juridicamente ao Estado, os cidadãos. O território: o espaço físico sobre o qual o Estado exerce o seu poder. E a soberania: o poder supremo dentro do território e a independência em relação a outros Estados. O Estado moderno nasce da centralização do poder político, entre os séculos XV e XVII, quando surgem exércitos, tributos e administração permanentes.</a:t>
             </a:r>
             <a:endParaRPr lang="en-US" dirty="0"/>
           </a:p>
@@ -2129,7 +2129,7 @@
           <a:p>
             <a:r>
               <a:rPr lang="en-US" dirty="0"/>
-              <a:t/>
+              <a:t>Max Weber nos dá uma das definições mais conhecidas: o Estado é a comunidade humana que reivindica, com êxito, o monopólio do uso legítimo da força física em um território. A palavra-chave é legítimo. E por que as pessoas obedecem? Weber identifica três tipos de dominação. A tradicional, baseada no costume, como a do monarca. A carismática, baseada nas qualidades extraordinárias de um líder. E a legal-racional, baseada em normas impessoais, que é a base da burocracia moderna. No Brasil, o concurso público e os princípios do artigo 37 da Constituição, legalidade, impessoalidade, moralidade, publicidade e eficiência, expressam a dominação legal-racional.</a:t>
             </a:r>
             <a:endParaRPr lang="en-US" dirty="0"/>
           </a:p>
@@ -2217,7 +2217,7 @@
           <a:p>
             <a:r>
               <a:rPr lang="en-US" dirty="0"/>
-              <a:t/>
+              <a:t>Vamos separar os conceitos. O Estado é a organização permanente e soberana sobre um território. O governo é o grupo que dirige o Estado num dado momento, e é transitório. O mercado é a coordenação descentralizada da economia, pela troca voluntária e pelos preços. E há a sociedade civil: associações, movimentos e o terceiro setor, que não são Estado nem mercado em sentido estrito. Um teste simples: quando o governo muda depois de uma eleição, o Estado brasileiro continua o mesmo. Mudam os governantes; permanecem as instituições.</a:t>
             </a:r>
             <a:endParaRPr lang="en-US" dirty="0"/>
           </a:p>
@@ -2305,7 +2305,7 @@
           <a:p>
             <a:r>
               <a:rPr lang="en-US" dirty="0"/>
-              <a:t/>
+              <a:t>O governo pode ser analisado por três ângulos. Pela forma: monarquia ou república; na república, o chefe de Estado é eleito e governa por mandato. Pelo sistema: presidencialismo ou parlamentarismo; no presidencialismo, o presidente é, ao mesmo tempo, chefe de Estado e de governo. E pela separação dos poderes: Executivo, Legislativo e Judiciário, porque, como dizia Montesquieu, o poder deve limitar o poder. O Brasil é uma república federativa presidencialista, com União, estados, Distrito Federal e municípios. No município, o Executivo é o prefeito e o Legislativo, a Câmara Municipal.</a:t>
             </a:r>
             <a:endParaRPr lang="en-US" dirty="0"/>
           </a:p>
@@ -2393,7 +2393,7 @@
           <a:p>
             <a:r>
               <a:rPr lang="en-US" dirty="0"/>
-              <a:t/>
+              <a:t>Um ponto importante: o mercado não funciona no vazio. Ele precisa de propriedade definida e contratos cumpridos, de moeda estável, de concorrência, com muitos compradores e vendedores, e de informação sobre preços e qualidade. E quem garante tudo isso? O próprio Estado: a Justiça faz cumprir os contratos, o Banco Central cuida da moeda e os órgãos de defesa da concorrência combatem os abusos. Por isso, Estado e mercado não são simplesmente opostos: um depende do outro.</a:t>
             </a:r>
             <a:endParaRPr lang="en-US" dirty="0"/>
           </a:p>
@@ -2481,7 +2481,7 @@
           <a:p>
             <a:r>
               <a:rPr lang="en-US" dirty="0"/>
-              <a:t/>
+              <a:t>Os bens podem ser classificados por dois critérios. A rivalidade: quando o consumo de uma pessoa reduz o que sobra para as outras. E a exclusão: quando é possível impedir alguém de usar. Bens rivais e excludentes são os bens privados: alimento, roupa, carro. Excludentes, mas não rivais, são os bens de clube, como a TV por assinatura ou a rodovia com pedágio. Rivais, mas não excludentes, são os recursos comuns, como os peixes de um rio. E não rivais e não excludentes são os bens públicos, como a defesa e a iluminação pública. Ninguém pode ser impedido de usar a rua iluminada; por isso o município oferece a iluminação e a financia com a COSIP, a contribuição prevista no artigo 149-A da Constituição.</a:t>
             </a:r>
             <a:endParaRPr lang="en-US" dirty="0"/>
           </a:p>
@@ -2569,7 +2569,7 @@
           <a:p>
             <a:r>
               <a:rPr lang="en-US" dirty="0"/>
-              <a:t/>
+              <a:t>Antes de começar, um lembrete da organização. Esta unidade vai de 9 a 18 de outubro. A leitura principal é o livro de Ricardo Corrêa Coelho, Estado, governo e mercado, na parte dos conceitos básicos, junto com as Unidades 1 e 2 da página de conteúdos. O fórum de apresentação e o fórum temático 1 ficam abertos até 18 de outubro, às 23h55. A videoaula tem duas partes: primeiro, fundamentos de economia; depois, os conceitos de Estado, governo e mercado.</a:t>
             </a:r>
             <a:endParaRPr lang="en-US" dirty="0"/>
           </a:p>
@@ -2657,7 +2657,7 @@
           <a:p>
             <a:r>
               <a:rPr lang="en-US" dirty="0"/>
-              <a:t/>
+              <a:t>Isso nos leva à pergunta central: por que o Estado atua na economia? A teoria econômica responde com as falhas de mercado. Os bens públicos, que o mercado não oferece sozinho. As externalidades, negativas como a poluição, ou positivas como a vacinação e a educação. O poder de mercado, como os monopólios naturais de saneamento e energia. A assimetria de informação, em áreas como saúde, crédito e medicamentos. A instabilidade: desemprego, recessão e inflação. E a desigualdade, quando a distribuição da renda é considerada injusta. Mas atenção: também existem falhas de governo, como a captura por interesses privados, a ineficiência, a corrupção e a rigidez burocrática. O Estado não é uma solução automática.</a:t>
             </a:r>
             <a:endParaRPr lang="en-US" dirty="0"/>
           </a:p>
@@ -2745,7 +2745,7 @@
           <a:p>
             <a:r>
               <a:rPr lang="en-US" dirty="0"/>
-              <a:t/>
+              <a:t>Vamos trazer isso para Mato Grosso. As queimadas são uma externalidade negativa: a fumaça afeta a saúde de quem mora longe do foco, e a resposta pública é fiscalização, multas e brigadas. A energia elétrica é um monopólio natural: não faz sentido ter várias redes de distribuição, então a ANEEL regula tarifas e qualidade. Os medicamentos envolvem assimetria de informação: o paciente não consegue avaliar o remédio, por isso existem o registro e a vigilância sanitária da ANVISA. E a vacinação é uma externalidade positiva: protege também quem não se vacinou, por isso o SUS oferece as vacinas de graça.</a:t>
             </a:r>
             <a:endParaRPr lang="en-US" dirty="0"/>
           </a:p>
@@ -2833,7 +2833,7 @@
           <a:p>
             <a:r>
               <a:rPr lang="en-US" dirty="0"/>
-              <a:t/>
+              <a:t>Richard Musgrave organizou as funções econômicas do Estado em três. A função alocativa: ofertar bens que o mercado não provê de forma adequada, como segurança, saneamento e infraestrutura. A função distributiva: ajustar a distribuição da renda, com tributação progressiva e programas como o Bolsa Família e o BPC. E a função estabilizadora: buscar emprego, preços estáveis e crescimento, por meio das políticas fiscal e monetária.</a:t>
             </a:r>
             <a:endParaRPr lang="en-US" dirty="0"/>
           </a:p>
@@ -2921,7 +2921,7 @@
           <a:p>
             <a:r>
               <a:rPr lang="en-US" dirty="0"/>
-              <a:t/>
+              <a:t>E no município? A função alocativa é a mais presente: UBS, escolas, pavimentação, coleta de lixo e iluminação. A distributiva aparece no IPTU progressivo, na tarifa social de água, no CRAS e na assistência social. A estabilizadora é limitada, porque a política monetária e boa parte da política fiscal são da União; mas o município pode, por exemplo, antecipar obras em anos de crise para gerar empregos. Fica a pergunta para o fórum: que função cumpre a política pública que você escolheu?</a:t>
             </a:r>
             <a:endParaRPr lang="en-US" dirty="0"/>
           </a:p>
@@ -3009,7 +3009,7 @@
           <a:p>
             <a:r>
               <a:rPr lang="en-US" dirty="0"/>
-              <a:t/>
+              <a:t>Este gráfico mostra como um município hipotético distribui a sua despesa por função. [Apontar para as fatias.] Educação, com 27%, e saúde, com 22%, somam quase metade do gasto. Há uma razão para isso: a Constituição exige aplicar ao menos 25% da receita de impostos, incluindo as transferências, em educação, e 15% em saúde. A maior parte do orçamento cumpre a função alocativa; a assistência social, com 5%, é o exemplo típico da função distributiva. Os dados reais do seu município estão no SICONFI, do Tesouro Nacional. Vale a pena conferir.</a:t>
             </a:r>
             <a:endParaRPr lang="en-US" dirty="0"/>
           </a:p>
@@ -3097,7 +3097,7 @@
           <a:p>
             <a:r>
               <a:rPr lang="en-US" dirty="0"/>
-              <a:t/>
+              <a:t>Vamos às atividades da Unidade 1. A disciplina abre no SIGAA em 9 de outubro, com o vídeo de apresentação e esta videoaula. Até 18 de outubro, participe do fórum de apresentação e do fórum temático 1, que pergunta: que falha de mercado uma política pública do seu município procura corrigir? Todas as entregas vão até as 23h55. Na próxima unidade, vamos estudar a dinâmica pendular entre Estado e mercado e a matriz liberal.</a:t>
             </a:r>
             <a:endParaRPr lang="en-US" dirty="0"/>
           </a:p>
@@ -3185,7 +3185,7 @@
           <a:p>
             <a:r>
               <a:rPr lang="en-US" dirty="0"/>
-              <a:t/>
+              <a:t>Para fechar, um quiz com cinco perguntas. Funciona assim: eu leio a pergunta, você pausa o vídeo, escolhe a sua resposta e, no slide seguinte, confere a correção. Vamos lá?</a:t>
             </a:r>
             <a:endParaRPr lang="en-US" dirty="0"/>
           </a:p>
@@ -3273,7 +3273,7 @@
           <a:p>
             <a:r>
               <a:rPr lang="en-US" dirty="0"/>
-              <a:t/>
+              <a:t>Pergunta 1. Qual destes NÃO é um elemento constitutivo do Estado? Letra a: Povo. Letra b: Território. Letra c: Soberania. Letra d: Mercado. Pause o vídeo e escolha a sua resposta.</a:t>
             </a:r>
             <a:endParaRPr lang="en-US" dirty="0"/>
           </a:p>
@@ -3361,7 +3361,7 @@
           <a:p>
             <a:r>
               <a:rPr lang="en-US" dirty="0"/>
-              <a:t/>
+              <a:t>A resposta correta é a letra d: Mercado. Os elementos clássicos do Estado são povo, território e soberania (poder político). O mercado é outra esfera de coordenação social.</a:t>
             </a:r>
             <a:endParaRPr lang="en-US" dirty="0"/>
           </a:p>
@@ -3449,7 +3449,7 @@
           <a:p>
             <a:r>
               <a:rPr lang="en-US" dirty="0"/>
-              <a:t/>
+              <a:t>Pergunta 2. Concursos públicos, leis e impessoalidade na administração expressam, segundo Weber, a dominação: Letra a: Tradicional. Letra b: Carismática. Letra c: Legal-racional. Letra d: Patrimonial. Pause o vídeo e escolha a sua resposta.</a:t>
             </a:r>
             <a:endParaRPr lang="en-US" dirty="0"/>
           </a:p>
@@ -3537,7 +3537,7 @@
           <a:p>
             <a:r>
               <a:rPr lang="en-US" dirty="0"/>
-              <a:t/>
+              <a:t>Começamos pela Parte 1: fundamentos de economia. Por que um curso de gestão pública começa pela economia? Porque toda decisão pública é, no fundo, uma escolha sobre como usar recursos limitados.</a:t>
             </a:r>
             <a:endParaRPr lang="en-US" dirty="0"/>
           </a:p>
@@ -3625,7 +3625,7 @@
           <a:p>
             <a:r>
               <a:rPr lang="en-US" dirty="0"/>
-              <a:t/>
+              <a:t>A resposta correta é a letra c: Legal-racional. A dominação legal-racional baseia-se na obediência a normas impessoais: é a base da burocracia moderna e do art. 37 da Constituição.</a:t>
             </a:r>
             <a:endParaRPr lang="en-US" dirty="0"/>
           </a:p>
@@ -3713,7 +3713,7 @@
           <a:p>
             <a:r>
               <a:rPr lang="en-US" dirty="0"/>
-              <a:t/>
+              <a:t>Pergunta 3. A iluminação das ruas de uma cidade é um exemplo de bem: Letra a: Privado. Letra b: De clube. Letra c: Comum. Letra d: Público. Pause o vídeo e escolha a sua resposta.</a:t>
             </a:r>
             <a:endParaRPr lang="en-US" dirty="0"/>
           </a:p>
@@ -3801,7 +3801,7 @@
           <a:p>
             <a:r>
               <a:rPr lang="en-US" dirty="0"/>
-              <a:t/>
+              <a:t>A resposta correta é a letra d: Público. É não rival (todos usam ao mesmo tempo) e não excludente (ninguém é impedido de usar). Por isso o mercado não a oferece sozinho.</a:t>
             </a:r>
             <a:endParaRPr lang="en-US" dirty="0"/>
           </a:p>
@@ -3889,7 +3889,7 @@
           <a:p>
             <a:r>
               <a:rPr lang="en-US" dirty="0"/>
-              <a:t/>
+              <a:t>Pergunta 4. A fumaça das queimadas que prejudica a saúde de moradores de outras cidades é: Letra a: Uma externalidade negativa. Letra b: Um bem público. Letra c: Assimetria de informação. Letra d: Um monopólio natural. Pause o vídeo e escolha a sua resposta.</a:t>
             </a:r>
             <a:endParaRPr lang="en-US" dirty="0"/>
           </a:p>
@@ -3977,7 +3977,7 @@
           <a:p>
             <a:r>
               <a:rPr lang="en-US" dirty="0"/>
-              <a:t/>
+              <a:t>A resposta correta é a letra a: Uma externalidade negativa. É um custo imposto a terceiros que não aparece no preço de nenhum produto: uma externalidade negativa, que justifica fiscalização e multas.</a:t>
             </a:r>
             <a:endParaRPr lang="en-US" dirty="0"/>
           </a:p>
@@ -4065,7 +4065,7 @@
           <a:p>
             <a:r>
               <a:rPr lang="en-US" dirty="0"/>
-              <a:t/>
+              <a:t>Pergunta 5. IPTU progressivo e tarifa social de água cumprem qual função econômica do Estado? Letra a: Alocativa. Letra b: Distributiva. Letra c: Estabilizadora. Letra d: Fixação de preços. Pause o vídeo e escolha a sua resposta.</a:t>
             </a:r>
             <a:endParaRPr lang="en-US" dirty="0"/>
           </a:p>
@@ -4153,7 +4153,7 @@
           <a:p>
             <a:r>
               <a:rPr lang="en-US" dirty="0"/>
-              <a:t/>
+              <a:t>A resposta correta é a letra b: Distributiva. São instrumentos da função distributiva: cobram mais de quem tem mais e reduzem o custo para as famílias de baixa renda. Com isso, encerramos a Unidade 1. Revise os conceitos, participe dos fóruns e até a próxima videoaula!</a:t>
             </a:r>
             <a:endParaRPr lang="en-US" dirty="0"/>
           </a:p>
@@ -4241,7 +4241,7 @@
           <a:p>
             <a:r>
               <a:rPr lang="en-US" dirty="0"/>
-              <a:t/>
+              <a:t>Economia é a ciência social que estuda como a sociedade emprega recursos escassos para produzir bens e serviços e distribuí-los entre as pessoas. Duas ideias sustentam essa definição. A primeira é a escassez: os recursos são limitados e as necessidades são praticamente ilimitadas, por isso é preciso escolher. A segunda é o custo de oportunidade: o valor da melhor alternativa de que abrimos mão. Se o município constrói uma ponte, talvez deixe de construir uma escola. Guarde esse conceito, porque ele atravessa todo o curso.</a:t>
             </a:r>
             <a:endParaRPr lang="en-US" dirty="0"/>
           </a:p>
@@ -4329,7 +4329,7 @@
           <a:p>
             <a:r>
               <a:rPr lang="en-US" dirty="0"/>
-              <a:t/>
+              <a:t>Vamos a um exemplo da gestão pública. A prefeitura tem 5 milhões de reais para uma única obra e três opções: ampliar a UBS central, pavimentar 3 quilômetros de ruas ou reformar duas escolas. Se escolher a UBS, o custo de oportunidade são as ruas e as escolas que deixarão de ser feitas. A pergunta do gestor é: qual alternativa gera mais benefício para a população com os mesmos recursos? Para responder, ele conta com o diagnóstico das demandas, com indicadores, com audiências públicas e com o Plano Plurianual, o PPA.</a:t>
             </a:r>
             <a:endParaRPr lang="en-US" dirty="0"/>
           </a:p>
@@ -4417,7 +4417,7 @@
           <a:p>
             <a:r>
               <a:rPr lang="en-US" dirty="0"/>
-              <a:t/>
+              <a:t>Este gráfico mostra a mesma ideia de forma visual. [Apontar para a curva.] É a fronteira de possibilidades do orçamento: cada ponto usa todo o dinheiro disponível. Sem reformar nenhuma escola, dá para pavimentar 12 quilômetros. Reformar a primeira escola custa apenas 1 quilômetro de rua; a quarta escola já custa 6 quilômetros. Ou seja, o custo de oportunidade cresce à medida que avançamos numa direção. E um ponto abaixo da curva significa desperdício: daria para fazer mais com o mesmo orçamento. Os números são hipotéticos, só para ilustrar o raciocínio.</a:t>
             </a:r>
             <a:endParaRPr lang="en-US" dirty="0"/>
           </a:p>
@@ -4505,7 +4505,7 @@
           <a:p>
             <a:r>
               <a:rPr lang="en-US" dirty="0"/>
-              <a:t/>
+              <a:t>Toda sociedade precisa responder a três perguntas. O que produzir: hospitais ou estradas, e em que quantidade? Como produzir: com que tecnologia e com que combinação de trabalho, máquinas e recursos naturais? E para quem produzir: como o produto e a renda serão distribuídos? A forma como cada sociedade responde a essas perguntas define o seu sistema econômico, e é aí que entram o Estado e o mercado.</a:t>
             </a:r>
             <a:endParaRPr lang="en-US" dirty="0"/>
           </a:p>
@@ -4593,7 +4593,7 @@
           <a:p>
             <a:r>
               <a:rPr lang="en-US" dirty="0"/>
-              <a:t/>
+              <a:t>Para produzir, a economia usa fatores de produção, e cada um tem a sua remuneração: a terra recebe aluguel; o trabalho, salário; o capital, juros; e a capacidade empresarial, lucro. Esses fatores circulam entre quatro agentes econômicos. As famílias ofertam fatores e consomem. As empresas contratam fatores e produzem. O governo tributa, oferece serviços, regula e redistribui renda. E o setor externo troca bens e capitais com o país. Repare que o governo também é um agente econômico: ele compra, contrata, paga e arrecada.</a:t>
             </a:r>
             <a:endParaRPr lang="en-US" dirty="0"/>
           </a:p>
@@ -4681,7 +4681,7 @@
           <a:p>
             <a:r>
               <a:rPr lang="en-US" dirty="0"/>
-              <a:t/>
+              <a:t>Quem responde às três perguntas? Depende do sistema econômico. Na economia de mercado, as decisões são descentralizadas e coordenadas pelos preços, com propriedade privada. Na economia planificada, um órgão central define as metas de produção, e a propriedade é estatal ou coletiva. Na economia mista, o mercado convive com regulação, empresas públicas e políticas sociais. Hoje, todas as economias são mistas. O que muda de um país para outro, e de uma época para outra, é o grau de presença do Estado. E esse é o grande tema da nossa disciplina.</a:t>
             </a:r>
             <a:endParaRPr lang="en-US" dirty="0"/>
           </a:p>

--- a/disciplina-01-estado-governo-mercado/materiais/01_Unidade_1_Introducao_a_Economia_Estado_Governo_Mercado.pptx
+++ b/disciplina-01-estado-governo-mercado/materiais/01_Unidade_1_Introducao_a_Economia_Estado_Governo_Mercado.pptx
@@ -3011,7 +3011,7 @@
           <a:p>
             <a:r>
               <a:rPr lang="en-US" dirty="0"/>
-              <a:t>Richard Musgrave organizou as funções econômicas do Estado em três. A função alocativa: ofertar bens que o mercado não provê de forma adequada, como segurança, saneamento e infraestrutura. A função distributiva: ajustar a distribuição da renda, com tributação progressiva e programas como o Bolsa Família e o BPC. E a função estabilizadora: buscar emprego, preços estáveis e crescimento, por meio das políticas fiscal e monetária.</a:t>
+              <a:t>Richard Musgrave organizou as funções econômicas do Estado em três, como mostra a tabela. A função alocativa tem o objetivo de ofertar bens e serviços que o mercado não provê de forma adequada, como segurança, justiça, saneamento e infraestrutura. A função distributiva busca ajustar a distribuição de renda e riqueza, com tributação progressiva, o Bolsa Família, o BPC e a previdência. E a função estabilizadora procura manter o emprego, a estabilidade de preços e o crescimento, por meio das políticas fiscal e monetária. Repare que uma mesma política pode cumprir mais de uma função: o SUS, por exemplo, é alocativo e também distributivo.</a:t>
             </a:r>
             <a:endParaRPr lang="en-US" dirty="0"/>
           </a:p>
@@ -4859,7 +4859,7 @@
           <a:p>
             <a:r>
               <a:rPr lang="en-US" dirty="0"/>
-              <a:t>Quem responde às três perguntas? Depende do sistema econômico. Na economia de mercado, as decisões são descentralizadas e coordenadas pelos preços, com propriedade privada. Na economia planificada, um órgão central define as metas de produção, e a propriedade é estatal ou coletiva. Na economia mista, o mercado convive com regulação, empresas públicas e políticas sociais. Hoje, todas as economias são mistas. O que muda de um país para outro, e de uma época para outra, é o grau de presença do Estado. E esse é o grande tema da nossa disciplina.</a:t>
+              <a:t>Quem responde às três perguntas? Depende do sistema econômico, e a tabela compara três deles por quem decide, pelo mecanismo de coordenação e pela propriedade dos meios de produção. Na economia de mercado, o capitalismo, decidem os consumidores e as empresas, a coordenação é feita pelos preços, pela oferta e pela demanda, e a propriedade é predominantemente privada. Na economia centralmente planificada, o socialismo, decide um órgão central de planejamento, com plano e metas de produção, e a propriedade é predominantemente estatal ou coletiva. Na economia mista, decidem o mercado e o Estado: há preços, mas com regulação e intervenção estatal, e a propriedade é privada, com empresas e serviços públicos. Hoje, todas as economias são mistas. O que muda de um país para outro, e de uma época para outra, é o grau de presença do Estado. E esse é o grande tema da nossa disciplina.</a:t>
             </a:r>
             <a:endParaRPr lang="en-US" dirty="0"/>
           </a:p>
@@ -8841,7 +8841,7 @@
                 <a:ea typeface="Calibri" pitchFamily="34" charset="-122"/>
                 <a:cs typeface="Calibri" pitchFamily="34" charset="-120"/>
               </a:rPr>
-              <a:t>Estado, governo e mercado</a:t>
+              <a:t>Conceitos fundamentais</a:t>
             </a:r>
             <a:endParaRPr lang="en-US" sz="2800" dirty="0"/>
           </a:p>
@@ -8883,391 +8883,884 @@
                 <a:ea typeface="Calibri" pitchFamily="34" charset="-122"/>
                 <a:cs typeface="Calibri" pitchFamily="34" charset="-120"/>
               </a:rPr>
-              <a:t>Conceitos que não devem ser confundidos</a:t>
+              <a:t>Estado, governo, administração pública, mercado e sociedade civil</a:t>
             </a:r>
             <a:endParaRPr lang="en-US" sz="1400" dirty="0"/>
           </a:p>
         </p:txBody>
       </p:sp>
-      <p:sp>
-        <p:nvSpPr>
-          <p:cNvPr id="4" name="Text 2"/>
+      <p:graphicFrame>
+        <p:nvGraphicFramePr>
+          <p:cNvPr id="18" name="Table 0"/>
+          <p:cNvGraphicFramePr>
+            <a:graphicFrameLocks noGrp="1"/>
+          </p:cNvGraphicFramePr>
+          <p:nvPr>
+            <p:extLst>
+              <p:ext uri="{D42A27DB-BD31-4B8C-83A1-F6EECF244321}">
+                <p14:modId xmlns:p14="http://schemas.microsoft.com/office/powerpoint/2010/main" val="1579011935"/>
+              </p:ext>
+            </p:extLst>
+          </p:nvPr>
+        </p:nvGraphicFramePr>
+        <p:xfrm>
+          <a:off x="685800" y="1188720"/>
+          <a:ext cx="7772400" cy="914400"/>
+        </p:xfrm>
+        <a:graphic>
+          <a:graphicData uri="http://schemas.openxmlformats.org/drawingml/2006/table">
+            <a:tbl>
+              <a:tblPr/>
+              <a:tblGrid>
+                <a:gridCol w="1737360"/>
+                <a:gridCol w="6035040"/>
+              </a:tblGrid>
+              <a:tr h="0">
+                <a:tc>
+                  <a:txBody>
+                    <a:bodyPr/>
+                    <a:lstStyle/>
+                    <a:p>
+                      <a:pPr indent="0" marL="0">
+                        <a:buNone/>
+                      </a:pPr>
+                      <a:r>
+                        <a:rPr lang="en-US" sz="1200" b="1" dirty="0">
+                          <a:solidFill>
+                            <a:srgbClr val="FFFFFF"/>
+                          </a:solidFill>
+                          <a:latin typeface="Calibri" pitchFamily="34" charset="0"/>
+                          <a:ea typeface="Calibri" pitchFamily="34" charset="-122"/>
+                          <a:cs typeface="Calibri" pitchFamily="34" charset="-120"/>
+                        </a:rPr>
+                        <a:t>Conceito</a:t>
+                      </a:r>
+                      <a:endParaRPr lang="en-US" sz="1200" dirty="0">
+                        <a:latin typeface="Calibri" charset="0"/>
+                        <a:ea typeface="Calibri" charset="0"/>
+                        <a:cs typeface="Calibri" charset="0"/>
+                      </a:endParaRPr>
+                    </a:p>
+                  </a:txBody>
+                  <a:tcPr marL="50800" marR="50800" marT="50800" marB="50800" anchor="ctr">
+                    <a:lnL w="9525" cap="flat" cmpd="sng" algn="ctr">
+                      <a:solidFill>
+                        <a:srgbClr val="DCD5C1"/>
+                      </a:solidFill>
+                      <a:prstDash val="solid"/>
+                      <a:round/>
+                      <a:headEnd type="none" w="med" len="med"/>
+                      <a:tailEnd type="none" w="med" len="med"/>
+                    </a:lnL>
+                    <a:lnR w="9525" cap="flat" cmpd="sng" algn="ctr">
+                      <a:solidFill>
+                        <a:srgbClr val="DCD5C1"/>
+                      </a:solidFill>
+                      <a:prstDash val="solid"/>
+                      <a:round/>
+                      <a:headEnd type="none" w="med" len="med"/>
+                      <a:tailEnd type="none" w="med" len="med"/>
+                    </a:lnR>
+                    <a:lnT w="9525" cap="flat" cmpd="sng" algn="ctr">
+                      <a:solidFill>
+                        <a:srgbClr val="DCD5C1"/>
+                      </a:solidFill>
+                      <a:prstDash val="solid"/>
+                      <a:round/>
+                      <a:headEnd type="none" w="med" len="med"/>
+                      <a:tailEnd type="none" w="med" len="med"/>
+                    </a:lnT>
+                    <a:lnB w="9525" cap="flat" cmpd="sng" algn="ctr">
+                      <a:solidFill>
+                        <a:srgbClr val="DCD5C1"/>
+                      </a:solidFill>
+                      <a:prstDash val="solid"/>
+                      <a:round/>
+                      <a:headEnd type="none" w="med" len="med"/>
+                      <a:tailEnd type="none" w="med" len="med"/>
+                    </a:lnB>
+                    <a:solidFill>
+                      <a:srgbClr val="13294B"/>
+                    </a:solidFill>
+                  </a:tcPr>
+                </a:tc>
+                <a:tc>
+                  <a:txBody>
+                    <a:bodyPr/>
+                    <a:lstStyle/>
+                    <a:p>
+                      <a:pPr indent="0" marL="0">
+                        <a:buNone/>
+                      </a:pPr>
+                      <a:r>
+                        <a:rPr lang="en-US" sz="1200" b="1" dirty="0">
+                          <a:solidFill>
+                            <a:srgbClr val="FFFFFF"/>
+                          </a:solidFill>
+                          <a:latin typeface="Calibri" pitchFamily="34" charset="0"/>
+                          <a:ea typeface="Calibri" pitchFamily="34" charset="-122"/>
+                          <a:cs typeface="Calibri" pitchFamily="34" charset="-120"/>
+                        </a:rPr>
+                        <a:t>Definição</a:t>
+                      </a:r>
+                      <a:endParaRPr lang="en-US" sz="1200" dirty="0">
+                        <a:latin typeface="Calibri" charset="0"/>
+                        <a:ea typeface="Calibri" charset="0"/>
+                        <a:cs typeface="Calibri" charset="0"/>
+                      </a:endParaRPr>
+                    </a:p>
+                  </a:txBody>
+                  <a:tcPr marL="50800" marR="50800" marT="50800" marB="50800" anchor="ctr">
+                    <a:lnL w="9525" cap="flat" cmpd="sng" algn="ctr">
+                      <a:solidFill>
+                        <a:srgbClr val="DCD5C1"/>
+                      </a:solidFill>
+                      <a:prstDash val="solid"/>
+                      <a:round/>
+                      <a:headEnd type="none" w="med" len="med"/>
+                      <a:tailEnd type="none" w="med" len="med"/>
+                    </a:lnL>
+                    <a:lnR w="9525" cap="flat" cmpd="sng" algn="ctr">
+                      <a:solidFill>
+                        <a:srgbClr val="DCD5C1"/>
+                      </a:solidFill>
+                      <a:prstDash val="solid"/>
+                      <a:round/>
+                      <a:headEnd type="none" w="med" len="med"/>
+                      <a:tailEnd type="none" w="med" len="med"/>
+                    </a:lnR>
+                    <a:lnT w="9525" cap="flat" cmpd="sng" algn="ctr">
+                      <a:solidFill>
+                        <a:srgbClr val="DCD5C1"/>
+                      </a:solidFill>
+                      <a:prstDash val="solid"/>
+                      <a:round/>
+                      <a:headEnd type="none" w="med" len="med"/>
+                      <a:tailEnd type="none" w="med" len="med"/>
+                    </a:lnT>
+                    <a:lnB w="9525" cap="flat" cmpd="sng" algn="ctr">
+                      <a:solidFill>
+                        <a:srgbClr val="DCD5C1"/>
+                      </a:solidFill>
+                      <a:prstDash val="solid"/>
+                      <a:round/>
+                      <a:headEnd type="none" w="med" len="med"/>
+                      <a:tailEnd type="none" w="med" len="med"/>
+                    </a:lnB>
+                    <a:solidFill>
+                      <a:srgbClr val="13294B"/>
+                    </a:solidFill>
+                  </a:tcPr>
+                </a:tc>
+              </a:tr>
+              <a:tr h="0">
+                <a:tc>
+                  <a:txBody>
+                    <a:bodyPr/>
+                    <a:lstStyle/>
+                    <a:p>
+                      <a:pPr indent="0" marL="0">
+                        <a:buNone/>
+                      </a:pPr>
+                      <a:r>
+                        <a:rPr lang="en-US" sz="1200" b="1" dirty="0">
+                          <a:solidFill>
+                            <a:srgbClr val="1F2A37"/>
+                          </a:solidFill>
+                          <a:latin typeface="Calibri" pitchFamily="34" charset="0"/>
+                          <a:ea typeface="Calibri" pitchFamily="34" charset="-122"/>
+                          <a:cs typeface="Calibri" pitchFamily="34" charset="-120"/>
+                        </a:rPr>
+                        <a:t>Estado</a:t>
+                      </a:r>
+                      <a:endParaRPr lang="en-US" sz="1200" dirty="0">
+                        <a:latin typeface="Calibri" charset="0"/>
+                        <a:ea typeface="Calibri" charset="0"/>
+                        <a:cs typeface="Calibri" charset="0"/>
+                      </a:endParaRPr>
+                    </a:p>
+                  </a:txBody>
+                  <a:tcPr marL="50800" marR="50800" marT="50800" marB="50800" anchor="ctr">
+                    <a:lnL w="9525" cap="flat" cmpd="sng" algn="ctr">
+                      <a:solidFill>
+                        <a:srgbClr val="DCD5C1"/>
+                      </a:solidFill>
+                      <a:prstDash val="solid"/>
+                      <a:round/>
+                      <a:headEnd type="none" w="med" len="med"/>
+                      <a:tailEnd type="none" w="med" len="med"/>
+                    </a:lnL>
+                    <a:lnR w="9525" cap="flat" cmpd="sng" algn="ctr">
+                      <a:solidFill>
+                        <a:srgbClr val="DCD5C1"/>
+                      </a:solidFill>
+                      <a:prstDash val="solid"/>
+                      <a:round/>
+                      <a:headEnd type="none" w="med" len="med"/>
+                      <a:tailEnd type="none" w="med" len="med"/>
+                    </a:lnR>
+                    <a:lnT w="9525" cap="flat" cmpd="sng" algn="ctr">
+                      <a:solidFill>
+                        <a:srgbClr val="DCD5C1"/>
+                      </a:solidFill>
+                      <a:prstDash val="solid"/>
+                      <a:round/>
+                      <a:headEnd type="none" w="med" len="med"/>
+                      <a:tailEnd type="none" w="med" len="med"/>
+                    </a:lnT>
+                    <a:lnB w="9525" cap="flat" cmpd="sng" algn="ctr">
+                      <a:solidFill>
+                        <a:srgbClr val="DCD5C1"/>
+                      </a:solidFill>
+                      <a:prstDash val="solid"/>
+                      <a:round/>
+                      <a:headEnd type="none" w="med" len="med"/>
+                      <a:tailEnd type="none" w="med" len="med"/>
+                    </a:lnB>
+                    <a:solidFill>
+                      <a:srgbClr val="FFFFFF"/>
+                    </a:solidFill>
+                  </a:tcPr>
+                </a:tc>
+                <a:tc>
+                  <a:txBody>
+                    <a:bodyPr/>
+                    <a:lstStyle/>
+                    <a:p>
+                      <a:pPr indent="0" marL="0">
+                        <a:buNone/>
+                      </a:pPr>
+                      <a:r>
+                        <a:rPr lang="en-US" sz="1200" dirty="0">
+                          <a:solidFill>
+                            <a:srgbClr val="1F2A37"/>
+                          </a:solidFill>
+                          <a:latin typeface="Calibri" pitchFamily="34" charset="0"/>
+                          <a:ea typeface="Calibri" pitchFamily="34" charset="-122"/>
+                          <a:cs typeface="Calibri" pitchFamily="34" charset="-120"/>
+                        </a:rPr>
+                        <a:t>Organização político-jurídica permanente que detém a soberania sobre um território e sua população. Para Weber, é a comunidade humana que reivindica com êxito o monopólio do uso legítimo da força física em um território.</a:t>
+                      </a:r>
+                      <a:endParaRPr lang="en-US" sz="1200" dirty="0">
+                        <a:latin typeface="Calibri" charset="0"/>
+                        <a:ea typeface="Calibri" charset="0"/>
+                        <a:cs typeface="Calibri" charset="0"/>
+                      </a:endParaRPr>
+                    </a:p>
+                  </a:txBody>
+                  <a:tcPr marL="50800" marR="50800" marT="50800" marB="50800" anchor="ctr">
+                    <a:lnL w="9525" cap="flat" cmpd="sng" algn="ctr">
+                      <a:solidFill>
+                        <a:srgbClr val="DCD5C1"/>
+                      </a:solidFill>
+                      <a:prstDash val="solid"/>
+                      <a:round/>
+                      <a:headEnd type="none" w="med" len="med"/>
+                      <a:tailEnd type="none" w="med" len="med"/>
+                    </a:lnL>
+                    <a:lnR w="9525" cap="flat" cmpd="sng" algn="ctr">
+                      <a:solidFill>
+                        <a:srgbClr val="DCD5C1"/>
+                      </a:solidFill>
+                      <a:prstDash val="solid"/>
+                      <a:round/>
+                      <a:headEnd type="none" w="med" len="med"/>
+                      <a:tailEnd type="none" w="med" len="med"/>
+                    </a:lnR>
+                    <a:lnT w="9525" cap="flat" cmpd="sng" algn="ctr">
+                      <a:solidFill>
+                        <a:srgbClr val="DCD5C1"/>
+                      </a:solidFill>
+                      <a:prstDash val="solid"/>
+                      <a:round/>
+                      <a:headEnd type="none" w="med" len="med"/>
+                      <a:tailEnd type="none" w="med" len="med"/>
+                    </a:lnT>
+                    <a:lnB w="9525" cap="flat" cmpd="sng" algn="ctr">
+                      <a:solidFill>
+                        <a:srgbClr val="DCD5C1"/>
+                      </a:solidFill>
+                      <a:prstDash val="solid"/>
+                      <a:round/>
+                      <a:headEnd type="none" w="med" len="med"/>
+                      <a:tailEnd type="none" w="med" len="med"/>
+                    </a:lnB>
+                    <a:solidFill>
+                      <a:srgbClr val="FFFFFF"/>
+                    </a:solidFill>
+                  </a:tcPr>
+                </a:tc>
+              </a:tr>
+              <a:tr h="0">
+                <a:tc>
+                  <a:txBody>
+                    <a:bodyPr/>
+                    <a:lstStyle/>
+                    <a:p>
+                      <a:pPr indent="0" marL="0">
+                        <a:buNone/>
+                      </a:pPr>
+                      <a:r>
+                        <a:rPr lang="en-US" sz="1200" b="1" dirty="0">
+                          <a:solidFill>
+                            <a:srgbClr val="1F2A37"/>
+                          </a:solidFill>
+                          <a:latin typeface="Calibri" pitchFamily="34" charset="0"/>
+                          <a:ea typeface="Calibri" pitchFamily="34" charset="-122"/>
+                          <a:cs typeface="Calibri" pitchFamily="34" charset="-120"/>
+                        </a:rPr>
+                        <a:t>Governo</a:t>
+                      </a:r>
+                      <a:endParaRPr lang="en-US" sz="1200" dirty="0">
+                        <a:latin typeface="Calibri" charset="0"/>
+                        <a:ea typeface="Calibri" charset="0"/>
+                        <a:cs typeface="Calibri" charset="0"/>
+                      </a:endParaRPr>
+                    </a:p>
+                  </a:txBody>
+                  <a:tcPr marL="50800" marR="50800" marT="50800" marB="50800" anchor="ctr">
+                    <a:lnL w="9525" cap="flat" cmpd="sng" algn="ctr">
+                      <a:solidFill>
+                        <a:srgbClr val="DCD5C1"/>
+                      </a:solidFill>
+                      <a:prstDash val="solid"/>
+                      <a:round/>
+                      <a:headEnd type="none" w="med" len="med"/>
+                      <a:tailEnd type="none" w="med" len="med"/>
+                    </a:lnL>
+                    <a:lnR w="9525" cap="flat" cmpd="sng" algn="ctr">
+                      <a:solidFill>
+                        <a:srgbClr val="DCD5C1"/>
+                      </a:solidFill>
+                      <a:prstDash val="solid"/>
+                      <a:round/>
+                      <a:headEnd type="none" w="med" len="med"/>
+                      <a:tailEnd type="none" w="med" len="med"/>
+                    </a:lnR>
+                    <a:lnT w="9525" cap="flat" cmpd="sng" algn="ctr">
+                      <a:solidFill>
+                        <a:srgbClr val="DCD5C1"/>
+                      </a:solidFill>
+                      <a:prstDash val="solid"/>
+                      <a:round/>
+                      <a:headEnd type="none" w="med" len="med"/>
+                      <a:tailEnd type="none" w="med" len="med"/>
+                    </a:lnT>
+                    <a:lnB w="9525" cap="flat" cmpd="sng" algn="ctr">
+                      <a:solidFill>
+                        <a:srgbClr val="DCD5C1"/>
+                      </a:solidFill>
+                      <a:prstDash val="solid"/>
+                      <a:round/>
+                      <a:headEnd type="none" w="med" len="med"/>
+                      <a:tailEnd type="none" w="med" len="med"/>
+                    </a:lnB>
+                    <a:solidFill>
+                      <a:srgbClr val="F4F7F8"/>
+                    </a:solidFill>
+                  </a:tcPr>
+                </a:tc>
+                <a:tc>
+                  <a:txBody>
+                    <a:bodyPr/>
+                    <a:lstStyle/>
+                    <a:p>
+                      <a:pPr indent="0" marL="0">
+                        <a:buNone/>
+                      </a:pPr>
+                      <a:r>
+                        <a:rPr lang="en-US" sz="1200" dirty="0">
+                          <a:solidFill>
+                            <a:srgbClr val="1F2A37"/>
+                          </a:solidFill>
+                          <a:latin typeface="Calibri" pitchFamily="34" charset="0"/>
+                          <a:ea typeface="Calibri" pitchFamily="34" charset="-122"/>
+                          <a:cs typeface="Calibri" pitchFamily="34" charset="-120"/>
+                        </a:rPr>
+                        <a:t>O grupo que, em dado momento, dirige o Estado e define suas políticas. Governos são transitórios; o Estado é permanente.</a:t>
+                      </a:r>
+                      <a:endParaRPr lang="en-US" sz="1200" dirty="0">
+                        <a:latin typeface="Calibri" charset="0"/>
+                        <a:ea typeface="Calibri" charset="0"/>
+                        <a:cs typeface="Calibri" charset="0"/>
+                      </a:endParaRPr>
+                    </a:p>
+                  </a:txBody>
+                  <a:tcPr marL="50800" marR="50800" marT="50800" marB="50800" anchor="ctr">
+                    <a:lnL w="9525" cap="flat" cmpd="sng" algn="ctr">
+                      <a:solidFill>
+                        <a:srgbClr val="DCD5C1"/>
+                      </a:solidFill>
+                      <a:prstDash val="solid"/>
+                      <a:round/>
+                      <a:headEnd type="none" w="med" len="med"/>
+                      <a:tailEnd type="none" w="med" len="med"/>
+                    </a:lnL>
+                    <a:lnR w="9525" cap="flat" cmpd="sng" algn="ctr">
+                      <a:solidFill>
+                        <a:srgbClr val="DCD5C1"/>
+                      </a:solidFill>
+                      <a:prstDash val="solid"/>
+                      <a:round/>
+                      <a:headEnd type="none" w="med" len="med"/>
+                      <a:tailEnd type="none" w="med" len="med"/>
+                    </a:lnR>
+                    <a:lnT w="9525" cap="flat" cmpd="sng" algn="ctr">
+                      <a:solidFill>
+                        <a:srgbClr val="DCD5C1"/>
+                      </a:solidFill>
+                      <a:prstDash val="solid"/>
+                      <a:round/>
+                      <a:headEnd type="none" w="med" len="med"/>
+                      <a:tailEnd type="none" w="med" len="med"/>
+                    </a:lnT>
+                    <a:lnB w="9525" cap="flat" cmpd="sng" algn="ctr">
+                      <a:solidFill>
+                        <a:srgbClr val="DCD5C1"/>
+                      </a:solidFill>
+                      <a:prstDash val="solid"/>
+                      <a:round/>
+                      <a:headEnd type="none" w="med" len="med"/>
+                      <a:tailEnd type="none" w="med" len="med"/>
+                    </a:lnB>
+                    <a:solidFill>
+                      <a:srgbClr val="F4F7F8"/>
+                    </a:solidFill>
+                  </a:tcPr>
+                </a:tc>
+              </a:tr>
+              <a:tr h="0">
+                <a:tc>
+                  <a:txBody>
+                    <a:bodyPr/>
+                    <a:lstStyle/>
+                    <a:p>
+                      <a:pPr indent="0" marL="0">
+                        <a:buNone/>
+                      </a:pPr>
+                      <a:r>
+                        <a:rPr lang="en-US" sz="1200" b="1" dirty="0">
+                          <a:solidFill>
+                            <a:srgbClr val="1F2A37"/>
+                          </a:solidFill>
+                          <a:latin typeface="Calibri" pitchFamily="34" charset="0"/>
+                          <a:ea typeface="Calibri" pitchFamily="34" charset="-122"/>
+                          <a:cs typeface="Calibri" pitchFamily="34" charset="-120"/>
+                        </a:rPr>
+                        <a:t>Administração pública</a:t>
+                      </a:r>
+                      <a:endParaRPr lang="en-US" sz="1200" dirty="0">
+                        <a:latin typeface="Calibri" charset="0"/>
+                        <a:ea typeface="Calibri" charset="0"/>
+                        <a:cs typeface="Calibri" charset="0"/>
+                      </a:endParaRPr>
+                    </a:p>
+                  </a:txBody>
+                  <a:tcPr marL="50800" marR="50800" marT="50800" marB="50800" anchor="ctr">
+                    <a:lnL w="9525" cap="flat" cmpd="sng" algn="ctr">
+                      <a:solidFill>
+                        <a:srgbClr val="DCD5C1"/>
+                      </a:solidFill>
+                      <a:prstDash val="solid"/>
+                      <a:round/>
+                      <a:headEnd type="none" w="med" len="med"/>
+                      <a:tailEnd type="none" w="med" len="med"/>
+                    </a:lnL>
+                    <a:lnR w="9525" cap="flat" cmpd="sng" algn="ctr">
+                      <a:solidFill>
+                        <a:srgbClr val="DCD5C1"/>
+                      </a:solidFill>
+                      <a:prstDash val="solid"/>
+                      <a:round/>
+                      <a:headEnd type="none" w="med" len="med"/>
+                      <a:tailEnd type="none" w="med" len="med"/>
+                    </a:lnR>
+                    <a:lnT w="9525" cap="flat" cmpd="sng" algn="ctr">
+                      <a:solidFill>
+                        <a:srgbClr val="DCD5C1"/>
+                      </a:solidFill>
+                      <a:prstDash val="solid"/>
+                      <a:round/>
+                      <a:headEnd type="none" w="med" len="med"/>
+                      <a:tailEnd type="none" w="med" len="med"/>
+                    </a:lnT>
+                    <a:lnB w="9525" cap="flat" cmpd="sng" algn="ctr">
+                      <a:solidFill>
+                        <a:srgbClr val="DCD5C1"/>
+                      </a:solidFill>
+                      <a:prstDash val="solid"/>
+                      <a:round/>
+                      <a:headEnd type="none" w="med" len="med"/>
+                      <a:tailEnd type="none" w="med" len="med"/>
+                    </a:lnB>
+                    <a:solidFill>
+                      <a:srgbClr val="FFFFFF"/>
+                    </a:solidFill>
+                  </a:tcPr>
+                </a:tc>
+                <a:tc>
+                  <a:txBody>
+                    <a:bodyPr/>
+                    <a:lstStyle/>
+                    <a:p>
+                      <a:pPr indent="0" marL="0">
+                        <a:buNone/>
+                      </a:pPr>
+                      <a:r>
+                        <a:rPr lang="en-US" sz="1200" dirty="0">
+                          <a:solidFill>
+                            <a:srgbClr val="1F2A37"/>
+                          </a:solidFill>
+                          <a:latin typeface="Calibri" pitchFamily="34" charset="0"/>
+                          <a:ea typeface="Calibri" pitchFamily="34" charset="-122"/>
+                          <a:cs typeface="Calibri" pitchFamily="34" charset="-120"/>
+                        </a:rPr>
+                        <a:t>O aparelho (órgãos, entidades e servidores) que executa as políticas definidas pelo governo.</a:t>
+                      </a:r>
+                      <a:endParaRPr lang="en-US" sz="1200" dirty="0">
+                        <a:latin typeface="Calibri" charset="0"/>
+                        <a:ea typeface="Calibri" charset="0"/>
+                        <a:cs typeface="Calibri" charset="0"/>
+                      </a:endParaRPr>
+                    </a:p>
+                  </a:txBody>
+                  <a:tcPr marL="50800" marR="50800" marT="50800" marB="50800" anchor="ctr">
+                    <a:lnL w="9525" cap="flat" cmpd="sng" algn="ctr">
+                      <a:solidFill>
+                        <a:srgbClr val="DCD5C1"/>
+                      </a:solidFill>
+                      <a:prstDash val="solid"/>
+                      <a:round/>
+                      <a:headEnd type="none" w="med" len="med"/>
+                      <a:tailEnd type="none" w="med" len="med"/>
+                    </a:lnL>
+                    <a:lnR w="9525" cap="flat" cmpd="sng" algn="ctr">
+                      <a:solidFill>
+                        <a:srgbClr val="DCD5C1"/>
+                      </a:solidFill>
+                      <a:prstDash val="solid"/>
+                      <a:round/>
+                      <a:headEnd type="none" w="med" len="med"/>
+                      <a:tailEnd type="none" w="med" len="med"/>
+                    </a:lnR>
+                    <a:lnT w="9525" cap="flat" cmpd="sng" algn="ctr">
+                      <a:solidFill>
+                        <a:srgbClr val="DCD5C1"/>
+                      </a:solidFill>
+                      <a:prstDash val="solid"/>
+                      <a:round/>
+                      <a:headEnd type="none" w="med" len="med"/>
+                      <a:tailEnd type="none" w="med" len="med"/>
+                    </a:lnT>
+                    <a:lnB w="9525" cap="flat" cmpd="sng" algn="ctr">
+                      <a:solidFill>
+                        <a:srgbClr val="DCD5C1"/>
+                      </a:solidFill>
+                      <a:prstDash val="solid"/>
+                      <a:round/>
+                      <a:headEnd type="none" w="med" len="med"/>
+                      <a:tailEnd type="none" w="med" len="med"/>
+                    </a:lnB>
+                    <a:solidFill>
+                      <a:srgbClr val="FFFFFF"/>
+                    </a:solidFill>
+                  </a:tcPr>
+                </a:tc>
+              </a:tr>
+              <a:tr h="0">
+                <a:tc>
+                  <a:txBody>
+                    <a:bodyPr/>
+                    <a:lstStyle/>
+                    <a:p>
+                      <a:pPr indent="0" marL="0">
+                        <a:buNone/>
+                      </a:pPr>
+                      <a:r>
+                        <a:rPr lang="en-US" sz="1200" b="1" dirty="0">
+                          <a:solidFill>
+                            <a:srgbClr val="1F2A37"/>
+                          </a:solidFill>
+                          <a:latin typeface="Calibri" pitchFamily="34" charset="0"/>
+                          <a:ea typeface="Calibri" pitchFamily="34" charset="-122"/>
+                          <a:cs typeface="Calibri" pitchFamily="34" charset="-120"/>
+                        </a:rPr>
+                        <a:t>Mercado</a:t>
+                      </a:r>
+                      <a:endParaRPr lang="en-US" sz="1200" dirty="0">
+                        <a:latin typeface="Calibri" charset="0"/>
+                        <a:ea typeface="Calibri" charset="0"/>
+                        <a:cs typeface="Calibri" charset="0"/>
+                      </a:endParaRPr>
+                    </a:p>
+                  </a:txBody>
+                  <a:tcPr marL="50800" marR="50800" marT="50800" marB="50800" anchor="ctr">
+                    <a:lnL w="9525" cap="flat" cmpd="sng" algn="ctr">
+                      <a:solidFill>
+                        <a:srgbClr val="DCD5C1"/>
+                      </a:solidFill>
+                      <a:prstDash val="solid"/>
+                      <a:round/>
+                      <a:headEnd type="none" w="med" len="med"/>
+                      <a:tailEnd type="none" w="med" len="med"/>
+                    </a:lnL>
+                    <a:lnR w="9525" cap="flat" cmpd="sng" algn="ctr">
+                      <a:solidFill>
+                        <a:srgbClr val="DCD5C1"/>
+                      </a:solidFill>
+                      <a:prstDash val="solid"/>
+                      <a:round/>
+                      <a:headEnd type="none" w="med" len="med"/>
+                      <a:tailEnd type="none" w="med" len="med"/>
+                    </a:lnR>
+                    <a:lnT w="9525" cap="flat" cmpd="sng" algn="ctr">
+                      <a:solidFill>
+                        <a:srgbClr val="DCD5C1"/>
+                      </a:solidFill>
+                      <a:prstDash val="solid"/>
+                      <a:round/>
+                      <a:headEnd type="none" w="med" len="med"/>
+                      <a:tailEnd type="none" w="med" len="med"/>
+                    </a:lnT>
+                    <a:lnB w="9525" cap="flat" cmpd="sng" algn="ctr">
+                      <a:solidFill>
+                        <a:srgbClr val="DCD5C1"/>
+                      </a:solidFill>
+                      <a:prstDash val="solid"/>
+                      <a:round/>
+                      <a:headEnd type="none" w="med" len="med"/>
+                      <a:tailEnd type="none" w="med" len="med"/>
+                    </a:lnB>
+                    <a:solidFill>
+                      <a:srgbClr val="F4F7F8"/>
+                    </a:solidFill>
+                  </a:tcPr>
+                </a:tc>
+                <a:tc>
+                  <a:txBody>
+                    <a:bodyPr/>
+                    <a:lstStyle/>
+                    <a:p>
+                      <a:pPr indent="0" marL="0">
+                        <a:buNone/>
+                      </a:pPr>
+                      <a:r>
+                        <a:rPr lang="en-US" sz="1200" dirty="0">
+                          <a:solidFill>
+                            <a:srgbClr val="1F2A37"/>
+                          </a:solidFill>
+                          <a:latin typeface="Calibri" pitchFamily="34" charset="0"/>
+                          <a:ea typeface="Calibri" pitchFamily="34" charset="-122"/>
+                          <a:cs typeface="Calibri" pitchFamily="34" charset="-120"/>
+                        </a:rPr>
+                        <a:t>Mecanismo de coordenação descentralizada das atividades econômicas, baseado na troca voluntária e nos preços.</a:t>
+                      </a:r>
+                      <a:endParaRPr lang="en-US" sz="1200" dirty="0">
+                        <a:latin typeface="Calibri" charset="0"/>
+                        <a:ea typeface="Calibri" charset="0"/>
+                        <a:cs typeface="Calibri" charset="0"/>
+                      </a:endParaRPr>
+                    </a:p>
+                  </a:txBody>
+                  <a:tcPr marL="50800" marR="50800" marT="50800" marB="50800" anchor="ctr">
+                    <a:lnL w="9525" cap="flat" cmpd="sng" algn="ctr">
+                      <a:solidFill>
+                        <a:srgbClr val="DCD5C1"/>
+                      </a:solidFill>
+                      <a:prstDash val="solid"/>
+                      <a:round/>
+                      <a:headEnd type="none" w="med" len="med"/>
+                      <a:tailEnd type="none" w="med" len="med"/>
+                    </a:lnL>
+                    <a:lnR w="9525" cap="flat" cmpd="sng" algn="ctr">
+                      <a:solidFill>
+                        <a:srgbClr val="DCD5C1"/>
+                      </a:solidFill>
+                      <a:prstDash val="solid"/>
+                      <a:round/>
+                      <a:headEnd type="none" w="med" len="med"/>
+                      <a:tailEnd type="none" w="med" len="med"/>
+                    </a:lnR>
+                    <a:lnT w="9525" cap="flat" cmpd="sng" algn="ctr">
+                      <a:solidFill>
+                        <a:srgbClr val="DCD5C1"/>
+                      </a:solidFill>
+                      <a:prstDash val="solid"/>
+                      <a:round/>
+                      <a:headEnd type="none" w="med" len="med"/>
+                      <a:tailEnd type="none" w="med" len="med"/>
+                    </a:lnT>
+                    <a:lnB w="9525" cap="flat" cmpd="sng" algn="ctr">
+                      <a:solidFill>
+                        <a:srgbClr val="DCD5C1"/>
+                      </a:solidFill>
+                      <a:prstDash val="solid"/>
+                      <a:round/>
+                      <a:headEnd type="none" w="med" len="med"/>
+                      <a:tailEnd type="none" w="med" len="med"/>
+                    </a:lnB>
+                    <a:solidFill>
+                      <a:srgbClr val="F4F7F8"/>
+                    </a:solidFill>
+                  </a:tcPr>
+                </a:tc>
+              </a:tr>
+              <a:tr h="0">
+                <a:tc>
+                  <a:txBody>
+                    <a:bodyPr/>
+                    <a:lstStyle/>
+                    <a:p>
+                      <a:pPr indent="0" marL="0">
+                        <a:buNone/>
+                      </a:pPr>
+                      <a:r>
+                        <a:rPr lang="en-US" sz="1200" b="1" dirty="0">
+                          <a:solidFill>
+                            <a:srgbClr val="1F2A37"/>
+                          </a:solidFill>
+                          <a:latin typeface="Calibri" pitchFamily="34" charset="0"/>
+                          <a:ea typeface="Calibri" pitchFamily="34" charset="-122"/>
+                          <a:cs typeface="Calibri" pitchFamily="34" charset="-120"/>
+                        </a:rPr>
+                        <a:t>Sociedade civil</a:t>
+                      </a:r>
+                      <a:endParaRPr lang="en-US" sz="1200" dirty="0">
+                        <a:latin typeface="Calibri" charset="0"/>
+                        <a:ea typeface="Calibri" charset="0"/>
+                        <a:cs typeface="Calibri" charset="0"/>
+                      </a:endParaRPr>
+                    </a:p>
+                  </a:txBody>
+                  <a:tcPr marL="50800" marR="50800" marT="50800" marB="50800" anchor="ctr">
+                    <a:lnL w="9525" cap="flat" cmpd="sng" algn="ctr">
+                      <a:solidFill>
+                        <a:srgbClr val="DCD5C1"/>
+                      </a:solidFill>
+                      <a:prstDash val="solid"/>
+                      <a:round/>
+                      <a:headEnd type="none" w="med" len="med"/>
+                      <a:tailEnd type="none" w="med" len="med"/>
+                    </a:lnL>
+                    <a:lnR w="9525" cap="flat" cmpd="sng" algn="ctr">
+                      <a:solidFill>
+                        <a:srgbClr val="DCD5C1"/>
+                      </a:solidFill>
+                      <a:prstDash val="solid"/>
+                      <a:round/>
+                      <a:headEnd type="none" w="med" len="med"/>
+                      <a:tailEnd type="none" w="med" len="med"/>
+                    </a:lnR>
+                    <a:lnT w="9525" cap="flat" cmpd="sng" algn="ctr">
+                      <a:solidFill>
+                        <a:srgbClr val="DCD5C1"/>
+                      </a:solidFill>
+                      <a:prstDash val="solid"/>
+                      <a:round/>
+                      <a:headEnd type="none" w="med" len="med"/>
+                      <a:tailEnd type="none" w="med" len="med"/>
+                    </a:lnT>
+                    <a:lnB w="9525" cap="flat" cmpd="sng" algn="ctr">
+                      <a:solidFill>
+                        <a:srgbClr val="DCD5C1"/>
+                      </a:solidFill>
+                      <a:prstDash val="solid"/>
+                      <a:round/>
+                      <a:headEnd type="none" w="med" len="med"/>
+                      <a:tailEnd type="none" w="med" len="med"/>
+                    </a:lnB>
+                    <a:solidFill>
+                      <a:srgbClr val="FFFFFF"/>
+                    </a:solidFill>
+                  </a:tcPr>
+                </a:tc>
+                <a:tc>
+                  <a:txBody>
+                    <a:bodyPr/>
+                    <a:lstStyle/>
+                    <a:p>
+                      <a:pPr indent="0" marL="0">
+                        <a:buNone/>
+                      </a:pPr>
+                      <a:r>
+                        <a:rPr lang="en-US" sz="1200" dirty="0">
+                          <a:solidFill>
+                            <a:srgbClr val="1F2A37"/>
+                          </a:solidFill>
+                          <a:latin typeface="Calibri" pitchFamily="34" charset="0"/>
+                          <a:ea typeface="Calibri" pitchFamily="34" charset="-122"/>
+                          <a:cs typeface="Calibri" pitchFamily="34" charset="-120"/>
+                        </a:rPr>
+                        <a:t>Relações sociais que não pertencem nem ao Estado nem, estritamente, ao mercado: associações, movimentos, terceiro setor.</a:t>
+                      </a:r>
+                      <a:endParaRPr lang="en-US" sz="1200" dirty="0">
+                        <a:latin typeface="Calibri" charset="0"/>
+                        <a:ea typeface="Calibri" charset="0"/>
+                        <a:cs typeface="Calibri" charset="0"/>
+                      </a:endParaRPr>
+                    </a:p>
+                  </a:txBody>
+                  <a:tcPr marL="50800" marR="50800" marT="50800" marB="50800" anchor="ctr">
+                    <a:lnL w="9525" cap="flat" cmpd="sng" algn="ctr">
+                      <a:solidFill>
+                        <a:srgbClr val="DCD5C1"/>
+                      </a:solidFill>
+                      <a:prstDash val="solid"/>
+                      <a:round/>
+                      <a:headEnd type="none" w="med" len="med"/>
+                      <a:tailEnd type="none" w="med" len="med"/>
+                    </a:lnL>
+                    <a:lnR w="9525" cap="flat" cmpd="sng" algn="ctr">
+                      <a:solidFill>
+                        <a:srgbClr val="DCD5C1"/>
+                      </a:solidFill>
+                      <a:prstDash val="solid"/>
+                      <a:round/>
+                      <a:headEnd type="none" w="med" len="med"/>
+                      <a:tailEnd type="none" w="med" len="med"/>
+                    </a:lnR>
+                    <a:lnT w="9525" cap="flat" cmpd="sng" algn="ctr">
+                      <a:solidFill>
+                        <a:srgbClr val="DCD5C1"/>
+                      </a:solidFill>
+                      <a:prstDash val="solid"/>
+                      <a:round/>
+                      <a:headEnd type="none" w="med" len="med"/>
+                      <a:tailEnd type="none" w="med" len="med"/>
+                    </a:lnT>
+                    <a:lnB w="9525" cap="flat" cmpd="sng" algn="ctr">
+                      <a:solidFill>
+                        <a:srgbClr val="DCD5C1"/>
+                      </a:solidFill>
+                      <a:prstDash val="solid"/>
+                      <a:round/>
+                      <a:headEnd type="none" w="med" len="med"/>
+                      <a:tailEnd type="none" w="med" len="med"/>
+                    </a:lnB>
+                    <a:solidFill>
+                      <a:srgbClr val="FFFFFF"/>
+                    </a:solidFill>
+                  </a:tcPr>
+                </a:tc>
+              </a:tr>
+            </a:tbl>
+          </a:graphicData>
+        </a:graphic>
+      </p:graphicFrame>
+      <p:sp>
+        <p:nvSpPr>
+          <p:cNvPr id="5" name="Text 2"/>
           <p:cNvSpPr txBox="1"/>
           <p:nvPr/>
         </p:nvSpPr>
         <p:spPr>
           <a:xfrm>
-            <a:off x="685800" y="1234440"/>
-            <a:ext cx="2456688" cy="1207008"/>
+            <a:off x="685800" y="4005072"/>
+            <a:ext cx="7772400" cy="475488"/>
           </a:xfrm>
           <a:prstGeom prst="roundRect">
             <a:avLst>
-              <a:gd name="adj" fmla="val 4545"/>
-            </a:avLst>
-          </a:prstGeom>
-          <a:solidFill>
-            <a:srgbClr val="FFFFFF"/>
-          </a:solidFill>
-          <a:ln w="12700">
-            <a:solidFill>
-              <a:srgbClr val="DCD5C1"/>
-            </a:solidFill>
-          </a:ln>
-        </p:spPr>
-        <p:txBody>
-          <a:bodyPr wrap="square" lIns="101600" tIns="101600" rIns="101600" bIns="101600" rtlCol="0" anchor="t"/>
-          <a:lstStyle/>
-          <a:p>
-            <a:pPr algn="l" indent="0" marL="0">
-              <a:lnSpc>
-                <a:spcPct val="100000"/>
-              </a:lnSpc>
-              <a:spcAft>
-                <a:spcPts val="300"/>
-              </a:spcAft>
-              <a:buNone/>
-            </a:pPr>
-            <a:r>
-              <a:rPr lang="en-US" sz="1450" b="1" dirty="0">
-                <a:solidFill>
-                  <a:srgbClr val="13294B"/>
-                </a:solidFill>
-                <a:latin typeface="Calibri" pitchFamily="34" charset="0"/>
-                <a:ea typeface="Calibri" pitchFamily="34" charset="-122"/>
-                <a:cs typeface="Calibri" pitchFamily="34" charset="-120"/>
-              </a:rPr>
-              <a:t>Estado</a:t>
-            </a:r>
-            <a:endParaRPr lang="en-US" sz="1450" dirty="0"/>
-          </a:p>
-          <a:p>
-            <a:pPr algn="l" indent="0" marL="0">
-              <a:lnSpc>
-                <a:spcPct val="100000"/>
-              </a:lnSpc>
-              <a:buNone/>
-            </a:pPr>
-            <a:r>
-              <a:rPr lang="en-US" sz="1250" dirty="0">
-                <a:solidFill>
-                  <a:srgbClr val="1F2A37"/>
-                </a:solidFill>
-                <a:latin typeface="Calibri" pitchFamily="34" charset="0"/>
-                <a:ea typeface="Calibri" pitchFamily="34" charset="-122"/>
-                <a:cs typeface="Calibri" pitchFamily="34" charset="-120"/>
-              </a:rPr>
-              <a:t>Organização político-jurídica permanente e soberana sobre um território e sua população.</a:t>
-            </a:r>
-            <a:endParaRPr lang="en-US" sz="1450" dirty="0"/>
-          </a:p>
-        </p:txBody>
-      </p:sp>
-      <p:sp>
-        <p:nvSpPr>
-          <p:cNvPr id="5" name="Text 3"/>
-          <p:cNvSpPr txBox="1"/>
-          <p:nvPr/>
-        </p:nvSpPr>
-        <p:spPr>
-          <a:xfrm>
-            <a:off x="3343656" y="1234440"/>
-            <a:ext cx="2456688" cy="1207008"/>
-          </a:xfrm>
-          <a:prstGeom prst="roundRect">
-            <a:avLst>
-              <a:gd name="adj" fmla="val 4545"/>
-            </a:avLst>
-          </a:prstGeom>
-          <a:solidFill>
-            <a:srgbClr val="FFFFFF"/>
-          </a:solidFill>
-          <a:ln w="12700">
-            <a:solidFill>
-              <a:srgbClr val="DCD5C1"/>
-            </a:solidFill>
-          </a:ln>
-        </p:spPr>
-        <p:txBody>
-          <a:bodyPr wrap="square" lIns="101600" tIns="101600" rIns="101600" bIns="101600" rtlCol="0" anchor="t"/>
-          <a:lstStyle/>
-          <a:p>
-            <a:pPr algn="l" indent="0" marL="0">
-              <a:lnSpc>
-                <a:spcPct val="100000"/>
-              </a:lnSpc>
-              <a:spcAft>
-                <a:spcPts val="300"/>
-              </a:spcAft>
-              <a:buNone/>
-            </a:pPr>
-            <a:r>
-              <a:rPr lang="en-US" sz="1450" b="1" dirty="0">
-                <a:solidFill>
-                  <a:srgbClr val="13294B"/>
-                </a:solidFill>
-                <a:latin typeface="Calibri" pitchFamily="34" charset="0"/>
-                <a:ea typeface="Calibri" pitchFamily="34" charset="-122"/>
-                <a:cs typeface="Calibri" pitchFamily="34" charset="-120"/>
-              </a:rPr>
-              <a:t>Governo</a:t>
-            </a:r>
-            <a:endParaRPr lang="en-US" sz="1450" dirty="0"/>
-          </a:p>
-          <a:p>
-            <a:pPr algn="l" indent="0" marL="0">
-              <a:lnSpc>
-                <a:spcPct val="100000"/>
-              </a:lnSpc>
-              <a:buNone/>
-            </a:pPr>
-            <a:r>
-              <a:rPr lang="en-US" sz="1250" dirty="0">
-                <a:solidFill>
-                  <a:srgbClr val="1F2A37"/>
-                </a:solidFill>
-                <a:latin typeface="Calibri" pitchFamily="34" charset="0"/>
-                <a:ea typeface="Calibri" pitchFamily="34" charset="-122"/>
-                <a:cs typeface="Calibri" pitchFamily="34" charset="-120"/>
-              </a:rPr>
-              <a:t>Grupo que dirige o Estado em dado momento e define as políticas. É transitório.</a:t>
-            </a:r>
-            <a:endParaRPr lang="en-US" sz="1450" dirty="0"/>
-          </a:p>
-        </p:txBody>
-      </p:sp>
-      <p:sp>
-        <p:nvSpPr>
-          <p:cNvPr id="6" name="Text 4"/>
-          <p:cNvSpPr txBox="1"/>
-          <p:nvPr/>
-        </p:nvSpPr>
-        <p:spPr>
-          <a:xfrm>
-            <a:off x="6001512" y="1234440"/>
-            <a:ext cx="2456688" cy="1207008"/>
-          </a:xfrm>
-          <a:prstGeom prst="roundRect">
-            <a:avLst>
-              <a:gd name="adj" fmla="val 4545"/>
-            </a:avLst>
-          </a:prstGeom>
-          <a:solidFill>
-            <a:srgbClr val="FFFFFF"/>
-          </a:solidFill>
-          <a:ln w="12700">
-            <a:solidFill>
-              <a:srgbClr val="DCD5C1"/>
-            </a:solidFill>
-          </a:ln>
-        </p:spPr>
-        <p:txBody>
-          <a:bodyPr wrap="square" lIns="101600" tIns="101600" rIns="101600" bIns="101600" rtlCol="0" anchor="t"/>
-          <a:lstStyle/>
-          <a:p>
-            <a:pPr algn="l" indent="0" marL="0">
-              <a:lnSpc>
-                <a:spcPct val="100000"/>
-              </a:lnSpc>
-              <a:spcAft>
-                <a:spcPts val="300"/>
-              </a:spcAft>
-              <a:buNone/>
-            </a:pPr>
-            <a:r>
-              <a:rPr lang="en-US" sz="1450" b="1" dirty="0">
-                <a:solidFill>
-                  <a:srgbClr val="13294B"/>
-                </a:solidFill>
-                <a:latin typeface="Calibri" pitchFamily="34" charset="0"/>
-                <a:ea typeface="Calibri" pitchFamily="34" charset="-122"/>
-                <a:cs typeface="Calibri" pitchFamily="34" charset="-120"/>
-              </a:rPr>
-              <a:t>Administração pública</a:t>
-            </a:r>
-            <a:endParaRPr lang="en-US" sz="1450" dirty="0"/>
-          </a:p>
-          <a:p>
-            <a:pPr algn="l" indent="0" marL="0">
-              <a:lnSpc>
-                <a:spcPct val="100000"/>
-              </a:lnSpc>
-              <a:buNone/>
-            </a:pPr>
-            <a:r>
-              <a:rPr lang="en-US" sz="1250" dirty="0">
-                <a:solidFill>
-                  <a:srgbClr val="1F2A37"/>
-                </a:solidFill>
-                <a:latin typeface="Calibri" pitchFamily="34" charset="0"/>
-                <a:ea typeface="Calibri" pitchFamily="34" charset="-122"/>
-                <a:cs typeface="Calibri" pitchFamily="34" charset="-120"/>
-              </a:rPr>
-              <a:t>Órgãos, entidades e servidores que executam as políticas definidas pelo governo.</a:t>
-            </a:r>
-            <a:endParaRPr lang="en-US" sz="1450" dirty="0"/>
-          </a:p>
-        </p:txBody>
-      </p:sp>
-      <p:sp>
-        <p:nvSpPr>
-          <p:cNvPr id="7" name="Text 5"/>
-          <p:cNvSpPr txBox="1"/>
-          <p:nvPr/>
-        </p:nvSpPr>
-        <p:spPr>
-          <a:xfrm>
-            <a:off x="685800" y="2587752"/>
-            <a:ext cx="2456688" cy="1207008"/>
-          </a:xfrm>
-          <a:prstGeom prst="roundRect">
-            <a:avLst>
-              <a:gd name="adj" fmla="val 4545"/>
-            </a:avLst>
-          </a:prstGeom>
-          <a:solidFill>
-            <a:srgbClr val="FFFFFF"/>
-          </a:solidFill>
-          <a:ln w="12700">
-            <a:solidFill>
-              <a:srgbClr val="DCD5C1"/>
-            </a:solidFill>
-          </a:ln>
-        </p:spPr>
-        <p:txBody>
-          <a:bodyPr wrap="square" lIns="101600" tIns="101600" rIns="101600" bIns="101600" rtlCol="0" anchor="t"/>
-          <a:lstStyle/>
-          <a:p>
-            <a:pPr algn="l" indent="0" marL="0">
-              <a:lnSpc>
-                <a:spcPct val="100000"/>
-              </a:lnSpc>
-              <a:spcAft>
-                <a:spcPts val="300"/>
-              </a:spcAft>
-              <a:buNone/>
-            </a:pPr>
-            <a:r>
-              <a:rPr lang="en-US" sz="1450" b="1" dirty="0">
-                <a:solidFill>
-                  <a:srgbClr val="13294B"/>
-                </a:solidFill>
-                <a:latin typeface="Calibri" pitchFamily="34" charset="0"/>
-                <a:ea typeface="Calibri" pitchFamily="34" charset="-122"/>
-                <a:cs typeface="Calibri" pitchFamily="34" charset="-120"/>
-              </a:rPr>
-              <a:t>Mercado</a:t>
-            </a:r>
-            <a:endParaRPr lang="en-US" sz="1450" dirty="0"/>
-          </a:p>
-          <a:p>
-            <a:pPr algn="l" indent="0" marL="0">
-              <a:lnSpc>
-                <a:spcPct val="100000"/>
-              </a:lnSpc>
-              <a:buNone/>
-            </a:pPr>
-            <a:r>
-              <a:rPr lang="en-US" sz="1250" dirty="0">
-                <a:solidFill>
-                  <a:srgbClr val="1F2A37"/>
-                </a:solidFill>
-                <a:latin typeface="Calibri" pitchFamily="34" charset="0"/>
-                <a:ea typeface="Calibri" pitchFamily="34" charset="-122"/>
-                <a:cs typeface="Calibri" pitchFamily="34" charset="-120"/>
-              </a:rPr>
-              <a:t>Coordenação descentralizada das atividades econômicas, pela troca voluntária e pelos preços.</a:t>
-            </a:r>
-            <a:endParaRPr lang="en-US" sz="1450" dirty="0"/>
-          </a:p>
-        </p:txBody>
-      </p:sp>
-      <p:sp>
-        <p:nvSpPr>
-          <p:cNvPr id="8" name="Text 6"/>
-          <p:cNvSpPr txBox="1"/>
-          <p:nvPr/>
-        </p:nvSpPr>
-        <p:spPr>
-          <a:xfrm>
-            <a:off x="3343656" y="2587752"/>
-            <a:ext cx="2456688" cy="1207008"/>
-          </a:xfrm>
-          <a:prstGeom prst="roundRect">
-            <a:avLst>
-              <a:gd name="adj" fmla="val 4545"/>
-            </a:avLst>
-          </a:prstGeom>
-          <a:solidFill>
-            <a:srgbClr val="FFFFFF"/>
-          </a:solidFill>
-          <a:ln w="12700">
-            <a:solidFill>
-              <a:srgbClr val="DCD5C1"/>
-            </a:solidFill>
-          </a:ln>
-        </p:spPr>
-        <p:txBody>
-          <a:bodyPr wrap="square" lIns="101600" tIns="101600" rIns="101600" bIns="101600" rtlCol="0" anchor="t"/>
-          <a:lstStyle/>
-          <a:p>
-            <a:pPr algn="l" indent="0" marL="0">
-              <a:lnSpc>
-                <a:spcPct val="100000"/>
-              </a:lnSpc>
-              <a:spcAft>
-                <a:spcPts val="300"/>
-              </a:spcAft>
-              <a:buNone/>
-            </a:pPr>
-            <a:r>
-              <a:rPr lang="en-US" sz="1450" b="1" dirty="0">
-                <a:solidFill>
-                  <a:srgbClr val="13294B"/>
-                </a:solidFill>
-                <a:latin typeface="Calibri" pitchFamily="34" charset="0"/>
-                <a:ea typeface="Calibri" pitchFamily="34" charset="-122"/>
-                <a:cs typeface="Calibri" pitchFamily="34" charset="-120"/>
-              </a:rPr>
-              <a:t>Sociedade civil</a:t>
-            </a:r>
-            <a:endParaRPr lang="en-US" sz="1450" dirty="0"/>
-          </a:p>
-          <a:p>
-            <a:pPr algn="l" indent="0" marL="0">
-              <a:lnSpc>
-                <a:spcPct val="100000"/>
-              </a:lnSpc>
-              <a:buNone/>
-            </a:pPr>
-            <a:r>
-              <a:rPr lang="en-US" sz="1250" dirty="0">
-                <a:solidFill>
-                  <a:srgbClr val="1F2A37"/>
-                </a:solidFill>
-                <a:latin typeface="Calibri" pitchFamily="34" charset="0"/>
-                <a:ea typeface="Calibri" pitchFamily="34" charset="-122"/>
-                <a:cs typeface="Calibri" pitchFamily="34" charset="-120"/>
-              </a:rPr>
-              <a:t>Associações, movimentos e terceiro setor: nem Estado nem, estritamente, mercado.</a:t>
-            </a:r>
-            <a:endParaRPr lang="en-US" sz="1450" dirty="0"/>
-          </a:p>
-        </p:txBody>
-      </p:sp>
-      <p:sp>
-        <p:nvSpPr>
-          <p:cNvPr id="9" name="Text 7"/>
-          <p:cNvSpPr txBox="1"/>
-          <p:nvPr/>
-        </p:nvSpPr>
-        <p:spPr>
-          <a:xfrm>
-            <a:off x="685800" y="3886200"/>
-            <a:ext cx="7772400" cy="530352"/>
-          </a:xfrm>
-          <a:prstGeom prst="roundRect">
-            <a:avLst>
-              <a:gd name="adj" fmla="val 13793"/>
+              <a:gd name="adj" fmla="val 15385"/>
             </a:avLst>
           </a:prstGeom>
           <a:solidFill>
@@ -9286,7 +9779,7 @@
               <a:buNone/>
             </a:pPr>
             <a:r>
-              <a:rPr lang="en-US" sz="1450" b="1" dirty="0">
+              <a:rPr lang="en-US" sz="1300" b="1" dirty="0">
                 <a:solidFill>
                   <a:srgbClr val="13294B"/>
                 </a:solidFill>
@@ -9294,15 +9787,15 @@
                 <a:ea typeface="Calibri" pitchFamily="34" charset="-122"/>
                 <a:cs typeface="Calibri" pitchFamily="34" charset="-120"/>
               </a:rPr>
-              <a:t>Quando o governo muda após uma eleição, o Estado brasileiro continua o mesmo.</a:t>
-            </a:r>
-            <a:endParaRPr lang="en-US" sz="1450" dirty="0"/>
-          </a:p>
-        </p:txBody>
-      </p:sp>
-      <p:sp>
-        <p:nvSpPr>
-          <p:cNvPr id="10" name="Text 8"/>
+              <a:t>Não confunda Estado com governo: quando o governo muda, o Estado continua o mesmo.</a:t>
+            </a:r>
+            <a:endParaRPr lang="en-US" sz="1300" dirty="0"/>
+          </a:p>
+        </p:txBody>
+      </p:sp>
+      <p:sp>
+        <p:nvSpPr>
+          <p:cNvPr id="6" name="Text 3"/>
           <p:cNvSpPr txBox="1"/>
           <p:nvPr/>
         </p:nvSpPr>
@@ -14408,111 +14901,894 @@
           </a:p>
         </p:txBody>
       </p:sp>
-      <p:sp>
-        <p:nvSpPr>
-          <p:cNvPr id="4" name="Shape 2"/>
-          <p:cNvSpPr/>
-          <p:nvPr/>
-        </p:nvSpPr>
-        <p:spPr>
-          <a:xfrm>
-            <a:off x="685800" y="1325880"/>
-            <a:ext cx="2456688" cy="2011680"/>
+      <p:graphicFrame>
+        <p:nvGraphicFramePr>
+          <p:cNvPr id="25" name="Table 0"/>
+          <p:cNvGraphicFramePr>
+            <a:graphicFrameLocks noGrp="1"/>
+          </p:cNvGraphicFramePr>
+          <p:nvPr>
+            <p:extLst>
+              <p:ext uri="{D42A27DB-BD31-4B8C-83A1-F6EECF244321}">
+                <p14:modId xmlns:p14="http://schemas.microsoft.com/office/powerpoint/2010/main" val="1579011935"/>
+              </p:ext>
+            </p:extLst>
+          </p:nvPr>
+        </p:nvGraphicFramePr>
+        <p:xfrm>
+          <a:off x="685800" y="1325880"/>
+          <a:ext cx="7772400" cy="914400"/>
+        </p:xfrm>
+        <a:graphic>
+          <a:graphicData uri="http://schemas.openxmlformats.org/drawingml/2006/table">
+            <a:tbl>
+              <a:tblPr/>
+              <a:tblGrid>
+                <a:gridCol w="1737360"/>
+                <a:gridCol w="3291840"/>
+                <a:gridCol w="2743200"/>
+              </a:tblGrid>
+              <a:tr h="0">
+                <a:tc>
+                  <a:txBody>
+                    <a:bodyPr/>
+                    <a:lstStyle/>
+                    <a:p>
+                      <a:pPr indent="0" marL="0">
+                        <a:buNone/>
+                      </a:pPr>
+                      <a:r>
+                        <a:rPr lang="en-US" sz="1400" b="1" dirty="0">
+                          <a:solidFill>
+                            <a:srgbClr val="FFFFFF"/>
+                          </a:solidFill>
+                          <a:latin typeface="Calibri" pitchFamily="34" charset="0"/>
+                          <a:ea typeface="Calibri" pitchFamily="34" charset="-122"/>
+                          <a:cs typeface="Calibri" pitchFamily="34" charset="-120"/>
+                        </a:rPr>
+                        <a:t>Função</a:t>
+                      </a:r>
+                      <a:endParaRPr lang="en-US" sz="1400" dirty="0">
+                        <a:latin typeface="Calibri" charset="0"/>
+                        <a:ea typeface="Calibri" charset="0"/>
+                        <a:cs typeface="Calibri" charset="0"/>
+                      </a:endParaRPr>
+                    </a:p>
+                  </a:txBody>
+                  <a:tcPr marL="50800" marR="50800" marT="50800" marB="50800" anchor="ctr">
+                    <a:lnL w="9525" cap="flat" cmpd="sng" algn="ctr">
+                      <a:solidFill>
+                        <a:srgbClr val="DCD5C1"/>
+                      </a:solidFill>
+                      <a:prstDash val="solid"/>
+                      <a:round/>
+                      <a:headEnd type="none" w="med" len="med"/>
+                      <a:tailEnd type="none" w="med" len="med"/>
+                    </a:lnL>
+                    <a:lnR w="9525" cap="flat" cmpd="sng" algn="ctr">
+                      <a:solidFill>
+                        <a:srgbClr val="DCD5C1"/>
+                      </a:solidFill>
+                      <a:prstDash val="solid"/>
+                      <a:round/>
+                      <a:headEnd type="none" w="med" len="med"/>
+                      <a:tailEnd type="none" w="med" len="med"/>
+                    </a:lnR>
+                    <a:lnT w="9525" cap="flat" cmpd="sng" algn="ctr">
+                      <a:solidFill>
+                        <a:srgbClr val="DCD5C1"/>
+                      </a:solidFill>
+                      <a:prstDash val="solid"/>
+                      <a:round/>
+                      <a:headEnd type="none" w="med" len="med"/>
+                      <a:tailEnd type="none" w="med" len="med"/>
+                    </a:lnT>
+                    <a:lnB w="9525" cap="flat" cmpd="sng" algn="ctr">
+                      <a:solidFill>
+                        <a:srgbClr val="DCD5C1"/>
+                      </a:solidFill>
+                      <a:prstDash val="solid"/>
+                      <a:round/>
+                      <a:headEnd type="none" w="med" len="med"/>
+                      <a:tailEnd type="none" w="med" len="med"/>
+                    </a:lnB>
+                    <a:solidFill>
+                      <a:srgbClr val="13294B"/>
+                    </a:solidFill>
+                  </a:tcPr>
+                </a:tc>
+                <a:tc>
+                  <a:txBody>
+                    <a:bodyPr/>
+                    <a:lstStyle/>
+                    <a:p>
+                      <a:pPr indent="0" marL="0">
+                        <a:buNone/>
+                      </a:pPr>
+                      <a:r>
+                        <a:rPr lang="en-US" sz="1400" b="1" dirty="0">
+                          <a:solidFill>
+                            <a:srgbClr val="FFFFFF"/>
+                          </a:solidFill>
+                          <a:latin typeface="Calibri" pitchFamily="34" charset="0"/>
+                          <a:ea typeface="Calibri" pitchFamily="34" charset="-122"/>
+                          <a:cs typeface="Calibri" pitchFamily="34" charset="-120"/>
+                        </a:rPr>
+                        <a:t>Objetivo</a:t>
+                      </a:r>
+                      <a:endParaRPr lang="en-US" sz="1400" dirty="0">
+                        <a:latin typeface="Calibri" charset="0"/>
+                        <a:ea typeface="Calibri" charset="0"/>
+                        <a:cs typeface="Calibri" charset="0"/>
+                      </a:endParaRPr>
+                    </a:p>
+                  </a:txBody>
+                  <a:tcPr marL="50800" marR="50800" marT="50800" marB="50800" anchor="ctr">
+                    <a:lnL w="9525" cap="flat" cmpd="sng" algn="ctr">
+                      <a:solidFill>
+                        <a:srgbClr val="DCD5C1"/>
+                      </a:solidFill>
+                      <a:prstDash val="solid"/>
+                      <a:round/>
+                      <a:headEnd type="none" w="med" len="med"/>
+                      <a:tailEnd type="none" w="med" len="med"/>
+                    </a:lnL>
+                    <a:lnR w="9525" cap="flat" cmpd="sng" algn="ctr">
+                      <a:solidFill>
+                        <a:srgbClr val="DCD5C1"/>
+                      </a:solidFill>
+                      <a:prstDash val="solid"/>
+                      <a:round/>
+                      <a:headEnd type="none" w="med" len="med"/>
+                      <a:tailEnd type="none" w="med" len="med"/>
+                    </a:lnR>
+                    <a:lnT w="9525" cap="flat" cmpd="sng" algn="ctr">
+                      <a:solidFill>
+                        <a:srgbClr val="DCD5C1"/>
+                      </a:solidFill>
+                      <a:prstDash val="solid"/>
+                      <a:round/>
+                      <a:headEnd type="none" w="med" len="med"/>
+                      <a:tailEnd type="none" w="med" len="med"/>
+                    </a:lnT>
+                    <a:lnB w="9525" cap="flat" cmpd="sng" algn="ctr">
+                      <a:solidFill>
+                        <a:srgbClr val="DCD5C1"/>
+                      </a:solidFill>
+                      <a:prstDash val="solid"/>
+                      <a:round/>
+                      <a:headEnd type="none" w="med" len="med"/>
+                      <a:tailEnd type="none" w="med" len="med"/>
+                    </a:lnB>
+                    <a:solidFill>
+                      <a:srgbClr val="13294B"/>
+                    </a:solidFill>
+                  </a:tcPr>
+                </a:tc>
+                <a:tc>
+                  <a:txBody>
+                    <a:bodyPr/>
+                    <a:lstStyle/>
+                    <a:p>
+                      <a:pPr indent="0" marL="0">
+                        <a:buNone/>
+                      </a:pPr>
+                      <a:r>
+                        <a:rPr lang="en-US" sz="1400" b="1" dirty="0">
+                          <a:solidFill>
+                            <a:srgbClr val="FFFFFF"/>
+                          </a:solidFill>
+                          <a:latin typeface="Calibri" pitchFamily="34" charset="0"/>
+                          <a:ea typeface="Calibri" pitchFamily="34" charset="-122"/>
+                          <a:cs typeface="Calibri" pitchFamily="34" charset="-120"/>
+                        </a:rPr>
+                        <a:t>Exemplos</a:t>
+                      </a:r>
+                      <a:endParaRPr lang="en-US" sz="1400" dirty="0">
+                        <a:latin typeface="Calibri" charset="0"/>
+                        <a:ea typeface="Calibri" charset="0"/>
+                        <a:cs typeface="Calibri" charset="0"/>
+                      </a:endParaRPr>
+                    </a:p>
+                  </a:txBody>
+                  <a:tcPr marL="50800" marR="50800" marT="50800" marB="50800" anchor="ctr">
+                    <a:lnL w="9525" cap="flat" cmpd="sng" algn="ctr">
+                      <a:solidFill>
+                        <a:srgbClr val="DCD5C1"/>
+                      </a:solidFill>
+                      <a:prstDash val="solid"/>
+                      <a:round/>
+                      <a:headEnd type="none" w="med" len="med"/>
+                      <a:tailEnd type="none" w="med" len="med"/>
+                    </a:lnL>
+                    <a:lnR w="9525" cap="flat" cmpd="sng" algn="ctr">
+                      <a:solidFill>
+                        <a:srgbClr val="DCD5C1"/>
+                      </a:solidFill>
+                      <a:prstDash val="solid"/>
+                      <a:round/>
+                      <a:headEnd type="none" w="med" len="med"/>
+                      <a:tailEnd type="none" w="med" len="med"/>
+                    </a:lnR>
+                    <a:lnT w="9525" cap="flat" cmpd="sng" algn="ctr">
+                      <a:solidFill>
+                        <a:srgbClr val="DCD5C1"/>
+                      </a:solidFill>
+                      <a:prstDash val="solid"/>
+                      <a:round/>
+                      <a:headEnd type="none" w="med" len="med"/>
+                      <a:tailEnd type="none" w="med" len="med"/>
+                    </a:lnT>
+                    <a:lnB w="9525" cap="flat" cmpd="sng" algn="ctr">
+                      <a:solidFill>
+                        <a:srgbClr val="DCD5C1"/>
+                      </a:solidFill>
+                      <a:prstDash val="solid"/>
+                      <a:round/>
+                      <a:headEnd type="none" w="med" len="med"/>
+                      <a:tailEnd type="none" w="med" len="med"/>
+                    </a:lnB>
+                    <a:solidFill>
+                      <a:srgbClr val="13294B"/>
+                    </a:solidFill>
+                  </a:tcPr>
+                </a:tc>
+              </a:tr>
+              <a:tr h="0">
+                <a:tc>
+                  <a:txBody>
+                    <a:bodyPr/>
+                    <a:lstStyle/>
+                    <a:p>
+                      <a:pPr indent="0" marL="0">
+                        <a:buNone/>
+                      </a:pPr>
+                      <a:r>
+                        <a:rPr lang="en-US" sz="1400" b="1" dirty="0">
+                          <a:solidFill>
+                            <a:srgbClr val="1F2A37"/>
+                          </a:solidFill>
+                          <a:latin typeface="Calibri" pitchFamily="34" charset="0"/>
+                          <a:ea typeface="Calibri" pitchFamily="34" charset="-122"/>
+                          <a:cs typeface="Calibri" pitchFamily="34" charset="-120"/>
+                        </a:rPr>
+                        <a:t>Alocativa</a:t>
+                      </a:r>
+                      <a:endParaRPr lang="en-US" sz="1400" dirty="0">
+                        <a:latin typeface="Calibri" charset="0"/>
+                        <a:ea typeface="Calibri" charset="0"/>
+                        <a:cs typeface="Calibri" charset="0"/>
+                      </a:endParaRPr>
+                    </a:p>
+                  </a:txBody>
+                  <a:tcPr marL="50800" marR="50800" marT="50800" marB="50800" anchor="ctr">
+                    <a:lnL w="9525" cap="flat" cmpd="sng" algn="ctr">
+                      <a:solidFill>
+                        <a:srgbClr val="DCD5C1"/>
+                      </a:solidFill>
+                      <a:prstDash val="solid"/>
+                      <a:round/>
+                      <a:headEnd type="none" w="med" len="med"/>
+                      <a:tailEnd type="none" w="med" len="med"/>
+                    </a:lnL>
+                    <a:lnR w="9525" cap="flat" cmpd="sng" algn="ctr">
+                      <a:solidFill>
+                        <a:srgbClr val="DCD5C1"/>
+                      </a:solidFill>
+                      <a:prstDash val="solid"/>
+                      <a:round/>
+                      <a:headEnd type="none" w="med" len="med"/>
+                      <a:tailEnd type="none" w="med" len="med"/>
+                    </a:lnR>
+                    <a:lnT w="9525" cap="flat" cmpd="sng" algn="ctr">
+                      <a:solidFill>
+                        <a:srgbClr val="DCD5C1"/>
+                      </a:solidFill>
+                      <a:prstDash val="solid"/>
+                      <a:round/>
+                      <a:headEnd type="none" w="med" len="med"/>
+                      <a:tailEnd type="none" w="med" len="med"/>
+                    </a:lnT>
+                    <a:lnB w="9525" cap="flat" cmpd="sng" algn="ctr">
+                      <a:solidFill>
+                        <a:srgbClr val="DCD5C1"/>
+                      </a:solidFill>
+                      <a:prstDash val="solid"/>
+                      <a:round/>
+                      <a:headEnd type="none" w="med" len="med"/>
+                      <a:tailEnd type="none" w="med" len="med"/>
+                    </a:lnB>
+                    <a:solidFill>
+                      <a:srgbClr val="FFFFFF"/>
+                    </a:solidFill>
+                  </a:tcPr>
+                </a:tc>
+                <a:tc>
+                  <a:txBody>
+                    <a:bodyPr/>
+                    <a:lstStyle/>
+                    <a:p>
+                      <a:pPr indent="0" marL="0">
+                        <a:buNone/>
+                      </a:pPr>
+                      <a:r>
+                        <a:rPr lang="en-US" sz="1400" dirty="0">
+                          <a:solidFill>
+                            <a:srgbClr val="1F2A37"/>
+                          </a:solidFill>
+                          <a:latin typeface="Calibri" pitchFamily="34" charset="0"/>
+                          <a:ea typeface="Calibri" pitchFamily="34" charset="-122"/>
+                          <a:cs typeface="Calibri" pitchFamily="34" charset="-120"/>
+                        </a:rPr>
+                        <a:t>Ofertar bens e serviços que o mercado não provê de forma adequada</a:t>
+                      </a:r>
+                      <a:endParaRPr lang="en-US" sz="1400" dirty="0">
+                        <a:latin typeface="Calibri" charset="0"/>
+                        <a:ea typeface="Calibri" charset="0"/>
+                        <a:cs typeface="Calibri" charset="0"/>
+                      </a:endParaRPr>
+                    </a:p>
+                  </a:txBody>
+                  <a:tcPr marL="50800" marR="50800" marT="50800" marB="50800" anchor="ctr">
+                    <a:lnL w="9525" cap="flat" cmpd="sng" algn="ctr">
+                      <a:solidFill>
+                        <a:srgbClr val="DCD5C1"/>
+                      </a:solidFill>
+                      <a:prstDash val="solid"/>
+                      <a:round/>
+                      <a:headEnd type="none" w="med" len="med"/>
+                      <a:tailEnd type="none" w="med" len="med"/>
+                    </a:lnL>
+                    <a:lnR w="9525" cap="flat" cmpd="sng" algn="ctr">
+                      <a:solidFill>
+                        <a:srgbClr val="DCD5C1"/>
+                      </a:solidFill>
+                      <a:prstDash val="solid"/>
+                      <a:round/>
+                      <a:headEnd type="none" w="med" len="med"/>
+                      <a:tailEnd type="none" w="med" len="med"/>
+                    </a:lnR>
+                    <a:lnT w="9525" cap="flat" cmpd="sng" algn="ctr">
+                      <a:solidFill>
+                        <a:srgbClr val="DCD5C1"/>
+                      </a:solidFill>
+                      <a:prstDash val="solid"/>
+                      <a:round/>
+                      <a:headEnd type="none" w="med" len="med"/>
+                      <a:tailEnd type="none" w="med" len="med"/>
+                    </a:lnT>
+                    <a:lnB w="9525" cap="flat" cmpd="sng" algn="ctr">
+                      <a:solidFill>
+                        <a:srgbClr val="DCD5C1"/>
+                      </a:solidFill>
+                      <a:prstDash val="solid"/>
+                      <a:round/>
+                      <a:headEnd type="none" w="med" len="med"/>
+                      <a:tailEnd type="none" w="med" len="med"/>
+                    </a:lnB>
+                    <a:solidFill>
+                      <a:srgbClr val="FFFFFF"/>
+                    </a:solidFill>
+                  </a:tcPr>
+                </a:tc>
+                <a:tc>
+                  <a:txBody>
+                    <a:bodyPr/>
+                    <a:lstStyle/>
+                    <a:p>
+                      <a:pPr indent="0" marL="0">
+                        <a:buNone/>
+                      </a:pPr>
+                      <a:r>
+                        <a:rPr lang="en-US" sz="1400" dirty="0">
+                          <a:solidFill>
+                            <a:srgbClr val="1F2A37"/>
+                          </a:solidFill>
+                          <a:latin typeface="Calibri" pitchFamily="34" charset="0"/>
+                          <a:ea typeface="Calibri" pitchFamily="34" charset="-122"/>
+                          <a:cs typeface="Calibri" pitchFamily="34" charset="-120"/>
+                        </a:rPr>
+                        <a:t>Segurança, justiça, saneamento, infraestrutura</a:t>
+                      </a:r>
+                      <a:endParaRPr lang="en-US" sz="1400" dirty="0">
+                        <a:latin typeface="Calibri" charset="0"/>
+                        <a:ea typeface="Calibri" charset="0"/>
+                        <a:cs typeface="Calibri" charset="0"/>
+                      </a:endParaRPr>
+                    </a:p>
+                  </a:txBody>
+                  <a:tcPr marL="50800" marR="50800" marT="50800" marB="50800" anchor="ctr">
+                    <a:lnL w="9525" cap="flat" cmpd="sng" algn="ctr">
+                      <a:solidFill>
+                        <a:srgbClr val="DCD5C1"/>
+                      </a:solidFill>
+                      <a:prstDash val="solid"/>
+                      <a:round/>
+                      <a:headEnd type="none" w="med" len="med"/>
+                      <a:tailEnd type="none" w="med" len="med"/>
+                    </a:lnL>
+                    <a:lnR w="9525" cap="flat" cmpd="sng" algn="ctr">
+                      <a:solidFill>
+                        <a:srgbClr val="DCD5C1"/>
+                      </a:solidFill>
+                      <a:prstDash val="solid"/>
+                      <a:round/>
+                      <a:headEnd type="none" w="med" len="med"/>
+                      <a:tailEnd type="none" w="med" len="med"/>
+                    </a:lnR>
+                    <a:lnT w="9525" cap="flat" cmpd="sng" algn="ctr">
+                      <a:solidFill>
+                        <a:srgbClr val="DCD5C1"/>
+                      </a:solidFill>
+                      <a:prstDash val="solid"/>
+                      <a:round/>
+                      <a:headEnd type="none" w="med" len="med"/>
+                      <a:tailEnd type="none" w="med" len="med"/>
+                    </a:lnT>
+                    <a:lnB w="9525" cap="flat" cmpd="sng" algn="ctr">
+                      <a:solidFill>
+                        <a:srgbClr val="DCD5C1"/>
+                      </a:solidFill>
+                      <a:prstDash val="solid"/>
+                      <a:round/>
+                      <a:headEnd type="none" w="med" len="med"/>
+                      <a:tailEnd type="none" w="med" len="med"/>
+                    </a:lnB>
+                    <a:solidFill>
+                      <a:srgbClr val="FFFFFF"/>
+                    </a:solidFill>
+                  </a:tcPr>
+                </a:tc>
+              </a:tr>
+              <a:tr h="0">
+                <a:tc>
+                  <a:txBody>
+                    <a:bodyPr/>
+                    <a:lstStyle/>
+                    <a:p>
+                      <a:pPr indent="0" marL="0">
+                        <a:buNone/>
+                      </a:pPr>
+                      <a:r>
+                        <a:rPr lang="en-US" sz="1400" b="1" dirty="0">
+                          <a:solidFill>
+                            <a:srgbClr val="1F2A37"/>
+                          </a:solidFill>
+                          <a:latin typeface="Calibri" pitchFamily="34" charset="0"/>
+                          <a:ea typeface="Calibri" pitchFamily="34" charset="-122"/>
+                          <a:cs typeface="Calibri" pitchFamily="34" charset="-120"/>
+                        </a:rPr>
+                        <a:t>Distributiva</a:t>
+                      </a:r>
+                      <a:endParaRPr lang="en-US" sz="1400" dirty="0">
+                        <a:latin typeface="Calibri" charset="0"/>
+                        <a:ea typeface="Calibri" charset="0"/>
+                        <a:cs typeface="Calibri" charset="0"/>
+                      </a:endParaRPr>
+                    </a:p>
+                  </a:txBody>
+                  <a:tcPr marL="50800" marR="50800" marT="50800" marB="50800" anchor="ctr">
+                    <a:lnL w="9525" cap="flat" cmpd="sng" algn="ctr">
+                      <a:solidFill>
+                        <a:srgbClr val="DCD5C1"/>
+                      </a:solidFill>
+                      <a:prstDash val="solid"/>
+                      <a:round/>
+                      <a:headEnd type="none" w="med" len="med"/>
+                      <a:tailEnd type="none" w="med" len="med"/>
+                    </a:lnL>
+                    <a:lnR w="9525" cap="flat" cmpd="sng" algn="ctr">
+                      <a:solidFill>
+                        <a:srgbClr val="DCD5C1"/>
+                      </a:solidFill>
+                      <a:prstDash val="solid"/>
+                      <a:round/>
+                      <a:headEnd type="none" w="med" len="med"/>
+                      <a:tailEnd type="none" w="med" len="med"/>
+                    </a:lnR>
+                    <a:lnT w="9525" cap="flat" cmpd="sng" algn="ctr">
+                      <a:solidFill>
+                        <a:srgbClr val="DCD5C1"/>
+                      </a:solidFill>
+                      <a:prstDash val="solid"/>
+                      <a:round/>
+                      <a:headEnd type="none" w="med" len="med"/>
+                      <a:tailEnd type="none" w="med" len="med"/>
+                    </a:lnT>
+                    <a:lnB w="9525" cap="flat" cmpd="sng" algn="ctr">
+                      <a:solidFill>
+                        <a:srgbClr val="DCD5C1"/>
+                      </a:solidFill>
+                      <a:prstDash val="solid"/>
+                      <a:round/>
+                      <a:headEnd type="none" w="med" len="med"/>
+                      <a:tailEnd type="none" w="med" len="med"/>
+                    </a:lnB>
+                    <a:solidFill>
+                      <a:srgbClr val="F4F7F8"/>
+                    </a:solidFill>
+                  </a:tcPr>
+                </a:tc>
+                <a:tc>
+                  <a:txBody>
+                    <a:bodyPr/>
+                    <a:lstStyle/>
+                    <a:p>
+                      <a:pPr indent="0" marL="0">
+                        <a:buNone/>
+                      </a:pPr>
+                      <a:r>
+                        <a:rPr lang="en-US" sz="1400" dirty="0">
+                          <a:solidFill>
+                            <a:srgbClr val="1F2A37"/>
+                          </a:solidFill>
+                          <a:latin typeface="Calibri" pitchFamily="34" charset="0"/>
+                          <a:ea typeface="Calibri" pitchFamily="34" charset="-122"/>
+                          <a:cs typeface="Calibri" pitchFamily="34" charset="-120"/>
+                        </a:rPr>
+                        <a:t>Ajustar a distribuição de renda e riqueza</a:t>
+                      </a:r>
+                      <a:endParaRPr lang="en-US" sz="1400" dirty="0">
+                        <a:latin typeface="Calibri" charset="0"/>
+                        <a:ea typeface="Calibri" charset="0"/>
+                        <a:cs typeface="Calibri" charset="0"/>
+                      </a:endParaRPr>
+                    </a:p>
+                  </a:txBody>
+                  <a:tcPr marL="50800" marR="50800" marT="50800" marB="50800" anchor="ctr">
+                    <a:lnL w="9525" cap="flat" cmpd="sng" algn="ctr">
+                      <a:solidFill>
+                        <a:srgbClr val="DCD5C1"/>
+                      </a:solidFill>
+                      <a:prstDash val="solid"/>
+                      <a:round/>
+                      <a:headEnd type="none" w="med" len="med"/>
+                      <a:tailEnd type="none" w="med" len="med"/>
+                    </a:lnL>
+                    <a:lnR w="9525" cap="flat" cmpd="sng" algn="ctr">
+                      <a:solidFill>
+                        <a:srgbClr val="DCD5C1"/>
+                      </a:solidFill>
+                      <a:prstDash val="solid"/>
+                      <a:round/>
+                      <a:headEnd type="none" w="med" len="med"/>
+                      <a:tailEnd type="none" w="med" len="med"/>
+                    </a:lnR>
+                    <a:lnT w="9525" cap="flat" cmpd="sng" algn="ctr">
+                      <a:solidFill>
+                        <a:srgbClr val="DCD5C1"/>
+                      </a:solidFill>
+                      <a:prstDash val="solid"/>
+                      <a:round/>
+                      <a:headEnd type="none" w="med" len="med"/>
+                      <a:tailEnd type="none" w="med" len="med"/>
+                    </a:lnT>
+                    <a:lnB w="9525" cap="flat" cmpd="sng" algn="ctr">
+                      <a:solidFill>
+                        <a:srgbClr val="DCD5C1"/>
+                      </a:solidFill>
+                      <a:prstDash val="solid"/>
+                      <a:round/>
+                      <a:headEnd type="none" w="med" len="med"/>
+                      <a:tailEnd type="none" w="med" len="med"/>
+                    </a:lnB>
+                    <a:solidFill>
+                      <a:srgbClr val="F4F7F8"/>
+                    </a:solidFill>
+                  </a:tcPr>
+                </a:tc>
+                <a:tc>
+                  <a:txBody>
+                    <a:bodyPr/>
+                    <a:lstStyle/>
+                    <a:p>
+                      <a:pPr indent="0" marL="0">
+                        <a:buNone/>
+                      </a:pPr>
+                      <a:r>
+                        <a:rPr lang="en-US" sz="1400" dirty="0">
+                          <a:solidFill>
+                            <a:srgbClr val="1F2A37"/>
+                          </a:solidFill>
+                          <a:latin typeface="Calibri" pitchFamily="34" charset="0"/>
+                          <a:ea typeface="Calibri" pitchFamily="34" charset="-122"/>
+                          <a:cs typeface="Calibri" pitchFamily="34" charset="-120"/>
+                        </a:rPr>
+                        <a:t>Tributação progressiva, Bolsa Família, BPC, previdência</a:t>
+                      </a:r>
+                      <a:endParaRPr lang="en-US" sz="1400" dirty="0">
+                        <a:latin typeface="Calibri" charset="0"/>
+                        <a:ea typeface="Calibri" charset="0"/>
+                        <a:cs typeface="Calibri" charset="0"/>
+                      </a:endParaRPr>
+                    </a:p>
+                  </a:txBody>
+                  <a:tcPr marL="50800" marR="50800" marT="50800" marB="50800" anchor="ctr">
+                    <a:lnL w="9525" cap="flat" cmpd="sng" algn="ctr">
+                      <a:solidFill>
+                        <a:srgbClr val="DCD5C1"/>
+                      </a:solidFill>
+                      <a:prstDash val="solid"/>
+                      <a:round/>
+                      <a:headEnd type="none" w="med" len="med"/>
+                      <a:tailEnd type="none" w="med" len="med"/>
+                    </a:lnL>
+                    <a:lnR w="9525" cap="flat" cmpd="sng" algn="ctr">
+                      <a:solidFill>
+                        <a:srgbClr val="DCD5C1"/>
+                      </a:solidFill>
+                      <a:prstDash val="solid"/>
+                      <a:round/>
+                      <a:headEnd type="none" w="med" len="med"/>
+                      <a:tailEnd type="none" w="med" len="med"/>
+                    </a:lnR>
+                    <a:lnT w="9525" cap="flat" cmpd="sng" algn="ctr">
+                      <a:solidFill>
+                        <a:srgbClr val="DCD5C1"/>
+                      </a:solidFill>
+                      <a:prstDash val="solid"/>
+                      <a:round/>
+                      <a:headEnd type="none" w="med" len="med"/>
+                      <a:tailEnd type="none" w="med" len="med"/>
+                    </a:lnT>
+                    <a:lnB w="9525" cap="flat" cmpd="sng" algn="ctr">
+                      <a:solidFill>
+                        <a:srgbClr val="DCD5C1"/>
+                      </a:solidFill>
+                      <a:prstDash val="solid"/>
+                      <a:round/>
+                      <a:headEnd type="none" w="med" len="med"/>
+                      <a:tailEnd type="none" w="med" len="med"/>
+                    </a:lnB>
+                    <a:solidFill>
+                      <a:srgbClr val="F4F7F8"/>
+                    </a:solidFill>
+                  </a:tcPr>
+                </a:tc>
+              </a:tr>
+              <a:tr h="0">
+                <a:tc>
+                  <a:txBody>
+                    <a:bodyPr/>
+                    <a:lstStyle/>
+                    <a:p>
+                      <a:pPr indent="0" marL="0">
+                        <a:buNone/>
+                      </a:pPr>
+                      <a:r>
+                        <a:rPr lang="en-US" sz="1400" b="1" dirty="0">
+                          <a:solidFill>
+                            <a:srgbClr val="1F2A37"/>
+                          </a:solidFill>
+                          <a:latin typeface="Calibri" pitchFamily="34" charset="0"/>
+                          <a:ea typeface="Calibri" pitchFamily="34" charset="-122"/>
+                          <a:cs typeface="Calibri" pitchFamily="34" charset="-120"/>
+                        </a:rPr>
+                        <a:t>Estabilizadora</a:t>
+                      </a:r>
+                      <a:endParaRPr lang="en-US" sz="1400" dirty="0">
+                        <a:latin typeface="Calibri" charset="0"/>
+                        <a:ea typeface="Calibri" charset="0"/>
+                        <a:cs typeface="Calibri" charset="0"/>
+                      </a:endParaRPr>
+                    </a:p>
+                  </a:txBody>
+                  <a:tcPr marL="50800" marR="50800" marT="50800" marB="50800" anchor="ctr">
+                    <a:lnL w="9525" cap="flat" cmpd="sng" algn="ctr">
+                      <a:solidFill>
+                        <a:srgbClr val="DCD5C1"/>
+                      </a:solidFill>
+                      <a:prstDash val="solid"/>
+                      <a:round/>
+                      <a:headEnd type="none" w="med" len="med"/>
+                      <a:tailEnd type="none" w="med" len="med"/>
+                    </a:lnL>
+                    <a:lnR w="9525" cap="flat" cmpd="sng" algn="ctr">
+                      <a:solidFill>
+                        <a:srgbClr val="DCD5C1"/>
+                      </a:solidFill>
+                      <a:prstDash val="solid"/>
+                      <a:round/>
+                      <a:headEnd type="none" w="med" len="med"/>
+                      <a:tailEnd type="none" w="med" len="med"/>
+                    </a:lnR>
+                    <a:lnT w="9525" cap="flat" cmpd="sng" algn="ctr">
+                      <a:solidFill>
+                        <a:srgbClr val="DCD5C1"/>
+                      </a:solidFill>
+                      <a:prstDash val="solid"/>
+                      <a:round/>
+                      <a:headEnd type="none" w="med" len="med"/>
+                      <a:tailEnd type="none" w="med" len="med"/>
+                    </a:lnT>
+                    <a:lnB w="9525" cap="flat" cmpd="sng" algn="ctr">
+                      <a:solidFill>
+                        <a:srgbClr val="DCD5C1"/>
+                      </a:solidFill>
+                      <a:prstDash val="solid"/>
+                      <a:round/>
+                      <a:headEnd type="none" w="med" len="med"/>
+                      <a:tailEnd type="none" w="med" len="med"/>
+                    </a:lnB>
+                    <a:solidFill>
+                      <a:srgbClr val="FFFFFF"/>
+                    </a:solidFill>
+                  </a:tcPr>
+                </a:tc>
+                <a:tc>
+                  <a:txBody>
+                    <a:bodyPr/>
+                    <a:lstStyle/>
+                    <a:p>
+                      <a:pPr indent="0" marL="0">
+                        <a:buNone/>
+                      </a:pPr>
+                      <a:r>
+                        <a:rPr lang="en-US" sz="1400" dirty="0">
+                          <a:solidFill>
+                            <a:srgbClr val="1F2A37"/>
+                          </a:solidFill>
+                          <a:latin typeface="Calibri" pitchFamily="34" charset="0"/>
+                          <a:ea typeface="Calibri" pitchFamily="34" charset="-122"/>
+                          <a:cs typeface="Calibri" pitchFamily="34" charset="-120"/>
+                        </a:rPr>
+                        <a:t>Manter emprego, estabilidade de preços e crescimento</a:t>
+                      </a:r>
+                      <a:endParaRPr lang="en-US" sz="1400" dirty="0">
+                        <a:latin typeface="Calibri" charset="0"/>
+                        <a:ea typeface="Calibri" charset="0"/>
+                        <a:cs typeface="Calibri" charset="0"/>
+                      </a:endParaRPr>
+                    </a:p>
+                  </a:txBody>
+                  <a:tcPr marL="50800" marR="50800" marT="50800" marB="50800" anchor="ctr">
+                    <a:lnL w="9525" cap="flat" cmpd="sng" algn="ctr">
+                      <a:solidFill>
+                        <a:srgbClr val="DCD5C1"/>
+                      </a:solidFill>
+                      <a:prstDash val="solid"/>
+                      <a:round/>
+                      <a:headEnd type="none" w="med" len="med"/>
+                      <a:tailEnd type="none" w="med" len="med"/>
+                    </a:lnL>
+                    <a:lnR w="9525" cap="flat" cmpd="sng" algn="ctr">
+                      <a:solidFill>
+                        <a:srgbClr val="DCD5C1"/>
+                      </a:solidFill>
+                      <a:prstDash val="solid"/>
+                      <a:round/>
+                      <a:headEnd type="none" w="med" len="med"/>
+                      <a:tailEnd type="none" w="med" len="med"/>
+                    </a:lnR>
+                    <a:lnT w="9525" cap="flat" cmpd="sng" algn="ctr">
+                      <a:solidFill>
+                        <a:srgbClr val="DCD5C1"/>
+                      </a:solidFill>
+                      <a:prstDash val="solid"/>
+                      <a:round/>
+                      <a:headEnd type="none" w="med" len="med"/>
+                      <a:tailEnd type="none" w="med" len="med"/>
+                    </a:lnT>
+                    <a:lnB w="9525" cap="flat" cmpd="sng" algn="ctr">
+                      <a:solidFill>
+                        <a:srgbClr val="DCD5C1"/>
+                      </a:solidFill>
+                      <a:prstDash val="solid"/>
+                      <a:round/>
+                      <a:headEnd type="none" w="med" len="med"/>
+                      <a:tailEnd type="none" w="med" len="med"/>
+                    </a:lnB>
+                    <a:solidFill>
+                      <a:srgbClr val="FFFFFF"/>
+                    </a:solidFill>
+                  </a:tcPr>
+                </a:tc>
+                <a:tc>
+                  <a:txBody>
+                    <a:bodyPr/>
+                    <a:lstStyle/>
+                    <a:p>
+                      <a:pPr indent="0" marL="0">
+                        <a:buNone/>
+                      </a:pPr>
+                      <a:r>
+                        <a:rPr lang="en-US" sz="1400" dirty="0">
+                          <a:solidFill>
+                            <a:srgbClr val="1F2A37"/>
+                          </a:solidFill>
+                          <a:latin typeface="Calibri" pitchFamily="34" charset="0"/>
+                          <a:ea typeface="Calibri" pitchFamily="34" charset="-122"/>
+                          <a:cs typeface="Calibri" pitchFamily="34" charset="-120"/>
+                        </a:rPr>
+                        <a:t>Políticas fiscal e monetária</a:t>
+                      </a:r>
+                      <a:endParaRPr lang="en-US" sz="1400" dirty="0">
+                        <a:latin typeface="Calibri" charset="0"/>
+                        <a:ea typeface="Calibri" charset="0"/>
+                        <a:cs typeface="Calibri" charset="0"/>
+                      </a:endParaRPr>
+                    </a:p>
+                  </a:txBody>
+                  <a:tcPr marL="50800" marR="50800" marT="50800" marB="50800" anchor="ctr">
+                    <a:lnL w="9525" cap="flat" cmpd="sng" algn="ctr">
+                      <a:solidFill>
+                        <a:srgbClr val="DCD5C1"/>
+                      </a:solidFill>
+                      <a:prstDash val="solid"/>
+                      <a:round/>
+                      <a:headEnd type="none" w="med" len="med"/>
+                      <a:tailEnd type="none" w="med" len="med"/>
+                    </a:lnL>
+                    <a:lnR w="9525" cap="flat" cmpd="sng" algn="ctr">
+                      <a:solidFill>
+                        <a:srgbClr val="DCD5C1"/>
+                      </a:solidFill>
+                      <a:prstDash val="solid"/>
+                      <a:round/>
+                      <a:headEnd type="none" w="med" len="med"/>
+                      <a:tailEnd type="none" w="med" len="med"/>
+                    </a:lnR>
+                    <a:lnT w="9525" cap="flat" cmpd="sng" algn="ctr">
+                      <a:solidFill>
+                        <a:srgbClr val="DCD5C1"/>
+                      </a:solidFill>
+                      <a:prstDash val="solid"/>
+                      <a:round/>
+                      <a:headEnd type="none" w="med" len="med"/>
+                      <a:tailEnd type="none" w="med" len="med"/>
+                    </a:lnT>
+                    <a:lnB w="9525" cap="flat" cmpd="sng" algn="ctr">
+                      <a:solidFill>
+                        <a:srgbClr val="DCD5C1"/>
+                      </a:solidFill>
+                      <a:prstDash val="solid"/>
+                      <a:round/>
+                      <a:headEnd type="none" w="med" len="med"/>
+                      <a:tailEnd type="none" w="med" len="med"/>
+                    </a:lnB>
+                    <a:solidFill>
+                      <a:srgbClr val="FFFFFF"/>
+                    </a:solidFill>
+                  </a:tcPr>
+                </a:tc>
+              </a:tr>
+            </a:tbl>
+          </a:graphicData>
+        </a:graphic>
+      </p:graphicFrame>
+      <p:sp>
+        <p:nvSpPr>
+          <p:cNvPr id="5" name="Text 2"/>
+          <p:cNvSpPr txBox="1"/>
+          <p:nvPr/>
+        </p:nvSpPr>
+        <p:spPr>
+          <a:xfrm>
+            <a:off x="685800" y="3611880"/>
+            <a:ext cx="7772400" cy="640080"/>
           </a:xfrm>
           <a:prstGeom prst="roundRect">
             <a:avLst>
-              <a:gd name="adj" fmla="val 2727"/>
+              <a:gd name="adj" fmla="val 11429"/>
             </a:avLst>
           </a:prstGeom>
           <a:solidFill>
-            <a:srgbClr val="FFFFFF"/>
-          </a:solidFill>
-          <a:ln w="12700">
-            <a:solidFill>
-              <a:srgbClr val="DCD5C1"/>
-            </a:solidFill>
-            <a:prstDash val="solid"/>
-          </a:ln>
-        </p:spPr>
-      </p:sp>
-      <p:sp>
-        <p:nvSpPr>
-          <p:cNvPr id="5" name="Shape 3"/>
-          <p:cNvSpPr/>
-          <p:nvPr/>
-        </p:nvSpPr>
-        <p:spPr>
-          <a:xfrm>
-            <a:off x="822960" y="1481328"/>
-            <a:ext cx="457200" cy="457200"/>
-          </a:xfrm>
-          <a:prstGeom prst="roundRect">
-            <a:avLst>
-              <a:gd name="adj" fmla="val 16000"/>
-            </a:avLst>
-          </a:prstGeom>
-          <a:solidFill>
-            <a:srgbClr val="13294B"/>
+            <a:srgbClr val="E6F2F0"/>
           </a:solidFill>
           <a:ln/>
         </p:spPr>
-      </p:sp>
-      <p:pic>
-        <p:nvPicPr>
-          <p:cNvPr id="6" name="Image 0" descr="/tmp/claude-0/-home-user-zero-claude/d7e33190-c541-582c-a7cc-1156817732ce/scratchpad/deck/assets/icon_FaRoad.png">    </p:cNvPr>
-          <p:cNvPicPr>
-            <a:picLocks noChangeAspect="1"/>
-          </p:cNvPicPr>
-          <p:nvPr/>
-        </p:nvPicPr>
-        <p:blipFill>
-          <a:blip r:embed="rId2"/>
-          <a:stretch>
-            <a:fillRect/>
-          </a:stretch>
-        </p:blipFill>
-        <p:spPr>
-          <a:xfrm>
-            <a:off x="923544" y="1581912"/>
-            <a:ext cx="256032" cy="256032"/>
-          </a:xfrm>
-          <a:prstGeom prst="rect">
-            <a:avLst/>
-          </a:prstGeom>
-        </p:spPr>
-      </p:pic>
-      <p:sp>
-        <p:nvSpPr>
-          <p:cNvPr id="7" name="Text 4"/>
-          <p:cNvSpPr txBox="1"/>
-          <p:nvPr/>
-        </p:nvSpPr>
-        <p:spPr>
-          <a:xfrm>
-            <a:off x="1371600" y="1399032"/>
-            <a:ext cx="1679448" cy="1865376"/>
-          </a:xfrm>
-          <a:prstGeom prst="rect">
-            <a:avLst/>
-          </a:prstGeom>
-          <a:noFill/>
-          <a:ln/>
-        </p:spPr>
-        <p:txBody>
-          <a:bodyPr wrap="square" lIns="38100" tIns="38100" rIns="38100" bIns="38100" rtlCol="0" anchor="t"/>
-          <a:lstStyle/>
-          <a:p>
-            <a:pPr algn="l" indent="0" marL="0">
-              <a:lnSpc>
-                <a:spcPct val="100000"/>
-              </a:lnSpc>
-              <a:spcAft>
-                <a:spcPts val="300"/>
-              </a:spcAft>
-              <a:buNone/>
-            </a:pPr>
-            <a:r>
-              <a:rPr lang="en-US" sz="1600" b="1" dirty="0">
+        <p:txBody>
+          <a:bodyPr wrap="square" lIns="127000" tIns="127000" rIns="127000" bIns="127000" rtlCol="0" anchor="ctr"/>
+          <a:lstStyle/>
+          <a:p>
+            <a:pPr algn="ctr" indent="0" marL="0">
+              <a:lnSpc>
+                <a:spcPct val="100000"/>
+              </a:lnSpc>
+              <a:buNone/>
+            </a:pPr>
+            <a:r>
+              <a:rPr lang="en-US" sz="1400" dirty="0">
                 <a:solidFill>
                   <a:srgbClr val="13294B"/>
                 </a:solidFill>
@@ -14520,311 +15796,15 @@
                 <a:ea typeface="Calibri" pitchFamily="34" charset="-122"/>
                 <a:cs typeface="Calibri" pitchFamily="34" charset="-120"/>
               </a:rPr>
-              <a:t>Alocativa</a:t>
-            </a:r>
-            <a:endParaRPr lang="en-US" sz="1600" dirty="0"/>
-          </a:p>
-          <a:p>
-            <a:pPr algn="l" indent="0" marL="0">
-              <a:lnSpc>
-                <a:spcPct val="100000"/>
-              </a:lnSpc>
-              <a:buNone/>
-            </a:pPr>
-            <a:r>
-              <a:rPr lang="en-US" sz="1400" dirty="0">
-                <a:solidFill>
-                  <a:srgbClr val="1F2A37"/>
-                </a:solidFill>
-                <a:latin typeface="Calibri" pitchFamily="34" charset="0"/>
-                <a:ea typeface="Calibri" pitchFamily="34" charset="-122"/>
-                <a:cs typeface="Calibri" pitchFamily="34" charset="-120"/>
-              </a:rPr>
-              <a:t>Ofertar bens que o mercado não provê: segurança, saneamento, infraestrutura.</a:t>
-            </a:r>
-            <a:endParaRPr lang="en-US" sz="1600" dirty="0"/>
-          </a:p>
-        </p:txBody>
-      </p:sp>
-      <p:sp>
-        <p:nvSpPr>
-          <p:cNvPr id="8" name="Shape 5"/>
-          <p:cNvSpPr/>
-          <p:nvPr/>
-        </p:nvSpPr>
-        <p:spPr>
-          <a:xfrm>
-            <a:off x="3343656" y="1325880"/>
-            <a:ext cx="2456688" cy="2011680"/>
-          </a:xfrm>
-          <a:prstGeom prst="roundRect">
-            <a:avLst>
-              <a:gd name="adj" fmla="val 2727"/>
-            </a:avLst>
-          </a:prstGeom>
-          <a:solidFill>
-            <a:srgbClr val="FFFFFF"/>
-          </a:solidFill>
-          <a:ln w="12700">
-            <a:solidFill>
-              <a:srgbClr val="DCD5C1"/>
-            </a:solidFill>
-            <a:prstDash val="solid"/>
-          </a:ln>
-        </p:spPr>
-      </p:sp>
-      <p:sp>
-        <p:nvSpPr>
-          <p:cNvPr id="9" name="Shape 6"/>
-          <p:cNvSpPr/>
-          <p:nvPr/>
-        </p:nvSpPr>
-        <p:spPr>
-          <a:xfrm>
-            <a:off x="3480816" y="1481328"/>
-            <a:ext cx="457200" cy="457200"/>
-          </a:xfrm>
-          <a:prstGeom prst="roundRect">
-            <a:avLst>
-              <a:gd name="adj" fmla="val 16000"/>
-            </a:avLst>
-          </a:prstGeom>
-          <a:solidFill>
-            <a:srgbClr val="13294B"/>
-          </a:solidFill>
-          <a:ln/>
-        </p:spPr>
-      </p:sp>
-      <p:pic>
-        <p:nvPicPr>
-          <p:cNvPr id="10" name="Image 1" descr="/tmp/claude-0/-home-user-zero-claude/d7e33190-c541-582c-a7cc-1156817732ce/scratchpad/deck/assets/icon_FaHandHoldingUsd.png">    </p:cNvPr>
-          <p:cNvPicPr>
-            <a:picLocks noChangeAspect="1"/>
-          </p:cNvPicPr>
-          <p:nvPr/>
-        </p:nvPicPr>
-        <p:blipFill>
-          <a:blip r:embed="rId3"/>
-          <a:stretch>
-            <a:fillRect/>
-          </a:stretch>
-        </p:blipFill>
-        <p:spPr>
-          <a:xfrm>
-            <a:off x="3581400" y="1581912"/>
-            <a:ext cx="256032" cy="256032"/>
-          </a:xfrm>
-          <a:prstGeom prst="rect">
-            <a:avLst/>
-          </a:prstGeom>
-        </p:spPr>
-      </p:pic>
-      <p:sp>
-        <p:nvSpPr>
-          <p:cNvPr id="11" name="Text 7"/>
-          <p:cNvSpPr txBox="1"/>
-          <p:nvPr/>
-        </p:nvSpPr>
-        <p:spPr>
-          <a:xfrm>
-            <a:off x="4029456" y="1399032"/>
-            <a:ext cx="1679448" cy="1865376"/>
-          </a:xfrm>
-          <a:prstGeom prst="rect">
-            <a:avLst/>
-          </a:prstGeom>
-          <a:noFill/>
-          <a:ln/>
-        </p:spPr>
-        <p:txBody>
-          <a:bodyPr wrap="square" lIns="38100" tIns="38100" rIns="38100" bIns="38100" rtlCol="0" anchor="t"/>
-          <a:lstStyle/>
-          <a:p>
-            <a:pPr algn="l" indent="0" marL="0">
-              <a:lnSpc>
-                <a:spcPct val="100000"/>
-              </a:lnSpc>
-              <a:spcAft>
-                <a:spcPts val="300"/>
-              </a:spcAft>
-              <a:buNone/>
-            </a:pPr>
-            <a:r>
-              <a:rPr lang="en-US" sz="1600" b="1" dirty="0">
-                <a:solidFill>
-                  <a:srgbClr val="13294B"/>
-                </a:solidFill>
-                <a:latin typeface="Calibri" pitchFamily="34" charset="0"/>
-                <a:ea typeface="Calibri" pitchFamily="34" charset="-122"/>
-                <a:cs typeface="Calibri" pitchFamily="34" charset="-120"/>
-              </a:rPr>
-              <a:t>Distributiva</a:t>
-            </a:r>
-            <a:endParaRPr lang="en-US" sz="1600" dirty="0"/>
-          </a:p>
-          <a:p>
-            <a:pPr algn="l" indent="0" marL="0">
-              <a:lnSpc>
-                <a:spcPct val="100000"/>
-              </a:lnSpc>
-              <a:buNone/>
-            </a:pPr>
-            <a:r>
-              <a:rPr lang="en-US" sz="1400" dirty="0">
-                <a:solidFill>
-                  <a:srgbClr val="1F2A37"/>
-                </a:solidFill>
-                <a:latin typeface="Calibri" pitchFamily="34" charset="0"/>
-                <a:ea typeface="Calibri" pitchFamily="34" charset="-122"/>
-                <a:cs typeface="Calibri" pitchFamily="34" charset="-120"/>
-              </a:rPr>
-              <a:t>Ajustar a distribuição da renda: tributação progressiva, Bolsa Família, BPC.</a:t>
-            </a:r>
-            <a:endParaRPr lang="en-US" sz="1600" dirty="0"/>
-          </a:p>
-        </p:txBody>
-      </p:sp>
-      <p:sp>
-        <p:nvSpPr>
-          <p:cNvPr id="12" name="Shape 8"/>
-          <p:cNvSpPr/>
-          <p:nvPr/>
-        </p:nvSpPr>
-        <p:spPr>
-          <a:xfrm>
-            <a:off x="6001512" y="1325880"/>
-            <a:ext cx="2456688" cy="2011680"/>
-          </a:xfrm>
-          <a:prstGeom prst="roundRect">
-            <a:avLst>
-              <a:gd name="adj" fmla="val 2727"/>
-            </a:avLst>
-          </a:prstGeom>
-          <a:solidFill>
-            <a:srgbClr val="FFFFFF"/>
-          </a:solidFill>
-          <a:ln w="12700">
-            <a:solidFill>
-              <a:srgbClr val="DCD5C1"/>
-            </a:solidFill>
-            <a:prstDash val="solid"/>
-          </a:ln>
-        </p:spPr>
-      </p:sp>
-      <p:sp>
-        <p:nvSpPr>
-          <p:cNvPr id="13" name="Shape 9"/>
-          <p:cNvSpPr/>
-          <p:nvPr/>
-        </p:nvSpPr>
-        <p:spPr>
-          <a:xfrm>
-            <a:off x="6138672" y="1481328"/>
-            <a:ext cx="457200" cy="457200"/>
-          </a:xfrm>
-          <a:prstGeom prst="roundRect">
-            <a:avLst>
-              <a:gd name="adj" fmla="val 16000"/>
-            </a:avLst>
-          </a:prstGeom>
-          <a:solidFill>
-            <a:srgbClr val="13294B"/>
-          </a:solidFill>
-          <a:ln/>
-        </p:spPr>
-      </p:sp>
-      <p:pic>
-        <p:nvPicPr>
-          <p:cNvPr id="14" name="Image 2" descr="/tmp/claude-0/-home-user-zero-claude/d7e33190-c541-582c-a7cc-1156817732ce/scratchpad/deck/assets/icon_FaChartLine.png">    </p:cNvPr>
-          <p:cNvPicPr>
-            <a:picLocks noChangeAspect="1"/>
-          </p:cNvPicPr>
-          <p:nvPr/>
-        </p:nvPicPr>
-        <p:blipFill>
-          <a:blip r:embed="rId4"/>
-          <a:stretch>
-            <a:fillRect/>
-          </a:stretch>
-        </p:blipFill>
-        <p:spPr>
-          <a:xfrm>
-            <a:off x="6239256" y="1581912"/>
-            <a:ext cx="256032" cy="256032"/>
-          </a:xfrm>
-          <a:prstGeom prst="rect">
-            <a:avLst/>
-          </a:prstGeom>
-        </p:spPr>
-      </p:pic>
-      <p:sp>
-        <p:nvSpPr>
-          <p:cNvPr id="15" name="Text 10"/>
-          <p:cNvSpPr txBox="1"/>
-          <p:nvPr/>
-        </p:nvSpPr>
-        <p:spPr>
-          <a:xfrm>
-            <a:off x="6687312" y="1399032"/>
-            <a:ext cx="1679448" cy="1865376"/>
-          </a:xfrm>
-          <a:prstGeom prst="rect">
-            <a:avLst/>
-          </a:prstGeom>
-          <a:noFill/>
-          <a:ln/>
-        </p:spPr>
-        <p:txBody>
-          <a:bodyPr wrap="square" lIns="38100" tIns="38100" rIns="38100" bIns="38100" rtlCol="0" anchor="t"/>
-          <a:lstStyle/>
-          <a:p>
-            <a:pPr algn="l" indent="0" marL="0">
-              <a:lnSpc>
-                <a:spcPct val="100000"/>
-              </a:lnSpc>
-              <a:spcAft>
-                <a:spcPts val="300"/>
-              </a:spcAft>
-              <a:buNone/>
-            </a:pPr>
-            <a:r>
-              <a:rPr lang="en-US" sz="1600" b="1" dirty="0">
-                <a:solidFill>
-                  <a:srgbClr val="13294B"/>
-                </a:solidFill>
-                <a:latin typeface="Calibri" pitchFamily="34" charset="0"/>
-                <a:ea typeface="Calibri" pitchFamily="34" charset="-122"/>
-                <a:cs typeface="Calibri" pitchFamily="34" charset="-120"/>
-              </a:rPr>
-              <a:t>Estabilizadora</a:t>
-            </a:r>
-            <a:endParaRPr lang="en-US" sz="1600" dirty="0"/>
-          </a:p>
-          <a:p>
-            <a:pPr algn="l" indent="0" marL="0">
-              <a:lnSpc>
-                <a:spcPct val="100000"/>
-              </a:lnSpc>
-              <a:buNone/>
-            </a:pPr>
-            <a:r>
-              <a:rPr lang="en-US" sz="1400" dirty="0">
-                <a:solidFill>
-                  <a:srgbClr val="1F2A37"/>
-                </a:solidFill>
-                <a:latin typeface="Calibri" pitchFamily="34" charset="0"/>
-                <a:ea typeface="Calibri" pitchFamily="34" charset="-122"/>
-                <a:cs typeface="Calibri" pitchFamily="34" charset="-120"/>
-              </a:rPr>
-              <a:t>Emprego, preços estáveis e crescimento, por meio das políticas fiscal e monetária.</a:t>
-            </a:r>
-            <a:endParaRPr lang="en-US" sz="1600" dirty="0"/>
-          </a:p>
-        </p:txBody>
-      </p:sp>
-      <p:sp>
-        <p:nvSpPr>
-          <p:cNvPr id="16" name="Text 11"/>
+              <a:t>A mesma política pode cumprir mais de uma função: o SUS, por exemplo, é alocativo e distributivo.</a:t>
+            </a:r>
+            <a:endParaRPr lang="en-US" sz="1400" dirty="0"/>
+          </a:p>
+        </p:txBody>
+      </p:sp>
+      <p:sp>
+        <p:nvSpPr>
+          <p:cNvPr id="6" name="Text 3"/>
           <p:cNvSpPr txBox="1"/>
           <p:nvPr/>
         </p:nvSpPr>
@@ -26038,16 +27018,17 @@
           </p:nvPr>
         </p:nvGraphicFramePr>
         <p:xfrm>
-          <a:off x="685800" y="1188720"/>
-          <a:ext cx="3794760" cy="914400"/>
+          <a:off x="685800" y="1143000"/>
+          <a:ext cx="7772400" cy="914400"/>
         </p:xfrm>
         <a:graphic>
           <a:graphicData uri="http://schemas.openxmlformats.org/drawingml/2006/table">
             <a:tbl>
               <a:tblPr/>
               <a:tblGrid>
-                <a:gridCol w="2697480"/>
-                <a:gridCol w="1097280"/>
+                <a:gridCol w="2377440"/>
+                <a:gridCol w="3291840"/>
+                <a:gridCol w="2103120"/>
               </a:tblGrid>
               <a:tr h="0">
                 <a:tc>
@@ -26067,7 +27048,75 @@
                           <a:ea typeface="Calibri" pitchFamily="34" charset="-122"/>
                           <a:cs typeface="Calibri" pitchFamily="34" charset="-120"/>
                         </a:rPr>
-                        <a:t>Fator (o que é)</a:t>
+                        <a:t>Fator de produção</a:t>
+                      </a:r>
+                      <a:endParaRPr lang="en-US" sz="1250" dirty="0">
+                        <a:latin typeface="Calibri" charset="0"/>
+                        <a:ea typeface="Calibri" charset="0"/>
+                        <a:cs typeface="Calibri" charset="0"/>
+                      </a:endParaRPr>
+                    </a:p>
+                  </a:txBody>
+                  <a:tcPr marL="50800" marR="50800" marT="50800" marB="50800" anchor="ctr">
+                    <a:lnL w="9525" cap="flat" cmpd="sng" algn="ctr">
+                      <a:solidFill>
+                        <a:srgbClr val="DCD5C1"/>
+                      </a:solidFill>
+                      <a:prstDash val="solid"/>
+                      <a:round/>
+                      <a:headEnd type="none" w="med" len="med"/>
+                      <a:tailEnd type="none" w="med" len="med"/>
+                    </a:lnL>
+                    <a:lnR w="9525" cap="flat" cmpd="sng" algn="ctr">
+                      <a:solidFill>
+                        <a:srgbClr val="DCD5C1"/>
+                      </a:solidFill>
+                      <a:prstDash val="solid"/>
+                      <a:round/>
+                      <a:headEnd type="none" w="med" len="med"/>
+                      <a:tailEnd type="none" w="med" len="med"/>
+                    </a:lnR>
+                    <a:lnT w="9525" cap="flat" cmpd="sng" algn="ctr">
+                      <a:solidFill>
+                        <a:srgbClr val="DCD5C1"/>
+                      </a:solidFill>
+                      <a:prstDash val="solid"/>
+                      <a:round/>
+                      <a:headEnd type="none" w="med" len="med"/>
+                      <a:tailEnd type="none" w="med" len="med"/>
+                    </a:lnT>
+                    <a:lnB w="9525" cap="flat" cmpd="sng" algn="ctr">
+                      <a:solidFill>
+                        <a:srgbClr val="DCD5C1"/>
+                      </a:solidFill>
+                      <a:prstDash val="solid"/>
+                      <a:round/>
+                      <a:headEnd type="none" w="med" len="med"/>
+                      <a:tailEnd type="none" w="med" len="med"/>
+                    </a:lnB>
+                    <a:solidFill>
+                      <a:srgbClr val="13294B"/>
+                    </a:solidFill>
+                  </a:tcPr>
+                </a:tc>
+                <a:tc>
+                  <a:txBody>
+                    <a:bodyPr/>
+                    <a:lstStyle/>
+                    <a:p>
+                      <a:pPr indent="0" marL="0">
+                        <a:buNone/>
+                      </a:pPr>
+                      <a:r>
+                        <a:rPr lang="en-US" sz="1250" b="1" dirty="0">
+                          <a:solidFill>
+                            <a:srgbClr val="FFFFFF"/>
+                          </a:solidFill>
+                          <a:latin typeface="Calibri" pitchFamily="34" charset="0"/>
+                          <a:ea typeface="Calibri" pitchFamily="34" charset="-122"/>
+                          <a:cs typeface="Calibri" pitchFamily="34" charset="-120"/>
+                        </a:rPr>
+                        <a:t>O que é</a:t>
                       </a:r>
                       <a:endParaRPr lang="en-US" sz="1250" dirty="0">
                         <a:latin typeface="Calibri" charset="0"/>
@@ -26197,7 +27246,7 @@
                         <a:buNone/>
                       </a:pPr>
                       <a:r>
-                        <a:rPr lang="en-US" sz="1250" dirty="0">
+                        <a:rPr lang="en-US" sz="1250" b="1" dirty="0">
                           <a:solidFill>
                             <a:srgbClr val="1F2A37"/>
                           </a:solidFill>
@@ -26205,7 +27254,7 @@
                           <a:ea typeface="Calibri" pitchFamily="34" charset="-122"/>
                           <a:cs typeface="Calibri" pitchFamily="34" charset="-120"/>
                         </a:rPr>
-                        <a:t>Terra: solo, água, minérios, florestas</a:t>
+                        <a:t>Terra (recursos naturais)</a:t>
                       </a:r>
                       <a:endParaRPr lang="en-US" sz="1250" dirty="0">
                         <a:latin typeface="Calibri" charset="0"/>
@@ -26273,7 +27322,75 @@
                           <a:ea typeface="Calibri" pitchFamily="34" charset="-122"/>
                           <a:cs typeface="Calibri" pitchFamily="34" charset="-120"/>
                         </a:rPr>
-                        <a:t>Aluguel</a:t>
+                        <a:t>Solo, água, minérios, florestas</a:t>
+                      </a:r>
+                      <a:endParaRPr lang="en-US" sz="1250" dirty="0">
+                        <a:latin typeface="Calibri" charset="0"/>
+                        <a:ea typeface="Calibri" charset="0"/>
+                        <a:cs typeface="Calibri" charset="0"/>
+                      </a:endParaRPr>
+                    </a:p>
+                  </a:txBody>
+                  <a:tcPr marL="50800" marR="50800" marT="50800" marB="50800" anchor="ctr">
+                    <a:lnL w="9525" cap="flat" cmpd="sng" algn="ctr">
+                      <a:solidFill>
+                        <a:srgbClr val="DCD5C1"/>
+                      </a:solidFill>
+                      <a:prstDash val="solid"/>
+                      <a:round/>
+                      <a:headEnd type="none" w="med" len="med"/>
+                      <a:tailEnd type="none" w="med" len="med"/>
+                    </a:lnL>
+                    <a:lnR w="9525" cap="flat" cmpd="sng" algn="ctr">
+                      <a:solidFill>
+                        <a:srgbClr val="DCD5C1"/>
+                      </a:solidFill>
+                      <a:prstDash val="solid"/>
+                      <a:round/>
+                      <a:headEnd type="none" w="med" len="med"/>
+                      <a:tailEnd type="none" w="med" len="med"/>
+                    </a:lnR>
+                    <a:lnT w="9525" cap="flat" cmpd="sng" algn="ctr">
+                      <a:solidFill>
+                        <a:srgbClr val="DCD5C1"/>
+                      </a:solidFill>
+                      <a:prstDash val="solid"/>
+                      <a:round/>
+                      <a:headEnd type="none" w="med" len="med"/>
+                      <a:tailEnd type="none" w="med" len="med"/>
+                    </a:lnT>
+                    <a:lnB w="9525" cap="flat" cmpd="sng" algn="ctr">
+                      <a:solidFill>
+                        <a:srgbClr val="DCD5C1"/>
+                      </a:solidFill>
+                      <a:prstDash val="solid"/>
+                      <a:round/>
+                      <a:headEnd type="none" w="med" len="med"/>
+                      <a:tailEnd type="none" w="med" len="med"/>
+                    </a:lnB>
+                    <a:solidFill>
+                      <a:srgbClr val="FFFFFF"/>
+                    </a:solidFill>
+                  </a:tcPr>
+                </a:tc>
+                <a:tc>
+                  <a:txBody>
+                    <a:bodyPr/>
+                    <a:lstStyle/>
+                    <a:p>
+                      <a:pPr indent="0" marL="0">
+                        <a:buNone/>
+                      </a:pPr>
+                      <a:r>
+                        <a:rPr lang="en-US" sz="1250" dirty="0">
+                          <a:solidFill>
+                            <a:srgbClr val="1F2A37"/>
+                          </a:solidFill>
+                          <a:latin typeface="Calibri" pitchFamily="34" charset="0"/>
+                          <a:ea typeface="Calibri" pitchFamily="34" charset="-122"/>
+                          <a:cs typeface="Calibri" pitchFamily="34" charset="-120"/>
+                        </a:rPr>
+                        <a:t>Aluguel (renda da terra)</a:t>
                       </a:r>
                       <a:endParaRPr lang="en-US" sz="1250" dirty="0">
                         <a:latin typeface="Calibri" charset="0"/>
@@ -26335,6 +27452,74 @@
                         <a:buNone/>
                       </a:pPr>
                       <a:r>
+                        <a:rPr lang="en-US" sz="1250" b="1" dirty="0">
+                          <a:solidFill>
+                            <a:srgbClr val="1F2A37"/>
+                          </a:solidFill>
+                          <a:latin typeface="Calibri" pitchFamily="34" charset="0"/>
+                          <a:ea typeface="Calibri" pitchFamily="34" charset="-122"/>
+                          <a:cs typeface="Calibri" pitchFamily="34" charset="-120"/>
+                        </a:rPr>
+                        <a:t>Trabalho</a:t>
+                      </a:r>
+                      <a:endParaRPr lang="en-US" sz="1250" dirty="0">
+                        <a:latin typeface="Calibri" charset="0"/>
+                        <a:ea typeface="Calibri" charset="0"/>
+                        <a:cs typeface="Calibri" charset="0"/>
+                      </a:endParaRPr>
+                    </a:p>
+                  </a:txBody>
+                  <a:tcPr marL="50800" marR="50800" marT="50800" marB="50800" anchor="ctr">
+                    <a:lnL w="9525" cap="flat" cmpd="sng" algn="ctr">
+                      <a:solidFill>
+                        <a:srgbClr val="DCD5C1"/>
+                      </a:solidFill>
+                      <a:prstDash val="solid"/>
+                      <a:round/>
+                      <a:headEnd type="none" w="med" len="med"/>
+                      <a:tailEnd type="none" w="med" len="med"/>
+                    </a:lnL>
+                    <a:lnR w="9525" cap="flat" cmpd="sng" algn="ctr">
+                      <a:solidFill>
+                        <a:srgbClr val="DCD5C1"/>
+                      </a:solidFill>
+                      <a:prstDash val="solid"/>
+                      <a:round/>
+                      <a:headEnd type="none" w="med" len="med"/>
+                      <a:tailEnd type="none" w="med" len="med"/>
+                    </a:lnR>
+                    <a:lnT w="9525" cap="flat" cmpd="sng" algn="ctr">
+                      <a:solidFill>
+                        <a:srgbClr val="DCD5C1"/>
+                      </a:solidFill>
+                      <a:prstDash val="solid"/>
+                      <a:round/>
+                      <a:headEnd type="none" w="med" len="med"/>
+                      <a:tailEnd type="none" w="med" len="med"/>
+                    </a:lnT>
+                    <a:lnB w="9525" cap="flat" cmpd="sng" algn="ctr">
+                      <a:solidFill>
+                        <a:srgbClr val="DCD5C1"/>
+                      </a:solidFill>
+                      <a:prstDash val="solid"/>
+                      <a:round/>
+                      <a:headEnd type="none" w="med" len="med"/>
+                      <a:tailEnd type="none" w="med" len="med"/>
+                    </a:lnB>
+                    <a:solidFill>
+                      <a:srgbClr val="F4F7F8"/>
+                    </a:solidFill>
+                  </a:tcPr>
+                </a:tc>
+                <a:tc>
+                  <a:txBody>
+                    <a:bodyPr/>
+                    <a:lstStyle/>
+                    <a:p>
+                      <a:pPr indent="0" marL="0">
+                        <a:buNone/>
+                      </a:pPr>
+                      <a:r>
                         <a:rPr lang="en-US" sz="1250" dirty="0">
                           <a:solidFill>
                             <a:srgbClr val="1F2A37"/>
@@ -26343,7 +27528,7 @@
                           <a:ea typeface="Calibri" pitchFamily="34" charset="-122"/>
                           <a:cs typeface="Calibri" pitchFamily="34" charset="-120"/>
                         </a:rPr>
-                        <a:t>Trabalho: esforço físico e intelectual</a:t>
+                        <a:t>Esforço humano, físico e intelectual</a:t>
                       </a:r>
                       <a:endParaRPr lang="en-US" sz="1250" dirty="0">
                         <a:latin typeface="Calibri" charset="0"/>
@@ -26473,6 +27658,74 @@
                         <a:buNone/>
                       </a:pPr>
                       <a:r>
+                        <a:rPr lang="en-US" sz="1250" b="1" dirty="0">
+                          <a:solidFill>
+                            <a:srgbClr val="1F2A37"/>
+                          </a:solidFill>
+                          <a:latin typeface="Calibri" pitchFamily="34" charset="0"/>
+                          <a:ea typeface="Calibri" pitchFamily="34" charset="-122"/>
+                          <a:cs typeface="Calibri" pitchFamily="34" charset="-120"/>
+                        </a:rPr>
+                        <a:t>Capital</a:t>
+                      </a:r>
+                      <a:endParaRPr lang="en-US" sz="1250" dirty="0">
+                        <a:latin typeface="Calibri" charset="0"/>
+                        <a:ea typeface="Calibri" charset="0"/>
+                        <a:cs typeface="Calibri" charset="0"/>
+                      </a:endParaRPr>
+                    </a:p>
+                  </a:txBody>
+                  <a:tcPr marL="50800" marR="50800" marT="50800" marB="50800" anchor="ctr">
+                    <a:lnL w="9525" cap="flat" cmpd="sng" algn="ctr">
+                      <a:solidFill>
+                        <a:srgbClr val="DCD5C1"/>
+                      </a:solidFill>
+                      <a:prstDash val="solid"/>
+                      <a:round/>
+                      <a:headEnd type="none" w="med" len="med"/>
+                      <a:tailEnd type="none" w="med" len="med"/>
+                    </a:lnL>
+                    <a:lnR w="9525" cap="flat" cmpd="sng" algn="ctr">
+                      <a:solidFill>
+                        <a:srgbClr val="DCD5C1"/>
+                      </a:solidFill>
+                      <a:prstDash val="solid"/>
+                      <a:round/>
+                      <a:headEnd type="none" w="med" len="med"/>
+                      <a:tailEnd type="none" w="med" len="med"/>
+                    </a:lnR>
+                    <a:lnT w="9525" cap="flat" cmpd="sng" algn="ctr">
+                      <a:solidFill>
+                        <a:srgbClr val="DCD5C1"/>
+                      </a:solidFill>
+                      <a:prstDash val="solid"/>
+                      <a:round/>
+                      <a:headEnd type="none" w="med" len="med"/>
+                      <a:tailEnd type="none" w="med" len="med"/>
+                    </a:lnT>
+                    <a:lnB w="9525" cap="flat" cmpd="sng" algn="ctr">
+                      <a:solidFill>
+                        <a:srgbClr val="DCD5C1"/>
+                      </a:solidFill>
+                      <a:prstDash val="solid"/>
+                      <a:round/>
+                      <a:headEnd type="none" w="med" len="med"/>
+                      <a:tailEnd type="none" w="med" len="med"/>
+                    </a:lnB>
+                    <a:solidFill>
+                      <a:srgbClr val="FFFFFF"/>
+                    </a:solidFill>
+                  </a:tcPr>
+                </a:tc>
+                <a:tc>
+                  <a:txBody>
+                    <a:bodyPr/>
+                    <a:lstStyle/>
+                    <a:p>
+                      <a:pPr indent="0" marL="0">
+                        <a:buNone/>
+                      </a:pPr>
+                      <a:r>
                         <a:rPr lang="en-US" sz="1250" dirty="0">
                           <a:solidFill>
                             <a:srgbClr val="1F2A37"/>
@@ -26481,7 +27734,7 @@
                           <a:ea typeface="Calibri" pitchFamily="34" charset="-122"/>
                           <a:cs typeface="Calibri" pitchFamily="34" charset="-120"/>
                         </a:rPr>
-                        <a:t>Capital: máquinas e instalações</a:t>
+                        <a:t>Máquinas, equipamentos, instalações</a:t>
                       </a:r>
                       <a:endParaRPr lang="en-US" sz="1250" dirty="0">
                         <a:latin typeface="Calibri" charset="0"/>
@@ -26611,6 +27864,74 @@
                         <a:buNone/>
                       </a:pPr>
                       <a:r>
+                        <a:rPr lang="en-US" sz="1250" b="1" dirty="0">
+                          <a:solidFill>
+                            <a:srgbClr val="1F2A37"/>
+                          </a:solidFill>
+                          <a:latin typeface="Calibri" pitchFamily="34" charset="0"/>
+                          <a:ea typeface="Calibri" pitchFamily="34" charset="-122"/>
+                          <a:cs typeface="Calibri" pitchFamily="34" charset="-120"/>
+                        </a:rPr>
+                        <a:t>Capacidade empresarial</a:t>
+                      </a:r>
+                      <a:endParaRPr lang="en-US" sz="1250" dirty="0">
+                        <a:latin typeface="Calibri" charset="0"/>
+                        <a:ea typeface="Calibri" charset="0"/>
+                        <a:cs typeface="Calibri" charset="0"/>
+                      </a:endParaRPr>
+                    </a:p>
+                  </a:txBody>
+                  <a:tcPr marL="50800" marR="50800" marT="50800" marB="50800" anchor="ctr">
+                    <a:lnL w="9525" cap="flat" cmpd="sng" algn="ctr">
+                      <a:solidFill>
+                        <a:srgbClr val="DCD5C1"/>
+                      </a:solidFill>
+                      <a:prstDash val="solid"/>
+                      <a:round/>
+                      <a:headEnd type="none" w="med" len="med"/>
+                      <a:tailEnd type="none" w="med" len="med"/>
+                    </a:lnL>
+                    <a:lnR w="9525" cap="flat" cmpd="sng" algn="ctr">
+                      <a:solidFill>
+                        <a:srgbClr val="DCD5C1"/>
+                      </a:solidFill>
+                      <a:prstDash val="solid"/>
+                      <a:round/>
+                      <a:headEnd type="none" w="med" len="med"/>
+                      <a:tailEnd type="none" w="med" len="med"/>
+                    </a:lnR>
+                    <a:lnT w="9525" cap="flat" cmpd="sng" algn="ctr">
+                      <a:solidFill>
+                        <a:srgbClr val="DCD5C1"/>
+                      </a:solidFill>
+                      <a:prstDash val="solid"/>
+                      <a:round/>
+                      <a:headEnd type="none" w="med" len="med"/>
+                      <a:tailEnd type="none" w="med" len="med"/>
+                    </a:lnT>
+                    <a:lnB w="9525" cap="flat" cmpd="sng" algn="ctr">
+                      <a:solidFill>
+                        <a:srgbClr val="DCD5C1"/>
+                      </a:solidFill>
+                      <a:prstDash val="solid"/>
+                      <a:round/>
+                      <a:headEnd type="none" w="med" len="med"/>
+                      <a:tailEnd type="none" w="med" len="med"/>
+                    </a:lnB>
+                    <a:solidFill>
+                      <a:srgbClr val="F4F7F8"/>
+                    </a:solidFill>
+                  </a:tcPr>
+                </a:tc>
+                <a:tc>
+                  <a:txBody>
+                    <a:bodyPr/>
+                    <a:lstStyle/>
+                    <a:p>
+                      <a:pPr indent="0" marL="0">
+                        <a:buNone/>
+                      </a:pPr>
+                      <a:r>
                         <a:rPr lang="en-US" sz="1250" dirty="0">
                           <a:solidFill>
                             <a:srgbClr val="1F2A37"/>
@@ -26619,7 +27940,7 @@
                           <a:ea typeface="Calibri" pitchFamily="34" charset="-122"/>
                           <a:cs typeface="Calibri" pitchFamily="34" charset="-120"/>
                         </a:rPr>
-                        <a:t>Capacidade empresarial: organiza e assume riscos</a:t>
+                        <a:t>Organização dos demais fatores e assunção de riscos</a:t>
                       </a:r>
                       <a:endParaRPr lang="en-US" sz="1250" dirty="0">
                         <a:latin typeface="Calibri" charset="0"/>
@@ -26751,12 +28072,12 @@
         </p:nvSpPr>
         <p:spPr>
           <a:xfrm>
-            <a:off x="4617720" y="1188720"/>
-            <a:ext cx="3840480" cy="713232"/>
+            <a:off x="685800" y="3246120"/>
+            <a:ext cx="1840230" cy="1005840"/>
           </a:xfrm>
           <a:prstGeom prst="roundRect">
             <a:avLst>
-              <a:gd name="adj" fmla="val 7692"/>
+              <a:gd name="adj" fmla="val 5455"/>
             </a:avLst>
           </a:prstGeom>
           <a:solidFill>
@@ -26778,7 +28099,7 @@
         </p:nvSpPr>
         <p:spPr>
           <a:xfrm>
-            <a:off x="4754880" y="1344168"/>
+            <a:off x="822960" y="3401568"/>
             <a:ext cx="457200" cy="457200"/>
           </a:xfrm>
           <a:prstGeom prst="roundRect">
@@ -26808,7 +28129,7 @@
         </p:blipFill>
         <p:spPr>
           <a:xfrm>
-            <a:off x="4855464" y="1444752"/>
+            <a:off x="923544" y="3502152"/>
             <a:ext cx="256032" cy="256032"/>
           </a:xfrm>
           <a:prstGeom prst="rect">
@@ -26824,8 +28145,8 @@
         </p:nvSpPr>
         <p:spPr>
           <a:xfrm>
-            <a:off x="5303520" y="1261872"/>
-            <a:ext cx="3063240" cy="566928"/>
+            <a:off x="1371600" y="3319272"/>
+            <a:ext cx="1062990" cy="859536"/>
           </a:xfrm>
           <a:prstGeom prst="rect">
             <a:avLst/>
@@ -26847,7 +28168,7 @@
               <a:buNone/>
             </a:pPr>
             <a:r>
-              <a:rPr lang="en-US" sz="1400" b="1" dirty="0">
+              <a:rPr lang="en-US" sz="1300" b="1" dirty="0">
                 <a:solidFill>
                   <a:srgbClr val="13294B"/>
                 </a:solidFill>
@@ -26857,7 +28178,7 @@
               </a:rPr>
               <a:t>Famílias</a:t>
             </a:r>
-            <a:endParaRPr lang="en-US" sz="1400" dirty="0"/>
+            <a:endParaRPr lang="en-US" sz="1300" dirty="0"/>
           </a:p>
           <a:p>
             <a:pPr algn="l" indent="0" marL="0">
@@ -26867,7 +28188,7 @@
               <a:buNone/>
             </a:pPr>
             <a:r>
-              <a:rPr lang="en-US" sz="1250" dirty="0">
+              <a:rPr lang="en-US" sz="1150" dirty="0">
                 <a:solidFill>
                   <a:srgbClr val="1F2A37"/>
                 </a:solidFill>
@@ -26877,7 +28198,7 @@
               </a:rPr>
               <a:t>Ofertam fatores e consomem.</a:t>
             </a:r>
-            <a:endParaRPr lang="en-US" sz="1400" dirty="0"/>
+            <a:endParaRPr lang="en-US" sz="1300" dirty="0"/>
           </a:p>
         </p:txBody>
       </p:sp>
@@ -26889,12 +28210,12 @@
         </p:nvSpPr>
         <p:spPr>
           <a:xfrm>
-            <a:off x="4617720" y="2020824"/>
-            <a:ext cx="3840480" cy="713232"/>
+            <a:off x="2663190" y="3246120"/>
+            <a:ext cx="1840230" cy="1005840"/>
           </a:xfrm>
           <a:prstGeom prst="roundRect">
             <a:avLst>
-              <a:gd name="adj" fmla="val 7692"/>
+              <a:gd name="adj" fmla="val 5455"/>
             </a:avLst>
           </a:prstGeom>
           <a:solidFill>
@@ -26916,7 +28237,7 @@
         </p:nvSpPr>
         <p:spPr>
           <a:xfrm>
-            <a:off x="4754880" y="2176272"/>
+            <a:off x="2800350" y="3401568"/>
             <a:ext cx="457200" cy="457200"/>
           </a:xfrm>
           <a:prstGeom prst="roundRect">
@@ -26946,7 +28267,7 @@
         </p:blipFill>
         <p:spPr>
           <a:xfrm>
-            <a:off x="4855464" y="2276856"/>
+            <a:off x="2900934" y="3502152"/>
             <a:ext cx="256032" cy="256032"/>
           </a:xfrm>
           <a:prstGeom prst="rect">
@@ -26962,8 +28283,8 @@
         </p:nvSpPr>
         <p:spPr>
           <a:xfrm>
-            <a:off x="5303520" y="2093976"/>
-            <a:ext cx="3063240" cy="566928"/>
+            <a:off x="3348990" y="3319272"/>
+            <a:ext cx="1062990" cy="859536"/>
           </a:xfrm>
           <a:prstGeom prst="rect">
             <a:avLst/>
@@ -26985,7 +28306,7 @@
               <a:buNone/>
             </a:pPr>
             <a:r>
-              <a:rPr lang="en-US" sz="1400" b="1" dirty="0">
+              <a:rPr lang="en-US" sz="1300" b="1" dirty="0">
                 <a:solidFill>
                   <a:srgbClr val="13294B"/>
                 </a:solidFill>
@@ -26995,7 +28316,7 @@
               </a:rPr>
               <a:t>Empresas</a:t>
             </a:r>
-            <a:endParaRPr lang="en-US" sz="1400" dirty="0"/>
+            <a:endParaRPr lang="en-US" sz="1300" dirty="0"/>
           </a:p>
           <a:p>
             <a:pPr algn="l" indent="0" marL="0">
@@ -27005,7 +28326,7 @@
               <a:buNone/>
             </a:pPr>
             <a:r>
-              <a:rPr lang="en-US" sz="1250" dirty="0">
+              <a:rPr lang="en-US" sz="1150" dirty="0">
                 <a:solidFill>
                   <a:srgbClr val="1F2A37"/>
                 </a:solidFill>
@@ -27015,7 +28336,7 @@
               </a:rPr>
               <a:t>Contratam fatores e produzem.</a:t>
             </a:r>
-            <a:endParaRPr lang="en-US" sz="1400" dirty="0"/>
+            <a:endParaRPr lang="en-US" sz="1300" dirty="0"/>
           </a:p>
         </p:txBody>
       </p:sp>
@@ -27027,12 +28348,12 @@
         </p:nvSpPr>
         <p:spPr>
           <a:xfrm>
-            <a:off x="4617720" y="2852928"/>
-            <a:ext cx="3840480" cy="713232"/>
+            <a:off x="4640580" y="3246120"/>
+            <a:ext cx="1840230" cy="1005840"/>
           </a:xfrm>
           <a:prstGeom prst="roundRect">
             <a:avLst>
-              <a:gd name="adj" fmla="val 7692"/>
+              <a:gd name="adj" fmla="val 5455"/>
             </a:avLst>
           </a:prstGeom>
           <a:solidFill>
@@ -27054,7 +28375,7 @@
         </p:nvSpPr>
         <p:spPr>
           <a:xfrm>
-            <a:off x="4754880" y="3008376"/>
+            <a:off x="4777740" y="3401568"/>
             <a:ext cx="457200" cy="457200"/>
           </a:xfrm>
           <a:prstGeom prst="roundRect">
@@ -27084,7 +28405,7 @@
         </p:blipFill>
         <p:spPr>
           <a:xfrm>
-            <a:off x="4855464" y="3108960"/>
+            <a:off x="4878324" y="3502152"/>
             <a:ext cx="256032" cy="256032"/>
           </a:xfrm>
           <a:prstGeom prst="rect">
@@ -27100,8 +28421,8 @@
         </p:nvSpPr>
         <p:spPr>
           <a:xfrm>
-            <a:off x="5303520" y="2926080"/>
-            <a:ext cx="3063240" cy="566928"/>
+            <a:off x="5326380" y="3319272"/>
+            <a:ext cx="1062990" cy="859536"/>
           </a:xfrm>
           <a:prstGeom prst="rect">
             <a:avLst/>
@@ -27123,7 +28444,7 @@
               <a:buNone/>
             </a:pPr>
             <a:r>
-              <a:rPr lang="en-US" sz="1400" b="1" dirty="0">
+              <a:rPr lang="en-US" sz="1300" b="1" dirty="0">
                 <a:solidFill>
                   <a:srgbClr val="13294B"/>
                 </a:solidFill>
@@ -27133,7 +28454,7 @@
               </a:rPr>
               <a:t>Governo</a:t>
             </a:r>
-            <a:endParaRPr lang="en-US" sz="1400" dirty="0"/>
+            <a:endParaRPr lang="en-US" sz="1300" dirty="0"/>
           </a:p>
           <a:p>
             <a:pPr algn="l" indent="0" marL="0">
@@ -27143,7 +28464,7 @@
               <a:buNone/>
             </a:pPr>
             <a:r>
-              <a:rPr lang="en-US" sz="1250" dirty="0">
+              <a:rPr lang="en-US" sz="1150" dirty="0">
                 <a:solidFill>
                   <a:srgbClr val="1F2A37"/>
                 </a:solidFill>
@@ -27153,7 +28474,7 @@
               </a:rPr>
               <a:t>Tributa, provê, regula e redistribui.</a:t>
             </a:r>
-            <a:endParaRPr lang="en-US" sz="1400" dirty="0"/>
+            <a:endParaRPr lang="en-US" sz="1300" dirty="0"/>
           </a:p>
         </p:txBody>
       </p:sp>
@@ -27165,12 +28486,12 @@
         </p:nvSpPr>
         <p:spPr>
           <a:xfrm>
-            <a:off x="4617720" y="3685032"/>
-            <a:ext cx="3840480" cy="713232"/>
+            <a:off x="6617970" y="3246120"/>
+            <a:ext cx="1840230" cy="1005840"/>
           </a:xfrm>
           <a:prstGeom prst="roundRect">
             <a:avLst>
-              <a:gd name="adj" fmla="val 7692"/>
+              <a:gd name="adj" fmla="val 5455"/>
             </a:avLst>
           </a:prstGeom>
           <a:solidFill>
@@ -27192,7 +28513,7 @@
         </p:nvSpPr>
         <p:spPr>
           <a:xfrm>
-            <a:off x="4754880" y="3840480"/>
+            <a:off x="6755130" y="3401568"/>
             <a:ext cx="457200" cy="457200"/>
           </a:xfrm>
           <a:prstGeom prst="roundRect">
@@ -27222,7 +28543,7 @@
         </p:blipFill>
         <p:spPr>
           <a:xfrm>
-            <a:off x="4855464" y="3941064"/>
+            <a:off x="6855714" y="3502152"/>
             <a:ext cx="256032" cy="256032"/>
           </a:xfrm>
           <a:prstGeom prst="rect">
@@ -27238,8 +28559,8 @@
         </p:nvSpPr>
         <p:spPr>
           <a:xfrm>
-            <a:off x="5303520" y="3758184"/>
-            <a:ext cx="3063240" cy="566928"/>
+            <a:off x="7303770" y="3319272"/>
+            <a:ext cx="1062990" cy="859536"/>
           </a:xfrm>
           <a:prstGeom prst="rect">
             <a:avLst/>
@@ -27261,7 +28582,7 @@
               <a:buNone/>
             </a:pPr>
             <a:r>
-              <a:rPr lang="en-US" sz="1400" b="1" dirty="0">
+              <a:rPr lang="en-US" sz="1300" b="1" dirty="0">
                 <a:solidFill>
                   <a:srgbClr val="13294B"/>
                 </a:solidFill>
@@ -27271,7 +28592,7 @@
               </a:rPr>
               <a:t>Setor externo</a:t>
             </a:r>
-            <a:endParaRPr lang="en-US" sz="1400" dirty="0"/>
+            <a:endParaRPr lang="en-US" sz="1300" dirty="0"/>
           </a:p>
           <a:p>
             <a:pPr algn="l" indent="0" marL="0">
@@ -27281,7 +28602,7 @@
               <a:buNone/>
             </a:pPr>
             <a:r>
-              <a:rPr lang="en-US" sz="1250" dirty="0">
+              <a:rPr lang="en-US" sz="1150" dirty="0">
                 <a:solidFill>
                   <a:srgbClr val="1F2A37"/>
                 </a:solidFill>
@@ -27289,9 +28610,9 @@
                 <a:ea typeface="Calibri" pitchFamily="34" charset="-122"/>
                 <a:cs typeface="Calibri" pitchFamily="34" charset="-120"/>
               </a:rPr>
-              <a:t>Troca bens e capitais com o país.</a:t>
-            </a:r>
-            <a:endParaRPr lang="en-US" sz="1400" dirty="0"/>
+              <a:t>Troca bens, serviços e capitais.</a:t>
+            </a:r>
+            <a:endParaRPr lang="en-US" sz="1300" dirty="0"/>
           </a:p>
         </p:txBody>
       </p:sp>
@@ -27460,434 +28781,1148 @@
           </a:p>
         </p:txBody>
       </p:sp>
-      <p:sp>
-        <p:nvSpPr>
-          <p:cNvPr id="4" name="Shape 2"/>
-          <p:cNvSpPr/>
-          <p:nvPr/>
-        </p:nvSpPr>
-        <p:spPr>
-          <a:xfrm>
-            <a:off x="685800" y="1325880"/>
-            <a:ext cx="2456688" cy="1600200"/>
+      <p:graphicFrame>
+        <p:nvGraphicFramePr>
+          <p:cNvPr id="10" name="Table 0"/>
+          <p:cNvGraphicFramePr>
+            <a:graphicFrameLocks noGrp="1"/>
+          </p:cNvGraphicFramePr>
+          <p:nvPr>
+            <p:extLst>
+              <p:ext uri="{D42A27DB-BD31-4B8C-83A1-F6EECF244321}">
+                <p14:modId xmlns:p14="http://schemas.microsoft.com/office/powerpoint/2010/main" val="1579011935"/>
+              </p:ext>
+            </p:extLst>
+          </p:nvPr>
+        </p:nvGraphicFramePr>
+        <p:xfrm>
+          <a:off x="685800" y="1280160"/>
+          <a:ext cx="7772400" cy="914400"/>
+        </p:xfrm>
+        <a:graphic>
+          <a:graphicData uri="http://schemas.openxmlformats.org/drawingml/2006/table">
+            <a:tbl>
+              <a:tblPr/>
+              <a:tblGrid>
+                <a:gridCol w="2148840"/>
+                <a:gridCol w="1691640"/>
+                <a:gridCol w="2011680"/>
+                <a:gridCol w="1920240"/>
+              </a:tblGrid>
+              <a:tr h="0">
+                <a:tc>
+                  <a:txBody>
+                    <a:bodyPr/>
+                    <a:lstStyle/>
+                    <a:p>
+                      <a:pPr indent="0" marL="0">
+                        <a:buNone/>
+                      </a:pPr>
+                      <a:r>
+                        <a:rPr lang="en-US" sz="1250" b="1" dirty="0">
+                          <a:solidFill>
+                            <a:srgbClr val="FFFFFF"/>
+                          </a:solidFill>
+                          <a:latin typeface="Calibri" pitchFamily="34" charset="0"/>
+                          <a:ea typeface="Calibri" pitchFamily="34" charset="-122"/>
+                          <a:cs typeface="Calibri" pitchFamily="34" charset="-120"/>
+                        </a:rPr>
+                        <a:t>Sistema</a:t>
+                      </a:r>
+                      <a:endParaRPr lang="en-US" sz="1250" dirty="0">
+                        <a:latin typeface="Calibri" charset="0"/>
+                        <a:ea typeface="Calibri" charset="0"/>
+                        <a:cs typeface="Calibri" charset="0"/>
+                      </a:endParaRPr>
+                    </a:p>
+                  </a:txBody>
+                  <a:tcPr marL="50800" marR="50800" marT="50800" marB="50800" anchor="ctr">
+                    <a:lnL w="9525" cap="flat" cmpd="sng" algn="ctr">
+                      <a:solidFill>
+                        <a:srgbClr val="DCD5C1"/>
+                      </a:solidFill>
+                      <a:prstDash val="solid"/>
+                      <a:round/>
+                      <a:headEnd type="none" w="med" len="med"/>
+                      <a:tailEnd type="none" w="med" len="med"/>
+                    </a:lnL>
+                    <a:lnR w="9525" cap="flat" cmpd="sng" algn="ctr">
+                      <a:solidFill>
+                        <a:srgbClr val="DCD5C1"/>
+                      </a:solidFill>
+                      <a:prstDash val="solid"/>
+                      <a:round/>
+                      <a:headEnd type="none" w="med" len="med"/>
+                      <a:tailEnd type="none" w="med" len="med"/>
+                    </a:lnR>
+                    <a:lnT w="9525" cap="flat" cmpd="sng" algn="ctr">
+                      <a:solidFill>
+                        <a:srgbClr val="DCD5C1"/>
+                      </a:solidFill>
+                      <a:prstDash val="solid"/>
+                      <a:round/>
+                      <a:headEnd type="none" w="med" len="med"/>
+                      <a:tailEnd type="none" w="med" len="med"/>
+                    </a:lnT>
+                    <a:lnB w="9525" cap="flat" cmpd="sng" algn="ctr">
+                      <a:solidFill>
+                        <a:srgbClr val="DCD5C1"/>
+                      </a:solidFill>
+                      <a:prstDash val="solid"/>
+                      <a:round/>
+                      <a:headEnd type="none" w="med" len="med"/>
+                      <a:tailEnd type="none" w="med" len="med"/>
+                    </a:lnB>
+                    <a:solidFill>
+                      <a:srgbClr val="13294B"/>
+                    </a:solidFill>
+                  </a:tcPr>
+                </a:tc>
+                <a:tc>
+                  <a:txBody>
+                    <a:bodyPr/>
+                    <a:lstStyle/>
+                    <a:p>
+                      <a:pPr indent="0" marL="0">
+                        <a:buNone/>
+                      </a:pPr>
+                      <a:r>
+                        <a:rPr lang="en-US" sz="1250" b="1" dirty="0">
+                          <a:solidFill>
+                            <a:srgbClr val="FFFFFF"/>
+                          </a:solidFill>
+                          <a:latin typeface="Calibri" pitchFamily="34" charset="0"/>
+                          <a:ea typeface="Calibri" pitchFamily="34" charset="-122"/>
+                          <a:cs typeface="Calibri" pitchFamily="34" charset="-120"/>
+                        </a:rPr>
+                        <a:t>Quem decide</a:t>
+                      </a:r>
+                      <a:endParaRPr lang="en-US" sz="1250" dirty="0">
+                        <a:latin typeface="Calibri" charset="0"/>
+                        <a:ea typeface="Calibri" charset="0"/>
+                        <a:cs typeface="Calibri" charset="0"/>
+                      </a:endParaRPr>
+                    </a:p>
+                  </a:txBody>
+                  <a:tcPr marL="50800" marR="50800" marT="50800" marB="50800" anchor="ctr">
+                    <a:lnL w="9525" cap="flat" cmpd="sng" algn="ctr">
+                      <a:solidFill>
+                        <a:srgbClr val="DCD5C1"/>
+                      </a:solidFill>
+                      <a:prstDash val="solid"/>
+                      <a:round/>
+                      <a:headEnd type="none" w="med" len="med"/>
+                      <a:tailEnd type="none" w="med" len="med"/>
+                    </a:lnL>
+                    <a:lnR w="9525" cap="flat" cmpd="sng" algn="ctr">
+                      <a:solidFill>
+                        <a:srgbClr val="DCD5C1"/>
+                      </a:solidFill>
+                      <a:prstDash val="solid"/>
+                      <a:round/>
+                      <a:headEnd type="none" w="med" len="med"/>
+                      <a:tailEnd type="none" w="med" len="med"/>
+                    </a:lnR>
+                    <a:lnT w="9525" cap="flat" cmpd="sng" algn="ctr">
+                      <a:solidFill>
+                        <a:srgbClr val="DCD5C1"/>
+                      </a:solidFill>
+                      <a:prstDash val="solid"/>
+                      <a:round/>
+                      <a:headEnd type="none" w="med" len="med"/>
+                      <a:tailEnd type="none" w="med" len="med"/>
+                    </a:lnT>
+                    <a:lnB w="9525" cap="flat" cmpd="sng" algn="ctr">
+                      <a:solidFill>
+                        <a:srgbClr val="DCD5C1"/>
+                      </a:solidFill>
+                      <a:prstDash val="solid"/>
+                      <a:round/>
+                      <a:headEnd type="none" w="med" len="med"/>
+                      <a:tailEnd type="none" w="med" len="med"/>
+                    </a:lnB>
+                    <a:solidFill>
+                      <a:srgbClr val="13294B"/>
+                    </a:solidFill>
+                  </a:tcPr>
+                </a:tc>
+                <a:tc>
+                  <a:txBody>
+                    <a:bodyPr/>
+                    <a:lstStyle/>
+                    <a:p>
+                      <a:pPr indent="0" marL="0">
+                        <a:buNone/>
+                      </a:pPr>
+                      <a:r>
+                        <a:rPr lang="en-US" sz="1250" b="1" dirty="0">
+                          <a:solidFill>
+                            <a:srgbClr val="FFFFFF"/>
+                          </a:solidFill>
+                          <a:latin typeface="Calibri" pitchFamily="34" charset="0"/>
+                          <a:ea typeface="Calibri" pitchFamily="34" charset="-122"/>
+                          <a:cs typeface="Calibri" pitchFamily="34" charset="-120"/>
+                        </a:rPr>
+                        <a:t>Mecanismo de coordenação</a:t>
+                      </a:r>
+                      <a:endParaRPr lang="en-US" sz="1250" dirty="0">
+                        <a:latin typeface="Calibri" charset="0"/>
+                        <a:ea typeface="Calibri" charset="0"/>
+                        <a:cs typeface="Calibri" charset="0"/>
+                      </a:endParaRPr>
+                    </a:p>
+                  </a:txBody>
+                  <a:tcPr marL="50800" marR="50800" marT="50800" marB="50800" anchor="ctr">
+                    <a:lnL w="9525" cap="flat" cmpd="sng" algn="ctr">
+                      <a:solidFill>
+                        <a:srgbClr val="DCD5C1"/>
+                      </a:solidFill>
+                      <a:prstDash val="solid"/>
+                      <a:round/>
+                      <a:headEnd type="none" w="med" len="med"/>
+                      <a:tailEnd type="none" w="med" len="med"/>
+                    </a:lnL>
+                    <a:lnR w="9525" cap="flat" cmpd="sng" algn="ctr">
+                      <a:solidFill>
+                        <a:srgbClr val="DCD5C1"/>
+                      </a:solidFill>
+                      <a:prstDash val="solid"/>
+                      <a:round/>
+                      <a:headEnd type="none" w="med" len="med"/>
+                      <a:tailEnd type="none" w="med" len="med"/>
+                    </a:lnR>
+                    <a:lnT w="9525" cap="flat" cmpd="sng" algn="ctr">
+                      <a:solidFill>
+                        <a:srgbClr val="DCD5C1"/>
+                      </a:solidFill>
+                      <a:prstDash val="solid"/>
+                      <a:round/>
+                      <a:headEnd type="none" w="med" len="med"/>
+                      <a:tailEnd type="none" w="med" len="med"/>
+                    </a:lnT>
+                    <a:lnB w="9525" cap="flat" cmpd="sng" algn="ctr">
+                      <a:solidFill>
+                        <a:srgbClr val="DCD5C1"/>
+                      </a:solidFill>
+                      <a:prstDash val="solid"/>
+                      <a:round/>
+                      <a:headEnd type="none" w="med" len="med"/>
+                      <a:tailEnd type="none" w="med" len="med"/>
+                    </a:lnB>
+                    <a:solidFill>
+                      <a:srgbClr val="13294B"/>
+                    </a:solidFill>
+                  </a:tcPr>
+                </a:tc>
+                <a:tc>
+                  <a:txBody>
+                    <a:bodyPr/>
+                    <a:lstStyle/>
+                    <a:p>
+                      <a:pPr indent="0" marL="0">
+                        <a:buNone/>
+                      </a:pPr>
+                      <a:r>
+                        <a:rPr lang="en-US" sz="1250" b="1" dirty="0">
+                          <a:solidFill>
+                            <a:srgbClr val="FFFFFF"/>
+                          </a:solidFill>
+                          <a:latin typeface="Calibri" pitchFamily="34" charset="0"/>
+                          <a:ea typeface="Calibri" pitchFamily="34" charset="-122"/>
+                          <a:cs typeface="Calibri" pitchFamily="34" charset="-120"/>
+                        </a:rPr>
+                        <a:t>Propriedade dos meios de produção</a:t>
+                      </a:r>
+                      <a:endParaRPr lang="en-US" sz="1250" dirty="0">
+                        <a:latin typeface="Calibri" charset="0"/>
+                        <a:ea typeface="Calibri" charset="0"/>
+                        <a:cs typeface="Calibri" charset="0"/>
+                      </a:endParaRPr>
+                    </a:p>
+                  </a:txBody>
+                  <a:tcPr marL="50800" marR="50800" marT="50800" marB="50800" anchor="ctr">
+                    <a:lnL w="9525" cap="flat" cmpd="sng" algn="ctr">
+                      <a:solidFill>
+                        <a:srgbClr val="DCD5C1"/>
+                      </a:solidFill>
+                      <a:prstDash val="solid"/>
+                      <a:round/>
+                      <a:headEnd type="none" w="med" len="med"/>
+                      <a:tailEnd type="none" w="med" len="med"/>
+                    </a:lnL>
+                    <a:lnR w="9525" cap="flat" cmpd="sng" algn="ctr">
+                      <a:solidFill>
+                        <a:srgbClr val="DCD5C1"/>
+                      </a:solidFill>
+                      <a:prstDash val="solid"/>
+                      <a:round/>
+                      <a:headEnd type="none" w="med" len="med"/>
+                      <a:tailEnd type="none" w="med" len="med"/>
+                    </a:lnR>
+                    <a:lnT w="9525" cap="flat" cmpd="sng" algn="ctr">
+                      <a:solidFill>
+                        <a:srgbClr val="DCD5C1"/>
+                      </a:solidFill>
+                      <a:prstDash val="solid"/>
+                      <a:round/>
+                      <a:headEnd type="none" w="med" len="med"/>
+                      <a:tailEnd type="none" w="med" len="med"/>
+                    </a:lnT>
+                    <a:lnB w="9525" cap="flat" cmpd="sng" algn="ctr">
+                      <a:solidFill>
+                        <a:srgbClr val="DCD5C1"/>
+                      </a:solidFill>
+                      <a:prstDash val="solid"/>
+                      <a:round/>
+                      <a:headEnd type="none" w="med" len="med"/>
+                      <a:tailEnd type="none" w="med" len="med"/>
+                    </a:lnB>
+                    <a:solidFill>
+                      <a:srgbClr val="13294B"/>
+                    </a:solidFill>
+                  </a:tcPr>
+                </a:tc>
+              </a:tr>
+              <a:tr h="0">
+                <a:tc>
+                  <a:txBody>
+                    <a:bodyPr/>
+                    <a:lstStyle/>
+                    <a:p>
+                      <a:pPr indent="0" marL="0">
+                        <a:buNone/>
+                      </a:pPr>
+                      <a:r>
+                        <a:rPr lang="en-US" sz="1250" b="1" dirty="0">
+                          <a:solidFill>
+                            <a:srgbClr val="1F2A37"/>
+                          </a:solidFill>
+                          <a:latin typeface="Calibri" pitchFamily="34" charset="0"/>
+                          <a:ea typeface="Calibri" pitchFamily="34" charset="-122"/>
+                          <a:cs typeface="Calibri" pitchFamily="34" charset="-120"/>
+                        </a:rPr>
+                        <a:t>Economia de mercado (capitalismo)</a:t>
+                      </a:r>
+                      <a:endParaRPr lang="en-US" sz="1250" dirty="0">
+                        <a:latin typeface="Calibri" charset="0"/>
+                        <a:ea typeface="Calibri" charset="0"/>
+                        <a:cs typeface="Calibri" charset="0"/>
+                      </a:endParaRPr>
+                    </a:p>
+                  </a:txBody>
+                  <a:tcPr marL="50800" marR="50800" marT="50800" marB="50800" anchor="ctr">
+                    <a:lnL w="9525" cap="flat" cmpd="sng" algn="ctr">
+                      <a:solidFill>
+                        <a:srgbClr val="DCD5C1"/>
+                      </a:solidFill>
+                      <a:prstDash val="solid"/>
+                      <a:round/>
+                      <a:headEnd type="none" w="med" len="med"/>
+                      <a:tailEnd type="none" w="med" len="med"/>
+                    </a:lnL>
+                    <a:lnR w="9525" cap="flat" cmpd="sng" algn="ctr">
+                      <a:solidFill>
+                        <a:srgbClr val="DCD5C1"/>
+                      </a:solidFill>
+                      <a:prstDash val="solid"/>
+                      <a:round/>
+                      <a:headEnd type="none" w="med" len="med"/>
+                      <a:tailEnd type="none" w="med" len="med"/>
+                    </a:lnR>
+                    <a:lnT w="9525" cap="flat" cmpd="sng" algn="ctr">
+                      <a:solidFill>
+                        <a:srgbClr val="DCD5C1"/>
+                      </a:solidFill>
+                      <a:prstDash val="solid"/>
+                      <a:round/>
+                      <a:headEnd type="none" w="med" len="med"/>
+                      <a:tailEnd type="none" w="med" len="med"/>
+                    </a:lnT>
+                    <a:lnB w="9525" cap="flat" cmpd="sng" algn="ctr">
+                      <a:solidFill>
+                        <a:srgbClr val="DCD5C1"/>
+                      </a:solidFill>
+                      <a:prstDash val="solid"/>
+                      <a:round/>
+                      <a:headEnd type="none" w="med" len="med"/>
+                      <a:tailEnd type="none" w="med" len="med"/>
+                    </a:lnB>
+                    <a:solidFill>
+                      <a:srgbClr val="FFFFFF"/>
+                    </a:solidFill>
+                  </a:tcPr>
+                </a:tc>
+                <a:tc>
+                  <a:txBody>
+                    <a:bodyPr/>
+                    <a:lstStyle/>
+                    <a:p>
+                      <a:pPr indent="0" marL="0">
+                        <a:buNone/>
+                      </a:pPr>
+                      <a:r>
+                        <a:rPr lang="en-US" sz="1250" dirty="0">
+                          <a:solidFill>
+                            <a:srgbClr val="1F2A37"/>
+                          </a:solidFill>
+                          <a:latin typeface="Calibri" pitchFamily="34" charset="0"/>
+                          <a:ea typeface="Calibri" pitchFamily="34" charset="-122"/>
+                          <a:cs typeface="Calibri" pitchFamily="34" charset="-120"/>
+                        </a:rPr>
+                        <a:t>Consumidores e empresas</a:t>
+                      </a:r>
+                      <a:endParaRPr lang="en-US" sz="1250" dirty="0">
+                        <a:latin typeface="Calibri" charset="0"/>
+                        <a:ea typeface="Calibri" charset="0"/>
+                        <a:cs typeface="Calibri" charset="0"/>
+                      </a:endParaRPr>
+                    </a:p>
+                  </a:txBody>
+                  <a:tcPr marL="50800" marR="50800" marT="50800" marB="50800" anchor="ctr">
+                    <a:lnL w="9525" cap="flat" cmpd="sng" algn="ctr">
+                      <a:solidFill>
+                        <a:srgbClr val="DCD5C1"/>
+                      </a:solidFill>
+                      <a:prstDash val="solid"/>
+                      <a:round/>
+                      <a:headEnd type="none" w="med" len="med"/>
+                      <a:tailEnd type="none" w="med" len="med"/>
+                    </a:lnL>
+                    <a:lnR w="9525" cap="flat" cmpd="sng" algn="ctr">
+                      <a:solidFill>
+                        <a:srgbClr val="DCD5C1"/>
+                      </a:solidFill>
+                      <a:prstDash val="solid"/>
+                      <a:round/>
+                      <a:headEnd type="none" w="med" len="med"/>
+                      <a:tailEnd type="none" w="med" len="med"/>
+                    </a:lnR>
+                    <a:lnT w="9525" cap="flat" cmpd="sng" algn="ctr">
+                      <a:solidFill>
+                        <a:srgbClr val="DCD5C1"/>
+                      </a:solidFill>
+                      <a:prstDash val="solid"/>
+                      <a:round/>
+                      <a:headEnd type="none" w="med" len="med"/>
+                      <a:tailEnd type="none" w="med" len="med"/>
+                    </a:lnT>
+                    <a:lnB w="9525" cap="flat" cmpd="sng" algn="ctr">
+                      <a:solidFill>
+                        <a:srgbClr val="DCD5C1"/>
+                      </a:solidFill>
+                      <a:prstDash val="solid"/>
+                      <a:round/>
+                      <a:headEnd type="none" w="med" len="med"/>
+                      <a:tailEnd type="none" w="med" len="med"/>
+                    </a:lnB>
+                    <a:solidFill>
+                      <a:srgbClr val="FFFFFF"/>
+                    </a:solidFill>
+                  </a:tcPr>
+                </a:tc>
+                <a:tc>
+                  <a:txBody>
+                    <a:bodyPr/>
+                    <a:lstStyle/>
+                    <a:p>
+                      <a:pPr indent="0" marL="0">
+                        <a:buNone/>
+                      </a:pPr>
+                      <a:r>
+                        <a:rPr lang="en-US" sz="1250" dirty="0">
+                          <a:solidFill>
+                            <a:srgbClr val="1F2A37"/>
+                          </a:solidFill>
+                          <a:latin typeface="Calibri" pitchFamily="34" charset="0"/>
+                          <a:ea typeface="Calibri" pitchFamily="34" charset="-122"/>
+                          <a:cs typeface="Calibri" pitchFamily="34" charset="-120"/>
+                        </a:rPr>
+                        <a:t>Preços, oferta e demanda</a:t>
+                      </a:r>
+                      <a:endParaRPr lang="en-US" sz="1250" dirty="0">
+                        <a:latin typeface="Calibri" charset="0"/>
+                        <a:ea typeface="Calibri" charset="0"/>
+                        <a:cs typeface="Calibri" charset="0"/>
+                      </a:endParaRPr>
+                    </a:p>
+                  </a:txBody>
+                  <a:tcPr marL="50800" marR="50800" marT="50800" marB="50800" anchor="ctr">
+                    <a:lnL w="9525" cap="flat" cmpd="sng" algn="ctr">
+                      <a:solidFill>
+                        <a:srgbClr val="DCD5C1"/>
+                      </a:solidFill>
+                      <a:prstDash val="solid"/>
+                      <a:round/>
+                      <a:headEnd type="none" w="med" len="med"/>
+                      <a:tailEnd type="none" w="med" len="med"/>
+                    </a:lnL>
+                    <a:lnR w="9525" cap="flat" cmpd="sng" algn="ctr">
+                      <a:solidFill>
+                        <a:srgbClr val="DCD5C1"/>
+                      </a:solidFill>
+                      <a:prstDash val="solid"/>
+                      <a:round/>
+                      <a:headEnd type="none" w="med" len="med"/>
+                      <a:tailEnd type="none" w="med" len="med"/>
+                    </a:lnR>
+                    <a:lnT w="9525" cap="flat" cmpd="sng" algn="ctr">
+                      <a:solidFill>
+                        <a:srgbClr val="DCD5C1"/>
+                      </a:solidFill>
+                      <a:prstDash val="solid"/>
+                      <a:round/>
+                      <a:headEnd type="none" w="med" len="med"/>
+                      <a:tailEnd type="none" w="med" len="med"/>
+                    </a:lnT>
+                    <a:lnB w="9525" cap="flat" cmpd="sng" algn="ctr">
+                      <a:solidFill>
+                        <a:srgbClr val="DCD5C1"/>
+                      </a:solidFill>
+                      <a:prstDash val="solid"/>
+                      <a:round/>
+                      <a:headEnd type="none" w="med" len="med"/>
+                      <a:tailEnd type="none" w="med" len="med"/>
+                    </a:lnB>
+                    <a:solidFill>
+                      <a:srgbClr val="FFFFFF"/>
+                    </a:solidFill>
+                  </a:tcPr>
+                </a:tc>
+                <a:tc>
+                  <a:txBody>
+                    <a:bodyPr/>
+                    <a:lstStyle/>
+                    <a:p>
+                      <a:pPr indent="0" marL="0">
+                        <a:buNone/>
+                      </a:pPr>
+                      <a:r>
+                        <a:rPr lang="en-US" sz="1250" dirty="0">
+                          <a:solidFill>
+                            <a:srgbClr val="1F2A37"/>
+                          </a:solidFill>
+                          <a:latin typeface="Calibri" pitchFamily="34" charset="0"/>
+                          <a:ea typeface="Calibri" pitchFamily="34" charset="-122"/>
+                          <a:cs typeface="Calibri" pitchFamily="34" charset="-120"/>
+                        </a:rPr>
+                        <a:t>Predominantemente privada</a:t>
+                      </a:r>
+                      <a:endParaRPr lang="en-US" sz="1250" dirty="0">
+                        <a:latin typeface="Calibri" charset="0"/>
+                        <a:ea typeface="Calibri" charset="0"/>
+                        <a:cs typeface="Calibri" charset="0"/>
+                      </a:endParaRPr>
+                    </a:p>
+                  </a:txBody>
+                  <a:tcPr marL="50800" marR="50800" marT="50800" marB="50800" anchor="ctr">
+                    <a:lnL w="9525" cap="flat" cmpd="sng" algn="ctr">
+                      <a:solidFill>
+                        <a:srgbClr val="DCD5C1"/>
+                      </a:solidFill>
+                      <a:prstDash val="solid"/>
+                      <a:round/>
+                      <a:headEnd type="none" w="med" len="med"/>
+                      <a:tailEnd type="none" w="med" len="med"/>
+                    </a:lnL>
+                    <a:lnR w="9525" cap="flat" cmpd="sng" algn="ctr">
+                      <a:solidFill>
+                        <a:srgbClr val="DCD5C1"/>
+                      </a:solidFill>
+                      <a:prstDash val="solid"/>
+                      <a:round/>
+                      <a:headEnd type="none" w="med" len="med"/>
+                      <a:tailEnd type="none" w="med" len="med"/>
+                    </a:lnR>
+                    <a:lnT w="9525" cap="flat" cmpd="sng" algn="ctr">
+                      <a:solidFill>
+                        <a:srgbClr val="DCD5C1"/>
+                      </a:solidFill>
+                      <a:prstDash val="solid"/>
+                      <a:round/>
+                      <a:headEnd type="none" w="med" len="med"/>
+                      <a:tailEnd type="none" w="med" len="med"/>
+                    </a:lnT>
+                    <a:lnB w="9525" cap="flat" cmpd="sng" algn="ctr">
+                      <a:solidFill>
+                        <a:srgbClr val="DCD5C1"/>
+                      </a:solidFill>
+                      <a:prstDash val="solid"/>
+                      <a:round/>
+                      <a:headEnd type="none" w="med" len="med"/>
+                      <a:tailEnd type="none" w="med" len="med"/>
+                    </a:lnB>
+                    <a:solidFill>
+                      <a:srgbClr val="FFFFFF"/>
+                    </a:solidFill>
+                  </a:tcPr>
+                </a:tc>
+              </a:tr>
+              <a:tr h="0">
+                <a:tc>
+                  <a:txBody>
+                    <a:bodyPr/>
+                    <a:lstStyle/>
+                    <a:p>
+                      <a:pPr indent="0" marL="0">
+                        <a:buNone/>
+                      </a:pPr>
+                      <a:r>
+                        <a:rPr lang="en-US" sz="1250" b="1" dirty="0">
+                          <a:solidFill>
+                            <a:srgbClr val="1F2A37"/>
+                          </a:solidFill>
+                          <a:latin typeface="Calibri" pitchFamily="34" charset="0"/>
+                          <a:ea typeface="Calibri" pitchFamily="34" charset="-122"/>
+                          <a:cs typeface="Calibri" pitchFamily="34" charset="-120"/>
+                        </a:rPr>
+                        <a:t>Economia centralmente planificada (socialismo)</a:t>
+                      </a:r>
+                      <a:endParaRPr lang="en-US" sz="1250" dirty="0">
+                        <a:latin typeface="Calibri" charset="0"/>
+                        <a:ea typeface="Calibri" charset="0"/>
+                        <a:cs typeface="Calibri" charset="0"/>
+                      </a:endParaRPr>
+                    </a:p>
+                  </a:txBody>
+                  <a:tcPr marL="50800" marR="50800" marT="50800" marB="50800" anchor="ctr">
+                    <a:lnL w="9525" cap="flat" cmpd="sng" algn="ctr">
+                      <a:solidFill>
+                        <a:srgbClr val="DCD5C1"/>
+                      </a:solidFill>
+                      <a:prstDash val="solid"/>
+                      <a:round/>
+                      <a:headEnd type="none" w="med" len="med"/>
+                      <a:tailEnd type="none" w="med" len="med"/>
+                    </a:lnL>
+                    <a:lnR w="9525" cap="flat" cmpd="sng" algn="ctr">
+                      <a:solidFill>
+                        <a:srgbClr val="DCD5C1"/>
+                      </a:solidFill>
+                      <a:prstDash val="solid"/>
+                      <a:round/>
+                      <a:headEnd type="none" w="med" len="med"/>
+                      <a:tailEnd type="none" w="med" len="med"/>
+                    </a:lnR>
+                    <a:lnT w="9525" cap="flat" cmpd="sng" algn="ctr">
+                      <a:solidFill>
+                        <a:srgbClr val="DCD5C1"/>
+                      </a:solidFill>
+                      <a:prstDash val="solid"/>
+                      <a:round/>
+                      <a:headEnd type="none" w="med" len="med"/>
+                      <a:tailEnd type="none" w="med" len="med"/>
+                    </a:lnT>
+                    <a:lnB w="9525" cap="flat" cmpd="sng" algn="ctr">
+                      <a:solidFill>
+                        <a:srgbClr val="DCD5C1"/>
+                      </a:solidFill>
+                      <a:prstDash val="solid"/>
+                      <a:round/>
+                      <a:headEnd type="none" w="med" len="med"/>
+                      <a:tailEnd type="none" w="med" len="med"/>
+                    </a:lnB>
+                    <a:solidFill>
+                      <a:srgbClr val="F4F7F8"/>
+                    </a:solidFill>
+                  </a:tcPr>
+                </a:tc>
+                <a:tc>
+                  <a:txBody>
+                    <a:bodyPr/>
+                    <a:lstStyle/>
+                    <a:p>
+                      <a:pPr indent="0" marL="0">
+                        <a:buNone/>
+                      </a:pPr>
+                      <a:r>
+                        <a:rPr lang="en-US" sz="1250" dirty="0">
+                          <a:solidFill>
+                            <a:srgbClr val="1F2A37"/>
+                          </a:solidFill>
+                          <a:latin typeface="Calibri" pitchFamily="34" charset="0"/>
+                          <a:ea typeface="Calibri" pitchFamily="34" charset="-122"/>
+                          <a:cs typeface="Calibri" pitchFamily="34" charset="-120"/>
+                        </a:rPr>
+                        <a:t>Órgão central de planejamento</a:t>
+                      </a:r>
+                      <a:endParaRPr lang="en-US" sz="1250" dirty="0">
+                        <a:latin typeface="Calibri" charset="0"/>
+                        <a:ea typeface="Calibri" charset="0"/>
+                        <a:cs typeface="Calibri" charset="0"/>
+                      </a:endParaRPr>
+                    </a:p>
+                  </a:txBody>
+                  <a:tcPr marL="50800" marR="50800" marT="50800" marB="50800" anchor="ctr">
+                    <a:lnL w="9525" cap="flat" cmpd="sng" algn="ctr">
+                      <a:solidFill>
+                        <a:srgbClr val="DCD5C1"/>
+                      </a:solidFill>
+                      <a:prstDash val="solid"/>
+                      <a:round/>
+                      <a:headEnd type="none" w="med" len="med"/>
+                      <a:tailEnd type="none" w="med" len="med"/>
+                    </a:lnL>
+                    <a:lnR w="9525" cap="flat" cmpd="sng" algn="ctr">
+                      <a:solidFill>
+                        <a:srgbClr val="DCD5C1"/>
+                      </a:solidFill>
+                      <a:prstDash val="solid"/>
+                      <a:round/>
+                      <a:headEnd type="none" w="med" len="med"/>
+                      <a:tailEnd type="none" w="med" len="med"/>
+                    </a:lnR>
+                    <a:lnT w="9525" cap="flat" cmpd="sng" algn="ctr">
+                      <a:solidFill>
+                        <a:srgbClr val="DCD5C1"/>
+                      </a:solidFill>
+                      <a:prstDash val="solid"/>
+                      <a:round/>
+                      <a:headEnd type="none" w="med" len="med"/>
+                      <a:tailEnd type="none" w="med" len="med"/>
+                    </a:lnT>
+                    <a:lnB w="9525" cap="flat" cmpd="sng" algn="ctr">
+                      <a:solidFill>
+                        <a:srgbClr val="DCD5C1"/>
+                      </a:solidFill>
+                      <a:prstDash val="solid"/>
+                      <a:round/>
+                      <a:headEnd type="none" w="med" len="med"/>
+                      <a:tailEnd type="none" w="med" len="med"/>
+                    </a:lnB>
+                    <a:solidFill>
+                      <a:srgbClr val="F4F7F8"/>
+                    </a:solidFill>
+                  </a:tcPr>
+                </a:tc>
+                <a:tc>
+                  <a:txBody>
+                    <a:bodyPr/>
+                    <a:lstStyle/>
+                    <a:p>
+                      <a:pPr indent="0" marL="0">
+                        <a:buNone/>
+                      </a:pPr>
+                      <a:r>
+                        <a:rPr lang="en-US" sz="1250" dirty="0">
+                          <a:solidFill>
+                            <a:srgbClr val="1F2A37"/>
+                          </a:solidFill>
+                          <a:latin typeface="Calibri" pitchFamily="34" charset="0"/>
+                          <a:ea typeface="Calibri" pitchFamily="34" charset="-122"/>
+                          <a:cs typeface="Calibri" pitchFamily="34" charset="-120"/>
+                        </a:rPr>
+                        <a:t>Plano e metas de produção</a:t>
+                      </a:r>
+                      <a:endParaRPr lang="en-US" sz="1250" dirty="0">
+                        <a:latin typeface="Calibri" charset="0"/>
+                        <a:ea typeface="Calibri" charset="0"/>
+                        <a:cs typeface="Calibri" charset="0"/>
+                      </a:endParaRPr>
+                    </a:p>
+                  </a:txBody>
+                  <a:tcPr marL="50800" marR="50800" marT="50800" marB="50800" anchor="ctr">
+                    <a:lnL w="9525" cap="flat" cmpd="sng" algn="ctr">
+                      <a:solidFill>
+                        <a:srgbClr val="DCD5C1"/>
+                      </a:solidFill>
+                      <a:prstDash val="solid"/>
+                      <a:round/>
+                      <a:headEnd type="none" w="med" len="med"/>
+                      <a:tailEnd type="none" w="med" len="med"/>
+                    </a:lnL>
+                    <a:lnR w="9525" cap="flat" cmpd="sng" algn="ctr">
+                      <a:solidFill>
+                        <a:srgbClr val="DCD5C1"/>
+                      </a:solidFill>
+                      <a:prstDash val="solid"/>
+                      <a:round/>
+                      <a:headEnd type="none" w="med" len="med"/>
+                      <a:tailEnd type="none" w="med" len="med"/>
+                    </a:lnR>
+                    <a:lnT w="9525" cap="flat" cmpd="sng" algn="ctr">
+                      <a:solidFill>
+                        <a:srgbClr val="DCD5C1"/>
+                      </a:solidFill>
+                      <a:prstDash val="solid"/>
+                      <a:round/>
+                      <a:headEnd type="none" w="med" len="med"/>
+                      <a:tailEnd type="none" w="med" len="med"/>
+                    </a:lnT>
+                    <a:lnB w="9525" cap="flat" cmpd="sng" algn="ctr">
+                      <a:solidFill>
+                        <a:srgbClr val="DCD5C1"/>
+                      </a:solidFill>
+                      <a:prstDash val="solid"/>
+                      <a:round/>
+                      <a:headEnd type="none" w="med" len="med"/>
+                      <a:tailEnd type="none" w="med" len="med"/>
+                    </a:lnB>
+                    <a:solidFill>
+                      <a:srgbClr val="F4F7F8"/>
+                    </a:solidFill>
+                  </a:tcPr>
+                </a:tc>
+                <a:tc>
+                  <a:txBody>
+                    <a:bodyPr/>
+                    <a:lstStyle/>
+                    <a:p>
+                      <a:pPr indent="0" marL="0">
+                        <a:buNone/>
+                      </a:pPr>
+                      <a:r>
+                        <a:rPr lang="en-US" sz="1250" dirty="0">
+                          <a:solidFill>
+                            <a:srgbClr val="1F2A37"/>
+                          </a:solidFill>
+                          <a:latin typeface="Calibri" pitchFamily="34" charset="0"/>
+                          <a:ea typeface="Calibri" pitchFamily="34" charset="-122"/>
+                          <a:cs typeface="Calibri" pitchFamily="34" charset="-120"/>
+                        </a:rPr>
+                        <a:t>Predominantemente estatal ou coletiva</a:t>
+                      </a:r>
+                      <a:endParaRPr lang="en-US" sz="1250" dirty="0">
+                        <a:latin typeface="Calibri" charset="0"/>
+                        <a:ea typeface="Calibri" charset="0"/>
+                        <a:cs typeface="Calibri" charset="0"/>
+                      </a:endParaRPr>
+                    </a:p>
+                  </a:txBody>
+                  <a:tcPr marL="50800" marR="50800" marT="50800" marB="50800" anchor="ctr">
+                    <a:lnL w="9525" cap="flat" cmpd="sng" algn="ctr">
+                      <a:solidFill>
+                        <a:srgbClr val="DCD5C1"/>
+                      </a:solidFill>
+                      <a:prstDash val="solid"/>
+                      <a:round/>
+                      <a:headEnd type="none" w="med" len="med"/>
+                      <a:tailEnd type="none" w="med" len="med"/>
+                    </a:lnL>
+                    <a:lnR w="9525" cap="flat" cmpd="sng" algn="ctr">
+                      <a:solidFill>
+                        <a:srgbClr val="DCD5C1"/>
+                      </a:solidFill>
+                      <a:prstDash val="solid"/>
+                      <a:round/>
+                      <a:headEnd type="none" w="med" len="med"/>
+                      <a:tailEnd type="none" w="med" len="med"/>
+                    </a:lnR>
+                    <a:lnT w="9525" cap="flat" cmpd="sng" algn="ctr">
+                      <a:solidFill>
+                        <a:srgbClr val="DCD5C1"/>
+                      </a:solidFill>
+                      <a:prstDash val="solid"/>
+                      <a:round/>
+                      <a:headEnd type="none" w="med" len="med"/>
+                      <a:tailEnd type="none" w="med" len="med"/>
+                    </a:lnT>
+                    <a:lnB w="9525" cap="flat" cmpd="sng" algn="ctr">
+                      <a:solidFill>
+                        <a:srgbClr val="DCD5C1"/>
+                      </a:solidFill>
+                      <a:prstDash val="solid"/>
+                      <a:round/>
+                      <a:headEnd type="none" w="med" len="med"/>
+                      <a:tailEnd type="none" w="med" len="med"/>
+                    </a:lnB>
+                    <a:solidFill>
+                      <a:srgbClr val="F4F7F8"/>
+                    </a:solidFill>
+                  </a:tcPr>
+                </a:tc>
+              </a:tr>
+              <a:tr h="0">
+                <a:tc>
+                  <a:txBody>
+                    <a:bodyPr/>
+                    <a:lstStyle/>
+                    <a:p>
+                      <a:pPr indent="0" marL="0">
+                        <a:buNone/>
+                      </a:pPr>
+                      <a:r>
+                        <a:rPr lang="en-US" sz="1250" b="1" dirty="0">
+                          <a:solidFill>
+                            <a:srgbClr val="1F2A37"/>
+                          </a:solidFill>
+                          <a:latin typeface="Calibri" pitchFamily="34" charset="0"/>
+                          <a:ea typeface="Calibri" pitchFamily="34" charset="-122"/>
+                          <a:cs typeface="Calibri" pitchFamily="34" charset="-120"/>
+                        </a:rPr>
+                        <a:t>Economia mista</a:t>
+                      </a:r>
+                      <a:endParaRPr lang="en-US" sz="1250" dirty="0">
+                        <a:latin typeface="Calibri" charset="0"/>
+                        <a:ea typeface="Calibri" charset="0"/>
+                        <a:cs typeface="Calibri" charset="0"/>
+                      </a:endParaRPr>
+                    </a:p>
+                  </a:txBody>
+                  <a:tcPr marL="50800" marR="50800" marT="50800" marB="50800" anchor="ctr">
+                    <a:lnL w="9525" cap="flat" cmpd="sng" algn="ctr">
+                      <a:solidFill>
+                        <a:srgbClr val="DCD5C1"/>
+                      </a:solidFill>
+                      <a:prstDash val="solid"/>
+                      <a:round/>
+                      <a:headEnd type="none" w="med" len="med"/>
+                      <a:tailEnd type="none" w="med" len="med"/>
+                    </a:lnL>
+                    <a:lnR w="9525" cap="flat" cmpd="sng" algn="ctr">
+                      <a:solidFill>
+                        <a:srgbClr val="DCD5C1"/>
+                      </a:solidFill>
+                      <a:prstDash val="solid"/>
+                      <a:round/>
+                      <a:headEnd type="none" w="med" len="med"/>
+                      <a:tailEnd type="none" w="med" len="med"/>
+                    </a:lnR>
+                    <a:lnT w="9525" cap="flat" cmpd="sng" algn="ctr">
+                      <a:solidFill>
+                        <a:srgbClr val="DCD5C1"/>
+                      </a:solidFill>
+                      <a:prstDash val="solid"/>
+                      <a:round/>
+                      <a:headEnd type="none" w="med" len="med"/>
+                      <a:tailEnd type="none" w="med" len="med"/>
+                    </a:lnT>
+                    <a:lnB w="9525" cap="flat" cmpd="sng" algn="ctr">
+                      <a:solidFill>
+                        <a:srgbClr val="DCD5C1"/>
+                      </a:solidFill>
+                      <a:prstDash val="solid"/>
+                      <a:round/>
+                      <a:headEnd type="none" w="med" len="med"/>
+                      <a:tailEnd type="none" w="med" len="med"/>
+                    </a:lnB>
+                    <a:solidFill>
+                      <a:srgbClr val="FFFFFF"/>
+                    </a:solidFill>
+                  </a:tcPr>
+                </a:tc>
+                <a:tc>
+                  <a:txBody>
+                    <a:bodyPr/>
+                    <a:lstStyle/>
+                    <a:p>
+                      <a:pPr indent="0" marL="0">
+                        <a:buNone/>
+                      </a:pPr>
+                      <a:r>
+                        <a:rPr lang="en-US" sz="1250" dirty="0">
+                          <a:solidFill>
+                            <a:srgbClr val="1F2A37"/>
+                          </a:solidFill>
+                          <a:latin typeface="Calibri" pitchFamily="34" charset="0"/>
+                          <a:ea typeface="Calibri" pitchFamily="34" charset="-122"/>
+                          <a:cs typeface="Calibri" pitchFamily="34" charset="-120"/>
+                        </a:rPr>
+                        <a:t>Mercado e Estado</a:t>
+                      </a:r>
+                      <a:endParaRPr lang="en-US" sz="1250" dirty="0">
+                        <a:latin typeface="Calibri" charset="0"/>
+                        <a:ea typeface="Calibri" charset="0"/>
+                        <a:cs typeface="Calibri" charset="0"/>
+                      </a:endParaRPr>
+                    </a:p>
+                  </a:txBody>
+                  <a:tcPr marL="50800" marR="50800" marT="50800" marB="50800" anchor="ctr">
+                    <a:lnL w="9525" cap="flat" cmpd="sng" algn="ctr">
+                      <a:solidFill>
+                        <a:srgbClr val="DCD5C1"/>
+                      </a:solidFill>
+                      <a:prstDash val="solid"/>
+                      <a:round/>
+                      <a:headEnd type="none" w="med" len="med"/>
+                      <a:tailEnd type="none" w="med" len="med"/>
+                    </a:lnL>
+                    <a:lnR w="9525" cap="flat" cmpd="sng" algn="ctr">
+                      <a:solidFill>
+                        <a:srgbClr val="DCD5C1"/>
+                      </a:solidFill>
+                      <a:prstDash val="solid"/>
+                      <a:round/>
+                      <a:headEnd type="none" w="med" len="med"/>
+                      <a:tailEnd type="none" w="med" len="med"/>
+                    </a:lnR>
+                    <a:lnT w="9525" cap="flat" cmpd="sng" algn="ctr">
+                      <a:solidFill>
+                        <a:srgbClr val="DCD5C1"/>
+                      </a:solidFill>
+                      <a:prstDash val="solid"/>
+                      <a:round/>
+                      <a:headEnd type="none" w="med" len="med"/>
+                      <a:tailEnd type="none" w="med" len="med"/>
+                    </a:lnT>
+                    <a:lnB w="9525" cap="flat" cmpd="sng" algn="ctr">
+                      <a:solidFill>
+                        <a:srgbClr val="DCD5C1"/>
+                      </a:solidFill>
+                      <a:prstDash val="solid"/>
+                      <a:round/>
+                      <a:headEnd type="none" w="med" len="med"/>
+                      <a:tailEnd type="none" w="med" len="med"/>
+                    </a:lnB>
+                    <a:solidFill>
+                      <a:srgbClr val="FFFFFF"/>
+                    </a:solidFill>
+                  </a:tcPr>
+                </a:tc>
+                <a:tc>
+                  <a:txBody>
+                    <a:bodyPr/>
+                    <a:lstStyle/>
+                    <a:p>
+                      <a:pPr indent="0" marL="0">
+                        <a:buNone/>
+                      </a:pPr>
+                      <a:r>
+                        <a:rPr lang="en-US" sz="1250" dirty="0">
+                          <a:solidFill>
+                            <a:srgbClr val="1F2A37"/>
+                          </a:solidFill>
+                          <a:latin typeface="Calibri" pitchFamily="34" charset="0"/>
+                          <a:ea typeface="Calibri" pitchFamily="34" charset="-122"/>
+                          <a:cs typeface="Calibri" pitchFamily="34" charset="-120"/>
+                        </a:rPr>
+                        <a:t>Preços, com regulação e intervenção estatal</a:t>
+                      </a:r>
+                      <a:endParaRPr lang="en-US" sz="1250" dirty="0">
+                        <a:latin typeface="Calibri" charset="0"/>
+                        <a:ea typeface="Calibri" charset="0"/>
+                        <a:cs typeface="Calibri" charset="0"/>
+                      </a:endParaRPr>
+                    </a:p>
+                  </a:txBody>
+                  <a:tcPr marL="50800" marR="50800" marT="50800" marB="50800" anchor="ctr">
+                    <a:lnL w="9525" cap="flat" cmpd="sng" algn="ctr">
+                      <a:solidFill>
+                        <a:srgbClr val="DCD5C1"/>
+                      </a:solidFill>
+                      <a:prstDash val="solid"/>
+                      <a:round/>
+                      <a:headEnd type="none" w="med" len="med"/>
+                      <a:tailEnd type="none" w="med" len="med"/>
+                    </a:lnL>
+                    <a:lnR w="9525" cap="flat" cmpd="sng" algn="ctr">
+                      <a:solidFill>
+                        <a:srgbClr val="DCD5C1"/>
+                      </a:solidFill>
+                      <a:prstDash val="solid"/>
+                      <a:round/>
+                      <a:headEnd type="none" w="med" len="med"/>
+                      <a:tailEnd type="none" w="med" len="med"/>
+                    </a:lnR>
+                    <a:lnT w="9525" cap="flat" cmpd="sng" algn="ctr">
+                      <a:solidFill>
+                        <a:srgbClr val="DCD5C1"/>
+                      </a:solidFill>
+                      <a:prstDash val="solid"/>
+                      <a:round/>
+                      <a:headEnd type="none" w="med" len="med"/>
+                      <a:tailEnd type="none" w="med" len="med"/>
+                    </a:lnT>
+                    <a:lnB w="9525" cap="flat" cmpd="sng" algn="ctr">
+                      <a:solidFill>
+                        <a:srgbClr val="DCD5C1"/>
+                      </a:solidFill>
+                      <a:prstDash val="solid"/>
+                      <a:round/>
+                      <a:headEnd type="none" w="med" len="med"/>
+                      <a:tailEnd type="none" w="med" len="med"/>
+                    </a:lnB>
+                    <a:solidFill>
+                      <a:srgbClr val="FFFFFF"/>
+                    </a:solidFill>
+                  </a:tcPr>
+                </a:tc>
+                <a:tc>
+                  <a:txBody>
+                    <a:bodyPr/>
+                    <a:lstStyle/>
+                    <a:p>
+                      <a:pPr indent="0" marL="0">
+                        <a:buNone/>
+                      </a:pPr>
+                      <a:r>
+                        <a:rPr lang="en-US" sz="1250" dirty="0">
+                          <a:solidFill>
+                            <a:srgbClr val="1F2A37"/>
+                          </a:solidFill>
+                          <a:latin typeface="Calibri" pitchFamily="34" charset="0"/>
+                          <a:ea typeface="Calibri" pitchFamily="34" charset="-122"/>
+                          <a:cs typeface="Calibri" pitchFamily="34" charset="-120"/>
+                        </a:rPr>
+                        <a:t>Privada, com empresas e serviços públicos</a:t>
+                      </a:r>
+                      <a:endParaRPr lang="en-US" sz="1250" dirty="0">
+                        <a:latin typeface="Calibri" charset="0"/>
+                        <a:ea typeface="Calibri" charset="0"/>
+                        <a:cs typeface="Calibri" charset="0"/>
+                      </a:endParaRPr>
+                    </a:p>
+                  </a:txBody>
+                  <a:tcPr marL="50800" marR="50800" marT="50800" marB="50800" anchor="ctr">
+                    <a:lnL w="9525" cap="flat" cmpd="sng" algn="ctr">
+                      <a:solidFill>
+                        <a:srgbClr val="DCD5C1"/>
+                      </a:solidFill>
+                      <a:prstDash val="solid"/>
+                      <a:round/>
+                      <a:headEnd type="none" w="med" len="med"/>
+                      <a:tailEnd type="none" w="med" len="med"/>
+                    </a:lnL>
+                    <a:lnR w="9525" cap="flat" cmpd="sng" algn="ctr">
+                      <a:solidFill>
+                        <a:srgbClr val="DCD5C1"/>
+                      </a:solidFill>
+                      <a:prstDash val="solid"/>
+                      <a:round/>
+                      <a:headEnd type="none" w="med" len="med"/>
+                      <a:tailEnd type="none" w="med" len="med"/>
+                    </a:lnR>
+                    <a:lnT w="9525" cap="flat" cmpd="sng" algn="ctr">
+                      <a:solidFill>
+                        <a:srgbClr val="DCD5C1"/>
+                      </a:solidFill>
+                      <a:prstDash val="solid"/>
+                      <a:round/>
+                      <a:headEnd type="none" w="med" len="med"/>
+                      <a:tailEnd type="none" w="med" len="med"/>
+                    </a:lnT>
+                    <a:lnB w="9525" cap="flat" cmpd="sng" algn="ctr">
+                      <a:solidFill>
+                        <a:srgbClr val="DCD5C1"/>
+                      </a:solidFill>
+                      <a:prstDash val="solid"/>
+                      <a:round/>
+                      <a:headEnd type="none" w="med" len="med"/>
+                      <a:tailEnd type="none" w="med" len="med"/>
+                    </a:lnB>
+                    <a:solidFill>
+                      <a:srgbClr val="FFFFFF"/>
+                    </a:solidFill>
+                  </a:tcPr>
+                </a:tc>
+              </a:tr>
+            </a:tbl>
+          </a:graphicData>
+        </a:graphic>
+      </p:graphicFrame>
+      <p:sp>
+        <p:nvSpPr>
+          <p:cNvPr id="5" name="Text 2"/>
+          <p:cNvSpPr txBox="1"/>
+          <p:nvPr/>
+        </p:nvSpPr>
+        <p:spPr>
+          <a:xfrm>
+            <a:off x="685800" y="3703320"/>
+            <a:ext cx="7772400" cy="640080"/>
           </a:xfrm>
           <a:prstGeom prst="roundRect">
             <a:avLst>
-              <a:gd name="adj" fmla="val 3429"/>
-            </a:avLst>
-          </a:prstGeom>
-          <a:solidFill>
-            <a:srgbClr val="FFFFFF"/>
-          </a:solidFill>
-          <a:ln w="12700">
-            <a:solidFill>
-              <a:srgbClr val="DCD5C1"/>
-            </a:solidFill>
-            <a:prstDash val="solid"/>
-          </a:ln>
-        </p:spPr>
-      </p:sp>
-      <p:sp>
-        <p:nvSpPr>
-          <p:cNvPr id="5" name="Shape 3"/>
-          <p:cNvSpPr/>
-          <p:nvPr/>
-        </p:nvSpPr>
-        <p:spPr>
-          <a:xfrm>
-            <a:off x="822960" y="1481328"/>
-            <a:ext cx="457200" cy="457200"/>
-          </a:xfrm>
-          <a:prstGeom prst="roundRect">
-            <a:avLst>
-              <a:gd name="adj" fmla="val 16000"/>
-            </a:avLst>
-          </a:prstGeom>
-          <a:solidFill>
-            <a:srgbClr val="13294B"/>
-          </a:solidFill>
-          <a:ln/>
-        </p:spPr>
-      </p:sp>
-      <p:pic>
-        <p:nvPicPr>
-          <p:cNvPr id="6" name="Image 0" descr="/tmp/claude-0/-home-user-zero-claude/d7e33190-c541-582c-a7cc-1156817732ce/scratchpad/deck/assets/icon_FaStore.png">    </p:cNvPr>
-          <p:cNvPicPr>
-            <a:picLocks noChangeAspect="1"/>
-          </p:cNvPicPr>
-          <p:nvPr/>
-        </p:nvPicPr>
-        <p:blipFill>
-          <a:blip r:embed="rId2"/>
-          <a:stretch>
-            <a:fillRect/>
-          </a:stretch>
-        </p:blipFill>
-        <p:spPr>
-          <a:xfrm>
-            <a:off x="923544" y="1581912"/>
-            <a:ext cx="256032" cy="256032"/>
-          </a:xfrm>
-          <a:prstGeom prst="rect">
-            <a:avLst/>
-          </a:prstGeom>
-        </p:spPr>
-      </p:pic>
-      <p:sp>
-        <p:nvSpPr>
-          <p:cNvPr id="7" name="Text 4"/>
-          <p:cNvSpPr txBox="1"/>
-          <p:nvPr/>
-        </p:nvSpPr>
-        <p:spPr>
-          <a:xfrm>
-            <a:off x="1371600" y="1399032"/>
-            <a:ext cx="1679448" cy="1453896"/>
-          </a:xfrm>
-          <a:prstGeom prst="rect">
-            <a:avLst/>
-          </a:prstGeom>
-          <a:noFill/>
-          <a:ln/>
-        </p:spPr>
-        <p:txBody>
-          <a:bodyPr wrap="square" lIns="38100" tIns="38100" rIns="38100" bIns="38100" rtlCol="0" anchor="t"/>
-          <a:lstStyle/>
-          <a:p>
-            <a:pPr algn="l" indent="0" marL="0">
-              <a:lnSpc>
-                <a:spcPct val="100000"/>
-              </a:lnSpc>
-              <a:spcAft>
-                <a:spcPts val="300"/>
-              </a:spcAft>
-              <a:buNone/>
-            </a:pPr>
-            <a:r>
-              <a:rPr lang="en-US" sz="1600" b="1" dirty="0">
-                <a:solidFill>
-                  <a:srgbClr val="13294B"/>
-                </a:solidFill>
-                <a:latin typeface="Calibri" pitchFamily="34" charset="0"/>
-                <a:ea typeface="Calibri" pitchFamily="34" charset="-122"/>
-                <a:cs typeface="Calibri" pitchFamily="34" charset="-120"/>
-              </a:rPr>
-              <a:t>De mercado</a:t>
-            </a:r>
-            <a:endParaRPr lang="en-US" sz="1600" dirty="0"/>
-          </a:p>
-          <a:p>
-            <a:pPr algn="l" indent="0" marL="0">
-              <a:lnSpc>
-                <a:spcPct val="100000"/>
-              </a:lnSpc>
-              <a:buNone/>
-            </a:pPr>
-            <a:r>
-              <a:rPr lang="en-US" sz="1350" dirty="0">
-                <a:solidFill>
-                  <a:srgbClr val="1F2A37"/>
-                </a:solidFill>
-                <a:latin typeface="Calibri" pitchFamily="34" charset="0"/>
-                <a:ea typeface="Calibri" pitchFamily="34" charset="-122"/>
-                <a:cs typeface="Calibri" pitchFamily="34" charset="-120"/>
-              </a:rPr>
-              <a:t>Decisões descentralizadas, coordenadas pelos preços. Propriedade privada.</a:t>
-            </a:r>
-            <a:endParaRPr lang="en-US" sz="1600" dirty="0"/>
-          </a:p>
-        </p:txBody>
-      </p:sp>
-      <p:sp>
-        <p:nvSpPr>
-          <p:cNvPr id="8" name="Shape 5"/>
-          <p:cNvSpPr/>
-          <p:nvPr/>
-        </p:nvSpPr>
-        <p:spPr>
-          <a:xfrm>
-            <a:off x="3343656" y="1325880"/>
-            <a:ext cx="2456688" cy="1600200"/>
-          </a:xfrm>
-          <a:prstGeom prst="roundRect">
-            <a:avLst>
-              <a:gd name="adj" fmla="val 3429"/>
-            </a:avLst>
-          </a:prstGeom>
-          <a:solidFill>
-            <a:srgbClr val="FFFFFF"/>
-          </a:solidFill>
-          <a:ln w="12700">
-            <a:solidFill>
-              <a:srgbClr val="DCD5C1"/>
-            </a:solidFill>
-            <a:prstDash val="solid"/>
-          </a:ln>
-        </p:spPr>
-      </p:sp>
-      <p:sp>
-        <p:nvSpPr>
-          <p:cNvPr id="9" name="Shape 6"/>
-          <p:cNvSpPr/>
-          <p:nvPr/>
-        </p:nvSpPr>
-        <p:spPr>
-          <a:xfrm>
-            <a:off x="3480816" y="1481328"/>
-            <a:ext cx="457200" cy="457200"/>
-          </a:xfrm>
-          <a:prstGeom prst="roundRect">
-            <a:avLst>
-              <a:gd name="adj" fmla="val 16000"/>
-            </a:avLst>
-          </a:prstGeom>
-          <a:solidFill>
-            <a:srgbClr val="13294B"/>
-          </a:solidFill>
-          <a:ln/>
-        </p:spPr>
-      </p:sp>
-      <p:pic>
-        <p:nvPicPr>
-          <p:cNvPr id="10" name="Image 1" descr="/tmp/claude-0/-home-user-zero-claude/d7e33190-c541-582c-a7cc-1156817732ce/scratchpad/deck/assets/icon_FaClipboardList.png">    </p:cNvPr>
-          <p:cNvPicPr>
-            <a:picLocks noChangeAspect="1"/>
-          </p:cNvPicPr>
-          <p:nvPr/>
-        </p:nvPicPr>
-        <p:blipFill>
-          <a:blip r:embed="rId3"/>
-          <a:stretch>
-            <a:fillRect/>
-          </a:stretch>
-        </p:blipFill>
-        <p:spPr>
-          <a:xfrm>
-            <a:off x="3581400" y="1581912"/>
-            <a:ext cx="256032" cy="256032"/>
-          </a:xfrm>
-          <a:prstGeom prst="rect">
-            <a:avLst/>
-          </a:prstGeom>
-        </p:spPr>
-      </p:pic>
-      <p:sp>
-        <p:nvSpPr>
-          <p:cNvPr id="11" name="Text 7"/>
-          <p:cNvSpPr txBox="1"/>
-          <p:nvPr/>
-        </p:nvSpPr>
-        <p:spPr>
-          <a:xfrm>
-            <a:off x="4029456" y="1399032"/>
-            <a:ext cx="1679448" cy="1453896"/>
-          </a:xfrm>
-          <a:prstGeom prst="rect">
-            <a:avLst/>
-          </a:prstGeom>
-          <a:noFill/>
-          <a:ln/>
-        </p:spPr>
-        <p:txBody>
-          <a:bodyPr wrap="square" lIns="38100" tIns="38100" rIns="38100" bIns="38100" rtlCol="0" anchor="t"/>
-          <a:lstStyle/>
-          <a:p>
-            <a:pPr algn="l" indent="0" marL="0">
-              <a:lnSpc>
-                <a:spcPct val="100000"/>
-              </a:lnSpc>
-              <a:spcAft>
-                <a:spcPts val="300"/>
-              </a:spcAft>
-              <a:buNone/>
-            </a:pPr>
-            <a:r>
-              <a:rPr lang="en-US" sz="1600" b="1" dirty="0">
-                <a:solidFill>
-                  <a:srgbClr val="13294B"/>
-                </a:solidFill>
-                <a:latin typeface="Calibri" pitchFamily="34" charset="0"/>
-                <a:ea typeface="Calibri" pitchFamily="34" charset="-122"/>
-                <a:cs typeface="Calibri" pitchFamily="34" charset="-120"/>
-              </a:rPr>
-              <a:t>Planificado</a:t>
-            </a:r>
-            <a:endParaRPr lang="en-US" sz="1600" dirty="0"/>
-          </a:p>
-          <a:p>
-            <a:pPr algn="l" indent="0" marL="0">
-              <a:lnSpc>
-                <a:spcPct val="100000"/>
-              </a:lnSpc>
-              <a:buNone/>
-            </a:pPr>
-            <a:r>
-              <a:rPr lang="en-US" sz="1350" dirty="0">
-                <a:solidFill>
-                  <a:srgbClr val="1F2A37"/>
-                </a:solidFill>
-                <a:latin typeface="Calibri" pitchFamily="34" charset="0"/>
-                <a:ea typeface="Calibri" pitchFamily="34" charset="-122"/>
-                <a:cs typeface="Calibri" pitchFamily="34" charset="-120"/>
-              </a:rPr>
-              <a:t>Um órgão central define metas de produção. Propriedade estatal ou coletiva.</a:t>
-            </a:r>
-            <a:endParaRPr lang="en-US" sz="1600" dirty="0"/>
-          </a:p>
-        </p:txBody>
-      </p:sp>
-      <p:sp>
-        <p:nvSpPr>
-          <p:cNvPr id="12" name="Shape 8"/>
-          <p:cNvSpPr/>
-          <p:nvPr/>
-        </p:nvSpPr>
-        <p:spPr>
-          <a:xfrm>
-            <a:off x="6001512" y="1325880"/>
-            <a:ext cx="2456688" cy="1600200"/>
-          </a:xfrm>
-          <a:prstGeom prst="roundRect">
-            <a:avLst>
-              <a:gd name="adj" fmla="val 3429"/>
-            </a:avLst>
-          </a:prstGeom>
-          <a:solidFill>
-            <a:srgbClr val="FFFFFF"/>
-          </a:solidFill>
-          <a:ln w="12700">
-            <a:solidFill>
-              <a:srgbClr val="DCD5C1"/>
-            </a:solidFill>
-            <a:prstDash val="solid"/>
-          </a:ln>
-        </p:spPr>
-      </p:sp>
-      <p:sp>
-        <p:nvSpPr>
-          <p:cNvPr id="13" name="Shape 9"/>
-          <p:cNvSpPr/>
-          <p:nvPr/>
-        </p:nvSpPr>
-        <p:spPr>
-          <a:xfrm>
-            <a:off x="6138672" y="1481328"/>
-            <a:ext cx="457200" cy="457200"/>
-          </a:xfrm>
-          <a:prstGeom prst="roundRect">
-            <a:avLst>
-              <a:gd name="adj" fmla="val 16000"/>
-            </a:avLst>
-          </a:prstGeom>
-          <a:solidFill>
-            <a:srgbClr val="13294B"/>
-          </a:solidFill>
-          <a:ln/>
-        </p:spPr>
-      </p:sp>
-      <p:pic>
-        <p:nvPicPr>
-          <p:cNvPr id="14" name="Image 2" descr="/tmp/claude-0/-home-user-zero-claude/d7e33190-c541-582c-a7cc-1156817732ce/scratchpad/deck/assets/icon_FaBalanceScale.png">    </p:cNvPr>
-          <p:cNvPicPr>
-            <a:picLocks noChangeAspect="1"/>
-          </p:cNvPicPr>
-          <p:nvPr/>
-        </p:nvPicPr>
-        <p:blipFill>
-          <a:blip r:embed="rId4"/>
-          <a:stretch>
-            <a:fillRect/>
-          </a:stretch>
-        </p:blipFill>
-        <p:spPr>
-          <a:xfrm>
-            <a:off x="6239256" y="1581912"/>
-            <a:ext cx="256032" cy="256032"/>
-          </a:xfrm>
-          <a:prstGeom prst="rect">
-            <a:avLst/>
-          </a:prstGeom>
-        </p:spPr>
-      </p:pic>
-      <p:sp>
-        <p:nvSpPr>
-          <p:cNvPr id="15" name="Text 10"/>
-          <p:cNvSpPr txBox="1"/>
-          <p:nvPr/>
-        </p:nvSpPr>
-        <p:spPr>
-          <a:xfrm>
-            <a:off x="6687312" y="1399032"/>
-            <a:ext cx="1679448" cy="1453896"/>
-          </a:xfrm>
-          <a:prstGeom prst="rect">
-            <a:avLst/>
-          </a:prstGeom>
-          <a:noFill/>
-          <a:ln/>
-        </p:spPr>
-        <p:txBody>
-          <a:bodyPr wrap="square" lIns="38100" tIns="38100" rIns="38100" bIns="38100" rtlCol="0" anchor="t"/>
-          <a:lstStyle/>
-          <a:p>
-            <a:pPr algn="l" indent="0" marL="0">
-              <a:lnSpc>
-                <a:spcPct val="100000"/>
-              </a:lnSpc>
-              <a:spcAft>
-                <a:spcPts val="300"/>
-              </a:spcAft>
-              <a:buNone/>
-            </a:pPr>
-            <a:r>
-              <a:rPr lang="en-US" sz="1600" b="1" dirty="0">
-                <a:solidFill>
-                  <a:srgbClr val="13294B"/>
-                </a:solidFill>
-                <a:latin typeface="Calibri" pitchFamily="34" charset="0"/>
-                <a:ea typeface="Calibri" pitchFamily="34" charset="-122"/>
-                <a:cs typeface="Calibri" pitchFamily="34" charset="-120"/>
-              </a:rPr>
-              <a:t>Misto</a:t>
-            </a:r>
-            <a:endParaRPr lang="en-US" sz="1600" dirty="0"/>
-          </a:p>
-          <a:p>
-            <a:pPr algn="l" indent="0" marL="0">
-              <a:lnSpc>
-                <a:spcPct val="100000"/>
-              </a:lnSpc>
-              <a:buNone/>
-            </a:pPr>
-            <a:r>
-              <a:rPr lang="en-US" sz="1350" dirty="0">
-                <a:solidFill>
-                  <a:srgbClr val="1F2A37"/>
-                </a:solidFill>
-                <a:latin typeface="Calibri" pitchFamily="34" charset="0"/>
-                <a:ea typeface="Calibri" pitchFamily="34" charset="-122"/>
-                <a:cs typeface="Calibri" pitchFamily="34" charset="-120"/>
-              </a:rPr>
-              <a:t>Mercado com regulação, empresas públicas e políticas sociais.</a:t>
-            </a:r>
-            <a:endParaRPr lang="en-US" sz="1600" dirty="0"/>
-          </a:p>
-        </p:txBody>
-      </p:sp>
-      <p:sp>
-        <p:nvSpPr>
-          <p:cNvPr id="16" name="Text 11"/>
-          <p:cNvSpPr txBox="1"/>
-          <p:nvPr/>
-        </p:nvSpPr>
-        <p:spPr>
-          <a:xfrm>
-            <a:off x="685800" y="3200400"/>
-            <a:ext cx="7772400" cy="731520"/>
-          </a:xfrm>
-          <a:prstGeom prst="roundRect">
-            <a:avLst>
-              <a:gd name="adj" fmla="val 10000"/>
+              <a:gd name="adj" fmla="val 11429"/>
             </a:avLst>
           </a:prstGeom>
           <a:solidFill>
@@ -27906,7 +29941,7 @@
               <a:buNone/>
             </a:pPr>
             <a:r>
-              <a:rPr lang="en-US" sz="1600" b="1" dirty="0">
+              <a:rPr lang="en-US" sz="1500" b="1" dirty="0">
                 <a:solidFill>
                   <a:srgbClr val="13294B"/>
                 </a:solidFill>
@@ -27916,13 +29951,13 @@
               </a:rPr>
               <a:t>Todas as economias atuais são mistas. O que muda é o grau de presença do Estado.</a:t>
             </a:r>
-            <a:endParaRPr lang="en-US" sz="1600" dirty="0"/>
-          </a:p>
-        </p:txBody>
-      </p:sp>
-      <p:sp>
-        <p:nvSpPr>
-          <p:cNvPr id="17" name="Text 12"/>
+            <a:endParaRPr lang="en-US" sz="1500" dirty="0"/>
+          </a:p>
+        </p:txBody>
+      </p:sp>
+      <p:sp>
+        <p:nvSpPr>
+          <p:cNvPr id="6" name="Text 3"/>
           <p:cNvSpPr txBox="1"/>
           <p:nvPr/>
         </p:nvSpPr>

--- a/disciplina-01-estado-governo-mercado/materiais/01_Unidade_1_Introducao_a_Economia_Estado_Governo_Mercado.pptx
+++ b/disciplina-01-estado-governo-mercado/materiais/01_Unidade_1_Introducao_a_Economia_Estado_Governo_Mercado.pptx
@@ -43,9 +43,10 @@
     <p:sldId id="291" r:id="rId37"/>
     <p:sldId id="292" r:id="rId38"/>
     <p:sldId id="293" r:id="rId39"/>
+    <p:sldId id="294" r:id="rId40"/>
   </p:sldIdLst>
   <p:notesMasterIdLst>
-    <p:notesMasterId r:id="rId40"/>
+    <p:notesMasterId r:id="rId41"/>
   </p:notesMasterIdLst>
   <p:sldSz cx="9144000" cy="5143500"/>
   <p:notesSz cx="5143500" cy="9144000"/>
@@ -4331,7 +4332,7 @@
           <a:p>
             <a:r>
               <a:rPr lang="en-US" dirty="0"/>
-              <a:t>A resposta correta é a letra b: Distributiva. São instrumentos da função distributiva: cobram mais de quem tem mais e reduzem o custo para as famílias de baixa renda. Com isso, encerramos a Unidade 1. Revise os conceitos, participe dos fóruns e até a próxima videoaula!</a:t>
+              <a:t>A resposta correta é a letra b: Distributiva. São instrumentos da função distributiva: cobram mais de quem tem mais e reduzem o custo para as famílias de baixa renda.</a:t>
             </a:r>
             <a:endParaRPr lang="en-US" dirty="0"/>
           </a:p>
@@ -4355,6 +4356,94 @@
             <a:fld id="{F7021451-1387-4CA6-816F-3879F97B5CBC}" type="slidenum">
               <a:rPr lang="en-US"/>
               <a:t>38</a:t>
+            </a:fld>
+            <a:endParaRPr lang="en-US"/>
+          </a:p>
+        </p:txBody>
+      </p:sp>
+    </p:spTree>
+    <p:extLst>
+      <p:ext uri="{BB962C8B-B14F-4D97-AF65-F5344CB8AC3E}">
+        <p14:creationId xmlns:p14="http://schemas.microsoft.com/office/powerpoint/2010/main" val="1024086991"/>
+      </p:ext>
+    </p:extLst>
+  </p:cSld>
+  <p:clrMapOvr>
+    <a:masterClrMapping/>
+  </p:clrMapOvr>
+</p:notes>
+</file>
+
+<file path=ppt/notesSlides/notesSlide39.xml><?xml version="1.0" encoding="utf-8"?>
+<p:notes xmlns:a="http://schemas.openxmlformats.org/drawingml/2006/main" xmlns:r="http://schemas.openxmlformats.org/officeDocument/2006/relationships" xmlns:p="http://schemas.openxmlformats.org/presentationml/2006/main">
+  <p:cSld>
+    <p:spTree>
+      <p:nvGrpSpPr>
+        <p:cNvPr id="1" name=""/>
+        <p:cNvGrpSpPr/>
+        <p:nvPr/>
+      </p:nvGrpSpPr>
+      <p:grpSpPr>
+        <a:xfrm>
+          <a:off x="0" y="0"/>
+          <a:ext cx="0" cy="0"/>
+          <a:chOff x="0" y="0"/>
+          <a:chExt cx="0" cy="0"/>
+        </a:xfrm>
+      </p:grpSpPr>
+      <p:sp>
+        <p:nvSpPr>
+          <p:cNvPr id="2" name="Slide Image Placeholder 1"/>
+          <p:cNvSpPr>
+            <a:spLocks noGrp="1" noRot="1" noChangeAspect="1"/>
+          </p:cNvSpPr>
+          <p:nvPr>
+            <p:ph type="sldImg"/>
+          </p:nvPr>
+        </p:nvSpPr>
+        <p:spPr/>
+      </p:sp>
+      <p:sp>
+        <p:nvSpPr>
+          <p:cNvPr id="3" name="Notes Placeholder 2"/>
+          <p:cNvSpPr>
+            <a:spLocks noGrp="1"/>
+          </p:cNvSpPr>
+          <p:nvPr>
+            <p:ph type="body" idx="1"/>
+          </p:nvPr>
+        </p:nvSpPr>
+        <p:spPr/>
+        <p:txBody>
+          <a:bodyPr/>
+          <a:lstStyle/>
+          <a:p>
+            <a:r>
+              <a:rPr lang="en-US" dirty="0"/>
+              <a:t>Para fechar a Unidade 1, vamos recapitular. [Apontar para o quadro da esquerda.] No tópico 1, vimos que a economia estuda como a sociedade faz escolhas com recursos escassos, e que toda escolha tem um custo de oportunidade. Toda sociedade precisa responder o que, como e para quem produzir. Conhecemos os fatores de produção e os agentes econômicos, vimos que os preços coordenam o mercado, que todas as economias atuais são mistas, e a diferença entre micro e macroeconomia. [Apontar para o quadro da direita.] No tópico 2, separamos Estado e governo: o Estado, com povo, território e soberania, é permanente; o governo é transitório. Com Weber, entendemos o Estado como o monopólio do uso legítimo da força. Vimos que o mercado depende de instituições garantidas pelo Estado, que as falhas de mercado justificam a ação estatal, mas que o Estado também falha, e conhecemos as três funções de Musgrave: alocativa, distributiva e estabilizadora. Na próxima unidade, estudaremos a dinâmica pendular e a matriz liberal. Revise os conceitos, participe dos fóruns e até a próxima videoaula!</a:t>
+            </a:r>
+            <a:endParaRPr lang="en-US" dirty="0"/>
+          </a:p>
+        </p:txBody>
+      </p:sp>
+      <p:sp>
+        <p:nvSpPr>
+          <p:cNvPr id="4" name="Slide Number Placeholder 3"/>
+          <p:cNvSpPr>
+            <a:spLocks noGrp="1"/>
+          </p:cNvSpPr>
+          <p:nvPr>
+            <p:ph type="sldNum" sz="quarter" idx="10"/>
+          </p:nvPr>
+        </p:nvSpPr>
+        <p:spPr/>
+        <p:txBody>
+          <a:bodyPr/>
+          <a:lstStyle/>
+          <a:p>
+            <a:fld id="{F7021451-1387-4CA6-816F-3879F97B5CBC}" type="slidenum">
+              <a:rPr lang="en-US"/>
+              <a:t>39</a:t>
             </a:fld>
             <a:endParaRPr lang="en-US"/>
           </a:p>
@@ -25065,6 +25154,605 @@
 </p:sld>
 </file>
 
+<file path=ppt/slides/slide39.xml><?xml version="1.0" encoding="utf-8"?>
+<p:sld xmlns:a="http://schemas.openxmlformats.org/drawingml/2006/main" xmlns:r="http://schemas.openxmlformats.org/officeDocument/2006/relationships" xmlns:p="http://schemas.openxmlformats.org/presentationml/2006/main">
+  <p:cSld name="Slide 39">
+    <p:bg>
+      <p:bgPr>
+        <a:blipFill dpi="0" rotWithShape="1">
+          <a:blip r:embed="rId1">
+            <a:lum/>
+          </a:blip>
+          <a:srcRect/>
+          <a:stretch>
+            <a:fillRect/>
+          </a:stretch>
+        </a:blipFill>
+        <a:effectLst/>
+      </p:bgPr>
+    </p:bg>
+    <p:spTree>
+      <p:nvGrpSpPr>
+        <p:cNvPr id="1" name=""/>
+        <p:cNvGrpSpPr/>
+        <p:nvPr/>
+      </p:nvGrpSpPr>
+      <p:grpSpPr>
+        <a:xfrm>
+          <a:off x="0" y="0"/>
+          <a:ext cx="0" cy="0"/>
+          <a:chOff x="0" y="0"/>
+          <a:chExt cx="0" cy="0"/>
+        </a:xfrm>
+      </p:grpSpPr>
+      <p:sp>
+        <p:nvSpPr>
+          <p:cNvPr id="2" name="Text 0"/>
+          <p:cNvSpPr txBox="1"/>
+          <p:nvPr/>
+        </p:nvSpPr>
+        <p:spPr>
+          <a:xfrm>
+            <a:off x="731520" y="256032"/>
+            <a:ext cx="7680960" cy="566928"/>
+          </a:xfrm>
+          <a:prstGeom prst="rect">
+            <a:avLst/>
+          </a:prstGeom>
+          <a:noFill/>
+          <a:ln/>
+        </p:spPr>
+        <p:txBody>
+          <a:bodyPr wrap="square" lIns="0" tIns="0" rIns="0" bIns="0" rtlCol="0" anchor="ctr"/>
+          <a:lstStyle/>
+          <a:p>
+            <a:pPr algn="ctr" indent="0" marL="0">
+              <a:lnSpc>
+                <a:spcPct val="100000"/>
+              </a:lnSpc>
+              <a:buNone/>
+            </a:pPr>
+            <a:r>
+              <a:rPr lang="en-US" sz="2800" b="1" dirty="0">
+                <a:solidFill>
+                  <a:srgbClr val="13294B"/>
+                </a:solidFill>
+                <a:latin typeface="Calibri" pitchFamily="34" charset="0"/>
+                <a:ea typeface="Calibri" pitchFamily="34" charset="-122"/>
+                <a:cs typeface="Calibri" pitchFamily="34" charset="-120"/>
+              </a:rPr>
+              <a:t>Resumo da Unidade 1</a:t>
+            </a:r>
+            <a:endParaRPr lang="en-US" sz="2800" dirty="0"/>
+          </a:p>
+        </p:txBody>
+      </p:sp>
+      <p:sp>
+        <p:nvSpPr>
+          <p:cNvPr id="3" name="Text 1"/>
+          <p:cNvSpPr txBox="1"/>
+          <p:nvPr/>
+        </p:nvSpPr>
+        <p:spPr>
+          <a:xfrm>
+            <a:off x="1005840" y="804672"/>
+            <a:ext cx="7132320" cy="329184"/>
+          </a:xfrm>
+          <a:prstGeom prst="rect">
+            <a:avLst/>
+          </a:prstGeom>
+          <a:noFill/>
+          <a:ln/>
+        </p:spPr>
+        <p:txBody>
+          <a:bodyPr wrap="square" lIns="0" tIns="0" rIns="0" bIns="0" rtlCol="0" anchor="ctr"/>
+          <a:lstStyle/>
+          <a:p>
+            <a:pPr algn="ctr" indent="0" marL="0">
+              <a:lnSpc>
+                <a:spcPct val="100000"/>
+              </a:lnSpc>
+              <a:buNone/>
+            </a:pPr>
+            <a:r>
+              <a:rPr lang="en-US" sz="1400" dirty="0">
+                <a:solidFill>
+                  <a:srgbClr val="5B6770"/>
+                </a:solidFill>
+                <a:latin typeface="Calibri" pitchFamily="34" charset="0"/>
+                <a:ea typeface="Calibri" pitchFamily="34" charset="-122"/>
+                <a:cs typeface="Calibri" pitchFamily="34" charset="-120"/>
+              </a:rPr>
+              <a:t>O que discutimos nesta unidade</a:t>
+            </a:r>
+            <a:endParaRPr lang="en-US" sz="1400" dirty="0"/>
+          </a:p>
+        </p:txBody>
+      </p:sp>
+      <p:sp>
+        <p:nvSpPr>
+          <p:cNvPr id="4" name="Text 2"/>
+          <p:cNvSpPr txBox="1"/>
+          <p:nvPr/>
+        </p:nvSpPr>
+        <p:spPr>
+          <a:xfrm>
+            <a:off x="685800" y="1170432"/>
+            <a:ext cx="3794760" cy="2743200"/>
+          </a:xfrm>
+          <a:prstGeom prst="roundRect">
+            <a:avLst>
+              <a:gd name="adj" fmla="val 2000"/>
+            </a:avLst>
+          </a:prstGeom>
+          <a:solidFill>
+            <a:srgbClr val="FFFFFF"/>
+          </a:solidFill>
+          <a:ln w="12700">
+            <a:solidFill>
+              <a:srgbClr val="DCD5C1"/>
+            </a:solidFill>
+          </a:ln>
+        </p:spPr>
+        <p:txBody>
+          <a:bodyPr wrap="square" lIns="114300" tIns="114300" rIns="114300" bIns="114300" rtlCol="0" anchor="t"/>
+          <a:lstStyle/>
+          <a:p>
+            <a:pPr algn="l" indent="0" marL="0">
+              <a:lnSpc>
+                <a:spcPct val="100000"/>
+              </a:lnSpc>
+              <a:spcAft>
+                <a:spcPts val="200"/>
+              </a:spcAft>
+              <a:buNone/>
+            </a:pPr>
+            <a:r>
+              <a:rPr lang="en-US" sz="1100" b="1" dirty="0">
+                <a:solidFill>
+                  <a:srgbClr val="2A8C85"/>
+                </a:solidFill>
+                <a:latin typeface="Calibri" pitchFamily="34" charset="0"/>
+                <a:ea typeface="Calibri" pitchFamily="34" charset="-122"/>
+                <a:cs typeface="Calibri" pitchFamily="34" charset="-120"/>
+              </a:rPr>
+              <a:t>PARTE 1 · TÓPICO 1</a:t>
+            </a:r>
+            <a:endParaRPr lang="en-US" sz="1100" dirty="0"/>
+          </a:p>
+          <a:p>
+            <a:pPr algn="l" indent="0" marL="0">
+              <a:lnSpc>
+                <a:spcPct val="100000"/>
+              </a:lnSpc>
+              <a:spcAft>
+                <a:spcPts val="400"/>
+              </a:spcAft>
+              <a:buNone/>
+            </a:pPr>
+            <a:r>
+              <a:rPr lang="en-US" sz="1450" b="1" dirty="0">
+                <a:solidFill>
+                  <a:srgbClr val="13294B"/>
+                </a:solidFill>
+                <a:latin typeface="Calibri" pitchFamily="34" charset="0"/>
+                <a:ea typeface="Calibri" pitchFamily="34" charset="-122"/>
+                <a:cs typeface="Calibri" pitchFamily="34" charset="-120"/>
+              </a:rPr>
+              <a:t>Introdução à economia</a:t>
+            </a:r>
+            <a:endParaRPr lang="en-US" sz="1100" dirty="0"/>
+          </a:p>
+          <a:p>
+            <a:pPr algn="l" marL="177800" indent="-177800">
+              <a:lnSpc>
+                <a:spcPct val="100000"/>
+              </a:lnSpc>
+              <a:spcAft>
+                <a:spcPts val="300"/>
+              </a:spcAft>
+              <a:buSzPct val="100000"/>
+              <a:buChar char="•"/>
+            </a:pPr>
+            <a:r>
+              <a:rPr lang="en-US" sz="1200" dirty="0">
+                <a:solidFill>
+                  <a:srgbClr val="1F2A37"/>
+                </a:solidFill>
+                <a:latin typeface="Calibri" pitchFamily="34" charset="0"/>
+                <a:ea typeface="Calibri" pitchFamily="34" charset="-122"/>
+                <a:cs typeface="Calibri" pitchFamily="34" charset="-120"/>
+              </a:rPr>
+              <a:t>Economia estuda escolhas com recursos escassos; toda escolha tem custo de oportunidade.</a:t>
+            </a:r>
+            <a:endParaRPr lang="en-US" sz="1100" dirty="0"/>
+          </a:p>
+          <a:p>
+            <a:pPr algn="l" marL="177800" indent="-177800">
+              <a:lnSpc>
+                <a:spcPct val="100000"/>
+              </a:lnSpc>
+              <a:spcAft>
+                <a:spcPts val="300"/>
+              </a:spcAft>
+              <a:buSzPct val="100000"/>
+              <a:buChar char="•"/>
+            </a:pPr>
+            <a:r>
+              <a:rPr lang="en-US" sz="1200" dirty="0">
+                <a:solidFill>
+                  <a:srgbClr val="1F2A37"/>
+                </a:solidFill>
+                <a:latin typeface="Calibri" pitchFamily="34" charset="0"/>
+                <a:ea typeface="Calibri" pitchFamily="34" charset="-122"/>
+                <a:cs typeface="Calibri" pitchFamily="34" charset="-120"/>
+              </a:rPr>
+              <a:t>Três problemas: o que, como e para quem produzir.</a:t>
+            </a:r>
+            <a:endParaRPr lang="en-US" sz="1100" dirty="0"/>
+          </a:p>
+          <a:p>
+            <a:pPr algn="l" marL="177800" indent="-177800">
+              <a:lnSpc>
+                <a:spcPct val="100000"/>
+              </a:lnSpc>
+              <a:spcAft>
+                <a:spcPts val="300"/>
+              </a:spcAft>
+              <a:buSzPct val="100000"/>
+              <a:buChar char="•"/>
+            </a:pPr>
+            <a:r>
+              <a:rPr lang="en-US" sz="1200" dirty="0">
+                <a:solidFill>
+                  <a:srgbClr val="1F2A37"/>
+                </a:solidFill>
+                <a:latin typeface="Calibri" pitchFamily="34" charset="0"/>
+                <a:ea typeface="Calibri" pitchFamily="34" charset="-122"/>
+                <a:cs typeface="Calibri" pitchFamily="34" charset="-120"/>
+              </a:rPr>
+              <a:t>Fatores (terra, trabalho, capital, capacidade empresarial) e agentes (famílias, empresas, governo, setor externo).</a:t>
+            </a:r>
+            <a:endParaRPr lang="en-US" sz="1100" dirty="0"/>
+          </a:p>
+          <a:p>
+            <a:pPr algn="l" marL="177800" indent="-177800">
+              <a:lnSpc>
+                <a:spcPct val="100000"/>
+              </a:lnSpc>
+              <a:spcAft>
+                <a:spcPts val="300"/>
+              </a:spcAft>
+              <a:buSzPct val="100000"/>
+              <a:buChar char="•"/>
+            </a:pPr>
+            <a:r>
+              <a:rPr lang="en-US" sz="1200" dirty="0">
+                <a:solidFill>
+                  <a:srgbClr val="1F2A37"/>
+                </a:solidFill>
+                <a:latin typeface="Calibri" pitchFamily="34" charset="0"/>
+                <a:ea typeface="Calibri" pitchFamily="34" charset="-122"/>
+                <a:cs typeface="Calibri" pitchFamily="34" charset="-120"/>
+              </a:rPr>
+              <a:t>Os preços coordenam o mercado; todas as economias são mistas.</a:t>
+            </a:r>
+            <a:endParaRPr lang="en-US" sz="1100" dirty="0"/>
+          </a:p>
+          <a:p>
+            <a:pPr algn="l" marL="177800" indent="-177800">
+              <a:lnSpc>
+                <a:spcPct val="100000"/>
+              </a:lnSpc>
+              <a:spcAft>
+                <a:spcPts val="300"/>
+              </a:spcAft>
+              <a:buSzPct val="100000"/>
+              <a:buChar char="•"/>
+            </a:pPr>
+            <a:r>
+              <a:rPr lang="en-US" sz="1200" dirty="0">
+                <a:solidFill>
+                  <a:srgbClr val="1F2A37"/>
+                </a:solidFill>
+                <a:latin typeface="Calibri" pitchFamily="34" charset="0"/>
+                <a:ea typeface="Calibri" pitchFamily="34" charset="-122"/>
+                <a:cs typeface="Calibri" pitchFamily="34" charset="-120"/>
+              </a:rPr>
+              <a:t>Micro estuda unidades individuais; macro, os agregados.</a:t>
+            </a:r>
+            <a:endParaRPr lang="en-US" sz="1100" dirty="0"/>
+          </a:p>
+        </p:txBody>
+      </p:sp>
+      <p:sp>
+        <p:nvSpPr>
+          <p:cNvPr id="5" name="Text 3"/>
+          <p:cNvSpPr txBox="1"/>
+          <p:nvPr/>
+        </p:nvSpPr>
+        <p:spPr>
+          <a:xfrm>
+            <a:off x="4663440" y="1170432"/>
+            <a:ext cx="3794760" cy="2743200"/>
+          </a:xfrm>
+          <a:prstGeom prst="roundRect">
+            <a:avLst>
+              <a:gd name="adj" fmla="val 2000"/>
+            </a:avLst>
+          </a:prstGeom>
+          <a:solidFill>
+            <a:srgbClr val="E6F2F0"/>
+          </a:solidFill>
+          <a:ln/>
+        </p:spPr>
+        <p:txBody>
+          <a:bodyPr wrap="square" lIns="114300" tIns="114300" rIns="114300" bIns="114300" rtlCol="0" anchor="t"/>
+          <a:lstStyle/>
+          <a:p>
+            <a:pPr algn="l" indent="0" marL="0">
+              <a:lnSpc>
+                <a:spcPct val="100000"/>
+              </a:lnSpc>
+              <a:spcAft>
+                <a:spcPts val="200"/>
+              </a:spcAft>
+              <a:buNone/>
+            </a:pPr>
+            <a:r>
+              <a:rPr lang="en-US" sz="1100" b="1" dirty="0">
+                <a:solidFill>
+                  <a:srgbClr val="2A8C85"/>
+                </a:solidFill>
+                <a:latin typeface="Calibri" pitchFamily="34" charset="0"/>
+                <a:ea typeface="Calibri" pitchFamily="34" charset="-122"/>
+                <a:cs typeface="Calibri" pitchFamily="34" charset="-120"/>
+              </a:rPr>
+              <a:t>PARTE 2 · TÓPICO 2</a:t>
+            </a:r>
+            <a:endParaRPr lang="en-US" sz="1100" dirty="0"/>
+          </a:p>
+          <a:p>
+            <a:pPr algn="l" indent="0" marL="0">
+              <a:lnSpc>
+                <a:spcPct val="100000"/>
+              </a:lnSpc>
+              <a:spcAft>
+                <a:spcPts val="400"/>
+              </a:spcAft>
+              <a:buNone/>
+            </a:pPr>
+            <a:r>
+              <a:rPr lang="en-US" sz="1450" b="1" dirty="0">
+                <a:solidFill>
+                  <a:srgbClr val="13294B"/>
+                </a:solidFill>
+                <a:latin typeface="Calibri" pitchFamily="34" charset="0"/>
+                <a:ea typeface="Calibri" pitchFamily="34" charset="-122"/>
+                <a:cs typeface="Calibri" pitchFamily="34" charset="-120"/>
+              </a:rPr>
+              <a:t>Estado, governo e mercado</a:t>
+            </a:r>
+            <a:endParaRPr lang="en-US" sz="1100" dirty="0"/>
+          </a:p>
+          <a:p>
+            <a:pPr algn="l" marL="177800" indent="-177800">
+              <a:lnSpc>
+                <a:spcPct val="100000"/>
+              </a:lnSpc>
+              <a:spcAft>
+                <a:spcPts val="300"/>
+              </a:spcAft>
+              <a:buSzPct val="100000"/>
+              <a:buChar char="•"/>
+            </a:pPr>
+            <a:r>
+              <a:rPr lang="en-US" sz="1200" dirty="0">
+                <a:solidFill>
+                  <a:srgbClr val="1F2A37"/>
+                </a:solidFill>
+                <a:latin typeface="Calibri" pitchFamily="34" charset="0"/>
+                <a:ea typeface="Calibri" pitchFamily="34" charset="-122"/>
+                <a:cs typeface="Calibri" pitchFamily="34" charset="-120"/>
+              </a:rPr>
+              <a:t>Estado (povo, território, soberania) é permanente; governo é transitório.</a:t>
+            </a:r>
+            <a:endParaRPr lang="en-US" sz="1100" dirty="0"/>
+          </a:p>
+          <a:p>
+            <a:pPr algn="l" marL="177800" indent="-177800">
+              <a:lnSpc>
+                <a:spcPct val="100000"/>
+              </a:lnSpc>
+              <a:spcAft>
+                <a:spcPts val="300"/>
+              </a:spcAft>
+              <a:buSzPct val="100000"/>
+              <a:buChar char="•"/>
+            </a:pPr>
+            <a:r>
+              <a:rPr lang="en-US" sz="1200" dirty="0">
+                <a:solidFill>
+                  <a:srgbClr val="1F2A37"/>
+                </a:solidFill>
+                <a:latin typeface="Calibri" pitchFamily="34" charset="0"/>
+                <a:ea typeface="Calibri" pitchFamily="34" charset="-122"/>
+                <a:cs typeface="Calibri" pitchFamily="34" charset="-120"/>
+              </a:rPr>
+              <a:t>Weber: monopólio do uso legítimo da força; dominação legal-racional.</a:t>
+            </a:r>
+            <a:endParaRPr lang="en-US" sz="1100" dirty="0"/>
+          </a:p>
+          <a:p>
+            <a:pPr algn="l" marL="177800" indent="-177800">
+              <a:lnSpc>
+                <a:spcPct val="100000"/>
+              </a:lnSpc>
+              <a:spcAft>
+                <a:spcPts val="300"/>
+              </a:spcAft>
+              <a:buSzPct val="100000"/>
+              <a:buChar char="•"/>
+            </a:pPr>
+            <a:r>
+              <a:rPr lang="en-US" sz="1200" dirty="0">
+                <a:solidFill>
+                  <a:srgbClr val="1F2A37"/>
+                </a:solidFill>
+                <a:latin typeface="Calibri" pitchFamily="34" charset="0"/>
+                <a:ea typeface="Calibri" pitchFamily="34" charset="-122"/>
+                <a:cs typeface="Calibri" pitchFamily="34" charset="-120"/>
+              </a:rPr>
+              <a:t>O mercado depende de instituições garantidas pelo Estado.</a:t>
+            </a:r>
+            <a:endParaRPr lang="en-US" sz="1100" dirty="0"/>
+          </a:p>
+          <a:p>
+            <a:pPr algn="l" marL="177800" indent="-177800">
+              <a:lnSpc>
+                <a:spcPct val="100000"/>
+              </a:lnSpc>
+              <a:spcAft>
+                <a:spcPts val="300"/>
+              </a:spcAft>
+              <a:buSzPct val="100000"/>
+              <a:buChar char="•"/>
+            </a:pPr>
+            <a:r>
+              <a:rPr lang="en-US" sz="1200" dirty="0">
+                <a:solidFill>
+                  <a:srgbClr val="1F2A37"/>
+                </a:solidFill>
+                <a:latin typeface="Calibri" pitchFamily="34" charset="0"/>
+                <a:ea typeface="Calibri" pitchFamily="34" charset="-122"/>
+                <a:cs typeface="Calibri" pitchFamily="34" charset="-120"/>
+              </a:rPr>
+              <a:t>Falhas de mercado justificam a ação do Estado, que também pode falhar.</a:t>
+            </a:r>
+            <a:endParaRPr lang="en-US" sz="1100" dirty="0"/>
+          </a:p>
+          <a:p>
+            <a:pPr algn="l" marL="177800" indent="-177800">
+              <a:lnSpc>
+                <a:spcPct val="100000"/>
+              </a:lnSpc>
+              <a:spcAft>
+                <a:spcPts val="300"/>
+              </a:spcAft>
+              <a:buSzPct val="100000"/>
+              <a:buChar char="•"/>
+            </a:pPr>
+            <a:r>
+              <a:rPr lang="en-US" sz="1200" dirty="0">
+                <a:solidFill>
+                  <a:srgbClr val="1F2A37"/>
+                </a:solidFill>
+                <a:latin typeface="Calibri" pitchFamily="34" charset="0"/>
+                <a:ea typeface="Calibri" pitchFamily="34" charset="-122"/>
+                <a:cs typeface="Calibri" pitchFamily="34" charset="-120"/>
+              </a:rPr>
+              <a:t>Musgrave: funções alocativa, distributiva e estabilizadora.</a:t>
+            </a:r>
+            <a:endParaRPr lang="en-US" sz="1100" dirty="0"/>
+          </a:p>
+        </p:txBody>
+      </p:sp>
+      <p:sp>
+        <p:nvSpPr>
+          <p:cNvPr id="6" name="Text 4"/>
+          <p:cNvSpPr txBox="1"/>
+          <p:nvPr/>
+        </p:nvSpPr>
+        <p:spPr>
+          <a:xfrm>
+            <a:off x="685800" y="3995928"/>
+            <a:ext cx="7772400" cy="484632"/>
+          </a:xfrm>
+          <a:prstGeom prst="roundRect">
+            <a:avLst>
+              <a:gd name="adj" fmla="val 15094"/>
+            </a:avLst>
+          </a:prstGeom>
+          <a:solidFill>
+            <a:srgbClr val="E6F2F0"/>
+          </a:solidFill>
+          <a:ln/>
+        </p:spPr>
+        <p:txBody>
+          <a:bodyPr wrap="square" lIns="127000" tIns="127000" rIns="127000" bIns="127000" rtlCol="0" anchor="ctr"/>
+          <a:lstStyle/>
+          <a:p>
+            <a:pPr algn="ctr" indent="0" marL="0">
+              <a:lnSpc>
+                <a:spcPct val="100000"/>
+              </a:lnSpc>
+              <a:buNone/>
+            </a:pPr>
+            <a:r>
+              <a:rPr lang="en-US" sz="1300" b="1" dirty="0">
+                <a:solidFill>
+                  <a:srgbClr val="13294B"/>
+                </a:solidFill>
+                <a:latin typeface="Calibri" pitchFamily="34" charset="0"/>
+                <a:ea typeface="Calibri" pitchFamily="34" charset="-122"/>
+                <a:cs typeface="Calibri" pitchFamily="34" charset="-120"/>
+              </a:rPr>
+              <a:t>Próxima unidade: a dinâmica pendular entre Estado e mercado e a matriz liberal.</a:t>
+            </a:r>
+            <a:endParaRPr lang="en-US" sz="1300" dirty="0"/>
+          </a:p>
+        </p:txBody>
+      </p:sp>
+      <p:sp>
+        <p:nvSpPr>
+          <p:cNvPr id="7" name="Text 5"/>
+          <p:cNvSpPr txBox="1"/>
+          <p:nvPr/>
+        </p:nvSpPr>
+        <p:spPr>
+          <a:xfrm>
+            <a:off x="4206240" y="36576"/>
+            <a:ext cx="4800600" cy="219456"/>
+          </a:xfrm>
+          <a:prstGeom prst="rect">
+            <a:avLst/>
+          </a:prstGeom>
+          <a:noFill/>
+          <a:ln/>
+        </p:spPr>
+        <p:txBody>
+          <a:bodyPr wrap="square" lIns="0" tIns="0" rIns="0" bIns="0" rtlCol="0" anchor="ctr"/>
+          <a:lstStyle/>
+          <a:p>
+            <a:pPr algn="r" indent="0" marL="0">
+              <a:lnSpc>
+                <a:spcPct val="100000"/>
+              </a:lnSpc>
+              <a:buNone/>
+            </a:pPr>
+            <a:r>
+              <a:rPr lang="en-US" sz="950" dirty="0">
+                <a:solidFill>
+                  <a:srgbClr val="5B6770"/>
+                </a:solidFill>
+                <a:latin typeface="Calibri" pitchFamily="34" charset="0"/>
+                <a:ea typeface="Calibri" pitchFamily="34" charset="-122"/>
+                <a:cs typeface="Calibri" pitchFamily="34" charset="-120"/>
+              </a:rPr>
+              <a:t>Estado, Governo e Mercado · Unidade 1</a:t>
+            </a:r>
+            <a:endParaRPr lang="en-US" sz="950" dirty="0"/>
+          </a:p>
+        </p:txBody>
+      </p:sp>
+    </p:spTree>
+  </p:cSld>
+  <p:clrMapOvr>
+    <a:masterClrMapping/>
+  </p:clrMapOvr>
+</p:sld>
+</file>
+
 <file path=ppt/slides/slide4.xml><?xml version="1.0" encoding="utf-8"?>
 <p:sld xmlns:a="http://schemas.openxmlformats.org/drawingml/2006/main" xmlns:r="http://schemas.openxmlformats.org/officeDocument/2006/relationships" xmlns:p="http://schemas.openxmlformats.org/presentationml/2006/main">
   <p:cSld name="Slide 4">

--- a/disciplina-01-estado-governo-mercado/materiais/01_Unidade_1_Introducao_a_Economia_Estado_Governo_Mercado.pptx
+++ b/disciplina-01-estado-governo-mercado/materiais/01_Unidade_1_Introducao_a_Economia_Estado_Governo_Mercado.pptx
@@ -49,9 +49,10 @@
     <p:sldId id="297" r:id="rId43"/>
     <p:sldId id="298" r:id="rId44"/>
     <p:sldId id="299" r:id="rId45"/>
+    <p:sldId id="300" r:id="rId46"/>
   </p:sldIdLst>
   <p:notesMasterIdLst>
-    <p:notesMasterId r:id="rId46"/>
+    <p:notesMasterId r:id="rId47"/>
   </p:notesMasterIdLst>
   <p:sldSz cx="9144000" cy="5143500"/>
   <p:notesSz cx="5143500" cy="9144000"/>
@@ -3755,7 +3756,7 @@
           <a:p>
             <a:r>
               <a:rPr lang="en-US" dirty="0"/>
-              <a:t>Vamos trazer isso para Mato Grosso. As queimadas são uma externalidade negativa: a fumaça afeta a saúde de quem mora longe do foco, e a resposta pública é fiscalização, multas e brigadas. A energia elétrica é um monopólio natural: não faz sentido ter várias redes de distribuição, então a ANEEL regula tarifas e qualidade. Os medicamentos envolvem assimetria de informação: o paciente não consegue avaliar o remédio, por isso existem o registro e a vigilância sanitária da ANVISA. E a vacinação é uma externalidade positiva: protege também quem não se vacinou, por isso o SUS oferece as vacinas de graça.</a:t>
+              <a:t>Vamos ver uma falha de mercado em um gráfico, com o exemplo da vacinação. [Apontar para a linha do benefício privado.] Cada pessoa decide se vacinar comparando o próprio benefício com o preço da dose. Se a vacina fosse vendida livremente, a cobertura ficaria em 50%, onde o benefício privado encontra o custo. [Apontar para a linha tracejada.] Mas a vacinação tem uma externalidade positiva: quem se vacina também protege os outros. Somando esse benefício, a curva do benefício social fica mais alta, e o ótimo para a sociedade é vacinar 95% da população. [Apontar para a área vermelha.] A área entre as curvas é a perda social: benefícios que deixam de existir porque o mercado não enxerga a externalidade. Por isso o Estado atua: um subsídio igual ao benefício externo, de 90 reais por dose no exemplo, leva a cobertura ao ótimo. Na prática, o SUS vai além e oferece a vacina de graça, com campanhas e a exigência da carteira de vacinação. Os números são hipotéticos, e há um gráfico interativo na página da disciplina.</a:t>
             </a:r>
             <a:endParaRPr lang="en-US" dirty="0"/>
           </a:p>
@@ -3843,7 +3844,7 @@
           <a:p>
             <a:r>
               <a:rPr lang="en-US" dirty="0"/>
-              <a:t>Mas o Estado também falha. Este slide coloca lado a lado as falhas de mercado e as falhas de governo: a captura do Estado por interesses privados, a ineficiência, a corrupção, a rigidez burocrática e os custos de informação, já que o governo nem sempre sabe o que a população precisa. O Estado não é uma solução automática. E aqui está uma chave para toda a disciplina: o debate entre as matrizes teóricas é, em grande medida, um debate sobre qual falha é mais grave, a do mercado ou a do governo.</a:t>
+              <a:t>Vamos trazer isso para Mato Grosso. As queimadas são uma externalidade negativa: a fumaça afeta a saúde de quem mora longe do foco, e a resposta pública é fiscalização, multas e brigadas. A energia elétrica é um monopólio natural: não faz sentido ter várias redes de distribuição, então a ANEEL regula tarifas e qualidade. Os medicamentos envolvem assimetria de informação: o paciente não consegue avaliar o remédio, por isso existem o registro e a vigilância sanitária da ANVISA. E a vacinação é uma externalidade positiva: protege também quem não se vacinou, por isso o SUS oferece as vacinas de graça.</a:t>
             </a:r>
             <a:endParaRPr lang="en-US" dirty="0"/>
           </a:p>
@@ -3931,7 +3932,7 @@
           <a:p>
             <a:r>
               <a:rPr lang="en-US" dirty="0"/>
-              <a:t>Richard Musgrave organizou as funções econômicas do Estado em três, como mostra a tabela. A função alocativa tem o objetivo de ofertar bens e serviços que o mercado não provê de forma adequada, como segurança, justiça, saneamento e infraestrutura. A função distributiva busca ajustar a distribuição de renda e riqueza, com tributação progressiva, o Bolsa Família, o BPC e a previdência. E a função estabilizadora procura manter o emprego, a estabilidade de preços e o crescimento, por meio das políticas fiscal e monetária. Repare que uma mesma política pode cumprir mais de uma função: o SUS, por exemplo, é alocativo e também distributivo.</a:t>
+              <a:t>Mas o Estado também falha. Este slide coloca lado a lado as falhas de mercado e as falhas de governo: a captura do Estado por interesses privados, a ineficiência, a corrupção, a rigidez burocrática e os custos de informação, já que o governo nem sempre sabe o que a população precisa. O Estado não é uma solução automática. E aqui está uma chave para toda a disciplina: o debate entre as matrizes teóricas é, em grande medida, um debate sobre qual falha é mais grave, a do mercado ou a do governo.</a:t>
             </a:r>
             <a:endParaRPr lang="en-US" dirty="0"/>
           </a:p>
@@ -4107,7 +4108,7 @@
           <a:p>
             <a:r>
               <a:rPr lang="en-US" dirty="0"/>
-              <a:t>E no município? A função alocativa é a mais presente: UBS, escolas, pavimentação, coleta de lixo e iluminação. A distributiva aparece no IPTU progressivo, na tarifa social de água, no CRAS e na assistência social. A estabilizadora é limitada, porque a política monetária e boa parte da política fiscal são da União; mas o município pode, por exemplo, antecipar obras em anos de crise para gerar empregos. Fica a pergunta para o fórum: que função cumpre a política pública que você escolheu?</a:t>
+              <a:t>Richard Musgrave organizou as funções econômicas do Estado em três, como mostra a tabela. A função alocativa tem o objetivo de ofertar bens e serviços que o mercado não provê de forma adequada, como segurança, justiça, saneamento e infraestrutura. A função distributiva busca ajustar a distribuição de renda e riqueza, com tributação progressiva, o Bolsa Família, o BPC e a previdência. E a função estabilizadora procura manter o emprego, a estabilidade de preços e o crescimento, por meio das políticas fiscal e monetária. Repare que uma mesma política pode cumprir mais de uma função: o SUS, por exemplo, é alocativo e também distributivo.</a:t>
             </a:r>
             <a:endParaRPr lang="en-US" dirty="0"/>
           </a:p>
@@ -4195,7 +4196,7 @@
           <a:p>
             <a:r>
               <a:rPr lang="en-US" dirty="0"/>
-              <a:t>Este gráfico mostra como um município hipotético distribui a sua despesa por função. [Apontar para as fatias.] Educação, com 27%, e saúde, com 22%, somam quase metade do gasto. Há uma razão para isso: a Constituição exige aplicar ao menos 25% da receita de impostos, incluindo as transferências, em educação, e 15% em saúde. A maior parte do orçamento cumpre a função alocativa; a assistência social, com 5%, é o exemplo típico da função distributiva. Os dados reais do seu município estão no SICONFI, do Tesouro Nacional. Vale a pena conferir.</a:t>
+              <a:t>E no município? A função alocativa é a mais presente: UBS, escolas, pavimentação, coleta de lixo e iluminação. A distributiva aparece no IPTU progressivo, na tarifa social de água, no CRAS e na assistência social. A estabilizadora é limitada, porque a política monetária e boa parte da política fiscal são da União; mas o município pode, por exemplo, antecipar obras em anos de crise para gerar empregos. Fica a pergunta para o fórum: que função cumpre a política pública que você escolheu?</a:t>
             </a:r>
             <a:endParaRPr lang="en-US" dirty="0"/>
           </a:p>
@@ -4283,7 +4284,7 @@
           <a:p>
             <a:r>
               <a:rPr lang="en-US" dirty="0"/>
-              <a:t>Vamos às atividades da Unidade 1. A disciplina abre no SIGAA em 9 de outubro, com o vídeo de apresentação e esta videoaula. Até 18 de outubro, participe do fórum de apresentação e do fórum temático 1, que pergunta: que falha de mercado uma política pública do seu município procura corrigir? Todas as entregas vão até as 23h55. Na próxima unidade, vamos estudar a dinâmica pendular entre Estado e mercado e a matriz liberal.</a:t>
+              <a:t>Este gráfico mostra como um município hipotético distribui a sua despesa por função. [Apontar para as fatias.] Educação, com 27%, e saúde, com 22%, somam quase metade do gasto. Há uma razão para isso: a Constituição exige aplicar ao menos 25% da receita de impostos, incluindo as transferências, em educação, e 15% em saúde. A maior parte do orçamento cumpre a função alocativa; a assistência social, com 5%, é o exemplo típico da função distributiva. Os dados reais do seu município estão no SICONFI, do Tesouro Nacional. Vale a pena conferir.</a:t>
             </a:r>
             <a:endParaRPr lang="en-US" dirty="0"/>
           </a:p>
@@ -4371,7 +4372,7 @@
           <a:p>
             <a:r>
               <a:rPr lang="en-US" dirty="0"/>
-              <a:t>Para fechar, um quiz com cinco perguntas. Funciona assim: eu leio a pergunta, você pausa o vídeo, escolhe a sua resposta e, no slide seguinte, confere a correção. Vamos lá?</a:t>
+              <a:t>Vamos às atividades da Unidade 1. A disciplina abre no SIGAA em 9 de outubro, com o vídeo de apresentação e esta videoaula. Até 18 de outubro, participe do fórum de apresentação e do fórum temático 1, que pergunta: que falha de mercado uma política pública do seu município procura corrigir? Todas as entregas vão até as 23h55. Na próxima unidade, vamos estudar a dinâmica pendular entre Estado e mercado e a matriz liberal.</a:t>
             </a:r>
             <a:endParaRPr lang="en-US" dirty="0"/>
           </a:p>
@@ -4459,7 +4460,7 @@
           <a:p>
             <a:r>
               <a:rPr lang="en-US" dirty="0"/>
-              <a:t>Pergunta 1. Qual destes NÃO é um elemento constitutivo do Estado? Letra a: Povo. Letra b: Território. Letra c: Soberania. Letra d: Mercado. Pause o vídeo e escolha a sua resposta.</a:t>
+              <a:t>Para fechar, um quiz com cinco perguntas. Funciona assim: eu leio a pergunta, você pausa o vídeo, escolhe a sua resposta e, no slide seguinte, confere a correção. Vamos lá?</a:t>
             </a:r>
             <a:endParaRPr lang="en-US" dirty="0"/>
           </a:p>
@@ -4547,7 +4548,7 @@
           <a:p>
             <a:r>
               <a:rPr lang="en-US" dirty="0"/>
-              <a:t>A resposta correta é a letra d: Mercado. Os elementos clássicos do Estado são povo, território e soberania (poder político). O mercado é outra esfera de coordenação social.</a:t>
+              <a:t>Pergunta 1. Qual destes NÃO é um elemento constitutivo do Estado? Letra a: Povo. Letra b: Território. Letra c: Soberania. Letra d: Mercado. Pause o vídeo e escolha a sua resposta.</a:t>
             </a:r>
             <a:endParaRPr lang="en-US" dirty="0"/>
           </a:p>
@@ -4635,7 +4636,7 @@
           <a:p>
             <a:r>
               <a:rPr lang="en-US" dirty="0"/>
-              <a:t>Pergunta 2. Concursos públicos, leis e impessoalidade na administração expressam, segundo Weber, a dominação: Letra a: Tradicional. Letra b: Carismática. Letra c: Legal-racional. Letra d: Patrimonial. Pause o vídeo e escolha a sua resposta.</a:t>
+              <a:t>A resposta correta é a letra d: Mercado. Os elementos clássicos do Estado são povo, território e soberania (poder político). O mercado é outra esfera de coordenação social.</a:t>
             </a:r>
             <a:endParaRPr lang="en-US" dirty="0"/>
           </a:p>
@@ -4723,7 +4724,7 @@
           <a:p>
             <a:r>
               <a:rPr lang="en-US" dirty="0"/>
-              <a:t>A resposta correta é a letra c: Legal-racional. A dominação legal-racional baseia-se na obediência a normas impessoais: é a base da burocracia moderna e do art. 37 da Constituição.</a:t>
+              <a:t>Pergunta 2. Concursos públicos, leis e impessoalidade na administração expressam, segundo Weber, a dominação: Letra a: Tradicional. Letra b: Carismática. Letra c: Legal-racional. Letra d: Patrimonial. Pause o vídeo e escolha a sua resposta.</a:t>
             </a:r>
             <a:endParaRPr lang="en-US" dirty="0"/>
           </a:p>
@@ -4811,7 +4812,7 @@
           <a:p>
             <a:r>
               <a:rPr lang="en-US" dirty="0"/>
-              <a:t>Pergunta 3. A iluminação das ruas de uma cidade é um exemplo de bem: Letra a: Privado. Letra b: De clube. Letra c: Comum. Letra d: Público. Pause o vídeo e escolha a sua resposta.</a:t>
+              <a:t>A resposta correta é a letra c: Legal-racional. A dominação legal-racional baseia-se na obediência a normas impessoais: é a base da burocracia moderna e do art. 37 da Constituição.</a:t>
             </a:r>
             <a:endParaRPr lang="en-US" dirty="0"/>
           </a:p>
@@ -4899,7 +4900,7 @@
           <a:p>
             <a:r>
               <a:rPr lang="en-US" dirty="0"/>
-              <a:t>A resposta correta é a letra d: Público. É não rival (todos usam ao mesmo tempo) e não excludente (ninguém é impedido de usar). Por isso o mercado não a oferece sozinho.</a:t>
+              <a:t>Pergunta 3. A iluminação das ruas de uma cidade é um exemplo de bem: Letra a: Privado. Letra b: De clube. Letra c: Comum. Letra d: Público. Pause o vídeo e escolha a sua resposta.</a:t>
             </a:r>
             <a:endParaRPr lang="en-US" dirty="0"/>
           </a:p>
@@ -5075,7 +5076,7 @@
           <a:p>
             <a:r>
               <a:rPr lang="en-US" dirty="0"/>
-              <a:t>Pergunta 4. A fumaça das queimadas que prejudica a saúde de moradores de outras cidades é: Letra a: Uma externalidade negativa. Letra b: Um bem público. Letra c: Assimetria de informação. Letra d: Um monopólio natural. Pause o vídeo e escolha a sua resposta.</a:t>
+              <a:t>A resposta correta é a letra d: Público. É não rival (todos usam ao mesmo tempo) e não excludente (ninguém é impedido de usar). Por isso o mercado não a oferece sozinho.</a:t>
             </a:r>
             <a:endParaRPr lang="en-US" dirty="0"/>
           </a:p>
@@ -5163,7 +5164,7 @@
           <a:p>
             <a:r>
               <a:rPr lang="en-US" dirty="0"/>
-              <a:t>A resposta correta é a letra a: Uma externalidade negativa. É um custo imposto a terceiros que não aparece no preço de nenhum produto: uma externalidade negativa, que justifica fiscalização e multas.</a:t>
+              <a:t>Pergunta 4. A fumaça das queimadas que prejudica a saúde de moradores de outras cidades é: Letra a: Uma externalidade negativa. Letra b: Um bem público. Letra c: Assimetria de informação. Letra d: Um monopólio natural. Pause o vídeo e escolha a sua resposta.</a:t>
             </a:r>
             <a:endParaRPr lang="en-US" dirty="0"/>
           </a:p>
@@ -5251,7 +5252,7 @@
           <a:p>
             <a:r>
               <a:rPr lang="en-US" dirty="0"/>
-              <a:t>Pergunta 5. IPTU progressivo e tarifa social de água cumprem qual função econômica do Estado? Letra a: Alocativa. Letra b: Distributiva. Letra c: Estabilizadora. Letra d: Fixação de preços. Pause o vídeo e escolha a sua resposta.</a:t>
+              <a:t>A resposta correta é a letra a: Uma externalidade negativa. É um custo imposto a terceiros que não aparece no preço de nenhum produto: uma externalidade negativa, que justifica fiscalização e multas.</a:t>
             </a:r>
             <a:endParaRPr lang="en-US" dirty="0"/>
           </a:p>
@@ -5339,7 +5340,7 @@
           <a:p>
             <a:r>
               <a:rPr lang="en-US" dirty="0"/>
-              <a:t>A resposta correta é a letra b: Distributiva. São instrumentos da função distributiva: cobram mais de quem tem mais e reduzem o custo para as famílias de baixa renda.</a:t>
+              <a:t>Pergunta 5. IPTU progressivo e tarifa social de água cumprem qual função econômica do Estado? Letra a: Alocativa. Letra b: Distributiva. Letra c: Estabilizadora. Letra d: Fixação de preços. Pause o vídeo e escolha a sua resposta.</a:t>
             </a:r>
             <a:endParaRPr lang="en-US" dirty="0"/>
           </a:p>
@@ -5427,7 +5428,7 @@
           <a:p>
             <a:r>
               <a:rPr lang="en-US" dirty="0"/>
-              <a:t>Para fechar a Unidade 1, vamos recapitular. [Apontar para o quadro da esquerda.] No tópico 1, vimos que a economia estuda como a sociedade faz escolhas com recursos escassos, e que toda escolha tem um custo de oportunidade, como no iceberg do custo e na escolha entre estrada vicinal e creche. Toda sociedade precisa responder o que, como e para quem produzir. Conhecemos os fatores de produção e os agentes econômicos, vimos que os preços coordenam o mercado, com os exemplos da tarifa de ônibus e do estacionamento rotativo, que todas as economias atuais são mistas, o que é a elasticidade-preço da demanda, com o exemplo da tarifa de água, e a diferença entre micro e macroeconomia. [Apontar para o quadro da direita.] No tópico 2, separamos Estado e governo: o Estado, com povo, território e soberania, é permanente; o governo é transitório. Com Weber, entendemos o Estado como o monopólio do uso legítimo da força. Vimos que o mercado depende de instituições garantidas pelo Estado, que as falhas de mercado justificam a ação estatal, mas que o Estado também falha, e conhecemos as três funções de Musgrave: alocativa, distributiva e estabilizadora. Na próxima unidade, estudaremos a dinâmica pendular e a matriz liberal. Revise os conceitos, participe dos fóruns e até a próxima videoaula!</a:t>
+              <a:t>A resposta correta é a letra b: Distributiva. São instrumentos da função distributiva: cobram mais de quem tem mais e reduzem o custo para as famílias de baixa renda.</a:t>
             </a:r>
             <a:endParaRPr lang="en-US" dirty="0"/>
           </a:p>
@@ -5451,6 +5452,94 @@
             <a:fld id="{F7021451-1387-4CA6-816F-3879F97B5CBC}" type="slidenum">
               <a:rPr lang="en-US"/>
               <a:t>44</a:t>
+            </a:fld>
+            <a:endParaRPr lang="en-US"/>
+          </a:p>
+        </p:txBody>
+      </p:sp>
+    </p:spTree>
+    <p:extLst>
+      <p:ext uri="{BB962C8B-B14F-4D97-AF65-F5344CB8AC3E}">
+        <p14:creationId xmlns:p14="http://schemas.microsoft.com/office/powerpoint/2010/main" val="1024086991"/>
+      </p:ext>
+    </p:extLst>
+  </p:cSld>
+  <p:clrMapOvr>
+    <a:masterClrMapping/>
+  </p:clrMapOvr>
+</p:notes>
+</file>
+
+<file path=ppt/notesSlides/notesSlide45.xml><?xml version="1.0" encoding="utf-8"?>
+<p:notes xmlns:a="http://schemas.openxmlformats.org/drawingml/2006/main" xmlns:r="http://schemas.openxmlformats.org/officeDocument/2006/relationships" xmlns:p="http://schemas.openxmlformats.org/presentationml/2006/main">
+  <p:cSld>
+    <p:spTree>
+      <p:nvGrpSpPr>
+        <p:cNvPr id="1" name=""/>
+        <p:cNvGrpSpPr/>
+        <p:nvPr/>
+      </p:nvGrpSpPr>
+      <p:grpSpPr>
+        <a:xfrm>
+          <a:off x="0" y="0"/>
+          <a:ext cx="0" cy="0"/>
+          <a:chOff x="0" y="0"/>
+          <a:chExt cx="0" cy="0"/>
+        </a:xfrm>
+      </p:grpSpPr>
+      <p:sp>
+        <p:nvSpPr>
+          <p:cNvPr id="2" name="Slide Image Placeholder 1"/>
+          <p:cNvSpPr>
+            <a:spLocks noGrp="1" noRot="1" noChangeAspect="1"/>
+          </p:cNvSpPr>
+          <p:nvPr>
+            <p:ph type="sldImg"/>
+          </p:nvPr>
+        </p:nvSpPr>
+        <p:spPr/>
+      </p:sp>
+      <p:sp>
+        <p:nvSpPr>
+          <p:cNvPr id="3" name="Notes Placeholder 2"/>
+          <p:cNvSpPr>
+            <a:spLocks noGrp="1"/>
+          </p:cNvSpPr>
+          <p:nvPr>
+            <p:ph type="body" idx="1"/>
+          </p:nvPr>
+        </p:nvSpPr>
+        <p:spPr/>
+        <p:txBody>
+          <a:bodyPr/>
+          <a:lstStyle/>
+          <a:p>
+            <a:r>
+              <a:rPr lang="en-US" dirty="0"/>
+              <a:t>Para fechar a Unidade 1, vamos recapitular. [Apontar para o quadro da esquerda.] No tópico 1, vimos que a economia estuda como a sociedade faz escolhas com recursos escassos, e que toda escolha tem um custo de oportunidade, como no iceberg do custo e na escolha entre estrada vicinal e creche. Toda sociedade precisa responder o que, como e para quem produzir. Conhecemos os fatores de produção e os agentes econômicos, vimos que os preços coordenam o mercado, com os exemplos da tarifa de ônibus e do estacionamento rotativo, que todas as economias atuais são mistas, o que é a elasticidade-preço da demanda, com o exemplo da tarifa de água, e a diferença entre micro e macroeconomia. [Apontar para o quadro da direita.] No tópico 2, separamos Estado e governo: o Estado, com povo, território e soberania, é permanente; o governo é transitório. Com Weber, entendemos o Estado como o monopólio do uso legítimo da força. Vimos que o mercado depende de instituições garantidas pelo Estado, que as falhas de mercado justificam a ação estatal, mas que o Estado também falha, e conhecemos as três funções de Musgrave: alocativa, distributiva e estabilizadora. Na próxima unidade, estudaremos a dinâmica pendular e a matriz liberal. Revise os conceitos, participe dos fóruns e até a próxima videoaula!</a:t>
+            </a:r>
+            <a:endParaRPr lang="en-US" dirty="0"/>
+          </a:p>
+        </p:txBody>
+      </p:sp>
+      <p:sp>
+        <p:nvSpPr>
+          <p:cNvPr id="4" name="Slide Number Placeholder 3"/>
+          <p:cNvSpPr>
+            <a:spLocks noGrp="1"/>
+          </p:cNvSpPr>
+          <p:nvPr>
+            <p:ph type="sldNum" sz="quarter" idx="10"/>
+          </p:nvPr>
+        </p:nvSpPr>
+        <p:spPr/>
+        <p:txBody>
+          <a:bodyPr/>
+          <a:lstStyle/>
+          <a:p>
+            <a:fld id="{F7021451-1387-4CA6-816F-3879F97B5CBC}" type="slidenum">
+              <a:rPr lang="en-US"/>
+              <a:t>45</a:t>
             </a:fld>
             <a:endParaRPr lang="en-US"/>
           </a:p>
@@ -18818,7 +18907,7 @@
               <a:buNone/>
             </a:pPr>
             <a:r>
-              <a:rPr lang="en-US" sz="2300" b="1" dirty="0">
+              <a:rPr lang="en-US" sz="2600" b="1" dirty="0">
                 <a:solidFill>
                   <a:srgbClr val="13294B"/>
                 </a:solidFill>
@@ -18826,26 +18915,68 @@
                 <a:ea typeface="Calibri" pitchFamily="34" charset="-122"/>
                 <a:cs typeface="Calibri" pitchFamily="34" charset="-120"/>
               </a:rPr>
-              <a:t>Falhas de mercado no dia a dia de Mato Grosso</a:t>
-            </a:r>
-            <a:endParaRPr lang="en-US" sz="2300" dirty="0"/>
-          </a:p>
-        </p:txBody>
-      </p:sp>
-      <p:sp>
-        <p:nvSpPr>
-          <p:cNvPr id="3" name="Shape 1"/>
+              <a:t>Externalidade positiva: a vacinação</a:t>
+            </a:r>
+            <a:endParaRPr lang="en-US" sz="2600" dirty="0"/>
+          </a:p>
+        </p:txBody>
+      </p:sp>
+      <p:sp>
+        <p:nvSpPr>
+          <p:cNvPr id="3" name="Text 1"/>
+          <p:cNvSpPr txBox="1"/>
+          <p:nvPr/>
+        </p:nvSpPr>
+        <p:spPr>
+          <a:xfrm>
+            <a:off x="1005840" y="804672"/>
+            <a:ext cx="7132320" cy="329184"/>
+          </a:xfrm>
+          <a:prstGeom prst="rect">
+            <a:avLst/>
+          </a:prstGeom>
+          <a:noFill/>
+          <a:ln/>
+        </p:spPr>
+        <p:txBody>
+          <a:bodyPr wrap="square" lIns="0" tIns="0" rIns="0" bIns="0" rtlCol="0" anchor="ctr"/>
+          <a:lstStyle/>
+          <a:p>
+            <a:pPr algn="ctr" indent="0" marL="0">
+              <a:lnSpc>
+                <a:spcPct val="100000"/>
+              </a:lnSpc>
+              <a:buNone/>
+            </a:pPr>
+            <a:r>
+              <a:rPr lang="en-US" sz="1400" dirty="0">
+                <a:solidFill>
+                  <a:srgbClr val="5B6770"/>
+                </a:solidFill>
+                <a:latin typeface="Calibri" pitchFamily="34" charset="0"/>
+                <a:ea typeface="Calibri" pitchFamily="34" charset="-122"/>
+                <a:cs typeface="Calibri" pitchFamily="34" charset="-120"/>
+              </a:rPr>
+              <a:t>Por que o mercado, sozinho, vacina menos do que a sociedade precisa</a:t>
+            </a:r>
+            <a:endParaRPr lang="en-US" sz="1400" dirty="0"/>
+          </a:p>
+        </p:txBody>
+      </p:sp>
+      <p:sp>
+        <p:nvSpPr>
+          <p:cNvPr id="4" name="Shape 2"/>
           <p:cNvSpPr/>
           <p:nvPr/>
         </p:nvSpPr>
         <p:spPr>
           <a:xfrm>
-            <a:off x="685800" y="1188720"/>
-            <a:ext cx="3749040" cy="1481328"/>
+            <a:off x="548640" y="1188720"/>
+            <a:ext cx="5029200" cy="3200400"/>
           </a:xfrm>
           <a:prstGeom prst="roundRect">
             <a:avLst>
-              <a:gd name="adj" fmla="val 3704"/>
+              <a:gd name="adj" fmla="val 1714"/>
             </a:avLst>
           </a:prstGeom>
           <a:solidFill>
@@ -18859,31 +18990,9 @@
           </a:ln>
         </p:spPr>
       </p:sp>
-      <p:sp>
-        <p:nvSpPr>
-          <p:cNvPr id="4" name="Shape 2"/>
-          <p:cNvSpPr/>
-          <p:nvPr/>
-        </p:nvSpPr>
-        <p:spPr>
-          <a:xfrm>
-            <a:off x="822960" y="1344168"/>
-            <a:ext cx="457200" cy="457200"/>
-          </a:xfrm>
-          <a:prstGeom prst="roundRect">
-            <a:avLst>
-              <a:gd name="adj" fmla="val 16000"/>
-            </a:avLst>
-          </a:prstGeom>
-          <a:solidFill>
-            <a:srgbClr val="13294B"/>
-          </a:solidFill>
-          <a:ln/>
-        </p:spPr>
-      </p:sp>
       <p:pic>
         <p:nvPicPr>
-          <p:cNvPr id="5" name="Image 0" descr="/tmp/claude-0/-home-user-zero-claude/d7e33190-c541-582c-a7cc-1156817732ce/scratchpad/deck/assets/icon_FaFire.png">    </p:cNvPr>
+          <p:cNvPr id="5" name="Image 0" descr="/tmp/claude-0/-home-user-zero-claude/d7e33190-c541-582c-a7cc-1156817732ce/scratchpad/deck/assets/vx_vacinacao.png">    </p:cNvPr>
           <p:cNvPicPr>
             <a:picLocks noChangeAspect="1"/>
           </p:cNvPicPr>
@@ -18897,8 +19006,8 @@
         </p:blipFill>
         <p:spPr>
           <a:xfrm>
-            <a:off x="923544" y="1444752"/>
-            <a:ext cx="256032" cy="256032"/>
+            <a:off x="621792" y="1243584"/>
+            <a:ext cx="4882896" cy="3108960"/>
           </a:xfrm>
           <a:prstGeom prst="rect">
             <a:avLst/>
@@ -18913,8 +19022,150 @@
         </p:nvSpPr>
         <p:spPr>
           <a:xfrm>
-            <a:off x="1371600" y="1261872"/>
-            <a:ext cx="2971800" cy="1335024"/>
+            <a:off x="5760720" y="1188720"/>
+            <a:ext cx="2834640" cy="3200400"/>
+          </a:xfrm>
+          <a:prstGeom prst="roundRect">
+            <a:avLst>
+              <a:gd name="adj" fmla="val 1935"/>
+            </a:avLst>
+          </a:prstGeom>
+          <a:solidFill>
+            <a:srgbClr val="E6F2F0"/>
+          </a:solidFill>
+          <a:ln/>
+        </p:spPr>
+        <p:txBody>
+          <a:bodyPr wrap="square" lIns="114300" tIns="114300" rIns="114300" bIns="114300" rtlCol="0" anchor="t"/>
+          <a:lstStyle/>
+          <a:p>
+            <a:pPr algn="l" indent="0" marL="0">
+              <a:lnSpc>
+                <a:spcPct val="100000"/>
+              </a:lnSpc>
+              <a:spcAft>
+                <a:spcPts val="400"/>
+              </a:spcAft>
+              <a:buNone/>
+            </a:pPr>
+            <a:r>
+              <a:rPr lang="en-US" sz="1100" b="1" dirty="0">
+                <a:solidFill>
+                  <a:srgbClr val="2A8C85"/>
+                </a:solidFill>
+                <a:latin typeface="Calibri" pitchFamily="34" charset="0"/>
+                <a:ea typeface="Calibri" pitchFamily="34" charset="-122"/>
+                <a:cs typeface="Calibri" pitchFamily="34" charset="-120"/>
+              </a:rPr>
+              <a:t>COMO LER O GRÁFICO</a:t>
+            </a:r>
+            <a:endParaRPr lang="en-US" sz="1100" dirty="0"/>
+          </a:p>
+          <a:p>
+            <a:pPr algn="l" marL="177800" indent="-177800">
+              <a:lnSpc>
+                <a:spcPct val="100000"/>
+              </a:lnSpc>
+              <a:spcAft>
+                <a:spcPts val="400"/>
+              </a:spcAft>
+              <a:buSzPct val="100000"/>
+              <a:buChar char="•"/>
+            </a:pPr>
+            <a:r>
+              <a:rPr lang="en-US" sz="1250" dirty="0">
+                <a:solidFill>
+                  <a:srgbClr val="1F2A37"/>
+                </a:solidFill>
+                <a:latin typeface="Calibri" pitchFamily="34" charset="0"/>
+                <a:ea typeface="Calibri" pitchFamily="34" charset="-122"/>
+                <a:cs typeface="Calibri" pitchFamily="34" charset="-120"/>
+              </a:rPr>
+              <a:t>Cada pessoa compara o próprio benefício com o preço: o mercado chega a 50% de cobertura.</a:t>
+            </a:r>
+            <a:endParaRPr lang="en-US" sz="1100" dirty="0"/>
+          </a:p>
+          <a:p>
+            <a:pPr algn="l" marL="177800" indent="-177800">
+              <a:lnSpc>
+                <a:spcPct val="100000"/>
+              </a:lnSpc>
+              <a:spcAft>
+                <a:spcPts val="400"/>
+              </a:spcAft>
+              <a:buSzPct val="100000"/>
+              <a:buChar char="•"/>
+            </a:pPr>
+            <a:r>
+              <a:rPr lang="en-US" sz="1250" dirty="0">
+                <a:solidFill>
+                  <a:srgbClr val="1F2A37"/>
+                </a:solidFill>
+                <a:latin typeface="Calibri" pitchFamily="34" charset="0"/>
+                <a:ea typeface="Calibri" pitchFamily="34" charset="-122"/>
+                <a:cs typeface="Calibri" pitchFamily="34" charset="-120"/>
+              </a:rPr>
+              <a:t>Somando a proteção dada aos outros, o ótimo social é 95%.</a:t>
+            </a:r>
+            <a:endParaRPr lang="en-US" sz="1100" dirty="0"/>
+          </a:p>
+          <a:p>
+            <a:pPr algn="l" marL="177800" indent="-177800">
+              <a:lnSpc>
+                <a:spcPct val="100000"/>
+              </a:lnSpc>
+              <a:spcAft>
+                <a:spcPts val="400"/>
+              </a:spcAft>
+              <a:buSzPct val="100000"/>
+              <a:buChar char="•"/>
+            </a:pPr>
+            <a:r>
+              <a:rPr lang="en-US" sz="1250" dirty="0">
+                <a:solidFill>
+                  <a:srgbClr val="1F2A37"/>
+                </a:solidFill>
+                <a:latin typeface="Calibri" pitchFamily="34" charset="0"/>
+                <a:ea typeface="Calibri" pitchFamily="34" charset="-122"/>
+                <a:cs typeface="Calibri" pitchFamily="34" charset="-120"/>
+              </a:rPr>
+              <a:t>A área vermelha é a perda social.</a:t>
+            </a:r>
+            <a:endParaRPr lang="en-US" sz="1100" dirty="0"/>
+          </a:p>
+          <a:p>
+            <a:pPr algn="l" marL="177800" indent="-177800">
+              <a:lnSpc>
+                <a:spcPct val="100000"/>
+              </a:lnSpc>
+              <a:buSzPct val="100000"/>
+              <a:buChar char="•"/>
+            </a:pPr>
+            <a:r>
+              <a:rPr lang="en-US" sz="1250" dirty="0">
+                <a:solidFill>
+                  <a:srgbClr val="1F2A37"/>
+                </a:solidFill>
+                <a:latin typeface="Calibri" pitchFamily="34" charset="0"/>
+                <a:ea typeface="Calibri" pitchFamily="34" charset="-122"/>
+                <a:cs typeface="Calibri" pitchFamily="34" charset="-120"/>
+              </a:rPr>
+              <a:t>Subsídio de R$ 90 por dose, vacina gratuita no SUS e campanhas corrigem a falha.</a:t>
+            </a:r>
+            <a:endParaRPr lang="en-US" sz="1100" dirty="0"/>
+          </a:p>
+        </p:txBody>
+      </p:sp>
+      <p:sp>
+        <p:nvSpPr>
+          <p:cNvPr id="7" name="Text 4"/>
+          <p:cNvSpPr txBox="1"/>
+          <p:nvPr/>
+        </p:nvSpPr>
+        <p:spPr>
+          <a:xfrm>
+            <a:off x="548640" y="4425696"/>
+            <a:ext cx="8046720" cy="237744"/>
           </a:xfrm>
           <a:prstGeom prst="rect">
             <a:avLst/>
@@ -18923,562 +19174,33 @@
           <a:ln/>
         </p:spPr>
         <p:txBody>
-          <a:bodyPr wrap="square" lIns="38100" tIns="38100" rIns="38100" bIns="38100" rtlCol="0" anchor="t"/>
+          <a:bodyPr wrap="square" lIns="0" tIns="0" rIns="0" bIns="0" rtlCol="0" anchor="ctr"/>
           <a:lstStyle/>
           <a:p>
             <a:pPr algn="l" indent="0" marL="0">
               <a:lnSpc>
                 <a:spcPct val="100000"/>
               </a:lnSpc>
-              <a:spcAft>
-                <a:spcPts val="200"/>
-              </a:spcAft>
-              <a:buNone/>
-            </a:pPr>
-            <a:r>
-              <a:rPr lang="en-US" sz="1100" b="1" dirty="0">
-                <a:solidFill>
-                  <a:srgbClr val="2A8C85"/>
-                </a:solidFill>
-                <a:latin typeface="Calibri" pitchFamily="34" charset="0"/>
-                <a:ea typeface="Calibri" pitchFamily="34" charset="-122"/>
-                <a:cs typeface="Calibri" pitchFamily="34" charset="-120"/>
-              </a:rPr>
-              <a:t>EXTERNALIDADE NEGATIVA</a:t>
-            </a:r>
-            <a:endParaRPr lang="en-US" sz="1100" dirty="0"/>
-          </a:p>
-          <a:p>
-            <a:pPr algn="l" indent="0" marL="0">
-              <a:lnSpc>
-                <a:spcPct val="100000"/>
-              </a:lnSpc>
-              <a:spcAft>
-                <a:spcPts val="300"/>
-              </a:spcAft>
-              <a:buNone/>
-            </a:pPr>
-            <a:r>
-              <a:rPr lang="en-US" sz="1450" b="1" dirty="0">
-                <a:solidFill>
-                  <a:srgbClr val="13294B"/>
-                </a:solidFill>
-                <a:latin typeface="Calibri" pitchFamily="34" charset="0"/>
-                <a:ea typeface="Calibri" pitchFamily="34" charset="-122"/>
-                <a:cs typeface="Calibri" pitchFamily="34" charset="-120"/>
-              </a:rPr>
-              <a:t>Queimadas</a:t>
-            </a:r>
-            <a:endParaRPr lang="en-US" sz="1100" dirty="0"/>
-          </a:p>
-          <a:p>
-            <a:pPr algn="l" indent="0" marL="0">
-              <a:lnSpc>
-                <a:spcPct val="100000"/>
-              </a:lnSpc>
-              <a:buNone/>
-            </a:pPr>
-            <a:r>
-              <a:rPr lang="en-US" sz="1250" dirty="0">
-                <a:solidFill>
-                  <a:srgbClr val="1F2A37"/>
-                </a:solidFill>
-                <a:latin typeface="Calibri" pitchFamily="34" charset="0"/>
-                <a:ea typeface="Calibri" pitchFamily="34" charset="-122"/>
-                <a:cs typeface="Calibri" pitchFamily="34" charset="-120"/>
-              </a:rPr>
-              <a:t>A fumaça afeta a saúde de moradores distantes do foco. Resposta: fiscalização, multas e brigadas.</a:t>
-            </a:r>
-            <a:endParaRPr lang="en-US" sz="1100" dirty="0"/>
-          </a:p>
-        </p:txBody>
-      </p:sp>
-      <p:sp>
-        <p:nvSpPr>
-          <p:cNvPr id="7" name="Shape 4"/>
-          <p:cNvSpPr/>
-          <p:nvPr/>
-        </p:nvSpPr>
-        <p:spPr>
-          <a:xfrm>
-            <a:off x="4709160" y="1188720"/>
-            <a:ext cx="3749040" cy="1481328"/>
-          </a:xfrm>
-          <a:prstGeom prst="roundRect">
-            <a:avLst>
-              <a:gd name="adj" fmla="val 3704"/>
-            </a:avLst>
-          </a:prstGeom>
-          <a:solidFill>
-            <a:srgbClr val="FFFFFF"/>
-          </a:solidFill>
-          <a:ln w="12700">
-            <a:solidFill>
-              <a:srgbClr val="DCD5C1"/>
-            </a:solidFill>
-            <a:prstDash val="solid"/>
-          </a:ln>
-        </p:spPr>
-      </p:sp>
-      <p:sp>
-        <p:nvSpPr>
-          <p:cNvPr id="8" name="Shape 5"/>
-          <p:cNvSpPr/>
-          <p:nvPr/>
-        </p:nvSpPr>
-        <p:spPr>
-          <a:xfrm>
-            <a:off x="4846320" y="1344168"/>
-            <a:ext cx="457200" cy="457200"/>
-          </a:xfrm>
-          <a:prstGeom prst="roundRect">
-            <a:avLst>
-              <a:gd name="adj" fmla="val 16000"/>
-            </a:avLst>
-          </a:prstGeom>
-          <a:solidFill>
-            <a:srgbClr val="13294B"/>
-          </a:solidFill>
-          <a:ln/>
-        </p:spPr>
-      </p:sp>
-      <p:pic>
-        <p:nvPicPr>
-          <p:cNvPr id="9" name="Image 1" descr="/tmp/claude-0/-home-user-zero-claude/d7e33190-c541-582c-a7cc-1156817732ce/scratchpad/deck/assets/icon_FaBolt.png">    </p:cNvPr>
-          <p:cNvPicPr>
-            <a:picLocks noChangeAspect="1"/>
-          </p:cNvPicPr>
-          <p:nvPr/>
-        </p:nvPicPr>
-        <p:blipFill>
-          <a:blip r:embed="rId3"/>
-          <a:stretch>
-            <a:fillRect/>
-          </a:stretch>
-        </p:blipFill>
-        <p:spPr>
-          <a:xfrm>
-            <a:off x="4946904" y="1444752"/>
-            <a:ext cx="256032" cy="256032"/>
-          </a:xfrm>
-          <a:prstGeom prst="rect">
-            <a:avLst/>
-          </a:prstGeom>
-        </p:spPr>
-      </p:pic>
-      <p:sp>
-        <p:nvSpPr>
-          <p:cNvPr id="10" name="Text 6"/>
-          <p:cNvSpPr txBox="1"/>
-          <p:nvPr/>
-        </p:nvSpPr>
-        <p:spPr>
-          <a:xfrm>
-            <a:off x="5394960" y="1261872"/>
-            <a:ext cx="2971800" cy="1335024"/>
-          </a:xfrm>
-          <a:prstGeom prst="rect">
-            <a:avLst/>
-          </a:prstGeom>
-          <a:noFill/>
-          <a:ln/>
-        </p:spPr>
-        <p:txBody>
-          <a:bodyPr wrap="square" lIns="38100" tIns="38100" rIns="38100" bIns="38100" rtlCol="0" anchor="t"/>
-          <a:lstStyle/>
-          <a:p>
-            <a:pPr algn="l" indent="0" marL="0">
-              <a:lnSpc>
-                <a:spcPct val="100000"/>
-              </a:lnSpc>
-              <a:spcAft>
-                <a:spcPts val="200"/>
-              </a:spcAft>
-              <a:buNone/>
-            </a:pPr>
-            <a:r>
-              <a:rPr lang="en-US" sz="1100" b="1" dirty="0">
-                <a:solidFill>
-                  <a:srgbClr val="2A8C85"/>
-                </a:solidFill>
-                <a:latin typeface="Calibri" pitchFamily="34" charset="0"/>
-                <a:ea typeface="Calibri" pitchFamily="34" charset="-122"/>
-                <a:cs typeface="Calibri" pitchFamily="34" charset="-120"/>
-              </a:rPr>
-              <a:t>MONOPÓLIO NATURAL</a:t>
-            </a:r>
-            <a:endParaRPr lang="en-US" sz="1100" dirty="0"/>
-          </a:p>
-          <a:p>
-            <a:pPr algn="l" indent="0" marL="0">
-              <a:lnSpc>
-                <a:spcPct val="100000"/>
-              </a:lnSpc>
-              <a:spcAft>
-                <a:spcPts val="300"/>
-              </a:spcAft>
-              <a:buNone/>
-            </a:pPr>
-            <a:r>
-              <a:rPr lang="en-US" sz="1450" b="1" dirty="0">
-                <a:solidFill>
-                  <a:srgbClr val="13294B"/>
-                </a:solidFill>
-                <a:latin typeface="Calibri" pitchFamily="34" charset="0"/>
-                <a:ea typeface="Calibri" pitchFamily="34" charset="-122"/>
-                <a:cs typeface="Calibri" pitchFamily="34" charset="-120"/>
-              </a:rPr>
-              <a:t>Energia elétrica</a:t>
-            </a:r>
-            <a:endParaRPr lang="en-US" sz="1100" dirty="0"/>
-          </a:p>
-          <a:p>
-            <a:pPr algn="l" indent="0" marL="0">
-              <a:lnSpc>
-                <a:spcPct val="100000"/>
-              </a:lnSpc>
-              <a:buNone/>
-            </a:pPr>
-            <a:r>
-              <a:rPr lang="en-US" sz="1250" dirty="0">
-                <a:solidFill>
-                  <a:srgbClr val="1F2A37"/>
-                </a:solidFill>
-                <a:latin typeface="Calibri" pitchFamily="34" charset="0"/>
-                <a:ea typeface="Calibri" pitchFamily="34" charset="-122"/>
-                <a:cs typeface="Calibri" pitchFamily="34" charset="-120"/>
-              </a:rPr>
-              <a:t>Uma única rede de distribuição. Resposta: tarifas e qualidade reguladas pela ANEEL.</a:t>
-            </a:r>
-            <a:endParaRPr lang="en-US" sz="1100" dirty="0"/>
-          </a:p>
-        </p:txBody>
-      </p:sp>
-      <p:sp>
-        <p:nvSpPr>
-          <p:cNvPr id="11" name="Shape 7"/>
-          <p:cNvSpPr/>
-          <p:nvPr/>
-        </p:nvSpPr>
-        <p:spPr>
-          <a:xfrm>
-            <a:off x="685800" y="2834640"/>
-            <a:ext cx="3749040" cy="1481328"/>
-          </a:xfrm>
-          <a:prstGeom prst="roundRect">
-            <a:avLst>
-              <a:gd name="adj" fmla="val 3704"/>
-            </a:avLst>
-          </a:prstGeom>
-          <a:solidFill>
-            <a:srgbClr val="FFFFFF"/>
-          </a:solidFill>
-          <a:ln w="12700">
-            <a:solidFill>
-              <a:srgbClr val="DCD5C1"/>
-            </a:solidFill>
-            <a:prstDash val="solid"/>
-          </a:ln>
-        </p:spPr>
-      </p:sp>
-      <p:sp>
-        <p:nvSpPr>
-          <p:cNvPr id="12" name="Shape 8"/>
-          <p:cNvSpPr/>
-          <p:nvPr/>
-        </p:nvSpPr>
-        <p:spPr>
-          <a:xfrm>
-            <a:off x="822960" y="2990088"/>
-            <a:ext cx="457200" cy="457200"/>
-          </a:xfrm>
-          <a:prstGeom prst="roundRect">
-            <a:avLst>
-              <a:gd name="adj" fmla="val 16000"/>
-            </a:avLst>
-          </a:prstGeom>
-          <a:solidFill>
-            <a:srgbClr val="13294B"/>
-          </a:solidFill>
-          <a:ln/>
-        </p:spPr>
-      </p:sp>
-      <p:pic>
-        <p:nvPicPr>
-          <p:cNvPr id="13" name="Image 2" descr="/tmp/claude-0/-home-user-zero-claude/d7e33190-c541-582c-a7cc-1156817732ce/scratchpad/deck/assets/icon_FaPills.png">    </p:cNvPr>
-          <p:cNvPicPr>
-            <a:picLocks noChangeAspect="1"/>
-          </p:cNvPicPr>
-          <p:nvPr/>
-        </p:nvPicPr>
-        <p:blipFill>
-          <a:blip r:embed="rId4"/>
-          <a:stretch>
-            <a:fillRect/>
-          </a:stretch>
-        </p:blipFill>
-        <p:spPr>
-          <a:xfrm>
-            <a:off x="923544" y="3090672"/>
-            <a:ext cx="256032" cy="256032"/>
-          </a:xfrm>
-          <a:prstGeom prst="rect">
-            <a:avLst/>
-          </a:prstGeom>
-        </p:spPr>
-      </p:pic>
-      <p:sp>
-        <p:nvSpPr>
-          <p:cNvPr id="14" name="Text 9"/>
-          <p:cNvSpPr txBox="1"/>
-          <p:nvPr/>
-        </p:nvSpPr>
-        <p:spPr>
-          <a:xfrm>
-            <a:off x="1371600" y="2907792"/>
-            <a:ext cx="2971800" cy="1335024"/>
-          </a:xfrm>
-          <a:prstGeom prst="rect">
-            <a:avLst/>
-          </a:prstGeom>
-          <a:noFill/>
-          <a:ln/>
-        </p:spPr>
-        <p:txBody>
-          <a:bodyPr wrap="square" lIns="38100" tIns="38100" rIns="38100" bIns="38100" rtlCol="0" anchor="t"/>
-          <a:lstStyle/>
-          <a:p>
-            <a:pPr algn="l" indent="0" marL="0">
-              <a:lnSpc>
-                <a:spcPct val="100000"/>
-              </a:lnSpc>
-              <a:spcAft>
-                <a:spcPts val="200"/>
-              </a:spcAft>
-              <a:buNone/>
-            </a:pPr>
-            <a:r>
-              <a:rPr lang="en-US" sz="1100" b="1" dirty="0">
-                <a:solidFill>
-                  <a:srgbClr val="2A8C85"/>
-                </a:solidFill>
-                <a:latin typeface="Calibri" pitchFamily="34" charset="0"/>
-                <a:ea typeface="Calibri" pitchFamily="34" charset="-122"/>
-                <a:cs typeface="Calibri" pitchFamily="34" charset="-120"/>
-              </a:rPr>
-              <a:t>ASSIMETRIA DE INFORMAÇÃO</a:t>
-            </a:r>
-            <a:endParaRPr lang="en-US" sz="1100" dirty="0"/>
-          </a:p>
-          <a:p>
-            <a:pPr algn="l" indent="0" marL="0">
-              <a:lnSpc>
-                <a:spcPct val="100000"/>
-              </a:lnSpc>
-              <a:spcAft>
-                <a:spcPts val="300"/>
-              </a:spcAft>
-              <a:buNone/>
-            </a:pPr>
-            <a:r>
-              <a:rPr lang="en-US" sz="1450" b="1" dirty="0">
-                <a:solidFill>
-                  <a:srgbClr val="13294B"/>
-                </a:solidFill>
-                <a:latin typeface="Calibri" pitchFamily="34" charset="0"/>
-                <a:ea typeface="Calibri" pitchFamily="34" charset="-122"/>
-                <a:cs typeface="Calibri" pitchFamily="34" charset="-120"/>
-              </a:rPr>
-              <a:t>Medicamentos</a:t>
-            </a:r>
-            <a:endParaRPr lang="en-US" sz="1100" dirty="0"/>
-          </a:p>
-          <a:p>
-            <a:pPr algn="l" indent="0" marL="0">
-              <a:lnSpc>
-                <a:spcPct val="100000"/>
-              </a:lnSpc>
-              <a:buNone/>
-            </a:pPr>
-            <a:r>
-              <a:rPr lang="en-US" sz="1250" dirty="0">
-                <a:solidFill>
-                  <a:srgbClr val="1F2A37"/>
-                </a:solidFill>
-                <a:latin typeface="Calibri" pitchFamily="34" charset="0"/>
-                <a:ea typeface="Calibri" pitchFamily="34" charset="-122"/>
-                <a:cs typeface="Calibri" pitchFamily="34" charset="-120"/>
-              </a:rPr>
-              <a:t>O paciente não avalia o remédio. Resposta: registro e vigilância sanitária (ANVISA).</a:t>
-            </a:r>
-            <a:endParaRPr lang="en-US" sz="1100" dirty="0"/>
-          </a:p>
-        </p:txBody>
-      </p:sp>
-      <p:sp>
-        <p:nvSpPr>
-          <p:cNvPr id="15" name="Shape 10"/>
-          <p:cNvSpPr/>
-          <p:nvPr/>
-        </p:nvSpPr>
-        <p:spPr>
-          <a:xfrm>
-            <a:off x="4709160" y="2834640"/>
-            <a:ext cx="3749040" cy="1481328"/>
-          </a:xfrm>
-          <a:prstGeom prst="roundRect">
-            <a:avLst>
-              <a:gd name="adj" fmla="val 3704"/>
-            </a:avLst>
-          </a:prstGeom>
-          <a:solidFill>
-            <a:srgbClr val="FFFFFF"/>
-          </a:solidFill>
-          <a:ln w="12700">
-            <a:solidFill>
-              <a:srgbClr val="DCD5C1"/>
-            </a:solidFill>
-            <a:prstDash val="solid"/>
-          </a:ln>
-        </p:spPr>
-      </p:sp>
-      <p:sp>
-        <p:nvSpPr>
-          <p:cNvPr id="16" name="Shape 11"/>
-          <p:cNvSpPr/>
-          <p:nvPr/>
-        </p:nvSpPr>
-        <p:spPr>
-          <a:xfrm>
-            <a:off x="4846320" y="2990088"/>
-            <a:ext cx="457200" cy="457200"/>
-          </a:xfrm>
-          <a:prstGeom prst="roundRect">
-            <a:avLst>
-              <a:gd name="adj" fmla="val 16000"/>
-            </a:avLst>
-          </a:prstGeom>
-          <a:solidFill>
-            <a:srgbClr val="13294B"/>
-          </a:solidFill>
-          <a:ln/>
-        </p:spPr>
-      </p:sp>
-      <p:pic>
-        <p:nvPicPr>
-          <p:cNvPr id="17" name="Image 3" descr="/tmp/claude-0/-home-user-zero-claude/d7e33190-c541-582c-a7cc-1156817732ce/scratchpad/deck/assets/icon_FaSyringe.png">    </p:cNvPr>
-          <p:cNvPicPr>
-            <a:picLocks noChangeAspect="1"/>
-          </p:cNvPicPr>
-          <p:nvPr/>
-        </p:nvPicPr>
-        <p:blipFill>
-          <a:blip r:embed="rId5"/>
-          <a:stretch>
-            <a:fillRect/>
-          </a:stretch>
-        </p:blipFill>
-        <p:spPr>
-          <a:xfrm>
-            <a:off x="4946904" y="3090672"/>
-            <a:ext cx="256032" cy="256032"/>
-          </a:xfrm>
-          <a:prstGeom prst="rect">
-            <a:avLst/>
-          </a:prstGeom>
-        </p:spPr>
-      </p:pic>
-      <p:sp>
-        <p:nvSpPr>
-          <p:cNvPr id="18" name="Text 12"/>
-          <p:cNvSpPr txBox="1"/>
-          <p:nvPr/>
-        </p:nvSpPr>
-        <p:spPr>
-          <a:xfrm>
-            <a:off x="5394960" y="2907792"/>
-            <a:ext cx="2971800" cy="1335024"/>
-          </a:xfrm>
-          <a:prstGeom prst="rect">
-            <a:avLst/>
-          </a:prstGeom>
-          <a:noFill/>
-          <a:ln/>
-        </p:spPr>
-        <p:txBody>
-          <a:bodyPr wrap="square" lIns="38100" tIns="38100" rIns="38100" bIns="38100" rtlCol="0" anchor="t"/>
-          <a:lstStyle/>
-          <a:p>
-            <a:pPr algn="l" indent="0" marL="0">
-              <a:lnSpc>
-                <a:spcPct val="100000"/>
-              </a:lnSpc>
-              <a:spcAft>
-                <a:spcPts val="200"/>
-              </a:spcAft>
-              <a:buNone/>
-            </a:pPr>
-            <a:r>
-              <a:rPr lang="en-US" sz="1100" b="1" dirty="0">
-                <a:solidFill>
-                  <a:srgbClr val="2A8C85"/>
-                </a:solidFill>
-                <a:latin typeface="Calibri" pitchFamily="34" charset="0"/>
-                <a:ea typeface="Calibri" pitchFamily="34" charset="-122"/>
-                <a:cs typeface="Calibri" pitchFamily="34" charset="-120"/>
-              </a:rPr>
-              <a:t>EXTERNALIDADE POSITIVA</a:t>
-            </a:r>
-            <a:endParaRPr lang="en-US" sz="1100" dirty="0"/>
-          </a:p>
-          <a:p>
-            <a:pPr algn="l" indent="0" marL="0">
-              <a:lnSpc>
-                <a:spcPct val="100000"/>
-              </a:lnSpc>
-              <a:spcAft>
-                <a:spcPts val="300"/>
-              </a:spcAft>
-              <a:buNone/>
-            </a:pPr>
-            <a:r>
-              <a:rPr lang="en-US" sz="1450" b="1" dirty="0">
-                <a:solidFill>
-                  <a:srgbClr val="13294B"/>
-                </a:solidFill>
-                <a:latin typeface="Calibri" pitchFamily="34" charset="0"/>
-                <a:ea typeface="Calibri" pitchFamily="34" charset="-122"/>
-                <a:cs typeface="Calibri" pitchFamily="34" charset="-120"/>
-              </a:rPr>
-              <a:t>Vacinação</a:t>
-            </a:r>
-            <a:endParaRPr lang="en-US" sz="1100" dirty="0"/>
-          </a:p>
-          <a:p>
-            <a:pPr algn="l" indent="0" marL="0">
-              <a:lnSpc>
-                <a:spcPct val="100000"/>
-              </a:lnSpc>
-              <a:buNone/>
-            </a:pPr>
-            <a:r>
-              <a:rPr lang="en-US" sz="1250" dirty="0">
-                <a:solidFill>
-                  <a:srgbClr val="1F2A37"/>
-                </a:solidFill>
-                <a:latin typeface="Calibri" pitchFamily="34" charset="0"/>
-                <a:ea typeface="Calibri" pitchFamily="34" charset="-122"/>
-                <a:cs typeface="Calibri" pitchFamily="34" charset="-120"/>
-              </a:rPr>
-              <a:t>Protege também quem não se vacinou. Resposta: vacinas gratuitas no SUS.</a:t>
-            </a:r>
-            <a:endParaRPr lang="en-US" sz="1100" dirty="0"/>
-          </a:p>
-        </p:txBody>
-      </p:sp>
-      <p:sp>
-        <p:nvSpPr>
-          <p:cNvPr id="19" name="Text 13"/>
+              <a:buNone/>
+            </a:pPr>
+            <a:r>
+              <a:rPr lang="en-US" sz="1000" i="1" dirty="0">
+                <a:solidFill>
+                  <a:srgbClr val="5B6770"/>
+                </a:solidFill>
+                <a:latin typeface="Calibri" pitchFamily="34" charset="0"/>
+                <a:ea typeface="Calibri" pitchFamily="34" charset="-122"/>
+                <a:cs typeface="Calibri" pitchFamily="34" charset="-120"/>
+              </a:rPr>
+              <a:t>Dados hipotéticos, para fins didáticos. Gráfico interativo na página da disciplina (seção 2.2).</a:t>
+            </a:r>
+            <a:endParaRPr lang="en-US" sz="1000" dirty="0"/>
+          </a:p>
+        </p:txBody>
+      </p:sp>
+      <p:sp>
+        <p:nvSpPr>
+          <p:cNvPr id="8" name="Text 5"/>
           <p:cNvSpPr txBox="1"/>
           <p:nvPr/>
         </p:nvSpPr>
@@ -19585,7 +19307,7 @@
               <a:buNone/>
             </a:pPr>
             <a:r>
-              <a:rPr lang="en-US" sz="2600" b="1" dirty="0">
+              <a:rPr lang="en-US" sz="2300" b="1" dirty="0">
                 <a:solidFill>
                   <a:srgbClr val="13294B"/>
                 </a:solidFill>
@@ -19593,68 +19315,26 @@
                 <a:ea typeface="Calibri" pitchFamily="34" charset="-122"/>
                 <a:cs typeface="Calibri" pitchFamily="34" charset="-120"/>
               </a:rPr>
-              <a:t>Falhas de mercado × falhas de governo</a:t>
-            </a:r>
-            <a:endParaRPr lang="en-US" sz="2600" dirty="0"/>
-          </a:p>
-        </p:txBody>
-      </p:sp>
-      <p:sp>
-        <p:nvSpPr>
-          <p:cNvPr id="3" name="Text 1"/>
-          <p:cNvSpPr txBox="1"/>
-          <p:nvPr/>
-        </p:nvSpPr>
-        <p:spPr>
-          <a:xfrm>
-            <a:off x="1005840" y="804672"/>
-            <a:ext cx="7132320" cy="329184"/>
-          </a:xfrm>
-          <a:prstGeom prst="rect">
-            <a:avLst/>
-          </a:prstGeom>
-          <a:noFill/>
-          <a:ln/>
-        </p:spPr>
-        <p:txBody>
-          <a:bodyPr wrap="square" lIns="0" tIns="0" rIns="0" bIns="0" rtlCol="0" anchor="ctr"/>
-          <a:lstStyle/>
-          <a:p>
-            <a:pPr algn="ctr" indent="0" marL="0">
-              <a:lnSpc>
-                <a:spcPct val="100000"/>
-              </a:lnSpc>
-              <a:buNone/>
-            </a:pPr>
-            <a:r>
-              <a:rPr lang="en-US" sz="1400" dirty="0">
-                <a:solidFill>
-                  <a:srgbClr val="5B6770"/>
-                </a:solidFill>
-                <a:latin typeface="Calibri" pitchFamily="34" charset="0"/>
-                <a:ea typeface="Calibri" pitchFamily="34" charset="-122"/>
-                <a:cs typeface="Calibri" pitchFamily="34" charset="-120"/>
-              </a:rPr>
-              <a:t>Nem o mercado nem o Estado são perfeitos</a:t>
-            </a:r>
-            <a:endParaRPr lang="en-US" sz="1400" dirty="0"/>
-          </a:p>
-        </p:txBody>
-      </p:sp>
-      <p:sp>
-        <p:nvSpPr>
-          <p:cNvPr id="4" name="Text 2"/>
-          <p:cNvSpPr txBox="1"/>
-          <p:nvPr/>
-        </p:nvSpPr>
-        <p:spPr>
-          <a:xfrm>
-            <a:off x="685800" y="1234440"/>
-            <a:ext cx="3794760" cy="2240280"/>
+              <a:t>Falhas de mercado no dia a dia de Mato Grosso</a:t>
+            </a:r>
+            <a:endParaRPr lang="en-US" sz="2300" dirty="0"/>
+          </a:p>
+        </p:txBody>
+      </p:sp>
+      <p:sp>
+        <p:nvSpPr>
+          <p:cNvPr id="3" name="Shape 1"/>
+          <p:cNvSpPr/>
+          <p:nvPr/>
+        </p:nvSpPr>
+        <p:spPr>
+          <a:xfrm>
+            <a:off x="685800" y="1188720"/>
+            <a:ext cx="3749040" cy="1481328"/>
           </a:xfrm>
           <a:prstGeom prst="roundRect">
             <a:avLst>
-              <a:gd name="adj" fmla="val 2449"/>
+              <a:gd name="adj" fmla="val 3704"/>
             </a:avLst>
           </a:prstGeom>
           <a:solidFill>
@@ -19664,10 +19344,75 @@
             <a:solidFill>
               <a:srgbClr val="DCD5C1"/>
             </a:solidFill>
+            <a:prstDash val="solid"/>
           </a:ln>
         </p:spPr>
-        <p:txBody>
-          <a:bodyPr wrap="square" lIns="127000" tIns="127000" rIns="127000" bIns="127000" rtlCol="0" anchor="t"/>
+      </p:sp>
+      <p:sp>
+        <p:nvSpPr>
+          <p:cNvPr id="4" name="Shape 2"/>
+          <p:cNvSpPr/>
+          <p:nvPr/>
+        </p:nvSpPr>
+        <p:spPr>
+          <a:xfrm>
+            <a:off x="822960" y="1344168"/>
+            <a:ext cx="457200" cy="457200"/>
+          </a:xfrm>
+          <a:prstGeom prst="roundRect">
+            <a:avLst>
+              <a:gd name="adj" fmla="val 16000"/>
+            </a:avLst>
+          </a:prstGeom>
+          <a:solidFill>
+            <a:srgbClr val="13294B"/>
+          </a:solidFill>
+          <a:ln/>
+        </p:spPr>
+      </p:sp>
+      <p:pic>
+        <p:nvPicPr>
+          <p:cNvPr id="5" name="Image 0" descr="/tmp/claude-0/-home-user-zero-claude/d7e33190-c541-582c-a7cc-1156817732ce/scratchpad/deck/assets/icon_FaFire.png">    </p:cNvPr>
+          <p:cNvPicPr>
+            <a:picLocks noChangeAspect="1"/>
+          </p:cNvPicPr>
+          <p:nvPr/>
+        </p:nvPicPr>
+        <p:blipFill>
+          <a:blip r:embed="rId2"/>
+          <a:stretch>
+            <a:fillRect/>
+          </a:stretch>
+        </p:blipFill>
+        <p:spPr>
+          <a:xfrm>
+            <a:off x="923544" y="1444752"/>
+            <a:ext cx="256032" cy="256032"/>
+          </a:xfrm>
+          <a:prstGeom prst="rect">
+            <a:avLst/>
+          </a:prstGeom>
+        </p:spPr>
+      </p:pic>
+      <p:sp>
+        <p:nvSpPr>
+          <p:cNvPr id="6" name="Text 3"/>
+          <p:cNvSpPr txBox="1"/>
+          <p:nvPr/>
+        </p:nvSpPr>
+        <p:spPr>
+          <a:xfrm>
+            <a:off x="1371600" y="1261872"/>
+            <a:ext cx="2971800" cy="1335024"/>
+          </a:xfrm>
+          <a:prstGeom prst="rect">
+            <a:avLst/>
+          </a:prstGeom>
+          <a:noFill/>
+          <a:ln/>
+        </p:spPr>
+        <p:txBody>
+          <a:bodyPr wrap="square" lIns="38100" tIns="38100" rIns="38100" bIns="38100" rtlCol="0" anchor="t"/>
           <a:lstStyle/>
           <a:p>
             <a:pPr algn="l" indent="0" marL="0">
@@ -19675,12 +19420,12 @@
                 <a:spcPct val="100000"/>
               </a:lnSpc>
               <a:spcAft>
-                <a:spcPts val="400"/>
+                <a:spcPts val="200"/>
               </a:spcAft>
               <a:buNone/>
             </a:pPr>
             <a:r>
-              <a:rPr lang="en-US" sz="1200" b="1" dirty="0">
+              <a:rPr lang="en-US" sz="1100" b="1" dirty="0">
                 <a:solidFill>
                   <a:srgbClr val="2A8C85"/>
                 </a:solidFill>
@@ -19688,23 +19433,42 @@
                 <a:ea typeface="Calibri" pitchFamily="34" charset="-122"/>
                 <a:cs typeface="Calibri" pitchFamily="34" charset="-120"/>
               </a:rPr>
-              <a:t>FALHAS DE MERCADO</a:t>
-            </a:r>
-            <a:endParaRPr lang="en-US" sz="1200" dirty="0"/>
-          </a:p>
-          <a:p>
-            <a:pPr algn="l" marL="177800" indent="-177800">
+              <a:t>EXTERNALIDADE NEGATIVA</a:t>
+            </a:r>
+            <a:endParaRPr lang="en-US" sz="1100" dirty="0"/>
+          </a:p>
+          <a:p>
+            <a:pPr algn="l" indent="0" marL="0">
               <a:lnSpc>
                 <a:spcPct val="100000"/>
               </a:lnSpc>
               <a:spcAft>
                 <a:spcPts val="300"/>
               </a:spcAft>
-              <a:buSzPct val="100000"/>
-              <a:buChar char="•"/>
-            </a:pPr>
-            <a:r>
-              <a:rPr lang="en-US" sz="1400" dirty="0">
+              <a:buNone/>
+            </a:pPr>
+            <a:r>
+              <a:rPr lang="en-US" sz="1450" b="1" dirty="0">
+                <a:solidFill>
+                  <a:srgbClr val="13294B"/>
+                </a:solidFill>
+                <a:latin typeface="Calibri" pitchFamily="34" charset="0"/>
+                <a:ea typeface="Calibri" pitchFamily="34" charset="-122"/>
+                <a:cs typeface="Calibri" pitchFamily="34" charset="-120"/>
+              </a:rPr>
+              <a:t>Queimadas</a:t>
+            </a:r>
+            <a:endParaRPr lang="en-US" sz="1100" dirty="0"/>
+          </a:p>
+          <a:p>
+            <a:pPr algn="l" indent="0" marL="0">
+              <a:lnSpc>
+                <a:spcPct val="100000"/>
+              </a:lnSpc>
+              <a:buNone/>
+            </a:pPr>
+            <a:r>
+              <a:rPr lang="en-US" sz="1250" dirty="0">
                 <a:solidFill>
                   <a:srgbClr val="1F2A37"/>
                 </a:solidFill>
@@ -19712,23 +19476,160 @@
                 <a:ea typeface="Calibri" pitchFamily="34" charset="-122"/>
                 <a:cs typeface="Calibri" pitchFamily="34" charset="-120"/>
               </a:rPr>
-              <a:t>Bens públicos e o problema do carona</a:t>
-            </a:r>
-            <a:endParaRPr lang="en-US" sz="1200" dirty="0"/>
-          </a:p>
-          <a:p>
-            <a:pPr algn="l" marL="177800" indent="-177800">
+              <a:t>A fumaça afeta a saúde de moradores distantes do foco. Resposta: fiscalização, multas e brigadas.</a:t>
+            </a:r>
+            <a:endParaRPr lang="en-US" sz="1100" dirty="0"/>
+          </a:p>
+        </p:txBody>
+      </p:sp>
+      <p:sp>
+        <p:nvSpPr>
+          <p:cNvPr id="7" name="Shape 4"/>
+          <p:cNvSpPr/>
+          <p:nvPr/>
+        </p:nvSpPr>
+        <p:spPr>
+          <a:xfrm>
+            <a:off x="4709160" y="1188720"/>
+            <a:ext cx="3749040" cy="1481328"/>
+          </a:xfrm>
+          <a:prstGeom prst="roundRect">
+            <a:avLst>
+              <a:gd name="adj" fmla="val 3704"/>
+            </a:avLst>
+          </a:prstGeom>
+          <a:solidFill>
+            <a:srgbClr val="FFFFFF"/>
+          </a:solidFill>
+          <a:ln w="12700">
+            <a:solidFill>
+              <a:srgbClr val="DCD5C1"/>
+            </a:solidFill>
+            <a:prstDash val="solid"/>
+          </a:ln>
+        </p:spPr>
+      </p:sp>
+      <p:sp>
+        <p:nvSpPr>
+          <p:cNvPr id="8" name="Shape 5"/>
+          <p:cNvSpPr/>
+          <p:nvPr/>
+        </p:nvSpPr>
+        <p:spPr>
+          <a:xfrm>
+            <a:off x="4846320" y="1344168"/>
+            <a:ext cx="457200" cy="457200"/>
+          </a:xfrm>
+          <a:prstGeom prst="roundRect">
+            <a:avLst>
+              <a:gd name="adj" fmla="val 16000"/>
+            </a:avLst>
+          </a:prstGeom>
+          <a:solidFill>
+            <a:srgbClr val="13294B"/>
+          </a:solidFill>
+          <a:ln/>
+        </p:spPr>
+      </p:sp>
+      <p:pic>
+        <p:nvPicPr>
+          <p:cNvPr id="9" name="Image 1" descr="/tmp/claude-0/-home-user-zero-claude/d7e33190-c541-582c-a7cc-1156817732ce/scratchpad/deck/assets/icon_FaBolt.png">    </p:cNvPr>
+          <p:cNvPicPr>
+            <a:picLocks noChangeAspect="1"/>
+          </p:cNvPicPr>
+          <p:nvPr/>
+        </p:nvPicPr>
+        <p:blipFill>
+          <a:blip r:embed="rId3"/>
+          <a:stretch>
+            <a:fillRect/>
+          </a:stretch>
+        </p:blipFill>
+        <p:spPr>
+          <a:xfrm>
+            <a:off x="4946904" y="1444752"/>
+            <a:ext cx="256032" cy="256032"/>
+          </a:xfrm>
+          <a:prstGeom prst="rect">
+            <a:avLst/>
+          </a:prstGeom>
+        </p:spPr>
+      </p:pic>
+      <p:sp>
+        <p:nvSpPr>
+          <p:cNvPr id="10" name="Text 6"/>
+          <p:cNvSpPr txBox="1"/>
+          <p:nvPr/>
+        </p:nvSpPr>
+        <p:spPr>
+          <a:xfrm>
+            <a:off x="5394960" y="1261872"/>
+            <a:ext cx="2971800" cy="1335024"/>
+          </a:xfrm>
+          <a:prstGeom prst="rect">
+            <a:avLst/>
+          </a:prstGeom>
+          <a:noFill/>
+          <a:ln/>
+        </p:spPr>
+        <p:txBody>
+          <a:bodyPr wrap="square" lIns="38100" tIns="38100" rIns="38100" bIns="38100" rtlCol="0" anchor="t"/>
+          <a:lstStyle/>
+          <a:p>
+            <a:pPr algn="l" indent="0" marL="0">
+              <a:lnSpc>
+                <a:spcPct val="100000"/>
+              </a:lnSpc>
+              <a:spcAft>
+                <a:spcPts val="200"/>
+              </a:spcAft>
+              <a:buNone/>
+            </a:pPr>
+            <a:r>
+              <a:rPr lang="en-US" sz="1100" b="1" dirty="0">
+                <a:solidFill>
+                  <a:srgbClr val="2A8C85"/>
+                </a:solidFill>
+                <a:latin typeface="Calibri" pitchFamily="34" charset="0"/>
+                <a:ea typeface="Calibri" pitchFamily="34" charset="-122"/>
+                <a:cs typeface="Calibri" pitchFamily="34" charset="-120"/>
+              </a:rPr>
+              <a:t>MONOPÓLIO NATURAL</a:t>
+            </a:r>
+            <a:endParaRPr lang="en-US" sz="1100" dirty="0"/>
+          </a:p>
+          <a:p>
+            <a:pPr algn="l" indent="0" marL="0">
               <a:lnSpc>
                 <a:spcPct val="100000"/>
               </a:lnSpc>
               <a:spcAft>
                 <a:spcPts val="300"/>
               </a:spcAft>
-              <a:buSzPct val="100000"/>
-              <a:buChar char="•"/>
-            </a:pPr>
-            <a:r>
-              <a:rPr lang="en-US" sz="1400" dirty="0">
+              <a:buNone/>
+            </a:pPr>
+            <a:r>
+              <a:rPr lang="en-US" sz="1450" b="1" dirty="0">
+                <a:solidFill>
+                  <a:srgbClr val="13294B"/>
+                </a:solidFill>
+                <a:latin typeface="Calibri" pitchFamily="34" charset="0"/>
+                <a:ea typeface="Calibri" pitchFamily="34" charset="-122"/>
+                <a:cs typeface="Calibri" pitchFamily="34" charset="-120"/>
+              </a:rPr>
+              <a:t>Energia elétrica</a:t>
+            </a:r>
+            <a:endParaRPr lang="en-US" sz="1100" dirty="0"/>
+          </a:p>
+          <a:p>
+            <a:pPr algn="l" indent="0" marL="0">
+              <a:lnSpc>
+                <a:spcPct val="100000"/>
+              </a:lnSpc>
+              <a:buNone/>
+            </a:pPr>
+            <a:r>
+              <a:rPr lang="en-US" sz="1250" dirty="0">
                 <a:solidFill>
                   <a:srgbClr val="1F2A37"/>
                 </a:solidFill>
@@ -19736,23 +19637,160 @@
                 <a:ea typeface="Calibri" pitchFamily="34" charset="-122"/>
                 <a:cs typeface="Calibri" pitchFamily="34" charset="-120"/>
               </a:rPr>
-              <a:t>Externalidades</a:t>
-            </a:r>
-            <a:endParaRPr lang="en-US" sz="1200" dirty="0"/>
-          </a:p>
-          <a:p>
-            <a:pPr algn="l" marL="177800" indent="-177800">
+              <a:t>Uma única rede de distribuição. Resposta: tarifas e qualidade reguladas pela ANEEL.</a:t>
+            </a:r>
+            <a:endParaRPr lang="en-US" sz="1100" dirty="0"/>
+          </a:p>
+        </p:txBody>
+      </p:sp>
+      <p:sp>
+        <p:nvSpPr>
+          <p:cNvPr id="11" name="Shape 7"/>
+          <p:cNvSpPr/>
+          <p:nvPr/>
+        </p:nvSpPr>
+        <p:spPr>
+          <a:xfrm>
+            <a:off x="685800" y="2834640"/>
+            <a:ext cx="3749040" cy="1481328"/>
+          </a:xfrm>
+          <a:prstGeom prst="roundRect">
+            <a:avLst>
+              <a:gd name="adj" fmla="val 3704"/>
+            </a:avLst>
+          </a:prstGeom>
+          <a:solidFill>
+            <a:srgbClr val="FFFFFF"/>
+          </a:solidFill>
+          <a:ln w="12700">
+            <a:solidFill>
+              <a:srgbClr val="DCD5C1"/>
+            </a:solidFill>
+            <a:prstDash val="solid"/>
+          </a:ln>
+        </p:spPr>
+      </p:sp>
+      <p:sp>
+        <p:nvSpPr>
+          <p:cNvPr id="12" name="Shape 8"/>
+          <p:cNvSpPr/>
+          <p:nvPr/>
+        </p:nvSpPr>
+        <p:spPr>
+          <a:xfrm>
+            <a:off x="822960" y="2990088"/>
+            <a:ext cx="457200" cy="457200"/>
+          </a:xfrm>
+          <a:prstGeom prst="roundRect">
+            <a:avLst>
+              <a:gd name="adj" fmla="val 16000"/>
+            </a:avLst>
+          </a:prstGeom>
+          <a:solidFill>
+            <a:srgbClr val="13294B"/>
+          </a:solidFill>
+          <a:ln/>
+        </p:spPr>
+      </p:sp>
+      <p:pic>
+        <p:nvPicPr>
+          <p:cNvPr id="13" name="Image 2" descr="/tmp/claude-0/-home-user-zero-claude/d7e33190-c541-582c-a7cc-1156817732ce/scratchpad/deck/assets/icon_FaPills.png">    </p:cNvPr>
+          <p:cNvPicPr>
+            <a:picLocks noChangeAspect="1"/>
+          </p:cNvPicPr>
+          <p:nvPr/>
+        </p:nvPicPr>
+        <p:blipFill>
+          <a:blip r:embed="rId4"/>
+          <a:stretch>
+            <a:fillRect/>
+          </a:stretch>
+        </p:blipFill>
+        <p:spPr>
+          <a:xfrm>
+            <a:off x="923544" y="3090672"/>
+            <a:ext cx="256032" cy="256032"/>
+          </a:xfrm>
+          <a:prstGeom prst="rect">
+            <a:avLst/>
+          </a:prstGeom>
+        </p:spPr>
+      </p:pic>
+      <p:sp>
+        <p:nvSpPr>
+          <p:cNvPr id="14" name="Text 9"/>
+          <p:cNvSpPr txBox="1"/>
+          <p:nvPr/>
+        </p:nvSpPr>
+        <p:spPr>
+          <a:xfrm>
+            <a:off x="1371600" y="2907792"/>
+            <a:ext cx="2971800" cy="1335024"/>
+          </a:xfrm>
+          <a:prstGeom prst="rect">
+            <a:avLst/>
+          </a:prstGeom>
+          <a:noFill/>
+          <a:ln/>
+        </p:spPr>
+        <p:txBody>
+          <a:bodyPr wrap="square" lIns="38100" tIns="38100" rIns="38100" bIns="38100" rtlCol="0" anchor="t"/>
+          <a:lstStyle/>
+          <a:p>
+            <a:pPr algn="l" indent="0" marL="0">
+              <a:lnSpc>
+                <a:spcPct val="100000"/>
+              </a:lnSpc>
+              <a:spcAft>
+                <a:spcPts val="200"/>
+              </a:spcAft>
+              <a:buNone/>
+            </a:pPr>
+            <a:r>
+              <a:rPr lang="en-US" sz="1100" b="1" dirty="0">
+                <a:solidFill>
+                  <a:srgbClr val="2A8C85"/>
+                </a:solidFill>
+                <a:latin typeface="Calibri" pitchFamily="34" charset="0"/>
+                <a:ea typeface="Calibri" pitchFamily="34" charset="-122"/>
+                <a:cs typeface="Calibri" pitchFamily="34" charset="-120"/>
+              </a:rPr>
+              <a:t>ASSIMETRIA DE INFORMAÇÃO</a:t>
+            </a:r>
+            <a:endParaRPr lang="en-US" sz="1100" dirty="0"/>
+          </a:p>
+          <a:p>
+            <a:pPr algn="l" indent="0" marL="0">
               <a:lnSpc>
                 <a:spcPct val="100000"/>
               </a:lnSpc>
               <a:spcAft>
                 <a:spcPts val="300"/>
               </a:spcAft>
-              <a:buSzPct val="100000"/>
-              <a:buChar char="•"/>
-            </a:pPr>
-            <a:r>
-              <a:rPr lang="en-US" sz="1400" dirty="0">
+              <a:buNone/>
+            </a:pPr>
+            <a:r>
+              <a:rPr lang="en-US" sz="1450" b="1" dirty="0">
+                <a:solidFill>
+                  <a:srgbClr val="13294B"/>
+                </a:solidFill>
+                <a:latin typeface="Calibri" pitchFamily="34" charset="0"/>
+                <a:ea typeface="Calibri" pitchFamily="34" charset="-122"/>
+                <a:cs typeface="Calibri" pitchFamily="34" charset="-120"/>
+              </a:rPr>
+              <a:t>Medicamentos</a:t>
+            </a:r>
+            <a:endParaRPr lang="en-US" sz="1100" dirty="0"/>
+          </a:p>
+          <a:p>
+            <a:pPr algn="l" indent="0" marL="0">
+              <a:lnSpc>
+                <a:spcPct val="100000"/>
+              </a:lnSpc>
+              <a:buNone/>
+            </a:pPr>
+            <a:r>
+              <a:rPr lang="en-US" sz="1250" dirty="0">
                 <a:solidFill>
                   <a:srgbClr val="1F2A37"/>
                 </a:solidFill>
@@ -19760,23 +19798,160 @@
                 <a:ea typeface="Calibri" pitchFamily="34" charset="-122"/>
                 <a:cs typeface="Calibri" pitchFamily="34" charset="-120"/>
               </a:rPr>
-              <a:t>Poder de mercado e monopólios</a:t>
-            </a:r>
-            <a:endParaRPr lang="en-US" sz="1200" dirty="0"/>
-          </a:p>
-          <a:p>
-            <a:pPr algn="l" marL="177800" indent="-177800">
+              <a:t>O paciente não avalia o remédio. Resposta: registro e vigilância sanitária (ANVISA).</a:t>
+            </a:r>
+            <a:endParaRPr lang="en-US" sz="1100" dirty="0"/>
+          </a:p>
+        </p:txBody>
+      </p:sp>
+      <p:sp>
+        <p:nvSpPr>
+          <p:cNvPr id="15" name="Shape 10"/>
+          <p:cNvSpPr/>
+          <p:nvPr/>
+        </p:nvSpPr>
+        <p:spPr>
+          <a:xfrm>
+            <a:off x="4709160" y="2834640"/>
+            <a:ext cx="3749040" cy="1481328"/>
+          </a:xfrm>
+          <a:prstGeom prst="roundRect">
+            <a:avLst>
+              <a:gd name="adj" fmla="val 3704"/>
+            </a:avLst>
+          </a:prstGeom>
+          <a:solidFill>
+            <a:srgbClr val="FFFFFF"/>
+          </a:solidFill>
+          <a:ln w="12700">
+            <a:solidFill>
+              <a:srgbClr val="DCD5C1"/>
+            </a:solidFill>
+            <a:prstDash val="solid"/>
+          </a:ln>
+        </p:spPr>
+      </p:sp>
+      <p:sp>
+        <p:nvSpPr>
+          <p:cNvPr id="16" name="Shape 11"/>
+          <p:cNvSpPr/>
+          <p:nvPr/>
+        </p:nvSpPr>
+        <p:spPr>
+          <a:xfrm>
+            <a:off x="4846320" y="2990088"/>
+            <a:ext cx="457200" cy="457200"/>
+          </a:xfrm>
+          <a:prstGeom prst="roundRect">
+            <a:avLst>
+              <a:gd name="adj" fmla="val 16000"/>
+            </a:avLst>
+          </a:prstGeom>
+          <a:solidFill>
+            <a:srgbClr val="13294B"/>
+          </a:solidFill>
+          <a:ln/>
+        </p:spPr>
+      </p:sp>
+      <p:pic>
+        <p:nvPicPr>
+          <p:cNvPr id="17" name="Image 3" descr="/tmp/claude-0/-home-user-zero-claude/d7e33190-c541-582c-a7cc-1156817732ce/scratchpad/deck/assets/icon_FaSyringe.png">    </p:cNvPr>
+          <p:cNvPicPr>
+            <a:picLocks noChangeAspect="1"/>
+          </p:cNvPicPr>
+          <p:nvPr/>
+        </p:nvPicPr>
+        <p:blipFill>
+          <a:blip r:embed="rId5"/>
+          <a:stretch>
+            <a:fillRect/>
+          </a:stretch>
+        </p:blipFill>
+        <p:spPr>
+          <a:xfrm>
+            <a:off x="4946904" y="3090672"/>
+            <a:ext cx="256032" cy="256032"/>
+          </a:xfrm>
+          <a:prstGeom prst="rect">
+            <a:avLst/>
+          </a:prstGeom>
+        </p:spPr>
+      </p:pic>
+      <p:sp>
+        <p:nvSpPr>
+          <p:cNvPr id="18" name="Text 12"/>
+          <p:cNvSpPr txBox="1"/>
+          <p:nvPr/>
+        </p:nvSpPr>
+        <p:spPr>
+          <a:xfrm>
+            <a:off x="5394960" y="2907792"/>
+            <a:ext cx="2971800" cy="1335024"/>
+          </a:xfrm>
+          <a:prstGeom prst="rect">
+            <a:avLst/>
+          </a:prstGeom>
+          <a:noFill/>
+          <a:ln/>
+        </p:spPr>
+        <p:txBody>
+          <a:bodyPr wrap="square" lIns="38100" tIns="38100" rIns="38100" bIns="38100" rtlCol="0" anchor="t"/>
+          <a:lstStyle/>
+          <a:p>
+            <a:pPr algn="l" indent="0" marL="0">
+              <a:lnSpc>
+                <a:spcPct val="100000"/>
+              </a:lnSpc>
+              <a:spcAft>
+                <a:spcPts val="200"/>
+              </a:spcAft>
+              <a:buNone/>
+            </a:pPr>
+            <a:r>
+              <a:rPr lang="en-US" sz="1100" b="1" dirty="0">
+                <a:solidFill>
+                  <a:srgbClr val="2A8C85"/>
+                </a:solidFill>
+                <a:latin typeface="Calibri" pitchFamily="34" charset="0"/>
+                <a:ea typeface="Calibri" pitchFamily="34" charset="-122"/>
+                <a:cs typeface="Calibri" pitchFamily="34" charset="-120"/>
+              </a:rPr>
+              <a:t>EXTERNALIDADE POSITIVA</a:t>
+            </a:r>
+            <a:endParaRPr lang="en-US" sz="1100" dirty="0"/>
+          </a:p>
+          <a:p>
+            <a:pPr algn="l" indent="0" marL="0">
               <a:lnSpc>
                 <a:spcPct val="100000"/>
               </a:lnSpc>
               <a:spcAft>
                 <a:spcPts val="300"/>
               </a:spcAft>
-              <a:buSzPct val="100000"/>
-              <a:buChar char="•"/>
-            </a:pPr>
-            <a:r>
-              <a:rPr lang="en-US" sz="1400" dirty="0">
+              <a:buNone/>
+            </a:pPr>
+            <a:r>
+              <a:rPr lang="en-US" sz="1450" b="1" dirty="0">
+                <a:solidFill>
+                  <a:srgbClr val="13294B"/>
+                </a:solidFill>
+                <a:latin typeface="Calibri" pitchFamily="34" charset="0"/>
+                <a:ea typeface="Calibri" pitchFamily="34" charset="-122"/>
+                <a:cs typeface="Calibri" pitchFamily="34" charset="-120"/>
+              </a:rPr>
+              <a:t>Vacinação</a:t>
+            </a:r>
+            <a:endParaRPr lang="en-US" sz="1100" dirty="0"/>
+          </a:p>
+          <a:p>
+            <a:pPr algn="l" indent="0" marL="0">
+              <a:lnSpc>
+                <a:spcPct val="100000"/>
+              </a:lnSpc>
+              <a:buNone/>
+            </a:pPr>
+            <a:r>
+              <a:rPr lang="en-US" sz="1250" dirty="0">
                 <a:solidFill>
                   <a:srgbClr val="1F2A37"/>
                 </a:solidFill>
@@ -19784,248 +19959,15 @@
                 <a:ea typeface="Calibri" pitchFamily="34" charset="-122"/>
                 <a:cs typeface="Calibri" pitchFamily="34" charset="-120"/>
               </a:rPr>
-              <a:t>Assimetria de informação</a:t>
-            </a:r>
-            <a:endParaRPr lang="en-US" sz="1200" dirty="0"/>
-          </a:p>
-          <a:p>
-            <a:pPr algn="l" marL="177800" indent="-177800">
-              <a:lnSpc>
-                <a:spcPct val="100000"/>
-              </a:lnSpc>
-              <a:buSzPct val="100000"/>
-              <a:buChar char="•"/>
-            </a:pPr>
-            <a:r>
-              <a:rPr lang="en-US" sz="1400" dirty="0">
-                <a:solidFill>
-                  <a:srgbClr val="1F2A37"/>
-                </a:solidFill>
-                <a:latin typeface="Calibri" pitchFamily="34" charset="0"/>
-                <a:ea typeface="Calibri" pitchFamily="34" charset="-122"/>
-                <a:cs typeface="Calibri" pitchFamily="34" charset="-120"/>
-              </a:rPr>
-              <a:t>Instabilidade e desigualdade</a:t>
-            </a:r>
-            <a:endParaRPr lang="en-US" sz="1200" dirty="0"/>
-          </a:p>
-        </p:txBody>
-      </p:sp>
-      <p:sp>
-        <p:nvSpPr>
-          <p:cNvPr id="5" name="Text 3"/>
-          <p:cNvSpPr txBox="1"/>
-          <p:nvPr/>
-        </p:nvSpPr>
-        <p:spPr>
-          <a:xfrm>
-            <a:off x="4663440" y="1234440"/>
-            <a:ext cx="3794760" cy="2240280"/>
-          </a:xfrm>
-          <a:prstGeom prst="roundRect">
-            <a:avLst>
-              <a:gd name="adj" fmla="val 2449"/>
-            </a:avLst>
-          </a:prstGeom>
-          <a:solidFill>
-            <a:srgbClr val="E6F2F0"/>
-          </a:solidFill>
-          <a:ln/>
-        </p:spPr>
-        <p:txBody>
-          <a:bodyPr wrap="square" lIns="127000" tIns="127000" rIns="127000" bIns="127000" rtlCol="0" anchor="t"/>
-          <a:lstStyle/>
-          <a:p>
-            <a:pPr algn="l" indent="0" marL="0">
-              <a:lnSpc>
-                <a:spcPct val="100000"/>
-              </a:lnSpc>
-              <a:spcAft>
-                <a:spcPts val="400"/>
-              </a:spcAft>
-              <a:buNone/>
-            </a:pPr>
-            <a:r>
-              <a:rPr lang="en-US" sz="1200" b="1" dirty="0">
-                <a:solidFill>
-                  <a:srgbClr val="2A8C85"/>
-                </a:solidFill>
-                <a:latin typeface="Calibri" pitchFamily="34" charset="0"/>
-                <a:ea typeface="Calibri" pitchFamily="34" charset="-122"/>
-                <a:cs typeface="Calibri" pitchFamily="34" charset="-120"/>
-              </a:rPr>
-              <a:t>FALHAS DE GOVERNO</a:t>
-            </a:r>
-            <a:endParaRPr lang="en-US" sz="1200" dirty="0"/>
-          </a:p>
-          <a:p>
-            <a:pPr algn="l" marL="177800" indent="-177800">
-              <a:lnSpc>
-                <a:spcPct val="100000"/>
-              </a:lnSpc>
-              <a:spcAft>
-                <a:spcPts val="300"/>
-              </a:spcAft>
-              <a:buSzPct val="100000"/>
-              <a:buChar char="•"/>
-            </a:pPr>
-            <a:r>
-              <a:rPr lang="en-US" sz="1400" dirty="0">
-                <a:solidFill>
-                  <a:srgbClr val="1F2A37"/>
-                </a:solidFill>
-                <a:latin typeface="Calibri" pitchFamily="34" charset="0"/>
-                <a:ea typeface="Calibri" pitchFamily="34" charset="-122"/>
-                <a:cs typeface="Calibri" pitchFamily="34" charset="-120"/>
-              </a:rPr>
-              <a:t>Captura por interesses privados</a:t>
-            </a:r>
-            <a:endParaRPr lang="en-US" sz="1200" dirty="0"/>
-          </a:p>
-          <a:p>
-            <a:pPr algn="l" marL="177800" indent="-177800">
-              <a:lnSpc>
-                <a:spcPct val="100000"/>
-              </a:lnSpc>
-              <a:spcAft>
-                <a:spcPts val="300"/>
-              </a:spcAft>
-              <a:buSzPct val="100000"/>
-              <a:buChar char="•"/>
-            </a:pPr>
-            <a:r>
-              <a:rPr lang="en-US" sz="1400" dirty="0">
-                <a:solidFill>
-                  <a:srgbClr val="1F2A37"/>
-                </a:solidFill>
-                <a:latin typeface="Calibri" pitchFamily="34" charset="0"/>
-                <a:ea typeface="Calibri" pitchFamily="34" charset="-122"/>
-                <a:cs typeface="Calibri" pitchFamily="34" charset="-120"/>
-              </a:rPr>
-              <a:t>Ineficiência</a:t>
-            </a:r>
-            <a:endParaRPr lang="en-US" sz="1200" dirty="0"/>
-          </a:p>
-          <a:p>
-            <a:pPr algn="l" marL="177800" indent="-177800">
-              <a:lnSpc>
-                <a:spcPct val="100000"/>
-              </a:lnSpc>
-              <a:spcAft>
-                <a:spcPts val="300"/>
-              </a:spcAft>
-              <a:buSzPct val="100000"/>
-              <a:buChar char="•"/>
-            </a:pPr>
-            <a:r>
-              <a:rPr lang="en-US" sz="1400" dirty="0">
-                <a:solidFill>
-                  <a:srgbClr val="1F2A37"/>
-                </a:solidFill>
-                <a:latin typeface="Calibri" pitchFamily="34" charset="0"/>
-                <a:ea typeface="Calibri" pitchFamily="34" charset="-122"/>
-                <a:cs typeface="Calibri" pitchFamily="34" charset="-120"/>
-              </a:rPr>
-              <a:t>Corrupção</a:t>
-            </a:r>
-            <a:endParaRPr lang="en-US" sz="1200" dirty="0"/>
-          </a:p>
-          <a:p>
-            <a:pPr algn="l" marL="177800" indent="-177800">
-              <a:lnSpc>
-                <a:spcPct val="100000"/>
-              </a:lnSpc>
-              <a:spcAft>
-                <a:spcPts val="300"/>
-              </a:spcAft>
-              <a:buSzPct val="100000"/>
-              <a:buChar char="•"/>
-            </a:pPr>
-            <a:r>
-              <a:rPr lang="en-US" sz="1400" dirty="0">
-                <a:solidFill>
-                  <a:srgbClr val="1F2A37"/>
-                </a:solidFill>
-                <a:latin typeface="Calibri" pitchFamily="34" charset="0"/>
-                <a:ea typeface="Calibri" pitchFamily="34" charset="-122"/>
-                <a:cs typeface="Calibri" pitchFamily="34" charset="-120"/>
-              </a:rPr>
-              <a:t>Rigidez burocrática</a:t>
-            </a:r>
-            <a:endParaRPr lang="en-US" sz="1200" dirty="0"/>
-          </a:p>
-          <a:p>
-            <a:pPr algn="l" marL="177800" indent="-177800">
-              <a:lnSpc>
-                <a:spcPct val="100000"/>
-              </a:lnSpc>
-              <a:buSzPct val="100000"/>
-              <a:buChar char="•"/>
-            </a:pPr>
-            <a:r>
-              <a:rPr lang="en-US" sz="1400" dirty="0">
-                <a:solidFill>
-                  <a:srgbClr val="1F2A37"/>
-                </a:solidFill>
-                <a:latin typeface="Calibri" pitchFamily="34" charset="0"/>
-                <a:ea typeface="Calibri" pitchFamily="34" charset="-122"/>
-                <a:cs typeface="Calibri" pitchFamily="34" charset="-120"/>
-              </a:rPr>
-              <a:t>Custos de informação</a:t>
-            </a:r>
-            <a:endParaRPr lang="en-US" sz="1200" dirty="0"/>
-          </a:p>
-        </p:txBody>
-      </p:sp>
-      <p:sp>
-        <p:nvSpPr>
-          <p:cNvPr id="6" name="Text 4"/>
-          <p:cNvSpPr txBox="1"/>
-          <p:nvPr/>
-        </p:nvSpPr>
-        <p:spPr>
-          <a:xfrm>
-            <a:off x="685800" y="3657600"/>
-            <a:ext cx="7772400" cy="685800"/>
-          </a:xfrm>
-          <a:prstGeom prst="roundRect">
-            <a:avLst>
-              <a:gd name="adj" fmla="val 10667"/>
-            </a:avLst>
-          </a:prstGeom>
-          <a:solidFill>
-            <a:srgbClr val="E6F2F0"/>
-          </a:solidFill>
-          <a:ln/>
-        </p:spPr>
-        <p:txBody>
-          <a:bodyPr wrap="square" lIns="127000" tIns="127000" rIns="127000" bIns="127000" rtlCol="0" anchor="ctr"/>
-          <a:lstStyle/>
-          <a:p>
-            <a:pPr algn="ctr" indent="0" marL="0">
-              <a:lnSpc>
-                <a:spcPct val="100000"/>
-              </a:lnSpc>
-              <a:buNone/>
-            </a:pPr>
-            <a:r>
-              <a:rPr lang="en-US" sz="1450" b="1" dirty="0">
-                <a:solidFill>
-                  <a:srgbClr val="13294B"/>
-                </a:solidFill>
-                <a:latin typeface="Calibri" pitchFamily="34" charset="0"/>
-                <a:ea typeface="Calibri" pitchFamily="34" charset="-122"/>
-                <a:cs typeface="Calibri" pitchFamily="34" charset="-120"/>
-              </a:rPr>
-              <a:t>O debate entre as matrizes teóricas é, em grande medida, um debate sobre qual falha é mais grave.</a:t>
-            </a:r>
-            <a:endParaRPr lang="en-US" sz="1450" dirty="0"/>
-          </a:p>
-        </p:txBody>
-      </p:sp>
-      <p:sp>
-        <p:nvSpPr>
-          <p:cNvPr id="7" name="Text 5"/>
+              <a:t>Protege também quem não se vacinou. Resposta: vacinas gratuitas no SUS.</a:t>
+            </a:r>
+            <a:endParaRPr lang="en-US" sz="1100" dirty="0"/>
+          </a:p>
+        </p:txBody>
+      </p:sp>
+      <p:sp>
+        <p:nvSpPr>
+          <p:cNvPr id="19" name="Text 13"/>
           <p:cNvSpPr txBox="1"/>
           <p:nvPr/>
         </p:nvSpPr>
@@ -20140,7 +20082,7 @@
                 <a:ea typeface="Calibri" pitchFamily="34" charset="-122"/>
                 <a:cs typeface="Calibri" pitchFamily="34" charset="-120"/>
               </a:rPr>
-              <a:t>As três funções econômicas do Estado</a:t>
+              <a:t>Falhas de mercado × falhas de governo</a:t>
             </a:r>
             <a:endParaRPr lang="en-US" sz="2600" dirty="0"/>
           </a:p>
@@ -20182,6 +20124,760 @@
                 <a:ea typeface="Calibri" pitchFamily="34" charset="-122"/>
                 <a:cs typeface="Calibri" pitchFamily="34" charset="-120"/>
               </a:rPr>
+              <a:t>Nem o mercado nem o Estado são perfeitos</a:t>
+            </a:r>
+            <a:endParaRPr lang="en-US" sz="1400" dirty="0"/>
+          </a:p>
+        </p:txBody>
+      </p:sp>
+      <p:sp>
+        <p:nvSpPr>
+          <p:cNvPr id="4" name="Text 2"/>
+          <p:cNvSpPr txBox="1"/>
+          <p:nvPr/>
+        </p:nvSpPr>
+        <p:spPr>
+          <a:xfrm>
+            <a:off x="685800" y="1234440"/>
+            <a:ext cx="3794760" cy="2240280"/>
+          </a:xfrm>
+          <a:prstGeom prst="roundRect">
+            <a:avLst>
+              <a:gd name="adj" fmla="val 2449"/>
+            </a:avLst>
+          </a:prstGeom>
+          <a:solidFill>
+            <a:srgbClr val="FFFFFF"/>
+          </a:solidFill>
+          <a:ln w="12700">
+            <a:solidFill>
+              <a:srgbClr val="DCD5C1"/>
+            </a:solidFill>
+          </a:ln>
+        </p:spPr>
+        <p:txBody>
+          <a:bodyPr wrap="square" lIns="127000" tIns="127000" rIns="127000" bIns="127000" rtlCol="0" anchor="t"/>
+          <a:lstStyle/>
+          <a:p>
+            <a:pPr algn="l" indent="0" marL="0">
+              <a:lnSpc>
+                <a:spcPct val="100000"/>
+              </a:lnSpc>
+              <a:spcAft>
+                <a:spcPts val="400"/>
+              </a:spcAft>
+              <a:buNone/>
+            </a:pPr>
+            <a:r>
+              <a:rPr lang="en-US" sz="1200" b="1" dirty="0">
+                <a:solidFill>
+                  <a:srgbClr val="2A8C85"/>
+                </a:solidFill>
+                <a:latin typeface="Calibri" pitchFamily="34" charset="0"/>
+                <a:ea typeface="Calibri" pitchFamily="34" charset="-122"/>
+                <a:cs typeface="Calibri" pitchFamily="34" charset="-120"/>
+              </a:rPr>
+              <a:t>FALHAS DE MERCADO</a:t>
+            </a:r>
+            <a:endParaRPr lang="en-US" sz="1200" dirty="0"/>
+          </a:p>
+          <a:p>
+            <a:pPr algn="l" marL="177800" indent="-177800">
+              <a:lnSpc>
+                <a:spcPct val="100000"/>
+              </a:lnSpc>
+              <a:spcAft>
+                <a:spcPts val="300"/>
+              </a:spcAft>
+              <a:buSzPct val="100000"/>
+              <a:buChar char="•"/>
+            </a:pPr>
+            <a:r>
+              <a:rPr lang="en-US" sz="1400" dirty="0">
+                <a:solidFill>
+                  <a:srgbClr val="1F2A37"/>
+                </a:solidFill>
+                <a:latin typeface="Calibri" pitchFamily="34" charset="0"/>
+                <a:ea typeface="Calibri" pitchFamily="34" charset="-122"/>
+                <a:cs typeface="Calibri" pitchFamily="34" charset="-120"/>
+              </a:rPr>
+              <a:t>Bens públicos e o problema do carona</a:t>
+            </a:r>
+            <a:endParaRPr lang="en-US" sz="1200" dirty="0"/>
+          </a:p>
+          <a:p>
+            <a:pPr algn="l" marL="177800" indent="-177800">
+              <a:lnSpc>
+                <a:spcPct val="100000"/>
+              </a:lnSpc>
+              <a:spcAft>
+                <a:spcPts val="300"/>
+              </a:spcAft>
+              <a:buSzPct val="100000"/>
+              <a:buChar char="•"/>
+            </a:pPr>
+            <a:r>
+              <a:rPr lang="en-US" sz="1400" dirty="0">
+                <a:solidFill>
+                  <a:srgbClr val="1F2A37"/>
+                </a:solidFill>
+                <a:latin typeface="Calibri" pitchFamily="34" charset="0"/>
+                <a:ea typeface="Calibri" pitchFamily="34" charset="-122"/>
+                <a:cs typeface="Calibri" pitchFamily="34" charset="-120"/>
+              </a:rPr>
+              <a:t>Externalidades</a:t>
+            </a:r>
+            <a:endParaRPr lang="en-US" sz="1200" dirty="0"/>
+          </a:p>
+          <a:p>
+            <a:pPr algn="l" marL="177800" indent="-177800">
+              <a:lnSpc>
+                <a:spcPct val="100000"/>
+              </a:lnSpc>
+              <a:spcAft>
+                <a:spcPts val="300"/>
+              </a:spcAft>
+              <a:buSzPct val="100000"/>
+              <a:buChar char="•"/>
+            </a:pPr>
+            <a:r>
+              <a:rPr lang="en-US" sz="1400" dirty="0">
+                <a:solidFill>
+                  <a:srgbClr val="1F2A37"/>
+                </a:solidFill>
+                <a:latin typeface="Calibri" pitchFamily="34" charset="0"/>
+                <a:ea typeface="Calibri" pitchFamily="34" charset="-122"/>
+                <a:cs typeface="Calibri" pitchFamily="34" charset="-120"/>
+              </a:rPr>
+              <a:t>Poder de mercado e monopólios</a:t>
+            </a:r>
+            <a:endParaRPr lang="en-US" sz="1200" dirty="0"/>
+          </a:p>
+          <a:p>
+            <a:pPr algn="l" marL="177800" indent="-177800">
+              <a:lnSpc>
+                <a:spcPct val="100000"/>
+              </a:lnSpc>
+              <a:spcAft>
+                <a:spcPts val="300"/>
+              </a:spcAft>
+              <a:buSzPct val="100000"/>
+              <a:buChar char="•"/>
+            </a:pPr>
+            <a:r>
+              <a:rPr lang="en-US" sz="1400" dirty="0">
+                <a:solidFill>
+                  <a:srgbClr val="1F2A37"/>
+                </a:solidFill>
+                <a:latin typeface="Calibri" pitchFamily="34" charset="0"/>
+                <a:ea typeface="Calibri" pitchFamily="34" charset="-122"/>
+                <a:cs typeface="Calibri" pitchFamily="34" charset="-120"/>
+              </a:rPr>
+              <a:t>Assimetria de informação</a:t>
+            </a:r>
+            <a:endParaRPr lang="en-US" sz="1200" dirty="0"/>
+          </a:p>
+          <a:p>
+            <a:pPr algn="l" marL="177800" indent="-177800">
+              <a:lnSpc>
+                <a:spcPct val="100000"/>
+              </a:lnSpc>
+              <a:buSzPct val="100000"/>
+              <a:buChar char="•"/>
+            </a:pPr>
+            <a:r>
+              <a:rPr lang="en-US" sz="1400" dirty="0">
+                <a:solidFill>
+                  <a:srgbClr val="1F2A37"/>
+                </a:solidFill>
+                <a:latin typeface="Calibri" pitchFamily="34" charset="0"/>
+                <a:ea typeface="Calibri" pitchFamily="34" charset="-122"/>
+                <a:cs typeface="Calibri" pitchFamily="34" charset="-120"/>
+              </a:rPr>
+              <a:t>Instabilidade e desigualdade</a:t>
+            </a:r>
+            <a:endParaRPr lang="en-US" sz="1200" dirty="0"/>
+          </a:p>
+        </p:txBody>
+      </p:sp>
+      <p:sp>
+        <p:nvSpPr>
+          <p:cNvPr id="5" name="Text 3"/>
+          <p:cNvSpPr txBox="1"/>
+          <p:nvPr/>
+        </p:nvSpPr>
+        <p:spPr>
+          <a:xfrm>
+            <a:off x="4663440" y="1234440"/>
+            <a:ext cx="3794760" cy="2240280"/>
+          </a:xfrm>
+          <a:prstGeom prst="roundRect">
+            <a:avLst>
+              <a:gd name="adj" fmla="val 2449"/>
+            </a:avLst>
+          </a:prstGeom>
+          <a:solidFill>
+            <a:srgbClr val="E6F2F0"/>
+          </a:solidFill>
+          <a:ln/>
+        </p:spPr>
+        <p:txBody>
+          <a:bodyPr wrap="square" lIns="127000" tIns="127000" rIns="127000" bIns="127000" rtlCol="0" anchor="t"/>
+          <a:lstStyle/>
+          <a:p>
+            <a:pPr algn="l" indent="0" marL="0">
+              <a:lnSpc>
+                <a:spcPct val="100000"/>
+              </a:lnSpc>
+              <a:spcAft>
+                <a:spcPts val="400"/>
+              </a:spcAft>
+              <a:buNone/>
+            </a:pPr>
+            <a:r>
+              <a:rPr lang="en-US" sz="1200" b="1" dirty="0">
+                <a:solidFill>
+                  <a:srgbClr val="2A8C85"/>
+                </a:solidFill>
+                <a:latin typeface="Calibri" pitchFamily="34" charset="0"/>
+                <a:ea typeface="Calibri" pitchFamily="34" charset="-122"/>
+                <a:cs typeface="Calibri" pitchFamily="34" charset="-120"/>
+              </a:rPr>
+              <a:t>FALHAS DE GOVERNO</a:t>
+            </a:r>
+            <a:endParaRPr lang="en-US" sz="1200" dirty="0"/>
+          </a:p>
+          <a:p>
+            <a:pPr algn="l" marL="177800" indent="-177800">
+              <a:lnSpc>
+                <a:spcPct val="100000"/>
+              </a:lnSpc>
+              <a:spcAft>
+                <a:spcPts val="300"/>
+              </a:spcAft>
+              <a:buSzPct val="100000"/>
+              <a:buChar char="•"/>
+            </a:pPr>
+            <a:r>
+              <a:rPr lang="en-US" sz="1400" dirty="0">
+                <a:solidFill>
+                  <a:srgbClr val="1F2A37"/>
+                </a:solidFill>
+                <a:latin typeface="Calibri" pitchFamily="34" charset="0"/>
+                <a:ea typeface="Calibri" pitchFamily="34" charset="-122"/>
+                <a:cs typeface="Calibri" pitchFamily="34" charset="-120"/>
+              </a:rPr>
+              <a:t>Captura por interesses privados</a:t>
+            </a:r>
+            <a:endParaRPr lang="en-US" sz="1200" dirty="0"/>
+          </a:p>
+          <a:p>
+            <a:pPr algn="l" marL="177800" indent="-177800">
+              <a:lnSpc>
+                <a:spcPct val="100000"/>
+              </a:lnSpc>
+              <a:spcAft>
+                <a:spcPts val="300"/>
+              </a:spcAft>
+              <a:buSzPct val="100000"/>
+              <a:buChar char="•"/>
+            </a:pPr>
+            <a:r>
+              <a:rPr lang="en-US" sz="1400" dirty="0">
+                <a:solidFill>
+                  <a:srgbClr val="1F2A37"/>
+                </a:solidFill>
+                <a:latin typeface="Calibri" pitchFamily="34" charset="0"/>
+                <a:ea typeface="Calibri" pitchFamily="34" charset="-122"/>
+                <a:cs typeface="Calibri" pitchFamily="34" charset="-120"/>
+              </a:rPr>
+              <a:t>Ineficiência</a:t>
+            </a:r>
+            <a:endParaRPr lang="en-US" sz="1200" dirty="0"/>
+          </a:p>
+          <a:p>
+            <a:pPr algn="l" marL="177800" indent="-177800">
+              <a:lnSpc>
+                <a:spcPct val="100000"/>
+              </a:lnSpc>
+              <a:spcAft>
+                <a:spcPts val="300"/>
+              </a:spcAft>
+              <a:buSzPct val="100000"/>
+              <a:buChar char="•"/>
+            </a:pPr>
+            <a:r>
+              <a:rPr lang="en-US" sz="1400" dirty="0">
+                <a:solidFill>
+                  <a:srgbClr val="1F2A37"/>
+                </a:solidFill>
+                <a:latin typeface="Calibri" pitchFamily="34" charset="0"/>
+                <a:ea typeface="Calibri" pitchFamily="34" charset="-122"/>
+                <a:cs typeface="Calibri" pitchFamily="34" charset="-120"/>
+              </a:rPr>
+              <a:t>Corrupção</a:t>
+            </a:r>
+            <a:endParaRPr lang="en-US" sz="1200" dirty="0"/>
+          </a:p>
+          <a:p>
+            <a:pPr algn="l" marL="177800" indent="-177800">
+              <a:lnSpc>
+                <a:spcPct val="100000"/>
+              </a:lnSpc>
+              <a:spcAft>
+                <a:spcPts val="300"/>
+              </a:spcAft>
+              <a:buSzPct val="100000"/>
+              <a:buChar char="•"/>
+            </a:pPr>
+            <a:r>
+              <a:rPr lang="en-US" sz="1400" dirty="0">
+                <a:solidFill>
+                  <a:srgbClr val="1F2A37"/>
+                </a:solidFill>
+                <a:latin typeface="Calibri" pitchFamily="34" charset="0"/>
+                <a:ea typeface="Calibri" pitchFamily="34" charset="-122"/>
+                <a:cs typeface="Calibri" pitchFamily="34" charset="-120"/>
+              </a:rPr>
+              <a:t>Rigidez burocrática</a:t>
+            </a:r>
+            <a:endParaRPr lang="en-US" sz="1200" dirty="0"/>
+          </a:p>
+          <a:p>
+            <a:pPr algn="l" marL="177800" indent="-177800">
+              <a:lnSpc>
+                <a:spcPct val="100000"/>
+              </a:lnSpc>
+              <a:buSzPct val="100000"/>
+              <a:buChar char="•"/>
+            </a:pPr>
+            <a:r>
+              <a:rPr lang="en-US" sz="1400" dirty="0">
+                <a:solidFill>
+                  <a:srgbClr val="1F2A37"/>
+                </a:solidFill>
+                <a:latin typeface="Calibri" pitchFamily="34" charset="0"/>
+                <a:ea typeface="Calibri" pitchFamily="34" charset="-122"/>
+                <a:cs typeface="Calibri" pitchFamily="34" charset="-120"/>
+              </a:rPr>
+              <a:t>Custos de informação</a:t>
+            </a:r>
+            <a:endParaRPr lang="en-US" sz="1200" dirty="0"/>
+          </a:p>
+        </p:txBody>
+      </p:sp>
+      <p:sp>
+        <p:nvSpPr>
+          <p:cNvPr id="6" name="Text 4"/>
+          <p:cNvSpPr txBox="1"/>
+          <p:nvPr/>
+        </p:nvSpPr>
+        <p:spPr>
+          <a:xfrm>
+            <a:off x="685800" y="3657600"/>
+            <a:ext cx="7772400" cy="685800"/>
+          </a:xfrm>
+          <a:prstGeom prst="roundRect">
+            <a:avLst>
+              <a:gd name="adj" fmla="val 10667"/>
+            </a:avLst>
+          </a:prstGeom>
+          <a:solidFill>
+            <a:srgbClr val="E6F2F0"/>
+          </a:solidFill>
+          <a:ln/>
+        </p:spPr>
+        <p:txBody>
+          <a:bodyPr wrap="square" lIns="127000" tIns="127000" rIns="127000" bIns="127000" rtlCol="0" anchor="ctr"/>
+          <a:lstStyle/>
+          <a:p>
+            <a:pPr algn="ctr" indent="0" marL="0">
+              <a:lnSpc>
+                <a:spcPct val="100000"/>
+              </a:lnSpc>
+              <a:buNone/>
+            </a:pPr>
+            <a:r>
+              <a:rPr lang="en-US" sz="1450" b="1" dirty="0">
+                <a:solidFill>
+                  <a:srgbClr val="13294B"/>
+                </a:solidFill>
+                <a:latin typeface="Calibri" pitchFamily="34" charset="0"/>
+                <a:ea typeface="Calibri" pitchFamily="34" charset="-122"/>
+                <a:cs typeface="Calibri" pitchFamily="34" charset="-120"/>
+              </a:rPr>
+              <a:t>O debate entre as matrizes teóricas é, em grande medida, um debate sobre qual falha é mais grave.</a:t>
+            </a:r>
+            <a:endParaRPr lang="en-US" sz="1450" dirty="0"/>
+          </a:p>
+        </p:txBody>
+      </p:sp>
+      <p:sp>
+        <p:nvSpPr>
+          <p:cNvPr id="7" name="Text 5"/>
+          <p:cNvSpPr txBox="1"/>
+          <p:nvPr/>
+        </p:nvSpPr>
+        <p:spPr>
+          <a:xfrm>
+            <a:off x="4206240" y="36576"/>
+            <a:ext cx="4800600" cy="219456"/>
+          </a:xfrm>
+          <a:prstGeom prst="rect">
+            <a:avLst/>
+          </a:prstGeom>
+          <a:noFill/>
+          <a:ln/>
+        </p:spPr>
+        <p:txBody>
+          <a:bodyPr wrap="square" lIns="0" tIns="0" rIns="0" bIns="0" rtlCol="0" anchor="ctr"/>
+          <a:lstStyle/>
+          <a:p>
+            <a:pPr algn="r" indent="0" marL="0">
+              <a:lnSpc>
+                <a:spcPct val="100000"/>
+              </a:lnSpc>
+              <a:buNone/>
+            </a:pPr>
+            <a:r>
+              <a:rPr lang="en-US" sz="950" dirty="0">
+                <a:solidFill>
+                  <a:srgbClr val="5B6770"/>
+                </a:solidFill>
+                <a:latin typeface="Calibri" pitchFamily="34" charset="0"/>
+                <a:ea typeface="Calibri" pitchFamily="34" charset="-122"/>
+                <a:cs typeface="Calibri" pitchFamily="34" charset="-120"/>
+              </a:rPr>
+              <a:t>Estado, Governo e Mercado · Unidade 1 · Tópico 2 do sumário</a:t>
+            </a:r>
+            <a:endParaRPr lang="en-US" sz="950" dirty="0"/>
+          </a:p>
+        </p:txBody>
+      </p:sp>
+    </p:spTree>
+  </p:cSld>
+  <p:clrMapOvr>
+    <a:masterClrMapping/>
+  </p:clrMapOvr>
+</p:sld>
+</file>
+
+<file path=ppt/slides/slide3.xml><?xml version="1.0" encoding="utf-8"?>
+<p:sld xmlns:a="http://schemas.openxmlformats.org/drawingml/2006/main" xmlns:r="http://schemas.openxmlformats.org/officeDocument/2006/relationships" xmlns:p="http://schemas.openxmlformats.org/presentationml/2006/main">
+  <p:cSld name="Slide 3">
+    <p:bg>
+      <p:bgPr>
+        <a:blipFill dpi="0" rotWithShape="1">
+          <a:blip r:embed="rId1">
+            <a:lum/>
+          </a:blip>
+          <a:srcRect/>
+          <a:stretch>
+            <a:fillRect/>
+          </a:stretch>
+        </a:blipFill>
+        <a:effectLst/>
+      </p:bgPr>
+    </p:bg>
+    <p:spTree>
+      <p:nvGrpSpPr>
+        <p:cNvPr id="1" name=""/>
+        <p:cNvGrpSpPr/>
+        <p:nvPr/>
+      </p:nvGrpSpPr>
+      <p:grpSpPr>
+        <a:xfrm>
+          <a:off x="0" y="0"/>
+          <a:ext cx="0" cy="0"/>
+          <a:chOff x="0" y="0"/>
+          <a:chExt cx="0" cy="0"/>
+        </a:xfrm>
+      </p:grpSpPr>
+      <p:sp>
+        <p:nvSpPr>
+          <p:cNvPr id="2" name="Text 0"/>
+          <p:cNvSpPr txBox="1"/>
+          <p:nvPr/>
+        </p:nvSpPr>
+        <p:spPr>
+          <a:xfrm>
+            <a:off x="731520" y="1417320"/>
+            <a:ext cx="7680960" cy="457200"/>
+          </a:xfrm>
+          <a:prstGeom prst="rect">
+            <a:avLst/>
+          </a:prstGeom>
+          <a:noFill/>
+          <a:ln/>
+        </p:spPr>
+        <p:txBody>
+          <a:bodyPr wrap="square" lIns="0" tIns="0" rIns="0" bIns="0" rtlCol="0" anchor="ctr"/>
+          <a:lstStyle/>
+          <a:p>
+            <a:pPr algn="ctr" indent="0" marL="0">
+              <a:lnSpc>
+                <a:spcPct val="100000"/>
+              </a:lnSpc>
+              <a:buNone/>
+            </a:pPr>
+            <a:r>
+              <a:rPr lang="en-US" sz="1600" b="1" dirty="0">
+                <a:solidFill>
+                  <a:srgbClr val="2A8C85"/>
+                </a:solidFill>
+                <a:latin typeface="Calibri" pitchFamily="34" charset="0"/>
+                <a:ea typeface="Calibri" pitchFamily="34" charset="-122"/>
+                <a:cs typeface="Calibri" pitchFamily="34" charset="-120"/>
+              </a:rPr>
+              <a:t>PARTE 1 · TÓPICO 1 DO SUMÁRIO</a:t>
+            </a:r>
+            <a:endParaRPr lang="en-US" sz="1600" dirty="0"/>
+          </a:p>
+        </p:txBody>
+      </p:sp>
+      <p:sp>
+        <p:nvSpPr>
+          <p:cNvPr id="3" name="Text 1"/>
+          <p:cNvSpPr txBox="1"/>
+          <p:nvPr/>
+        </p:nvSpPr>
+        <p:spPr>
+          <a:xfrm>
+            <a:off x="731520" y="1874520"/>
+            <a:ext cx="7680960" cy="1097280"/>
+          </a:xfrm>
+          <a:prstGeom prst="rect">
+            <a:avLst/>
+          </a:prstGeom>
+          <a:noFill/>
+          <a:ln/>
+        </p:spPr>
+        <p:txBody>
+          <a:bodyPr wrap="square" lIns="0" tIns="0" rIns="0" bIns="0" rtlCol="0" anchor="ctr"/>
+          <a:lstStyle/>
+          <a:p>
+            <a:pPr algn="ctr" indent="0" marL="0">
+              <a:lnSpc>
+                <a:spcPct val="100000"/>
+              </a:lnSpc>
+              <a:buNone/>
+            </a:pPr>
+            <a:r>
+              <a:rPr lang="en-US" sz="3000" b="1" dirty="0">
+                <a:solidFill>
+                  <a:srgbClr val="13294B"/>
+                </a:solidFill>
+                <a:latin typeface="Calibri" pitchFamily="34" charset="0"/>
+                <a:ea typeface="Calibri" pitchFamily="34" charset="-122"/>
+                <a:cs typeface="Calibri" pitchFamily="34" charset="-120"/>
+              </a:rPr>
+              <a:t>Introdução à economia: conceitos básicos</a:t>
+            </a:r>
+            <a:endParaRPr lang="en-US" sz="3000" dirty="0"/>
+          </a:p>
+        </p:txBody>
+      </p:sp>
+      <p:sp>
+        <p:nvSpPr>
+          <p:cNvPr id="4" name="Text 2"/>
+          <p:cNvSpPr txBox="1"/>
+          <p:nvPr/>
+        </p:nvSpPr>
+        <p:spPr>
+          <a:xfrm>
+            <a:off x="1188720" y="2971800"/>
+            <a:ext cx="6766560" cy="457200"/>
+          </a:xfrm>
+          <a:prstGeom prst="rect">
+            <a:avLst/>
+          </a:prstGeom>
+          <a:noFill/>
+          <a:ln/>
+        </p:spPr>
+        <p:txBody>
+          <a:bodyPr wrap="square" lIns="0" tIns="0" rIns="0" bIns="0" rtlCol="0" anchor="ctr"/>
+          <a:lstStyle/>
+          <a:p>
+            <a:pPr algn="ctr" indent="0" marL="0">
+              <a:lnSpc>
+                <a:spcPct val="100000"/>
+              </a:lnSpc>
+              <a:buNone/>
+            </a:pPr>
+            <a:r>
+              <a:rPr lang="en-US" sz="1600" dirty="0">
+                <a:solidFill>
+                  <a:srgbClr val="5B6770"/>
+                </a:solidFill>
+                <a:latin typeface="Calibri" pitchFamily="34" charset="0"/>
+                <a:ea typeface="Calibri" pitchFamily="34" charset="-122"/>
+                <a:cs typeface="Calibri" pitchFamily="34" charset="-120"/>
+              </a:rPr>
+              <a:t>Escassez, problemas fundamentais, agentes, sistemas e mercado</a:t>
+            </a:r>
+            <a:endParaRPr lang="en-US" sz="1600" dirty="0"/>
+          </a:p>
+        </p:txBody>
+      </p:sp>
+      <p:sp>
+        <p:nvSpPr>
+          <p:cNvPr id="5" name="Text 3"/>
+          <p:cNvSpPr txBox="1"/>
+          <p:nvPr/>
+        </p:nvSpPr>
+        <p:spPr>
+          <a:xfrm>
+            <a:off x="4206240" y="36576"/>
+            <a:ext cx="4800600" cy="219456"/>
+          </a:xfrm>
+          <a:prstGeom prst="rect">
+            <a:avLst/>
+          </a:prstGeom>
+          <a:noFill/>
+          <a:ln/>
+        </p:spPr>
+        <p:txBody>
+          <a:bodyPr wrap="square" lIns="0" tIns="0" rIns="0" bIns="0" rtlCol="0" anchor="ctr"/>
+          <a:lstStyle/>
+          <a:p>
+            <a:pPr algn="r" indent="0" marL="0">
+              <a:lnSpc>
+                <a:spcPct val="100000"/>
+              </a:lnSpc>
+              <a:buNone/>
+            </a:pPr>
+            <a:r>
+              <a:rPr lang="en-US" sz="950" dirty="0">
+                <a:solidFill>
+                  <a:srgbClr val="5B6770"/>
+                </a:solidFill>
+                <a:latin typeface="Calibri" pitchFamily="34" charset="0"/>
+                <a:ea typeface="Calibri" pitchFamily="34" charset="-122"/>
+                <a:cs typeface="Calibri" pitchFamily="34" charset="-120"/>
+              </a:rPr>
+              <a:t>Estado, Governo e Mercado · Unidade 1 · Tópico 1 do sumário</a:t>
+            </a:r>
+            <a:endParaRPr lang="en-US" sz="950" dirty="0"/>
+          </a:p>
+        </p:txBody>
+      </p:sp>
+    </p:spTree>
+  </p:cSld>
+  <p:clrMapOvr>
+    <a:masterClrMapping/>
+  </p:clrMapOvr>
+</p:sld>
+</file>
+
+<file path=ppt/slides/slide30.xml><?xml version="1.0" encoding="utf-8"?>
+<p:sld xmlns:a="http://schemas.openxmlformats.org/drawingml/2006/main" xmlns:r="http://schemas.openxmlformats.org/officeDocument/2006/relationships" xmlns:p="http://schemas.openxmlformats.org/presentationml/2006/main">
+  <p:cSld name="Slide 30">
+    <p:bg>
+      <p:bgPr>
+        <a:blipFill dpi="0" rotWithShape="1">
+          <a:blip r:embed="rId1">
+            <a:lum/>
+          </a:blip>
+          <a:srcRect/>
+          <a:stretch>
+            <a:fillRect/>
+          </a:stretch>
+        </a:blipFill>
+        <a:effectLst/>
+      </p:bgPr>
+    </p:bg>
+    <p:spTree>
+      <p:nvGrpSpPr>
+        <p:cNvPr id="1" name=""/>
+        <p:cNvGrpSpPr/>
+        <p:nvPr/>
+      </p:nvGrpSpPr>
+      <p:grpSpPr>
+        <a:xfrm>
+          <a:off x="0" y="0"/>
+          <a:ext cx="0" cy="0"/>
+          <a:chOff x="0" y="0"/>
+          <a:chExt cx="0" cy="0"/>
+        </a:xfrm>
+      </p:grpSpPr>
+      <p:sp>
+        <p:nvSpPr>
+          <p:cNvPr id="2" name="Text 0"/>
+          <p:cNvSpPr txBox="1"/>
+          <p:nvPr/>
+        </p:nvSpPr>
+        <p:spPr>
+          <a:xfrm>
+            <a:off x="731520" y="256032"/>
+            <a:ext cx="7680960" cy="566928"/>
+          </a:xfrm>
+          <a:prstGeom prst="rect">
+            <a:avLst/>
+          </a:prstGeom>
+          <a:noFill/>
+          <a:ln/>
+        </p:spPr>
+        <p:txBody>
+          <a:bodyPr wrap="square" lIns="0" tIns="0" rIns="0" bIns="0" rtlCol="0" anchor="ctr"/>
+          <a:lstStyle/>
+          <a:p>
+            <a:pPr algn="ctr" indent="0" marL="0">
+              <a:lnSpc>
+                <a:spcPct val="100000"/>
+              </a:lnSpc>
+              <a:buNone/>
+            </a:pPr>
+            <a:r>
+              <a:rPr lang="en-US" sz="2600" b="1" dirty="0">
+                <a:solidFill>
+                  <a:srgbClr val="13294B"/>
+                </a:solidFill>
+                <a:latin typeface="Calibri" pitchFamily="34" charset="0"/>
+                <a:ea typeface="Calibri" pitchFamily="34" charset="-122"/>
+                <a:cs typeface="Calibri" pitchFamily="34" charset="-120"/>
+              </a:rPr>
+              <a:t>As três funções econômicas do Estado</a:t>
+            </a:r>
+            <a:endParaRPr lang="en-US" sz="2600" dirty="0"/>
+          </a:p>
+        </p:txBody>
+      </p:sp>
+      <p:sp>
+        <p:nvSpPr>
+          <p:cNvPr id="3" name="Text 1"/>
+          <p:cNvSpPr txBox="1"/>
+          <p:nvPr/>
+        </p:nvSpPr>
+        <p:spPr>
+          <a:xfrm>
+            <a:off x="1005840" y="804672"/>
+            <a:ext cx="7132320" cy="329184"/>
+          </a:xfrm>
+          <a:prstGeom prst="rect">
+            <a:avLst/>
+          </a:prstGeom>
+          <a:noFill/>
+          <a:ln/>
+        </p:spPr>
+        <p:txBody>
+          <a:bodyPr wrap="square" lIns="0" tIns="0" rIns="0" bIns="0" rtlCol="0" anchor="ctr"/>
+          <a:lstStyle/>
+          <a:p>
+            <a:pPr algn="ctr" indent="0" marL="0">
+              <a:lnSpc>
+                <a:spcPct val="100000"/>
+              </a:lnSpc>
+              <a:buNone/>
+            </a:pPr>
+            <a:r>
+              <a:rPr lang="en-US" sz="1400" dirty="0">
+                <a:solidFill>
+                  <a:srgbClr val="5B6770"/>
+                </a:solidFill>
+                <a:latin typeface="Calibri" pitchFamily="34" charset="0"/>
+                <a:ea typeface="Calibri" pitchFamily="34" charset="-122"/>
+                <a:cs typeface="Calibri" pitchFamily="34" charset="-120"/>
+              </a:rPr>
               <a:t>Classificação de Richard Musgrave</a:t>
             </a:r>
             <a:endParaRPr lang="en-US" sz="1400" dirty="0"/>
@@ -20190,7 +20886,7 @@
       </p:sp>
       <p:graphicFrame>
         <p:nvGraphicFramePr>
-          <p:cNvPr id="30" name="Table 0"/>
+          <p:cNvPr id="31" name="Table 0"/>
           <p:cNvGraphicFramePr>
             <a:graphicFrameLocks noGrp="1"/>
           </p:cNvGraphicFramePr>
@@ -21139,9 +21835,9 @@
 </p:sld>
 </file>
 
-<file path=ppt/slides/slide3.xml><?xml version="1.0" encoding="utf-8"?>
+<file path=ppt/slides/slide31.xml><?xml version="1.0" encoding="utf-8"?>
 <p:sld xmlns:a="http://schemas.openxmlformats.org/drawingml/2006/main" xmlns:r="http://schemas.openxmlformats.org/officeDocument/2006/relationships" xmlns:p="http://schemas.openxmlformats.org/presentationml/2006/main">
-  <p:cSld name="Slide 3">
+  <p:cSld name="Slide 31">
     <p:bg>
       <p:bgPr>
         <a:blipFill dpi="0" rotWithShape="1">
@@ -21178,8 +21874,8 @@
         </p:nvSpPr>
         <p:spPr>
           <a:xfrm>
-            <a:off x="731520" y="1417320"/>
-            <a:ext cx="7680960" cy="457200"/>
+            <a:off x="731520" y="256032"/>
+            <a:ext cx="7680960" cy="566928"/>
           </a:xfrm>
           <a:prstGeom prst="rect">
             <a:avLst/>
@@ -21198,213 +21894,6 @@
               <a:buNone/>
             </a:pPr>
             <a:r>
-              <a:rPr lang="en-US" sz="1600" b="1" dirty="0">
-                <a:solidFill>
-                  <a:srgbClr val="2A8C85"/>
-                </a:solidFill>
-                <a:latin typeface="Calibri" pitchFamily="34" charset="0"/>
-                <a:ea typeface="Calibri" pitchFamily="34" charset="-122"/>
-                <a:cs typeface="Calibri" pitchFamily="34" charset="-120"/>
-              </a:rPr>
-              <a:t>PARTE 1 · TÓPICO 1 DO SUMÁRIO</a:t>
-            </a:r>
-            <a:endParaRPr lang="en-US" sz="1600" dirty="0"/>
-          </a:p>
-        </p:txBody>
-      </p:sp>
-      <p:sp>
-        <p:nvSpPr>
-          <p:cNvPr id="3" name="Text 1"/>
-          <p:cNvSpPr txBox="1"/>
-          <p:nvPr/>
-        </p:nvSpPr>
-        <p:spPr>
-          <a:xfrm>
-            <a:off x="731520" y="1874520"/>
-            <a:ext cx="7680960" cy="1097280"/>
-          </a:xfrm>
-          <a:prstGeom prst="rect">
-            <a:avLst/>
-          </a:prstGeom>
-          <a:noFill/>
-          <a:ln/>
-        </p:spPr>
-        <p:txBody>
-          <a:bodyPr wrap="square" lIns="0" tIns="0" rIns="0" bIns="0" rtlCol="0" anchor="ctr"/>
-          <a:lstStyle/>
-          <a:p>
-            <a:pPr algn="ctr" indent="0" marL="0">
-              <a:lnSpc>
-                <a:spcPct val="100000"/>
-              </a:lnSpc>
-              <a:buNone/>
-            </a:pPr>
-            <a:r>
-              <a:rPr lang="en-US" sz="3000" b="1" dirty="0">
-                <a:solidFill>
-                  <a:srgbClr val="13294B"/>
-                </a:solidFill>
-                <a:latin typeface="Calibri" pitchFamily="34" charset="0"/>
-                <a:ea typeface="Calibri" pitchFamily="34" charset="-122"/>
-                <a:cs typeface="Calibri" pitchFamily="34" charset="-120"/>
-              </a:rPr>
-              <a:t>Introdução à economia: conceitos básicos</a:t>
-            </a:r>
-            <a:endParaRPr lang="en-US" sz="3000" dirty="0"/>
-          </a:p>
-        </p:txBody>
-      </p:sp>
-      <p:sp>
-        <p:nvSpPr>
-          <p:cNvPr id="4" name="Text 2"/>
-          <p:cNvSpPr txBox="1"/>
-          <p:nvPr/>
-        </p:nvSpPr>
-        <p:spPr>
-          <a:xfrm>
-            <a:off x="1188720" y="2971800"/>
-            <a:ext cx="6766560" cy="457200"/>
-          </a:xfrm>
-          <a:prstGeom prst="rect">
-            <a:avLst/>
-          </a:prstGeom>
-          <a:noFill/>
-          <a:ln/>
-        </p:spPr>
-        <p:txBody>
-          <a:bodyPr wrap="square" lIns="0" tIns="0" rIns="0" bIns="0" rtlCol="0" anchor="ctr"/>
-          <a:lstStyle/>
-          <a:p>
-            <a:pPr algn="ctr" indent="0" marL="0">
-              <a:lnSpc>
-                <a:spcPct val="100000"/>
-              </a:lnSpc>
-              <a:buNone/>
-            </a:pPr>
-            <a:r>
-              <a:rPr lang="en-US" sz="1600" dirty="0">
-                <a:solidFill>
-                  <a:srgbClr val="5B6770"/>
-                </a:solidFill>
-                <a:latin typeface="Calibri" pitchFamily="34" charset="0"/>
-                <a:ea typeface="Calibri" pitchFamily="34" charset="-122"/>
-                <a:cs typeface="Calibri" pitchFamily="34" charset="-120"/>
-              </a:rPr>
-              <a:t>Escassez, problemas fundamentais, agentes, sistemas e mercado</a:t>
-            </a:r>
-            <a:endParaRPr lang="en-US" sz="1600" dirty="0"/>
-          </a:p>
-        </p:txBody>
-      </p:sp>
-      <p:sp>
-        <p:nvSpPr>
-          <p:cNvPr id="5" name="Text 3"/>
-          <p:cNvSpPr txBox="1"/>
-          <p:nvPr/>
-        </p:nvSpPr>
-        <p:spPr>
-          <a:xfrm>
-            <a:off x="4206240" y="36576"/>
-            <a:ext cx="4800600" cy="219456"/>
-          </a:xfrm>
-          <a:prstGeom prst="rect">
-            <a:avLst/>
-          </a:prstGeom>
-          <a:noFill/>
-          <a:ln/>
-        </p:spPr>
-        <p:txBody>
-          <a:bodyPr wrap="square" lIns="0" tIns="0" rIns="0" bIns="0" rtlCol="0" anchor="ctr"/>
-          <a:lstStyle/>
-          <a:p>
-            <a:pPr algn="r" indent="0" marL="0">
-              <a:lnSpc>
-                <a:spcPct val="100000"/>
-              </a:lnSpc>
-              <a:buNone/>
-            </a:pPr>
-            <a:r>
-              <a:rPr lang="en-US" sz="950" dirty="0">
-                <a:solidFill>
-                  <a:srgbClr val="5B6770"/>
-                </a:solidFill>
-                <a:latin typeface="Calibri" pitchFamily="34" charset="0"/>
-                <a:ea typeface="Calibri" pitchFamily="34" charset="-122"/>
-                <a:cs typeface="Calibri" pitchFamily="34" charset="-120"/>
-              </a:rPr>
-              <a:t>Estado, Governo e Mercado · Unidade 1 · Tópico 1 do sumário</a:t>
-            </a:r>
-            <a:endParaRPr lang="en-US" sz="950" dirty="0"/>
-          </a:p>
-        </p:txBody>
-      </p:sp>
-    </p:spTree>
-  </p:cSld>
-  <p:clrMapOvr>
-    <a:masterClrMapping/>
-  </p:clrMapOvr>
-</p:sld>
-</file>
-
-<file path=ppt/slides/slide30.xml><?xml version="1.0" encoding="utf-8"?>
-<p:sld xmlns:a="http://schemas.openxmlformats.org/drawingml/2006/main" xmlns:r="http://schemas.openxmlformats.org/officeDocument/2006/relationships" xmlns:p="http://schemas.openxmlformats.org/presentationml/2006/main">
-  <p:cSld name="Slide 30">
-    <p:bg>
-      <p:bgPr>
-        <a:blipFill dpi="0" rotWithShape="1">
-          <a:blip r:embed="rId1">
-            <a:lum/>
-          </a:blip>
-          <a:srcRect/>
-          <a:stretch>
-            <a:fillRect/>
-          </a:stretch>
-        </a:blipFill>
-        <a:effectLst/>
-      </p:bgPr>
-    </p:bg>
-    <p:spTree>
-      <p:nvGrpSpPr>
-        <p:cNvPr id="1" name=""/>
-        <p:cNvGrpSpPr/>
-        <p:nvPr/>
-      </p:nvGrpSpPr>
-      <p:grpSpPr>
-        <a:xfrm>
-          <a:off x="0" y="0"/>
-          <a:ext cx="0" cy="0"/>
-          <a:chOff x="0" y="0"/>
-          <a:chExt cx="0" cy="0"/>
-        </a:xfrm>
-      </p:grpSpPr>
-      <p:sp>
-        <p:nvSpPr>
-          <p:cNvPr id="2" name="Text 0"/>
-          <p:cNvSpPr txBox="1"/>
-          <p:nvPr/>
-        </p:nvSpPr>
-        <p:spPr>
-          <a:xfrm>
-            <a:off x="731520" y="256032"/>
-            <a:ext cx="7680960" cy="566928"/>
-          </a:xfrm>
-          <a:prstGeom prst="rect">
-            <a:avLst/>
-          </a:prstGeom>
-          <a:noFill/>
-          <a:ln/>
-        </p:spPr>
-        <p:txBody>
-          <a:bodyPr wrap="square" lIns="0" tIns="0" rIns="0" bIns="0" rtlCol="0" anchor="ctr"/>
-          <a:lstStyle/>
-          <a:p>
-            <a:pPr algn="ctr" indent="0" marL="0">
-              <a:lnSpc>
-                <a:spcPct val="100000"/>
-              </a:lnSpc>
-              <a:buNone/>
-            </a:pPr>
-            <a:r>
               <a:rPr lang="en-US" sz="2600" b="1" dirty="0">
                 <a:solidFill>
                   <a:srgbClr val="13294B"/>
@@ -21421,7 +21910,7 @@
       </p:sp>
       <p:graphicFrame>
         <p:nvGraphicFramePr>
-          <p:cNvPr id="31" name="Table 0"/>
+          <p:cNvPr id="32" name="Table 0"/>
           <p:cNvGraphicFramePr>
             <a:graphicFrameLocks noGrp="1"/>
           </p:cNvGraphicFramePr>
@@ -22370,419 +22859,6 @@
 </p:sld>
 </file>
 
-<file path=ppt/slides/slide31.xml><?xml version="1.0" encoding="utf-8"?>
-<p:sld xmlns:a="http://schemas.openxmlformats.org/drawingml/2006/main" xmlns:r="http://schemas.openxmlformats.org/officeDocument/2006/relationships" xmlns:p="http://schemas.openxmlformats.org/presentationml/2006/main">
-  <p:cSld name="Slide 31">
-    <p:bg>
-      <p:bgPr>
-        <a:blipFill dpi="0" rotWithShape="1">
-          <a:blip r:embed="rId1">
-            <a:lum/>
-          </a:blip>
-          <a:srcRect/>
-          <a:stretch>
-            <a:fillRect/>
-          </a:stretch>
-        </a:blipFill>
-        <a:effectLst/>
-      </p:bgPr>
-    </p:bg>
-    <p:spTree>
-      <p:nvGrpSpPr>
-        <p:cNvPr id="1" name=""/>
-        <p:cNvGrpSpPr/>
-        <p:nvPr/>
-      </p:nvGrpSpPr>
-      <p:grpSpPr>
-        <a:xfrm>
-          <a:off x="0" y="0"/>
-          <a:ext cx="0" cy="0"/>
-          <a:chOff x="0" y="0"/>
-          <a:chExt cx="0" cy="0"/>
-        </a:xfrm>
-      </p:grpSpPr>
-      <p:sp>
-        <p:nvSpPr>
-          <p:cNvPr id="2" name="Text 0"/>
-          <p:cNvSpPr txBox="1"/>
-          <p:nvPr/>
-        </p:nvSpPr>
-        <p:spPr>
-          <a:xfrm>
-            <a:off x="731520" y="256032"/>
-            <a:ext cx="7680960" cy="566928"/>
-          </a:xfrm>
-          <a:prstGeom prst="rect">
-            <a:avLst/>
-          </a:prstGeom>
-          <a:noFill/>
-          <a:ln/>
-        </p:spPr>
-        <p:txBody>
-          <a:bodyPr wrap="square" lIns="0" tIns="0" rIns="0" bIns="0" rtlCol="0" anchor="ctr"/>
-          <a:lstStyle/>
-          <a:p>
-            <a:pPr algn="ctr" indent="0" marL="0">
-              <a:lnSpc>
-                <a:spcPct val="100000"/>
-              </a:lnSpc>
-              <a:buNone/>
-            </a:pPr>
-            <a:r>
-              <a:rPr lang="en-US" sz="2600" b="1" dirty="0">
-                <a:solidFill>
-                  <a:srgbClr val="13294B"/>
-                </a:solidFill>
-                <a:latin typeface="Calibri" pitchFamily="34" charset="0"/>
-                <a:ea typeface="Calibri" pitchFamily="34" charset="-122"/>
-                <a:cs typeface="Calibri" pitchFamily="34" charset="-120"/>
-              </a:rPr>
-              <a:t>Para onde vai o orçamento municipal</a:t>
-            </a:r>
-            <a:endParaRPr lang="en-US" sz="2600" dirty="0"/>
-          </a:p>
-        </p:txBody>
-      </p:sp>
-      <p:sp>
-        <p:nvSpPr>
-          <p:cNvPr id="3" name="Text 1"/>
-          <p:cNvSpPr txBox="1"/>
-          <p:nvPr/>
-        </p:nvSpPr>
-        <p:spPr>
-          <a:xfrm>
-            <a:off x="1005840" y="804672"/>
-            <a:ext cx="7132320" cy="329184"/>
-          </a:xfrm>
-          <a:prstGeom prst="rect">
-            <a:avLst/>
-          </a:prstGeom>
-          <a:noFill/>
-          <a:ln/>
-        </p:spPr>
-        <p:txBody>
-          <a:bodyPr wrap="square" lIns="0" tIns="0" rIns="0" bIns="0" rtlCol="0" anchor="ctr"/>
-          <a:lstStyle/>
-          <a:p>
-            <a:pPr algn="ctr" indent="0" marL="0">
-              <a:lnSpc>
-                <a:spcPct val="100000"/>
-              </a:lnSpc>
-              <a:buNone/>
-            </a:pPr>
-            <a:r>
-              <a:rPr lang="en-US" sz="1400" dirty="0">
-                <a:solidFill>
-                  <a:srgbClr val="5B6770"/>
-                </a:solidFill>
-                <a:latin typeface="Calibri" pitchFamily="34" charset="0"/>
-                <a:ea typeface="Calibri" pitchFamily="34" charset="-122"/>
-                <a:cs typeface="Calibri" pitchFamily="34" charset="-120"/>
-              </a:rPr>
-              <a:t>Despesa de um município por função</a:t>
-            </a:r>
-            <a:endParaRPr lang="en-US" sz="1400" dirty="0"/>
-          </a:p>
-        </p:txBody>
-      </p:sp>
-      <p:sp>
-        <p:nvSpPr>
-          <p:cNvPr id="4" name="Shape 2"/>
-          <p:cNvSpPr/>
-          <p:nvPr/>
-        </p:nvSpPr>
-        <p:spPr>
-          <a:xfrm>
-            <a:off x="548640" y="1207008"/>
-            <a:ext cx="5349240" cy="2953512"/>
-          </a:xfrm>
-          <a:prstGeom prst="roundRect">
-            <a:avLst>
-              <a:gd name="adj" fmla="val 1858"/>
-            </a:avLst>
-          </a:prstGeom>
-          <a:solidFill>
-            <a:srgbClr val="FFFFFF"/>
-          </a:solidFill>
-          <a:ln w="12700">
-            <a:solidFill>
-              <a:srgbClr val="DCD5C1"/>
-            </a:solidFill>
-            <a:prstDash val="solid"/>
-          </a:ln>
-        </p:spPr>
-      </p:sp>
-      <p:sp>
-        <p:nvSpPr>
-          <p:cNvPr id="5" name="Text 3"/>
-          <p:cNvSpPr txBox="1"/>
-          <p:nvPr/>
-        </p:nvSpPr>
-        <p:spPr>
-          <a:xfrm>
-            <a:off x="658368" y="1261872"/>
-            <a:ext cx="5120640" cy="310896"/>
-          </a:xfrm>
-          <a:prstGeom prst="rect">
-            <a:avLst/>
-          </a:prstGeom>
-          <a:noFill/>
-          <a:ln/>
-        </p:spPr>
-        <p:txBody>
-          <a:bodyPr wrap="square" lIns="0" tIns="0" rIns="0" bIns="0" rtlCol="0" anchor="ctr"/>
-          <a:lstStyle/>
-          <a:p>
-            <a:pPr algn="l" indent="0" marL="0">
-              <a:lnSpc>
-                <a:spcPct val="100000"/>
-              </a:lnSpc>
-              <a:buNone/>
-            </a:pPr>
-            <a:r>
-              <a:rPr lang="en-US" sz="1300" b="1" dirty="0">
-                <a:solidFill>
-                  <a:srgbClr val="13294B"/>
-                </a:solidFill>
-                <a:latin typeface="Calibri" pitchFamily="34" charset="0"/>
-                <a:ea typeface="Calibri" pitchFamily="34" charset="-122"/>
-                <a:cs typeface="Calibri" pitchFamily="34" charset="-120"/>
-              </a:rPr>
-              <a:t>Despesa por função (% do total)</a:t>
-            </a:r>
-            <a:endParaRPr lang="en-US" sz="1300" dirty="0"/>
-          </a:p>
-        </p:txBody>
-      </p:sp>
-      <p:graphicFrame>
-        <p:nvGraphicFramePr>
-          <p:cNvPr id="6" name="Chart 0" descr=""/>
-          <p:cNvGraphicFramePr/>
-          <p:nvPr/>
-        </p:nvGraphicFramePr>
-        <p:xfrm>
-          <a:off x="658368" y="1591056"/>
-          <a:ext cx="5138928" cy="2496312"/>
-        </p:xfrm>
-        <a:graphic xmlns:a="http://schemas.openxmlformats.org/drawingml/2006/main">
-          <a:graphicData uri="http://schemas.openxmlformats.org/drawingml/2006/chart">
-            <c:chart xmlns:c="http://schemas.openxmlformats.org/drawingml/2006/chart" r:id="rId2"/>
-          </a:graphicData>
-        </a:graphic>
-      </p:graphicFrame>
-      <p:sp>
-        <p:nvSpPr>
-          <p:cNvPr id="7" name="Text 4"/>
-          <p:cNvSpPr txBox="1"/>
-          <p:nvPr/>
-        </p:nvSpPr>
-        <p:spPr>
-          <a:xfrm>
-            <a:off x="6035040" y="1207008"/>
-            <a:ext cx="2560320" cy="2953512"/>
-          </a:xfrm>
-          <a:prstGeom prst="roundRect">
-            <a:avLst>
-              <a:gd name="adj" fmla="val 2143"/>
-            </a:avLst>
-          </a:prstGeom>
-          <a:solidFill>
-            <a:srgbClr val="E6F2F0"/>
-          </a:solidFill>
-          <a:ln/>
-        </p:spPr>
-        <p:txBody>
-          <a:bodyPr wrap="square" lIns="114300" tIns="114300" rIns="114300" bIns="114300" rtlCol="0" anchor="t"/>
-          <a:lstStyle/>
-          <a:p>
-            <a:pPr algn="l" indent="0" marL="0">
-              <a:lnSpc>
-                <a:spcPct val="100000"/>
-              </a:lnSpc>
-              <a:spcAft>
-                <a:spcPts val="400"/>
-              </a:spcAft>
-              <a:buNone/>
-            </a:pPr>
-            <a:r>
-              <a:rPr lang="en-US" sz="1100" b="1" dirty="0">
-                <a:solidFill>
-                  <a:srgbClr val="2A8C85"/>
-                </a:solidFill>
-                <a:latin typeface="Calibri" pitchFamily="34" charset="0"/>
-                <a:ea typeface="Calibri" pitchFamily="34" charset="-122"/>
-                <a:cs typeface="Calibri" pitchFamily="34" charset="-120"/>
-              </a:rPr>
-              <a:t>COMO LER O GRÁFICO</a:t>
-            </a:r>
-            <a:endParaRPr lang="en-US" sz="1100" dirty="0"/>
-          </a:p>
-          <a:p>
-            <a:pPr algn="l" marL="177800" indent="-177800">
-              <a:lnSpc>
-                <a:spcPct val="100000"/>
-              </a:lnSpc>
-              <a:spcAft>
-                <a:spcPts val="500"/>
-              </a:spcAft>
-              <a:buSzPct val="100000"/>
-              <a:buChar char="•"/>
-            </a:pPr>
-            <a:r>
-              <a:rPr lang="en-US" sz="1250" dirty="0">
-                <a:solidFill>
-                  <a:srgbClr val="1F2A37"/>
-                </a:solidFill>
-                <a:latin typeface="Calibri" pitchFamily="34" charset="0"/>
-                <a:ea typeface="Calibri" pitchFamily="34" charset="-122"/>
-                <a:cs typeface="Calibri" pitchFamily="34" charset="-120"/>
-              </a:rPr>
-              <a:t>Educação e saúde somam quase metade do gasto.</a:t>
-            </a:r>
-            <a:endParaRPr lang="en-US" sz="1100" dirty="0"/>
-          </a:p>
-          <a:p>
-            <a:pPr algn="l" marL="177800" indent="-177800">
-              <a:lnSpc>
-                <a:spcPct val="100000"/>
-              </a:lnSpc>
-              <a:spcAft>
-                <a:spcPts val="500"/>
-              </a:spcAft>
-              <a:buSzPct val="100000"/>
-              <a:buChar char="•"/>
-            </a:pPr>
-            <a:r>
-              <a:rPr lang="en-US" sz="1250" dirty="0">
-                <a:solidFill>
-                  <a:srgbClr val="1F2A37"/>
-                </a:solidFill>
-                <a:latin typeface="Calibri" pitchFamily="34" charset="0"/>
-                <a:ea typeface="Calibri" pitchFamily="34" charset="-122"/>
-                <a:cs typeface="Calibri" pitchFamily="34" charset="-120"/>
-              </a:rPr>
-              <a:t>A Constituição exige aplicar ao menos 25% da receita de impostos em educação e 15% em saúde.</a:t>
-            </a:r>
-            <a:endParaRPr lang="en-US" sz="1100" dirty="0"/>
-          </a:p>
-          <a:p>
-            <a:pPr algn="l" marL="177800" indent="-177800">
-              <a:lnSpc>
-                <a:spcPct val="100000"/>
-              </a:lnSpc>
-              <a:spcAft>
-                <a:spcPts val="500"/>
-              </a:spcAft>
-              <a:buSzPct val="100000"/>
-              <a:buChar char="•"/>
-            </a:pPr>
-            <a:r>
-              <a:rPr lang="en-US" sz="1250" dirty="0">
-                <a:solidFill>
-                  <a:srgbClr val="1F2A37"/>
-                </a:solidFill>
-                <a:latin typeface="Calibri" pitchFamily="34" charset="0"/>
-                <a:ea typeface="Calibri" pitchFamily="34" charset="-122"/>
-                <a:cs typeface="Calibri" pitchFamily="34" charset="-120"/>
-              </a:rPr>
-              <a:t>A maior parte é função alocativa; a assistência social é distributiva.</a:t>
-            </a:r>
-            <a:endParaRPr lang="en-US" sz="1100" dirty="0"/>
-          </a:p>
-        </p:txBody>
-      </p:sp>
-      <p:sp>
-        <p:nvSpPr>
-          <p:cNvPr id="8" name="Text 5"/>
-          <p:cNvSpPr txBox="1"/>
-          <p:nvPr/>
-        </p:nvSpPr>
-        <p:spPr>
-          <a:xfrm>
-            <a:off x="548640" y="4206240"/>
-            <a:ext cx="8046720" cy="274320"/>
-          </a:xfrm>
-          <a:prstGeom prst="rect">
-            <a:avLst/>
-          </a:prstGeom>
-          <a:noFill/>
-          <a:ln/>
-        </p:spPr>
-        <p:txBody>
-          <a:bodyPr wrap="square" lIns="0" tIns="0" rIns="0" bIns="0" rtlCol="0" anchor="ctr"/>
-          <a:lstStyle/>
-          <a:p>
-            <a:pPr algn="l" indent="0" marL="0">
-              <a:lnSpc>
-                <a:spcPct val="100000"/>
-              </a:lnSpc>
-              <a:buNone/>
-            </a:pPr>
-            <a:r>
-              <a:rPr lang="en-US" sz="1000" i="1" dirty="0">
-                <a:solidFill>
-                  <a:srgbClr val="5B6770"/>
-                </a:solidFill>
-                <a:latin typeface="Calibri" pitchFamily="34" charset="0"/>
-                <a:ea typeface="Calibri" pitchFamily="34" charset="-122"/>
-                <a:cs typeface="Calibri" pitchFamily="34" charset="-120"/>
-              </a:rPr>
-              <a:t>Dados hipotéticos, para fins didáticos. Dados reais: SICONFI (Tesouro Nacional), despesa por função.</a:t>
-            </a:r>
-            <a:endParaRPr lang="en-US" sz="1000" dirty="0"/>
-          </a:p>
-        </p:txBody>
-      </p:sp>
-      <p:sp>
-        <p:nvSpPr>
-          <p:cNvPr id="9" name="Text 6"/>
-          <p:cNvSpPr txBox="1"/>
-          <p:nvPr/>
-        </p:nvSpPr>
-        <p:spPr>
-          <a:xfrm>
-            <a:off x="4206240" y="36576"/>
-            <a:ext cx="4800600" cy="219456"/>
-          </a:xfrm>
-          <a:prstGeom prst="rect">
-            <a:avLst/>
-          </a:prstGeom>
-          <a:noFill/>
-          <a:ln/>
-        </p:spPr>
-        <p:txBody>
-          <a:bodyPr wrap="square" lIns="0" tIns="0" rIns="0" bIns="0" rtlCol="0" anchor="ctr"/>
-          <a:lstStyle/>
-          <a:p>
-            <a:pPr algn="r" indent="0" marL="0">
-              <a:lnSpc>
-                <a:spcPct val="100000"/>
-              </a:lnSpc>
-              <a:buNone/>
-            </a:pPr>
-            <a:r>
-              <a:rPr lang="en-US" sz="950" dirty="0">
-                <a:solidFill>
-                  <a:srgbClr val="5B6770"/>
-                </a:solidFill>
-                <a:latin typeface="Calibri" pitchFamily="34" charset="0"/>
-                <a:ea typeface="Calibri" pitchFamily="34" charset="-122"/>
-                <a:cs typeface="Calibri" pitchFamily="34" charset="-120"/>
-              </a:rPr>
-              <a:t>Estado, Governo e Mercado · Unidade 1 · Tópico 2 do sumário</a:t>
-            </a:r>
-            <a:endParaRPr lang="en-US" sz="950" dirty="0"/>
-          </a:p>
-        </p:txBody>
-      </p:sp>
-    </p:spTree>
-  </p:cSld>
-  <p:clrMapOvr>
-    <a:masterClrMapping/>
-  </p:clrMapOvr>
-</p:sld>
-</file>
-
 <file path=ppt/slides/slide32.xml><?xml version="1.0" encoding="utf-8"?>
 <p:sld xmlns:a="http://schemas.openxmlformats.org/drawingml/2006/main" xmlns:r="http://schemas.openxmlformats.org/officeDocument/2006/relationships" xmlns:p="http://schemas.openxmlformats.org/presentationml/2006/main">
   <p:cSld name="Slide 32">
@@ -22842,7 +22918,7 @@
               <a:buNone/>
             </a:pPr>
             <a:r>
-              <a:rPr lang="en-US" sz="2800" b="1" dirty="0">
+              <a:rPr lang="en-US" sz="2600" b="1" dirty="0">
                 <a:solidFill>
                   <a:srgbClr val="13294B"/>
                 </a:solidFill>
@@ -22850,9 +22926,9 @@
                 <a:ea typeface="Calibri" pitchFamily="34" charset="-122"/>
                 <a:cs typeface="Calibri" pitchFamily="34" charset="-120"/>
               </a:rPr>
-              <a:t>Atividades da Unidade 1</a:t>
-            </a:r>
-            <a:endParaRPr lang="en-US" sz="2800" dirty="0"/>
+              <a:t>Para onde vai o orçamento municipal</a:t>
+            </a:r>
+            <a:endParaRPr lang="en-US" sz="2600" dirty="0"/>
           </a:p>
         </p:txBody>
       </p:sp>
@@ -22892,15 +22968,428 @@
                 <a:ea typeface="Calibri" pitchFamily="34" charset="-122"/>
                 <a:cs typeface="Calibri" pitchFamily="34" charset="-120"/>
               </a:rPr>
-              <a:t>Atividades e prazos da unidade (todas as entregas até 23h55)</a:t>
+              <a:t>Despesa de um município por função</a:t>
             </a:r>
             <a:endParaRPr lang="en-US" sz="1400" dirty="0"/>
+          </a:p>
+        </p:txBody>
+      </p:sp>
+      <p:sp>
+        <p:nvSpPr>
+          <p:cNvPr id="4" name="Shape 2"/>
+          <p:cNvSpPr/>
+          <p:nvPr/>
+        </p:nvSpPr>
+        <p:spPr>
+          <a:xfrm>
+            <a:off x="548640" y="1207008"/>
+            <a:ext cx="5349240" cy="2953512"/>
+          </a:xfrm>
+          <a:prstGeom prst="roundRect">
+            <a:avLst>
+              <a:gd name="adj" fmla="val 1858"/>
+            </a:avLst>
+          </a:prstGeom>
+          <a:solidFill>
+            <a:srgbClr val="FFFFFF"/>
+          </a:solidFill>
+          <a:ln w="12700">
+            <a:solidFill>
+              <a:srgbClr val="DCD5C1"/>
+            </a:solidFill>
+            <a:prstDash val="solid"/>
+          </a:ln>
+        </p:spPr>
+      </p:sp>
+      <p:sp>
+        <p:nvSpPr>
+          <p:cNvPr id="5" name="Text 3"/>
+          <p:cNvSpPr txBox="1"/>
+          <p:nvPr/>
+        </p:nvSpPr>
+        <p:spPr>
+          <a:xfrm>
+            <a:off x="658368" y="1261872"/>
+            <a:ext cx="5120640" cy="310896"/>
+          </a:xfrm>
+          <a:prstGeom prst="rect">
+            <a:avLst/>
+          </a:prstGeom>
+          <a:noFill/>
+          <a:ln/>
+        </p:spPr>
+        <p:txBody>
+          <a:bodyPr wrap="square" lIns="0" tIns="0" rIns="0" bIns="0" rtlCol="0" anchor="ctr"/>
+          <a:lstStyle/>
+          <a:p>
+            <a:pPr algn="l" indent="0" marL="0">
+              <a:lnSpc>
+                <a:spcPct val="100000"/>
+              </a:lnSpc>
+              <a:buNone/>
+            </a:pPr>
+            <a:r>
+              <a:rPr lang="en-US" sz="1300" b="1" dirty="0">
+                <a:solidFill>
+                  <a:srgbClr val="13294B"/>
+                </a:solidFill>
+                <a:latin typeface="Calibri" pitchFamily="34" charset="0"/>
+                <a:ea typeface="Calibri" pitchFamily="34" charset="-122"/>
+                <a:cs typeface="Calibri" pitchFamily="34" charset="-120"/>
+              </a:rPr>
+              <a:t>Despesa por função (% do total)</a:t>
+            </a:r>
+            <a:endParaRPr lang="en-US" sz="1300" dirty="0"/>
           </a:p>
         </p:txBody>
       </p:sp>
       <p:graphicFrame>
         <p:nvGraphicFramePr>
-          <p:cNvPr id="33" name="Table 0"/>
+          <p:cNvPr id="6" name="Chart 0" descr=""/>
+          <p:cNvGraphicFramePr/>
+          <p:nvPr/>
+        </p:nvGraphicFramePr>
+        <p:xfrm>
+          <a:off x="658368" y="1591056"/>
+          <a:ext cx="5138928" cy="2496312"/>
+        </p:xfrm>
+        <a:graphic xmlns:a="http://schemas.openxmlformats.org/drawingml/2006/main">
+          <a:graphicData uri="http://schemas.openxmlformats.org/drawingml/2006/chart">
+            <c:chart xmlns:c="http://schemas.openxmlformats.org/drawingml/2006/chart" r:id="rId2"/>
+          </a:graphicData>
+        </a:graphic>
+      </p:graphicFrame>
+      <p:sp>
+        <p:nvSpPr>
+          <p:cNvPr id="7" name="Text 4"/>
+          <p:cNvSpPr txBox="1"/>
+          <p:nvPr/>
+        </p:nvSpPr>
+        <p:spPr>
+          <a:xfrm>
+            <a:off x="6035040" y="1207008"/>
+            <a:ext cx="2560320" cy="2953512"/>
+          </a:xfrm>
+          <a:prstGeom prst="roundRect">
+            <a:avLst>
+              <a:gd name="adj" fmla="val 2143"/>
+            </a:avLst>
+          </a:prstGeom>
+          <a:solidFill>
+            <a:srgbClr val="E6F2F0"/>
+          </a:solidFill>
+          <a:ln/>
+        </p:spPr>
+        <p:txBody>
+          <a:bodyPr wrap="square" lIns="114300" tIns="114300" rIns="114300" bIns="114300" rtlCol="0" anchor="t"/>
+          <a:lstStyle/>
+          <a:p>
+            <a:pPr algn="l" indent="0" marL="0">
+              <a:lnSpc>
+                <a:spcPct val="100000"/>
+              </a:lnSpc>
+              <a:spcAft>
+                <a:spcPts val="400"/>
+              </a:spcAft>
+              <a:buNone/>
+            </a:pPr>
+            <a:r>
+              <a:rPr lang="en-US" sz="1100" b="1" dirty="0">
+                <a:solidFill>
+                  <a:srgbClr val="2A8C85"/>
+                </a:solidFill>
+                <a:latin typeface="Calibri" pitchFamily="34" charset="0"/>
+                <a:ea typeface="Calibri" pitchFamily="34" charset="-122"/>
+                <a:cs typeface="Calibri" pitchFamily="34" charset="-120"/>
+              </a:rPr>
+              <a:t>COMO LER O GRÁFICO</a:t>
+            </a:r>
+            <a:endParaRPr lang="en-US" sz="1100" dirty="0"/>
+          </a:p>
+          <a:p>
+            <a:pPr algn="l" marL="177800" indent="-177800">
+              <a:lnSpc>
+                <a:spcPct val="100000"/>
+              </a:lnSpc>
+              <a:spcAft>
+                <a:spcPts val="500"/>
+              </a:spcAft>
+              <a:buSzPct val="100000"/>
+              <a:buChar char="•"/>
+            </a:pPr>
+            <a:r>
+              <a:rPr lang="en-US" sz="1250" dirty="0">
+                <a:solidFill>
+                  <a:srgbClr val="1F2A37"/>
+                </a:solidFill>
+                <a:latin typeface="Calibri" pitchFamily="34" charset="0"/>
+                <a:ea typeface="Calibri" pitchFamily="34" charset="-122"/>
+                <a:cs typeface="Calibri" pitchFamily="34" charset="-120"/>
+              </a:rPr>
+              <a:t>Educação e saúde somam quase metade do gasto.</a:t>
+            </a:r>
+            <a:endParaRPr lang="en-US" sz="1100" dirty="0"/>
+          </a:p>
+          <a:p>
+            <a:pPr algn="l" marL="177800" indent="-177800">
+              <a:lnSpc>
+                <a:spcPct val="100000"/>
+              </a:lnSpc>
+              <a:spcAft>
+                <a:spcPts val="500"/>
+              </a:spcAft>
+              <a:buSzPct val="100000"/>
+              <a:buChar char="•"/>
+            </a:pPr>
+            <a:r>
+              <a:rPr lang="en-US" sz="1250" dirty="0">
+                <a:solidFill>
+                  <a:srgbClr val="1F2A37"/>
+                </a:solidFill>
+                <a:latin typeface="Calibri" pitchFamily="34" charset="0"/>
+                <a:ea typeface="Calibri" pitchFamily="34" charset="-122"/>
+                <a:cs typeface="Calibri" pitchFamily="34" charset="-120"/>
+              </a:rPr>
+              <a:t>A Constituição exige aplicar ao menos 25% da receita de impostos em educação e 15% em saúde.</a:t>
+            </a:r>
+            <a:endParaRPr lang="en-US" sz="1100" dirty="0"/>
+          </a:p>
+          <a:p>
+            <a:pPr algn="l" marL="177800" indent="-177800">
+              <a:lnSpc>
+                <a:spcPct val="100000"/>
+              </a:lnSpc>
+              <a:spcAft>
+                <a:spcPts val="500"/>
+              </a:spcAft>
+              <a:buSzPct val="100000"/>
+              <a:buChar char="•"/>
+            </a:pPr>
+            <a:r>
+              <a:rPr lang="en-US" sz="1250" dirty="0">
+                <a:solidFill>
+                  <a:srgbClr val="1F2A37"/>
+                </a:solidFill>
+                <a:latin typeface="Calibri" pitchFamily="34" charset="0"/>
+                <a:ea typeface="Calibri" pitchFamily="34" charset="-122"/>
+                <a:cs typeface="Calibri" pitchFamily="34" charset="-120"/>
+              </a:rPr>
+              <a:t>A maior parte é função alocativa; a assistência social é distributiva.</a:t>
+            </a:r>
+            <a:endParaRPr lang="en-US" sz="1100" dirty="0"/>
+          </a:p>
+        </p:txBody>
+      </p:sp>
+      <p:sp>
+        <p:nvSpPr>
+          <p:cNvPr id="8" name="Text 5"/>
+          <p:cNvSpPr txBox="1"/>
+          <p:nvPr/>
+        </p:nvSpPr>
+        <p:spPr>
+          <a:xfrm>
+            <a:off x="548640" y="4206240"/>
+            <a:ext cx="8046720" cy="274320"/>
+          </a:xfrm>
+          <a:prstGeom prst="rect">
+            <a:avLst/>
+          </a:prstGeom>
+          <a:noFill/>
+          <a:ln/>
+        </p:spPr>
+        <p:txBody>
+          <a:bodyPr wrap="square" lIns="0" tIns="0" rIns="0" bIns="0" rtlCol="0" anchor="ctr"/>
+          <a:lstStyle/>
+          <a:p>
+            <a:pPr algn="l" indent="0" marL="0">
+              <a:lnSpc>
+                <a:spcPct val="100000"/>
+              </a:lnSpc>
+              <a:buNone/>
+            </a:pPr>
+            <a:r>
+              <a:rPr lang="en-US" sz="1000" i="1" dirty="0">
+                <a:solidFill>
+                  <a:srgbClr val="5B6770"/>
+                </a:solidFill>
+                <a:latin typeface="Calibri" pitchFamily="34" charset="0"/>
+                <a:ea typeface="Calibri" pitchFamily="34" charset="-122"/>
+                <a:cs typeface="Calibri" pitchFamily="34" charset="-120"/>
+              </a:rPr>
+              <a:t>Dados hipotéticos, para fins didáticos. Dados reais: SICONFI (Tesouro Nacional), despesa por função.</a:t>
+            </a:r>
+            <a:endParaRPr lang="en-US" sz="1000" dirty="0"/>
+          </a:p>
+        </p:txBody>
+      </p:sp>
+      <p:sp>
+        <p:nvSpPr>
+          <p:cNvPr id="9" name="Text 6"/>
+          <p:cNvSpPr txBox="1"/>
+          <p:nvPr/>
+        </p:nvSpPr>
+        <p:spPr>
+          <a:xfrm>
+            <a:off x="4206240" y="36576"/>
+            <a:ext cx="4800600" cy="219456"/>
+          </a:xfrm>
+          <a:prstGeom prst="rect">
+            <a:avLst/>
+          </a:prstGeom>
+          <a:noFill/>
+          <a:ln/>
+        </p:spPr>
+        <p:txBody>
+          <a:bodyPr wrap="square" lIns="0" tIns="0" rIns="0" bIns="0" rtlCol="0" anchor="ctr"/>
+          <a:lstStyle/>
+          <a:p>
+            <a:pPr algn="r" indent="0" marL="0">
+              <a:lnSpc>
+                <a:spcPct val="100000"/>
+              </a:lnSpc>
+              <a:buNone/>
+            </a:pPr>
+            <a:r>
+              <a:rPr lang="en-US" sz="950" dirty="0">
+                <a:solidFill>
+                  <a:srgbClr val="5B6770"/>
+                </a:solidFill>
+                <a:latin typeface="Calibri" pitchFamily="34" charset="0"/>
+                <a:ea typeface="Calibri" pitchFamily="34" charset="-122"/>
+                <a:cs typeface="Calibri" pitchFamily="34" charset="-120"/>
+              </a:rPr>
+              <a:t>Estado, Governo e Mercado · Unidade 1 · Tópico 2 do sumário</a:t>
+            </a:r>
+            <a:endParaRPr lang="en-US" sz="950" dirty="0"/>
+          </a:p>
+        </p:txBody>
+      </p:sp>
+    </p:spTree>
+  </p:cSld>
+  <p:clrMapOvr>
+    <a:masterClrMapping/>
+  </p:clrMapOvr>
+</p:sld>
+</file>
+
+<file path=ppt/slides/slide33.xml><?xml version="1.0" encoding="utf-8"?>
+<p:sld xmlns:a="http://schemas.openxmlformats.org/drawingml/2006/main" xmlns:r="http://schemas.openxmlformats.org/officeDocument/2006/relationships" xmlns:p="http://schemas.openxmlformats.org/presentationml/2006/main">
+  <p:cSld name="Slide 33">
+    <p:bg>
+      <p:bgPr>
+        <a:blipFill dpi="0" rotWithShape="1">
+          <a:blip r:embed="rId1">
+            <a:lum/>
+          </a:blip>
+          <a:srcRect/>
+          <a:stretch>
+            <a:fillRect/>
+          </a:stretch>
+        </a:blipFill>
+        <a:effectLst/>
+      </p:bgPr>
+    </p:bg>
+    <p:spTree>
+      <p:nvGrpSpPr>
+        <p:cNvPr id="1" name=""/>
+        <p:cNvGrpSpPr/>
+        <p:nvPr/>
+      </p:nvGrpSpPr>
+      <p:grpSpPr>
+        <a:xfrm>
+          <a:off x="0" y="0"/>
+          <a:ext cx="0" cy="0"/>
+          <a:chOff x="0" y="0"/>
+          <a:chExt cx="0" cy="0"/>
+        </a:xfrm>
+      </p:grpSpPr>
+      <p:sp>
+        <p:nvSpPr>
+          <p:cNvPr id="2" name="Text 0"/>
+          <p:cNvSpPr txBox="1"/>
+          <p:nvPr/>
+        </p:nvSpPr>
+        <p:spPr>
+          <a:xfrm>
+            <a:off x="731520" y="256032"/>
+            <a:ext cx="7680960" cy="566928"/>
+          </a:xfrm>
+          <a:prstGeom prst="rect">
+            <a:avLst/>
+          </a:prstGeom>
+          <a:noFill/>
+          <a:ln/>
+        </p:spPr>
+        <p:txBody>
+          <a:bodyPr wrap="square" lIns="0" tIns="0" rIns="0" bIns="0" rtlCol="0" anchor="ctr"/>
+          <a:lstStyle/>
+          <a:p>
+            <a:pPr algn="ctr" indent="0" marL="0">
+              <a:lnSpc>
+                <a:spcPct val="100000"/>
+              </a:lnSpc>
+              <a:buNone/>
+            </a:pPr>
+            <a:r>
+              <a:rPr lang="en-US" sz="2800" b="1" dirty="0">
+                <a:solidFill>
+                  <a:srgbClr val="13294B"/>
+                </a:solidFill>
+                <a:latin typeface="Calibri" pitchFamily="34" charset="0"/>
+                <a:ea typeface="Calibri" pitchFamily="34" charset="-122"/>
+                <a:cs typeface="Calibri" pitchFamily="34" charset="-120"/>
+              </a:rPr>
+              <a:t>Atividades da Unidade 1</a:t>
+            </a:r>
+            <a:endParaRPr lang="en-US" sz="2800" dirty="0"/>
+          </a:p>
+        </p:txBody>
+      </p:sp>
+      <p:sp>
+        <p:nvSpPr>
+          <p:cNvPr id="3" name="Text 1"/>
+          <p:cNvSpPr txBox="1"/>
+          <p:nvPr/>
+        </p:nvSpPr>
+        <p:spPr>
+          <a:xfrm>
+            <a:off x="1005840" y="804672"/>
+            <a:ext cx="7132320" cy="329184"/>
+          </a:xfrm>
+          <a:prstGeom prst="rect">
+            <a:avLst/>
+          </a:prstGeom>
+          <a:noFill/>
+          <a:ln/>
+        </p:spPr>
+        <p:txBody>
+          <a:bodyPr wrap="square" lIns="0" tIns="0" rIns="0" bIns="0" rtlCol="0" anchor="ctr"/>
+          <a:lstStyle/>
+          <a:p>
+            <a:pPr algn="ctr" indent="0" marL="0">
+              <a:lnSpc>
+                <a:spcPct val="100000"/>
+              </a:lnSpc>
+              <a:buNone/>
+            </a:pPr>
+            <a:r>
+              <a:rPr lang="en-US" sz="1400" dirty="0">
+                <a:solidFill>
+                  <a:srgbClr val="5B6770"/>
+                </a:solidFill>
+                <a:latin typeface="Calibri" pitchFamily="34" charset="0"/>
+                <a:ea typeface="Calibri" pitchFamily="34" charset="-122"/>
+                <a:cs typeface="Calibri" pitchFamily="34" charset="-120"/>
+              </a:rPr>
+              <a:t>Atividades e prazos da unidade (todas as entregas até 23h55)</a:t>
+            </a:r>
+            <a:endParaRPr lang="en-US" sz="1400" dirty="0"/>
+          </a:p>
+        </p:txBody>
+      </p:sp>
+      <p:graphicFrame>
+        <p:nvGraphicFramePr>
+          <p:cNvPr id="34" name="Table 0"/>
           <p:cNvGraphicFramePr>
             <a:graphicFrameLocks noGrp="1"/>
           </p:cNvGraphicFramePr>
@@ -23576,217 +24065,6 @@
 </p:sld>
 </file>
 
-<file path=ppt/slides/slide33.xml><?xml version="1.0" encoding="utf-8"?>
-<p:sld xmlns:a="http://schemas.openxmlformats.org/drawingml/2006/main" xmlns:r="http://schemas.openxmlformats.org/officeDocument/2006/relationships" xmlns:p="http://schemas.openxmlformats.org/presentationml/2006/main">
-  <p:cSld name="Slide 33">
-    <p:bg>
-      <p:bgPr>
-        <a:blipFill dpi="0" rotWithShape="1">
-          <a:blip r:embed="rId1">
-            <a:lum/>
-          </a:blip>
-          <a:srcRect/>
-          <a:stretch>
-            <a:fillRect/>
-          </a:stretch>
-        </a:blipFill>
-        <a:effectLst/>
-      </p:bgPr>
-    </p:bg>
-    <p:spTree>
-      <p:nvGrpSpPr>
-        <p:cNvPr id="1" name=""/>
-        <p:cNvGrpSpPr/>
-        <p:nvPr/>
-      </p:nvGrpSpPr>
-      <p:grpSpPr>
-        <a:xfrm>
-          <a:off x="0" y="0"/>
-          <a:ext cx="0" cy="0"/>
-          <a:chOff x="0" y="0"/>
-          <a:chExt cx="0" cy="0"/>
-        </a:xfrm>
-      </p:grpSpPr>
-      <p:sp>
-        <p:nvSpPr>
-          <p:cNvPr id="2" name="Shape 0"/>
-          <p:cNvSpPr/>
-          <p:nvPr/>
-        </p:nvSpPr>
-        <p:spPr>
-          <a:xfrm>
-            <a:off x="4069080" y="1097280"/>
-            <a:ext cx="1005840" cy="1005840"/>
-          </a:xfrm>
-          <a:prstGeom prst="roundRect">
-            <a:avLst>
-              <a:gd name="adj" fmla="val 18182"/>
-            </a:avLst>
-          </a:prstGeom>
-          <a:solidFill>
-            <a:srgbClr val="2A8C85"/>
-          </a:solidFill>
-          <a:ln/>
-        </p:spPr>
-      </p:sp>
-      <p:pic>
-        <p:nvPicPr>
-          <p:cNvPr id="3" name="Image 0" descr="/tmp/claude-0/-home-user-zero-claude/d7e33190-c541-582c-a7cc-1156817732ce/scratchpad/deck/assets/icon_FaQuestion.png">    </p:cNvPr>
-          <p:cNvPicPr>
-            <a:picLocks noChangeAspect="1"/>
-          </p:cNvPicPr>
-          <p:nvPr/>
-        </p:nvPicPr>
-        <p:blipFill>
-          <a:blip r:embed="rId2"/>
-          <a:stretch>
-            <a:fillRect/>
-          </a:stretch>
-        </p:blipFill>
-        <p:spPr>
-          <a:xfrm>
-            <a:off x="4297680" y="1325880"/>
-            <a:ext cx="548640" cy="548640"/>
-          </a:xfrm>
-          <a:prstGeom prst="rect">
-            <a:avLst/>
-          </a:prstGeom>
-        </p:spPr>
-      </p:pic>
-      <p:sp>
-        <p:nvSpPr>
-          <p:cNvPr id="4" name="Text 1"/>
-          <p:cNvSpPr txBox="1"/>
-          <p:nvPr/>
-        </p:nvSpPr>
-        <p:spPr>
-          <a:xfrm>
-            <a:off x="731520" y="2240280"/>
-            <a:ext cx="7680960" cy="731520"/>
-          </a:xfrm>
-          <a:prstGeom prst="rect">
-            <a:avLst/>
-          </a:prstGeom>
-          <a:noFill/>
-          <a:ln/>
-        </p:spPr>
-        <p:txBody>
-          <a:bodyPr wrap="square" lIns="0" tIns="0" rIns="0" bIns="0" rtlCol="0" anchor="ctr"/>
-          <a:lstStyle/>
-          <a:p>
-            <a:pPr algn="ctr" indent="0" marL="0">
-              <a:lnSpc>
-                <a:spcPct val="100000"/>
-              </a:lnSpc>
-              <a:buNone/>
-            </a:pPr>
-            <a:r>
-              <a:rPr lang="en-US" sz="3600" b="1" dirty="0">
-                <a:solidFill>
-                  <a:srgbClr val="13294B"/>
-                </a:solidFill>
-                <a:latin typeface="Calibri" pitchFamily="34" charset="0"/>
-                <a:ea typeface="Calibri" pitchFamily="34" charset="-122"/>
-                <a:cs typeface="Calibri" pitchFamily="34" charset="-120"/>
-              </a:rPr>
-              <a:t>Quiz da Unidade 1</a:t>
-            </a:r>
-            <a:endParaRPr lang="en-US" sz="3600" dirty="0"/>
-          </a:p>
-        </p:txBody>
-      </p:sp>
-      <p:sp>
-        <p:nvSpPr>
-          <p:cNvPr id="5" name="Text 2"/>
-          <p:cNvSpPr txBox="1"/>
-          <p:nvPr/>
-        </p:nvSpPr>
-        <p:spPr>
-          <a:xfrm>
-            <a:off x="1188720" y="2926080"/>
-            <a:ext cx="6766560" cy="822960"/>
-          </a:xfrm>
-          <a:prstGeom prst="rect">
-            <a:avLst/>
-          </a:prstGeom>
-          <a:noFill/>
-          <a:ln/>
-        </p:spPr>
-        <p:txBody>
-          <a:bodyPr wrap="square" lIns="0" tIns="0" rIns="0" bIns="0" rtlCol="0" anchor="t"/>
-          <a:lstStyle/>
-          <a:p>
-            <a:pPr algn="ctr" indent="0" marL="0">
-              <a:lnSpc>
-                <a:spcPct val="100000"/>
-              </a:lnSpc>
-              <a:buNone/>
-            </a:pPr>
-            <a:r>
-              <a:rPr lang="en-US" sz="1600" dirty="0">
-                <a:solidFill>
-                  <a:srgbClr val="5B6770"/>
-                </a:solidFill>
-                <a:latin typeface="Calibri" pitchFamily="34" charset="0"/>
-                <a:ea typeface="Calibri" pitchFamily="34" charset="-122"/>
-                <a:cs typeface="Calibri" pitchFamily="34" charset="-120"/>
-              </a:rPr>
-              <a:t>5 perguntas para revisar a unidade. Pause o vídeo, escolha sua resposta e confira no slide seguinte.</a:t>
-            </a:r>
-            <a:endParaRPr lang="en-US" sz="1600" dirty="0"/>
-          </a:p>
-        </p:txBody>
-      </p:sp>
-      <p:sp>
-        <p:nvSpPr>
-          <p:cNvPr id="6" name="Text 3"/>
-          <p:cNvSpPr txBox="1"/>
-          <p:nvPr/>
-        </p:nvSpPr>
-        <p:spPr>
-          <a:xfrm>
-            <a:off x="4206240" y="36576"/>
-            <a:ext cx="4800600" cy="219456"/>
-          </a:xfrm>
-          <a:prstGeom prst="rect">
-            <a:avLst/>
-          </a:prstGeom>
-          <a:noFill/>
-          <a:ln/>
-        </p:spPr>
-        <p:txBody>
-          <a:bodyPr wrap="square" lIns="0" tIns="0" rIns="0" bIns="0" rtlCol="0" anchor="ctr"/>
-          <a:lstStyle/>
-          <a:p>
-            <a:pPr algn="r" indent="0" marL="0">
-              <a:lnSpc>
-                <a:spcPct val="100000"/>
-              </a:lnSpc>
-              <a:buNone/>
-            </a:pPr>
-            <a:r>
-              <a:rPr lang="en-US" sz="950" dirty="0">
-                <a:solidFill>
-                  <a:srgbClr val="5B6770"/>
-                </a:solidFill>
-                <a:latin typeface="Calibri" pitchFamily="34" charset="0"/>
-                <a:ea typeface="Calibri" pitchFamily="34" charset="-122"/>
-                <a:cs typeface="Calibri" pitchFamily="34" charset="-120"/>
-              </a:rPr>
-              <a:t>Estado, Governo e Mercado · Unidade 1</a:t>
-            </a:r>
-            <a:endParaRPr lang="en-US" sz="950" dirty="0"/>
-          </a:p>
-        </p:txBody>
-      </p:sp>
-    </p:spTree>
-  </p:cSld>
-  <p:clrMapOvr>
-    <a:masterClrMapping/>
-  </p:clrMapOvr>
-</p:sld>
-</file>
-
 <file path=ppt/slides/slide34.xml><?xml version="1.0" encoding="utf-8"?>
 <p:sld xmlns:a="http://schemas.openxmlformats.org/drawingml/2006/main" xmlns:r="http://schemas.openxmlformats.org/officeDocument/2006/relationships" xmlns:p="http://schemas.openxmlformats.org/presentationml/2006/main">
   <p:cSld name="Slide 34">
@@ -23820,18 +24098,64 @@
       </p:grpSpPr>
       <p:sp>
         <p:nvSpPr>
-          <p:cNvPr id="2" name="Text 0"/>
-          <p:cNvSpPr txBox="1"/>
-          <p:nvPr/>
-        </p:nvSpPr>
-        <p:spPr>
-          <a:xfrm>
-            <a:off x="731520" y="274320"/>
-            <a:ext cx="7680960" cy="365760"/>
+          <p:cNvPr id="2" name="Shape 0"/>
+          <p:cNvSpPr/>
+          <p:nvPr/>
+        </p:nvSpPr>
+        <p:spPr>
+          <a:xfrm>
+            <a:off x="4069080" y="1097280"/>
+            <a:ext cx="1005840" cy="1005840"/>
+          </a:xfrm>
+          <a:prstGeom prst="roundRect">
+            <a:avLst>
+              <a:gd name="adj" fmla="val 18182"/>
+            </a:avLst>
+          </a:prstGeom>
+          <a:solidFill>
+            <a:srgbClr val="2A8C85"/>
+          </a:solidFill>
+          <a:ln/>
+        </p:spPr>
+      </p:sp>
+      <p:pic>
+        <p:nvPicPr>
+          <p:cNvPr id="3" name="Image 0" descr="/tmp/claude-0/-home-user-zero-claude/d7e33190-c541-582c-a7cc-1156817732ce/scratchpad/deck/assets/icon_FaQuestion.png">    </p:cNvPr>
+          <p:cNvPicPr>
+            <a:picLocks noChangeAspect="1"/>
+          </p:cNvPicPr>
+          <p:nvPr/>
+        </p:nvPicPr>
+        <p:blipFill>
+          <a:blip r:embed="rId2"/>
+          <a:stretch>
+            <a:fillRect/>
+          </a:stretch>
+        </p:blipFill>
+        <p:spPr>
+          <a:xfrm>
+            <a:off x="4297680" y="1325880"/>
+            <a:ext cx="548640" cy="548640"/>
           </a:xfrm>
           <a:prstGeom prst="rect">
             <a:avLst/>
           </a:prstGeom>
+        </p:spPr>
+      </p:pic>
+      <p:sp>
+        <p:nvSpPr>
+          <p:cNvPr id="4" name="Text 1"/>
+          <p:cNvSpPr txBox="1"/>
+          <p:nvPr/>
+        </p:nvSpPr>
+        <p:spPr>
+          <a:xfrm>
+            <a:off x="731520" y="2240280"/>
+            <a:ext cx="7680960" cy="731520"/>
+          </a:xfrm>
+          <a:prstGeom prst="rect">
+            <a:avLst/>
+          </a:prstGeom>
           <a:noFill/>
           <a:ln/>
         </p:spPr>
@@ -23846,30 +24170,30 @@
               <a:buNone/>
             </a:pPr>
             <a:r>
-              <a:rPr lang="en-US" sz="1250" b="1" dirty="0">
-                <a:solidFill>
-                  <a:srgbClr val="2A8C85"/>
-                </a:solidFill>
-                <a:latin typeface="Calibri" pitchFamily="34" charset="0"/>
-                <a:ea typeface="Calibri" pitchFamily="34" charset="-122"/>
-                <a:cs typeface="Calibri" pitchFamily="34" charset="-120"/>
-              </a:rPr>
-              <a:t>QUIZ DA UNIDADE 1 · PERGUNTA 1 DE 5</a:t>
-            </a:r>
-            <a:endParaRPr lang="en-US" sz="1250" dirty="0"/>
-          </a:p>
-        </p:txBody>
-      </p:sp>
-      <p:sp>
-        <p:nvSpPr>
-          <p:cNvPr id="3" name="Text 1"/>
+              <a:rPr lang="en-US" sz="3600" b="1" dirty="0">
+                <a:solidFill>
+                  <a:srgbClr val="13294B"/>
+                </a:solidFill>
+                <a:latin typeface="Calibri" pitchFamily="34" charset="0"/>
+                <a:ea typeface="Calibri" pitchFamily="34" charset="-122"/>
+                <a:cs typeface="Calibri" pitchFamily="34" charset="-120"/>
+              </a:rPr>
+              <a:t>Quiz da Unidade 1</a:t>
+            </a:r>
+            <a:endParaRPr lang="en-US" sz="3600" dirty="0"/>
+          </a:p>
+        </p:txBody>
+      </p:sp>
+      <p:sp>
+        <p:nvSpPr>
+          <p:cNvPr id="5" name="Text 2"/>
           <p:cNvSpPr txBox="1"/>
           <p:nvPr/>
         </p:nvSpPr>
         <p:spPr>
           <a:xfrm>
-            <a:off x="731520" y="658368"/>
-            <a:ext cx="7680960" cy="960120"/>
+            <a:off x="1188720" y="2926080"/>
+            <a:ext cx="6766560" cy="822960"/>
           </a:xfrm>
           <a:prstGeom prst="rect">
             <a:avLst/>
@@ -23878,7 +24202,7 @@
           <a:ln/>
         </p:spPr>
         <p:txBody>
-          <a:bodyPr wrap="square" lIns="0" tIns="0" rIns="0" bIns="0" rtlCol="0" anchor="ctr"/>
+          <a:bodyPr wrap="square" lIns="0" tIns="0" rIns="0" bIns="0" rtlCol="0" anchor="t"/>
           <a:lstStyle/>
           <a:p>
             <a:pPr algn="ctr" indent="0" marL="0">
@@ -23888,88 +24212,15 @@
               <a:buNone/>
             </a:pPr>
             <a:r>
-              <a:rPr lang="en-US" sz="1900" b="1" dirty="0">
-                <a:solidFill>
-                  <a:srgbClr val="13294B"/>
-                </a:solidFill>
-                <a:latin typeface="Calibri" pitchFamily="34" charset="0"/>
-                <a:ea typeface="Calibri" pitchFamily="34" charset="-122"/>
-                <a:cs typeface="Calibri" pitchFamily="34" charset="-120"/>
-              </a:rPr>
-              <a:t>Qual destes NÃO é um elemento constitutivo do Estado?</a:t>
-            </a:r>
-            <a:endParaRPr lang="en-US" sz="1900" dirty="0"/>
-          </a:p>
-        </p:txBody>
-      </p:sp>
-      <p:sp>
-        <p:nvSpPr>
-          <p:cNvPr id="4" name="Shape 2"/>
-          <p:cNvSpPr/>
-          <p:nvPr/>
-        </p:nvSpPr>
-        <p:spPr>
-          <a:xfrm>
-            <a:off x="685800" y="1737360"/>
-            <a:ext cx="3794760" cy="914400"/>
-          </a:xfrm>
-          <a:prstGeom prst="roundRect">
-            <a:avLst>
-              <a:gd name="adj" fmla="val 8000"/>
-            </a:avLst>
-          </a:prstGeom>
-          <a:solidFill>
-            <a:srgbClr val="FFFFFF"/>
-          </a:solidFill>
-          <a:ln w="12700">
-            <a:solidFill>
-              <a:srgbClr val="DCD5C1"/>
-            </a:solidFill>
-            <a:prstDash val="solid"/>
-          </a:ln>
-        </p:spPr>
-      </p:sp>
-      <p:sp>
-        <p:nvSpPr>
-          <p:cNvPr id="5" name="Text 3"/>
-          <p:cNvSpPr txBox="1"/>
-          <p:nvPr/>
-        </p:nvSpPr>
-        <p:spPr>
-          <a:xfrm>
-            <a:off x="813816" y="1984248"/>
-            <a:ext cx="420624" cy="420624"/>
-          </a:xfrm>
-          <a:prstGeom prst="roundRect">
-            <a:avLst>
-              <a:gd name="adj" fmla="val 50000"/>
-            </a:avLst>
-          </a:prstGeom>
-          <a:solidFill>
-            <a:srgbClr val="13294B"/>
-          </a:solidFill>
-          <a:ln/>
-        </p:spPr>
-        <p:txBody>
-          <a:bodyPr wrap="square" lIns="0" tIns="0" rIns="0" bIns="0" rtlCol="0" anchor="ctr"/>
-          <a:lstStyle/>
-          <a:p>
-            <a:pPr algn="ctr" indent="0" marL="0">
-              <a:lnSpc>
-                <a:spcPct val="100000"/>
-              </a:lnSpc>
-              <a:buNone/>
-            </a:pPr>
-            <a:r>
-              <a:rPr lang="en-US" sz="1600" b="1" dirty="0">
-                <a:solidFill>
-                  <a:srgbClr val="FFFFFF"/>
-                </a:solidFill>
-                <a:latin typeface="Calibri" pitchFamily="34" charset="0"/>
-                <a:ea typeface="Calibri" pitchFamily="34" charset="-122"/>
-                <a:cs typeface="Calibri" pitchFamily="34" charset="-120"/>
-              </a:rPr>
-              <a:t>a</a:t>
+              <a:rPr lang="en-US" sz="1600" dirty="0">
+                <a:solidFill>
+                  <a:srgbClr val="5B6770"/>
+                </a:solidFill>
+                <a:latin typeface="Calibri" pitchFamily="34" charset="0"/>
+                <a:ea typeface="Calibri" pitchFamily="34" charset="-122"/>
+                <a:cs typeface="Calibri" pitchFamily="34" charset="-120"/>
+              </a:rPr>
+              <a:t>5 perguntas para revisar a unidade. Pause o vídeo, escolha sua resposta e confira no slide seguinte.</a:t>
             </a:r>
             <a:endParaRPr lang="en-US" sz="1600" dirty="0"/>
           </a:p>
@@ -23977,394 +24228,7 @@
       </p:sp>
       <p:sp>
         <p:nvSpPr>
-          <p:cNvPr id="6" name="Text 4"/>
-          <p:cNvSpPr txBox="1"/>
-          <p:nvPr/>
-        </p:nvSpPr>
-        <p:spPr>
-          <a:xfrm>
-            <a:off x="1344168" y="1773936"/>
-            <a:ext cx="3044952" cy="841248"/>
-          </a:xfrm>
-          <a:prstGeom prst="rect">
-            <a:avLst/>
-          </a:prstGeom>
-          <a:noFill/>
-          <a:ln/>
-        </p:spPr>
-        <p:txBody>
-          <a:bodyPr wrap="square" lIns="25400" tIns="25400" rIns="25400" bIns="25400" rtlCol="0" anchor="ctr"/>
-          <a:lstStyle/>
-          <a:p>
-            <a:pPr algn="l" indent="0" marL="0">
-              <a:lnSpc>
-                <a:spcPct val="100000"/>
-              </a:lnSpc>
-              <a:buNone/>
-            </a:pPr>
-            <a:r>
-              <a:rPr lang="en-US" sz="1400" dirty="0">
-                <a:solidFill>
-                  <a:srgbClr val="1F2A37"/>
-                </a:solidFill>
-                <a:latin typeface="Calibri" pitchFamily="34" charset="0"/>
-                <a:ea typeface="Calibri" pitchFamily="34" charset="-122"/>
-                <a:cs typeface="Calibri" pitchFamily="34" charset="-120"/>
-              </a:rPr>
-              <a:t>Povo</a:t>
-            </a:r>
-            <a:endParaRPr lang="en-US" sz="1400" dirty="0"/>
-          </a:p>
-        </p:txBody>
-      </p:sp>
-      <p:sp>
-        <p:nvSpPr>
-          <p:cNvPr id="7" name="Shape 5"/>
-          <p:cNvSpPr/>
-          <p:nvPr/>
-        </p:nvSpPr>
-        <p:spPr>
-          <a:xfrm>
-            <a:off x="4663440" y="1737360"/>
-            <a:ext cx="3794760" cy="914400"/>
-          </a:xfrm>
-          <a:prstGeom prst="roundRect">
-            <a:avLst>
-              <a:gd name="adj" fmla="val 8000"/>
-            </a:avLst>
-          </a:prstGeom>
-          <a:solidFill>
-            <a:srgbClr val="FFFFFF"/>
-          </a:solidFill>
-          <a:ln w="12700">
-            <a:solidFill>
-              <a:srgbClr val="DCD5C1"/>
-            </a:solidFill>
-            <a:prstDash val="solid"/>
-          </a:ln>
-        </p:spPr>
-      </p:sp>
-      <p:sp>
-        <p:nvSpPr>
-          <p:cNvPr id="8" name="Text 6"/>
-          <p:cNvSpPr txBox="1"/>
-          <p:nvPr/>
-        </p:nvSpPr>
-        <p:spPr>
-          <a:xfrm>
-            <a:off x="4791456" y="1984248"/>
-            <a:ext cx="420624" cy="420624"/>
-          </a:xfrm>
-          <a:prstGeom prst="roundRect">
-            <a:avLst>
-              <a:gd name="adj" fmla="val 50000"/>
-            </a:avLst>
-          </a:prstGeom>
-          <a:solidFill>
-            <a:srgbClr val="13294B"/>
-          </a:solidFill>
-          <a:ln/>
-        </p:spPr>
-        <p:txBody>
-          <a:bodyPr wrap="square" lIns="0" tIns="0" rIns="0" bIns="0" rtlCol="0" anchor="ctr"/>
-          <a:lstStyle/>
-          <a:p>
-            <a:pPr algn="ctr" indent="0" marL="0">
-              <a:lnSpc>
-                <a:spcPct val="100000"/>
-              </a:lnSpc>
-              <a:buNone/>
-            </a:pPr>
-            <a:r>
-              <a:rPr lang="en-US" sz="1600" b="1" dirty="0">
-                <a:solidFill>
-                  <a:srgbClr val="FFFFFF"/>
-                </a:solidFill>
-                <a:latin typeface="Calibri" pitchFamily="34" charset="0"/>
-                <a:ea typeface="Calibri" pitchFamily="34" charset="-122"/>
-                <a:cs typeface="Calibri" pitchFamily="34" charset="-120"/>
-              </a:rPr>
-              <a:t>b</a:t>
-            </a:r>
-            <a:endParaRPr lang="en-US" sz="1600" dirty="0"/>
-          </a:p>
-        </p:txBody>
-      </p:sp>
-      <p:sp>
-        <p:nvSpPr>
-          <p:cNvPr id="9" name="Text 7"/>
-          <p:cNvSpPr txBox="1"/>
-          <p:nvPr/>
-        </p:nvSpPr>
-        <p:spPr>
-          <a:xfrm>
-            <a:off x="5321808" y="1773936"/>
-            <a:ext cx="3044952" cy="841248"/>
-          </a:xfrm>
-          <a:prstGeom prst="rect">
-            <a:avLst/>
-          </a:prstGeom>
-          <a:noFill/>
-          <a:ln/>
-        </p:spPr>
-        <p:txBody>
-          <a:bodyPr wrap="square" lIns="25400" tIns="25400" rIns="25400" bIns="25400" rtlCol="0" anchor="ctr"/>
-          <a:lstStyle/>
-          <a:p>
-            <a:pPr algn="l" indent="0" marL="0">
-              <a:lnSpc>
-                <a:spcPct val="100000"/>
-              </a:lnSpc>
-              <a:buNone/>
-            </a:pPr>
-            <a:r>
-              <a:rPr lang="en-US" sz="1400" dirty="0">
-                <a:solidFill>
-                  <a:srgbClr val="1F2A37"/>
-                </a:solidFill>
-                <a:latin typeface="Calibri" pitchFamily="34" charset="0"/>
-                <a:ea typeface="Calibri" pitchFamily="34" charset="-122"/>
-                <a:cs typeface="Calibri" pitchFamily="34" charset="-120"/>
-              </a:rPr>
-              <a:t>Território</a:t>
-            </a:r>
-            <a:endParaRPr lang="en-US" sz="1400" dirty="0"/>
-          </a:p>
-        </p:txBody>
-      </p:sp>
-      <p:sp>
-        <p:nvSpPr>
-          <p:cNvPr id="10" name="Shape 8"/>
-          <p:cNvSpPr/>
-          <p:nvPr/>
-        </p:nvSpPr>
-        <p:spPr>
-          <a:xfrm>
-            <a:off x="685800" y="2798064"/>
-            <a:ext cx="3794760" cy="914400"/>
-          </a:xfrm>
-          <a:prstGeom prst="roundRect">
-            <a:avLst>
-              <a:gd name="adj" fmla="val 8000"/>
-            </a:avLst>
-          </a:prstGeom>
-          <a:solidFill>
-            <a:srgbClr val="FFFFFF"/>
-          </a:solidFill>
-          <a:ln w="12700">
-            <a:solidFill>
-              <a:srgbClr val="DCD5C1"/>
-            </a:solidFill>
-            <a:prstDash val="solid"/>
-          </a:ln>
-        </p:spPr>
-      </p:sp>
-      <p:sp>
-        <p:nvSpPr>
-          <p:cNvPr id="11" name="Text 9"/>
-          <p:cNvSpPr txBox="1"/>
-          <p:nvPr/>
-        </p:nvSpPr>
-        <p:spPr>
-          <a:xfrm>
-            <a:off x="813816" y="3044952"/>
-            <a:ext cx="420624" cy="420624"/>
-          </a:xfrm>
-          <a:prstGeom prst="roundRect">
-            <a:avLst>
-              <a:gd name="adj" fmla="val 50000"/>
-            </a:avLst>
-          </a:prstGeom>
-          <a:solidFill>
-            <a:srgbClr val="13294B"/>
-          </a:solidFill>
-          <a:ln/>
-        </p:spPr>
-        <p:txBody>
-          <a:bodyPr wrap="square" lIns="0" tIns="0" rIns="0" bIns="0" rtlCol="0" anchor="ctr"/>
-          <a:lstStyle/>
-          <a:p>
-            <a:pPr algn="ctr" indent="0" marL="0">
-              <a:lnSpc>
-                <a:spcPct val="100000"/>
-              </a:lnSpc>
-              <a:buNone/>
-            </a:pPr>
-            <a:r>
-              <a:rPr lang="en-US" sz="1600" b="1" dirty="0">
-                <a:solidFill>
-                  <a:srgbClr val="FFFFFF"/>
-                </a:solidFill>
-                <a:latin typeface="Calibri" pitchFamily="34" charset="0"/>
-                <a:ea typeface="Calibri" pitchFamily="34" charset="-122"/>
-                <a:cs typeface="Calibri" pitchFamily="34" charset="-120"/>
-              </a:rPr>
-              <a:t>c</a:t>
-            </a:r>
-            <a:endParaRPr lang="en-US" sz="1600" dirty="0"/>
-          </a:p>
-        </p:txBody>
-      </p:sp>
-      <p:sp>
-        <p:nvSpPr>
-          <p:cNvPr id="12" name="Text 10"/>
-          <p:cNvSpPr txBox="1"/>
-          <p:nvPr/>
-        </p:nvSpPr>
-        <p:spPr>
-          <a:xfrm>
-            <a:off x="1344168" y="2834640"/>
-            <a:ext cx="3044952" cy="841248"/>
-          </a:xfrm>
-          <a:prstGeom prst="rect">
-            <a:avLst/>
-          </a:prstGeom>
-          <a:noFill/>
-          <a:ln/>
-        </p:spPr>
-        <p:txBody>
-          <a:bodyPr wrap="square" lIns="25400" tIns="25400" rIns="25400" bIns="25400" rtlCol="0" anchor="ctr"/>
-          <a:lstStyle/>
-          <a:p>
-            <a:pPr algn="l" indent="0" marL="0">
-              <a:lnSpc>
-                <a:spcPct val="100000"/>
-              </a:lnSpc>
-              <a:buNone/>
-            </a:pPr>
-            <a:r>
-              <a:rPr lang="en-US" sz="1400" dirty="0">
-                <a:solidFill>
-                  <a:srgbClr val="1F2A37"/>
-                </a:solidFill>
-                <a:latin typeface="Calibri" pitchFamily="34" charset="0"/>
-                <a:ea typeface="Calibri" pitchFamily="34" charset="-122"/>
-                <a:cs typeface="Calibri" pitchFamily="34" charset="-120"/>
-              </a:rPr>
-              <a:t>Soberania</a:t>
-            </a:r>
-            <a:endParaRPr lang="en-US" sz="1400" dirty="0"/>
-          </a:p>
-        </p:txBody>
-      </p:sp>
-      <p:sp>
-        <p:nvSpPr>
-          <p:cNvPr id="13" name="Shape 11"/>
-          <p:cNvSpPr/>
-          <p:nvPr/>
-        </p:nvSpPr>
-        <p:spPr>
-          <a:xfrm>
-            <a:off x="4663440" y="2798064"/>
-            <a:ext cx="3794760" cy="914400"/>
-          </a:xfrm>
-          <a:prstGeom prst="roundRect">
-            <a:avLst>
-              <a:gd name="adj" fmla="val 8000"/>
-            </a:avLst>
-          </a:prstGeom>
-          <a:solidFill>
-            <a:srgbClr val="FFFFFF"/>
-          </a:solidFill>
-          <a:ln w="12700">
-            <a:solidFill>
-              <a:srgbClr val="DCD5C1"/>
-            </a:solidFill>
-            <a:prstDash val="solid"/>
-          </a:ln>
-        </p:spPr>
-      </p:sp>
-      <p:sp>
-        <p:nvSpPr>
-          <p:cNvPr id="14" name="Text 12"/>
-          <p:cNvSpPr txBox="1"/>
-          <p:nvPr/>
-        </p:nvSpPr>
-        <p:spPr>
-          <a:xfrm>
-            <a:off x="4791456" y="3044952"/>
-            <a:ext cx="420624" cy="420624"/>
-          </a:xfrm>
-          <a:prstGeom prst="roundRect">
-            <a:avLst>
-              <a:gd name="adj" fmla="val 50000"/>
-            </a:avLst>
-          </a:prstGeom>
-          <a:solidFill>
-            <a:srgbClr val="13294B"/>
-          </a:solidFill>
-          <a:ln/>
-        </p:spPr>
-        <p:txBody>
-          <a:bodyPr wrap="square" lIns="0" tIns="0" rIns="0" bIns="0" rtlCol="0" anchor="ctr"/>
-          <a:lstStyle/>
-          <a:p>
-            <a:pPr algn="ctr" indent="0" marL="0">
-              <a:lnSpc>
-                <a:spcPct val="100000"/>
-              </a:lnSpc>
-              <a:buNone/>
-            </a:pPr>
-            <a:r>
-              <a:rPr lang="en-US" sz="1600" b="1" dirty="0">
-                <a:solidFill>
-                  <a:srgbClr val="FFFFFF"/>
-                </a:solidFill>
-                <a:latin typeface="Calibri" pitchFamily="34" charset="0"/>
-                <a:ea typeface="Calibri" pitchFamily="34" charset="-122"/>
-                <a:cs typeface="Calibri" pitchFamily="34" charset="-120"/>
-              </a:rPr>
-              <a:t>d</a:t>
-            </a:r>
-            <a:endParaRPr lang="en-US" sz="1600" dirty="0"/>
-          </a:p>
-        </p:txBody>
-      </p:sp>
-      <p:sp>
-        <p:nvSpPr>
-          <p:cNvPr id="15" name="Text 13"/>
-          <p:cNvSpPr txBox="1"/>
-          <p:nvPr/>
-        </p:nvSpPr>
-        <p:spPr>
-          <a:xfrm>
-            <a:off x="5321808" y="2834640"/>
-            <a:ext cx="3044952" cy="841248"/>
-          </a:xfrm>
-          <a:prstGeom prst="rect">
-            <a:avLst/>
-          </a:prstGeom>
-          <a:noFill/>
-          <a:ln/>
-        </p:spPr>
-        <p:txBody>
-          <a:bodyPr wrap="square" lIns="25400" tIns="25400" rIns="25400" bIns="25400" rtlCol="0" anchor="ctr"/>
-          <a:lstStyle/>
-          <a:p>
-            <a:pPr algn="l" indent="0" marL="0">
-              <a:lnSpc>
-                <a:spcPct val="100000"/>
-              </a:lnSpc>
-              <a:buNone/>
-            </a:pPr>
-            <a:r>
-              <a:rPr lang="en-US" sz="1400" dirty="0">
-                <a:solidFill>
-                  <a:srgbClr val="1F2A37"/>
-                </a:solidFill>
-                <a:latin typeface="Calibri" pitchFamily="34" charset="0"/>
-                <a:ea typeface="Calibri" pitchFamily="34" charset="-122"/>
-                <a:cs typeface="Calibri" pitchFamily="34" charset="-120"/>
-              </a:rPr>
-              <a:t>Mercado</a:t>
-            </a:r>
-            <a:endParaRPr lang="en-US" sz="1400" dirty="0"/>
-          </a:p>
-        </p:txBody>
-      </p:sp>
-      <p:sp>
-        <p:nvSpPr>
-          <p:cNvPr id="16" name="Text 14"/>
+          <p:cNvPr id="6" name="Text 3"/>
           <p:cNvSpPr txBox="1"/>
           <p:nvPr/>
         </p:nvSpPr>
@@ -24479,7 +24343,7 @@
                 <a:ea typeface="Calibri" pitchFamily="34" charset="-122"/>
                 <a:cs typeface="Calibri" pitchFamily="34" charset="-120"/>
               </a:rPr>
-              <a:t>QUIZ DA UNIDADE 1 · PERGUNTA 1 DE 5 · RESPOSTA</a:t>
+              <a:t>QUIZ DA UNIDADE 1 · PERGUNTA 1 DE 5</a:t>
             </a:r>
             <a:endParaRPr lang="en-US" sz="1250" dirty="0"/>
           </a:p>
@@ -24536,11 +24400,11 @@
         <p:spPr>
           <a:xfrm>
             <a:off x="685800" y="1737360"/>
-            <a:ext cx="3794760" cy="749808"/>
+            <a:ext cx="3794760" cy="914400"/>
           </a:xfrm>
           <a:prstGeom prst="roundRect">
             <a:avLst>
-              <a:gd name="adj" fmla="val 9756"/>
+              <a:gd name="adj" fmla="val 8000"/>
             </a:avLst>
           </a:prstGeom>
           <a:solidFill>
@@ -24562,7 +24426,7 @@
         </p:nvSpPr>
         <p:spPr>
           <a:xfrm>
-            <a:off x="813816" y="1901952"/>
+            <a:off x="813816" y="1984248"/>
             <a:ext cx="420624" cy="420624"/>
           </a:xfrm>
           <a:prstGeom prst="roundRect">
@@ -24571,7 +24435,7 @@
             </a:avLst>
           </a:prstGeom>
           <a:solidFill>
-            <a:srgbClr val="9AA3AB"/>
+            <a:srgbClr val="13294B"/>
           </a:solidFill>
           <a:ln/>
         </p:spPr>
@@ -24609,7 +24473,7 @@
         <p:spPr>
           <a:xfrm>
             <a:off x="1344168" y="1773936"/>
-            <a:ext cx="3044952" cy="676656"/>
+            <a:ext cx="3044952" cy="841248"/>
           </a:xfrm>
           <a:prstGeom prst="rect">
             <a:avLst/>
@@ -24630,7 +24494,7 @@
             <a:r>
               <a:rPr lang="en-US" sz="1400" dirty="0">
                 <a:solidFill>
-                  <a:srgbClr val="5B6770"/>
+                  <a:srgbClr val="1F2A37"/>
                 </a:solidFill>
                 <a:latin typeface="Calibri" pitchFamily="34" charset="0"/>
                 <a:ea typeface="Calibri" pitchFamily="34" charset="-122"/>
@@ -24651,11 +24515,11 @@
         <p:spPr>
           <a:xfrm>
             <a:off x="4663440" y="1737360"/>
-            <a:ext cx="3794760" cy="749808"/>
+            <a:ext cx="3794760" cy="914400"/>
           </a:xfrm>
           <a:prstGeom prst="roundRect">
             <a:avLst>
-              <a:gd name="adj" fmla="val 9756"/>
+              <a:gd name="adj" fmla="val 8000"/>
             </a:avLst>
           </a:prstGeom>
           <a:solidFill>
@@ -24677,7 +24541,7 @@
         </p:nvSpPr>
         <p:spPr>
           <a:xfrm>
-            <a:off x="4791456" y="1901952"/>
+            <a:off x="4791456" y="1984248"/>
             <a:ext cx="420624" cy="420624"/>
           </a:xfrm>
           <a:prstGeom prst="roundRect">
@@ -24686,7 +24550,7 @@
             </a:avLst>
           </a:prstGeom>
           <a:solidFill>
-            <a:srgbClr val="9AA3AB"/>
+            <a:srgbClr val="13294B"/>
           </a:solidFill>
           <a:ln/>
         </p:spPr>
@@ -24724,7 +24588,7 @@
         <p:spPr>
           <a:xfrm>
             <a:off x="5321808" y="1773936"/>
-            <a:ext cx="3044952" cy="676656"/>
+            <a:ext cx="3044952" cy="841248"/>
           </a:xfrm>
           <a:prstGeom prst="rect">
             <a:avLst/>
@@ -24745,7 +24609,7 @@
             <a:r>
               <a:rPr lang="en-US" sz="1400" dirty="0">
                 <a:solidFill>
-                  <a:srgbClr val="5B6770"/>
+                  <a:srgbClr val="1F2A37"/>
                 </a:solidFill>
                 <a:latin typeface="Calibri" pitchFamily="34" charset="0"/>
                 <a:ea typeface="Calibri" pitchFamily="34" charset="-122"/>
@@ -24765,12 +24629,12 @@
         </p:nvSpPr>
         <p:spPr>
           <a:xfrm>
-            <a:off x="685800" y="2633472"/>
-            <a:ext cx="3794760" cy="749808"/>
+            <a:off x="685800" y="2798064"/>
+            <a:ext cx="3794760" cy="914400"/>
           </a:xfrm>
           <a:prstGeom prst="roundRect">
             <a:avLst>
-              <a:gd name="adj" fmla="val 9756"/>
+              <a:gd name="adj" fmla="val 8000"/>
             </a:avLst>
           </a:prstGeom>
           <a:solidFill>
@@ -24792,7 +24656,7 @@
         </p:nvSpPr>
         <p:spPr>
           <a:xfrm>
-            <a:off x="813816" y="2798064"/>
+            <a:off x="813816" y="3044952"/>
             <a:ext cx="420624" cy="420624"/>
           </a:xfrm>
           <a:prstGeom prst="roundRect">
@@ -24801,7 +24665,7 @@
             </a:avLst>
           </a:prstGeom>
           <a:solidFill>
-            <a:srgbClr val="9AA3AB"/>
+            <a:srgbClr val="13294B"/>
           </a:solidFill>
           <a:ln/>
         </p:spPr>
@@ -24838,8 +24702,8 @@
         </p:nvSpPr>
         <p:spPr>
           <a:xfrm>
-            <a:off x="1344168" y="2670048"/>
-            <a:ext cx="3044952" cy="676656"/>
+            <a:off x="1344168" y="2834640"/>
+            <a:ext cx="3044952" cy="841248"/>
           </a:xfrm>
           <a:prstGeom prst="rect">
             <a:avLst/>
@@ -24860,7 +24724,7 @@
             <a:r>
               <a:rPr lang="en-US" sz="1400" dirty="0">
                 <a:solidFill>
-                  <a:srgbClr val="5B6770"/>
+                  <a:srgbClr val="1F2A37"/>
                 </a:solidFill>
                 <a:latin typeface="Calibri" pitchFamily="34" charset="0"/>
                 <a:ea typeface="Calibri" pitchFamily="34" charset="-122"/>
@@ -24880,20 +24744,20 @@
         </p:nvSpPr>
         <p:spPr>
           <a:xfrm>
-            <a:off x="4663440" y="2633472"/>
-            <a:ext cx="3794760" cy="749808"/>
+            <a:off x="4663440" y="2798064"/>
+            <a:ext cx="3794760" cy="914400"/>
           </a:xfrm>
           <a:prstGeom prst="roundRect">
             <a:avLst>
-              <a:gd name="adj" fmla="val 9756"/>
+              <a:gd name="adj" fmla="val 8000"/>
             </a:avLst>
           </a:prstGeom>
           <a:solidFill>
-            <a:srgbClr val="E3F2E8"/>
+            <a:srgbClr val="FFFFFF"/>
           </a:solidFill>
-          <a:ln w="25400">
+          <a:ln w="12700">
             <a:solidFill>
-              <a:srgbClr val="2E7D4F"/>
+              <a:srgbClr val="DCD5C1"/>
             </a:solidFill>
             <a:prstDash val="solid"/>
           </a:ln>
@@ -24907,7 +24771,7 @@
         </p:nvSpPr>
         <p:spPr>
           <a:xfrm>
-            <a:off x="4791456" y="2798064"/>
+            <a:off x="4791456" y="3044952"/>
             <a:ext cx="420624" cy="420624"/>
           </a:xfrm>
           <a:prstGeom prst="roundRect">
@@ -24916,7 +24780,7 @@
             </a:avLst>
           </a:prstGeom>
           <a:solidFill>
-            <a:srgbClr val="2E7D4F"/>
+            <a:srgbClr val="13294B"/>
           </a:solidFill>
           <a:ln/>
         </p:spPr>
@@ -24953,8 +24817,8 @@
         </p:nvSpPr>
         <p:spPr>
           <a:xfrm>
-            <a:off x="5321808" y="2670048"/>
-            <a:ext cx="3044952" cy="676656"/>
+            <a:off x="5321808" y="2834640"/>
+            <a:ext cx="3044952" cy="841248"/>
           </a:xfrm>
           <a:prstGeom prst="rect">
             <a:avLst/>
@@ -24973,7 +24837,7 @@
               <a:buNone/>
             </a:pPr>
             <a:r>
-              <a:rPr lang="en-US" sz="1400" b="1" dirty="0">
+              <a:rPr lang="en-US" sz="1400" dirty="0">
                 <a:solidFill>
                   <a:srgbClr val="1F2A37"/>
                 </a:solidFill>
@@ -24990,69 +24854,6 @@
       <p:sp>
         <p:nvSpPr>
           <p:cNvPr id="16" name="Text 14"/>
-          <p:cNvSpPr txBox="1"/>
-          <p:nvPr/>
-        </p:nvSpPr>
-        <p:spPr>
-          <a:xfrm>
-            <a:off x="685800" y="3566160"/>
-            <a:ext cx="7772400" cy="841248"/>
-          </a:xfrm>
-          <a:prstGeom prst="roundRect">
-            <a:avLst>
-              <a:gd name="adj" fmla="val 8696"/>
-            </a:avLst>
-          </a:prstGeom>
-          <a:solidFill>
-            <a:srgbClr val="E6F2F0"/>
-          </a:solidFill>
-          <a:ln/>
-        </p:spPr>
-        <p:txBody>
-          <a:bodyPr wrap="square" lIns="114300" tIns="114300" rIns="114300" bIns="114300" rtlCol="0" anchor="ctr"/>
-          <a:lstStyle/>
-          <a:p>
-            <a:pPr algn="l" indent="0" marL="0">
-              <a:lnSpc>
-                <a:spcPct val="100000"/>
-              </a:lnSpc>
-              <a:buNone/>
-            </a:pPr>
-            <a:r>
-              <a:rPr lang="en-US" sz="1350" b="1" dirty="0">
-                <a:solidFill>
-                  <a:srgbClr val="2E7D4F"/>
-                </a:solidFill>
-                <a:latin typeface="Calibri" pitchFamily="34" charset="0"/>
-                <a:ea typeface="Calibri" pitchFamily="34" charset="-122"/>
-                <a:cs typeface="Calibri" pitchFamily="34" charset="-120"/>
-              </a:rPr>
-              <a:t>Resposta: d) </a:t>
-            </a:r>
-            <a:pPr algn="l" indent="0" marL="0">
-              <a:lnSpc>
-                <a:spcPct val="100000"/>
-              </a:lnSpc>
-              <a:buNone/>
-            </a:pPr>
-            <a:r>
-              <a:rPr lang="en-US" sz="1350" dirty="0">
-                <a:solidFill>
-                  <a:srgbClr val="1F2A37"/>
-                </a:solidFill>
-                <a:latin typeface="Calibri" pitchFamily="34" charset="0"/>
-                <a:ea typeface="Calibri" pitchFamily="34" charset="-122"/>
-                <a:cs typeface="Calibri" pitchFamily="34" charset="-120"/>
-              </a:rPr>
-              <a:t>Os elementos clássicos do Estado são povo, território e soberania (poder político). O mercado é outra esfera de coordenação social.</a:t>
-            </a:r>
-            <a:endParaRPr lang="en-US" sz="1350" dirty="0"/>
-          </a:p>
-        </p:txBody>
-      </p:sp>
-      <p:sp>
-        <p:nvSpPr>
-          <p:cNvPr id="17" name="Text 15"/>
           <p:cNvSpPr txBox="1"/>
           <p:nvPr/>
         </p:nvSpPr>
@@ -25167,7 +24968,7 @@
                 <a:ea typeface="Calibri" pitchFamily="34" charset="-122"/>
                 <a:cs typeface="Calibri" pitchFamily="34" charset="-120"/>
               </a:rPr>
-              <a:t>QUIZ DA UNIDADE 1 · PERGUNTA 2 DE 5</a:t>
+              <a:t>QUIZ DA UNIDADE 1 · PERGUNTA 1 DE 5 · RESPOSTA</a:t>
             </a:r>
             <a:endParaRPr lang="en-US" sz="1250" dirty="0"/>
           </a:p>
@@ -25209,7 +25010,7 @@
                 <a:ea typeface="Calibri" pitchFamily="34" charset="-122"/>
                 <a:cs typeface="Calibri" pitchFamily="34" charset="-120"/>
               </a:rPr>
-              <a:t>Concursos públicos, leis e impessoalidade na administração expressam, segundo Weber, a dominação:</a:t>
+              <a:t>Qual destes NÃO é um elemento constitutivo do Estado?</a:t>
             </a:r>
             <a:endParaRPr lang="en-US" sz="1900" dirty="0"/>
           </a:p>
@@ -25224,11 +25025,11 @@
         <p:spPr>
           <a:xfrm>
             <a:off x="685800" y="1737360"/>
-            <a:ext cx="3794760" cy="914400"/>
+            <a:ext cx="3794760" cy="749808"/>
           </a:xfrm>
           <a:prstGeom prst="roundRect">
             <a:avLst>
-              <a:gd name="adj" fmla="val 8000"/>
+              <a:gd name="adj" fmla="val 9756"/>
             </a:avLst>
           </a:prstGeom>
           <a:solidFill>
@@ -25250,7 +25051,7 @@
         </p:nvSpPr>
         <p:spPr>
           <a:xfrm>
-            <a:off x="813816" y="1984248"/>
+            <a:off x="813816" y="1901952"/>
             <a:ext cx="420624" cy="420624"/>
           </a:xfrm>
           <a:prstGeom prst="roundRect">
@@ -25259,7 +25060,7 @@
             </a:avLst>
           </a:prstGeom>
           <a:solidFill>
-            <a:srgbClr val="13294B"/>
+            <a:srgbClr val="9AA3AB"/>
           </a:solidFill>
           <a:ln/>
         </p:spPr>
@@ -25297,7 +25098,7 @@
         <p:spPr>
           <a:xfrm>
             <a:off x="1344168" y="1773936"/>
-            <a:ext cx="3044952" cy="841248"/>
+            <a:ext cx="3044952" cy="676656"/>
           </a:xfrm>
           <a:prstGeom prst="rect">
             <a:avLst/>
@@ -25318,13 +25119,13 @@
             <a:r>
               <a:rPr lang="en-US" sz="1400" dirty="0">
                 <a:solidFill>
-                  <a:srgbClr val="1F2A37"/>
-                </a:solidFill>
-                <a:latin typeface="Calibri" pitchFamily="34" charset="0"/>
-                <a:ea typeface="Calibri" pitchFamily="34" charset="-122"/>
-                <a:cs typeface="Calibri" pitchFamily="34" charset="-120"/>
-              </a:rPr>
-              <a:t>Tradicional</a:t>
+                  <a:srgbClr val="5B6770"/>
+                </a:solidFill>
+                <a:latin typeface="Calibri" pitchFamily="34" charset="0"/>
+                <a:ea typeface="Calibri" pitchFamily="34" charset="-122"/>
+                <a:cs typeface="Calibri" pitchFamily="34" charset="-120"/>
+              </a:rPr>
+              <a:t>Povo</a:t>
             </a:r>
             <a:endParaRPr lang="en-US" sz="1400" dirty="0"/>
           </a:p>
@@ -25339,11 +25140,11 @@
         <p:spPr>
           <a:xfrm>
             <a:off x="4663440" y="1737360"/>
-            <a:ext cx="3794760" cy="914400"/>
+            <a:ext cx="3794760" cy="749808"/>
           </a:xfrm>
           <a:prstGeom prst="roundRect">
             <a:avLst>
-              <a:gd name="adj" fmla="val 8000"/>
+              <a:gd name="adj" fmla="val 9756"/>
             </a:avLst>
           </a:prstGeom>
           <a:solidFill>
@@ -25365,7 +25166,7 @@
         </p:nvSpPr>
         <p:spPr>
           <a:xfrm>
-            <a:off x="4791456" y="1984248"/>
+            <a:off x="4791456" y="1901952"/>
             <a:ext cx="420624" cy="420624"/>
           </a:xfrm>
           <a:prstGeom prst="roundRect">
@@ -25374,7 +25175,7 @@
             </a:avLst>
           </a:prstGeom>
           <a:solidFill>
-            <a:srgbClr val="13294B"/>
+            <a:srgbClr val="9AA3AB"/>
           </a:solidFill>
           <a:ln/>
         </p:spPr>
@@ -25412,7 +25213,7 @@
         <p:spPr>
           <a:xfrm>
             <a:off x="5321808" y="1773936"/>
-            <a:ext cx="3044952" cy="841248"/>
+            <a:ext cx="3044952" cy="676656"/>
           </a:xfrm>
           <a:prstGeom prst="rect">
             <a:avLst/>
@@ -25433,13 +25234,13 @@
             <a:r>
               <a:rPr lang="en-US" sz="1400" dirty="0">
                 <a:solidFill>
-                  <a:srgbClr val="1F2A37"/>
-                </a:solidFill>
-                <a:latin typeface="Calibri" pitchFamily="34" charset="0"/>
-                <a:ea typeface="Calibri" pitchFamily="34" charset="-122"/>
-                <a:cs typeface="Calibri" pitchFamily="34" charset="-120"/>
-              </a:rPr>
-              <a:t>Carismática</a:t>
+                  <a:srgbClr val="5B6770"/>
+                </a:solidFill>
+                <a:latin typeface="Calibri" pitchFamily="34" charset="0"/>
+                <a:ea typeface="Calibri" pitchFamily="34" charset="-122"/>
+                <a:cs typeface="Calibri" pitchFamily="34" charset="-120"/>
+              </a:rPr>
+              <a:t>Território</a:t>
             </a:r>
             <a:endParaRPr lang="en-US" sz="1400" dirty="0"/>
           </a:p>
@@ -25453,12 +25254,12 @@
         </p:nvSpPr>
         <p:spPr>
           <a:xfrm>
-            <a:off x="685800" y="2798064"/>
-            <a:ext cx="3794760" cy="914400"/>
+            <a:off x="685800" y="2633472"/>
+            <a:ext cx="3794760" cy="749808"/>
           </a:xfrm>
           <a:prstGeom prst="roundRect">
             <a:avLst>
-              <a:gd name="adj" fmla="val 8000"/>
+              <a:gd name="adj" fmla="val 9756"/>
             </a:avLst>
           </a:prstGeom>
           <a:solidFill>
@@ -25480,7 +25281,7 @@
         </p:nvSpPr>
         <p:spPr>
           <a:xfrm>
-            <a:off x="813816" y="3044952"/>
+            <a:off x="813816" y="2798064"/>
             <a:ext cx="420624" cy="420624"/>
           </a:xfrm>
           <a:prstGeom prst="roundRect">
@@ -25489,7 +25290,7 @@
             </a:avLst>
           </a:prstGeom>
           <a:solidFill>
-            <a:srgbClr val="13294B"/>
+            <a:srgbClr val="9AA3AB"/>
           </a:solidFill>
           <a:ln/>
         </p:spPr>
@@ -25526,8 +25327,8 @@
         </p:nvSpPr>
         <p:spPr>
           <a:xfrm>
-            <a:off x="1344168" y="2834640"/>
-            <a:ext cx="3044952" cy="841248"/>
+            <a:off x="1344168" y="2670048"/>
+            <a:ext cx="3044952" cy="676656"/>
           </a:xfrm>
           <a:prstGeom prst="rect">
             <a:avLst/>
@@ -25548,13 +25349,13 @@
             <a:r>
               <a:rPr lang="en-US" sz="1400" dirty="0">
                 <a:solidFill>
-                  <a:srgbClr val="1F2A37"/>
-                </a:solidFill>
-                <a:latin typeface="Calibri" pitchFamily="34" charset="0"/>
-                <a:ea typeface="Calibri" pitchFamily="34" charset="-122"/>
-                <a:cs typeface="Calibri" pitchFamily="34" charset="-120"/>
-              </a:rPr>
-              <a:t>Legal-racional</a:t>
+                  <a:srgbClr val="5B6770"/>
+                </a:solidFill>
+                <a:latin typeface="Calibri" pitchFamily="34" charset="0"/>
+                <a:ea typeface="Calibri" pitchFamily="34" charset="-122"/>
+                <a:cs typeface="Calibri" pitchFamily="34" charset="-120"/>
+              </a:rPr>
+              <a:t>Soberania</a:t>
             </a:r>
             <a:endParaRPr lang="en-US" sz="1400" dirty="0"/>
           </a:p>
@@ -25568,20 +25369,20 @@
         </p:nvSpPr>
         <p:spPr>
           <a:xfrm>
-            <a:off x="4663440" y="2798064"/>
-            <a:ext cx="3794760" cy="914400"/>
+            <a:off x="4663440" y="2633472"/>
+            <a:ext cx="3794760" cy="749808"/>
           </a:xfrm>
           <a:prstGeom prst="roundRect">
             <a:avLst>
-              <a:gd name="adj" fmla="val 8000"/>
+              <a:gd name="adj" fmla="val 9756"/>
             </a:avLst>
           </a:prstGeom>
           <a:solidFill>
-            <a:srgbClr val="FFFFFF"/>
+            <a:srgbClr val="E3F2E8"/>
           </a:solidFill>
-          <a:ln w="12700">
+          <a:ln w="25400">
             <a:solidFill>
-              <a:srgbClr val="DCD5C1"/>
+              <a:srgbClr val="2E7D4F"/>
             </a:solidFill>
             <a:prstDash val="solid"/>
           </a:ln>
@@ -25595,7 +25396,7 @@
         </p:nvSpPr>
         <p:spPr>
           <a:xfrm>
-            <a:off x="4791456" y="3044952"/>
+            <a:off x="4791456" y="2798064"/>
             <a:ext cx="420624" cy="420624"/>
           </a:xfrm>
           <a:prstGeom prst="roundRect">
@@ -25604,7 +25405,7 @@
             </a:avLst>
           </a:prstGeom>
           <a:solidFill>
-            <a:srgbClr val="13294B"/>
+            <a:srgbClr val="2E7D4F"/>
           </a:solidFill>
           <a:ln/>
         </p:spPr>
@@ -25641,8 +25442,8 @@
         </p:nvSpPr>
         <p:spPr>
           <a:xfrm>
-            <a:off x="5321808" y="2834640"/>
-            <a:ext cx="3044952" cy="841248"/>
+            <a:off x="5321808" y="2670048"/>
+            <a:ext cx="3044952" cy="676656"/>
           </a:xfrm>
           <a:prstGeom prst="rect">
             <a:avLst/>
@@ -25661,7 +25462,7 @@
               <a:buNone/>
             </a:pPr>
             <a:r>
-              <a:rPr lang="en-US" sz="1400" dirty="0">
+              <a:rPr lang="en-US" sz="1400" b="1" dirty="0">
                 <a:solidFill>
                   <a:srgbClr val="1F2A37"/>
                 </a:solidFill>
@@ -25669,7 +25470,7 @@
                 <a:ea typeface="Calibri" pitchFamily="34" charset="-122"/>
                 <a:cs typeface="Calibri" pitchFamily="34" charset="-120"/>
               </a:rPr>
-              <a:t>Patrimonial</a:t>
+              <a:t>Mercado</a:t>
             </a:r>
             <a:endParaRPr lang="en-US" sz="1400" dirty="0"/>
           </a:p>
@@ -25678,6 +25479,69 @@
       <p:sp>
         <p:nvSpPr>
           <p:cNvPr id="16" name="Text 14"/>
+          <p:cNvSpPr txBox="1"/>
+          <p:nvPr/>
+        </p:nvSpPr>
+        <p:spPr>
+          <a:xfrm>
+            <a:off x="685800" y="3566160"/>
+            <a:ext cx="7772400" cy="841248"/>
+          </a:xfrm>
+          <a:prstGeom prst="roundRect">
+            <a:avLst>
+              <a:gd name="adj" fmla="val 8696"/>
+            </a:avLst>
+          </a:prstGeom>
+          <a:solidFill>
+            <a:srgbClr val="E6F2F0"/>
+          </a:solidFill>
+          <a:ln/>
+        </p:spPr>
+        <p:txBody>
+          <a:bodyPr wrap="square" lIns="114300" tIns="114300" rIns="114300" bIns="114300" rtlCol="0" anchor="ctr"/>
+          <a:lstStyle/>
+          <a:p>
+            <a:pPr algn="l" indent="0" marL="0">
+              <a:lnSpc>
+                <a:spcPct val="100000"/>
+              </a:lnSpc>
+              <a:buNone/>
+            </a:pPr>
+            <a:r>
+              <a:rPr lang="en-US" sz="1350" b="1" dirty="0">
+                <a:solidFill>
+                  <a:srgbClr val="2E7D4F"/>
+                </a:solidFill>
+                <a:latin typeface="Calibri" pitchFamily="34" charset="0"/>
+                <a:ea typeface="Calibri" pitchFamily="34" charset="-122"/>
+                <a:cs typeface="Calibri" pitchFamily="34" charset="-120"/>
+              </a:rPr>
+              <a:t>Resposta: d) </a:t>
+            </a:r>
+            <a:pPr algn="l" indent="0" marL="0">
+              <a:lnSpc>
+                <a:spcPct val="100000"/>
+              </a:lnSpc>
+              <a:buNone/>
+            </a:pPr>
+            <a:r>
+              <a:rPr lang="en-US" sz="1350" dirty="0">
+                <a:solidFill>
+                  <a:srgbClr val="1F2A37"/>
+                </a:solidFill>
+                <a:latin typeface="Calibri" pitchFamily="34" charset="0"/>
+                <a:ea typeface="Calibri" pitchFamily="34" charset="-122"/>
+                <a:cs typeface="Calibri" pitchFamily="34" charset="-120"/>
+              </a:rPr>
+              <a:t>Os elementos clássicos do Estado são povo, território e soberania (poder político). O mercado é outra esfera de coordenação social.</a:t>
+            </a:r>
+            <a:endParaRPr lang="en-US" sz="1350" dirty="0"/>
+          </a:p>
+        </p:txBody>
+      </p:sp>
+      <p:sp>
+        <p:nvSpPr>
+          <p:cNvPr id="17" name="Text 15"/>
           <p:cNvSpPr txBox="1"/>
           <p:nvPr/>
         </p:nvSpPr>
@@ -25792,7 +25656,7 @@
                 <a:ea typeface="Calibri" pitchFamily="34" charset="-122"/>
                 <a:cs typeface="Calibri" pitchFamily="34" charset="-120"/>
               </a:rPr>
-              <a:t>QUIZ DA UNIDADE 1 · PERGUNTA 2 DE 5 · RESPOSTA</a:t>
+              <a:t>QUIZ DA UNIDADE 1 · PERGUNTA 2 DE 5</a:t>
             </a:r>
             <a:endParaRPr lang="en-US" sz="1250" dirty="0"/>
           </a:p>
@@ -25849,11 +25713,11 @@
         <p:spPr>
           <a:xfrm>
             <a:off x="685800" y="1737360"/>
-            <a:ext cx="3794760" cy="749808"/>
+            <a:ext cx="3794760" cy="914400"/>
           </a:xfrm>
           <a:prstGeom prst="roundRect">
             <a:avLst>
-              <a:gd name="adj" fmla="val 9756"/>
+              <a:gd name="adj" fmla="val 8000"/>
             </a:avLst>
           </a:prstGeom>
           <a:solidFill>
@@ -25875,7 +25739,7 @@
         </p:nvSpPr>
         <p:spPr>
           <a:xfrm>
-            <a:off x="813816" y="1901952"/>
+            <a:off x="813816" y="1984248"/>
             <a:ext cx="420624" cy="420624"/>
           </a:xfrm>
           <a:prstGeom prst="roundRect">
@@ -25884,7 +25748,7 @@
             </a:avLst>
           </a:prstGeom>
           <a:solidFill>
-            <a:srgbClr val="9AA3AB"/>
+            <a:srgbClr val="13294B"/>
           </a:solidFill>
           <a:ln/>
         </p:spPr>
@@ -25922,7 +25786,7 @@
         <p:spPr>
           <a:xfrm>
             <a:off x="1344168" y="1773936"/>
-            <a:ext cx="3044952" cy="676656"/>
+            <a:ext cx="3044952" cy="841248"/>
           </a:xfrm>
           <a:prstGeom prst="rect">
             <a:avLst/>
@@ -25943,7 +25807,7 @@
             <a:r>
               <a:rPr lang="en-US" sz="1400" dirty="0">
                 <a:solidFill>
-                  <a:srgbClr val="5B6770"/>
+                  <a:srgbClr val="1F2A37"/>
                 </a:solidFill>
                 <a:latin typeface="Calibri" pitchFamily="34" charset="0"/>
                 <a:ea typeface="Calibri" pitchFamily="34" charset="-122"/>
@@ -25964,11 +25828,11 @@
         <p:spPr>
           <a:xfrm>
             <a:off x="4663440" y="1737360"/>
-            <a:ext cx="3794760" cy="749808"/>
+            <a:ext cx="3794760" cy="914400"/>
           </a:xfrm>
           <a:prstGeom prst="roundRect">
             <a:avLst>
-              <a:gd name="adj" fmla="val 9756"/>
+              <a:gd name="adj" fmla="val 8000"/>
             </a:avLst>
           </a:prstGeom>
           <a:solidFill>
@@ -25990,7 +25854,7 @@
         </p:nvSpPr>
         <p:spPr>
           <a:xfrm>
-            <a:off x="4791456" y="1901952"/>
+            <a:off x="4791456" y="1984248"/>
             <a:ext cx="420624" cy="420624"/>
           </a:xfrm>
           <a:prstGeom prst="roundRect">
@@ -25999,7 +25863,7 @@
             </a:avLst>
           </a:prstGeom>
           <a:solidFill>
-            <a:srgbClr val="9AA3AB"/>
+            <a:srgbClr val="13294B"/>
           </a:solidFill>
           <a:ln/>
         </p:spPr>
@@ -26037,7 +25901,7 @@
         <p:spPr>
           <a:xfrm>
             <a:off x="5321808" y="1773936"/>
-            <a:ext cx="3044952" cy="676656"/>
+            <a:ext cx="3044952" cy="841248"/>
           </a:xfrm>
           <a:prstGeom prst="rect">
             <a:avLst/>
@@ -26058,7 +25922,7 @@
             <a:r>
               <a:rPr lang="en-US" sz="1400" dirty="0">
                 <a:solidFill>
-                  <a:srgbClr val="5B6770"/>
+                  <a:srgbClr val="1F2A37"/>
                 </a:solidFill>
                 <a:latin typeface="Calibri" pitchFamily="34" charset="0"/>
                 <a:ea typeface="Calibri" pitchFamily="34" charset="-122"/>
@@ -26078,127 +25942,12 @@
         </p:nvSpPr>
         <p:spPr>
           <a:xfrm>
-            <a:off x="685800" y="2633472"/>
-            <a:ext cx="3794760" cy="749808"/>
+            <a:off x="685800" y="2798064"/>
+            <a:ext cx="3794760" cy="914400"/>
           </a:xfrm>
           <a:prstGeom prst="roundRect">
             <a:avLst>
-              <a:gd name="adj" fmla="val 9756"/>
-            </a:avLst>
-          </a:prstGeom>
-          <a:solidFill>
-            <a:srgbClr val="E3F2E8"/>
-          </a:solidFill>
-          <a:ln w="25400">
-            <a:solidFill>
-              <a:srgbClr val="2E7D4F"/>
-            </a:solidFill>
-            <a:prstDash val="solid"/>
-          </a:ln>
-        </p:spPr>
-      </p:sp>
-      <p:sp>
-        <p:nvSpPr>
-          <p:cNvPr id="11" name="Text 9"/>
-          <p:cNvSpPr txBox="1"/>
-          <p:nvPr/>
-        </p:nvSpPr>
-        <p:spPr>
-          <a:xfrm>
-            <a:off x="813816" y="2798064"/>
-            <a:ext cx="420624" cy="420624"/>
-          </a:xfrm>
-          <a:prstGeom prst="roundRect">
-            <a:avLst>
-              <a:gd name="adj" fmla="val 50000"/>
-            </a:avLst>
-          </a:prstGeom>
-          <a:solidFill>
-            <a:srgbClr val="2E7D4F"/>
-          </a:solidFill>
-          <a:ln/>
-        </p:spPr>
-        <p:txBody>
-          <a:bodyPr wrap="square" lIns="0" tIns="0" rIns="0" bIns="0" rtlCol="0" anchor="ctr"/>
-          <a:lstStyle/>
-          <a:p>
-            <a:pPr algn="ctr" indent="0" marL="0">
-              <a:lnSpc>
-                <a:spcPct val="100000"/>
-              </a:lnSpc>
-              <a:buNone/>
-            </a:pPr>
-            <a:r>
-              <a:rPr lang="en-US" sz="1600" b="1" dirty="0">
-                <a:solidFill>
-                  <a:srgbClr val="FFFFFF"/>
-                </a:solidFill>
-                <a:latin typeface="Calibri" pitchFamily="34" charset="0"/>
-                <a:ea typeface="Calibri" pitchFamily="34" charset="-122"/>
-                <a:cs typeface="Calibri" pitchFamily="34" charset="-120"/>
-              </a:rPr>
-              <a:t>c</a:t>
-            </a:r>
-            <a:endParaRPr lang="en-US" sz="1600" dirty="0"/>
-          </a:p>
-        </p:txBody>
-      </p:sp>
-      <p:sp>
-        <p:nvSpPr>
-          <p:cNvPr id="12" name="Text 10"/>
-          <p:cNvSpPr txBox="1"/>
-          <p:nvPr/>
-        </p:nvSpPr>
-        <p:spPr>
-          <a:xfrm>
-            <a:off x="1344168" y="2670048"/>
-            <a:ext cx="3044952" cy="676656"/>
-          </a:xfrm>
-          <a:prstGeom prst="rect">
-            <a:avLst/>
-          </a:prstGeom>
-          <a:noFill/>
-          <a:ln/>
-        </p:spPr>
-        <p:txBody>
-          <a:bodyPr wrap="square" lIns="25400" tIns="25400" rIns="25400" bIns="25400" rtlCol="0" anchor="ctr"/>
-          <a:lstStyle/>
-          <a:p>
-            <a:pPr algn="l" indent="0" marL="0">
-              <a:lnSpc>
-                <a:spcPct val="100000"/>
-              </a:lnSpc>
-              <a:buNone/>
-            </a:pPr>
-            <a:r>
-              <a:rPr lang="en-US" sz="1400" b="1" dirty="0">
-                <a:solidFill>
-                  <a:srgbClr val="1F2A37"/>
-                </a:solidFill>
-                <a:latin typeface="Calibri" pitchFamily="34" charset="0"/>
-                <a:ea typeface="Calibri" pitchFamily="34" charset="-122"/>
-                <a:cs typeface="Calibri" pitchFamily="34" charset="-120"/>
-              </a:rPr>
-              <a:t>Legal-racional</a:t>
-            </a:r>
-            <a:endParaRPr lang="en-US" sz="1400" dirty="0"/>
-          </a:p>
-        </p:txBody>
-      </p:sp>
-      <p:sp>
-        <p:nvSpPr>
-          <p:cNvPr id="13" name="Shape 11"/>
-          <p:cNvSpPr/>
-          <p:nvPr/>
-        </p:nvSpPr>
-        <p:spPr>
-          <a:xfrm>
-            <a:off x="4663440" y="2633472"/>
-            <a:ext cx="3794760" cy="749808"/>
-          </a:xfrm>
-          <a:prstGeom prst="roundRect">
-            <a:avLst>
-              <a:gd name="adj" fmla="val 9756"/>
+              <a:gd name="adj" fmla="val 8000"/>
             </a:avLst>
           </a:prstGeom>
           <a:solidFill>
@@ -26214,13 +25963,13 @@
       </p:sp>
       <p:sp>
         <p:nvSpPr>
-          <p:cNvPr id="14" name="Text 12"/>
+          <p:cNvPr id="11" name="Text 9"/>
           <p:cNvSpPr txBox="1"/>
           <p:nvPr/>
         </p:nvSpPr>
         <p:spPr>
           <a:xfrm>
-            <a:off x="4791456" y="2798064"/>
+            <a:off x="813816" y="3044952"/>
             <a:ext cx="420624" cy="420624"/>
           </a:xfrm>
           <a:prstGeom prst="roundRect">
@@ -26229,7 +25978,7 @@
             </a:avLst>
           </a:prstGeom>
           <a:solidFill>
-            <a:srgbClr val="9AA3AB"/>
+            <a:srgbClr val="13294B"/>
           </a:solidFill>
           <a:ln/>
         </p:spPr>
@@ -26252,6 +26001,121 @@
                 <a:ea typeface="Calibri" pitchFamily="34" charset="-122"/>
                 <a:cs typeface="Calibri" pitchFamily="34" charset="-120"/>
               </a:rPr>
+              <a:t>c</a:t>
+            </a:r>
+            <a:endParaRPr lang="en-US" sz="1600" dirty="0"/>
+          </a:p>
+        </p:txBody>
+      </p:sp>
+      <p:sp>
+        <p:nvSpPr>
+          <p:cNvPr id="12" name="Text 10"/>
+          <p:cNvSpPr txBox="1"/>
+          <p:nvPr/>
+        </p:nvSpPr>
+        <p:spPr>
+          <a:xfrm>
+            <a:off x="1344168" y="2834640"/>
+            <a:ext cx="3044952" cy="841248"/>
+          </a:xfrm>
+          <a:prstGeom prst="rect">
+            <a:avLst/>
+          </a:prstGeom>
+          <a:noFill/>
+          <a:ln/>
+        </p:spPr>
+        <p:txBody>
+          <a:bodyPr wrap="square" lIns="25400" tIns="25400" rIns="25400" bIns="25400" rtlCol="0" anchor="ctr"/>
+          <a:lstStyle/>
+          <a:p>
+            <a:pPr algn="l" indent="0" marL="0">
+              <a:lnSpc>
+                <a:spcPct val="100000"/>
+              </a:lnSpc>
+              <a:buNone/>
+            </a:pPr>
+            <a:r>
+              <a:rPr lang="en-US" sz="1400" dirty="0">
+                <a:solidFill>
+                  <a:srgbClr val="1F2A37"/>
+                </a:solidFill>
+                <a:latin typeface="Calibri" pitchFamily="34" charset="0"/>
+                <a:ea typeface="Calibri" pitchFamily="34" charset="-122"/>
+                <a:cs typeface="Calibri" pitchFamily="34" charset="-120"/>
+              </a:rPr>
+              <a:t>Legal-racional</a:t>
+            </a:r>
+            <a:endParaRPr lang="en-US" sz="1400" dirty="0"/>
+          </a:p>
+        </p:txBody>
+      </p:sp>
+      <p:sp>
+        <p:nvSpPr>
+          <p:cNvPr id="13" name="Shape 11"/>
+          <p:cNvSpPr/>
+          <p:nvPr/>
+        </p:nvSpPr>
+        <p:spPr>
+          <a:xfrm>
+            <a:off x="4663440" y="2798064"/>
+            <a:ext cx="3794760" cy="914400"/>
+          </a:xfrm>
+          <a:prstGeom prst="roundRect">
+            <a:avLst>
+              <a:gd name="adj" fmla="val 8000"/>
+            </a:avLst>
+          </a:prstGeom>
+          <a:solidFill>
+            <a:srgbClr val="FFFFFF"/>
+          </a:solidFill>
+          <a:ln w="12700">
+            <a:solidFill>
+              <a:srgbClr val="DCD5C1"/>
+            </a:solidFill>
+            <a:prstDash val="solid"/>
+          </a:ln>
+        </p:spPr>
+      </p:sp>
+      <p:sp>
+        <p:nvSpPr>
+          <p:cNvPr id="14" name="Text 12"/>
+          <p:cNvSpPr txBox="1"/>
+          <p:nvPr/>
+        </p:nvSpPr>
+        <p:spPr>
+          <a:xfrm>
+            <a:off x="4791456" y="3044952"/>
+            <a:ext cx="420624" cy="420624"/>
+          </a:xfrm>
+          <a:prstGeom prst="roundRect">
+            <a:avLst>
+              <a:gd name="adj" fmla="val 50000"/>
+            </a:avLst>
+          </a:prstGeom>
+          <a:solidFill>
+            <a:srgbClr val="13294B"/>
+          </a:solidFill>
+          <a:ln/>
+        </p:spPr>
+        <p:txBody>
+          <a:bodyPr wrap="square" lIns="0" tIns="0" rIns="0" bIns="0" rtlCol="0" anchor="ctr"/>
+          <a:lstStyle/>
+          <a:p>
+            <a:pPr algn="ctr" indent="0" marL="0">
+              <a:lnSpc>
+                <a:spcPct val="100000"/>
+              </a:lnSpc>
+              <a:buNone/>
+            </a:pPr>
+            <a:r>
+              <a:rPr lang="en-US" sz="1600" b="1" dirty="0">
+                <a:solidFill>
+                  <a:srgbClr val="FFFFFF"/>
+                </a:solidFill>
+                <a:latin typeface="Calibri" pitchFamily="34" charset="0"/>
+                <a:ea typeface="Calibri" pitchFamily="34" charset="-122"/>
+                <a:cs typeface="Calibri" pitchFamily="34" charset="-120"/>
+              </a:rPr>
               <a:t>d</a:t>
             </a:r>
             <a:endParaRPr lang="en-US" sz="1600" dirty="0"/>
@@ -26266,8 +26130,8 @@
         </p:nvSpPr>
         <p:spPr>
           <a:xfrm>
-            <a:off x="5321808" y="2670048"/>
-            <a:ext cx="3044952" cy="676656"/>
+            <a:off x="5321808" y="2834640"/>
+            <a:ext cx="3044952" cy="841248"/>
           </a:xfrm>
           <a:prstGeom prst="rect">
             <a:avLst/>
@@ -26288,7 +26152,7 @@
             <a:r>
               <a:rPr lang="en-US" sz="1400" dirty="0">
                 <a:solidFill>
-                  <a:srgbClr val="5B6770"/>
+                  <a:srgbClr val="1F2A37"/>
                 </a:solidFill>
                 <a:latin typeface="Calibri" pitchFamily="34" charset="0"/>
                 <a:ea typeface="Calibri" pitchFamily="34" charset="-122"/>
@@ -26303,69 +26167,6 @@
       <p:sp>
         <p:nvSpPr>
           <p:cNvPr id="16" name="Text 14"/>
-          <p:cNvSpPr txBox="1"/>
-          <p:nvPr/>
-        </p:nvSpPr>
-        <p:spPr>
-          <a:xfrm>
-            <a:off x="685800" y="3566160"/>
-            <a:ext cx="7772400" cy="841248"/>
-          </a:xfrm>
-          <a:prstGeom prst="roundRect">
-            <a:avLst>
-              <a:gd name="adj" fmla="val 8696"/>
-            </a:avLst>
-          </a:prstGeom>
-          <a:solidFill>
-            <a:srgbClr val="E6F2F0"/>
-          </a:solidFill>
-          <a:ln/>
-        </p:spPr>
-        <p:txBody>
-          <a:bodyPr wrap="square" lIns="114300" tIns="114300" rIns="114300" bIns="114300" rtlCol="0" anchor="ctr"/>
-          <a:lstStyle/>
-          <a:p>
-            <a:pPr algn="l" indent="0" marL="0">
-              <a:lnSpc>
-                <a:spcPct val="100000"/>
-              </a:lnSpc>
-              <a:buNone/>
-            </a:pPr>
-            <a:r>
-              <a:rPr lang="en-US" sz="1350" b="1" dirty="0">
-                <a:solidFill>
-                  <a:srgbClr val="2E7D4F"/>
-                </a:solidFill>
-                <a:latin typeface="Calibri" pitchFamily="34" charset="0"/>
-                <a:ea typeface="Calibri" pitchFamily="34" charset="-122"/>
-                <a:cs typeface="Calibri" pitchFamily="34" charset="-120"/>
-              </a:rPr>
-              <a:t>Resposta: c) </a:t>
-            </a:r>
-            <a:pPr algn="l" indent="0" marL="0">
-              <a:lnSpc>
-                <a:spcPct val="100000"/>
-              </a:lnSpc>
-              <a:buNone/>
-            </a:pPr>
-            <a:r>
-              <a:rPr lang="en-US" sz="1350" dirty="0">
-                <a:solidFill>
-                  <a:srgbClr val="1F2A37"/>
-                </a:solidFill>
-                <a:latin typeface="Calibri" pitchFamily="34" charset="0"/>
-                <a:ea typeface="Calibri" pitchFamily="34" charset="-122"/>
-                <a:cs typeface="Calibri" pitchFamily="34" charset="-120"/>
-              </a:rPr>
-              <a:t>A dominação legal-racional baseia-se na obediência a normas impessoais: é a base da burocracia moderna e do art. 37 da Constituição.</a:t>
-            </a:r>
-            <a:endParaRPr lang="en-US" sz="1350" dirty="0"/>
-          </a:p>
-        </p:txBody>
-      </p:sp>
-      <p:sp>
-        <p:nvSpPr>
-          <p:cNvPr id="17" name="Text 15"/>
           <p:cNvSpPr txBox="1"/>
           <p:nvPr/>
         </p:nvSpPr>
@@ -26480,7 +26281,7 @@
                 <a:ea typeface="Calibri" pitchFamily="34" charset="-122"/>
                 <a:cs typeface="Calibri" pitchFamily="34" charset="-120"/>
               </a:rPr>
-              <a:t>QUIZ DA UNIDADE 1 · PERGUNTA 3 DE 5</a:t>
+              <a:t>QUIZ DA UNIDADE 1 · PERGUNTA 2 DE 5 · RESPOSTA</a:t>
             </a:r>
             <a:endParaRPr lang="en-US" sz="1250" dirty="0"/>
           </a:p>
@@ -26522,7 +26323,7 @@
                 <a:ea typeface="Calibri" pitchFamily="34" charset="-122"/>
                 <a:cs typeface="Calibri" pitchFamily="34" charset="-120"/>
               </a:rPr>
-              <a:t>A iluminação das ruas de uma cidade é um exemplo de bem:</a:t>
+              <a:t>Concursos públicos, leis e impessoalidade na administração expressam, segundo Weber, a dominação:</a:t>
             </a:r>
             <a:endParaRPr lang="en-US" sz="1900" dirty="0"/>
           </a:p>
@@ -26537,11 +26338,11 @@
         <p:spPr>
           <a:xfrm>
             <a:off x="685800" y="1737360"/>
-            <a:ext cx="3794760" cy="914400"/>
+            <a:ext cx="3794760" cy="749808"/>
           </a:xfrm>
           <a:prstGeom prst="roundRect">
             <a:avLst>
-              <a:gd name="adj" fmla="val 8000"/>
+              <a:gd name="adj" fmla="val 9756"/>
             </a:avLst>
           </a:prstGeom>
           <a:solidFill>
@@ -26563,7 +26364,7 @@
         </p:nvSpPr>
         <p:spPr>
           <a:xfrm>
-            <a:off x="813816" y="1984248"/>
+            <a:off x="813816" y="1901952"/>
             <a:ext cx="420624" cy="420624"/>
           </a:xfrm>
           <a:prstGeom prst="roundRect">
@@ -26572,7 +26373,7 @@
             </a:avLst>
           </a:prstGeom>
           <a:solidFill>
-            <a:srgbClr val="13294B"/>
+            <a:srgbClr val="9AA3AB"/>
           </a:solidFill>
           <a:ln/>
         </p:spPr>
@@ -26610,7 +26411,7 @@
         <p:spPr>
           <a:xfrm>
             <a:off x="1344168" y="1773936"/>
-            <a:ext cx="3044952" cy="841248"/>
+            <a:ext cx="3044952" cy="676656"/>
           </a:xfrm>
           <a:prstGeom prst="rect">
             <a:avLst/>
@@ -26631,13 +26432,13 @@
             <a:r>
               <a:rPr lang="en-US" sz="1400" dirty="0">
                 <a:solidFill>
-                  <a:srgbClr val="1F2A37"/>
-                </a:solidFill>
-                <a:latin typeface="Calibri" pitchFamily="34" charset="0"/>
-                <a:ea typeface="Calibri" pitchFamily="34" charset="-122"/>
-                <a:cs typeface="Calibri" pitchFamily="34" charset="-120"/>
-              </a:rPr>
-              <a:t>Privado</a:t>
+                  <a:srgbClr val="5B6770"/>
+                </a:solidFill>
+                <a:latin typeface="Calibri" pitchFamily="34" charset="0"/>
+                <a:ea typeface="Calibri" pitchFamily="34" charset="-122"/>
+                <a:cs typeface="Calibri" pitchFamily="34" charset="-120"/>
+              </a:rPr>
+              <a:t>Tradicional</a:t>
             </a:r>
             <a:endParaRPr lang="en-US" sz="1400" dirty="0"/>
           </a:p>
@@ -26652,11 +26453,11 @@
         <p:spPr>
           <a:xfrm>
             <a:off x="4663440" y="1737360"/>
-            <a:ext cx="3794760" cy="914400"/>
+            <a:ext cx="3794760" cy="749808"/>
           </a:xfrm>
           <a:prstGeom prst="roundRect">
             <a:avLst>
-              <a:gd name="adj" fmla="val 8000"/>
+              <a:gd name="adj" fmla="val 9756"/>
             </a:avLst>
           </a:prstGeom>
           <a:solidFill>
@@ -26678,7 +26479,7 @@
         </p:nvSpPr>
         <p:spPr>
           <a:xfrm>
-            <a:off x="4791456" y="1984248"/>
+            <a:off x="4791456" y="1901952"/>
             <a:ext cx="420624" cy="420624"/>
           </a:xfrm>
           <a:prstGeom prst="roundRect">
@@ -26687,7 +26488,7 @@
             </a:avLst>
           </a:prstGeom>
           <a:solidFill>
-            <a:srgbClr val="13294B"/>
+            <a:srgbClr val="9AA3AB"/>
           </a:solidFill>
           <a:ln/>
         </p:spPr>
@@ -26725,7 +26526,7 @@
         <p:spPr>
           <a:xfrm>
             <a:off x="5321808" y="1773936"/>
-            <a:ext cx="3044952" cy="841248"/>
+            <a:ext cx="3044952" cy="676656"/>
           </a:xfrm>
           <a:prstGeom prst="rect">
             <a:avLst/>
@@ -26746,13 +26547,13 @@
             <a:r>
               <a:rPr lang="en-US" sz="1400" dirty="0">
                 <a:solidFill>
-                  <a:srgbClr val="1F2A37"/>
-                </a:solidFill>
-                <a:latin typeface="Calibri" pitchFamily="34" charset="0"/>
-                <a:ea typeface="Calibri" pitchFamily="34" charset="-122"/>
-                <a:cs typeface="Calibri" pitchFamily="34" charset="-120"/>
-              </a:rPr>
-              <a:t>De clube</a:t>
+                  <a:srgbClr val="5B6770"/>
+                </a:solidFill>
+                <a:latin typeface="Calibri" pitchFamily="34" charset="0"/>
+                <a:ea typeface="Calibri" pitchFamily="34" charset="-122"/>
+                <a:cs typeface="Calibri" pitchFamily="34" charset="-120"/>
+              </a:rPr>
+              <a:t>Carismática</a:t>
             </a:r>
             <a:endParaRPr lang="en-US" sz="1400" dirty="0"/>
           </a:p>
@@ -26766,12 +26567,127 @@
         </p:nvSpPr>
         <p:spPr>
           <a:xfrm>
-            <a:off x="685800" y="2798064"/>
-            <a:ext cx="3794760" cy="914400"/>
+            <a:off x="685800" y="2633472"/>
+            <a:ext cx="3794760" cy="749808"/>
           </a:xfrm>
           <a:prstGeom prst="roundRect">
             <a:avLst>
-              <a:gd name="adj" fmla="val 8000"/>
+              <a:gd name="adj" fmla="val 9756"/>
+            </a:avLst>
+          </a:prstGeom>
+          <a:solidFill>
+            <a:srgbClr val="E3F2E8"/>
+          </a:solidFill>
+          <a:ln w="25400">
+            <a:solidFill>
+              <a:srgbClr val="2E7D4F"/>
+            </a:solidFill>
+            <a:prstDash val="solid"/>
+          </a:ln>
+        </p:spPr>
+      </p:sp>
+      <p:sp>
+        <p:nvSpPr>
+          <p:cNvPr id="11" name="Text 9"/>
+          <p:cNvSpPr txBox="1"/>
+          <p:nvPr/>
+        </p:nvSpPr>
+        <p:spPr>
+          <a:xfrm>
+            <a:off x="813816" y="2798064"/>
+            <a:ext cx="420624" cy="420624"/>
+          </a:xfrm>
+          <a:prstGeom prst="roundRect">
+            <a:avLst>
+              <a:gd name="adj" fmla="val 50000"/>
+            </a:avLst>
+          </a:prstGeom>
+          <a:solidFill>
+            <a:srgbClr val="2E7D4F"/>
+          </a:solidFill>
+          <a:ln/>
+        </p:spPr>
+        <p:txBody>
+          <a:bodyPr wrap="square" lIns="0" tIns="0" rIns="0" bIns="0" rtlCol="0" anchor="ctr"/>
+          <a:lstStyle/>
+          <a:p>
+            <a:pPr algn="ctr" indent="0" marL="0">
+              <a:lnSpc>
+                <a:spcPct val="100000"/>
+              </a:lnSpc>
+              <a:buNone/>
+            </a:pPr>
+            <a:r>
+              <a:rPr lang="en-US" sz="1600" b="1" dirty="0">
+                <a:solidFill>
+                  <a:srgbClr val="FFFFFF"/>
+                </a:solidFill>
+                <a:latin typeface="Calibri" pitchFamily="34" charset="0"/>
+                <a:ea typeface="Calibri" pitchFamily="34" charset="-122"/>
+                <a:cs typeface="Calibri" pitchFamily="34" charset="-120"/>
+              </a:rPr>
+              <a:t>c</a:t>
+            </a:r>
+            <a:endParaRPr lang="en-US" sz="1600" dirty="0"/>
+          </a:p>
+        </p:txBody>
+      </p:sp>
+      <p:sp>
+        <p:nvSpPr>
+          <p:cNvPr id="12" name="Text 10"/>
+          <p:cNvSpPr txBox="1"/>
+          <p:nvPr/>
+        </p:nvSpPr>
+        <p:spPr>
+          <a:xfrm>
+            <a:off x="1344168" y="2670048"/>
+            <a:ext cx="3044952" cy="676656"/>
+          </a:xfrm>
+          <a:prstGeom prst="rect">
+            <a:avLst/>
+          </a:prstGeom>
+          <a:noFill/>
+          <a:ln/>
+        </p:spPr>
+        <p:txBody>
+          <a:bodyPr wrap="square" lIns="25400" tIns="25400" rIns="25400" bIns="25400" rtlCol="0" anchor="ctr"/>
+          <a:lstStyle/>
+          <a:p>
+            <a:pPr algn="l" indent="0" marL="0">
+              <a:lnSpc>
+                <a:spcPct val="100000"/>
+              </a:lnSpc>
+              <a:buNone/>
+            </a:pPr>
+            <a:r>
+              <a:rPr lang="en-US" sz="1400" b="1" dirty="0">
+                <a:solidFill>
+                  <a:srgbClr val="1F2A37"/>
+                </a:solidFill>
+                <a:latin typeface="Calibri" pitchFamily="34" charset="0"/>
+                <a:ea typeface="Calibri" pitchFamily="34" charset="-122"/>
+                <a:cs typeface="Calibri" pitchFamily="34" charset="-120"/>
+              </a:rPr>
+              <a:t>Legal-racional</a:t>
+            </a:r>
+            <a:endParaRPr lang="en-US" sz="1400" dirty="0"/>
+          </a:p>
+        </p:txBody>
+      </p:sp>
+      <p:sp>
+        <p:nvSpPr>
+          <p:cNvPr id="13" name="Shape 11"/>
+          <p:cNvSpPr/>
+          <p:nvPr/>
+        </p:nvSpPr>
+        <p:spPr>
+          <a:xfrm>
+            <a:off x="4663440" y="2633472"/>
+            <a:ext cx="3794760" cy="749808"/>
+          </a:xfrm>
+          <a:prstGeom prst="roundRect">
+            <a:avLst>
+              <a:gd name="adj" fmla="val 9756"/>
             </a:avLst>
           </a:prstGeom>
           <a:solidFill>
@@ -26787,13 +26703,13 @@
       </p:sp>
       <p:sp>
         <p:nvSpPr>
-          <p:cNvPr id="11" name="Text 9"/>
+          <p:cNvPr id="14" name="Text 12"/>
           <p:cNvSpPr txBox="1"/>
           <p:nvPr/>
         </p:nvSpPr>
         <p:spPr>
           <a:xfrm>
-            <a:off x="813816" y="3044952"/>
+            <a:off x="4791456" y="2798064"/>
             <a:ext cx="420624" cy="420624"/>
           </a:xfrm>
           <a:prstGeom prst="roundRect">
@@ -26802,7 +26718,7 @@
             </a:avLst>
           </a:prstGeom>
           <a:solidFill>
-            <a:srgbClr val="13294B"/>
+            <a:srgbClr val="9AA3AB"/>
           </a:solidFill>
           <a:ln/>
         </p:spPr>
@@ -26825,7 +26741,7 @@
                 <a:ea typeface="Calibri" pitchFamily="34" charset="-122"/>
                 <a:cs typeface="Calibri" pitchFamily="34" charset="-120"/>
               </a:rPr>
-              <a:t>c</a:t>
+              <a:t>d</a:t>
             </a:r>
             <a:endParaRPr lang="en-US" sz="1600" dirty="0"/>
           </a:p>
@@ -26833,14 +26749,14 @@
       </p:sp>
       <p:sp>
         <p:nvSpPr>
-          <p:cNvPr id="12" name="Text 10"/>
+          <p:cNvPr id="15" name="Text 13"/>
           <p:cNvSpPr txBox="1"/>
           <p:nvPr/>
         </p:nvSpPr>
         <p:spPr>
           <a:xfrm>
-            <a:off x="1344168" y="2834640"/>
-            <a:ext cx="3044952" cy="841248"/>
+            <a:off x="5321808" y="2670048"/>
+            <a:ext cx="3044952" cy="676656"/>
           </a:xfrm>
           <a:prstGeom prst="rect">
             <a:avLst/>
@@ -26861,13 +26777,13 @@
             <a:r>
               <a:rPr lang="en-US" sz="1400" dirty="0">
                 <a:solidFill>
-                  <a:srgbClr val="1F2A37"/>
-                </a:solidFill>
-                <a:latin typeface="Calibri" pitchFamily="34" charset="0"/>
-                <a:ea typeface="Calibri" pitchFamily="34" charset="-122"/>
-                <a:cs typeface="Calibri" pitchFamily="34" charset="-120"/>
-              </a:rPr>
-              <a:t>Comum</a:t>
+                  <a:srgbClr val="5B6770"/>
+                </a:solidFill>
+                <a:latin typeface="Calibri" pitchFamily="34" charset="0"/>
+                <a:ea typeface="Calibri" pitchFamily="34" charset="-122"/>
+                <a:cs typeface="Calibri" pitchFamily="34" charset="-120"/>
+              </a:rPr>
+              <a:t>Patrimonial</a:t>
             </a:r>
             <a:endParaRPr lang="en-US" sz="1400" dirty="0"/>
           </a:p>
@@ -26875,96 +26791,27 @@
       </p:sp>
       <p:sp>
         <p:nvSpPr>
-          <p:cNvPr id="13" name="Shape 11"/>
-          <p:cNvSpPr/>
-          <p:nvPr/>
-        </p:nvSpPr>
-        <p:spPr>
-          <a:xfrm>
-            <a:off x="4663440" y="2798064"/>
-            <a:ext cx="3794760" cy="914400"/>
+          <p:cNvPr id="16" name="Text 14"/>
+          <p:cNvSpPr txBox="1"/>
+          <p:nvPr/>
+        </p:nvSpPr>
+        <p:spPr>
+          <a:xfrm>
+            <a:off x="685800" y="3566160"/>
+            <a:ext cx="7772400" cy="841248"/>
           </a:xfrm>
           <a:prstGeom prst="roundRect">
             <a:avLst>
-              <a:gd name="adj" fmla="val 8000"/>
+              <a:gd name="adj" fmla="val 8696"/>
             </a:avLst>
           </a:prstGeom>
           <a:solidFill>
-            <a:srgbClr val="FFFFFF"/>
-          </a:solidFill>
-          <a:ln w="12700">
-            <a:solidFill>
-              <a:srgbClr val="DCD5C1"/>
-            </a:solidFill>
-            <a:prstDash val="solid"/>
-          </a:ln>
-        </p:spPr>
-      </p:sp>
-      <p:sp>
-        <p:nvSpPr>
-          <p:cNvPr id="14" name="Text 12"/>
-          <p:cNvSpPr txBox="1"/>
-          <p:nvPr/>
-        </p:nvSpPr>
-        <p:spPr>
-          <a:xfrm>
-            <a:off x="4791456" y="3044952"/>
-            <a:ext cx="420624" cy="420624"/>
-          </a:xfrm>
-          <a:prstGeom prst="roundRect">
-            <a:avLst>
-              <a:gd name="adj" fmla="val 50000"/>
-            </a:avLst>
-          </a:prstGeom>
-          <a:solidFill>
-            <a:srgbClr val="13294B"/>
+            <a:srgbClr val="E6F2F0"/>
           </a:solidFill>
           <a:ln/>
         </p:spPr>
         <p:txBody>
-          <a:bodyPr wrap="square" lIns="0" tIns="0" rIns="0" bIns="0" rtlCol="0" anchor="ctr"/>
-          <a:lstStyle/>
-          <a:p>
-            <a:pPr algn="ctr" indent="0" marL="0">
-              <a:lnSpc>
-                <a:spcPct val="100000"/>
-              </a:lnSpc>
-              <a:buNone/>
-            </a:pPr>
-            <a:r>
-              <a:rPr lang="en-US" sz="1600" b="1" dirty="0">
-                <a:solidFill>
-                  <a:srgbClr val="FFFFFF"/>
-                </a:solidFill>
-                <a:latin typeface="Calibri" pitchFamily="34" charset="0"/>
-                <a:ea typeface="Calibri" pitchFamily="34" charset="-122"/>
-                <a:cs typeface="Calibri" pitchFamily="34" charset="-120"/>
-              </a:rPr>
-              <a:t>d</a:t>
-            </a:r>
-            <a:endParaRPr lang="en-US" sz="1600" dirty="0"/>
-          </a:p>
-        </p:txBody>
-      </p:sp>
-      <p:sp>
-        <p:nvSpPr>
-          <p:cNvPr id="15" name="Text 13"/>
-          <p:cNvSpPr txBox="1"/>
-          <p:nvPr/>
-        </p:nvSpPr>
-        <p:spPr>
-          <a:xfrm>
-            <a:off x="5321808" y="2834640"/>
-            <a:ext cx="3044952" cy="841248"/>
-          </a:xfrm>
-          <a:prstGeom prst="rect">
-            <a:avLst/>
-          </a:prstGeom>
-          <a:noFill/>
-          <a:ln/>
-        </p:spPr>
-        <p:txBody>
-          <a:bodyPr wrap="square" lIns="25400" tIns="25400" rIns="25400" bIns="25400" rtlCol="0" anchor="ctr"/>
+          <a:bodyPr wrap="square" lIns="114300" tIns="114300" rIns="114300" bIns="114300" rtlCol="0" anchor="ctr"/>
           <a:lstStyle/>
           <a:p>
             <a:pPr algn="l" indent="0" marL="0">
@@ -26974,7 +26821,24 @@
               <a:buNone/>
             </a:pPr>
             <a:r>
-              <a:rPr lang="en-US" sz="1400" dirty="0">
+              <a:rPr lang="en-US" sz="1350" b="1" dirty="0">
+                <a:solidFill>
+                  <a:srgbClr val="2E7D4F"/>
+                </a:solidFill>
+                <a:latin typeface="Calibri" pitchFamily="34" charset="0"/>
+                <a:ea typeface="Calibri" pitchFamily="34" charset="-122"/>
+                <a:cs typeface="Calibri" pitchFamily="34" charset="-120"/>
+              </a:rPr>
+              <a:t>Resposta: c) </a:t>
+            </a:r>
+            <a:pPr algn="l" indent="0" marL="0">
+              <a:lnSpc>
+                <a:spcPct val="100000"/>
+              </a:lnSpc>
+              <a:buNone/>
+            </a:pPr>
+            <a:r>
+              <a:rPr lang="en-US" sz="1350" dirty="0">
                 <a:solidFill>
                   <a:srgbClr val="1F2A37"/>
                 </a:solidFill>
@@ -26982,15 +26846,15 @@
                 <a:ea typeface="Calibri" pitchFamily="34" charset="-122"/>
                 <a:cs typeface="Calibri" pitchFamily="34" charset="-120"/>
               </a:rPr>
-              <a:t>Público</a:t>
-            </a:r>
-            <a:endParaRPr lang="en-US" sz="1400" dirty="0"/>
-          </a:p>
-        </p:txBody>
-      </p:sp>
-      <p:sp>
-        <p:nvSpPr>
-          <p:cNvPr id="16" name="Text 14"/>
+              <a:t>A dominação legal-racional baseia-se na obediência a normas impessoais: é a base da burocracia moderna e do art. 37 da Constituição.</a:t>
+            </a:r>
+            <a:endParaRPr lang="en-US" sz="1350" dirty="0"/>
+          </a:p>
+        </p:txBody>
+      </p:sp>
+      <p:sp>
+        <p:nvSpPr>
+          <p:cNvPr id="17" name="Text 15"/>
           <p:cNvSpPr txBox="1"/>
           <p:nvPr/>
         </p:nvSpPr>
@@ -27105,7 +26969,7 @@
                 <a:ea typeface="Calibri" pitchFamily="34" charset="-122"/>
                 <a:cs typeface="Calibri" pitchFamily="34" charset="-120"/>
               </a:rPr>
-              <a:t>QUIZ DA UNIDADE 1 · PERGUNTA 3 DE 5 · RESPOSTA</a:t>
+              <a:t>QUIZ DA UNIDADE 1 · PERGUNTA 3 DE 5</a:t>
             </a:r>
             <a:endParaRPr lang="en-US" sz="1250" dirty="0"/>
           </a:p>
@@ -27162,11 +27026,11 @@
         <p:spPr>
           <a:xfrm>
             <a:off x="685800" y="1737360"/>
-            <a:ext cx="3794760" cy="749808"/>
+            <a:ext cx="3794760" cy="914400"/>
           </a:xfrm>
           <a:prstGeom prst="roundRect">
             <a:avLst>
-              <a:gd name="adj" fmla="val 9756"/>
+              <a:gd name="adj" fmla="val 8000"/>
             </a:avLst>
           </a:prstGeom>
           <a:solidFill>
@@ -27188,7 +27052,7 @@
         </p:nvSpPr>
         <p:spPr>
           <a:xfrm>
-            <a:off x="813816" y="1901952"/>
+            <a:off x="813816" y="1984248"/>
             <a:ext cx="420624" cy="420624"/>
           </a:xfrm>
           <a:prstGeom prst="roundRect">
@@ -27197,7 +27061,7 @@
             </a:avLst>
           </a:prstGeom>
           <a:solidFill>
-            <a:srgbClr val="9AA3AB"/>
+            <a:srgbClr val="13294B"/>
           </a:solidFill>
           <a:ln/>
         </p:spPr>
@@ -27235,7 +27099,7 @@
         <p:spPr>
           <a:xfrm>
             <a:off x="1344168" y="1773936"/>
-            <a:ext cx="3044952" cy="676656"/>
+            <a:ext cx="3044952" cy="841248"/>
           </a:xfrm>
           <a:prstGeom prst="rect">
             <a:avLst/>
@@ -27256,7 +27120,7 @@
             <a:r>
               <a:rPr lang="en-US" sz="1400" dirty="0">
                 <a:solidFill>
-                  <a:srgbClr val="5B6770"/>
+                  <a:srgbClr val="1F2A37"/>
                 </a:solidFill>
                 <a:latin typeface="Calibri" pitchFamily="34" charset="0"/>
                 <a:ea typeface="Calibri" pitchFamily="34" charset="-122"/>
@@ -27277,11 +27141,11 @@
         <p:spPr>
           <a:xfrm>
             <a:off x="4663440" y="1737360"/>
-            <a:ext cx="3794760" cy="749808"/>
+            <a:ext cx="3794760" cy="914400"/>
           </a:xfrm>
           <a:prstGeom prst="roundRect">
             <a:avLst>
-              <a:gd name="adj" fmla="val 9756"/>
+              <a:gd name="adj" fmla="val 8000"/>
             </a:avLst>
           </a:prstGeom>
           <a:solidFill>
@@ -27303,7 +27167,7 @@
         </p:nvSpPr>
         <p:spPr>
           <a:xfrm>
-            <a:off x="4791456" y="1901952"/>
+            <a:off x="4791456" y="1984248"/>
             <a:ext cx="420624" cy="420624"/>
           </a:xfrm>
           <a:prstGeom prst="roundRect">
@@ -27312,7 +27176,7 @@
             </a:avLst>
           </a:prstGeom>
           <a:solidFill>
-            <a:srgbClr val="9AA3AB"/>
+            <a:srgbClr val="13294B"/>
           </a:solidFill>
           <a:ln/>
         </p:spPr>
@@ -27350,7 +27214,7 @@
         <p:spPr>
           <a:xfrm>
             <a:off x="5321808" y="1773936"/>
-            <a:ext cx="3044952" cy="676656"/>
+            <a:ext cx="3044952" cy="841248"/>
           </a:xfrm>
           <a:prstGeom prst="rect">
             <a:avLst/>
@@ -27371,7 +27235,7 @@
             <a:r>
               <a:rPr lang="en-US" sz="1400" dirty="0">
                 <a:solidFill>
-                  <a:srgbClr val="5B6770"/>
+                  <a:srgbClr val="1F2A37"/>
                 </a:solidFill>
                 <a:latin typeface="Calibri" pitchFamily="34" charset="0"/>
                 <a:ea typeface="Calibri" pitchFamily="34" charset="-122"/>
@@ -27391,12 +27255,12 @@
         </p:nvSpPr>
         <p:spPr>
           <a:xfrm>
-            <a:off x="685800" y="2633472"/>
-            <a:ext cx="3794760" cy="749808"/>
+            <a:off x="685800" y="2798064"/>
+            <a:ext cx="3794760" cy="914400"/>
           </a:xfrm>
           <a:prstGeom prst="roundRect">
             <a:avLst>
-              <a:gd name="adj" fmla="val 9756"/>
+              <a:gd name="adj" fmla="val 8000"/>
             </a:avLst>
           </a:prstGeom>
           <a:solidFill>
@@ -27418,7 +27282,7 @@
         </p:nvSpPr>
         <p:spPr>
           <a:xfrm>
-            <a:off x="813816" y="2798064"/>
+            <a:off x="813816" y="3044952"/>
             <a:ext cx="420624" cy="420624"/>
           </a:xfrm>
           <a:prstGeom prst="roundRect">
@@ -27427,7 +27291,7 @@
             </a:avLst>
           </a:prstGeom>
           <a:solidFill>
-            <a:srgbClr val="9AA3AB"/>
+            <a:srgbClr val="13294B"/>
           </a:solidFill>
           <a:ln/>
         </p:spPr>
@@ -27464,8 +27328,8 @@
         </p:nvSpPr>
         <p:spPr>
           <a:xfrm>
-            <a:off x="1344168" y="2670048"/>
-            <a:ext cx="3044952" cy="676656"/>
+            <a:off x="1344168" y="2834640"/>
+            <a:ext cx="3044952" cy="841248"/>
           </a:xfrm>
           <a:prstGeom prst="rect">
             <a:avLst/>
@@ -27486,7 +27350,7 @@
             <a:r>
               <a:rPr lang="en-US" sz="1400" dirty="0">
                 <a:solidFill>
-                  <a:srgbClr val="5B6770"/>
+                  <a:srgbClr val="1F2A37"/>
                 </a:solidFill>
                 <a:latin typeface="Calibri" pitchFamily="34" charset="0"/>
                 <a:ea typeface="Calibri" pitchFamily="34" charset="-122"/>
@@ -27506,20 +27370,20 @@
         </p:nvSpPr>
         <p:spPr>
           <a:xfrm>
-            <a:off x="4663440" y="2633472"/>
-            <a:ext cx="3794760" cy="749808"/>
+            <a:off x="4663440" y="2798064"/>
+            <a:ext cx="3794760" cy="914400"/>
           </a:xfrm>
           <a:prstGeom prst="roundRect">
             <a:avLst>
-              <a:gd name="adj" fmla="val 9756"/>
+              <a:gd name="adj" fmla="val 8000"/>
             </a:avLst>
           </a:prstGeom>
           <a:solidFill>
-            <a:srgbClr val="E3F2E8"/>
+            <a:srgbClr val="FFFFFF"/>
           </a:solidFill>
-          <a:ln w="25400">
+          <a:ln w="12700">
             <a:solidFill>
-              <a:srgbClr val="2E7D4F"/>
+              <a:srgbClr val="DCD5C1"/>
             </a:solidFill>
             <a:prstDash val="solid"/>
           </a:ln>
@@ -27533,7 +27397,7 @@
         </p:nvSpPr>
         <p:spPr>
           <a:xfrm>
-            <a:off x="4791456" y="2798064"/>
+            <a:off x="4791456" y="3044952"/>
             <a:ext cx="420624" cy="420624"/>
           </a:xfrm>
           <a:prstGeom prst="roundRect">
@@ -27542,7 +27406,7 @@
             </a:avLst>
           </a:prstGeom>
           <a:solidFill>
-            <a:srgbClr val="2E7D4F"/>
+            <a:srgbClr val="13294B"/>
           </a:solidFill>
           <a:ln/>
         </p:spPr>
@@ -27579,8 +27443,8 @@
         </p:nvSpPr>
         <p:spPr>
           <a:xfrm>
-            <a:off x="5321808" y="2670048"/>
-            <a:ext cx="3044952" cy="676656"/>
+            <a:off x="5321808" y="2834640"/>
+            <a:ext cx="3044952" cy="841248"/>
           </a:xfrm>
           <a:prstGeom prst="rect">
             <a:avLst/>
@@ -27599,7 +27463,7 @@
               <a:buNone/>
             </a:pPr>
             <a:r>
-              <a:rPr lang="en-US" sz="1400" b="1" dirty="0">
+              <a:rPr lang="en-US" sz="1400" dirty="0">
                 <a:solidFill>
                   <a:srgbClr val="1F2A37"/>
                 </a:solidFill>
@@ -27616,69 +27480,6 @@
       <p:sp>
         <p:nvSpPr>
           <p:cNvPr id="16" name="Text 14"/>
-          <p:cNvSpPr txBox="1"/>
-          <p:nvPr/>
-        </p:nvSpPr>
-        <p:spPr>
-          <a:xfrm>
-            <a:off x="685800" y="3566160"/>
-            <a:ext cx="7772400" cy="841248"/>
-          </a:xfrm>
-          <a:prstGeom prst="roundRect">
-            <a:avLst>
-              <a:gd name="adj" fmla="val 8696"/>
-            </a:avLst>
-          </a:prstGeom>
-          <a:solidFill>
-            <a:srgbClr val="E6F2F0"/>
-          </a:solidFill>
-          <a:ln/>
-        </p:spPr>
-        <p:txBody>
-          <a:bodyPr wrap="square" lIns="114300" tIns="114300" rIns="114300" bIns="114300" rtlCol="0" anchor="ctr"/>
-          <a:lstStyle/>
-          <a:p>
-            <a:pPr algn="l" indent="0" marL="0">
-              <a:lnSpc>
-                <a:spcPct val="100000"/>
-              </a:lnSpc>
-              <a:buNone/>
-            </a:pPr>
-            <a:r>
-              <a:rPr lang="en-US" sz="1350" b="1" dirty="0">
-                <a:solidFill>
-                  <a:srgbClr val="2E7D4F"/>
-                </a:solidFill>
-                <a:latin typeface="Calibri" pitchFamily="34" charset="0"/>
-                <a:ea typeface="Calibri" pitchFamily="34" charset="-122"/>
-                <a:cs typeface="Calibri" pitchFamily="34" charset="-120"/>
-              </a:rPr>
-              <a:t>Resposta: d) </a:t>
-            </a:r>
-            <a:pPr algn="l" indent="0" marL="0">
-              <a:lnSpc>
-                <a:spcPct val="100000"/>
-              </a:lnSpc>
-              <a:buNone/>
-            </a:pPr>
-            <a:r>
-              <a:rPr lang="en-US" sz="1350" dirty="0">
-                <a:solidFill>
-                  <a:srgbClr val="1F2A37"/>
-                </a:solidFill>
-                <a:latin typeface="Calibri" pitchFamily="34" charset="0"/>
-                <a:ea typeface="Calibri" pitchFamily="34" charset="-122"/>
-                <a:cs typeface="Calibri" pitchFamily="34" charset="-120"/>
-              </a:rPr>
-              <a:t>É não rival (todos usam ao mesmo tempo) e não excludente (ninguém é impedido de usar). Por isso o mercado não a oferece sozinho.</a:t>
-            </a:r>
-            <a:endParaRPr lang="en-US" sz="1350" dirty="0"/>
-          </a:p>
-        </p:txBody>
-      </p:sp>
-      <p:sp>
-        <p:nvSpPr>
-          <p:cNvPr id="17" name="Text 15"/>
           <p:cNvSpPr txBox="1"/>
           <p:nvPr/>
         </p:nvSpPr>
@@ -28297,7 +28098,7 @@
                 <a:ea typeface="Calibri" pitchFamily="34" charset="-122"/>
                 <a:cs typeface="Calibri" pitchFamily="34" charset="-120"/>
               </a:rPr>
-              <a:t>QUIZ DA UNIDADE 1 · PERGUNTA 4 DE 5</a:t>
+              <a:t>QUIZ DA UNIDADE 1 · PERGUNTA 3 DE 5 · RESPOSTA</a:t>
             </a:r>
             <a:endParaRPr lang="en-US" sz="1250" dirty="0"/>
           </a:p>
@@ -28339,7 +28140,7 @@
                 <a:ea typeface="Calibri" pitchFamily="34" charset="-122"/>
                 <a:cs typeface="Calibri" pitchFamily="34" charset="-120"/>
               </a:rPr>
-              <a:t>A fumaça das queimadas que prejudica a saúde de moradores de outras cidades é:</a:t>
+              <a:t>A iluminação das ruas de uma cidade é um exemplo de bem:</a:t>
             </a:r>
             <a:endParaRPr lang="en-US" sz="1900" dirty="0"/>
           </a:p>
@@ -28354,11 +28155,11 @@
         <p:spPr>
           <a:xfrm>
             <a:off x="685800" y="1737360"/>
-            <a:ext cx="3794760" cy="914400"/>
+            <a:ext cx="3794760" cy="749808"/>
           </a:xfrm>
           <a:prstGeom prst="roundRect">
             <a:avLst>
-              <a:gd name="adj" fmla="val 8000"/>
+              <a:gd name="adj" fmla="val 9756"/>
             </a:avLst>
           </a:prstGeom>
           <a:solidFill>
@@ -28380,7 +28181,7 @@
         </p:nvSpPr>
         <p:spPr>
           <a:xfrm>
-            <a:off x="813816" y="1984248"/>
+            <a:off x="813816" y="1901952"/>
             <a:ext cx="420624" cy="420624"/>
           </a:xfrm>
           <a:prstGeom prst="roundRect">
@@ -28389,7 +28190,7 @@
             </a:avLst>
           </a:prstGeom>
           <a:solidFill>
-            <a:srgbClr val="13294B"/>
+            <a:srgbClr val="9AA3AB"/>
           </a:solidFill>
           <a:ln/>
         </p:spPr>
@@ -28427,7 +28228,7 @@
         <p:spPr>
           <a:xfrm>
             <a:off x="1344168" y="1773936"/>
-            <a:ext cx="3044952" cy="841248"/>
+            <a:ext cx="3044952" cy="676656"/>
           </a:xfrm>
           <a:prstGeom prst="rect">
             <a:avLst/>
@@ -28448,13 +28249,13 @@
             <a:r>
               <a:rPr lang="en-US" sz="1400" dirty="0">
                 <a:solidFill>
-                  <a:srgbClr val="1F2A37"/>
-                </a:solidFill>
-                <a:latin typeface="Calibri" pitchFamily="34" charset="0"/>
-                <a:ea typeface="Calibri" pitchFamily="34" charset="-122"/>
-                <a:cs typeface="Calibri" pitchFamily="34" charset="-120"/>
-              </a:rPr>
-              <a:t>Uma externalidade negativa</a:t>
+                  <a:srgbClr val="5B6770"/>
+                </a:solidFill>
+                <a:latin typeface="Calibri" pitchFamily="34" charset="0"/>
+                <a:ea typeface="Calibri" pitchFamily="34" charset="-122"/>
+                <a:cs typeface="Calibri" pitchFamily="34" charset="-120"/>
+              </a:rPr>
+              <a:t>Privado</a:t>
             </a:r>
             <a:endParaRPr lang="en-US" sz="1400" dirty="0"/>
           </a:p>
@@ -28469,11 +28270,11 @@
         <p:spPr>
           <a:xfrm>
             <a:off x="4663440" y="1737360"/>
-            <a:ext cx="3794760" cy="914400"/>
+            <a:ext cx="3794760" cy="749808"/>
           </a:xfrm>
           <a:prstGeom prst="roundRect">
             <a:avLst>
-              <a:gd name="adj" fmla="val 8000"/>
+              <a:gd name="adj" fmla="val 9756"/>
             </a:avLst>
           </a:prstGeom>
           <a:solidFill>
@@ -28495,7 +28296,7 @@
         </p:nvSpPr>
         <p:spPr>
           <a:xfrm>
-            <a:off x="4791456" y="1984248"/>
+            <a:off x="4791456" y="1901952"/>
             <a:ext cx="420624" cy="420624"/>
           </a:xfrm>
           <a:prstGeom prst="roundRect">
@@ -28504,7 +28305,7 @@
             </a:avLst>
           </a:prstGeom>
           <a:solidFill>
-            <a:srgbClr val="13294B"/>
+            <a:srgbClr val="9AA3AB"/>
           </a:solidFill>
           <a:ln/>
         </p:spPr>
@@ -28542,7 +28343,7 @@
         <p:spPr>
           <a:xfrm>
             <a:off x="5321808" y="1773936"/>
-            <a:ext cx="3044952" cy="841248"/>
+            <a:ext cx="3044952" cy="676656"/>
           </a:xfrm>
           <a:prstGeom prst="rect">
             <a:avLst/>
@@ -28563,13 +28364,13 @@
             <a:r>
               <a:rPr lang="en-US" sz="1400" dirty="0">
                 <a:solidFill>
-                  <a:srgbClr val="1F2A37"/>
-                </a:solidFill>
-                <a:latin typeface="Calibri" pitchFamily="34" charset="0"/>
-                <a:ea typeface="Calibri" pitchFamily="34" charset="-122"/>
-                <a:cs typeface="Calibri" pitchFamily="34" charset="-120"/>
-              </a:rPr>
-              <a:t>Um bem público</a:t>
+                  <a:srgbClr val="5B6770"/>
+                </a:solidFill>
+                <a:latin typeface="Calibri" pitchFamily="34" charset="0"/>
+                <a:ea typeface="Calibri" pitchFamily="34" charset="-122"/>
+                <a:cs typeface="Calibri" pitchFamily="34" charset="-120"/>
+              </a:rPr>
+              <a:t>De clube</a:t>
             </a:r>
             <a:endParaRPr lang="en-US" sz="1400" dirty="0"/>
           </a:p>
@@ -28583,12 +28384,12 @@
         </p:nvSpPr>
         <p:spPr>
           <a:xfrm>
-            <a:off x="685800" y="2798064"/>
-            <a:ext cx="3794760" cy="914400"/>
+            <a:off x="685800" y="2633472"/>
+            <a:ext cx="3794760" cy="749808"/>
           </a:xfrm>
           <a:prstGeom prst="roundRect">
             <a:avLst>
-              <a:gd name="adj" fmla="val 8000"/>
+              <a:gd name="adj" fmla="val 9756"/>
             </a:avLst>
           </a:prstGeom>
           <a:solidFill>
@@ -28610,7 +28411,7 @@
         </p:nvSpPr>
         <p:spPr>
           <a:xfrm>
-            <a:off x="813816" y="3044952"/>
+            <a:off x="813816" y="2798064"/>
             <a:ext cx="420624" cy="420624"/>
           </a:xfrm>
           <a:prstGeom prst="roundRect">
@@ -28619,7 +28420,7 @@
             </a:avLst>
           </a:prstGeom>
           <a:solidFill>
-            <a:srgbClr val="13294B"/>
+            <a:srgbClr val="9AA3AB"/>
           </a:solidFill>
           <a:ln/>
         </p:spPr>
@@ -28656,8 +28457,8 @@
         </p:nvSpPr>
         <p:spPr>
           <a:xfrm>
-            <a:off x="1344168" y="2834640"/>
-            <a:ext cx="3044952" cy="841248"/>
+            <a:off x="1344168" y="2670048"/>
+            <a:ext cx="3044952" cy="676656"/>
           </a:xfrm>
           <a:prstGeom prst="rect">
             <a:avLst/>
@@ -28678,13 +28479,13 @@
             <a:r>
               <a:rPr lang="en-US" sz="1400" dirty="0">
                 <a:solidFill>
-                  <a:srgbClr val="1F2A37"/>
-                </a:solidFill>
-                <a:latin typeface="Calibri" pitchFamily="34" charset="0"/>
-                <a:ea typeface="Calibri" pitchFamily="34" charset="-122"/>
-                <a:cs typeface="Calibri" pitchFamily="34" charset="-120"/>
-              </a:rPr>
-              <a:t>Assimetria de informação</a:t>
+                  <a:srgbClr val="5B6770"/>
+                </a:solidFill>
+                <a:latin typeface="Calibri" pitchFamily="34" charset="0"/>
+                <a:ea typeface="Calibri" pitchFamily="34" charset="-122"/>
+                <a:cs typeface="Calibri" pitchFamily="34" charset="-120"/>
+              </a:rPr>
+              <a:t>Comum</a:t>
             </a:r>
             <a:endParaRPr lang="en-US" sz="1400" dirty="0"/>
           </a:p>
@@ -28698,20 +28499,20 @@
         </p:nvSpPr>
         <p:spPr>
           <a:xfrm>
-            <a:off x="4663440" y="2798064"/>
-            <a:ext cx="3794760" cy="914400"/>
+            <a:off x="4663440" y="2633472"/>
+            <a:ext cx="3794760" cy="749808"/>
           </a:xfrm>
           <a:prstGeom prst="roundRect">
             <a:avLst>
-              <a:gd name="adj" fmla="val 8000"/>
+              <a:gd name="adj" fmla="val 9756"/>
             </a:avLst>
           </a:prstGeom>
           <a:solidFill>
-            <a:srgbClr val="FFFFFF"/>
+            <a:srgbClr val="E3F2E8"/>
           </a:solidFill>
-          <a:ln w="12700">
+          <a:ln w="25400">
             <a:solidFill>
-              <a:srgbClr val="DCD5C1"/>
+              <a:srgbClr val="2E7D4F"/>
             </a:solidFill>
             <a:prstDash val="solid"/>
           </a:ln>
@@ -28725,7 +28526,7 @@
         </p:nvSpPr>
         <p:spPr>
           <a:xfrm>
-            <a:off x="4791456" y="3044952"/>
+            <a:off x="4791456" y="2798064"/>
             <a:ext cx="420624" cy="420624"/>
           </a:xfrm>
           <a:prstGeom prst="roundRect">
@@ -28734,7 +28535,7 @@
             </a:avLst>
           </a:prstGeom>
           <a:solidFill>
-            <a:srgbClr val="13294B"/>
+            <a:srgbClr val="2E7D4F"/>
           </a:solidFill>
           <a:ln/>
         </p:spPr>
@@ -28771,8 +28572,8 @@
         </p:nvSpPr>
         <p:spPr>
           <a:xfrm>
-            <a:off x="5321808" y="2834640"/>
-            <a:ext cx="3044952" cy="841248"/>
+            <a:off x="5321808" y="2670048"/>
+            <a:ext cx="3044952" cy="676656"/>
           </a:xfrm>
           <a:prstGeom prst="rect">
             <a:avLst/>
@@ -28791,7 +28592,7 @@
               <a:buNone/>
             </a:pPr>
             <a:r>
-              <a:rPr lang="en-US" sz="1400" dirty="0">
+              <a:rPr lang="en-US" sz="1400" b="1" dirty="0">
                 <a:solidFill>
                   <a:srgbClr val="1F2A37"/>
                 </a:solidFill>
@@ -28799,7 +28600,7 @@
                 <a:ea typeface="Calibri" pitchFamily="34" charset="-122"/>
                 <a:cs typeface="Calibri" pitchFamily="34" charset="-120"/>
               </a:rPr>
-              <a:t>Um monopólio natural</a:t>
+              <a:t>Público</a:t>
             </a:r>
             <a:endParaRPr lang="en-US" sz="1400" dirty="0"/>
           </a:p>
@@ -28808,6 +28609,69 @@
       <p:sp>
         <p:nvSpPr>
           <p:cNvPr id="16" name="Text 14"/>
+          <p:cNvSpPr txBox="1"/>
+          <p:nvPr/>
+        </p:nvSpPr>
+        <p:spPr>
+          <a:xfrm>
+            <a:off x="685800" y="3566160"/>
+            <a:ext cx="7772400" cy="841248"/>
+          </a:xfrm>
+          <a:prstGeom prst="roundRect">
+            <a:avLst>
+              <a:gd name="adj" fmla="val 8696"/>
+            </a:avLst>
+          </a:prstGeom>
+          <a:solidFill>
+            <a:srgbClr val="E6F2F0"/>
+          </a:solidFill>
+          <a:ln/>
+        </p:spPr>
+        <p:txBody>
+          <a:bodyPr wrap="square" lIns="114300" tIns="114300" rIns="114300" bIns="114300" rtlCol="0" anchor="ctr"/>
+          <a:lstStyle/>
+          <a:p>
+            <a:pPr algn="l" indent="0" marL="0">
+              <a:lnSpc>
+                <a:spcPct val="100000"/>
+              </a:lnSpc>
+              <a:buNone/>
+            </a:pPr>
+            <a:r>
+              <a:rPr lang="en-US" sz="1350" b="1" dirty="0">
+                <a:solidFill>
+                  <a:srgbClr val="2E7D4F"/>
+                </a:solidFill>
+                <a:latin typeface="Calibri" pitchFamily="34" charset="0"/>
+                <a:ea typeface="Calibri" pitchFamily="34" charset="-122"/>
+                <a:cs typeface="Calibri" pitchFamily="34" charset="-120"/>
+              </a:rPr>
+              <a:t>Resposta: d) </a:t>
+            </a:r>
+            <a:pPr algn="l" indent="0" marL="0">
+              <a:lnSpc>
+                <a:spcPct val="100000"/>
+              </a:lnSpc>
+              <a:buNone/>
+            </a:pPr>
+            <a:r>
+              <a:rPr lang="en-US" sz="1350" dirty="0">
+                <a:solidFill>
+                  <a:srgbClr val="1F2A37"/>
+                </a:solidFill>
+                <a:latin typeface="Calibri" pitchFamily="34" charset="0"/>
+                <a:ea typeface="Calibri" pitchFamily="34" charset="-122"/>
+                <a:cs typeface="Calibri" pitchFamily="34" charset="-120"/>
+              </a:rPr>
+              <a:t>É não rival (todos usam ao mesmo tempo) e não excludente (ninguém é impedido de usar). Por isso o mercado não a oferece sozinho.</a:t>
+            </a:r>
+            <a:endParaRPr lang="en-US" sz="1350" dirty="0"/>
+          </a:p>
+        </p:txBody>
+      </p:sp>
+      <p:sp>
+        <p:nvSpPr>
+          <p:cNvPr id="17" name="Text 15"/>
           <p:cNvSpPr txBox="1"/>
           <p:nvPr/>
         </p:nvSpPr>
@@ -28922,7 +28786,7 @@
                 <a:ea typeface="Calibri" pitchFamily="34" charset="-122"/>
                 <a:cs typeface="Calibri" pitchFamily="34" charset="-120"/>
               </a:rPr>
-              <a:t>QUIZ DA UNIDADE 1 · PERGUNTA 4 DE 5 · RESPOSTA</a:t>
+              <a:t>QUIZ DA UNIDADE 1 · PERGUNTA 4 DE 5</a:t>
             </a:r>
             <a:endParaRPr lang="en-US" sz="1250" dirty="0"/>
           </a:p>
@@ -28979,126 +28843,11 @@
         <p:spPr>
           <a:xfrm>
             <a:off x="685800" y="1737360"/>
-            <a:ext cx="3794760" cy="749808"/>
+            <a:ext cx="3794760" cy="914400"/>
           </a:xfrm>
           <a:prstGeom prst="roundRect">
             <a:avLst>
-              <a:gd name="adj" fmla="val 9756"/>
-            </a:avLst>
-          </a:prstGeom>
-          <a:solidFill>
-            <a:srgbClr val="E3F2E8"/>
-          </a:solidFill>
-          <a:ln w="25400">
-            <a:solidFill>
-              <a:srgbClr val="2E7D4F"/>
-            </a:solidFill>
-            <a:prstDash val="solid"/>
-          </a:ln>
-        </p:spPr>
-      </p:sp>
-      <p:sp>
-        <p:nvSpPr>
-          <p:cNvPr id="5" name="Text 3"/>
-          <p:cNvSpPr txBox="1"/>
-          <p:nvPr/>
-        </p:nvSpPr>
-        <p:spPr>
-          <a:xfrm>
-            <a:off x="813816" y="1901952"/>
-            <a:ext cx="420624" cy="420624"/>
-          </a:xfrm>
-          <a:prstGeom prst="roundRect">
-            <a:avLst>
-              <a:gd name="adj" fmla="val 50000"/>
-            </a:avLst>
-          </a:prstGeom>
-          <a:solidFill>
-            <a:srgbClr val="2E7D4F"/>
-          </a:solidFill>
-          <a:ln/>
-        </p:spPr>
-        <p:txBody>
-          <a:bodyPr wrap="square" lIns="0" tIns="0" rIns="0" bIns="0" rtlCol="0" anchor="ctr"/>
-          <a:lstStyle/>
-          <a:p>
-            <a:pPr algn="ctr" indent="0" marL="0">
-              <a:lnSpc>
-                <a:spcPct val="100000"/>
-              </a:lnSpc>
-              <a:buNone/>
-            </a:pPr>
-            <a:r>
-              <a:rPr lang="en-US" sz="1600" b="1" dirty="0">
-                <a:solidFill>
-                  <a:srgbClr val="FFFFFF"/>
-                </a:solidFill>
-                <a:latin typeface="Calibri" pitchFamily="34" charset="0"/>
-                <a:ea typeface="Calibri" pitchFamily="34" charset="-122"/>
-                <a:cs typeface="Calibri" pitchFamily="34" charset="-120"/>
-              </a:rPr>
-              <a:t>a</a:t>
-            </a:r>
-            <a:endParaRPr lang="en-US" sz="1600" dirty="0"/>
-          </a:p>
-        </p:txBody>
-      </p:sp>
-      <p:sp>
-        <p:nvSpPr>
-          <p:cNvPr id="6" name="Text 4"/>
-          <p:cNvSpPr txBox="1"/>
-          <p:nvPr/>
-        </p:nvSpPr>
-        <p:spPr>
-          <a:xfrm>
-            <a:off x="1344168" y="1773936"/>
-            <a:ext cx="3044952" cy="676656"/>
-          </a:xfrm>
-          <a:prstGeom prst="rect">
-            <a:avLst/>
-          </a:prstGeom>
-          <a:noFill/>
-          <a:ln/>
-        </p:spPr>
-        <p:txBody>
-          <a:bodyPr wrap="square" lIns="25400" tIns="25400" rIns="25400" bIns="25400" rtlCol="0" anchor="ctr"/>
-          <a:lstStyle/>
-          <a:p>
-            <a:pPr algn="l" indent="0" marL="0">
-              <a:lnSpc>
-                <a:spcPct val="100000"/>
-              </a:lnSpc>
-              <a:buNone/>
-            </a:pPr>
-            <a:r>
-              <a:rPr lang="en-US" sz="1400" b="1" dirty="0">
-                <a:solidFill>
-                  <a:srgbClr val="1F2A37"/>
-                </a:solidFill>
-                <a:latin typeface="Calibri" pitchFamily="34" charset="0"/>
-                <a:ea typeface="Calibri" pitchFamily="34" charset="-122"/>
-                <a:cs typeface="Calibri" pitchFamily="34" charset="-120"/>
-              </a:rPr>
-              <a:t>Uma externalidade negativa</a:t>
-            </a:r>
-            <a:endParaRPr lang="en-US" sz="1400" dirty="0"/>
-          </a:p>
-        </p:txBody>
-      </p:sp>
-      <p:sp>
-        <p:nvSpPr>
-          <p:cNvPr id="7" name="Shape 5"/>
-          <p:cNvSpPr/>
-          <p:nvPr/>
-        </p:nvSpPr>
-        <p:spPr>
-          <a:xfrm>
-            <a:off x="4663440" y="1737360"/>
-            <a:ext cx="3794760" cy="749808"/>
-          </a:xfrm>
-          <a:prstGeom prst="roundRect">
-            <a:avLst>
-              <a:gd name="adj" fmla="val 9756"/>
+              <a:gd name="adj" fmla="val 8000"/>
             </a:avLst>
           </a:prstGeom>
           <a:solidFill>
@@ -29114,13 +28863,13 @@
       </p:sp>
       <p:sp>
         <p:nvSpPr>
-          <p:cNvPr id="8" name="Text 6"/>
+          <p:cNvPr id="5" name="Text 3"/>
           <p:cNvSpPr txBox="1"/>
           <p:nvPr/>
         </p:nvSpPr>
         <p:spPr>
           <a:xfrm>
-            <a:off x="4791456" y="1901952"/>
+            <a:off x="813816" y="1984248"/>
             <a:ext cx="420624" cy="420624"/>
           </a:xfrm>
           <a:prstGeom prst="roundRect">
@@ -29129,7 +28878,7 @@
             </a:avLst>
           </a:prstGeom>
           <a:solidFill>
-            <a:srgbClr val="9AA3AB"/>
+            <a:srgbClr val="13294B"/>
           </a:solidFill>
           <a:ln/>
         </p:spPr>
@@ -29152,7 +28901,7 @@
                 <a:ea typeface="Calibri" pitchFamily="34" charset="-122"/>
                 <a:cs typeface="Calibri" pitchFamily="34" charset="-120"/>
               </a:rPr>
-              <a:t>b</a:t>
+              <a:t>a</a:t>
             </a:r>
             <a:endParaRPr lang="en-US" sz="1600" dirty="0"/>
           </a:p>
@@ -29160,14 +28909,14 @@
       </p:sp>
       <p:sp>
         <p:nvSpPr>
-          <p:cNvPr id="9" name="Text 7"/>
+          <p:cNvPr id="6" name="Text 4"/>
           <p:cNvSpPr txBox="1"/>
           <p:nvPr/>
         </p:nvSpPr>
         <p:spPr>
           <a:xfrm>
-            <a:off x="5321808" y="1773936"/>
-            <a:ext cx="3044952" cy="676656"/>
+            <a:off x="1344168" y="1773936"/>
+            <a:ext cx="3044952" cy="841248"/>
           </a:xfrm>
           <a:prstGeom prst="rect">
             <a:avLst/>
@@ -29188,13 +28937,13 @@
             <a:r>
               <a:rPr lang="en-US" sz="1400" dirty="0">
                 <a:solidFill>
-                  <a:srgbClr val="5B6770"/>
-                </a:solidFill>
-                <a:latin typeface="Calibri" pitchFamily="34" charset="0"/>
-                <a:ea typeface="Calibri" pitchFamily="34" charset="-122"/>
-                <a:cs typeface="Calibri" pitchFamily="34" charset="-120"/>
-              </a:rPr>
-              <a:t>Um bem público</a:t>
+                  <a:srgbClr val="1F2A37"/>
+                </a:solidFill>
+                <a:latin typeface="Calibri" pitchFamily="34" charset="0"/>
+                <a:ea typeface="Calibri" pitchFamily="34" charset="-122"/>
+                <a:cs typeface="Calibri" pitchFamily="34" charset="-120"/>
+              </a:rPr>
+              <a:t>Uma externalidade negativa</a:t>
             </a:r>
             <a:endParaRPr lang="en-US" sz="1400" dirty="0"/>
           </a:p>
@@ -29202,18 +28951,18 @@
       </p:sp>
       <p:sp>
         <p:nvSpPr>
-          <p:cNvPr id="10" name="Shape 8"/>
+          <p:cNvPr id="7" name="Shape 5"/>
           <p:cNvSpPr/>
           <p:nvPr/>
         </p:nvSpPr>
         <p:spPr>
           <a:xfrm>
-            <a:off x="685800" y="2633472"/>
-            <a:ext cx="3794760" cy="749808"/>
+            <a:off x="4663440" y="1737360"/>
+            <a:ext cx="3794760" cy="914400"/>
           </a:xfrm>
           <a:prstGeom prst="roundRect">
             <a:avLst>
-              <a:gd name="adj" fmla="val 9756"/>
+              <a:gd name="adj" fmla="val 8000"/>
             </a:avLst>
           </a:prstGeom>
           <a:solidFill>
@@ -29229,13 +28978,13 @@
       </p:sp>
       <p:sp>
         <p:nvSpPr>
-          <p:cNvPr id="11" name="Text 9"/>
+          <p:cNvPr id="8" name="Text 6"/>
           <p:cNvSpPr txBox="1"/>
           <p:nvPr/>
         </p:nvSpPr>
         <p:spPr>
           <a:xfrm>
-            <a:off x="813816" y="2798064"/>
+            <a:off x="4791456" y="1984248"/>
             <a:ext cx="420624" cy="420624"/>
           </a:xfrm>
           <a:prstGeom prst="roundRect">
@@ -29244,7 +28993,7 @@
             </a:avLst>
           </a:prstGeom>
           <a:solidFill>
-            <a:srgbClr val="9AA3AB"/>
+            <a:srgbClr val="13294B"/>
           </a:solidFill>
           <a:ln/>
         </p:spPr>
@@ -29267,7 +29016,7 @@
                 <a:ea typeface="Calibri" pitchFamily="34" charset="-122"/>
                 <a:cs typeface="Calibri" pitchFamily="34" charset="-120"/>
               </a:rPr>
-              <a:t>c</a:t>
+              <a:t>b</a:t>
             </a:r>
             <a:endParaRPr lang="en-US" sz="1600" dirty="0"/>
           </a:p>
@@ -29275,14 +29024,14 @@
       </p:sp>
       <p:sp>
         <p:nvSpPr>
-          <p:cNvPr id="12" name="Text 10"/>
+          <p:cNvPr id="9" name="Text 7"/>
           <p:cNvSpPr txBox="1"/>
           <p:nvPr/>
         </p:nvSpPr>
         <p:spPr>
           <a:xfrm>
-            <a:off x="1344168" y="2670048"/>
-            <a:ext cx="3044952" cy="676656"/>
+            <a:off x="5321808" y="1773936"/>
+            <a:ext cx="3044952" cy="841248"/>
           </a:xfrm>
           <a:prstGeom prst="rect">
             <a:avLst/>
@@ -29303,13 +29052,13 @@
             <a:r>
               <a:rPr lang="en-US" sz="1400" dirty="0">
                 <a:solidFill>
-                  <a:srgbClr val="5B6770"/>
-                </a:solidFill>
-                <a:latin typeface="Calibri" pitchFamily="34" charset="0"/>
-                <a:ea typeface="Calibri" pitchFamily="34" charset="-122"/>
-                <a:cs typeface="Calibri" pitchFamily="34" charset="-120"/>
-              </a:rPr>
-              <a:t>Assimetria de informação</a:t>
+                  <a:srgbClr val="1F2A37"/>
+                </a:solidFill>
+                <a:latin typeface="Calibri" pitchFamily="34" charset="0"/>
+                <a:ea typeface="Calibri" pitchFamily="34" charset="-122"/>
+                <a:cs typeface="Calibri" pitchFamily="34" charset="-120"/>
+              </a:rPr>
+              <a:t>Um bem público</a:t>
             </a:r>
             <a:endParaRPr lang="en-US" sz="1400" dirty="0"/>
           </a:p>
@@ -29317,18 +29066,18 @@
       </p:sp>
       <p:sp>
         <p:nvSpPr>
-          <p:cNvPr id="13" name="Shape 11"/>
+          <p:cNvPr id="10" name="Shape 8"/>
           <p:cNvSpPr/>
           <p:nvPr/>
         </p:nvSpPr>
         <p:spPr>
           <a:xfrm>
-            <a:off x="4663440" y="2633472"/>
-            <a:ext cx="3794760" cy="749808"/>
+            <a:off x="685800" y="2798064"/>
+            <a:ext cx="3794760" cy="914400"/>
           </a:xfrm>
           <a:prstGeom prst="roundRect">
             <a:avLst>
-              <a:gd name="adj" fmla="val 9756"/>
+              <a:gd name="adj" fmla="val 8000"/>
             </a:avLst>
           </a:prstGeom>
           <a:solidFill>
@@ -29344,13 +29093,13 @@
       </p:sp>
       <p:sp>
         <p:nvSpPr>
-          <p:cNvPr id="14" name="Text 12"/>
+          <p:cNvPr id="11" name="Text 9"/>
           <p:cNvSpPr txBox="1"/>
           <p:nvPr/>
         </p:nvSpPr>
         <p:spPr>
           <a:xfrm>
-            <a:off x="4791456" y="2798064"/>
+            <a:off x="813816" y="3044952"/>
             <a:ext cx="420624" cy="420624"/>
           </a:xfrm>
           <a:prstGeom prst="roundRect">
@@ -29359,7 +29108,7 @@
             </a:avLst>
           </a:prstGeom>
           <a:solidFill>
-            <a:srgbClr val="9AA3AB"/>
+            <a:srgbClr val="13294B"/>
           </a:solidFill>
           <a:ln/>
         </p:spPr>
@@ -29382,6 +29131,121 @@
                 <a:ea typeface="Calibri" pitchFamily="34" charset="-122"/>
                 <a:cs typeface="Calibri" pitchFamily="34" charset="-120"/>
               </a:rPr>
+              <a:t>c</a:t>
+            </a:r>
+            <a:endParaRPr lang="en-US" sz="1600" dirty="0"/>
+          </a:p>
+        </p:txBody>
+      </p:sp>
+      <p:sp>
+        <p:nvSpPr>
+          <p:cNvPr id="12" name="Text 10"/>
+          <p:cNvSpPr txBox="1"/>
+          <p:nvPr/>
+        </p:nvSpPr>
+        <p:spPr>
+          <a:xfrm>
+            <a:off x="1344168" y="2834640"/>
+            <a:ext cx="3044952" cy="841248"/>
+          </a:xfrm>
+          <a:prstGeom prst="rect">
+            <a:avLst/>
+          </a:prstGeom>
+          <a:noFill/>
+          <a:ln/>
+        </p:spPr>
+        <p:txBody>
+          <a:bodyPr wrap="square" lIns="25400" tIns="25400" rIns="25400" bIns="25400" rtlCol="0" anchor="ctr"/>
+          <a:lstStyle/>
+          <a:p>
+            <a:pPr algn="l" indent="0" marL="0">
+              <a:lnSpc>
+                <a:spcPct val="100000"/>
+              </a:lnSpc>
+              <a:buNone/>
+            </a:pPr>
+            <a:r>
+              <a:rPr lang="en-US" sz="1400" dirty="0">
+                <a:solidFill>
+                  <a:srgbClr val="1F2A37"/>
+                </a:solidFill>
+                <a:latin typeface="Calibri" pitchFamily="34" charset="0"/>
+                <a:ea typeface="Calibri" pitchFamily="34" charset="-122"/>
+                <a:cs typeface="Calibri" pitchFamily="34" charset="-120"/>
+              </a:rPr>
+              <a:t>Assimetria de informação</a:t>
+            </a:r>
+            <a:endParaRPr lang="en-US" sz="1400" dirty="0"/>
+          </a:p>
+        </p:txBody>
+      </p:sp>
+      <p:sp>
+        <p:nvSpPr>
+          <p:cNvPr id="13" name="Shape 11"/>
+          <p:cNvSpPr/>
+          <p:nvPr/>
+        </p:nvSpPr>
+        <p:spPr>
+          <a:xfrm>
+            <a:off x="4663440" y="2798064"/>
+            <a:ext cx="3794760" cy="914400"/>
+          </a:xfrm>
+          <a:prstGeom prst="roundRect">
+            <a:avLst>
+              <a:gd name="adj" fmla="val 8000"/>
+            </a:avLst>
+          </a:prstGeom>
+          <a:solidFill>
+            <a:srgbClr val="FFFFFF"/>
+          </a:solidFill>
+          <a:ln w="12700">
+            <a:solidFill>
+              <a:srgbClr val="DCD5C1"/>
+            </a:solidFill>
+            <a:prstDash val="solid"/>
+          </a:ln>
+        </p:spPr>
+      </p:sp>
+      <p:sp>
+        <p:nvSpPr>
+          <p:cNvPr id="14" name="Text 12"/>
+          <p:cNvSpPr txBox="1"/>
+          <p:nvPr/>
+        </p:nvSpPr>
+        <p:spPr>
+          <a:xfrm>
+            <a:off x="4791456" y="3044952"/>
+            <a:ext cx="420624" cy="420624"/>
+          </a:xfrm>
+          <a:prstGeom prst="roundRect">
+            <a:avLst>
+              <a:gd name="adj" fmla="val 50000"/>
+            </a:avLst>
+          </a:prstGeom>
+          <a:solidFill>
+            <a:srgbClr val="13294B"/>
+          </a:solidFill>
+          <a:ln/>
+        </p:spPr>
+        <p:txBody>
+          <a:bodyPr wrap="square" lIns="0" tIns="0" rIns="0" bIns="0" rtlCol="0" anchor="ctr"/>
+          <a:lstStyle/>
+          <a:p>
+            <a:pPr algn="ctr" indent="0" marL="0">
+              <a:lnSpc>
+                <a:spcPct val="100000"/>
+              </a:lnSpc>
+              <a:buNone/>
+            </a:pPr>
+            <a:r>
+              <a:rPr lang="en-US" sz="1600" b="1" dirty="0">
+                <a:solidFill>
+                  <a:srgbClr val="FFFFFF"/>
+                </a:solidFill>
+                <a:latin typeface="Calibri" pitchFamily="34" charset="0"/>
+                <a:ea typeface="Calibri" pitchFamily="34" charset="-122"/>
+                <a:cs typeface="Calibri" pitchFamily="34" charset="-120"/>
+              </a:rPr>
               <a:t>d</a:t>
             </a:r>
             <a:endParaRPr lang="en-US" sz="1600" dirty="0"/>
@@ -29396,8 +29260,8 @@
         </p:nvSpPr>
         <p:spPr>
           <a:xfrm>
-            <a:off x="5321808" y="2670048"/>
-            <a:ext cx="3044952" cy="676656"/>
+            <a:off x="5321808" y="2834640"/>
+            <a:ext cx="3044952" cy="841248"/>
           </a:xfrm>
           <a:prstGeom prst="rect">
             <a:avLst/>
@@ -29418,7 +29282,7 @@
             <a:r>
               <a:rPr lang="en-US" sz="1400" dirty="0">
                 <a:solidFill>
-                  <a:srgbClr val="5B6770"/>
+                  <a:srgbClr val="1F2A37"/>
                 </a:solidFill>
                 <a:latin typeface="Calibri" pitchFamily="34" charset="0"/>
                 <a:ea typeface="Calibri" pitchFamily="34" charset="-122"/>
@@ -29433,69 +29297,6 @@
       <p:sp>
         <p:nvSpPr>
           <p:cNvPr id="16" name="Text 14"/>
-          <p:cNvSpPr txBox="1"/>
-          <p:nvPr/>
-        </p:nvSpPr>
-        <p:spPr>
-          <a:xfrm>
-            <a:off x="685800" y="3566160"/>
-            <a:ext cx="7772400" cy="841248"/>
-          </a:xfrm>
-          <a:prstGeom prst="roundRect">
-            <a:avLst>
-              <a:gd name="adj" fmla="val 8696"/>
-            </a:avLst>
-          </a:prstGeom>
-          <a:solidFill>
-            <a:srgbClr val="E6F2F0"/>
-          </a:solidFill>
-          <a:ln/>
-        </p:spPr>
-        <p:txBody>
-          <a:bodyPr wrap="square" lIns="114300" tIns="114300" rIns="114300" bIns="114300" rtlCol="0" anchor="ctr"/>
-          <a:lstStyle/>
-          <a:p>
-            <a:pPr algn="l" indent="0" marL="0">
-              <a:lnSpc>
-                <a:spcPct val="100000"/>
-              </a:lnSpc>
-              <a:buNone/>
-            </a:pPr>
-            <a:r>
-              <a:rPr lang="en-US" sz="1350" b="1" dirty="0">
-                <a:solidFill>
-                  <a:srgbClr val="2E7D4F"/>
-                </a:solidFill>
-                <a:latin typeface="Calibri" pitchFamily="34" charset="0"/>
-                <a:ea typeface="Calibri" pitchFamily="34" charset="-122"/>
-                <a:cs typeface="Calibri" pitchFamily="34" charset="-120"/>
-              </a:rPr>
-              <a:t>Resposta: a) </a:t>
-            </a:r>
-            <a:pPr algn="l" indent="0" marL="0">
-              <a:lnSpc>
-                <a:spcPct val="100000"/>
-              </a:lnSpc>
-              <a:buNone/>
-            </a:pPr>
-            <a:r>
-              <a:rPr lang="en-US" sz="1350" dirty="0">
-                <a:solidFill>
-                  <a:srgbClr val="1F2A37"/>
-                </a:solidFill>
-                <a:latin typeface="Calibri" pitchFamily="34" charset="0"/>
-                <a:ea typeface="Calibri" pitchFamily="34" charset="-122"/>
-                <a:cs typeface="Calibri" pitchFamily="34" charset="-120"/>
-              </a:rPr>
-              <a:t>É um custo imposto a terceiros que não aparece no preço de nenhum produto: uma externalidade negativa, que justifica fiscalização e multas.</a:t>
-            </a:r>
-            <a:endParaRPr lang="en-US" sz="1350" dirty="0"/>
-          </a:p>
-        </p:txBody>
-      </p:sp>
-      <p:sp>
-        <p:nvSpPr>
-          <p:cNvPr id="17" name="Text 15"/>
           <p:cNvSpPr txBox="1"/>
           <p:nvPr/>
         </p:nvSpPr>
@@ -29610,7 +29411,7 @@
                 <a:ea typeface="Calibri" pitchFamily="34" charset="-122"/>
                 <a:cs typeface="Calibri" pitchFamily="34" charset="-120"/>
               </a:rPr>
-              <a:t>QUIZ DA UNIDADE 1 · PERGUNTA 5 DE 5</a:t>
+              <a:t>QUIZ DA UNIDADE 1 · PERGUNTA 4 DE 5 · RESPOSTA</a:t>
             </a:r>
             <a:endParaRPr lang="en-US" sz="1250" dirty="0"/>
           </a:p>
@@ -29652,7 +29453,7 @@
                 <a:ea typeface="Calibri" pitchFamily="34" charset="-122"/>
                 <a:cs typeface="Calibri" pitchFamily="34" charset="-120"/>
               </a:rPr>
-              <a:t>IPTU progressivo e tarifa social de água cumprem qual função econômica do Estado?</a:t>
+              <a:t>A fumaça das queimadas que prejudica a saúde de moradores de outras cidades é:</a:t>
             </a:r>
             <a:endParaRPr lang="en-US" sz="1900" dirty="0"/>
           </a:p>
@@ -29667,11 +29468,126 @@
         <p:spPr>
           <a:xfrm>
             <a:off x="685800" y="1737360"/>
-            <a:ext cx="3794760" cy="914400"/>
+            <a:ext cx="3794760" cy="749808"/>
           </a:xfrm>
           <a:prstGeom prst="roundRect">
             <a:avLst>
-              <a:gd name="adj" fmla="val 8000"/>
+              <a:gd name="adj" fmla="val 9756"/>
+            </a:avLst>
+          </a:prstGeom>
+          <a:solidFill>
+            <a:srgbClr val="E3F2E8"/>
+          </a:solidFill>
+          <a:ln w="25400">
+            <a:solidFill>
+              <a:srgbClr val="2E7D4F"/>
+            </a:solidFill>
+            <a:prstDash val="solid"/>
+          </a:ln>
+        </p:spPr>
+      </p:sp>
+      <p:sp>
+        <p:nvSpPr>
+          <p:cNvPr id="5" name="Text 3"/>
+          <p:cNvSpPr txBox="1"/>
+          <p:nvPr/>
+        </p:nvSpPr>
+        <p:spPr>
+          <a:xfrm>
+            <a:off x="813816" y="1901952"/>
+            <a:ext cx="420624" cy="420624"/>
+          </a:xfrm>
+          <a:prstGeom prst="roundRect">
+            <a:avLst>
+              <a:gd name="adj" fmla="val 50000"/>
+            </a:avLst>
+          </a:prstGeom>
+          <a:solidFill>
+            <a:srgbClr val="2E7D4F"/>
+          </a:solidFill>
+          <a:ln/>
+        </p:spPr>
+        <p:txBody>
+          <a:bodyPr wrap="square" lIns="0" tIns="0" rIns="0" bIns="0" rtlCol="0" anchor="ctr"/>
+          <a:lstStyle/>
+          <a:p>
+            <a:pPr algn="ctr" indent="0" marL="0">
+              <a:lnSpc>
+                <a:spcPct val="100000"/>
+              </a:lnSpc>
+              <a:buNone/>
+            </a:pPr>
+            <a:r>
+              <a:rPr lang="en-US" sz="1600" b="1" dirty="0">
+                <a:solidFill>
+                  <a:srgbClr val="FFFFFF"/>
+                </a:solidFill>
+                <a:latin typeface="Calibri" pitchFamily="34" charset="0"/>
+                <a:ea typeface="Calibri" pitchFamily="34" charset="-122"/>
+                <a:cs typeface="Calibri" pitchFamily="34" charset="-120"/>
+              </a:rPr>
+              <a:t>a</a:t>
+            </a:r>
+            <a:endParaRPr lang="en-US" sz="1600" dirty="0"/>
+          </a:p>
+        </p:txBody>
+      </p:sp>
+      <p:sp>
+        <p:nvSpPr>
+          <p:cNvPr id="6" name="Text 4"/>
+          <p:cNvSpPr txBox="1"/>
+          <p:nvPr/>
+        </p:nvSpPr>
+        <p:spPr>
+          <a:xfrm>
+            <a:off x="1344168" y="1773936"/>
+            <a:ext cx="3044952" cy="676656"/>
+          </a:xfrm>
+          <a:prstGeom prst="rect">
+            <a:avLst/>
+          </a:prstGeom>
+          <a:noFill/>
+          <a:ln/>
+        </p:spPr>
+        <p:txBody>
+          <a:bodyPr wrap="square" lIns="25400" tIns="25400" rIns="25400" bIns="25400" rtlCol="0" anchor="ctr"/>
+          <a:lstStyle/>
+          <a:p>
+            <a:pPr algn="l" indent="0" marL="0">
+              <a:lnSpc>
+                <a:spcPct val="100000"/>
+              </a:lnSpc>
+              <a:buNone/>
+            </a:pPr>
+            <a:r>
+              <a:rPr lang="en-US" sz="1400" b="1" dirty="0">
+                <a:solidFill>
+                  <a:srgbClr val="1F2A37"/>
+                </a:solidFill>
+                <a:latin typeface="Calibri" pitchFamily="34" charset="0"/>
+                <a:ea typeface="Calibri" pitchFamily="34" charset="-122"/>
+                <a:cs typeface="Calibri" pitchFamily="34" charset="-120"/>
+              </a:rPr>
+              <a:t>Uma externalidade negativa</a:t>
+            </a:r>
+            <a:endParaRPr lang="en-US" sz="1400" dirty="0"/>
+          </a:p>
+        </p:txBody>
+      </p:sp>
+      <p:sp>
+        <p:nvSpPr>
+          <p:cNvPr id="7" name="Shape 5"/>
+          <p:cNvSpPr/>
+          <p:nvPr/>
+        </p:nvSpPr>
+        <p:spPr>
+          <a:xfrm>
+            <a:off x="4663440" y="1737360"/>
+            <a:ext cx="3794760" cy="749808"/>
+          </a:xfrm>
+          <a:prstGeom prst="roundRect">
+            <a:avLst>
+              <a:gd name="adj" fmla="val 9756"/>
             </a:avLst>
           </a:prstGeom>
           <a:solidFill>
@@ -29687,13 +29603,13 @@
       </p:sp>
       <p:sp>
         <p:nvSpPr>
-          <p:cNvPr id="5" name="Text 3"/>
+          <p:cNvPr id="8" name="Text 6"/>
           <p:cNvSpPr txBox="1"/>
           <p:nvPr/>
         </p:nvSpPr>
         <p:spPr>
           <a:xfrm>
-            <a:off x="813816" y="1984248"/>
+            <a:off x="4791456" y="1901952"/>
             <a:ext cx="420624" cy="420624"/>
           </a:xfrm>
           <a:prstGeom prst="roundRect">
@@ -29702,7 +29618,7 @@
             </a:avLst>
           </a:prstGeom>
           <a:solidFill>
-            <a:srgbClr val="13294B"/>
+            <a:srgbClr val="9AA3AB"/>
           </a:solidFill>
           <a:ln/>
         </p:spPr>
@@ -29725,7 +29641,7 @@
                 <a:ea typeface="Calibri" pitchFamily="34" charset="-122"/>
                 <a:cs typeface="Calibri" pitchFamily="34" charset="-120"/>
               </a:rPr>
-              <a:t>a</a:t>
+              <a:t>b</a:t>
             </a:r>
             <a:endParaRPr lang="en-US" sz="1600" dirty="0"/>
           </a:p>
@@ -29733,14 +29649,14 @@
       </p:sp>
       <p:sp>
         <p:nvSpPr>
-          <p:cNvPr id="6" name="Text 4"/>
+          <p:cNvPr id="9" name="Text 7"/>
           <p:cNvSpPr txBox="1"/>
           <p:nvPr/>
         </p:nvSpPr>
         <p:spPr>
           <a:xfrm>
-            <a:off x="1344168" y="1773936"/>
-            <a:ext cx="3044952" cy="841248"/>
+            <a:off x="5321808" y="1773936"/>
+            <a:ext cx="3044952" cy="676656"/>
           </a:xfrm>
           <a:prstGeom prst="rect">
             <a:avLst/>
@@ -29761,13 +29677,13 @@
             <a:r>
               <a:rPr lang="en-US" sz="1400" dirty="0">
                 <a:solidFill>
-                  <a:srgbClr val="1F2A37"/>
-                </a:solidFill>
-                <a:latin typeface="Calibri" pitchFamily="34" charset="0"/>
-                <a:ea typeface="Calibri" pitchFamily="34" charset="-122"/>
-                <a:cs typeface="Calibri" pitchFamily="34" charset="-120"/>
-              </a:rPr>
-              <a:t>Alocativa</a:t>
+                  <a:srgbClr val="5B6770"/>
+                </a:solidFill>
+                <a:latin typeface="Calibri" pitchFamily="34" charset="0"/>
+                <a:ea typeface="Calibri" pitchFamily="34" charset="-122"/>
+                <a:cs typeface="Calibri" pitchFamily="34" charset="-120"/>
+              </a:rPr>
+              <a:t>Um bem público</a:t>
             </a:r>
             <a:endParaRPr lang="en-US" sz="1400" dirty="0"/>
           </a:p>
@@ -29775,18 +29691,18 @@
       </p:sp>
       <p:sp>
         <p:nvSpPr>
-          <p:cNvPr id="7" name="Shape 5"/>
+          <p:cNvPr id="10" name="Shape 8"/>
           <p:cNvSpPr/>
           <p:nvPr/>
         </p:nvSpPr>
         <p:spPr>
           <a:xfrm>
-            <a:off x="4663440" y="1737360"/>
-            <a:ext cx="3794760" cy="914400"/>
+            <a:off x="685800" y="2633472"/>
+            <a:ext cx="3794760" cy="749808"/>
           </a:xfrm>
           <a:prstGeom prst="roundRect">
             <a:avLst>
-              <a:gd name="adj" fmla="val 8000"/>
+              <a:gd name="adj" fmla="val 9756"/>
             </a:avLst>
           </a:prstGeom>
           <a:solidFill>
@@ -29802,13 +29718,13 @@
       </p:sp>
       <p:sp>
         <p:nvSpPr>
-          <p:cNvPr id="8" name="Text 6"/>
+          <p:cNvPr id="11" name="Text 9"/>
           <p:cNvSpPr txBox="1"/>
           <p:nvPr/>
         </p:nvSpPr>
         <p:spPr>
           <a:xfrm>
-            <a:off x="4791456" y="1984248"/>
+            <a:off x="813816" y="2798064"/>
             <a:ext cx="420624" cy="420624"/>
           </a:xfrm>
           <a:prstGeom prst="roundRect">
@@ -29817,7 +29733,7 @@
             </a:avLst>
           </a:prstGeom>
           <a:solidFill>
-            <a:srgbClr val="13294B"/>
+            <a:srgbClr val="9AA3AB"/>
           </a:solidFill>
           <a:ln/>
         </p:spPr>
@@ -29840,7 +29756,7 @@
                 <a:ea typeface="Calibri" pitchFamily="34" charset="-122"/>
                 <a:cs typeface="Calibri" pitchFamily="34" charset="-120"/>
               </a:rPr>
-              <a:t>b</a:t>
+              <a:t>c</a:t>
             </a:r>
             <a:endParaRPr lang="en-US" sz="1600" dirty="0"/>
           </a:p>
@@ -29848,14 +29764,14 @@
       </p:sp>
       <p:sp>
         <p:nvSpPr>
-          <p:cNvPr id="9" name="Text 7"/>
+          <p:cNvPr id="12" name="Text 10"/>
           <p:cNvSpPr txBox="1"/>
           <p:nvPr/>
         </p:nvSpPr>
         <p:spPr>
           <a:xfrm>
-            <a:off x="5321808" y="1773936"/>
-            <a:ext cx="3044952" cy="841248"/>
+            <a:off x="1344168" y="2670048"/>
+            <a:ext cx="3044952" cy="676656"/>
           </a:xfrm>
           <a:prstGeom prst="rect">
             <a:avLst/>
@@ -29876,13 +29792,13 @@
             <a:r>
               <a:rPr lang="en-US" sz="1400" dirty="0">
                 <a:solidFill>
-                  <a:srgbClr val="1F2A37"/>
-                </a:solidFill>
-                <a:latin typeface="Calibri" pitchFamily="34" charset="0"/>
-                <a:ea typeface="Calibri" pitchFamily="34" charset="-122"/>
-                <a:cs typeface="Calibri" pitchFamily="34" charset="-120"/>
-              </a:rPr>
-              <a:t>Distributiva</a:t>
+                  <a:srgbClr val="5B6770"/>
+                </a:solidFill>
+                <a:latin typeface="Calibri" pitchFamily="34" charset="0"/>
+                <a:ea typeface="Calibri" pitchFamily="34" charset="-122"/>
+                <a:cs typeface="Calibri" pitchFamily="34" charset="-120"/>
+              </a:rPr>
+              <a:t>Assimetria de informação</a:t>
             </a:r>
             <a:endParaRPr lang="en-US" sz="1400" dirty="0"/>
           </a:p>
@@ -29890,18 +29806,18 @@
       </p:sp>
       <p:sp>
         <p:nvSpPr>
-          <p:cNvPr id="10" name="Shape 8"/>
+          <p:cNvPr id="13" name="Shape 11"/>
           <p:cNvSpPr/>
           <p:nvPr/>
         </p:nvSpPr>
         <p:spPr>
           <a:xfrm>
-            <a:off x="685800" y="2798064"/>
-            <a:ext cx="3794760" cy="914400"/>
+            <a:off x="4663440" y="2633472"/>
+            <a:ext cx="3794760" cy="749808"/>
           </a:xfrm>
           <a:prstGeom prst="roundRect">
             <a:avLst>
-              <a:gd name="adj" fmla="val 8000"/>
+              <a:gd name="adj" fmla="val 9756"/>
             </a:avLst>
           </a:prstGeom>
           <a:solidFill>
@@ -29917,13 +29833,13 @@
       </p:sp>
       <p:sp>
         <p:nvSpPr>
-          <p:cNvPr id="11" name="Text 9"/>
+          <p:cNvPr id="14" name="Text 12"/>
           <p:cNvSpPr txBox="1"/>
           <p:nvPr/>
         </p:nvSpPr>
         <p:spPr>
           <a:xfrm>
-            <a:off x="813816" y="3044952"/>
+            <a:off x="4791456" y="2798064"/>
             <a:ext cx="420624" cy="420624"/>
           </a:xfrm>
           <a:prstGeom prst="roundRect">
@@ -29932,7 +29848,7 @@
             </a:avLst>
           </a:prstGeom>
           <a:solidFill>
-            <a:srgbClr val="13294B"/>
+            <a:srgbClr val="9AA3AB"/>
           </a:solidFill>
           <a:ln/>
         </p:spPr>
@@ -29955,7 +29871,7 @@
                 <a:ea typeface="Calibri" pitchFamily="34" charset="-122"/>
                 <a:cs typeface="Calibri" pitchFamily="34" charset="-120"/>
               </a:rPr>
-              <a:t>c</a:t>
+              <a:t>d</a:t>
             </a:r>
             <a:endParaRPr lang="en-US" sz="1600" dirty="0"/>
           </a:p>
@@ -29963,14 +29879,14 @@
       </p:sp>
       <p:sp>
         <p:nvSpPr>
-          <p:cNvPr id="12" name="Text 10"/>
+          <p:cNvPr id="15" name="Text 13"/>
           <p:cNvSpPr txBox="1"/>
           <p:nvPr/>
         </p:nvSpPr>
         <p:spPr>
           <a:xfrm>
-            <a:off x="1344168" y="2834640"/>
-            <a:ext cx="3044952" cy="841248"/>
+            <a:off x="5321808" y="2670048"/>
+            <a:ext cx="3044952" cy="676656"/>
           </a:xfrm>
           <a:prstGeom prst="rect">
             <a:avLst/>
@@ -29991,13 +29907,13 @@
             <a:r>
               <a:rPr lang="en-US" sz="1400" dirty="0">
                 <a:solidFill>
-                  <a:srgbClr val="1F2A37"/>
-                </a:solidFill>
-                <a:latin typeface="Calibri" pitchFamily="34" charset="0"/>
-                <a:ea typeface="Calibri" pitchFamily="34" charset="-122"/>
-                <a:cs typeface="Calibri" pitchFamily="34" charset="-120"/>
-              </a:rPr>
-              <a:t>Estabilizadora</a:t>
+                  <a:srgbClr val="5B6770"/>
+                </a:solidFill>
+                <a:latin typeface="Calibri" pitchFamily="34" charset="0"/>
+                <a:ea typeface="Calibri" pitchFamily="34" charset="-122"/>
+                <a:cs typeface="Calibri" pitchFamily="34" charset="-120"/>
+              </a:rPr>
+              <a:t>Um monopólio natural</a:t>
             </a:r>
             <a:endParaRPr lang="en-US" sz="1400" dirty="0"/>
           </a:p>
@@ -30005,96 +29921,27 @@
       </p:sp>
       <p:sp>
         <p:nvSpPr>
-          <p:cNvPr id="13" name="Shape 11"/>
-          <p:cNvSpPr/>
-          <p:nvPr/>
-        </p:nvSpPr>
-        <p:spPr>
-          <a:xfrm>
-            <a:off x="4663440" y="2798064"/>
-            <a:ext cx="3794760" cy="914400"/>
+          <p:cNvPr id="16" name="Text 14"/>
+          <p:cNvSpPr txBox="1"/>
+          <p:nvPr/>
+        </p:nvSpPr>
+        <p:spPr>
+          <a:xfrm>
+            <a:off x="685800" y="3566160"/>
+            <a:ext cx="7772400" cy="841248"/>
           </a:xfrm>
           <a:prstGeom prst="roundRect">
             <a:avLst>
-              <a:gd name="adj" fmla="val 8000"/>
+              <a:gd name="adj" fmla="val 8696"/>
             </a:avLst>
           </a:prstGeom>
           <a:solidFill>
-            <a:srgbClr val="FFFFFF"/>
-          </a:solidFill>
-          <a:ln w="12700">
-            <a:solidFill>
-              <a:srgbClr val="DCD5C1"/>
-            </a:solidFill>
-            <a:prstDash val="solid"/>
-          </a:ln>
-        </p:spPr>
-      </p:sp>
-      <p:sp>
-        <p:nvSpPr>
-          <p:cNvPr id="14" name="Text 12"/>
-          <p:cNvSpPr txBox="1"/>
-          <p:nvPr/>
-        </p:nvSpPr>
-        <p:spPr>
-          <a:xfrm>
-            <a:off x="4791456" y="3044952"/>
-            <a:ext cx="420624" cy="420624"/>
-          </a:xfrm>
-          <a:prstGeom prst="roundRect">
-            <a:avLst>
-              <a:gd name="adj" fmla="val 50000"/>
-            </a:avLst>
-          </a:prstGeom>
-          <a:solidFill>
-            <a:srgbClr val="13294B"/>
+            <a:srgbClr val="E6F2F0"/>
           </a:solidFill>
           <a:ln/>
         </p:spPr>
         <p:txBody>
-          <a:bodyPr wrap="square" lIns="0" tIns="0" rIns="0" bIns="0" rtlCol="0" anchor="ctr"/>
-          <a:lstStyle/>
-          <a:p>
-            <a:pPr algn="ctr" indent="0" marL="0">
-              <a:lnSpc>
-                <a:spcPct val="100000"/>
-              </a:lnSpc>
-              <a:buNone/>
-            </a:pPr>
-            <a:r>
-              <a:rPr lang="en-US" sz="1600" b="1" dirty="0">
-                <a:solidFill>
-                  <a:srgbClr val="FFFFFF"/>
-                </a:solidFill>
-                <a:latin typeface="Calibri" pitchFamily="34" charset="0"/>
-                <a:ea typeface="Calibri" pitchFamily="34" charset="-122"/>
-                <a:cs typeface="Calibri" pitchFamily="34" charset="-120"/>
-              </a:rPr>
-              <a:t>d</a:t>
-            </a:r>
-            <a:endParaRPr lang="en-US" sz="1600" dirty="0"/>
-          </a:p>
-        </p:txBody>
-      </p:sp>
-      <p:sp>
-        <p:nvSpPr>
-          <p:cNvPr id="15" name="Text 13"/>
-          <p:cNvSpPr txBox="1"/>
-          <p:nvPr/>
-        </p:nvSpPr>
-        <p:spPr>
-          <a:xfrm>
-            <a:off x="5321808" y="2834640"/>
-            <a:ext cx="3044952" cy="841248"/>
-          </a:xfrm>
-          <a:prstGeom prst="rect">
-            <a:avLst/>
-          </a:prstGeom>
-          <a:noFill/>
-          <a:ln/>
-        </p:spPr>
-        <p:txBody>
-          <a:bodyPr wrap="square" lIns="25400" tIns="25400" rIns="25400" bIns="25400" rtlCol="0" anchor="ctr"/>
+          <a:bodyPr wrap="square" lIns="114300" tIns="114300" rIns="114300" bIns="114300" rtlCol="0" anchor="ctr"/>
           <a:lstStyle/>
           <a:p>
             <a:pPr algn="l" indent="0" marL="0">
@@ -30104,7 +29951,24 @@
               <a:buNone/>
             </a:pPr>
             <a:r>
-              <a:rPr lang="en-US" sz="1400" dirty="0">
+              <a:rPr lang="en-US" sz="1350" b="1" dirty="0">
+                <a:solidFill>
+                  <a:srgbClr val="2E7D4F"/>
+                </a:solidFill>
+                <a:latin typeface="Calibri" pitchFamily="34" charset="0"/>
+                <a:ea typeface="Calibri" pitchFamily="34" charset="-122"/>
+                <a:cs typeface="Calibri" pitchFamily="34" charset="-120"/>
+              </a:rPr>
+              <a:t>Resposta: a) </a:t>
+            </a:r>
+            <a:pPr algn="l" indent="0" marL="0">
+              <a:lnSpc>
+                <a:spcPct val="100000"/>
+              </a:lnSpc>
+              <a:buNone/>
+            </a:pPr>
+            <a:r>
+              <a:rPr lang="en-US" sz="1350" dirty="0">
                 <a:solidFill>
                   <a:srgbClr val="1F2A37"/>
                 </a:solidFill>
@@ -30112,15 +29976,15 @@
                 <a:ea typeface="Calibri" pitchFamily="34" charset="-122"/>
                 <a:cs typeface="Calibri" pitchFamily="34" charset="-120"/>
               </a:rPr>
-              <a:t>Fixação de preços</a:t>
-            </a:r>
-            <a:endParaRPr lang="en-US" sz="1400" dirty="0"/>
-          </a:p>
-        </p:txBody>
-      </p:sp>
-      <p:sp>
-        <p:nvSpPr>
-          <p:cNvPr id="16" name="Text 14"/>
+              <a:t>É um custo imposto a terceiros que não aparece no preço de nenhum produto: uma externalidade negativa, que justifica fiscalização e multas.</a:t>
+            </a:r>
+            <a:endParaRPr lang="en-US" sz="1350" dirty="0"/>
+          </a:p>
+        </p:txBody>
+      </p:sp>
+      <p:sp>
+        <p:nvSpPr>
+          <p:cNvPr id="17" name="Text 15"/>
           <p:cNvSpPr txBox="1"/>
           <p:nvPr/>
         </p:nvSpPr>
@@ -30235,7 +30099,7 @@
                 <a:ea typeface="Calibri" pitchFamily="34" charset="-122"/>
                 <a:cs typeface="Calibri" pitchFamily="34" charset="-120"/>
               </a:rPr>
-              <a:t>QUIZ DA UNIDADE 1 · PERGUNTA 5 DE 5 · RESPOSTA</a:t>
+              <a:t>QUIZ DA UNIDADE 1 · PERGUNTA 5 DE 5</a:t>
             </a:r>
             <a:endParaRPr lang="en-US" sz="1250" dirty="0"/>
           </a:p>
@@ -30292,11 +30156,11 @@
         <p:spPr>
           <a:xfrm>
             <a:off x="685800" y="1737360"/>
-            <a:ext cx="3794760" cy="749808"/>
+            <a:ext cx="3794760" cy="914400"/>
           </a:xfrm>
           <a:prstGeom prst="roundRect">
             <a:avLst>
-              <a:gd name="adj" fmla="val 9756"/>
+              <a:gd name="adj" fmla="val 8000"/>
             </a:avLst>
           </a:prstGeom>
           <a:solidFill>
@@ -30318,7 +30182,7 @@
         </p:nvSpPr>
         <p:spPr>
           <a:xfrm>
-            <a:off x="813816" y="1901952"/>
+            <a:off x="813816" y="1984248"/>
             <a:ext cx="420624" cy="420624"/>
           </a:xfrm>
           <a:prstGeom prst="roundRect">
@@ -30327,7 +30191,7 @@
             </a:avLst>
           </a:prstGeom>
           <a:solidFill>
-            <a:srgbClr val="9AA3AB"/>
+            <a:srgbClr val="13294B"/>
           </a:solidFill>
           <a:ln/>
         </p:spPr>
@@ -30365,7 +30229,7 @@
         <p:spPr>
           <a:xfrm>
             <a:off x="1344168" y="1773936"/>
-            <a:ext cx="3044952" cy="676656"/>
+            <a:ext cx="3044952" cy="841248"/>
           </a:xfrm>
           <a:prstGeom prst="rect">
             <a:avLst/>
@@ -30386,7 +30250,7 @@
             <a:r>
               <a:rPr lang="en-US" sz="1400" dirty="0">
                 <a:solidFill>
-                  <a:srgbClr val="5B6770"/>
+                  <a:srgbClr val="1F2A37"/>
                 </a:solidFill>
                 <a:latin typeface="Calibri" pitchFamily="34" charset="0"/>
                 <a:ea typeface="Calibri" pitchFamily="34" charset="-122"/>
@@ -30407,126 +30271,11 @@
         <p:spPr>
           <a:xfrm>
             <a:off x="4663440" y="1737360"/>
-            <a:ext cx="3794760" cy="749808"/>
+            <a:ext cx="3794760" cy="914400"/>
           </a:xfrm>
           <a:prstGeom prst="roundRect">
             <a:avLst>
-              <a:gd name="adj" fmla="val 9756"/>
-            </a:avLst>
-          </a:prstGeom>
-          <a:solidFill>
-            <a:srgbClr val="E3F2E8"/>
-          </a:solidFill>
-          <a:ln w="25400">
-            <a:solidFill>
-              <a:srgbClr val="2E7D4F"/>
-            </a:solidFill>
-            <a:prstDash val="solid"/>
-          </a:ln>
-        </p:spPr>
-      </p:sp>
-      <p:sp>
-        <p:nvSpPr>
-          <p:cNvPr id="8" name="Text 6"/>
-          <p:cNvSpPr txBox="1"/>
-          <p:nvPr/>
-        </p:nvSpPr>
-        <p:spPr>
-          <a:xfrm>
-            <a:off x="4791456" y="1901952"/>
-            <a:ext cx="420624" cy="420624"/>
-          </a:xfrm>
-          <a:prstGeom prst="roundRect">
-            <a:avLst>
-              <a:gd name="adj" fmla="val 50000"/>
-            </a:avLst>
-          </a:prstGeom>
-          <a:solidFill>
-            <a:srgbClr val="2E7D4F"/>
-          </a:solidFill>
-          <a:ln/>
-        </p:spPr>
-        <p:txBody>
-          <a:bodyPr wrap="square" lIns="0" tIns="0" rIns="0" bIns="0" rtlCol="0" anchor="ctr"/>
-          <a:lstStyle/>
-          <a:p>
-            <a:pPr algn="ctr" indent="0" marL="0">
-              <a:lnSpc>
-                <a:spcPct val="100000"/>
-              </a:lnSpc>
-              <a:buNone/>
-            </a:pPr>
-            <a:r>
-              <a:rPr lang="en-US" sz="1600" b="1" dirty="0">
-                <a:solidFill>
-                  <a:srgbClr val="FFFFFF"/>
-                </a:solidFill>
-                <a:latin typeface="Calibri" pitchFamily="34" charset="0"/>
-                <a:ea typeface="Calibri" pitchFamily="34" charset="-122"/>
-                <a:cs typeface="Calibri" pitchFamily="34" charset="-120"/>
-              </a:rPr>
-              <a:t>b</a:t>
-            </a:r>
-            <a:endParaRPr lang="en-US" sz="1600" dirty="0"/>
-          </a:p>
-        </p:txBody>
-      </p:sp>
-      <p:sp>
-        <p:nvSpPr>
-          <p:cNvPr id="9" name="Text 7"/>
-          <p:cNvSpPr txBox="1"/>
-          <p:nvPr/>
-        </p:nvSpPr>
-        <p:spPr>
-          <a:xfrm>
-            <a:off x="5321808" y="1773936"/>
-            <a:ext cx="3044952" cy="676656"/>
-          </a:xfrm>
-          <a:prstGeom prst="rect">
-            <a:avLst/>
-          </a:prstGeom>
-          <a:noFill/>
-          <a:ln/>
-        </p:spPr>
-        <p:txBody>
-          <a:bodyPr wrap="square" lIns="25400" tIns="25400" rIns="25400" bIns="25400" rtlCol="0" anchor="ctr"/>
-          <a:lstStyle/>
-          <a:p>
-            <a:pPr algn="l" indent="0" marL="0">
-              <a:lnSpc>
-                <a:spcPct val="100000"/>
-              </a:lnSpc>
-              <a:buNone/>
-            </a:pPr>
-            <a:r>
-              <a:rPr lang="en-US" sz="1400" b="1" dirty="0">
-                <a:solidFill>
-                  <a:srgbClr val="1F2A37"/>
-                </a:solidFill>
-                <a:latin typeface="Calibri" pitchFamily="34" charset="0"/>
-                <a:ea typeface="Calibri" pitchFamily="34" charset="-122"/>
-                <a:cs typeface="Calibri" pitchFamily="34" charset="-120"/>
-              </a:rPr>
-              <a:t>Distributiva</a:t>
-            </a:r>
-            <a:endParaRPr lang="en-US" sz="1400" dirty="0"/>
-          </a:p>
-        </p:txBody>
-      </p:sp>
-      <p:sp>
-        <p:nvSpPr>
-          <p:cNvPr id="10" name="Shape 8"/>
-          <p:cNvSpPr/>
-          <p:nvPr/>
-        </p:nvSpPr>
-        <p:spPr>
-          <a:xfrm>
-            <a:off x="685800" y="2633472"/>
-            <a:ext cx="3794760" cy="749808"/>
-          </a:xfrm>
-          <a:prstGeom prst="roundRect">
-            <a:avLst>
-              <a:gd name="adj" fmla="val 9756"/>
+              <a:gd name="adj" fmla="val 8000"/>
             </a:avLst>
           </a:prstGeom>
           <a:solidFill>
@@ -30542,13 +30291,13 @@
       </p:sp>
       <p:sp>
         <p:nvSpPr>
-          <p:cNvPr id="11" name="Text 9"/>
+          <p:cNvPr id="8" name="Text 6"/>
           <p:cNvSpPr txBox="1"/>
           <p:nvPr/>
         </p:nvSpPr>
         <p:spPr>
           <a:xfrm>
-            <a:off x="813816" y="2798064"/>
+            <a:off x="4791456" y="1984248"/>
             <a:ext cx="420624" cy="420624"/>
           </a:xfrm>
           <a:prstGeom prst="roundRect">
@@ -30557,7 +30306,7 @@
             </a:avLst>
           </a:prstGeom>
           <a:solidFill>
-            <a:srgbClr val="9AA3AB"/>
+            <a:srgbClr val="13294B"/>
           </a:solidFill>
           <a:ln/>
         </p:spPr>
@@ -30580,7 +30329,7 @@
                 <a:ea typeface="Calibri" pitchFamily="34" charset="-122"/>
                 <a:cs typeface="Calibri" pitchFamily="34" charset="-120"/>
               </a:rPr>
-              <a:t>c</a:t>
+              <a:t>b</a:t>
             </a:r>
             <a:endParaRPr lang="en-US" sz="1600" dirty="0"/>
           </a:p>
@@ -30588,14 +30337,14 @@
       </p:sp>
       <p:sp>
         <p:nvSpPr>
-          <p:cNvPr id="12" name="Text 10"/>
+          <p:cNvPr id="9" name="Text 7"/>
           <p:cNvSpPr txBox="1"/>
           <p:nvPr/>
         </p:nvSpPr>
         <p:spPr>
           <a:xfrm>
-            <a:off x="1344168" y="2670048"/>
-            <a:ext cx="3044952" cy="676656"/>
+            <a:off x="5321808" y="1773936"/>
+            <a:ext cx="3044952" cy="841248"/>
           </a:xfrm>
           <a:prstGeom prst="rect">
             <a:avLst/>
@@ -30616,13 +30365,13 @@
             <a:r>
               <a:rPr lang="en-US" sz="1400" dirty="0">
                 <a:solidFill>
-                  <a:srgbClr val="5B6770"/>
-                </a:solidFill>
-                <a:latin typeface="Calibri" pitchFamily="34" charset="0"/>
-                <a:ea typeface="Calibri" pitchFamily="34" charset="-122"/>
-                <a:cs typeface="Calibri" pitchFamily="34" charset="-120"/>
-              </a:rPr>
-              <a:t>Estabilizadora</a:t>
+                  <a:srgbClr val="1F2A37"/>
+                </a:solidFill>
+                <a:latin typeface="Calibri" pitchFamily="34" charset="0"/>
+                <a:ea typeface="Calibri" pitchFamily="34" charset="-122"/>
+                <a:cs typeface="Calibri" pitchFamily="34" charset="-120"/>
+              </a:rPr>
+              <a:t>Distributiva</a:t>
             </a:r>
             <a:endParaRPr lang="en-US" sz="1400" dirty="0"/>
           </a:p>
@@ -30630,18 +30379,18 @@
       </p:sp>
       <p:sp>
         <p:nvSpPr>
-          <p:cNvPr id="13" name="Shape 11"/>
+          <p:cNvPr id="10" name="Shape 8"/>
           <p:cNvSpPr/>
           <p:nvPr/>
         </p:nvSpPr>
         <p:spPr>
           <a:xfrm>
-            <a:off x="4663440" y="2633472"/>
-            <a:ext cx="3794760" cy="749808"/>
+            <a:off x="685800" y="2798064"/>
+            <a:ext cx="3794760" cy="914400"/>
           </a:xfrm>
           <a:prstGeom prst="roundRect">
             <a:avLst>
-              <a:gd name="adj" fmla="val 9756"/>
+              <a:gd name="adj" fmla="val 8000"/>
             </a:avLst>
           </a:prstGeom>
           <a:solidFill>
@@ -30657,13 +30406,13 @@
       </p:sp>
       <p:sp>
         <p:nvSpPr>
-          <p:cNvPr id="14" name="Text 12"/>
+          <p:cNvPr id="11" name="Text 9"/>
           <p:cNvSpPr txBox="1"/>
           <p:nvPr/>
         </p:nvSpPr>
         <p:spPr>
           <a:xfrm>
-            <a:off x="4791456" y="2798064"/>
+            <a:off x="813816" y="3044952"/>
             <a:ext cx="420624" cy="420624"/>
           </a:xfrm>
           <a:prstGeom prst="roundRect">
@@ -30672,7 +30421,7 @@
             </a:avLst>
           </a:prstGeom>
           <a:solidFill>
-            <a:srgbClr val="9AA3AB"/>
+            <a:srgbClr val="13294B"/>
           </a:solidFill>
           <a:ln/>
         </p:spPr>
@@ -30695,6 +30444,121 @@
                 <a:ea typeface="Calibri" pitchFamily="34" charset="-122"/>
                 <a:cs typeface="Calibri" pitchFamily="34" charset="-120"/>
               </a:rPr>
+              <a:t>c</a:t>
+            </a:r>
+            <a:endParaRPr lang="en-US" sz="1600" dirty="0"/>
+          </a:p>
+        </p:txBody>
+      </p:sp>
+      <p:sp>
+        <p:nvSpPr>
+          <p:cNvPr id="12" name="Text 10"/>
+          <p:cNvSpPr txBox="1"/>
+          <p:nvPr/>
+        </p:nvSpPr>
+        <p:spPr>
+          <a:xfrm>
+            <a:off x="1344168" y="2834640"/>
+            <a:ext cx="3044952" cy="841248"/>
+          </a:xfrm>
+          <a:prstGeom prst="rect">
+            <a:avLst/>
+          </a:prstGeom>
+          <a:noFill/>
+          <a:ln/>
+        </p:spPr>
+        <p:txBody>
+          <a:bodyPr wrap="square" lIns="25400" tIns="25400" rIns="25400" bIns="25400" rtlCol="0" anchor="ctr"/>
+          <a:lstStyle/>
+          <a:p>
+            <a:pPr algn="l" indent="0" marL="0">
+              <a:lnSpc>
+                <a:spcPct val="100000"/>
+              </a:lnSpc>
+              <a:buNone/>
+            </a:pPr>
+            <a:r>
+              <a:rPr lang="en-US" sz="1400" dirty="0">
+                <a:solidFill>
+                  <a:srgbClr val="1F2A37"/>
+                </a:solidFill>
+                <a:latin typeface="Calibri" pitchFamily="34" charset="0"/>
+                <a:ea typeface="Calibri" pitchFamily="34" charset="-122"/>
+                <a:cs typeface="Calibri" pitchFamily="34" charset="-120"/>
+              </a:rPr>
+              <a:t>Estabilizadora</a:t>
+            </a:r>
+            <a:endParaRPr lang="en-US" sz="1400" dirty="0"/>
+          </a:p>
+        </p:txBody>
+      </p:sp>
+      <p:sp>
+        <p:nvSpPr>
+          <p:cNvPr id="13" name="Shape 11"/>
+          <p:cNvSpPr/>
+          <p:nvPr/>
+        </p:nvSpPr>
+        <p:spPr>
+          <a:xfrm>
+            <a:off x="4663440" y="2798064"/>
+            <a:ext cx="3794760" cy="914400"/>
+          </a:xfrm>
+          <a:prstGeom prst="roundRect">
+            <a:avLst>
+              <a:gd name="adj" fmla="val 8000"/>
+            </a:avLst>
+          </a:prstGeom>
+          <a:solidFill>
+            <a:srgbClr val="FFFFFF"/>
+          </a:solidFill>
+          <a:ln w="12700">
+            <a:solidFill>
+              <a:srgbClr val="DCD5C1"/>
+            </a:solidFill>
+            <a:prstDash val="solid"/>
+          </a:ln>
+        </p:spPr>
+      </p:sp>
+      <p:sp>
+        <p:nvSpPr>
+          <p:cNvPr id="14" name="Text 12"/>
+          <p:cNvSpPr txBox="1"/>
+          <p:nvPr/>
+        </p:nvSpPr>
+        <p:spPr>
+          <a:xfrm>
+            <a:off x="4791456" y="3044952"/>
+            <a:ext cx="420624" cy="420624"/>
+          </a:xfrm>
+          <a:prstGeom prst="roundRect">
+            <a:avLst>
+              <a:gd name="adj" fmla="val 50000"/>
+            </a:avLst>
+          </a:prstGeom>
+          <a:solidFill>
+            <a:srgbClr val="13294B"/>
+          </a:solidFill>
+          <a:ln/>
+        </p:spPr>
+        <p:txBody>
+          <a:bodyPr wrap="square" lIns="0" tIns="0" rIns="0" bIns="0" rtlCol="0" anchor="ctr"/>
+          <a:lstStyle/>
+          <a:p>
+            <a:pPr algn="ctr" indent="0" marL="0">
+              <a:lnSpc>
+                <a:spcPct val="100000"/>
+              </a:lnSpc>
+              <a:buNone/>
+            </a:pPr>
+            <a:r>
+              <a:rPr lang="en-US" sz="1600" b="1" dirty="0">
+                <a:solidFill>
+                  <a:srgbClr val="FFFFFF"/>
+                </a:solidFill>
+                <a:latin typeface="Calibri" pitchFamily="34" charset="0"/>
+                <a:ea typeface="Calibri" pitchFamily="34" charset="-122"/>
+                <a:cs typeface="Calibri" pitchFamily="34" charset="-120"/>
+              </a:rPr>
               <a:t>d</a:t>
             </a:r>
             <a:endParaRPr lang="en-US" sz="1600" dirty="0"/>
@@ -30709,8 +30573,8 @@
         </p:nvSpPr>
         <p:spPr>
           <a:xfrm>
-            <a:off x="5321808" y="2670048"/>
-            <a:ext cx="3044952" cy="676656"/>
+            <a:off x="5321808" y="2834640"/>
+            <a:ext cx="3044952" cy="841248"/>
           </a:xfrm>
           <a:prstGeom prst="rect">
             <a:avLst/>
@@ -30731,7 +30595,7 @@
             <a:r>
               <a:rPr lang="en-US" sz="1400" dirty="0">
                 <a:solidFill>
-                  <a:srgbClr val="5B6770"/>
+                  <a:srgbClr val="1F2A37"/>
                 </a:solidFill>
                 <a:latin typeface="Calibri" pitchFamily="34" charset="0"/>
                 <a:ea typeface="Calibri" pitchFamily="34" charset="-122"/>
@@ -30746,69 +30610,6 @@
       <p:sp>
         <p:nvSpPr>
           <p:cNvPr id="16" name="Text 14"/>
-          <p:cNvSpPr txBox="1"/>
-          <p:nvPr/>
-        </p:nvSpPr>
-        <p:spPr>
-          <a:xfrm>
-            <a:off x="685800" y="3566160"/>
-            <a:ext cx="7772400" cy="841248"/>
-          </a:xfrm>
-          <a:prstGeom prst="roundRect">
-            <a:avLst>
-              <a:gd name="adj" fmla="val 8696"/>
-            </a:avLst>
-          </a:prstGeom>
-          <a:solidFill>
-            <a:srgbClr val="E6F2F0"/>
-          </a:solidFill>
-          <a:ln/>
-        </p:spPr>
-        <p:txBody>
-          <a:bodyPr wrap="square" lIns="114300" tIns="114300" rIns="114300" bIns="114300" rtlCol="0" anchor="ctr"/>
-          <a:lstStyle/>
-          <a:p>
-            <a:pPr algn="l" indent="0" marL="0">
-              <a:lnSpc>
-                <a:spcPct val="100000"/>
-              </a:lnSpc>
-              <a:buNone/>
-            </a:pPr>
-            <a:r>
-              <a:rPr lang="en-US" sz="1350" b="1" dirty="0">
-                <a:solidFill>
-                  <a:srgbClr val="2E7D4F"/>
-                </a:solidFill>
-                <a:latin typeface="Calibri" pitchFamily="34" charset="0"/>
-                <a:ea typeface="Calibri" pitchFamily="34" charset="-122"/>
-                <a:cs typeface="Calibri" pitchFamily="34" charset="-120"/>
-              </a:rPr>
-              <a:t>Resposta: b) </a:t>
-            </a:r>
-            <a:pPr algn="l" indent="0" marL="0">
-              <a:lnSpc>
-                <a:spcPct val="100000"/>
-              </a:lnSpc>
-              <a:buNone/>
-            </a:pPr>
-            <a:r>
-              <a:rPr lang="en-US" sz="1350" dirty="0">
-                <a:solidFill>
-                  <a:srgbClr val="1F2A37"/>
-                </a:solidFill>
-                <a:latin typeface="Calibri" pitchFamily="34" charset="0"/>
-                <a:ea typeface="Calibri" pitchFamily="34" charset="-122"/>
-                <a:cs typeface="Calibri" pitchFamily="34" charset="-120"/>
-              </a:rPr>
-              <a:t>São instrumentos da função distributiva: cobram mais de quem tem mais e reduzem o custo para as famílias de baixa renda.</a:t>
-            </a:r>
-            <a:endParaRPr lang="en-US" sz="1350" dirty="0"/>
-          </a:p>
-        </p:txBody>
-      </p:sp>
-      <p:sp>
-        <p:nvSpPr>
-          <p:cNvPr id="17" name="Text 15"/>
           <p:cNvSpPr txBox="1"/>
           <p:nvPr/>
         </p:nvSpPr>
@@ -30859,6 +30660,694 @@
 <file path=ppt/slides/slide44.xml><?xml version="1.0" encoding="utf-8"?>
 <p:sld xmlns:a="http://schemas.openxmlformats.org/drawingml/2006/main" xmlns:r="http://schemas.openxmlformats.org/officeDocument/2006/relationships" xmlns:p="http://schemas.openxmlformats.org/presentationml/2006/main">
   <p:cSld name="Slide 44">
+    <p:bg>
+      <p:bgPr>
+        <a:blipFill dpi="0" rotWithShape="1">
+          <a:blip r:embed="rId1">
+            <a:lum/>
+          </a:blip>
+          <a:srcRect/>
+          <a:stretch>
+            <a:fillRect/>
+          </a:stretch>
+        </a:blipFill>
+        <a:effectLst/>
+      </p:bgPr>
+    </p:bg>
+    <p:spTree>
+      <p:nvGrpSpPr>
+        <p:cNvPr id="1" name=""/>
+        <p:cNvGrpSpPr/>
+        <p:nvPr/>
+      </p:nvGrpSpPr>
+      <p:grpSpPr>
+        <a:xfrm>
+          <a:off x="0" y="0"/>
+          <a:ext cx="0" cy="0"/>
+          <a:chOff x="0" y="0"/>
+          <a:chExt cx="0" cy="0"/>
+        </a:xfrm>
+      </p:grpSpPr>
+      <p:sp>
+        <p:nvSpPr>
+          <p:cNvPr id="2" name="Text 0"/>
+          <p:cNvSpPr txBox="1"/>
+          <p:nvPr/>
+        </p:nvSpPr>
+        <p:spPr>
+          <a:xfrm>
+            <a:off x="731520" y="274320"/>
+            <a:ext cx="7680960" cy="365760"/>
+          </a:xfrm>
+          <a:prstGeom prst="rect">
+            <a:avLst/>
+          </a:prstGeom>
+          <a:noFill/>
+          <a:ln/>
+        </p:spPr>
+        <p:txBody>
+          <a:bodyPr wrap="square" lIns="0" tIns="0" rIns="0" bIns="0" rtlCol="0" anchor="ctr"/>
+          <a:lstStyle/>
+          <a:p>
+            <a:pPr algn="ctr" indent="0" marL="0">
+              <a:lnSpc>
+                <a:spcPct val="100000"/>
+              </a:lnSpc>
+              <a:buNone/>
+            </a:pPr>
+            <a:r>
+              <a:rPr lang="en-US" sz="1250" b="1" dirty="0">
+                <a:solidFill>
+                  <a:srgbClr val="2A8C85"/>
+                </a:solidFill>
+                <a:latin typeface="Calibri" pitchFamily="34" charset="0"/>
+                <a:ea typeface="Calibri" pitchFamily="34" charset="-122"/>
+                <a:cs typeface="Calibri" pitchFamily="34" charset="-120"/>
+              </a:rPr>
+              <a:t>QUIZ DA UNIDADE 1 · PERGUNTA 5 DE 5 · RESPOSTA</a:t>
+            </a:r>
+            <a:endParaRPr lang="en-US" sz="1250" dirty="0"/>
+          </a:p>
+        </p:txBody>
+      </p:sp>
+      <p:sp>
+        <p:nvSpPr>
+          <p:cNvPr id="3" name="Text 1"/>
+          <p:cNvSpPr txBox="1"/>
+          <p:nvPr/>
+        </p:nvSpPr>
+        <p:spPr>
+          <a:xfrm>
+            <a:off x="731520" y="658368"/>
+            <a:ext cx="7680960" cy="960120"/>
+          </a:xfrm>
+          <a:prstGeom prst="rect">
+            <a:avLst/>
+          </a:prstGeom>
+          <a:noFill/>
+          <a:ln/>
+        </p:spPr>
+        <p:txBody>
+          <a:bodyPr wrap="square" lIns="0" tIns="0" rIns="0" bIns="0" rtlCol="0" anchor="ctr"/>
+          <a:lstStyle/>
+          <a:p>
+            <a:pPr algn="ctr" indent="0" marL="0">
+              <a:lnSpc>
+                <a:spcPct val="100000"/>
+              </a:lnSpc>
+              <a:buNone/>
+            </a:pPr>
+            <a:r>
+              <a:rPr lang="en-US" sz="1900" b="1" dirty="0">
+                <a:solidFill>
+                  <a:srgbClr val="13294B"/>
+                </a:solidFill>
+                <a:latin typeface="Calibri" pitchFamily="34" charset="0"/>
+                <a:ea typeface="Calibri" pitchFamily="34" charset="-122"/>
+                <a:cs typeface="Calibri" pitchFamily="34" charset="-120"/>
+              </a:rPr>
+              <a:t>IPTU progressivo e tarifa social de água cumprem qual função econômica do Estado?</a:t>
+            </a:r>
+            <a:endParaRPr lang="en-US" sz="1900" dirty="0"/>
+          </a:p>
+        </p:txBody>
+      </p:sp>
+      <p:sp>
+        <p:nvSpPr>
+          <p:cNvPr id="4" name="Shape 2"/>
+          <p:cNvSpPr/>
+          <p:nvPr/>
+        </p:nvSpPr>
+        <p:spPr>
+          <a:xfrm>
+            <a:off x="685800" y="1737360"/>
+            <a:ext cx="3794760" cy="749808"/>
+          </a:xfrm>
+          <a:prstGeom prst="roundRect">
+            <a:avLst>
+              <a:gd name="adj" fmla="val 9756"/>
+            </a:avLst>
+          </a:prstGeom>
+          <a:solidFill>
+            <a:srgbClr val="FFFFFF"/>
+          </a:solidFill>
+          <a:ln w="12700">
+            <a:solidFill>
+              <a:srgbClr val="DCD5C1"/>
+            </a:solidFill>
+            <a:prstDash val="solid"/>
+          </a:ln>
+        </p:spPr>
+      </p:sp>
+      <p:sp>
+        <p:nvSpPr>
+          <p:cNvPr id="5" name="Text 3"/>
+          <p:cNvSpPr txBox="1"/>
+          <p:nvPr/>
+        </p:nvSpPr>
+        <p:spPr>
+          <a:xfrm>
+            <a:off x="813816" y="1901952"/>
+            <a:ext cx="420624" cy="420624"/>
+          </a:xfrm>
+          <a:prstGeom prst="roundRect">
+            <a:avLst>
+              <a:gd name="adj" fmla="val 50000"/>
+            </a:avLst>
+          </a:prstGeom>
+          <a:solidFill>
+            <a:srgbClr val="9AA3AB"/>
+          </a:solidFill>
+          <a:ln/>
+        </p:spPr>
+        <p:txBody>
+          <a:bodyPr wrap="square" lIns="0" tIns="0" rIns="0" bIns="0" rtlCol="0" anchor="ctr"/>
+          <a:lstStyle/>
+          <a:p>
+            <a:pPr algn="ctr" indent="0" marL="0">
+              <a:lnSpc>
+                <a:spcPct val="100000"/>
+              </a:lnSpc>
+              <a:buNone/>
+            </a:pPr>
+            <a:r>
+              <a:rPr lang="en-US" sz="1600" b="1" dirty="0">
+                <a:solidFill>
+                  <a:srgbClr val="FFFFFF"/>
+                </a:solidFill>
+                <a:latin typeface="Calibri" pitchFamily="34" charset="0"/>
+                <a:ea typeface="Calibri" pitchFamily="34" charset="-122"/>
+                <a:cs typeface="Calibri" pitchFamily="34" charset="-120"/>
+              </a:rPr>
+              <a:t>a</a:t>
+            </a:r>
+            <a:endParaRPr lang="en-US" sz="1600" dirty="0"/>
+          </a:p>
+        </p:txBody>
+      </p:sp>
+      <p:sp>
+        <p:nvSpPr>
+          <p:cNvPr id="6" name="Text 4"/>
+          <p:cNvSpPr txBox="1"/>
+          <p:nvPr/>
+        </p:nvSpPr>
+        <p:spPr>
+          <a:xfrm>
+            <a:off x="1344168" y="1773936"/>
+            <a:ext cx="3044952" cy="676656"/>
+          </a:xfrm>
+          <a:prstGeom prst="rect">
+            <a:avLst/>
+          </a:prstGeom>
+          <a:noFill/>
+          <a:ln/>
+        </p:spPr>
+        <p:txBody>
+          <a:bodyPr wrap="square" lIns="25400" tIns="25400" rIns="25400" bIns="25400" rtlCol="0" anchor="ctr"/>
+          <a:lstStyle/>
+          <a:p>
+            <a:pPr algn="l" indent="0" marL="0">
+              <a:lnSpc>
+                <a:spcPct val="100000"/>
+              </a:lnSpc>
+              <a:buNone/>
+            </a:pPr>
+            <a:r>
+              <a:rPr lang="en-US" sz="1400" dirty="0">
+                <a:solidFill>
+                  <a:srgbClr val="5B6770"/>
+                </a:solidFill>
+                <a:latin typeface="Calibri" pitchFamily="34" charset="0"/>
+                <a:ea typeface="Calibri" pitchFamily="34" charset="-122"/>
+                <a:cs typeface="Calibri" pitchFamily="34" charset="-120"/>
+              </a:rPr>
+              <a:t>Alocativa</a:t>
+            </a:r>
+            <a:endParaRPr lang="en-US" sz="1400" dirty="0"/>
+          </a:p>
+        </p:txBody>
+      </p:sp>
+      <p:sp>
+        <p:nvSpPr>
+          <p:cNvPr id="7" name="Shape 5"/>
+          <p:cNvSpPr/>
+          <p:nvPr/>
+        </p:nvSpPr>
+        <p:spPr>
+          <a:xfrm>
+            <a:off x="4663440" y="1737360"/>
+            <a:ext cx="3794760" cy="749808"/>
+          </a:xfrm>
+          <a:prstGeom prst="roundRect">
+            <a:avLst>
+              <a:gd name="adj" fmla="val 9756"/>
+            </a:avLst>
+          </a:prstGeom>
+          <a:solidFill>
+            <a:srgbClr val="E3F2E8"/>
+          </a:solidFill>
+          <a:ln w="25400">
+            <a:solidFill>
+              <a:srgbClr val="2E7D4F"/>
+            </a:solidFill>
+            <a:prstDash val="solid"/>
+          </a:ln>
+        </p:spPr>
+      </p:sp>
+      <p:sp>
+        <p:nvSpPr>
+          <p:cNvPr id="8" name="Text 6"/>
+          <p:cNvSpPr txBox="1"/>
+          <p:nvPr/>
+        </p:nvSpPr>
+        <p:spPr>
+          <a:xfrm>
+            <a:off x="4791456" y="1901952"/>
+            <a:ext cx="420624" cy="420624"/>
+          </a:xfrm>
+          <a:prstGeom prst="roundRect">
+            <a:avLst>
+              <a:gd name="adj" fmla="val 50000"/>
+            </a:avLst>
+          </a:prstGeom>
+          <a:solidFill>
+            <a:srgbClr val="2E7D4F"/>
+          </a:solidFill>
+          <a:ln/>
+        </p:spPr>
+        <p:txBody>
+          <a:bodyPr wrap="square" lIns="0" tIns="0" rIns="0" bIns="0" rtlCol="0" anchor="ctr"/>
+          <a:lstStyle/>
+          <a:p>
+            <a:pPr algn="ctr" indent="0" marL="0">
+              <a:lnSpc>
+                <a:spcPct val="100000"/>
+              </a:lnSpc>
+              <a:buNone/>
+            </a:pPr>
+            <a:r>
+              <a:rPr lang="en-US" sz="1600" b="1" dirty="0">
+                <a:solidFill>
+                  <a:srgbClr val="FFFFFF"/>
+                </a:solidFill>
+                <a:latin typeface="Calibri" pitchFamily="34" charset="0"/>
+                <a:ea typeface="Calibri" pitchFamily="34" charset="-122"/>
+                <a:cs typeface="Calibri" pitchFamily="34" charset="-120"/>
+              </a:rPr>
+              <a:t>b</a:t>
+            </a:r>
+            <a:endParaRPr lang="en-US" sz="1600" dirty="0"/>
+          </a:p>
+        </p:txBody>
+      </p:sp>
+      <p:sp>
+        <p:nvSpPr>
+          <p:cNvPr id="9" name="Text 7"/>
+          <p:cNvSpPr txBox="1"/>
+          <p:nvPr/>
+        </p:nvSpPr>
+        <p:spPr>
+          <a:xfrm>
+            <a:off x="5321808" y="1773936"/>
+            <a:ext cx="3044952" cy="676656"/>
+          </a:xfrm>
+          <a:prstGeom prst="rect">
+            <a:avLst/>
+          </a:prstGeom>
+          <a:noFill/>
+          <a:ln/>
+        </p:spPr>
+        <p:txBody>
+          <a:bodyPr wrap="square" lIns="25400" tIns="25400" rIns="25400" bIns="25400" rtlCol="0" anchor="ctr"/>
+          <a:lstStyle/>
+          <a:p>
+            <a:pPr algn="l" indent="0" marL="0">
+              <a:lnSpc>
+                <a:spcPct val="100000"/>
+              </a:lnSpc>
+              <a:buNone/>
+            </a:pPr>
+            <a:r>
+              <a:rPr lang="en-US" sz="1400" b="1" dirty="0">
+                <a:solidFill>
+                  <a:srgbClr val="1F2A37"/>
+                </a:solidFill>
+                <a:latin typeface="Calibri" pitchFamily="34" charset="0"/>
+                <a:ea typeface="Calibri" pitchFamily="34" charset="-122"/>
+                <a:cs typeface="Calibri" pitchFamily="34" charset="-120"/>
+              </a:rPr>
+              <a:t>Distributiva</a:t>
+            </a:r>
+            <a:endParaRPr lang="en-US" sz="1400" dirty="0"/>
+          </a:p>
+        </p:txBody>
+      </p:sp>
+      <p:sp>
+        <p:nvSpPr>
+          <p:cNvPr id="10" name="Shape 8"/>
+          <p:cNvSpPr/>
+          <p:nvPr/>
+        </p:nvSpPr>
+        <p:spPr>
+          <a:xfrm>
+            <a:off x="685800" y="2633472"/>
+            <a:ext cx="3794760" cy="749808"/>
+          </a:xfrm>
+          <a:prstGeom prst="roundRect">
+            <a:avLst>
+              <a:gd name="adj" fmla="val 9756"/>
+            </a:avLst>
+          </a:prstGeom>
+          <a:solidFill>
+            <a:srgbClr val="FFFFFF"/>
+          </a:solidFill>
+          <a:ln w="12700">
+            <a:solidFill>
+              <a:srgbClr val="DCD5C1"/>
+            </a:solidFill>
+            <a:prstDash val="solid"/>
+          </a:ln>
+        </p:spPr>
+      </p:sp>
+      <p:sp>
+        <p:nvSpPr>
+          <p:cNvPr id="11" name="Text 9"/>
+          <p:cNvSpPr txBox="1"/>
+          <p:nvPr/>
+        </p:nvSpPr>
+        <p:spPr>
+          <a:xfrm>
+            <a:off x="813816" y="2798064"/>
+            <a:ext cx="420624" cy="420624"/>
+          </a:xfrm>
+          <a:prstGeom prst="roundRect">
+            <a:avLst>
+              <a:gd name="adj" fmla="val 50000"/>
+            </a:avLst>
+          </a:prstGeom>
+          <a:solidFill>
+            <a:srgbClr val="9AA3AB"/>
+          </a:solidFill>
+          <a:ln/>
+        </p:spPr>
+        <p:txBody>
+          <a:bodyPr wrap="square" lIns="0" tIns="0" rIns="0" bIns="0" rtlCol="0" anchor="ctr"/>
+          <a:lstStyle/>
+          <a:p>
+            <a:pPr algn="ctr" indent="0" marL="0">
+              <a:lnSpc>
+                <a:spcPct val="100000"/>
+              </a:lnSpc>
+              <a:buNone/>
+            </a:pPr>
+            <a:r>
+              <a:rPr lang="en-US" sz="1600" b="1" dirty="0">
+                <a:solidFill>
+                  <a:srgbClr val="FFFFFF"/>
+                </a:solidFill>
+                <a:latin typeface="Calibri" pitchFamily="34" charset="0"/>
+                <a:ea typeface="Calibri" pitchFamily="34" charset="-122"/>
+                <a:cs typeface="Calibri" pitchFamily="34" charset="-120"/>
+              </a:rPr>
+              <a:t>c</a:t>
+            </a:r>
+            <a:endParaRPr lang="en-US" sz="1600" dirty="0"/>
+          </a:p>
+        </p:txBody>
+      </p:sp>
+      <p:sp>
+        <p:nvSpPr>
+          <p:cNvPr id="12" name="Text 10"/>
+          <p:cNvSpPr txBox="1"/>
+          <p:nvPr/>
+        </p:nvSpPr>
+        <p:spPr>
+          <a:xfrm>
+            <a:off x="1344168" y="2670048"/>
+            <a:ext cx="3044952" cy="676656"/>
+          </a:xfrm>
+          <a:prstGeom prst="rect">
+            <a:avLst/>
+          </a:prstGeom>
+          <a:noFill/>
+          <a:ln/>
+        </p:spPr>
+        <p:txBody>
+          <a:bodyPr wrap="square" lIns="25400" tIns="25400" rIns="25400" bIns="25400" rtlCol="0" anchor="ctr"/>
+          <a:lstStyle/>
+          <a:p>
+            <a:pPr algn="l" indent="0" marL="0">
+              <a:lnSpc>
+                <a:spcPct val="100000"/>
+              </a:lnSpc>
+              <a:buNone/>
+            </a:pPr>
+            <a:r>
+              <a:rPr lang="en-US" sz="1400" dirty="0">
+                <a:solidFill>
+                  <a:srgbClr val="5B6770"/>
+                </a:solidFill>
+                <a:latin typeface="Calibri" pitchFamily="34" charset="0"/>
+                <a:ea typeface="Calibri" pitchFamily="34" charset="-122"/>
+                <a:cs typeface="Calibri" pitchFamily="34" charset="-120"/>
+              </a:rPr>
+              <a:t>Estabilizadora</a:t>
+            </a:r>
+            <a:endParaRPr lang="en-US" sz="1400" dirty="0"/>
+          </a:p>
+        </p:txBody>
+      </p:sp>
+      <p:sp>
+        <p:nvSpPr>
+          <p:cNvPr id="13" name="Shape 11"/>
+          <p:cNvSpPr/>
+          <p:nvPr/>
+        </p:nvSpPr>
+        <p:spPr>
+          <a:xfrm>
+            <a:off x="4663440" y="2633472"/>
+            <a:ext cx="3794760" cy="749808"/>
+          </a:xfrm>
+          <a:prstGeom prst="roundRect">
+            <a:avLst>
+              <a:gd name="adj" fmla="val 9756"/>
+            </a:avLst>
+          </a:prstGeom>
+          <a:solidFill>
+            <a:srgbClr val="FFFFFF"/>
+          </a:solidFill>
+          <a:ln w="12700">
+            <a:solidFill>
+              <a:srgbClr val="DCD5C1"/>
+            </a:solidFill>
+            <a:prstDash val="solid"/>
+          </a:ln>
+        </p:spPr>
+      </p:sp>
+      <p:sp>
+        <p:nvSpPr>
+          <p:cNvPr id="14" name="Text 12"/>
+          <p:cNvSpPr txBox="1"/>
+          <p:nvPr/>
+        </p:nvSpPr>
+        <p:spPr>
+          <a:xfrm>
+            <a:off x="4791456" y="2798064"/>
+            <a:ext cx="420624" cy="420624"/>
+          </a:xfrm>
+          <a:prstGeom prst="roundRect">
+            <a:avLst>
+              <a:gd name="adj" fmla="val 50000"/>
+            </a:avLst>
+          </a:prstGeom>
+          <a:solidFill>
+            <a:srgbClr val="9AA3AB"/>
+          </a:solidFill>
+          <a:ln/>
+        </p:spPr>
+        <p:txBody>
+          <a:bodyPr wrap="square" lIns="0" tIns="0" rIns="0" bIns="0" rtlCol="0" anchor="ctr"/>
+          <a:lstStyle/>
+          <a:p>
+            <a:pPr algn="ctr" indent="0" marL="0">
+              <a:lnSpc>
+                <a:spcPct val="100000"/>
+              </a:lnSpc>
+              <a:buNone/>
+            </a:pPr>
+            <a:r>
+              <a:rPr lang="en-US" sz="1600" b="1" dirty="0">
+                <a:solidFill>
+                  <a:srgbClr val="FFFFFF"/>
+                </a:solidFill>
+                <a:latin typeface="Calibri" pitchFamily="34" charset="0"/>
+                <a:ea typeface="Calibri" pitchFamily="34" charset="-122"/>
+                <a:cs typeface="Calibri" pitchFamily="34" charset="-120"/>
+              </a:rPr>
+              <a:t>d</a:t>
+            </a:r>
+            <a:endParaRPr lang="en-US" sz="1600" dirty="0"/>
+          </a:p>
+        </p:txBody>
+      </p:sp>
+      <p:sp>
+        <p:nvSpPr>
+          <p:cNvPr id="15" name="Text 13"/>
+          <p:cNvSpPr txBox="1"/>
+          <p:nvPr/>
+        </p:nvSpPr>
+        <p:spPr>
+          <a:xfrm>
+            <a:off x="5321808" y="2670048"/>
+            <a:ext cx="3044952" cy="676656"/>
+          </a:xfrm>
+          <a:prstGeom prst="rect">
+            <a:avLst/>
+          </a:prstGeom>
+          <a:noFill/>
+          <a:ln/>
+        </p:spPr>
+        <p:txBody>
+          <a:bodyPr wrap="square" lIns="25400" tIns="25400" rIns="25400" bIns="25400" rtlCol="0" anchor="ctr"/>
+          <a:lstStyle/>
+          <a:p>
+            <a:pPr algn="l" indent="0" marL="0">
+              <a:lnSpc>
+                <a:spcPct val="100000"/>
+              </a:lnSpc>
+              <a:buNone/>
+            </a:pPr>
+            <a:r>
+              <a:rPr lang="en-US" sz="1400" dirty="0">
+                <a:solidFill>
+                  <a:srgbClr val="5B6770"/>
+                </a:solidFill>
+                <a:latin typeface="Calibri" pitchFamily="34" charset="0"/>
+                <a:ea typeface="Calibri" pitchFamily="34" charset="-122"/>
+                <a:cs typeface="Calibri" pitchFamily="34" charset="-120"/>
+              </a:rPr>
+              <a:t>Fixação de preços</a:t>
+            </a:r>
+            <a:endParaRPr lang="en-US" sz="1400" dirty="0"/>
+          </a:p>
+        </p:txBody>
+      </p:sp>
+      <p:sp>
+        <p:nvSpPr>
+          <p:cNvPr id="16" name="Text 14"/>
+          <p:cNvSpPr txBox="1"/>
+          <p:nvPr/>
+        </p:nvSpPr>
+        <p:spPr>
+          <a:xfrm>
+            <a:off x="685800" y="3566160"/>
+            <a:ext cx="7772400" cy="841248"/>
+          </a:xfrm>
+          <a:prstGeom prst="roundRect">
+            <a:avLst>
+              <a:gd name="adj" fmla="val 8696"/>
+            </a:avLst>
+          </a:prstGeom>
+          <a:solidFill>
+            <a:srgbClr val="E6F2F0"/>
+          </a:solidFill>
+          <a:ln/>
+        </p:spPr>
+        <p:txBody>
+          <a:bodyPr wrap="square" lIns="114300" tIns="114300" rIns="114300" bIns="114300" rtlCol="0" anchor="ctr"/>
+          <a:lstStyle/>
+          <a:p>
+            <a:pPr algn="l" indent="0" marL="0">
+              <a:lnSpc>
+                <a:spcPct val="100000"/>
+              </a:lnSpc>
+              <a:buNone/>
+            </a:pPr>
+            <a:r>
+              <a:rPr lang="en-US" sz="1350" b="1" dirty="0">
+                <a:solidFill>
+                  <a:srgbClr val="2E7D4F"/>
+                </a:solidFill>
+                <a:latin typeface="Calibri" pitchFamily="34" charset="0"/>
+                <a:ea typeface="Calibri" pitchFamily="34" charset="-122"/>
+                <a:cs typeface="Calibri" pitchFamily="34" charset="-120"/>
+              </a:rPr>
+              <a:t>Resposta: b) </a:t>
+            </a:r>
+            <a:pPr algn="l" indent="0" marL="0">
+              <a:lnSpc>
+                <a:spcPct val="100000"/>
+              </a:lnSpc>
+              <a:buNone/>
+            </a:pPr>
+            <a:r>
+              <a:rPr lang="en-US" sz="1350" dirty="0">
+                <a:solidFill>
+                  <a:srgbClr val="1F2A37"/>
+                </a:solidFill>
+                <a:latin typeface="Calibri" pitchFamily="34" charset="0"/>
+                <a:ea typeface="Calibri" pitchFamily="34" charset="-122"/>
+                <a:cs typeface="Calibri" pitchFamily="34" charset="-120"/>
+              </a:rPr>
+              <a:t>São instrumentos da função distributiva: cobram mais de quem tem mais e reduzem o custo para as famílias de baixa renda.</a:t>
+            </a:r>
+            <a:endParaRPr lang="en-US" sz="1350" dirty="0"/>
+          </a:p>
+        </p:txBody>
+      </p:sp>
+      <p:sp>
+        <p:nvSpPr>
+          <p:cNvPr id="17" name="Text 15"/>
+          <p:cNvSpPr txBox="1"/>
+          <p:nvPr/>
+        </p:nvSpPr>
+        <p:spPr>
+          <a:xfrm>
+            <a:off x="4206240" y="36576"/>
+            <a:ext cx="4800600" cy="219456"/>
+          </a:xfrm>
+          <a:prstGeom prst="rect">
+            <a:avLst/>
+          </a:prstGeom>
+          <a:noFill/>
+          <a:ln/>
+        </p:spPr>
+        <p:txBody>
+          <a:bodyPr wrap="square" lIns="0" tIns="0" rIns="0" bIns="0" rtlCol="0" anchor="ctr"/>
+          <a:lstStyle/>
+          <a:p>
+            <a:pPr algn="r" indent="0" marL="0">
+              <a:lnSpc>
+                <a:spcPct val="100000"/>
+              </a:lnSpc>
+              <a:buNone/>
+            </a:pPr>
+            <a:r>
+              <a:rPr lang="en-US" sz="950" dirty="0">
+                <a:solidFill>
+                  <a:srgbClr val="5B6770"/>
+                </a:solidFill>
+                <a:latin typeface="Calibri" pitchFamily="34" charset="0"/>
+                <a:ea typeface="Calibri" pitchFamily="34" charset="-122"/>
+                <a:cs typeface="Calibri" pitchFamily="34" charset="-120"/>
+              </a:rPr>
+              <a:t>Estado, Governo e Mercado · Unidade 1</a:t>
+            </a:r>
+            <a:endParaRPr lang="en-US" sz="950" dirty="0"/>
+          </a:p>
+        </p:txBody>
+      </p:sp>
+    </p:spTree>
+  </p:cSld>
+  <p:clrMapOvr>
+    <a:masterClrMapping/>
+  </p:clrMapOvr>
+</p:sld>
+</file>
+
+<file path=ppt/slides/slide45.xml><?xml version="1.0" encoding="utf-8"?>
+<p:sld xmlns:a="http://schemas.openxmlformats.org/drawingml/2006/main" xmlns:r="http://schemas.openxmlformats.org/officeDocument/2006/relationships" xmlns:p="http://schemas.openxmlformats.org/presentationml/2006/main">
+  <p:cSld name="Slide 45">
     <p:bg>
       <p:bgPr>
         <a:blipFill dpi="0" rotWithShape="1">

--- a/disciplina-01-estado-governo-mercado/materiais/01_Unidade_1_Introducao_a_Economia_Estado_Governo_Mercado.pptx
+++ b/disciplina-01-estado-governo-mercado/materiais/01_Unidade_1_Introducao_a_Economia_Estado_Governo_Mercado.pptx
@@ -39,20 +39,9 @@
     <p:sldId id="287" r:id="rId33"/>
     <p:sldId id="288" r:id="rId34"/>
     <p:sldId id="289" r:id="rId35"/>
-    <p:sldId id="290" r:id="rId36"/>
-    <p:sldId id="291" r:id="rId37"/>
-    <p:sldId id="292" r:id="rId38"/>
-    <p:sldId id="293" r:id="rId39"/>
-    <p:sldId id="294" r:id="rId40"/>
-    <p:sldId id="295" r:id="rId41"/>
-    <p:sldId id="296" r:id="rId42"/>
-    <p:sldId id="297" r:id="rId43"/>
-    <p:sldId id="298" r:id="rId44"/>
-    <p:sldId id="299" r:id="rId45"/>
-    <p:sldId id="300" r:id="rId46"/>
   </p:sldIdLst>
   <p:notesMasterIdLst>
-    <p:notesMasterId r:id="rId47"/>
+    <p:notesMasterId r:id="rId36"/>
   </p:notesMasterIdLst>
   <p:sldSz cx="9144000" cy="5143500"/>
   <p:notesSz cx="5143500" cy="9144000"/>
@@ -4372,7 +4361,7 @@
           <a:p>
             <a:r>
               <a:rPr lang="en-US" dirty="0"/>
-              <a:t>Vamos às atividades da Unidade 1. A disciplina abre no SIGAA em 9 de outubro, com o vídeo de apresentação e esta videoaula. Até 18 de outubro, participe do fórum de apresentação e do fórum temático 1, que pergunta: que falha de mercado uma política pública do seu município procura corrigir? Todas as entregas vão até as 23h55. Na próxima unidade, vamos estudar a dinâmica pendular entre Estado e mercado e a matriz liberal.</a:t>
+              <a:t>Vamos às atividades da Unidade 1. A disciplina abre no SIGAA em 9 de outubro, com o vídeo de apresentação e esta videoaula. Até 18 de outubro, participe do fórum de apresentação e do fórum temático 1, que pergunta: que falha de mercado uma política pública do seu município procura corrigir? Todas as entregas vão até as 23h55. Na próxima unidade, vamos estudar a dinâmica pendular entre Estado e mercado e a matriz liberal. E, para revisar, faça o quiz da Unidade 1 na página de conteúdos da disciplina: cinco perguntas com resposta comentada, sem nota.</a:t>
             </a:r>
             <a:endParaRPr lang="en-US" dirty="0"/>
           </a:p>
@@ -4460,7 +4449,7 @@
           <a:p>
             <a:r>
               <a:rPr lang="en-US" dirty="0"/>
-              <a:t>Para fechar, um quiz com cinco perguntas. Funciona assim: eu leio a pergunta, você pausa o vídeo, escolhe a sua resposta e, no slide seguinte, confere a correção. Vamos lá?</a:t>
+              <a:t>Para fechar a Unidade 1, vamos recapitular. [Apontar para o quadro da esquerda.] No tópico 1, vimos que a economia estuda como a sociedade faz escolhas com recursos escassos, e que toda escolha tem um custo de oportunidade, como no iceberg do custo e na escolha entre estrada vicinal e creche. Toda sociedade precisa responder o que, como e para quem produzir. Conhecemos os fatores de produção e os agentes econômicos, vimos que os preços coordenam o mercado, com os exemplos da tarifa de ônibus e do estacionamento rotativo, que todas as economias atuais são mistas, o que é a elasticidade-preço da demanda, com o exemplo da tarifa de água, e a diferença entre micro e macroeconomia. [Apontar para o quadro da direita.] No tópico 2, separamos Estado e governo: o Estado, com povo, território e soberania, é permanente; o governo é transitório. Com Weber, entendemos o Estado como o monopólio do uso legítimo da força. Vimos que o mercado depende de instituições garantidas pelo Estado, que as falhas de mercado justificam a ação estatal, mas que o Estado também falha, e conhecemos as três funções de Musgrave: alocativa, distributiva e estabilizadora. Na próxima unidade, estudaremos a dinâmica pendular e a matriz liberal. Revise os conceitos, participe dos fóruns e até a próxima videoaula!</a:t>
             </a:r>
             <a:endParaRPr lang="en-US" dirty="0"/>
           </a:p>
@@ -4484,446 +4473,6 @@
             <a:fld id="{F7021451-1387-4CA6-816F-3879F97B5CBC}" type="slidenum">
               <a:rPr lang="en-US"/>
               <a:t>34</a:t>
-            </a:fld>
-            <a:endParaRPr lang="en-US"/>
-          </a:p>
-        </p:txBody>
-      </p:sp>
-    </p:spTree>
-    <p:extLst>
-      <p:ext uri="{BB962C8B-B14F-4D97-AF65-F5344CB8AC3E}">
-        <p14:creationId xmlns:p14="http://schemas.microsoft.com/office/powerpoint/2010/main" val="1024086991"/>
-      </p:ext>
-    </p:extLst>
-  </p:cSld>
-  <p:clrMapOvr>
-    <a:masterClrMapping/>
-  </p:clrMapOvr>
-</p:notes>
-</file>
-
-<file path=ppt/notesSlides/notesSlide35.xml><?xml version="1.0" encoding="utf-8"?>
-<p:notes xmlns:a="http://schemas.openxmlformats.org/drawingml/2006/main" xmlns:r="http://schemas.openxmlformats.org/officeDocument/2006/relationships" xmlns:p="http://schemas.openxmlformats.org/presentationml/2006/main">
-  <p:cSld>
-    <p:spTree>
-      <p:nvGrpSpPr>
-        <p:cNvPr id="1" name=""/>
-        <p:cNvGrpSpPr/>
-        <p:nvPr/>
-      </p:nvGrpSpPr>
-      <p:grpSpPr>
-        <a:xfrm>
-          <a:off x="0" y="0"/>
-          <a:ext cx="0" cy="0"/>
-          <a:chOff x="0" y="0"/>
-          <a:chExt cx="0" cy="0"/>
-        </a:xfrm>
-      </p:grpSpPr>
-      <p:sp>
-        <p:nvSpPr>
-          <p:cNvPr id="2" name="Slide Image Placeholder 1"/>
-          <p:cNvSpPr>
-            <a:spLocks noGrp="1" noRot="1" noChangeAspect="1"/>
-          </p:cNvSpPr>
-          <p:nvPr>
-            <p:ph type="sldImg"/>
-          </p:nvPr>
-        </p:nvSpPr>
-        <p:spPr/>
-      </p:sp>
-      <p:sp>
-        <p:nvSpPr>
-          <p:cNvPr id="3" name="Notes Placeholder 2"/>
-          <p:cNvSpPr>
-            <a:spLocks noGrp="1"/>
-          </p:cNvSpPr>
-          <p:nvPr>
-            <p:ph type="body" idx="1"/>
-          </p:nvPr>
-        </p:nvSpPr>
-        <p:spPr/>
-        <p:txBody>
-          <a:bodyPr/>
-          <a:lstStyle/>
-          <a:p>
-            <a:r>
-              <a:rPr lang="en-US" dirty="0"/>
-              <a:t>Pergunta 1. Qual destes NÃO é um elemento constitutivo do Estado? Letra a: Povo. Letra b: Território. Letra c: Soberania. Letra d: Mercado. Pause o vídeo e escolha a sua resposta.</a:t>
-            </a:r>
-            <a:endParaRPr lang="en-US" dirty="0"/>
-          </a:p>
-        </p:txBody>
-      </p:sp>
-      <p:sp>
-        <p:nvSpPr>
-          <p:cNvPr id="4" name="Slide Number Placeholder 3"/>
-          <p:cNvSpPr>
-            <a:spLocks noGrp="1"/>
-          </p:cNvSpPr>
-          <p:nvPr>
-            <p:ph type="sldNum" sz="quarter" idx="10"/>
-          </p:nvPr>
-        </p:nvSpPr>
-        <p:spPr/>
-        <p:txBody>
-          <a:bodyPr/>
-          <a:lstStyle/>
-          <a:p>
-            <a:fld id="{F7021451-1387-4CA6-816F-3879F97B5CBC}" type="slidenum">
-              <a:rPr lang="en-US"/>
-              <a:t>35</a:t>
-            </a:fld>
-            <a:endParaRPr lang="en-US"/>
-          </a:p>
-        </p:txBody>
-      </p:sp>
-    </p:spTree>
-    <p:extLst>
-      <p:ext uri="{BB962C8B-B14F-4D97-AF65-F5344CB8AC3E}">
-        <p14:creationId xmlns:p14="http://schemas.microsoft.com/office/powerpoint/2010/main" val="1024086991"/>
-      </p:ext>
-    </p:extLst>
-  </p:cSld>
-  <p:clrMapOvr>
-    <a:masterClrMapping/>
-  </p:clrMapOvr>
-</p:notes>
-</file>
-
-<file path=ppt/notesSlides/notesSlide36.xml><?xml version="1.0" encoding="utf-8"?>
-<p:notes xmlns:a="http://schemas.openxmlformats.org/drawingml/2006/main" xmlns:r="http://schemas.openxmlformats.org/officeDocument/2006/relationships" xmlns:p="http://schemas.openxmlformats.org/presentationml/2006/main">
-  <p:cSld>
-    <p:spTree>
-      <p:nvGrpSpPr>
-        <p:cNvPr id="1" name=""/>
-        <p:cNvGrpSpPr/>
-        <p:nvPr/>
-      </p:nvGrpSpPr>
-      <p:grpSpPr>
-        <a:xfrm>
-          <a:off x="0" y="0"/>
-          <a:ext cx="0" cy="0"/>
-          <a:chOff x="0" y="0"/>
-          <a:chExt cx="0" cy="0"/>
-        </a:xfrm>
-      </p:grpSpPr>
-      <p:sp>
-        <p:nvSpPr>
-          <p:cNvPr id="2" name="Slide Image Placeholder 1"/>
-          <p:cNvSpPr>
-            <a:spLocks noGrp="1" noRot="1" noChangeAspect="1"/>
-          </p:cNvSpPr>
-          <p:nvPr>
-            <p:ph type="sldImg"/>
-          </p:nvPr>
-        </p:nvSpPr>
-        <p:spPr/>
-      </p:sp>
-      <p:sp>
-        <p:nvSpPr>
-          <p:cNvPr id="3" name="Notes Placeholder 2"/>
-          <p:cNvSpPr>
-            <a:spLocks noGrp="1"/>
-          </p:cNvSpPr>
-          <p:nvPr>
-            <p:ph type="body" idx="1"/>
-          </p:nvPr>
-        </p:nvSpPr>
-        <p:spPr/>
-        <p:txBody>
-          <a:bodyPr/>
-          <a:lstStyle/>
-          <a:p>
-            <a:r>
-              <a:rPr lang="en-US" dirty="0"/>
-              <a:t>A resposta correta é a letra d: Mercado. Os elementos clássicos do Estado são povo, território e soberania (poder político). O mercado é outra esfera de coordenação social.</a:t>
-            </a:r>
-            <a:endParaRPr lang="en-US" dirty="0"/>
-          </a:p>
-        </p:txBody>
-      </p:sp>
-      <p:sp>
-        <p:nvSpPr>
-          <p:cNvPr id="4" name="Slide Number Placeholder 3"/>
-          <p:cNvSpPr>
-            <a:spLocks noGrp="1"/>
-          </p:cNvSpPr>
-          <p:nvPr>
-            <p:ph type="sldNum" sz="quarter" idx="10"/>
-          </p:nvPr>
-        </p:nvSpPr>
-        <p:spPr/>
-        <p:txBody>
-          <a:bodyPr/>
-          <a:lstStyle/>
-          <a:p>
-            <a:fld id="{F7021451-1387-4CA6-816F-3879F97B5CBC}" type="slidenum">
-              <a:rPr lang="en-US"/>
-              <a:t>36</a:t>
-            </a:fld>
-            <a:endParaRPr lang="en-US"/>
-          </a:p>
-        </p:txBody>
-      </p:sp>
-    </p:spTree>
-    <p:extLst>
-      <p:ext uri="{BB962C8B-B14F-4D97-AF65-F5344CB8AC3E}">
-        <p14:creationId xmlns:p14="http://schemas.microsoft.com/office/powerpoint/2010/main" val="1024086991"/>
-      </p:ext>
-    </p:extLst>
-  </p:cSld>
-  <p:clrMapOvr>
-    <a:masterClrMapping/>
-  </p:clrMapOvr>
-</p:notes>
-</file>
-
-<file path=ppt/notesSlides/notesSlide37.xml><?xml version="1.0" encoding="utf-8"?>
-<p:notes xmlns:a="http://schemas.openxmlformats.org/drawingml/2006/main" xmlns:r="http://schemas.openxmlformats.org/officeDocument/2006/relationships" xmlns:p="http://schemas.openxmlformats.org/presentationml/2006/main">
-  <p:cSld>
-    <p:spTree>
-      <p:nvGrpSpPr>
-        <p:cNvPr id="1" name=""/>
-        <p:cNvGrpSpPr/>
-        <p:nvPr/>
-      </p:nvGrpSpPr>
-      <p:grpSpPr>
-        <a:xfrm>
-          <a:off x="0" y="0"/>
-          <a:ext cx="0" cy="0"/>
-          <a:chOff x="0" y="0"/>
-          <a:chExt cx="0" cy="0"/>
-        </a:xfrm>
-      </p:grpSpPr>
-      <p:sp>
-        <p:nvSpPr>
-          <p:cNvPr id="2" name="Slide Image Placeholder 1"/>
-          <p:cNvSpPr>
-            <a:spLocks noGrp="1" noRot="1" noChangeAspect="1"/>
-          </p:cNvSpPr>
-          <p:nvPr>
-            <p:ph type="sldImg"/>
-          </p:nvPr>
-        </p:nvSpPr>
-        <p:spPr/>
-      </p:sp>
-      <p:sp>
-        <p:nvSpPr>
-          <p:cNvPr id="3" name="Notes Placeholder 2"/>
-          <p:cNvSpPr>
-            <a:spLocks noGrp="1"/>
-          </p:cNvSpPr>
-          <p:nvPr>
-            <p:ph type="body" idx="1"/>
-          </p:nvPr>
-        </p:nvSpPr>
-        <p:spPr/>
-        <p:txBody>
-          <a:bodyPr/>
-          <a:lstStyle/>
-          <a:p>
-            <a:r>
-              <a:rPr lang="en-US" dirty="0"/>
-              <a:t>Pergunta 2. Concursos públicos, leis e impessoalidade na administração expressam, segundo Weber, a dominação: Letra a: Tradicional. Letra b: Carismática. Letra c: Legal-racional. Letra d: Patrimonial. Pause o vídeo e escolha a sua resposta.</a:t>
-            </a:r>
-            <a:endParaRPr lang="en-US" dirty="0"/>
-          </a:p>
-        </p:txBody>
-      </p:sp>
-      <p:sp>
-        <p:nvSpPr>
-          <p:cNvPr id="4" name="Slide Number Placeholder 3"/>
-          <p:cNvSpPr>
-            <a:spLocks noGrp="1"/>
-          </p:cNvSpPr>
-          <p:nvPr>
-            <p:ph type="sldNum" sz="quarter" idx="10"/>
-          </p:nvPr>
-        </p:nvSpPr>
-        <p:spPr/>
-        <p:txBody>
-          <a:bodyPr/>
-          <a:lstStyle/>
-          <a:p>
-            <a:fld id="{F7021451-1387-4CA6-816F-3879F97B5CBC}" type="slidenum">
-              <a:rPr lang="en-US"/>
-              <a:t>37</a:t>
-            </a:fld>
-            <a:endParaRPr lang="en-US"/>
-          </a:p>
-        </p:txBody>
-      </p:sp>
-    </p:spTree>
-    <p:extLst>
-      <p:ext uri="{BB962C8B-B14F-4D97-AF65-F5344CB8AC3E}">
-        <p14:creationId xmlns:p14="http://schemas.microsoft.com/office/powerpoint/2010/main" val="1024086991"/>
-      </p:ext>
-    </p:extLst>
-  </p:cSld>
-  <p:clrMapOvr>
-    <a:masterClrMapping/>
-  </p:clrMapOvr>
-</p:notes>
-</file>
-
-<file path=ppt/notesSlides/notesSlide38.xml><?xml version="1.0" encoding="utf-8"?>
-<p:notes xmlns:a="http://schemas.openxmlformats.org/drawingml/2006/main" xmlns:r="http://schemas.openxmlformats.org/officeDocument/2006/relationships" xmlns:p="http://schemas.openxmlformats.org/presentationml/2006/main">
-  <p:cSld>
-    <p:spTree>
-      <p:nvGrpSpPr>
-        <p:cNvPr id="1" name=""/>
-        <p:cNvGrpSpPr/>
-        <p:nvPr/>
-      </p:nvGrpSpPr>
-      <p:grpSpPr>
-        <a:xfrm>
-          <a:off x="0" y="0"/>
-          <a:ext cx="0" cy="0"/>
-          <a:chOff x="0" y="0"/>
-          <a:chExt cx="0" cy="0"/>
-        </a:xfrm>
-      </p:grpSpPr>
-      <p:sp>
-        <p:nvSpPr>
-          <p:cNvPr id="2" name="Slide Image Placeholder 1"/>
-          <p:cNvSpPr>
-            <a:spLocks noGrp="1" noRot="1" noChangeAspect="1"/>
-          </p:cNvSpPr>
-          <p:nvPr>
-            <p:ph type="sldImg"/>
-          </p:nvPr>
-        </p:nvSpPr>
-        <p:spPr/>
-      </p:sp>
-      <p:sp>
-        <p:nvSpPr>
-          <p:cNvPr id="3" name="Notes Placeholder 2"/>
-          <p:cNvSpPr>
-            <a:spLocks noGrp="1"/>
-          </p:cNvSpPr>
-          <p:nvPr>
-            <p:ph type="body" idx="1"/>
-          </p:nvPr>
-        </p:nvSpPr>
-        <p:spPr/>
-        <p:txBody>
-          <a:bodyPr/>
-          <a:lstStyle/>
-          <a:p>
-            <a:r>
-              <a:rPr lang="en-US" dirty="0"/>
-              <a:t>A resposta correta é a letra c: Legal-racional. A dominação legal-racional baseia-se na obediência a normas impessoais: é a base da burocracia moderna e do art. 37 da Constituição.</a:t>
-            </a:r>
-            <a:endParaRPr lang="en-US" dirty="0"/>
-          </a:p>
-        </p:txBody>
-      </p:sp>
-      <p:sp>
-        <p:nvSpPr>
-          <p:cNvPr id="4" name="Slide Number Placeholder 3"/>
-          <p:cNvSpPr>
-            <a:spLocks noGrp="1"/>
-          </p:cNvSpPr>
-          <p:nvPr>
-            <p:ph type="sldNum" sz="quarter" idx="10"/>
-          </p:nvPr>
-        </p:nvSpPr>
-        <p:spPr/>
-        <p:txBody>
-          <a:bodyPr/>
-          <a:lstStyle/>
-          <a:p>
-            <a:fld id="{F7021451-1387-4CA6-816F-3879F97B5CBC}" type="slidenum">
-              <a:rPr lang="en-US"/>
-              <a:t>38</a:t>
-            </a:fld>
-            <a:endParaRPr lang="en-US"/>
-          </a:p>
-        </p:txBody>
-      </p:sp>
-    </p:spTree>
-    <p:extLst>
-      <p:ext uri="{BB962C8B-B14F-4D97-AF65-F5344CB8AC3E}">
-        <p14:creationId xmlns:p14="http://schemas.microsoft.com/office/powerpoint/2010/main" val="1024086991"/>
-      </p:ext>
-    </p:extLst>
-  </p:cSld>
-  <p:clrMapOvr>
-    <a:masterClrMapping/>
-  </p:clrMapOvr>
-</p:notes>
-</file>
-
-<file path=ppt/notesSlides/notesSlide39.xml><?xml version="1.0" encoding="utf-8"?>
-<p:notes xmlns:a="http://schemas.openxmlformats.org/drawingml/2006/main" xmlns:r="http://schemas.openxmlformats.org/officeDocument/2006/relationships" xmlns:p="http://schemas.openxmlformats.org/presentationml/2006/main">
-  <p:cSld>
-    <p:spTree>
-      <p:nvGrpSpPr>
-        <p:cNvPr id="1" name=""/>
-        <p:cNvGrpSpPr/>
-        <p:nvPr/>
-      </p:nvGrpSpPr>
-      <p:grpSpPr>
-        <a:xfrm>
-          <a:off x="0" y="0"/>
-          <a:ext cx="0" cy="0"/>
-          <a:chOff x="0" y="0"/>
-          <a:chExt cx="0" cy="0"/>
-        </a:xfrm>
-      </p:grpSpPr>
-      <p:sp>
-        <p:nvSpPr>
-          <p:cNvPr id="2" name="Slide Image Placeholder 1"/>
-          <p:cNvSpPr>
-            <a:spLocks noGrp="1" noRot="1" noChangeAspect="1"/>
-          </p:cNvSpPr>
-          <p:nvPr>
-            <p:ph type="sldImg"/>
-          </p:nvPr>
-        </p:nvSpPr>
-        <p:spPr/>
-      </p:sp>
-      <p:sp>
-        <p:nvSpPr>
-          <p:cNvPr id="3" name="Notes Placeholder 2"/>
-          <p:cNvSpPr>
-            <a:spLocks noGrp="1"/>
-          </p:cNvSpPr>
-          <p:nvPr>
-            <p:ph type="body" idx="1"/>
-          </p:nvPr>
-        </p:nvSpPr>
-        <p:spPr/>
-        <p:txBody>
-          <a:bodyPr/>
-          <a:lstStyle/>
-          <a:p>
-            <a:r>
-              <a:rPr lang="en-US" dirty="0"/>
-              <a:t>Pergunta 3. A iluminação das ruas de uma cidade é um exemplo de bem: Letra a: Privado. Letra b: De clube. Letra c: Comum. Letra d: Público. Pause o vídeo e escolha a sua resposta.</a:t>
-            </a:r>
-            <a:endParaRPr lang="en-US" dirty="0"/>
-          </a:p>
-        </p:txBody>
-      </p:sp>
-      <p:sp>
-        <p:nvSpPr>
-          <p:cNvPr id="4" name="Slide Number Placeholder 3"/>
-          <p:cNvSpPr>
-            <a:spLocks noGrp="1"/>
-          </p:cNvSpPr>
-          <p:nvPr>
-            <p:ph type="sldNum" sz="quarter" idx="10"/>
-          </p:nvPr>
-        </p:nvSpPr>
-        <p:spPr/>
-        <p:txBody>
-          <a:bodyPr/>
-          <a:lstStyle/>
-          <a:p>
-            <a:fld id="{F7021451-1387-4CA6-816F-3879F97B5CBC}" type="slidenum">
-              <a:rPr lang="en-US"/>
-              <a:t>39</a:t>
             </a:fld>
             <a:endParaRPr lang="en-US"/>
           </a:p>
@@ -5012,534 +4561,6 @@
             <a:fld id="{F7021451-1387-4CA6-816F-3879F97B5CBC}" type="slidenum">
               <a:rPr lang="en-US"/>
               <a:t>4</a:t>
-            </a:fld>
-            <a:endParaRPr lang="en-US"/>
-          </a:p>
-        </p:txBody>
-      </p:sp>
-    </p:spTree>
-    <p:extLst>
-      <p:ext uri="{BB962C8B-B14F-4D97-AF65-F5344CB8AC3E}">
-        <p14:creationId xmlns:p14="http://schemas.microsoft.com/office/powerpoint/2010/main" val="1024086991"/>
-      </p:ext>
-    </p:extLst>
-  </p:cSld>
-  <p:clrMapOvr>
-    <a:masterClrMapping/>
-  </p:clrMapOvr>
-</p:notes>
-</file>
-
-<file path=ppt/notesSlides/notesSlide40.xml><?xml version="1.0" encoding="utf-8"?>
-<p:notes xmlns:a="http://schemas.openxmlformats.org/drawingml/2006/main" xmlns:r="http://schemas.openxmlformats.org/officeDocument/2006/relationships" xmlns:p="http://schemas.openxmlformats.org/presentationml/2006/main">
-  <p:cSld>
-    <p:spTree>
-      <p:nvGrpSpPr>
-        <p:cNvPr id="1" name=""/>
-        <p:cNvGrpSpPr/>
-        <p:nvPr/>
-      </p:nvGrpSpPr>
-      <p:grpSpPr>
-        <a:xfrm>
-          <a:off x="0" y="0"/>
-          <a:ext cx="0" cy="0"/>
-          <a:chOff x="0" y="0"/>
-          <a:chExt cx="0" cy="0"/>
-        </a:xfrm>
-      </p:grpSpPr>
-      <p:sp>
-        <p:nvSpPr>
-          <p:cNvPr id="2" name="Slide Image Placeholder 1"/>
-          <p:cNvSpPr>
-            <a:spLocks noGrp="1" noRot="1" noChangeAspect="1"/>
-          </p:cNvSpPr>
-          <p:nvPr>
-            <p:ph type="sldImg"/>
-          </p:nvPr>
-        </p:nvSpPr>
-        <p:spPr/>
-      </p:sp>
-      <p:sp>
-        <p:nvSpPr>
-          <p:cNvPr id="3" name="Notes Placeholder 2"/>
-          <p:cNvSpPr>
-            <a:spLocks noGrp="1"/>
-          </p:cNvSpPr>
-          <p:nvPr>
-            <p:ph type="body" idx="1"/>
-          </p:nvPr>
-        </p:nvSpPr>
-        <p:spPr/>
-        <p:txBody>
-          <a:bodyPr/>
-          <a:lstStyle/>
-          <a:p>
-            <a:r>
-              <a:rPr lang="en-US" dirty="0"/>
-              <a:t>A resposta correta é a letra d: Público. É não rival (todos usam ao mesmo tempo) e não excludente (ninguém é impedido de usar). Por isso o mercado não a oferece sozinho.</a:t>
-            </a:r>
-            <a:endParaRPr lang="en-US" dirty="0"/>
-          </a:p>
-        </p:txBody>
-      </p:sp>
-      <p:sp>
-        <p:nvSpPr>
-          <p:cNvPr id="4" name="Slide Number Placeholder 3"/>
-          <p:cNvSpPr>
-            <a:spLocks noGrp="1"/>
-          </p:cNvSpPr>
-          <p:nvPr>
-            <p:ph type="sldNum" sz="quarter" idx="10"/>
-          </p:nvPr>
-        </p:nvSpPr>
-        <p:spPr/>
-        <p:txBody>
-          <a:bodyPr/>
-          <a:lstStyle/>
-          <a:p>
-            <a:fld id="{F7021451-1387-4CA6-816F-3879F97B5CBC}" type="slidenum">
-              <a:rPr lang="en-US"/>
-              <a:t>40</a:t>
-            </a:fld>
-            <a:endParaRPr lang="en-US"/>
-          </a:p>
-        </p:txBody>
-      </p:sp>
-    </p:spTree>
-    <p:extLst>
-      <p:ext uri="{BB962C8B-B14F-4D97-AF65-F5344CB8AC3E}">
-        <p14:creationId xmlns:p14="http://schemas.microsoft.com/office/powerpoint/2010/main" val="1024086991"/>
-      </p:ext>
-    </p:extLst>
-  </p:cSld>
-  <p:clrMapOvr>
-    <a:masterClrMapping/>
-  </p:clrMapOvr>
-</p:notes>
-</file>
-
-<file path=ppt/notesSlides/notesSlide41.xml><?xml version="1.0" encoding="utf-8"?>
-<p:notes xmlns:a="http://schemas.openxmlformats.org/drawingml/2006/main" xmlns:r="http://schemas.openxmlformats.org/officeDocument/2006/relationships" xmlns:p="http://schemas.openxmlformats.org/presentationml/2006/main">
-  <p:cSld>
-    <p:spTree>
-      <p:nvGrpSpPr>
-        <p:cNvPr id="1" name=""/>
-        <p:cNvGrpSpPr/>
-        <p:nvPr/>
-      </p:nvGrpSpPr>
-      <p:grpSpPr>
-        <a:xfrm>
-          <a:off x="0" y="0"/>
-          <a:ext cx="0" cy="0"/>
-          <a:chOff x="0" y="0"/>
-          <a:chExt cx="0" cy="0"/>
-        </a:xfrm>
-      </p:grpSpPr>
-      <p:sp>
-        <p:nvSpPr>
-          <p:cNvPr id="2" name="Slide Image Placeholder 1"/>
-          <p:cNvSpPr>
-            <a:spLocks noGrp="1" noRot="1" noChangeAspect="1"/>
-          </p:cNvSpPr>
-          <p:nvPr>
-            <p:ph type="sldImg"/>
-          </p:nvPr>
-        </p:nvSpPr>
-        <p:spPr/>
-      </p:sp>
-      <p:sp>
-        <p:nvSpPr>
-          <p:cNvPr id="3" name="Notes Placeholder 2"/>
-          <p:cNvSpPr>
-            <a:spLocks noGrp="1"/>
-          </p:cNvSpPr>
-          <p:nvPr>
-            <p:ph type="body" idx="1"/>
-          </p:nvPr>
-        </p:nvSpPr>
-        <p:spPr/>
-        <p:txBody>
-          <a:bodyPr/>
-          <a:lstStyle/>
-          <a:p>
-            <a:r>
-              <a:rPr lang="en-US" dirty="0"/>
-              <a:t>Pergunta 4. A fumaça das queimadas que prejudica a saúde de moradores de outras cidades é: Letra a: Uma externalidade negativa. Letra b: Um bem público. Letra c: Assimetria de informação. Letra d: Um monopólio natural. Pause o vídeo e escolha a sua resposta.</a:t>
-            </a:r>
-            <a:endParaRPr lang="en-US" dirty="0"/>
-          </a:p>
-        </p:txBody>
-      </p:sp>
-      <p:sp>
-        <p:nvSpPr>
-          <p:cNvPr id="4" name="Slide Number Placeholder 3"/>
-          <p:cNvSpPr>
-            <a:spLocks noGrp="1"/>
-          </p:cNvSpPr>
-          <p:nvPr>
-            <p:ph type="sldNum" sz="quarter" idx="10"/>
-          </p:nvPr>
-        </p:nvSpPr>
-        <p:spPr/>
-        <p:txBody>
-          <a:bodyPr/>
-          <a:lstStyle/>
-          <a:p>
-            <a:fld id="{F7021451-1387-4CA6-816F-3879F97B5CBC}" type="slidenum">
-              <a:rPr lang="en-US"/>
-              <a:t>41</a:t>
-            </a:fld>
-            <a:endParaRPr lang="en-US"/>
-          </a:p>
-        </p:txBody>
-      </p:sp>
-    </p:spTree>
-    <p:extLst>
-      <p:ext uri="{BB962C8B-B14F-4D97-AF65-F5344CB8AC3E}">
-        <p14:creationId xmlns:p14="http://schemas.microsoft.com/office/powerpoint/2010/main" val="1024086991"/>
-      </p:ext>
-    </p:extLst>
-  </p:cSld>
-  <p:clrMapOvr>
-    <a:masterClrMapping/>
-  </p:clrMapOvr>
-</p:notes>
-</file>
-
-<file path=ppt/notesSlides/notesSlide42.xml><?xml version="1.0" encoding="utf-8"?>
-<p:notes xmlns:a="http://schemas.openxmlformats.org/drawingml/2006/main" xmlns:r="http://schemas.openxmlformats.org/officeDocument/2006/relationships" xmlns:p="http://schemas.openxmlformats.org/presentationml/2006/main">
-  <p:cSld>
-    <p:spTree>
-      <p:nvGrpSpPr>
-        <p:cNvPr id="1" name=""/>
-        <p:cNvGrpSpPr/>
-        <p:nvPr/>
-      </p:nvGrpSpPr>
-      <p:grpSpPr>
-        <a:xfrm>
-          <a:off x="0" y="0"/>
-          <a:ext cx="0" cy="0"/>
-          <a:chOff x="0" y="0"/>
-          <a:chExt cx="0" cy="0"/>
-        </a:xfrm>
-      </p:grpSpPr>
-      <p:sp>
-        <p:nvSpPr>
-          <p:cNvPr id="2" name="Slide Image Placeholder 1"/>
-          <p:cNvSpPr>
-            <a:spLocks noGrp="1" noRot="1" noChangeAspect="1"/>
-          </p:cNvSpPr>
-          <p:nvPr>
-            <p:ph type="sldImg"/>
-          </p:nvPr>
-        </p:nvSpPr>
-        <p:spPr/>
-      </p:sp>
-      <p:sp>
-        <p:nvSpPr>
-          <p:cNvPr id="3" name="Notes Placeholder 2"/>
-          <p:cNvSpPr>
-            <a:spLocks noGrp="1"/>
-          </p:cNvSpPr>
-          <p:nvPr>
-            <p:ph type="body" idx="1"/>
-          </p:nvPr>
-        </p:nvSpPr>
-        <p:spPr/>
-        <p:txBody>
-          <a:bodyPr/>
-          <a:lstStyle/>
-          <a:p>
-            <a:r>
-              <a:rPr lang="en-US" dirty="0"/>
-              <a:t>A resposta correta é a letra a: Uma externalidade negativa. É um custo imposto a terceiros que não aparece no preço de nenhum produto: uma externalidade negativa, que justifica fiscalização e multas.</a:t>
-            </a:r>
-            <a:endParaRPr lang="en-US" dirty="0"/>
-          </a:p>
-        </p:txBody>
-      </p:sp>
-      <p:sp>
-        <p:nvSpPr>
-          <p:cNvPr id="4" name="Slide Number Placeholder 3"/>
-          <p:cNvSpPr>
-            <a:spLocks noGrp="1"/>
-          </p:cNvSpPr>
-          <p:nvPr>
-            <p:ph type="sldNum" sz="quarter" idx="10"/>
-          </p:nvPr>
-        </p:nvSpPr>
-        <p:spPr/>
-        <p:txBody>
-          <a:bodyPr/>
-          <a:lstStyle/>
-          <a:p>
-            <a:fld id="{F7021451-1387-4CA6-816F-3879F97B5CBC}" type="slidenum">
-              <a:rPr lang="en-US"/>
-              <a:t>42</a:t>
-            </a:fld>
-            <a:endParaRPr lang="en-US"/>
-          </a:p>
-        </p:txBody>
-      </p:sp>
-    </p:spTree>
-    <p:extLst>
-      <p:ext uri="{BB962C8B-B14F-4D97-AF65-F5344CB8AC3E}">
-        <p14:creationId xmlns:p14="http://schemas.microsoft.com/office/powerpoint/2010/main" val="1024086991"/>
-      </p:ext>
-    </p:extLst>
-  </p:cSld>
-  <p:clrMapOvr>
-    <a:masterClrMapping/>
-  </p:clrMapOvr>
-</p:notes>
-</file>
-
-<file path=ppt/notesSlides/notesSlide43.xml><?xml version="1.0" encoding="utf-8"?>
-<p:notes xmlns:a="http://schemas.openxmlformats.org/drawingml/2006/main" xmlns:r="http://schemas.openxmlformats.org/officeDocument/2006/relationships" xmlns:p="http://schemas.openxmlformats.org/presentationml/2006/main">
-  <p:cSld>
-    <p:spTree>
-      <p:nvGrpSpPr>
-        <p:cNvPr id="1" name=""/>
-        <p:cNvGrpSpPr/>
-        <p:nvPr/>
-      </p:nvGrpSpPr>
-      <p:grpSpPr>
-        <a:xfrm>
-          <a:off x="0" y="0"/>
-          <a:ext cx="0" cy="0"/>
-          <a:chOff x="0" y="0"/>
-          <a:chExt cx="0" cy="0"/>
-        </a:xfrm>
-      </p:grpSpPr>
-      <p:sp>
-        <p:nvSpPr>
-          <p:cNvPr id="2" name="Slide Image Placeholder 1"/>
-          <p:cNvSpPr>
-            <a:spLocks noGrp="1" noRot="1" noChangeAspect="1"/>
-          </p:cNvSpPr>
-          <p:nvPr>
-            <p:ph type="sldImg"/>
-          </p:nvPr>
-        </p:nvSpPr>
-        <p:spPr/>
-      </p:sp>
-      <p:sp>
-        <p:nvSpPr>
-          <p:cNvPr id="3" name="Notes Placeholder 2"/>
-          <p:cNvSpPr>
-            <a:spLocks noGrp="1"/>
-          </p:cNvSpPr>
-          <p:nvPr>
-            <p:ph type="body" idx="1"/>
-          </p:nvPr>
-        </p:nvSpPr>
-        <p:spPr/>
-        <p:txBody>
-          <a:bodyPr/>
-          <a:lstStyle/>
-          <a:p>
-            <a:r>
-              <a:rPr lang="en-US" dirty="0"/>
-              <a:t>Pergunta 5. IPTU progressivo e tarifa social de água cumprem qual função econômica do Estado? Letra a: Alocativa. Letra b: Distributiva. Letra c: Estabilizadora. Letra d: Fixação de preços. Pause o vídeo e escolha a sua resposta.</a:t>
-            </a:r>
-            <a:endParaRPr lang="en-US" dirty="0"/>
-          </a:p>
-        </p:txBody>
-      </p:sp>
-      <p:sp>
-        <p:nvSpPr>
-          <p:cNvPr id="4" name="Slide Number Placeholder 3"/>
-          <p:cNvSpPr>
-            <a:spLocks noGrp="1"/>
-          </p:cNvSpPr>
-          <p:nvPr>
-            <p:ph type="sldNum" sz="quarter" idx="10"/>
-          </p:nvPr>
-        </p:nvSpPr>
-        <p:spPr/>
-        <p:txBody>
-          <a:bodyPr/>
-          <a:lstStyle/>
-          <a:p>
-            <a:fld id="{F7021451-1387-4CA6-816F-3879F97B5CBC}" type="slidenum">
-              <a:rPr lang="en-US"/>
-              <a:t>43</a:t>
-            </a:fld>
-            <a:endParaRPr lang="en-US"/>
-          </a:p>
-        </p:txBody>
-      </p:sp>
-    </p:spTree>
-    <p:extLst>
-      <p:ext uri="{BB962C8B-B14F-4D97-AF65-F5344CB8AC3E}">
-        <p14:creationId xmlns:p14="http://schemas.microsoft.com/office/powerpoint/2010/main" val="1024086991"/>
-      </p:ext>
-    </p:extLst>
-  </p:cSld>
-  <p:clrMapOvr>
-    <a:masterClrMapping/>
-  </p:clrMapOvr>
-</p:notes>
-</file>
-
-<file path=ppt/notesSlides/notesSlide44.xml><?xml version="1.0" encoding="utf-8"?>
-<p:notes xmlns:a="http://schemas.openxmlformats.org/drawingml/2006/main" xmlns:r="http://schemas.openxmlformats.org/officeDocument/2006/relationships" xmlns:p="http://schemas.openxmlformats.org/presentationml/2006/main">
-  <p:cSld>
-    <p:spTree>
-      <p:nvGrpSpPr>
-        <p:cNvPr id="1" name=""/>
-        <p:cNvGrpSpPr/>
-        <p:nvPr/>
-      </p:nvGrpSpPr>
-      <p:grpSpPr>
-        <a:xfrm>
-          <a:off x="0" y="0"/>
-          <a:ext cx="0" cy="0"/>
-          <a:chOff x="0" y="0"/>
-          <a:chExt cx="0" cy="0"/>
-        </a:xfrm>
-      </p:grpSpPr>
-      <p:sp>
-        <p:nvSpPr>
-          <p:cNvPr id="2" name="Slide Image Placeholder 1"/>
-          <p:cNvSpPr>
-            <a:spLocks noGrp="1" noRot="1" noChangeAspect="1"/>
-          </p:cNvSpPr>
-          <p:nvPr>
-            <p:ph type="sldImg"/>
-          </p:nvPr>
-        </p:nvSpPr>
-        <p:spPr/>
-      </p:sp>
-      <p:sp>
-        <p:nvSpPr>
-          <p:cNvPr id="3" name="Notes Placeholder 2"/>
-          <p:cNvSpPr>
-            <a:spLocks noGrp="1"/>
-          </p:cNvSpPr>
-          <p:nvPr>
-            <p:ph type="body" idx="1"/>
-          </p:nvPr>
-        </p:nvSpPr>
-        <p:spPr/>
-        <p:txBody>
-          <a:bodyPr/>
-          <a:lstStyle/>
-          <a:p>
-            <a:r>
-              <a:rPr lang="en-US" dirty="0"/>
-              <a:t>A resposta correta é a letra b: Distributiva. São instrumentos da função distributiva: cobram mais de quem tem mais e reduzem o custo para as famílias de baixa renda.</a:t>
-            </a:r>
-            <a:endParaRPr lang="en-US" dirty="0"/>
-          </a:p>
-        </p:txBody>
-      </p:sp>
-      <p:sp>
-        <p:nvSpPr>
-          <p:cNvPr id="4" name="Slide Number Placeholder 3"/>
-          <p:cNvSpPr>
-            <a:spLocks noGrp="1"/>
-          </p:cNvSpPr>
-          <p:nvPr>
-            <p:ph type="sldNum" sz="quarter" idx="10"/>
-          </p:nvPr>
-        </p:nvSpPr>
-        <p:spPr/>
-        <p:txBody>
-          <a:bodyPr/>
-          <a:lstStyle/>
-          <a:p>
-            <a:fld id="{F7021451-1387-4CA6-816F-3879F97B5CBC}" type="slidenum">
-              <a:rPr lang="en-US"/>
-              <a:t>44</a:t>
-            </a:fld>
-            <a:endParaRPr lang="en-US"/>
-          </a:p>
-        </p:txBody>
-      </p:sp>
-    </p:spTree>
-    <p:extLst>
-      <p:ext uri="{BB962C8B-B14F-4D97-AF65-F5344CB8AC3E}">
-        <p14:creationId xmlns:p14="http://schemas.microsoft.com/office/powerpoint/2010/main" val="1024086991"/>
-      </p:ext>
-    </p:extLst>
-  </p:cSld>
-  <p:clrMapOvr>
-    <a:masterClrMapping/>
-  </p:clrMapOvr>
-</p:notes>
-</file>
-
-<file path=ppt/notesSlides/notesSlide45.xml><?xml version="1.0" encoding="utf-8"?>
-<p:notes xmlns:a="http://schemas.openxmlformats.org/drawingml/2006/main" xmlns:r="http://schemas.openxmlformats.org/officeDocument/2006/relationships" xmlns:p="http://schemas.openxmlformats.org/presentationml/2006/main">
-  <p:cSld>
-    <p:spTree>
-      <p:nvGrpSpPr>
-        <p:cNvPr id="1" name=""/>
-        <p:cNvGrpSpPr/>
-        <p:nvPr/>
-      </p:nvGrpSpPr>
-      <p:grpSpPr>
-        <a:xfrm>
-          <a:off x="0" y="0"/>
-          <a:ext cx="0" cy="0"/>
-          <a:chOff x="0" y="0"/>
-          <a:chExt cx="0" cy="0"/>
-        </a:xfrm>
-      </p:grpSpPr>
-      <p:sp>
-        <p:nvSpPr>
-          <p:cNvPr id="2" name="Slide Image Placeholder 1"/>
-          <p:cNvSpPr>
-            <a:spLocks noGrp="1" noRot="1" noChangeAspect="1"/>
-          </p:cNvSpPr>
-          <p:nvPr>
-            <p:ph type="sldImg"/>
-          </p:nvPr>
-        </p:nvSpPr>
-        <p:spPr/>
-      </p:sp>
-      <p:sp>
-        <p:nvSpPr>
-          <p:cNvPr id="3" name="Notes Placeholder 2"/>
-          <p:cNvSpPr>
-            <a:spLocks noGrp="1"/>
-          </p:cNvSpPr>
-          <p:nvPr>
-            <p:ph type="body" idx="1"/>
-          </p:nvPr>
-        </p:nvSpPr>
-        <p:spPr/>
-        <p:txBody>
-          <a:bodyPr/>
-          <a:lstStyle/>
-          <a:p>
-            <a:r>
-              <a:rPr lang="en-US" dirty="0"/>
-              <a:t>Para fechar a Unidade 1, vamos recapitular. [Apontar para o quadro da esquerda.] No tópico 1, vimos que a economia estuda como a sociedade faz escolhas com recursos escassos, e que toda escolha tem um custo de oportunidade, como no iceberg do custo e na escolha entre estrada vicinal e creche. Toda sociedade precisa responder o que, como e para quem produzir. Conhecemos os fatores de produção e os agentes econômicos, vimos que os preços coordenam o mercado, com os exemplos da tarifa de ônibus e do estacionamento rotativo, que todas as economias atuais são mistas, o que é a elasticidade-preço da demanda, com o exemplo da tarifa de água, e a diferença entre micro e macroeconomia. [Apontar para o quadro da direita.] No tópico 2, separamos Estado e governo: o Estado, com povo, território e soberania, é permanente; o governo é transitório. Com Weber, entendemos o Estado como o monopólio do uso legítimo da força. Vimos que o mercado depende de instituições garantidas pelo Estado, que as falhas de mercado justificam a ação estatal, mas que o Estado também falha, e conhecemos as três funções de Musgrave: alocativa, distributiva e estabilizadora. Na próxima unidade, estudaremos a dinâmica pendular e a matriz liberal. Revise os conceitos, participe dos fóruns e até a próxima videoaula!</a:t>
-            </a:r>
-            <a:endParaRPr lang="en-US" dirty="0"/>
-          </a:p>
-        </p:txBody>
-      </p:sp>
-      <p:sp>
-        <p:nvSpPr>
-          <p:cNvPr id="4" name="Slide Number Placeholder 3"/>
-          <p:cNvSpPr>
-            <a:spLocks noGrp="1"/>
-          </p:cNvSpPr>
-          <p:nvPr>
-            <p:ph type="sldNum" sz="quarter" idx="10"/>
-          </p:nvPr>
-        </p:nvSpPr>
-        <p:spPr/>
-        <p:txBody>
-          <a:bodyPr/>
-          <a:lstStyle/>
-          <a:p>
-            <a:fld id="{F7021451-1387-4CA6-816F-3879F97B5CBC}" type="slidenum">
-              <a:rPr lang="en-US"/>
-              <a:t>45</a:t>
             </a:fld>
             <a:endParaRPr lang="en-US"/>
           </a:p>
@@ -23965,6 +22986,144 @@
                   </a:tcPr>
                 </a:tc>
               </a:tr>
+              <a:tr h="0">
+                <a:tc>
+                  <a:txBody>
+                    <a:bodyPr/>
+                    <a:lstStyle/>
+                    <a:p>
+                      <a:pPr indent="0" marL="0">
+                        <a:buNone/>
+                      </a:pPr>
+                      <a:r>
+                        <a:rPr lang="en-US" sz="1350" dirty="0">
+                          <a:solidFill>
+                            <a:srgbClr val="1F2A37"/>
+                          </a:solidFill>
+                          <a:latin typeface="Calibri" pitchFamily="34" charset="0"/>
+                          <a:ea typeface="Calibri" pitchFamily="34" charset="-122"/>
+                          <a:cs typeface="Calibri" pitchFamily="34" charset="-120"/>
+                        </a:rPr>
+                        <a:t>Na página</a:t>
+                      </a:r>
+                      <a:endParaRPr lang="en-US" sz="1350" dirty="0">
+                        <a:latin typeface="Calibri" charset="0"/>
+                        <a:ea typeface="Calibri" charset="0"/>
+                        <a:cs typeface="Calibri" charset="0"/>
+                      </a:endParaRPr>
+                    </a:p>
+                  </a:txBody>
+                  <a:tcPr marL="50800" marR="50800" marT="50800" marB="50800" anchor="ctr">
+                    <a:lnL w="9525" cap="flat" cmpd="sng" algn="ctr">
+                      <a:solidFill>
+                        <a:srgbClr val="DCD5C1"/>
+                      </a:solidFill>
+                      <a:prstDash val="solid"/>
+                      <a:round/>
+                      <a:headEnd type="none" w="med" len="med"/>
+                      <a:tailEnd type="none" w="med" len="med"/>
+                    </a:lnL>
+                    <a:lnR w="9525" cap="flat" cmpd="sng" algn="ctr">
+                      <a:solidFill>
+                        <a:srgbClr val="DCD5C1"/>
+                      </a:solidFill>
+                      <a:prstDash val="solid"/>
+                      <a:round/>
+                      <a:headEnd type="none" w="med" len="med"/>
+                      <a:tailEnd type="none" w="med" len="med"/>
+                    </a:lnR>
+                    <a:lnT w="9525" cap="flat" cmpd="sng" algn="ctr">
+                      <a:solidFill>
+                        <a:srgbClr val="DCD5C1"/>
+                      </a:solidFill>
+                      <a:prstDash val="solid"/>
+                      <a:round/>
+                      <a:headEnd type="none" w="med" len="med"/>
+                      <a:tailEnd type="none" w="med" len="med"/>
+                    </a:lnT>
+                    <a:lnB w="9525" cap="flat" cmpd="sng" algn="ctr">
+                      <a:solidFill>
+                        <a:srgbClr val="DCD5C1"/>
+                      </a:solidFill>
+                      <a:prstDash val="solid"/>
+                      <a:round/>
+                      <a:headEnd type="none" w="med" len="med"/>
+                      <a:tailEnd type="none" w="med" len="med"/>
+                    </a:lnB>
+                    <a:solidFill>
+                      <a:srgbClr val="F4F7F8"/>
+                    </a:solidFill>
+                  </a:tcPr>
+                </a:tc>
+                <a:tc>
+                  <a:txBody>
+                    <a:bodyPr/>
+                    <a:lstStyle/>
+                    <a:p>
+                      <a:pPr indent="0" marL="0">
+                        <a:buNone/>
+                      </a:pPr>
+                      <a:r>
+                        <a:rPr lang="en-US" sz="1350" dirty="0">
+                          <a:solidFill>
+                            <a:srgbClr val="1F2A37"/>
+                          </a:solidFill>
+                          <a:latin typeface="Calibri" pitchFamily="34" charset="0"/>
+                          <a:ea typeface="Calibri" pitchFamily="34" charset="-122"/>
+                          <a:cs typeface="Calibri" pitchFamily="34" charset="-120"/>
+                        </a:rPr>
+                        <a:t>Quiz de revisão da Unidade 1: 5 perguntas com resposta comentada (sem nota)</a:t>
+                      </a:r>
+                      <a:endParaRPr lang="en-US" sz="1350" dirty="0">
+                        <a:latin typeface="Calibri" charset="0"/>
+                        <a:ea typeface="Calibri" charset="0"/>
+                        <a:cs typeface="Calibri" charset="0"/>
+                      </a:endParaRPr>
+                    </a:p>
+                  </a:txBody>
+                  <a:tcPr marL="50800" marR="50800" marT="50800" marB="50800" anchor="ctr">
+                    <a:lnL w="9525" cap="flat" cmpd="sng" algn="ctr">
+                      <a:solidFill>
+                        <a:srgbClr val="DCD5C1"/>
+                      </a:solidFill>
+                      <a:prstDash val="solid"/>
+                      <a:round/>
+                      <a:headEnd type="none" w="med" len="med"/>
+                      <a:tailEnd type="none" w="med" len="med"/>
+                    </a:lnL>
+                    <a:lnR w="9525" cap="flat" cmpd="sng" algn="ctr">
+                      <a:solidFill>
+                        <a:srgbClr val="DCD5C1"/>
+                      </a:solidFill>
+                      <a:prstDash val="solid"/>
+                      <a:round/>
+                      <a:headEnd type="none" w="med" len="med"/>
+                      <a:tailEnd type="none" w="med" len="med"/>
+                    </a:lnR>
+                    <a:lnT w="9525" cap="flat" cmpd="sng" algn="ctr">
+                      <a:solidFill>
+                        <a:srgbClr val="DCD5C1"/>
+                      </a:solidFill>
+                      <a:prstDash val="solid"/>
+                      <a:round/>
+                      <a:headEnd type="none" w="med" len="med"/>
+                      <a:tailEnd type="none" w="med" len="med"/>
+                    </a:lnT>
+                    <a:lnB w="9525" cap="flat" cmpd="sng" algn="ctr">
+                      <a:solidFill>
+                        <a:srgbClr val="DCD5C1"/>
+                      </a:solidFill>
+                      <a:prstDash val="solid"/>
+                      <a:round/>
+                      <a:headEnd type="none" w="med" len="med"/>
+                      <a:tailEnd type="none" w="med" len="med"/>
+                    </a:lnB>
+                    <a:solidFill>
+                      <a:srgbClr val="F4F7F8"/>
+                    </a:solidFill>
+                  </a:tcPr>
+                </a:tc>
+              </a:tr>
             </a:tbl>
           </a:graphicData>
         </a:graphic>
@@ -24098,60 +23257,14 @@
       </p:grpSpPr>
       <p:sp>
         <p:nvSpPr>
-          <p:cNvPr id="2" name="Shape 0"/>
-          <p:cNvSpPr/>
-          <p:nvPr/>
-        </p:nvSpPr>
-        <p:spPr>
-          <a:xfrm>
-            <a:off x="4069080" y="1097280"/>
-            <a:ext cx="1005840" cy="1005840"/>
-          </a:xfrm>
-          <a:prstGeom prst="roundRect">
-            <a:avLst>
-              <a:gd name="adj" fmla="val 18182"/>
-            </a:avLst>
-          </a:prstGeom>
-          <a:solidFill>
-            <a:srgbClr val="2A8C85"/>
-          </a:solidFill>
-          <a:ln/>
-        </p:spPr>
-      </p:sp>
-      <p:pic>
-        <p:nvPicPr>
-          <p:cNvPr id="3" name="Image 0" descr="/tmp/claude-0/-home-user-zero-claude/d7e33190-c541-582c-a7cc-1156817732ce/scratchpad/deck/assets/icon_FaQuestion.png">    </p:cNvPr>
-          <p:cNvPicPr>
-            <a:picLocks noChangeAspect="1"/>
-          </p:cNvPicPr>
-          <p:nvPr/>
-        </p:nvPicPr>
-        <p:blipFill>
-          <a:blip r:embed="rId2"/>
-          <a:stretch>
-            <a:fillRect/>
-          </a:stretch>
-        </p:blipFill>
-        <p:spPr>
-          <a:xfrm>
-            <a:off x="4297680" y="1325880"/>
-            <a:ext cx="548640" cy="548640"/>
-          </a:xfrm>
-          <a:prstGeom prst="rect">
-            <a:avLst/>
-          </a:prstGeom>
-        </p:spPr>
-      </p:pic>
-      <p:sp>
-        <p:nvSpPr>
-          <p:cNvPr id="4" name="Text 1"/>
+          <p:cNvPr id="2" name="Text 0"/>
           <p:cNvSpPr txBox="1"/>
           <p:nvPr/>
         </p:nvSpPr>
         <p:spPr>
           <a:xfrm>
-            <a:off x="731520" y="2240280"/>
-            <a:ext cx="7680960" cy="731520"/>
+            <a:off x="731520" y="256032"/>
+            <a:ext cx="7680960" cy="566928"/>
           </a:xfrm>
           <a:prstGeom prst="rect">
             <a:avLst/>
@@ -24170,7 +23283,7 @@
               <a:buNone/>
             </a:pPr>
             <a:r>
-              <a:rPr lang="en-US" sz="3600" b="1" dirty="0">
+              <a:rPr lang="en-US" sz="2800" b="1" dirty="0">
                 <a:solidFill>
                   <a:srgbClr val="13294B"/>
                 </a:solidFill>
@@ -24178,64 +23291,22 @@
                 <a:ea typeface="Calibri" pitchFamily="34" charset="-122"/>
                 <a:cs typeface="Calibri" pitchFamily="34" charset="-120"/>
               </a:rPr>
-              <a:t>Quiz da Unidade 1</a:t>
-            </a:r>
-            <a:endParaRPr lang="en-US" sz="3600" dirty="0"/>
+              <a:t>Resumo da Unidade 1</a:t>
+            </a:r>
+            <a:endParaRPr lang="en-US" sz="2800" dirty="0"/>
           </a:p>
         </p:txBody>
       </p:sp>
       <p:sp>
         <p:nvSpPr>
-          <p:cNvPr id="5" name="Text 2"/>
+          <p:cNvPr id="3" name="Text 1"/>
           <p:cNvSpPr txBox="1"/>
           <p:nvPr/>
         </p:nvSpPr>
         <p:spPr>
           <a:xfrm>
-            <a:off x="1188720" y="2926080"/>
-            <a:ext cx="6766560" cy="822960"/>
-          </a:xfrm>
-          <a:prstGeom prst="rect">
-            <a:avLst/>
-          </a:prstGeom>
-          <a:noFill/>
-          <a:ln/>
-        </p:spPr>
-        <p:txBody>
-          <a:bodyPr wrap="square" lIns="0" tIns="0" rIns="0" bIns="0" rtlCol="0" anchor="t"/>
-          <a:lstStyle/>
-          <a:p>
-            <a:pPr algn="ctr" indent="0" marL="0">
-              <a:lnSpc>
-                <a:spcPct val="100000"/>
-              </a:lnSpc>
-              <a:buNone/>
-            </a:pPr>
-            <a:r>
-              <a:rPr lang="en-US" sz="1600" dirty="0">
-                <a:solidFill>
-                  <a:srgbClr val="5B6770"/>
-                </a:solidFill>
-                <a:latin typeface="Calibri" pitchFamily="34" charset="0"/>
-                <a:ea typeface="Calibri" pitchFamily="34" charset="-122"/>
-                <a:cs typeface="Calibri" pitchFamily="34" charset="-120"/>
-              </a:rPr>
-              <a:t>5 perguntas para revisar a unidade. Pause o vídeo, escolha sua resposta e confira no slide seguinte.</a:t>
-            </a:r>
-            <a:endParaRPr lang="en-US" sz="1600" dirty="0"/>
-          </a:p>
-        </p:txBody>
-      </p:sp>
-      <p:sp>
-        <p:nvSpPr>
-          <p:cNvPr id="6" name="Text 3"/>
-          <p:cNvSpPr txBox="1"/>
-          <p:nvPr/>
-        </p:nvSpPr>
-        <p:spPr>
-          <a:xfrm>
-            <a:off x="4206240" y="36576"/>
-            <a:ext cx="4800600" cy="219456"/>
+            <a:off x="1005840" y="804672"/>
+            <a:ext cx="7132320" cy="329184"/>
           </a:xfrm>
           <a:prstGeom prst="rect">
             <a:avLst/>
@@ -24247,14 +23318,14 @@
           <a:bodyPr wrap="square" lIns="0" tIns="0" rIns="0" bIns="0" rtlCol="0" anchor="ctr"/>
           <a:lstStyle/>
           <a:p>
-            <a:pPr algn="r" indent="0" marL="0">
+            <a:pPr algn="ctr" indent="0" marL="0">
               <a:lnSpc>
                 <a:spcPct val="100000"/>
               </a:lnSpc>
               <a:buNone/>
             </a:pPr>
             <a:r>
-              <a:rPr lang="en-US" sz="950" dirty="0">
+              <a:rPr lang="en-US" sz="1400" dirty="0">
                 <a:solidFill>
                   <a:srgbClr val="5B6770"/>
                 </a:solidFill>
@@ -24262,149 +23333,26 @@
                 <a:ea typeface="Calibri" pitchFamily="34" charset="-122"/>
                 <a:cs typeface="Calibri" pitchFamily="34" charset="-120"/>
               </a:rPr>
-              <a:t>Estado, Governo e Mercado · Unidade 1</a:t>
-            </a:r>
-            <a:endParaRPr lang="en-US" sz="950" dirty="0"/>
+              <a:t>O que discutimos nesta unidade</a:t>
+            </a:r>
+            <a:endParaRPr lang="en-US" sz="1400" dirty="0"/>
           </a:p>
         </p:txBody>
       </p:sp>
-    </p:spTree>
-  </p:cSld>
-  <p:clrMapOvr>
-    <a:masterClrMapping/>
-  </p:clrMapOvr>
-</p:sld>
-</file>
-
-<file path=ppt/slides/slide35.xml><?xml version="1.0" encoding="utf-8"?>
-<p:sld xmlns:a="http://schemas.openxmlformats.org/drawingml/2006/main" xmlns:r="http://schemas.openxmlformats.org/officeDocument/2006/relationships" xmlns:p="http://schemas.openxmlformats.org/presentationml/2006/main">
-  <p:cSld name="Slide 35">
-    <p:bg>
-      <p:bgPr>
-        <a:blipFill dpi="0" rotWithShape="1">
-          <a:blip r:embed="rId1">
-            <a:lum/>
-          </a:blip>
-          <a:srcRect/>
-          <a:stretch>
-            <a:fillRect/>
-          </a:stretch>
-        </a:blipFill>
-        <a:effectLst/>
-      </p:bgPr>
-    </p:bg>
-    <p:spTree>
-      <p:nvGrpSpPr>
-        <p:cNvPr id="1" name=""/>
-        <p:cNvGrpSpPr/>
-        <p:nvPr/>
-      </p:nvGrpSpPr>
-      <p:grpSpPr>
-        <a:xfrm>
-          <a:off x="0" y="0"/>
-          <a:ext cx="0" cy="0"/>
-          <a:chOff x="0" y="0"/>
-          <a:chExt cx="0" cy="0"/>
-        </a:xfrm>
-      </p:grpSpPr>
-      <p:sp>
-        <p:nvSpPr>
-          <p:cNvPr id="2" name="Text 0"/>
+      <p:sp>
+        <p:nvSpPr>
+          <p:cNvPr id="4" name="Text 2"/>
           <p:cNvSpPr txBox="1"/>
           <p:nvPr/>
         </p:nvSpPr>
         <p:spPr>
           <a:xfrm>
-            <a:off x="731520" y="274320"/>
-            <a:ext cx="7680960" cy="365760"/>
-          </a:xfrm>
-          <a:prstGeom prst="rect">
-            <a:avLst/>
-          </a:prstGeom>
-          <a:noFill/>
-          <a:ln/>
-        </p:spPr>
-        <p:txBody>
-          <a:bodyPr wrap="square" lIns="0" tIns="0" rIns="0" bIns="0" rtlCol="0" anchor="ctr"/>
-          <a:lstStyle/>
-          <a:p>
-            <a:pPr algn="ctr" indent="0" marL="0">
-              <a:lnSpc>
-                <a:spcPct val="100000"/>
-              </a:lnSpc>
-              <a:buNone/>
-            </a:pPr>
-            <a:r>
-              <a:rPr lang="en-US" sz="1250" b="1" dirty="0">
-                <a:solidFill>
-                  <a:srgbClr val="2A8C85"/>
-                </a:solidFill>
-                <a:latin typeface="Calibri" pitchFamily="34" charset="0"/>
-                <a:ea typeface="Calibri" pitchFamily="34" charset="-122"/>
-                <a:cs typeface="Calibri" pitchFamily="34" charset="-120"/>
-              </a:rPr>
-              <a:t>QUIZ DA UNIDADE 1 · PERGUNTA 1 DE 5</a:t>
-            </a:r>
-            <a:endParaRPr lang="en-US" sz="1250" dirty="0"/>
-          </a:p>
-        </p:txBody>
-      </p:sp>
-      <p:sp>
-        <p:nvSpPr>
-          <p:cNvPr id="3" name="Text 1"/>
-          <p:cNvSpPr txBox="1"/>
-          <p:nvPr/>
-        </p:nvSpPr>
-        <p:spPr>
-          <a:xfrm>
-            <a:off x="731520" y="658368"/>
-            <a:ext cx="7680960" cy="960120"/>
-          </a:xfrm>
-          <a:prstGeom prst="rect">
-            <a:avLst/>
-          </a:prstGeom>
-          <a:noFill/>
-          <a:ln/>
-        </p:spPr>
-        <p:txBody>
-          <a:bodyPr wrap="square" lIns="0" tIns="0" rIns="0" bIns="0" rtlCol="0" anchor="ctr"/>
-          <a:lstStyle/>
-          <a:p>
-            <a:pPr algn="ctr" indent="0" marL="0">
-              <a:lnSpc>
-                <a:spcPct val="100000"/>
-              </a:lnSpc>
-              <a:buNone/>
-            </a:pPr>
-            <a:r>
-              <a:rPr lang="en-US" sz="1900" b="1" dirty="0">
-                <a:solidFill>
-                  <a:srgbClr val="13294B"/>
-                </a:solidFill>
-                <a:latin typeface="Calibri" pitchFamily="34" charset="0"/>
-                <a:ea typeface="Calibri" pitchFamily="34" charset="-122"/>
-                <a:cs typeface="Calibri" pitchFamily="34" charset="-120"/>
-              </a:rPr>
-              <a:t>Qual destes NÃO é um elemento constitutivo do Estado?</a:t>
-            </a:r>
-            <a:endParaRPr lang="en-US" sz="1900" dirty="0"/>
-          </a:p>
-        </p:txBody>
-      </p:sp>
-      <p:sp>
-        <p:nvSpPr>
-          <p:cNvPr id="4" name="Shape 2"/>
-          <p:cNvSpPr/>
-          <p:nvPr/>
-        </p:nvSpPr>
-        <p:spPr>
-          <a:xfrm>
-            <a:off x="685800" y="1737360"/>
-            <a:ext cx="3794760" cy="914400"/>
+            <a:off x="685800" y="1170432"/>
+            <a:ext cx="3794760" cy="2743200"/>
           </a:xfrm>
           <a:prstGeom prst="roundRect">
             <a:avLst>
-              <a:gd name="adj" fmla="val 8000"/>
+              <a:gd name="adj" fmla="val 2000"/>
             </a:avLst>
           </a:prstGeom>
           <a:solidFill>
@@ -24414,9 +23362,178 @@
             <a:solidFill>
               <a:srgbClr val="DCD5C1"/>
             </a:solidFill>
-            <a:prstDash val="solid"/>
           </a:ln>
         </p:spPr>
+        <p:txBody>
+          <a:bodyPr wrap="square" lIns="114300" tIns="114300" rIns="114300" bIns="114300" rtlCol="0" anchor="t"/>
+          <a:lstStyle/>
+          <a:p>
+            <a:pPr algn="l" indent="0" marL="0">
+              <a:lnSpc>
+                <a:spcPct val="100000"/>
+              </a:lnSpc>
+              <a:spcAft>
+                <a:spcPts val="200"/>
+              </a:spcAft>
+              <a:buNone/>
+            </a:pPr>
+            <a:r>
+              <a:rPr lang="en-US" sz="1100" b="1" dirty="0">
+                <a:solidFill>
+                  <a:srgbClr val="2A8C85"/>
+                </a:solidFill>
+                <a:latin typeface="Calibri" pitchFamily="34" charset="0"/>
+                <a:ea typeface="Calibri" pitchFamily="34" charset="-122"/>
+                <a:cs typeface="Calibri" pitchFamily="34" charset="-120"/>
+              </a:rPr>
+              <a:t>PARTE 1 · TÓPICO 1</a:t>
+            </a:r>
+            <a:endParaRPr lang="en-US" sz="1100" dirty="0"/>
+          </a:p>
+          <a:p>
+            <a:pPr algn="l" indent="0" marL="0">
+              <a:lnSpc>
+                <a:spcPct val="100000"/>
+              </a:lnSpc>
+              <a:spcAft>
+                <a:spcPts val="400"/>
+              </a:spcAft>
+              <a:buNone/>
+            </a:pPr>
+            <a:r>
+              <a:rPr lang="en-US" sz="1450" b="1" dirty="0">
+                <a:solidFill>
+                  <a:srgbClr val="13294B"/>
+                </a:solidFill>
+                <a:latin typeface="Calibri" pitchFamily="34" charset="0"/>
+                <a:ea typeface="Calibri" pitchFamily="34" charset="-122"/>
+                <a:cs typeface="Calibri" pitchFamily="34" charset="-120"/>
+              </a:rPr>
+              <a:t>Introdução à economia</a:t>
+            </a:r>
+            <a:endParaRPr lang="en-US" sz="1100" dirty="0"/>
+          </a:p>
+          <a:p>
+            <a:pPr algn="l" marL="177800" indent="-177800">
+              <a:lnSpc>
+                <a:spcPct val="100000"/>
+              </a:lnSpc>
+              <a:spcAft>
+                <a:spcPts val="300"/>
+              </a:spcAft>
+              <a:buSzPct val="100000"/>
+              <a:buChar char="•"/>
+            </a:pPr>
+            <a:r>
+              <a:rPr lang="en-US" sz="1200" dirty="0">
+                <a:solidFill>
+                  <a:srgbClr val="1F2A37"/>
+                </a:solidFill>
+                <a:latin typeface="Calibri" pitchFamily="34" charset="0"/>
+                <a:ea typeface="Calibri" pitchFamily="34" charset="-122"/>
+                <a:cs typeface="Calibri" pitchFamily="34" charset="-120"/>
+              </a:rPr>
+              <a:t>Economia estuda escolhas com recursos escassos; toda escolha tem custo de oportunidade.</a:t>
+            </a:r>
+            <a:endParaRPr lang="en-US" sz="1100" dirty="0"/>
+          </a:p>
+          <a:p>
+            <a:pPr algn="l" marL="177800" indent="-177800">
+              <a:lnSpc>
+                <a:spcPct val="100000"/>
+              </a:lnSpc>
+              <a:spcAft>
+                <a:spcPts val="300"/>
+              </a:spcAft>
+              <a:buSzPct val="100000"/>
+              <a:buChar char="•"/>
+            </a:pPr>
+            <a:r>
+              <a:rPr lang="en-US" sz="1200" dirty="0">
+                <a:solidFill>
+                  <a:srgbClr val="1F2A37"/>
+                </a:solidFill>
+                <a:latin typeface="Calibri" pitchFamily="34" charset="0"/>
+                <a:ea typeface="Calibri" pitchFamily="34" charset="-122"/>
+                <a:cs typeface="Calibri" pitchFamily="34" charset="-120"/>
+              </a:rPr>
+              <a:t>Três problemas: o que, como e para quem produzir.</a:t>
+            </a:r>
+            <a:endParaRPr lang="en-US" sz="1100" dirty="0"/>
+          </a:p>
+          <a:p>
+            <a:pPr algn="l" marL="177800" indent="-177800">
+              <a:lnSpc>
+                <a:spcPct val="100000"/>
+              </a:lnSpc>
+              <a:spcAft>
+                <a:spcPts val="300"/>
+              </a:spcAft>
+              <a:buSzPct val="100000"/>
+              <a:buChar char="•"/>
+            </a:pPr>
+            <a:r>
+              <a:rPr lang="en-US" sz="1200" dirty="0">
+                <a:solidFill>
+                  <a:srgbClr val="1F2A37"/>
+                </a:solidFill>
+                <a:latin typeface="Calibri" pitchFamily="34" charset="0"/>
+                <a:ea typeface="Calibri" pitchFamily="34" charset="-122"/>
+                <a:cs typeface="Calibri" pitchFamily="34" charset="-120"/>
+              </a:rPr>
+              <a:t>Fatores (terra, trabalho, capital, capacidade empresarial) e agentes (famílias, empresas, governo, setor externo).</a:t>
+            </a:r>
+            <a:endParaRPr lang="en-US" sz="1100" dirty="0"/>
+          </a:p>
+          <a:p>
+            <a:pPr algn="l" marL="177800" indent="-177800">
+              <a:lnSpc>
+                <a:spcPct val="100000"/>
+              </a:lnSpc>
+              <a:spcAft>
+                <a:spcPts val="300"/>
+              </a:spcAft>
+              <a:buSzPct val="100000"/>
+              <a:buChar char="•"/>
+            </a:pPr>
+            <a:r>
+              <a:rPr lang="en-US" sz="1200" dirty="0">
+                <a:solidFill>
+                  <a:srgbClr val="1F2A37"/>
+                </a:solidFill>
+                <a:latin typeface="Calibri" pitchFamily="34" charset="0"/>
+                <a:ea typeface="Calibri" pitchFamily="34" charset="-122"/>
+                <a:cs typeface="Calibri" pitchFamily="34" charset="-120"/>
+              </a:rPr>
+              <a:t>Os preços coordenam o mercado; todas as economias são mistas.</a:t>
+            </a:r>
+            <a:endParaRPr lang="en-US" sz="1100" dirty="0"/>
+          </a:p>
+          <a:p>
+            <a:pPr algn="l" marL="177800" indent="-177800">
+              <a:lnSpc>
+                <a:spcPct val="100000"/>
+              </a:lnSpc>
+              <a:spcAft>
+                <a:spcPts val="300"/>
+              </a:spcAft>
+              <a:buSzPct val="100000"/>
+              <a:buChar char="•"/>
+            </a:pPr>
+            <a:r>
+              <a:rPr lang="en-US" sz="1200" dirty="0">
+                <a:solidFill>
+                  <a:srgbClr val="1F2A37"/>
+                </a:solidFill>
+                <a:latin typeface="Calibri" pitchFamily="34" charset="0"/>
+                <a:ea typeface="Calibri" pitchFamily="34" charset="-122"/>
+                <a:cs typeface="Calibri" pitchFamily="34" charset="-120"/>
+              </a:rPr>
+              <a:t>Elasticidade: quanto a quantidade reage ao preço; micro × macro.</a:t>
+            </a:r>
+            <a:endParaRPr lang="en-US" sz="1100" dirty="0"/>
+          </a:p>
+        </p:txBody>
       </p:sp>
       <p:sp>
         <p:nvSpPr>
@@ -24426,1070 +23543,12 @@
         </p:nvSpPr>
         <p:spPr>
           <a:xfrm>
-            <a:off x="813816" y="1984248"/>
-            <a:ext cx="420624" cy="420624"/>
+            <a:off x="4663440" y="1170432"/>
+            <a:ext cx="3794760" cy="2743200"/>
           </a:xfrm>
           <a:prstGeom prst="roundRect">
             <a:avLst>
-              <a:gd name="adj" fmla="val 50000"/>
-            </a:avLst>
-          </a:prstGeom>
-          <a:solidFill>
-            <a:srgbClr val="13294B"/>
-          </a:solidFill>
-          <a:ln/>
-        </p:spPr>
-        <p:txBody>
-          <a:bodyPr wrap="square" lIns="0" tIns="0" rIns="0" bIns="0" rtlCol="0" anchor="ctr"/>
-          <a:lstStyle/>
-          <a:p>
-            <a:pPr algn="ctr" indent="0" marL="0">
-              <a:lnSpc>
-                <a:spcPct val="100000"/>
-              </a:lnSpc>
-              <a:buNone/>
-            </a:pPr>
-            <a:r>
-              <a:rPr lang="en-US" sz="1600" b="1" dirty="0">
-                <a:solidFill>
-                  <a:srgbClr val="FFFFFF"/>
-                </a:solidFill>
-                <a:latin typeface="Calibri" pitchFamily="34" charset="0"/>
-                <a:ea typeface="Calibri" pitchFamily="34" charset="-122"/>
-                <a:cs typeface="Calibri" pitchFamily="34" charset="-120"/>
-              </a:rPr>
-              <a:t>a</a:t>
-            </a:r>
-            <a:endParaRPr lang="en-US" sz="1600" dirty="0"/>
-          </a:p>
-        </p:txBody>
-      </p:sp>
-      <p:sp>
-        <p:nvSpPr>
-          <p:cNvPr id="6" name="Text 4"/>
-          <p:cNvSpPr txBox="1"/>
-          <p:nvPr/>
-        </p:nvSpPr>
-        <p:spPr>
-          <a:xfrm>
-            <a:off x="1344168" y="1773936"/>
-            <a:ext cx="3044952" cy="841248"/>
-          </a:xfrm>
-          <a:prstGeom prst="rect">
-            <a:avLst/>
-          </a:prstGeom>
-          <a:noFill/>
-          <a:ln/>
-        </p:spPr>
-        <p:txBody>
-          <a:bodyPr wrap="square" lIns="25400" tIns="25400" rIns="25400" bIns="25400" rtlCol="0" anchor="ctr"/>
-          <a:lstStyle/>
-          <a:p>
-            <a:pPr algn="l" indent="0" marL="0">
-              <a:lnSpc>
-                <a:spcPct val="100000"/>
-              </a:lnSpc>
-              <a:buNone/>
-            </a:pPr>
-            <a:r>
-              <a:rPr lang="en-US" sz="1400" dirty="0">
-                <a:solidFill>
-                  <a:srgbClr val="1F2A37"/>
-                </a:solidFill>
-                <a:latin typeface="Calibri" pitchFamily="34" charset="0"/>
-                <a:ea typeface="Calibri" pitchFamily="34" charset="-122"/>
-                <a:cs typeface="Calibri" pitchFamily="34" charset="-120"/>
-              </a:rPr>
-              <a:t>Povo</a:t>
-            </a:r>
-            <a:endParaRPr lang="en-US" sz="1400" dirty="0"/>
-          </a:p>
-        </p:txBody>
-      </p:sp>
-      <p:sp>
-        <p:nvSpPr>
-          <p:cNvPr id="7" name="Shape 5"/>
-          <p:cNvSpPr/>
-          <p:nvPr/>
-        </p:nvSpPr>
-        <p:spPr>
-          <a:xfrm>
-            <a:off x="4663440" y="1737360"/>
-            <a:ext cx="3794760" cy="914400"/>
-          </a:xfrm>
-          <a:prstGeom prst="roundRect">
-            <a:avLst>
-              <a:gd name="adj" fmla="val 8000"/>
-            </a:avLst>
-          </a:prstGeom>
-          <a:solidFill>
-            <a:srgbClr val="FFFFFF"/>
-          </a:solidFill>
-          <a:ln w="12700">
-            <a:solidFill>
-              <a:srgbClr val="DCD5C1"/>
-            </a:solidFill>
-            <a:prstDash val="solid"/>
-          </a:ln>
-        </p:spPr>
-      </p:sp>
-      <p:sp>
-        <p:nvSpPr>
-          <p:cNvPr id="8" name="Text 6"/>
-          <p:cNvSpPr txBox="1"/>
-          <p:nvPr/>
-        </p:nvSpPr>
-        <p:spPr>
-          <a:xfrm>
-            <a:off x="4791456" y="1984248"/>
-            <a:ext cx="420624" cy="420624"/>
-          </a:xfrm>
-          <a:prstGeom prst="roundRect">
-            <a:avLst>
-              <a:gd name="adj" fmla="val 50000"/>
-            </a:avLst>
-          </a:prstGeom>
-          <a:solidFill>
-            <a:srgbClr val="13294B"/>
-          </a:solidFill>
-          <a:ln/>
-        </p:spPr>
-        <p:txBody>
-          <a:bodyPr wrap="square" lIns="0" tIns="0" rIns="0" bIns="0" rtlCol="0" anchor="ctr"/>
-          <a:lstStyle/>
-          <a:p>
-            <a:pPr algn="ctr" indent="0" marL="0">
-              <a:lnSpc>
-                <a:spcPct val="100000"/>
-              </a:lnSpc>
-              <a:buNone/>
-            </a:pPr>
-            <a:r>
-              <a:rPr lang="en-US" sz="1600" b="1" dirty="0">
-                <a:solidFill>
-                  <a:srgbClr val="FFFFFF"/>
-                </a:solidFill>
-                <a:latin typeface="Calibri" pitchFamily="34" charset="0"/>
-                <a:ea typeface="Calibri" pitchFamily="34" charset="-122"/>
-                <a:cs typeface="Calibri" pitchFamily="34" charset="-120"/>
-              </a:rPr>
-              <a:t>b</a:t>
-            </a:r>
-            <a:endParaRPr lang="en-US" sz="1600" dirty="0"/>
-          </a:p>
-        </p:txBody>
-      </p:sp>
-      <p:sp>
-        <p:nvSpPr>
-          <p:cNvPr id="9" name="Text 7"/>
-          <p:cNvSpPr txBox="1"/>
-          <p:nvPr/>
-        </p:nvSpPr>
-        <p:spPr>
-          <a:xfrm>
-            <a:off x="5321808" y="1773936"/>
-            <a:ext cx="3044952" cy="841248"/>
-          </a:xfrm>
-          <a:prstGeom prst="rect">
-            <a:avLst/>
-          </a:prstGeom>
-          <a:noFill/>
-          <a:ln/>
-        </p:spPr>
-        <p:txBody>
-          <a:bodyPr wrap="square" lIns="25400" tIns="25400" rIns="25400" bIns="25400" rtlCol="0" anchor="ctr"/>
-          <a:lstStyle/>
-          <a:p>
-            <a:pPr algn="l" indent="0" marL="0">
-              <a:lnSpc>
-                <a:spcPct val="100000"/>
-              </a:lnSpc>
-              <a:buNone/>
-            </a:pPr>
-            <a:r>
-              <a:rPr lang="en-US" sz="1400" dirty="0">
-                <a:solidFill>
-                  <a:srgbClr val="1F2A37"/>
-                </a:solidFill>
-                <a:latin typeface="Calibri" pitchFamily="34" charset="0"/>
-                <a:ea typeface="Calibri" pitchFamily="34" charset="-122"/>
-                <a:cs typeface="Calibri" pitchFamily="34" charset="-120"/>
-              </a:rPr>
-              <a:t>Território</a:t>
-            </a:r>
-            <a:endParaRPr lang="en-US" sz="1400" dirty="0"/>
-          </a:p>
-        </p:txBody>
-      </p:sp>
-      <p:sp>
-        <p:nvSpPr>
-          <p:cNvPr id="10" name="Shape 8"/>
-          <p:cNvSpPr/>
-          <p:nvPr/>
-        </p:nvSpPr>
-        <p:spPr>
-          <a:xfrm>
-            <a:off x="685800" y="2798064"/>
-            <a:ext cx="3794760" cy="914400"/>
-          </a:xfrm>
-          <a:prstGeom prst="roundRect">
-            <a:avLst>
-              <a:gd name="adj" fmla="val 8000"/>
-            </a:avLst>
-          </a:prstGeom>
-          <a:solidFill>
-            <a:srgbClr val="FFFFFF"/>
-          </a:solidFill>
-          <a:ln w="12700">
-            <a:solidFill>
-              <a:srgbClr val="DCD5C1"/>
-            </a:solidFill>
-            <a:prstDash val="solid"/>
-          </a:ln>
-        </p:spPr>
-      </p:sp>
-      <p:sp>
-        <p:nvSpPr>
-          <p:cNvPr id="11" name="Text 9"/>
-          <p:cNvSpPr txBox="1"/>
-          <p:nvPr/>
-        </p:nvSpPr>
-        <p:spPr>
-          <a:xfrm>
-            <a:off x="813816" y="3044952"/>
-            <a:ext cx="420624" cy="420624"/>
-          </a:xfrm>
-          <a:prstGeom prst="roundRect">
-            <a:avLst>
-              <a:gd name="adj" fmla="val 50000"/>
-            </a:avLst>
-          </a:prstGeom>
-          <a:solidFill>
-            <a:srgbClr val="13294B"/>
-          </a:solidFill>
-          <a:ln/>
-        </p:spPr>
-        <p:txBody>
-          <a:bodyPr wrap="square" lIns="0" tIns="0" rIns="0" bIns="0" rtlCol="0" anchor="ctr"/>
-          <a:lstStyle/>
-          <a:p>
-            <a:pPr algn="ctr" indent="0" marL="0">
-              <a:lnSpc>
-                <a:spcPct val="100000"/>
-              </a:lnSpc>
-              <a:buNone/>
-            </a:pPr>
-            <a:r>
-              <a:rPr lang="en-US" sz="1600" b="1" dirty="0">
-                <a:solidFill>
-                  <a:srgbClr val="FFFFFF"/>
-                </a:solidFill>
-                <a:latin typeface="Calibri" pitchFamily="34" charset="0"/>
-                <a:ea typeface="Calibri" pitchFamily="34" charset="-122"/>
-                <a:cs typeface="Calibri" pitchFamily="34" charset="-120"/>
-              </a:rPr>
-              <a:t>c</a:t>
-            </a:r>
-            <a:endParaRPr lang="en-US" sz="1600" dirty="0"/>
-          </a:p>
-        </p:txBody>
-      </p:sp>
-      <p:sp>
-        <p:nvSpPr>
-          <p:cNvPr id="12" name="Text 10"/>
-          <p:cNvSpPr txBox="1"/>
-          <p:nvPr/>
-        </p:nvSpPr>
-        <p:spPr>
-          <a:xfrm>
-            <a:off x="1344168" y="2834640"/>
-            <a:ext cx="3044952" cy="841248"/>
-          </a:xfrm>
-          <a:prstGeom prst="rect">
-            <a:avLst/>
-          </a:prstGeom>
-          <a:noFill/>
-          <a:ln/>
-        </p:spPr>
-        <p:txBody>
-          <a:bodyPr wrap="square" lIns="25400" tIns="25400" rIns="25400" bIns="25400" rtlCol="0" anchor="ctr"/>
-          <a:lstStyle/>
-          <a:p>
-            <a:pPr algn="l" indent="0" marL="0">
-              <a:lnSpc>
-                <a:spcPct val="100000"/>
-              </a:lnSpc>
-              <a:buNone/>
-            </a:pPr>
-            <a:r>
-              <a:rPr lang="en-US" sz="1400" dirty="0">
-                <a:solidFill>
-                  <a:srgbClr val="1F2A37"/>
-                </a:solidFill>
-                <a:latin typeface="Calibri" pitchFamily="34" charset="0"/>
-                <a:ea typeface="Calibri" pitchFamily="34" charset="-122"/>
-                <a:cs typeface="Calibri" pitchFamily="34" charset="-120"/>
-              </a:rPr>
-              <a:t>Soberania</a:t>
-            </a:r>
-            <a:endParaRPr lang="en-US" sz="1400" dirty="0"/>
-          </a:p>
-        </p:txBody>
-      </p:sp>
-      <p:sp>
-        <p:nvSpPr>
-          <p:cNvPr id="13" name="Shape 11"/>
-          <p:cNvSpPr/>
-          <p:nvPr/>
-        </p:nvSpPr>
-        <p:spPr>
-          <a:xfrm>
-            <a:off x="4663440" y="2798064"/>
-            <a:ext cx="3794760" cy="914400"/>
-          </a:xfrm>
-          <a:prstGeom prst="roundRect">
-            <a:avLst>
-              <a:gd name="adj" fmla="val 8000"/>
-            </a:avLst>
-          </a:prstGeom>
-          <a:solidFill>
-            <a:srgbClr val="FFFFFF"/>
-          </a:solidFill>
-          <a:ln w="12700">
-            <a:solidFill>
-              <a:srgbClr val="DCD5C1"/>
-            </a:solidFill>
-            <a:prstDash val="solid"/>
-          </a:ln>
-        </p:spPr>
-      </p:sp>
-      <p:sp>
-        <p:nvSpPr>
-          <p:cNvPr id="14" name="Text 12"/>
-          <p:cNvSpPr txBox="1"/>
-          <p:nvPr/>
-        </p:nvSpPr>
-        <p:spPr>
-          <a:xfrm>
-            <a:off x="4791456" y="3044952"/>
-            <a:ext cx="420624" cy="420624"/>
-          </a:xfrm>
-          <a:prstGeom prst="roundRect">
-            <a:avLst>
-              <a:gd name="adj" fmla="val 50000"/>
-            </a:avLst>
-          </a:prstGeom>
-          <a:solidFill>
-            <a:srgbClr val="13294B"/>
-          </a:solidFill>
-          <a:ln/>
-        </p:spPr>
-        <p:txBody>
-          <a:bodyPr wrap="square" lIns="0" tIns="0" rIns="0" bIns="0" rtlCol="0" anchor="ctr"/>
-          <a:lstStyle/>
-          <a:p>
-            <a:pPr algn="ctr" indent="0" marL="0">
-              <a:lnSpc>
-                <a:spcPct val="100000"/>
-              </a:lnSpc>
-              <a:buNone/>
-            </a:pPr>
-            <a:r>
-              <a:rPr lang="en-US" sz="1600" b="1" dirty="0">
-                <a:solidFill>
-                  <a:srgbClr val="FFFFFF"/>
-                </a:solidFill>
-                <a:latin typeface="Calibri" pitchFamily="34" charset="0"/>
-                <a:ea typeface="Calibri" pitchFamily="34" charset="-122"/>
-                <a:cs typeface="Calibri" pitchFamily="34" charset="-120"/>
-              </a:rPr>
-              <a:t>d</a:t>
-            </a:r>
-            <a:endParaRPr lang="en-US" sz="1600" dirty="0"/>
-          </a:p>
-        </p:txBody>
-      </p:sp>
-      <p:sp>
-        <p:nvSpPr>
-          <p:cNvPr id="15" name="Text 13"/>
-          <p:cNvSpPr txBox="1"/>
-          <p:nvPr/>
-        </p:nvSpPr>
-        <p:spPr>
-          <a:xfrm>
-            <a:off x="5321808" y="2834640"/>
-            <a:ext cx="3044952" cy="841248"/>
-          </a:xfrm>
-          <a:prstGeom prst="rect">
-            <a:avLst/>
-          </a:prstGeom>
-          <a:noFill/>
-          <a:ln/>
-        </p:spPr>
-        <p:txBody>
-          <a:bodyPr wrap="square" lIns="25400" tIns="25400" rIns="25400" bIns="25400" rtlCol="0" anchor="ctr"/>
-          <a:lstStyle/>
-          <a:p>
-            <a:pPr algn="l" indent="0" marL="0">
-              <a:lnSpc>
-                <a:spcPct val="100000"/>
-              </a:lnSpc>
-              <a:buNone/>
-            </a:pPr>
-            <a:r>
-              <a:rPr lang="en-US" sz="1400" dirty="0">
-                <a:solidFill>
-                  <a:srgbClr val="1F2A37"/>
-                </a:solidFill>
-                <a:latin typeface="Calibri" pitchFamily="34" charset="0"/>
-                <a:ea typeface="Calibri" pitchFamily="34" charset="-122"/>
-                <a:cs typeface="Calibri" pitchFamily="34" charset="-120"/>
-              </a:rPr>
-              <a:t>Mercado</a:t>
-            </a:r>
-            <a:endParaRPr lang="en-US" sz="1400" dirty="0"/>
-          </a:p>
-        </p:txBody>
-      </p:sp>
-      <p:sp>
-        <p:nvSpPr>
-          <p:cNvPr id="16" name="Text 14"/>
-          <p:cNvSpPr txBox="1"/>
-          <p:nvPr/>
-        </p:nvSpPr>
-        <p:spPr>
-          <a:xfrm>
-            <a:off x="4206240" y="36576"/>
-            <a:ext cx="4800600" cy="219456"/>
-          </a:xfrm>
-          <a:prstGeom prst="rect">
-            <a:avLst/>
-          </a:prstGeom>
-          <a:noFill/>
-          <a:ln/>
-        </p:spPr>
-        <p:txBody>
-          <a:bodyPr wrap="square" lIns="0" tIns="0" rIns="0" bIns="0" rtlCol="0" anchor="ctr"/>
-          <a:lstStyle/>
-          <a:p>
-            <a:pPr algn="r" indent="0" marL="0">
-              <a:lnSpc>
-                <a:spcPct val="100000"/>
-              </a:lnSpc>
-              <a:buNone/>
-            </a:pPr>
-            <a:r>
-              <a:rPr lang="en-US" sz="950" dirty="0">
-                <a:solidFill>
-                  <a:srgbClr val="5B6770"/>
-                </a:solidFill>
-                <a:latin typeface="Calibri" pitchFamily="34" charset="0"/>
-                <a:ea typeface="Calibri" pitchFamily="34" charset="-122"/>
-                <a:cs typeface="Calibri" pitchFamily="34" charset="-120"/>
-              </a:rPr>
-              <a:t>Estado, Governo e Mercado · Unidade 1</a:t>
-            </a:r>
-            <a:endParaRPr lang="en-US" sz="950" dirty="0"/>
-          </a:p>
-        </p:txBody>
-      </p:sp>
-    </p:spTree>
-  </p:cSld>
-  <p:clrMapOvr>
-    <a:masterClrMapping/>
-  </p:clrMapOvr>
-</p:sld>
-</file>
-
-<file path=ppt/slides/slide36.xml><?xml version="1.0" encoding="utf-8"?>
-<p:sld xmlns:a="http://schemas.openxmlformats.org/drawingml/2006/main" xmlns:r="http://schemas.openxmlformats.org/officeDocument/2006/relationships" xmlns:p="http://schemas.openxmlformats.org/presentationml/2006/main">
-  <p:cSld name="Slide 36">
-    <p:bg>
-      <p:bgPr>
-        <a:blipFill dpi="0" rotWithShape="1">
-          <a:blip r:embed="rId1">
-            <a:lum/>
-          </a:blip>
-          <a:srcRect/>
-          <a:stretch>
-            <a:fillRect/>
-          </a:stretch>
-        </a:blipFill>
-        <a:effectLst/>
-      </p:bgPr>
-    </p:bg>
-    <p:spTree>
-      <p:nvGrpSpPr>
-        <p:cNvPr id="1" name=""/>
-        <p:cNvGrpSpPr/>
-        <p:nvPr/>
-      </p:nvGrpSpPr>
-      <p:grpSpPr>
-        <a:xfrm>
-          <a:off x="0" y="0"/>
-          <a:ext cx="0" cy="0"/>
-          <a:chOff x="0" y="0"/>
-          <a:chExt cx="0" cy="0"/>
-        </a:xfrm>
-      </p:grpSpPr>
-      <p:sp>
-        <p:nvSpPr>
-          <p:cNvPr id="2" name="Text 0"/>
-          <p:cNvSpPr txBox="1"/>
-          <p:nvPr/>
-        </p:nvSpPr>
-        <p:spPr>
-          <a:xfrm>
-            <a:off x="731520" y="274320"/>
-            <a:ext cx="7680960" cy="365760"/>
-          </a:xfrm>
-          <a:prstGeom prst="rect">
-            <a:avLst/>
-          </a:prstGeom>
-          <a:noFill/>
-          <a:ln/>
-        </p:spPr>
-        <p:txBody>
-          <a:bodyPr wrap="square" lIns="0" tIns="0" rIns="0" bIns="0" rtlCol="0" anchor="ctr"/>
-          <a:lstStyle/>
-          <a:p>
-            <a:pPr algn="ctr" indent="0" marL="0">
-              <a:lnSpc>
-                <a:spcPct val="100000"/>
-              </a:lnSpc>
-              <a:buNone/>
-            </a:pPr>
-            <a:r>
-              <a:rPr lang="en-US" sz="1250" b="1" dirty="0">
-                <a:solidFill>
-                  <a:srgbClr val="2A8C85"/>
-                </a:solidFill>
-                <a:latin typeface="Calibri" pitchFamily="34" charset="0"/>
-                <a:ea typeface="Calibri" pitchFamily="34" charset="-122"/>
-                <a:cs typeface="Calibri" pitchFamily="34" charset="-120"/>
-              </a:rPr>
-              <a:t>QUIZ DA UNIDADE 1 · PERGUNTA 1 DE 5 · RESPOSTA</a:t>
-            </a:r>
-            <a:endParaRPr lang="en-US" sz="1250" dirty="0"/>
-          </a:p>
-        </p:txBody>
-      </p:sp>
-      <p:sp>
-        <p:nvSpPr>
-          <p:cNvPr id="3" name="Text 1"/>
-          <p:cNvSpPr txBox="1"/>
-          <p:nvPr/>
-        </p:nvSpPr>
-        <p:spPr>
-          <a:xfrm>
-            <a:off x="731520" y="658368"/>
-            <a:ext cx="7680960" cy="960120"/>
-          </a:xfrm>
-          <a:prstGeom prst="rect">
-            <a:avLst/>
-          </a:prstGeom>
-          <a:noFill/>
-          <a:ln/>
-        </p:spPr>
-        <p:txBody>
-          <a:bodyPr wrap="square" lIns="0" tIns="0" rIns="0" bIns="0" rtlCol="0" anchor="ctr"/>
-          <a:lstStyle/>
-          <a:p>
-            <a:pPr algn="ctr" indent="0" marL="0">
-              <a:lnSpc>
-                <a:spcPct val="100000"/>
-              </a:lnSpc>
-              <a:buNone/>
-            </a:pPr>
-            <a:r>
-              <a:rPr lang="en-US" sz="1900" b="1" dirty="0">
-                <a:solidFill>
-                  <a:srgbClr val="13294B"/>
-                </a:solidFill>
-                <a:latin typeface="Calibri" pitchFamily="34" charset="0"/>
-                <a:ea typeface="Calibri" pitchFamily="34" charset="-122"/>
-                <a:cs typeface="Calibri" pitchFamily="34" charset="-120"/>
-              </a:rPr>
-              <a:t>Qual destes NÃO é um elemento constitutivo do Estado?</a:t>
-            </a:r>
-            <a:endParaRPr lang="en-US" sz="1900" dirty="0"/>
-          </a:p>
-        </p:txBody>
-      </p:sp>
-      <p:sp>
-        <p:nvSpPr>
-          <p:cNvPr id="4" name="Shape 2"/>
-          <p:cNvSpPr/>
-          <p:nvPr/>
-        </p:nvSpPr>
-        <p:spPr>
-          <a:xfrm>
-            <a:off x="685800" y="1737360"/>
-            <a:ext cx="3794760" cy="749808"/>
-          </a:xfrm>
-          <a:prstGeom prst="roundRect">
-            <a:avLst>
-              <a:gd name="adj" fmla="val 9756"/>
-            </a:avLst>
-          </a:prstGeom>
-          <a:solidFill>
-            <a:srgbClr val="FFFFFF"/>
-          </a:solidFill>
-          <a:ln w="12700">
-            <a:solidFill>
-              <a:srgbClr val="DCD5C1"/>
-            </a:solidFill>
-            <a:prstDash val="solid"/>
-          </a:ln>
-        </p:spPr>
-      </p:sp>
-      <p:sp>
-        <p:nvSpPr>
-          <p:cNvPr id="5" name="Text 3"/>
-          <p:cNvSpPr txBox="1"/>
-          <p:nvPr/>
-        </p:nvSpPr>
-        <p:spPr>
-          <a:xfrm>
-            <a:off x="813816" y="1901952"/>
-            <a:ext cx="420624" cy="420624"/>
-          </a:xfrm>
-          <a:prstGeom prst="roundRect">
-            <a:avLst>
-              <a:gd name="adj" fmla="val 50000"/>
-            </a:avLst>
-          </a:prstGeom>
-          <a:solidFill>
-            <a:srgbClr val="9AA3AB"/>
-          </a:solidFill>
-          <a:ln/>
-        </p:spPr>
-        <p:txBody>
-          <a:bodyPr wrap="square" lIns="0" tIns="0" rIns="0" bIns="0" rtlCol="0" anchor="ctr"/>
-          <a:lstStyle/>
-          <a:p>
-            <a:pPr algn="ctr" indent="0" marL="0">
-              <a:lnSpc>
-                <a:spcPct val="100000"/>
-              </a:lnSpc>
-              <a:buNone/>
-            </a:pPr>
-            <a:r>
-              <a:rPr lang="en-US" sz="1600" b="1" dirty="0">
-                <a:solidFill>
-                  <a:srgbClr val="FFFFFF"/>
-                </a:solidFill>
-                <a:latin typeface="Calibri" pitchFamily="34" charset="0"/>
-                <a:ea typeface="Calibri" pitchFamily="34" charset="-122"/>
-                <a:cs typeface="Calibri" pitchFamily="34" charset="-120"/>
-              </a:rPr>
-              <a:t>a</a:t>
-            </a:r>
-            <a:endParaRPr lang="en-US" sz="1600" dirty="0"/>
-          </a:p>
-        </p:txBody>
-      </p:sp>
-      <p:sp>
-        <p:nvSpPr>
-          <p:cNvPr id="6" name="Text 4"/>
-          <p:cNvSpPr txBox="1"/>
-          <p:nvPr/>
-        </p:nvSpPr>
-        <p:spPr>
-          <a:xfrm>
-            <a:off x="1344168" y="1773936"/>
-            <a:ext cx="3044952" cy="676656"/>
-          </a:xfrm>
-          <a:prstGeom prst="rect">
-            <a:avLst/>
-          </a:prstGeom>
-          <a:noFill/>
-          <a:ln/>
-        </p:spPr>
-        <p:txBody>
-          <a:bodyPr wrap="square" lIns="25400" tIns="25400" rIns="25400" bIns="25400" rtlCol="0" anchor="ctr"/>
-          <a:lstStyle/>
-          <a:p>
-            <a:pPr algn="l" indent="0" marL="0">
-              <a:lnSpc>
-                <a:spcPct val="100000"/>
-              </a:lnSpc>
-              <a:buNone/>
-            </a:pPr>
-            <a:r>
-              <a:rPr lang="en-US" sz="1400" dirty="0">
-                <a:solidFill>
-                  <a:srgbClr val="5B6770"/>
-                </a:solidFill>
-                <a:latin typeface="Calibri" pitchFamily="34" charset="0"/>
-                <a:ea typeface="Calibri" pitchFamily="34" charset="-122"/>
-                <a:cs typeface="Calibri" pitchFamily="34" charset="-120"/>
-              </a:rPr>
-              <a:t>Povo</a:t>
-            </a:r>
-            <a:endParaRPr lang="en-US" sz="1400" dirty="0"/>
-          </a:p>
-        </p:txBody>
-      </p:sp>
-      <p:sp>
-        <p:nvSpPr>
-          <p:cNvPr id="7" name="Shape 5"/>
-          <p:cNvSpPr/>
-          <p:nvPr/>
-        </p:nvSpPr>
-        <p:spPr>
-          <a:xfrm>
-            <a:off x="4663440" y="1737360"/>
-            <a:ext cx="3794760" cy="749808"/>
-          </a:xfrm>
-          <a:prstGeom prst="roundRect">
-            <a:avLst>
-              <a:gd name="adj" fmla="val 9756"/>
-            </a:avLst>
-          </a:prstGeom>
-          <a:solidFill>
-            <a:srgbClr val="FFFFFF"/>
-          </a:solidFill>
-          <a:ln w="12700">
-            <a:solidFill>
-              <a:srgbClr val="DCD5C1"/>
-            </a:solidFill>
-            <a:prstDash val="solid"/>
-          </a:ln>
-        </p:spPr>
-      </p:sp>
-      <p:sp>
-        <p:nvSpPr>
-          <p:cNvPr id="8" name="Text 6"/>
-          <p:cNvSpPr txBox="1"/>
-          <p:nvPr/>
-        </p:nvSpPr>
-        <p:spPr>
-          <a:xfrm>
-            <a:off x="4791456" y="1901952"/>
-            <a:ext cx="420624" cy="420624"/>
-          </a:xfrm>
-          <a:prstGeom prst="roundRect">
-            <a:avLst>
-              <a:gd name="adj" fmla="val 50000"/>
-            </a:avLst>
-          </a:prstGeom>
-          <a:solidFill>
-            <a:srgbClr val="9AA3AB"/>
-          </a:solidFill>
-          <a:ln/>
-        </p:spPr>
-        <p:txBody>
-          <a:bodyPr wrap="square" lIns="0" tIns="0" rIns="0" bIns="0" rtlCol="0" anchor="ctr"/>
-          <a:lstStyle/>
-          <a:p>
-            <a:pPr algn="ctr" indent="0" marL="0">
-              <a:lnSpc>
-                <a:spcPct val="100000"/>
-              </a:lnSpc>
-              <a:buNone/>
-            </a:pPr>
-            <a:r>
-              <a:rPr lang="en-US" sz="1600" b="1" dirty="0">
-                <a:solidFill>
-                  <a:srgbClr val="FFFFFF"/>
-                </a:solidFill>
-                <a:latin typeface="Calibri" pitchFamily="34" charset="0"/>
-                <a:ea typeface="Calibri" pitchFamily="34" charset="-122"/>
-                <a:cs typeface="Calibri" pitchFamily="34" charset="-120"/>
-              </a:rPr>
-              <a:t>b</a:t>
-            </a:r>
-            <a:endParaRPr lang="en-US" sz="1600" dirty="0"/>
-          </a:p>
-        </p:txBody>
-      </p:sp>
-      <p:sp>
-        <p:nvSpPr>
-          <p:cNvPr id="9" name="Text 7"/>
-          <p:cNvSpPr txBox="1"/>
-          <p:nvPr/>
-        </p:nvSpPr>
-        <p:spPr>
-          <a:xfrm>
-            <a:off x="5321808" y="1773936"/>
-            <a:ext cx="3044952" cy="676656"/>
-          </a:xfrm>
-          <a:prstGeom prst="rect">
-            <a:avLst/>
-          </a:prstGeom>
-          <a:noFill/>
-          <a:ln/>
-        </p:spPr>
-        <p:txBody>
-          <a:bodyPr wrap="square" lIns="25400" tIns="25400" rIns="25400" bIns="25400" rtlCol="0" anchor="ctr"/>
-          <a:lstStyle/>
-          <a:p>
-            <a:pPr algn="l" indent="0" marL="0">
-              <a:lnSpc>
-                <a:spcPct val="100000"/>
-              </a:lnSpc>
-              <a:buNone/>
-            </a:pPr>
-            <a:r>
-              <a:rPr lang="en-US" sz="1400" dirty="0">
-                <a:solidFill>
-                  <a:srgbClr val="5B6770"/>
-                </a:solidFill>
-                <a:latin typeface="Calibri" pitchFamily="34" charset="0"/>
-                <a:ea typeface="Calibri" pitchFamily="34" charset="-122"/>
-                <a:cs typeface="Calibri" pitchFamily="34" charset="-120"/>
-              </a:rPr>
-              <a:t>Território</a:t>
-            </a:r>
-            <a:endParaRPr lang="en-US" sz="1400" dirty="0"/>
-          </a:p>
-        </p:txBody>
-      </p:sp>
-      <p:sp>
-        <p:nvSpPr>
-          <p:cNvPr id="10" name="Shape 8"/>
-          <p:cNvSpPr/>
-          <p:nvPr/>
-        </p:nvSpPr>
-        <p:spPr>
-          <a:xfrm>
-            <a:off x="685800" y="2633472"/>
-            <a:ext cx="3794760" cy="749808"/>
-          </a:xfrm>
-          <a:prstGeom prst="roundRect">
-            <a:avLst>
-              <a:gd name="adj" fmla="val 9756"/>
-            </a:avLst>
-          </a:prstGeom>
-          <a:solidFill>
-            <a:srgbClr val="FFFFFF"/>
-          </a:solidFill>
-          <a:ln w="12700">
-            <a:solidFill>
-              <a:srgbClr val="DCD5C1"/>
-            </a:solidFill>
-            <a:prstDash val="solid"/>
-          </a:ln>
-        </p:spPr>
-      </p:sp>
-      <p:sp>
-        <p:nvSpPr>
-          <p:cNvPr id="11" name="Text 9"/>
-          <p:cNvSpPr txBox="1"/>
-          <p:nvPr/>
-        </p:nvSpPr>
-        <p:spPr>
-          <a:xfrm>
-            <a:off x="813816" y="2798064"/>
-            <a:ext cx="420624" cy="420624"/>
-          </a:xfrm>
-          <a:prstGeom prst="roundRect">
-            <a:avLst>
-              <a:gd name="adj" fmla="val 50000"/>
-            </a:avLst>
-          </a:prstGeom>
-          <a:solidFill>
-            <a:srgbClr val="9AA3AB"/>
-          </a:solidFill>
-          <a:ln/>
-        </p:spPr>
-        <p:txBody>
-          <a:bodyPr wrap="square" lIns="0" tIns="0" rIns="0" bIns="0" rtlCol="0" anchor="ctr"/>
-          <a:lstStyle/>
-          <a:p>
-            <a:pPr algn="ctr" indent="0" marL="0">
-              <a:lnSpc>
-                <a:spcPct val="100000"/>
-              </a:lnSpc>
-              <a:buNone/>
-            </a:pPr>
-            <a:r>
-              <a:rPr lang="en-US" sz="1600" b="1" dirty="0">
-                <a:solidFill>
-                  <a:srgbClr val="FFFFFF"/>
-                </a:solidFill>
-                <a:latin typeface="Calibri" pitchFamily="34" charset="0"/>
-                <a:ea typeface="Calibri" pitchFamily="34" charset="-122"/>
-                <a:cs typeface="Calibri" pitchFamily="34" charset="-120"/>
-              </a:rPr>
-              <a:t>c</a:t>
-            </a:r>
-            <a:endParaRPr lang="en-US" sz="1600" dirty="0"/>
-          </a:p>
-        </p:txBody>
-      </p:sp>
-      <p:sp>
-        <p:nvSpPr>
-          <p:cNvPr id="12" name="Text 10"/>
-          <p:cNvSpPr txBox="1"/>
-          <p:nvPr/>
-        </p:nvSpPr>
-        <p:spPr>
-          <a:xfrm>
-            <a:off x="1344168" y="2670048"/>
-            <a:ext cx="3044952" cy="676656"/>
-          </a:xfrm>
-          <a:prstGeom prst="rect">
-            <a:avLst/>
-          </a:prstGeom>
-          <a:noFill/>
-          <a:ln/>
-        </p:spPr>
-        <p:txBody>
-          <a:bodyPr wrap="square" lIns="25400" tIns="25400" rIns="25400" bIns="25400" rtlCol="0" anchor="ctr"/>
-          <a:lstStyle/>
-          <a:p>
-            <a:pPr algn="l" indent="0" marL="0">
-              <a:lnSpc>
-                <a:spcPct val="100000"/>
-              </a:lnSpc>
-              <a:buNone/>
-            </a:pPr>
-            <a:r>
-              <a:rPr lang="en-US" sz="1400" dirty="0">
-                <a:solidFill>
-                  <a:srgbClr val="5B6770"/>
-                </a:solidFill>
-                <a:latin typeface="Calibri" pitchFamily="34" charset="0"/>
-                <a:ea typeface="Calibri" pitchFamily="34" charset="-122"/>
-                <a:cs typeface="Calibri" pitchFamily="34" charset="-120"/>
-              </a:rPr>
-              <a:t>Soberania</a:t>
-            </a:r>
-            <a:endParaRPr lang="en-US" sz="1400" dirty="0"/>
-          </a:p>
-        </p:txBody>
-      </p:sp>
-      <p:sp>
-        <p:nvSpPr>
-          <p:cNvPr id="13" name="Shape 11"/>
-          <p:cNvSpPr/>
-          <p:nvPr/>
-        </p:nvSpPr>
-        <p:spPr>
-          <a:xfrm>
-            <a:off x="4663440" y="2633472"/>
-            <a:ext cx="3794760" cy="749808"/>
-          </a:xfrm>
-          <a:prstGeom prst="roundRect">
-            <a:avLst>
-              <a:gd name="adj" fmla="val 9756"/>
-            </a:avLst>
-          </a:prstGeom>
-          <a:solidFill>
-            <a:srgbClr val="E3F2E8"/>
-          </a:solidFill>
-          <a:ln w="25400">
-            <a:solidFill>
-              <a:srgbClr val="2E7D4F"/>
-            </a:solidFill>
-            <a:prstDash val="solid"/>
-          </a:ln>
-        </p:spPr>
-      </p:sp>
-      <p:sp>
-        <p:nvSpPr>
-          <p:cNvPr id="14" name="Text 12"/>
-          <p:cNvSpPr txBox="1"/>
-          <p:nvPr/>
-        </p:nvSpPr>
-        <p:spPr>
-          <a:xfrm>
-            <a:off x="4791456" y="2798064"/>
-            <a:ext cx="420624" cy="420624"/>
-          </a:xfrm>
-          <a:prstGeom prst="roundRect">
-            <a:avLst>
-              <a:gd name="adj" fmla="val 50000"/>
-            </a:avLst>
-          </a:prstGeom>
-          <a:solidFill>
-            <a:srgbClr val="2E7D4F"/>
-          </a:solidFill>
-          <a:ln/>
-        </p:spPr>
-        <p:txBody>
-          <a:bodyPr wrap="square" lIns="0" tIns="0" rIns="0" bIns="0" rtlCol="0" anchor="ctr"/>
-          <a:lstStyle/>
-          <a:p>
-            <a:pPr algn="ctr" indent="0" marL="0">
-              <a:lnSpc>
-                <a:spcPct val="100000"/>
-              </a:lnSpc>
-              <a:buNone/>
-            </a:pPr>
-            <a:r>
-              <a:rPr lang="en-US" sz="1600" b="1" dirty="0">
-                <a:solidFill>
-                  <a:srgbClr val="FFFFFF"/>
-                </a:solidFill>
-                <a:latin typeface="Calibri" pitchFamily="34" charset="0"/>
-                <a:ea typeface="Calibri" pitchFamily="34" charset="-122"/>
-                <a:cs typeface="Calibri" pitchFamily="34" charset="-120"/>
-              </a:rPr>
-              <a:t>d</a:t>
-            </a:r>
-            <a:endParaRPr lang="en-US" sz="1600" dirty="0"/>
-          </a:p>
-        </p:txBody>
-      </p:sp>
-      <p:sp>
-        <p:nvSpPr>
-          <p:cNvPr id="15" name="Text 13"/>
-          <p:cNvSpPr txBox="1"/>
-          <p:nvPr/>
-        </p:nvSpPr>
-        <p:spPr>
-          <a:xfrm>
-            <a:off x="5321808" y="2670048"/>
-            <a:ext cx="3044952" cy="676656"/>
-          </a:xfrm>
-          <a:prstGeom prst="rect">
-            <a:avLst/>
-          </a:prstGeom>
-          <a:noFill/>
-          <a:ln/>
-        </p:spPr>
-        <p:txBody>
-          <a:bodyPr wrap="square" lIns="25400" tIns="25400" rIns="25400" bIns="25400" rtlCol="0" anchor="ctr"/>
-          <a:lstStyle/>
-          <a:p>
-            <a:pPr algn="l" indent="0" marL="0">
-              <a:lnSpc>
-                <a:spcPct val="100000"/>
-              </a:lnSpc>
-              <a:buNone/>
-            </a:pPr>
-            <a:r>
-              <a:rPr lang="en-US" sz="1400" b="1" dirty="0">
-                <a:solidFill>
-                  <a:srgbClr val="1F2A37"/>
-                </a:solidFill>
-                <a:latin typeface="Calibri" pitchFamily="34" charset="0"/>
-                <a:ea typeface="Calibri" pitchFamily="34" charset="-122"/>
-                <a:cs typeface="Calibri" pitchFamily="34" charset="-120"/>
-              </a:rPr>
-              <a:t>Mercado</a:t>
-            </a:r>
-            <a:endParaRPr lang="en-US" sz="1400" dirty="0"/>
-          </a:p>
-        </p:txBody>
-      </p:sp>
-      <p:sp>
-        <p:nvSpPr>
-          <p:cNvPr id="16" name="Text 14"/>
-          <p:cNvSpPr txBox="1"/>
-          <p:nvPr/>
-        </p:nvSpPr>
-        <p:spPr>
-          <a:xfrm>
-            <a:off x="685800" y="3566160"/>
-            <a:ext cx="7772400" cy="841248"/>
-          </a:xfrm>
-          <a:prstGeom prst="roundRect">
-            <a:avLst>
-              <a:gd name="adj" fmla="val 8696"/>
+              <a:gd name="adj" fmla="val 2000"/>
             </a:avLst>
           </a:prstGeom>
           <a:solidFill>
@@ -25498,34 +23557,67 @@
           <a:ln/>
         </p:spPr>
         <p:txBody>
-          <a:bodyPr wrap="square" lIns="114300" tIns="114300" rIns="114300" bIns="114300" rtlCol="0" anchor="ctr"/>
+          <a:bodyPr wrap="square" lIns="114300" tIns="114300" rIns="114300" bIns="114300" rtlCol="0" anchor="t"/>
           <a:lstStyle/>
           <a:p>
             <a:pPr algn="l" indent="0" marL="0">
               <a:lnSpc>
                 <a:spcPct val="100000"/>
               </a:lnSpc>
+              <a:spcAft>
+                <a:spcPts val="200"/>
+              </a:spcAft>
               <a:buNone/>
             </a:pPr>
             <a:r>
-              <a:rPr lang="en-US" sz="1350" b="1" dirty="0">
-                <a:solidFill>
-                  <a:srgbClr val="2E7D4F"/>
-                </a:solidFill>
-                <a:latin typeface="Calibri" pitchFamily="34" charset="0"/>
-                <a:ea typeface="Calibri" pitchFamily="34" charset="-122"/>
-                <a:cs typeface="Calibri" pitchFamily="34" charset="-120"/>
-              </a:rPr>
-              <a:t>Resposta: d) </a:t>
-            </a:r>
+              <a:rPr lang="en-US" sz="1100" b="1" dirty="0">
+                <a:solidFill>
+                  <a:srgbClr val="2A8C85"/>
+                </a:solidFill>
+                <a:latin typeface="Calibri" pitchFamily="34" charset="0"/>
+                <a:ea typeface="Calibri" pitchFamily="34" charset="-122"/>
+                <a:cs typeface="Calibri" pitchFamily="34" charset="-120"/>
+              </a:rPr>
+              <a:t>PARTE 2 · TÓPICO 2</a:t>
+            </a:r>
+            <a:endParaRPr lang="en-US" sz="1100" dirty="0"/>
+          </a:p>
+          <a:p>
             <a:pPr algn="l" indent="0" marL="0">
               <a:lnSpc>
                 <a:spcPct val="100000"/>
               </a:lnSpc>
+              <a:spcAft>
+                <a:spcPts val="400"/>
+              </a:spcAft>
               <a:buNone/>
             </a:pPr>
             <a:r>
-              <a:rPr lang="en-US" sz="1350" dirty="0">
+              <a:rPr lang="en-US" sz="1450" b="1" dirty="0">
+                <a:solidFill>
+                  <a:srgbClr val="13294B"/>
+                </a:solidFill>
+                <a:latin typeface="Calibri" pitchFamily="34" charset="0"/>
+                <a:ea typeface="Calibri" pitchFamily="34" charset="-122"/>
+                <a:cs typeface="Calibri" pitchFamily="34" charset="-120"/>
+              </a:rPr>
+              <a:t>Estado, governo e mercado</a:t>
+            </a:r>
+            <a:endParaRPr lang="en-US" sz="1100" dirty="0"/>
+          </a:p>
+          <a:p>
+            <a:pPr algn="l" marL="177800" indent="-177800">
+              <a:lnSpc>
+                <a:spcPct val="100000"/>
+              </a:lnSpc>
+              <a:spcAft>
+                <a:spcPts val="300"/>
+              </a:spcAft>
+              <a:buSzPct val="100000"/>
+              <a:buChar char="•"/>
+            </a:pPr>
+            <a:r>
+              <a:rPr lang="en-US" sz="1200" dirty="0">
                 <a:solidFill>
                   <a:srgbClr val="1F2A37"/>
                 </a:solidFill>
@@ -25533,1276 +23625,122 @@
                 <a:ea typeface="Calibri" pitchFamily="34" charset="-122"/>
                 <a:cs typeface="Calibri" pitchFamily="34" charset="-120"/>
               </a:rPr>
-              <a:t>Os elementos clássicos do Estado são povo, território e soberania (poder político). O mercado é outra esfera de coordenação social.</a:t>
-            </a:r>
-            <a:endParaRPr lang="en-US" sz="1350" dirty="0"/>
+              <a:t>Estado (povo, território, soberania) é permanente; governo é transitório.</a:t>
+            </a:r>
+            <a:endParaRPr lang="en-US" sz="1100" dirty="0"/>
+          </a:p>
+          <a:p>
+            <a:pPr algn="l" marL="177800" indent="-177800">
+              <a:lnSpc>
+                <a:spcPct val="100000"/>
+              </a:lnSpc>
+              <a:spcAft>
+                <a:spcPts val="300"/>
+              </a:spcAft>
+              <a:buSzPct val="100000"/>
+              <a:buChar char="•"/>
+            </a:pPr>
+            <a:r>
+              <a:rPr lang="en-US" sz="1200" dirty="0">
+                <a:solidFill>
+                  <a:srgbClr val="1F2A37"/>
+                </a:solidFill>
+                <a:latin typeface="Calibri" pitchFamily="34" charset="0"/>
+                <a:ea typeface="Calibri" pitchFamily="34" charset="-122"/>
+                <a:cs typeface="Calibri" pitchFamily="34" charset="-120"/>
+              </a:rPr>
+              <a:t>Weber: monopólio do uso legítimo da força; dominação legal-racional.</a:t>
+            </a:r>
+            <a:endParaRPr lang="en-US" sz="1100" dirty="0"/>
+          </a:p>
+          <a:p>
+            <a:pPr algn="l" marL="177800" indent="-177800">
+              <a:lnSpc>
+                <a:spcPct val="100000"/>
+              </a:lnSpc>
+              <a:spcAft>
+                <a:spcPts val="300"/>
+              </a:spcAft>
+              <a:buSzPct val="100000"/>
+              <a:buChar char="•"/>
+            </a:pPr>
+            <a:r>
+              <a:rPr lang="en-US" sz="1200" dirty="0">
+                <a:solidFill>
+                  <a:srgbClr val="1F2A37"/>
+                </a:solidFill>
+                <a:latin typeface="Calibri" pitchFamily="34" charset="0"/>
+                <a:ea typeface="Calibri" pitchFamily="34" charset="-122"/>
+                <a:cs typeface="Calibri" pitchFamily="34" charset="-120"/>
+              </a:rPr>
+              <a:t>O mercado depende de instituições garantidas pelo Estado.</a:t>
+            </a:r>
+            <a:endParaRPr lang="en-US" sz="1100" dirty="0"/>
+          </a:p>
+          <a:p>
+            <a:pPr algn="l" marL="177800" indent="-177800">
+              <a:lnSpc>
+                <a:spcPct val="100000"/>
+              </a:lnSpc>
+              <a:spcAft>
+                <a:spcPts val="300"/>
+              </a:spcAft>
+              <a:buSzPct val="100000"/>
+              <a:buChar char="•"/>
+            </a:pPr>
+            <a:r>
+              <a:rPr lang="en-US" sz="1200" dirty="0">
+                <a:solidFill>
+                  <a:srgbClr val="1F2A37"/>
+                </a:solidFill>
+                <a:latin typeface="Calibri" pitchFamily="34" charset="0"/>
+                <a:ea typeface="Calibri" pitchFamily="34" charset="-122"/>
+                <a:cs typeface="Calibri" pitchFamily="34" charset="-120"/>
+              </a:rPr>
+              <a:t>Falhas de mercado justificam a ação do Estado, que também pode falhar.</a:t>
+            </a:r>
+            <a:endParaRPr lang="en-US" sz="1100" dirty="0"/>
+          </a:p>
+          <a:p>
+            <a:pPr algn="l" marL="177800" indent="-177800">
+              <a:lnSpc>
+                <a:spcPct val="100000"/>
+              </a:lnSpc>
+              <a:spcAft>
+                <a:spcPts val="300"/>
+              </a:spcAft>
+              <a:buSzPct val="100000"/>
+              <a:buChar char="•"/>
+            </a:pPr>
+            <a:r>
+              <a:rPr lang="en-US" sz="1200" dirty="0">
+                <a:solidFill>
+                  <a:srgbClr val="1F2A37"/>
+                </a:solidFill>
+                <a:latin typeface="Calibri" pitchFamily="34" charset="0"/>
+                <a:ea typeface="Calibri" pitchFamily="34" charset="-122"/>
+                <a:cs typeface="Calibri" pitchFamily="34" charset="-120"/>
+              </a:rPr>
+              <a:t>Musgrave: funções alocativa, distributiva e estabilizadora.</a:t>
+            </a:r>
+            <a:endParaRPr lang="en-US" sz="1100" dirty="0"/>
           </a:p>
         </p:txBody>
       </p:sp>
       <p:sp>
         <p:nvSpPr>
-          <p:cNvPr id="17" name="Text 15"/>
+          <p:cNvPr id="6" name="Text 4"/>
           <p:cNvSpPr txBox="1"/>
           <p:nvPr/>
         </p:nvSpPr>
         <p:spPr>
           <a:xfrm>
-            <a:off x="4206240" y="36576"/>
-            <a:ext cx="4800600" cy="219456"/>
-          </a:xfrm>
-          <a:prstGeom prst="rect">
-            <a:avLst/>
-          </a:prstGeom>
-          <a:noFill/>
-          <a:ln/>
-        </p:spPr>
-        <p:txBody>
-          <a:bodyPr wrap="square" lIns="0" tIns="0" rIns="0" bIns="0" rtlCol="0" anchor="ctr"/>
-          <a:lstStyle/>
-          <a:p>
-            <a:pPr algn="r" indent="0" marL="0">
-              <a:lnSpc>
-                <a:spcPct val="100000"/>
-              </a:lnSpc>
-              <a:buNone/>
-            </a:pPr>
-            <a:r>
-              <a:rPr lang="en-US" sz="950" dirty="0">
-                <a:solidFill>
-                  <a:srgbClr val="5B6770"/>
-                </a:solidFill>
-                <a:latin typeface="Calibri" pitchFamily="34" charset="0"/>
-                <a:ea typeface="Calibri" pitchFamily="34" charset="-122"/>
-                <a:cs typeface="Calibri" pitchFamily="34" charset="-120"/>
-              </a:rPr>
-              <a:t>Estado, Governo e Mercado · Unidade 1</a:t>
-            </a:r>
-            <a:endParaRPr lang="en-US" sz="950" dirty="0"/>
-          </a:p>
-        </p:txBody>
-      </p:sp>
-    </p:spTree>
-  </p:cSld>
-  <p:clrMapOvr>
-    <a:masterClrMapping/>
-  </p:clrMapOvr>
-</p:sld>
-</file>
-
-<file path=ppt/slides/slide37.xml><?xml version="1.0" encoding="utf-8"?>
-<p:sld xmlns:a="http://schemas.openxmlformats.org/drawingml/2006/main" xmlns:r="http://schemas.openxmlformats.org/officeDocument/2006/relationships" xmlns:p="http://schemas.openxmlformats.org/presentationml/2006/main">
-  <p:cSld name="Slide 37">
-    <p:bg>
-      <p:bgPr>
-        <a:blipFill dpi="0" rotWithShape="1">
-          <a:blip r:embed="rId1">
-            <a:lum/>
-          </a:blip>
-          <a:srcRect/>
-          <a:stretch>
-            <a:fillRect/>
-          </a:stretch>
-        </a:blipFill>
-        <a:effectLst/>
-      </p:bgPr>
-    </p:bg>
-    <p:spTree>
-      <p:nvGrpSpPr>
-        <p:cNvPr id="1" name=""/>
-        <p:cNvGrpSpPr/>
-        <p:nvPr/>
-      </p:nvGrpSpPr>
-      <p:grpSpPr>
-        <a:xfrm>
-          <a:off x="0" y="0"/>
-          <a:ext cx="0" cy="0"/>
-          <a:chOff x="0" y="0"/>
-          <a:chExt cx="0" cy="0"/>
-        </a:xfrm>
-      </p:grpSpPr>
-      <p:sp>
-        <p:nvSpPr>
-          <p:cNvPr id="2" name="Text 0"/>
-          <p:cNvSpPr txBox="1"/>
-          <p:nvPr/>
-        </p:nvSpPr>
-        <p:spPr>
-          <a:xfrm>
-            <a:off x="731520" y="274320"/>
-            <a:ext cx="7680960" cy="365760"/>
-          </a:xfrm>
-          <a:prstGeom prst="rect">
-            <a:avLst/>
-          </a:prstGeom>
-          <a:noFill/>
-          <a:ln/>
-        </p:spPr>
-        <p:txBody>
-          <a:bodyPr wrap="square" lIns="0" tIns="0" rIns="0" bIns="0" rtlCol="0" anchor="ctr"/>
-          <a:lstStyle/>
-          <a:p>
-            <a:pPr algn="ctr" indent="0" marL="0">
-              <a:lnSpc>
-                <a:spcPct val="100000"/>
-              </a:lnSpc>
-              <a:buNone/>
-            </a:pPr>
-            <a:r>
-              <a:rPr lang="en-US" sz="1250" b="1" dirty="0">
-                <a:solidFill>
-                  <a:srgbClr val="2A8C85"/>
-                </a:solidFill>
-                <a:latin typeface="Calibri" pitchFamily="34" charset="0"/>
-                <a:ea typeface="Calibri" pitchFamily="34" charset="-122"/>
-                <a:cs typeface="Calibri" pitchFamily="34" charset="-120"/>
-              </a:rPr>
-              <a:t>QUIZ DA UNIDADE 1 · PERGUNTA 2 DE 5</a:t>
-            </a:r>
-            <a:endParaRPr lang="en-US" sz="1250" dirty="0"/>
-          </a:p>
-        </p:txBody>
-      </p:sp>
-      <p:sp>
-        <p:nvSpPr>
-          <p:cNvPr id="3" name="Text 1"/>
-          <p:cNvSpPr txBox="1"/>
-          <p:nvPr/>
-        </p:nvSpPr>
-        <p:spPr>
-          <a:xfrm>
-            <a:off x="731520" y="658368"/>
-            <a:ext cx="7680960" cy="960120"/>
-          </a:xfrm>
-          <a:prstGeom prst="rect">
-            <a:avLst/>
-          </a:prstGeom>
-          <a:noFill/>
-          <a:ln/>
-        </p:spPr>
-        <p:txBody>
-          <a:bodyPr wrap="square" lIns="0" tIns="0" rIns="0" bIns="0" rtlCol="0" anchor="ctr"/>
-          <a:lstStyle/>
-          <a:p>
-            <a:pPr algn="ctr" indent="0" marL="0">
-              <a:lnSpc>
-                <a:spcPct val="100000"/>
-              </a:lnSpc>
-              <a:buNone/>
-            </a:pPr>
-            <a:r>
-              <a:rPr lang="en-US" sz="1900" b="1" dirty="0">
-                <a:solidFill>
-                  <a:srgbClr val="13294B"/>
-                </a:solidFill>
-                <a:latin typeface="Calibri" pitchFamily="34" charset="0"/>
-                <a:ea typeface="Calibri" pitchFamily="34" charset="-122"/>
-                <a:cs typeface="Calibri" pitchFamily="34" charset="-120"/>
-              </a:rPr>
-              <a:t>Concursos públicos, leis e impessoalidade na administração expressam, segundo Weber, a dominação:</a:t>
-            </a:r>
-            <a:endParaRPr lang="en-US" sz="1900" dirty="0"/>
-          </a:p>
-        </p:txBody>
-      </p:sp>
-      <p:sp>
-        <p:nvSpPr>
-          <p:cNvPr id="4" name="Shape 2"/>
-          <p:cNvSpPr/>
-          <p:nvPr/>
-        </p:nvSpPr>
-        <p:spPr>
-          <a:xfrm>
-            <a:off x="685800" y="1737360"/>
-            <a:ext cx="3794760" cy="914400"/>
+            <a:off x="685800" y="3995928"/>
+            <a:ext cx="7772400" cy="484632"/>
           </a:xfrm>
           <a:prstGeom prst="roundRect">
             <a:avLst>
-              <a:gd name="adj" fmla="val 8000"/>
-            </a:avLst>
-          </a:prstGeom>
-          <a:solidFill>
-            <a:srgbClr val="FFFFFF"/>
-          </a:solidFill>
-          <a:ln w="12700">
-            <a:solidFill>
-              <a:srgbClr val="DCD5C1"/>
-            </a:solidFill>
-            <a:prstDash val="solid"/>
-          </a:ln>
-        </p:spPr>
-      </p:sp>
-      <p:sp>
-        <p:nvSpPr>
-          <p:cNvPr id="5" name="Text 3"/>
-          <p:cNvSpPr txBox="1"/>
-          <p:nvPr/>
-        </p:nvSpPr>
-        <p:spPr>
-          <a:xfrm>
-            <a:off x="813816" y="1984248"/>
-            <a:ext cx="420624" cy="420624"/>
-          </a:xfrm>
-          <a:prstGeom prst="roundRect">
-            <a:avLst>
-              <a:gd name="adj" fmla="val 50000"/>
-            </a:avLst>
-          </a:prstGeom>
-          <a:solidFill>
-            <a:srgbClr val="13294B"/>
-          </a:solidFill>
-          <a:ln/>
-        </p:spPr>
-        <p:txBody>
-          <a:bodyPr wrap="square" lIns="0" tIns="0" rIns="0" bIns="0" rtlCol="0" anchor="ctr"/>
-          <a:lstStyle/>
-          <a:p>
-            <a:pPr algn="ctr" indent="0" marL="0">
-              <a:lnSpc>
-                <a:spcPct val="100000"/>
-              </a:lnSpc>
-              <a:buNone/>
-            </a:pPr>
-            <a:r>
-              <a:rPr lang="en-US" sz="1600" b="1" dirty="0">
-                <a:solidFill>
-                  <a:srgbClr val="FFFFFF"/>
-                </a:solidFill>
-                <a:latin typeface="Calibri" pitchFamily="34" charset="0"/>
-                <a:ea typeface="Calibri" pitchFamily="34" charset="-122"/>
-                <a:cs typeface="Calibri" pitchFamily="34" charset="-120"/>
-              </a:rPr>
-              <a:t>a</a:t>
-            </a:r>
-            <a:endParaRPr lang="en-US" sz="1600" dirty="0"/>
-          </a:p>
-        </p:txBody>
-      </p:sp>
-      <p:sp>
-        <p:nvSpPr>
-          <p:cNvPr id="6" name="Text 4"/>
-          <p:cNvSpPr txBox="1"/>
-          <p:nvPr/>
-        </p:nvSpPr>
-        <p:spPr>
-          <a:xfrm>
-            <a:off x="1344168" y="1773936"/>
-            <a:ext cx="3044952" cy="841248"/>
-          </a:xfrm>
-          <a:prstGeom prst="rect">
-            <a:avLst/>
-          </a:prstGeom>
-          <a:noFill/>
-          <a:ln/>
-        </p:spPr>
-        <p:txBody>
-          <a:bodyPr wrap="square" lIns="25400" tIns="25400" rIns="25400" bIns="25400" rtlCol="0" anchor="ctr"/>
-          <a:lstStyle/>
-          <a:p>
-            <a:pPr algn="l" indent="0" marL="0">
-              <a:lnSpc>
-                <a:spcPct val="100000"/>
-              </a:lnSpc>
-              <a:buNone/>
-            </a:pPr>
-            <a:r>
-              <a:rPr lang="en-US" sz="1400" dirty="0">
-                <a:solidFill>
-                  <a:srgbClr val="1F2A37"/>
-                </a:solidFill>
-                <a:latin typeface="Calibri" pitchFamily="34" charset="0"/>
-                <a:ea typeface="Calibri" pitchFamily="34" charset="-122"/>
-                <a:cs typeface="Calibri" pitchFamily="34" charset="-120"/>
-              </a:rPr>
-              <a:t>Tradicional</a:t>
-            </a:r>
-            <a:endParaRPr lang="en-US" sz="1400" dirty="0"/>
-          </a:p>
-        </p:txBody>
-      </p:sp>
-      <p:sp>
-        <p:nvSpPr>
-          <p:cNvPr id="7" name="Shape 5"/>
-          <p:cNvSpPr/>
-          <p:nvPr/>
-        </p:nvSpPr>
-        <p:spPr>
-          <a:xfrm>
-            <a:off x="4663440" y="1737360"/>
-            <a:ext cx="3794760" cy="914400"/>
-          </a:xfrm>
-          <a:prstGeom prst="roundRect">
-            <a:avLst>
-              <a:gd name="adj" fmla="val 8000"/>
-            </a:avLst>
-          </a:prstGeom>
-          <a:solidFill>
-            <a:srgbClr val="FFFFFF"/>
-          </a:solidFill>
-          <a:ln w="12700">
-            <a:solidFill>
-              <a:srgbClr val="DCD5C1"/>
-            </a:solidFill>
-            <a:prstDash val="solid"/>
-          </a:ln>
-        </p:spPr>
-      </p:sp>
-      <p:sp>
-        <p:nvSpPr>
-          <p:cNvPr id="8" name="Text 6"/>
-          <p:cNvSpPr txBox="1"/>
-          <p:nvPr/>
-        </p:nvSpPr>
-        <p:spPr>
-          <a:xfrm>
-            <a:off x="4791456" y="1984248"/>
-            <a:ext cx="420624" cy="420624"/>
-          </a:xfrm>
-          <a:prstGeom prst="roundRect">
-            <a:avLst>
-              <a:gd name="adj" fmla="val 50000"/>
-            </a:avLst>
-          </a:prstGeom>
-          <a:solidFill>
-            <a:srgbClr val="13294B"/>
-          </a:solidFill>
-          <a:ln/>
-        </p:spPr>
-        <p:txBody>
-          <a:bodyPr wrap="square" lIns="0" tIns="0" rIns="0" bIns="0" rtlCol="0" anchor="ctr"/>
-          <a:lstStyle/>
-          <a:p>
-            <a:pPr algn="ctr" indent="0" marL="0">
-              <a:lnSpc>
-                <a:spcPct val="100000"/>
-              </a:lnSpc>
-              <a:buNone/>
-            </a:pPr>
-            <a:r>
-              <a:rPr lang="en-US" sz="1600" b="1" dirty="0">
-                <a:solidFill>
-                  <a:srgbClr val="FFFFFF"/>
-                </a:solidFill>
-                <a:latin typeface="Calibri" pitchFamily="34" charset="0"/>
-                <a:ea typeface="Calibri" pitchFamily="34" charset="-122"/>
-                <a:cs typeface="Calibri" pitchFamily="34" charset="-120"/>
-              </a:rPr>
-              <a:t>b</a:t>
-            </a:r>
-            <a:endParaRPr lang="en-US" sz="1600" dirty="0"/>
-          </a:p>
-        </p:txBody>
-      </p:sp>
-      <p:sp>
-        <p:nvSpPr>
-          <p:cNvPr id="9" name="Text 7"/>
-          <p:cNvSpPr txBox="1"/>
-          <p:nvPr/>
-        </p:nvSpPr>
-        <p:spPr>
-          <a:xfrm>
-            <a:off x="5321808" y="1773936"/>
-            <a:ext cx="3044952" cy="841248"/>
-          </a:xfrm>
-          <a:prstGeom prst="rect">
-            <a:avLst/>
-          </a:prstGeom>
-          <a:noFill/>
-          <a:ln/>
-        </p:spPr>
-        <p:txBody>
-          <a:bodyPr wrap="square" lIns="25400" tIns="25400" rIns="25400" bIns="25400" rtlCol="0" anchor="ctr"/>
-          <a:lstStyle/>
-          <a:p>
-            <a:pPr algn="l" indent="0" marL="0">
-              <a:lnSpc>
-                <a:spcPct val="100000"/>
-              </a:lnSpc>
-              <a:buNone/>
-            </a:pPr>
-            <a:r>
-              <a:rPr lang="en-US" sz="1400" dirty="0">
-                <a:solidFill>
-                  <a:srgbClr val="1F2A37"/>
-                </a:solidFill>
-                <a:latin typeface="Calibri" pitchFamily="34" charset="0"/>
-                <a:ea typeface="Calibri" pitchFamily="34" charset="-122"/>
-                <a:cs typeface="Calibri" pitchFamily="34" charset="-120"/>
-              </a:rPr>
-              <a:t>Carismática</a:t>
-            </a:r>
-            <a:endParaRPr lang="en-US" sz="1400" dirty="0"/>
-          </a:p>
-        </p:txBody>
-      </p:sp>
-      <p:sp>
-        <p:nvSpPr>
-          <p:cNvPr id="10" name="Shape 8"/>
-          <p:cNvSpPr/>
-          <p:nvPr/>
-        </p:nvSpPr>
-        <p:spPr>
-          <a:xfrm>
-            <a:off x="685800" y="2798064"/>
-            <a:ext cx="3794760" cy="914400"/>
-          </a:xfrm>
-          <a:prstGeom prst="roundRect">
-            <a:avLst>
-              <a:gd name="adj" fmla="val 8000"/>
-            </a:avLst>
-          </a:prstGeom>
-          <a:solidFill>
-            <a:srgbClr val="FFFFFF"/>
-          </a:solidFill>
-          <a:ln w="12700">
-            <a:solidFill>
-              <a:srgbClr val="DCD5C1"/>
-            </a:solidFill>
-            <a:prstDash val="solid"/>
-          </a:ln>
-        </p:spPr>
-      </p:sp>
-      <p:sp>
-        <p:nvSpPr>
-          <p:cNvPr id="11" name="Text 9"/>
-          <p:cNvSpPr txBox="1"/>
-          <p:nvPr/>
-        </p:nvSpPr>
-        <p:spPr>
-          <a:xfrm>
-            <a:off x="813816" y="3044952"/>
-            <a:ext cx="420624" cy="420624"/>
-          </a:xfrm>
-          <a:prstGeom prst="roundRect">
-            <a:avLst>
-              <a:gd name="adj" fmla="val 50000"/>
-            </a:avLst>
-          </a:prstGeom>
-          <a:solidFill>
-            <a:srgbClr val="13294B"/>
-          </a:solidFill>
-          <a:ln/>
-        </p:spPr>
-        <p:txBody>
-          <a:bodyPr wrap="square" lIns="0" tIns="0" rIns="0" bIns="0" rtlCol="0" anchor="ctr"/>
-          <a:lstStyle/>
-          <a:p>
-            <a:pPr algn="ctr" indent="0" marL="0">
-              <a:lnSpc>
-                <a:spcPct val="100000"/>
-              </a:lnSpc>
-              <a:buNone/>
-            </a:pPr>
-            <a:r>
-              <a:rPr lang="en-US" sz="1600" b="1" dirty="0">
-                <a:solidFill>
-                  <a:srgbClr val="FFFFFF"/>
-                </a:solidFill>
-                <a:latin typeface="Calibri" pitchFamily="34" charset="0"/>
-                <a:ea typeface="Calibri" pitchFamily="34" charset="-122"/>
-                <a:cs typeface="Calibri" pitchFamily="34" charset="-120"/>
-              </a:rPr>
-              <a:t>c</a:t>
-            </a:r>
-            <a:endParaRPr lang="en-US" sz="1600" dirty="0"/>
-          </a:p>
-        </p:txBody>
-      </p:sp>
-      <p:sp>
-        <p:nvSpPr>
-          <p:cNvPr id="12" name="Text 10"/>
-          <p:cNvSpPr txBox="1"/>
-          <p:nvPr/>
-        </p:nvSpPr>
-        <p:spPr>
-          <a:xfrm>
-            <a:off x="1344168" y="2834640"/>
-            <a:ext cx="3044952" cy="841248"/>
-          </a:xfrm>
-          <a:prstGeom prst="rect">
-            <a:avLst/>
-          </a:prstGeom>
-          <a:noFill/>
-          <a:ln/>
-        </p:spPr>
-        <p:txBody>
-          <a:bodyPr wrap="square" lIns="25400" tIns="25400" rIns="25400" bIns="25400" rtlCol="0" anchor="ctr"/>
-          <a:lstStyle/>
-          <a:p>
-            <a:pPr algn="l" indent="0" marL="0">
-              <a:lnSpc>
-                <a:spcPct val="100000"/>
-              </a:lnSpc>
-              <a:buNone/>
-            </a:pPr>
-            <a:r>
-              <a:rPr lang="en-US" sz="1400" dirty="0">
-                <a:solidFill>
-                  <a:srgbClr val="1F2A37"/>
-                </a:solidFill>
-                <a:latin typeface="Calibri" pitchFamily="34" charset="0"/>
-                <a:ea typeface="Calibri" pitchFamily="34" charset="-122"/>
-                <a:cs typeface="Calibri" pitchFamily="34" charset="-120"/>
-              </a:rPr>
-              <a:t>Legal-racional</a:t>
-            </a:r>
-            <a:endParaRPr lang="en-US" sz="1400" dirty="0"/>
-          </a:p>
-        </p:txBody>
-      </p:sp>
-      <p:sp>
-        <p:nvSpPr>
-          <p:cNvPr id="13" name="Shape 11"/>
-          <p:cNvSpPr/>
-          <p:nvPr/>
-        </p:nvSpPr>
-        <p:spPr>
-          <a:xfrm>
-            <a:off x="4663440" y="2798064"/>
-            <a:ext cx="3794760" cy="914400"/>
-          </a:xfrm>
-          <a:prstGeom prst="roundRect">
-            <a:avLst>
-              <a:gd name="adj" fmla="val 8000"/>
-            </a:avLst>
-          </a:prstGeom>
-          <a:solidFill>
-            <a:srgbClr val="FFFFFF"/>
-          </a:solidFill>
-          <a:ln w="12700">
-            <a:solidFill>
-              <a:srgbClr val="DCD5C1"/>
-            </a:solidFill>
-            <a:prstDash val="solid"/>
-          </a:ln>
-        </p:spPr>
-      </p:sp>
-      <p:sp>
-        <p:nvSpPr>
-          <p:cNvPr id="14" name="Text 12"/>
-          <p:cNvSpPr txBox="1"/>
-          <p:nvPr/>
-        </p:nvSpPr>
-        <p:spPr>
-          <a:xfrm>
-            <a:off x="4791456" y="3044952"/>
-            <a:ext cx="420624" cy="420624"/>
-          </a:xfrm>
-          <a:prstGeom prst="roundRect">
-            <a:avLst>
-              <a:gd name="adj" fmla="val 50000"/>
-            </a:avLst>
-          </a:prstGeom>
-          <a:solidFill>
-            <a:srgbClr val="13294B"/>
-          </a:solidFill>
-          <a:ln/>
-        </p:spPr>
-        <p:txBody>
-          <a:bodyPr wrap="square" lIns="0" tIns="0" rIns="0" bIns="0" rtlCol="0" anchor="ctr"/>
-          <a:lstStyle/>
-          <a:p>
-            <a:pPr algn="ctr" indent="0" marL="0">
-              <a:lnSpc>
-                <a:spcPct val="100000"/>
-              </a:lnSpc>
-              <a:buNone/>
-            </a:pPr>
-            <a:r>
-              <a:rPr lang="en-US" sz="1600" b="1" dirty="0">
-                <a:solidFill>
-                  <a:srgbClr val="FFFFFF"/>
-                </a:solidFill>
-                <a:latin typeface="Calibri" pitchFamily="34" charset="0"/>
-                <a:ea typeface="Calibri" pitchFamily="34" charset="-122"/>
-                <a:cs typeface="Calibri" pitchFamily="34" charset="-120"/>
-              </a:rPr>
-              <a:t>d</a:t>
-            </a:r>
-            <a:endParaRPr lang="en-US" sz="1600" dirty="0"/>
-          </a:p>
-        </p:txBody>
-      </p:sp>
-      <p:sp>
-        <p:nvSpPr>
-          <p:cNvPr id="15" name="Text 13"/>
-          <p:cNvSpPr txBox="1"/>
-          <p:nvPr/>
-        </p:nvSpPr>
-        <p:spPr>
-          <a:xfrm>
-            <a:off x="5321808" y="2834640"/>
-            <a:ext cx="3044952" cy="841248"/>
-          </a:xfrm>
-          <a:prstGeom prst="rect">
-            <a:avLst/>
-          </a:prstGeom>
-          <a:noFill/>
-          <a:ln/>
-        </p:spPr>
-        <p:txBody>
-          <a:bodyPr wrap="square" lIns="25400" tIns="25400" rIns="25400" bIns="25400" rtlCol="0" anchor="ctr"/>
-          <a:lstStyle/>
-          <a:p>
-            <a:pPr algn="l" indent="0" marL="0">
-              <a:lnSpc>
-                <a:spcPct val="100000"/>
-              </a:lnSpc>
-              <a:buNone/>
-            </a:pPr>
-            <a:r>
-              <a:rPr lang="en-US" sz="1400" dirty="0">
-                <a:solidFill>
-                  <a:srgbClr val="1F2A37"/>
-                </a:solidFill>
-                <a:latin typeface="Calibri" pitchFamily="34" charset="0"/>
-                <a:ea typeface="Calibri" pitchFamily="34" charset="-122"/>
-                <a:cs typeface="Calibri" pitchFamily="34" charset="-120"/>
-              </a:rPr>
-              <a:t>Patrimonial</a:t>
-            </a:r>
-            <a:endParaRPr lang="en-US" sz="1400" dirty="0"/>
-          </a:p>
-        </p:txBody>
-      </p:sp>
-      <p:sp>
-        <p:nvSpPr>
-          <p:cNvPr id="16" name="Text 14"/>
-          <p:cNvSpPr txBox="1"/>
-          <p:nvPr/>
-        </p:nvSpPr>
-        <p:spPr>
-          <a:xfrm>
-            <a:off x="4206240" y="36576"/>
-            <a:ext cx="4800600" cy="219456"/>
-          </a:xfrm>
-          <a:prstGeom prst="rect">
-            <a:avLst/>
-          </a:prstGeom>
-          <a:noFill/>
-          <a:ln/>
-        </p:spPr>
-        <p:txBody>
-          <a:bodyPr wrap="square" lIns="0" tIns="0" rIns="0" bIns="0" rtlCol="0" anchor="ctr"/>
-          <a:lstStyle/>
-          <a:p>
-            <a:pPr algn="r" indent="0" marL="0">
-              <a:lnSpc>
-                <a:spcPct val="100000"/>
-              </a:lnSpc>
-              <a:buNone/>
-            </a:pPr>
-            <a:r>
-              <a:rPr lang="en-US" sz="950" dirty="0">
-                <a:solidFill>
-                  <a:srgbClr val="5B6770"/>
-                </a:solidFill>
-                <a:latin typeface="Calibri" pitchFamily="34" charset="0"/>
-                <a:ea typeface="Calibri" pitchFamily="34" charset="-122"/>
-                <a:cs typeface="Calibri" pitchFamily="34" charset="-120"/>
-              </a:rPr>
-              <a:t>Estado, Governo e Mercado · Unidade 1</a:t>
-            </a:r>
-            <a:endParaRPr lang="en-US" sz="950" dirty="0"/>
-          </a:p>
-        </p:txBody>
-      </p:sp>
-    </p:spTree>
-  </p:cSld>
-  <p:clrMapOvr>
-    <a:masterClrMapping/>
-  </p:clrMapOvr>
-</p:sld>
-</file>
-
-<file path=ppt/slides/slide38.xml><?xml version="1.0" encoding="utf-8"?>
-<p:sld xmlns:a="http://schemas.openxmlformats.org/drawingml/2006/main" xmlns:r="http://schemas.openxmlformats.org/officeDocument/2006/relationships" xmlns:p="http://schemas.openxmlformats.org/presentationml/2006/main">
-  <p:cSld name="Slide 38">
-    <p:bg>
-      <p:bgPr>
-        <a:blipFill dpi="0" rotWithShape="1">
-          <a:blip r:embed="rId1">
-            <a:lum/>
-          </a:blip>
-          <a:srcRect/>
-          <a:stretch>
-            <a:fillRect/>
-          </a:stretch>
-        </a:blipFill>
-        <a:effectLst/>
-      </p:bgPr>
-    </p:bg>
-    <p:spTree>
-      <p:nvGrpSpPr>
-        <p:cNvPr id="1" name=""/>
-        <p:cNvGrpSpPr/>
-        <p:nvPr/>
-      </p:nvGrpSpPr>
-      <p:grpSpPr>
-        <a:xfrm>
-          <a:off x="0" y="0"/>
-          <a:ext cx="0" cy="0"/>
-          <a:chOff x="0" y="0"/>
-          <a:chExt cx="0" cy="0"/>
-        </a:xfrm>
-      </p:grpSpPr>
-      <p:sp>
-        <p:nvSpPr>
-          <p:cNvPr id="2" name="Text 0"/>
-          <p:cNvSpPr txBox="1"/>
-          <p:nvPr/>
-        </p:nvSpPr>
-        <p:spPr>
-          <a:xfrm>
-            <a:off x="731520" y="274320"/>
-            <a:ext cx="7680960" cy="365760"/>
-          </a:xfrm>
-          <a:prstGeom prst="rect">
-            <a:avLst/>
-          </a:prstGeom>
-          <a:noFill/>
-          <a:ln/>
-        </p:spPr>
-        <p:txBody>
-          <a:bodyPr wrap="square" lIns="0" tIns="0" rIns="0" bIns="0" rtlCol="0" anchor="ctr"/>
-          <a:lstStyle/>
-          <a:p>
-            <a:pPr algn="ctr" indent="0" marL="0">
-              <a:lnSpc>
-                <a:spcPct val="100000"/>
-              </a:lnSpc>
-              <a:buNone/>
-            </a:pPr>
-            <a:r>
-              <a:rPr lang="en-US" sz="1250" b="1" dirty="0">
-                <a:solidFill>
-                  <a:srgbClr val="2A8C85"/>
-                </a:solidFill>
-                <a:latin typeface="Calibri" pitchFamily="34" charset="0"/>
-                <a:ea typeface="Calibri" pitchFamily="34" charset="-122"/>
-                <a:cs typeface="Calibri" pitchFamily="34" charset="-120"/>
-              </a:rPr>
-              <a:t>QUIZ DA UNIDADE 1 · PERGUNTA 2 DE 5 · RESPOSTA</a:t>
-            </a:r>
-            <a:endParaRPr lang="en-US" sz="1250" dirty="0"/>
-          </a:p>
-        </p:txBody>
-      </p:sp>
-      <p:sp>
-        <p:nvSpPr>
-          <p:cNvPr id="3" name="Text 1"/>
-          <p:cNvSpPr txBox="1"/>
-          <p:nvPr/>
-        </p:nvSpPr>
-        <p:spPr>
-          <a:xfrm>
-            <a:off x="731520" y="658368"/>
-            <a:ext cx="7680960" cy="960120"/>
-          </a:xfrm>
-          <a:prstGeom prst="rect">
-            <a:avLst/>
-          </a:prstGeom>
-          <a:noFill/>
-          <a:ln/>
-        </p:spPr>
-        <p:txBody>
-          <a:bodyPr wrap="square" lIns="0" tIns="0" rIns="0" bIns="0" rtlCol="0" anchor="ctr"/>
-          <a:lstStyle/>
-          <a:p>
-            <a:pPr algn="ctr" indent="0" marL="0">
-              <a:lnSpc>
-                <a:spcPct val="100000"/>
-              </a:lnSpc>
-              <a:buNone/>
-            </a:pPr>
-            <a:r>
-              <a:rPr lang="en-US" sz="1900" b="1" dirty="0">
-                <a:solidFill>
-                  <a:srgbClr val="13294B"/>
-                </a:solidFill>
-                <a:latin typeface="Calibri" pitchFamily="34" charset="0"/>
-                <a:ea typeface="Calibri" pitchFamily="34" charset="-122"/>
-                <a:cs typeface="Calibri" pitchFamily="34" charset="-120"/>
-              </a:rPr>
-              <a:t>Concursos públicos, leis e impessoalidade na administração expressam, segundo Weber, a dominação:</a:t>
-            </a:r>
-            <a:endParaRPr lang="en-US" sz="1900" dirty="0"/>
-          </a:p>
-        </p:txBody>
-      </p:sp>
-      <p:sp>
-        <p:nvSpPr>
-          <p:cNvPr id="4" name="Shape 2"/>
-          <p:cNvSpPr/>
-          <p:nvPr/>
-        </p:nvSpPr>
-        <p:spPr>
-          <a:xfrm>
-            <a:off x="685800" y="1737360"/>
-            <a:ext cx="3794760" cy="749808"/>
-          </a:xfrm>
-          <a:prstGeom prst="roundRect">
-            <a:avLst>
-              <a:gd name="adj" fmla="val 9756"/>
-            </a:avLst>
-          </a:prstGeom>
-          <a:solidFill>
-            <a:srgbClr val="FFFFFF"/>
-          </a:solidFill>
-          <a:ln w="12700">
-            <a:solidFill>
-              <a:srgbClr val="DCD5C1"/>
-            </a:solidFill>
-            <a:prstDash val="solid"/>
-          </a:ln>
-        </p:spPr>
-      </p:sp>
-      <p:sp>
-        <p:nvSpPr>
-          <p:cNvPr id="5" name="Text 3"/>
-          <p:cNvSpPr txBox="1"/>
-          <p:nvPr/>
-        </p:nvSpPr>
-        <p:spPr>
-          <a:xfrm>
-            <a:off x="813816" y="1901952"/>
-            <a:ext cx="420624" cy="420624"/>
-          </a:xfrm>
-          <a:prstGeom prst="roundRect">
-            <a:avLst>
-              <a:gd name="adj" fmla="val 50000"/>
-            </a:avLst>
-          </a:prstGeom>
-          <a:solidFill>
-            <a:srgbClr val="9AA3AB"/>
-          </a:solidFill>
-          <a:ln/>
-        </p:spPr>
-        <p:txBody>
-          <a:bodyPr wrap="square" lIns="0" tIns="0" rIns="0" bIns="0" rtlCol="0" anchor="ctr"/>
-          <a:lstStyle/>
-          <a:p>
-            <a:pPr algn="ctr" indent="0" marL="0">
-              <a:lnSpc>
-                <a:spcPct val="100000"/>
-              </a:lnSpc>
-              <a:buNone/>
-            </a:pPr>
-            <a:r>
-              <a:rPr lang="en-US" sz="1600" b="1" dirty="0">
-                <a:solidFill>
-                  <a:srgbClr val="FFFFFF"/>
-                </a:solidFill>
-                <a:latin typeface="Calibri" pitchFamily="34" charset="0"/>
-                <a:ea typeface="Calibri" pitchFamily="34" charset="-122"/>
-                <a:cs typeface="Calibri" pitchFamily="34" charset="-120"/>
-              </a:rPr>
-              <a:t>a</a:t>
-            </a:r>
-            <a:endParaRPr lang="en-US" sz="1600" dirty="0"/>
-          </a:p>
-        </p:txBody>
-      </p:sp>
-      <p:sp>
-        <p:nvSpPr>
-          <p:cNvPr id="6" name="Text 4"/>
-          <p:cNvSpPr txBox="1"/>
-          <p:nvPr/>
-        </p:nvSpPr>
-        <p:spPr>
-          <a:xfrm>
-            <a:off x="1344168" y="1773936"/>
-            <a:ext cx="3044952" cy="676656"/>
-          </a:xfrm>
-          <a:prstGeom prst="rect">
-            <a:avLst/>
-          </a:prstGeom>
-          <a:noFill/>
-          <a:ln/>
-        </p:spPr>
-        <p:txBody>
-          <a:bodyPr wrap="square" lIns="25400" tIns="25400" rIns="25400" bIns="25400" rtlCol="0" anchor="ctr"/>
-          <a:lstStyle/>
-          <a:p>
-            <a:pPr algn="l" indent="0" marL="0">
-              <a:lnSpc>
-                <a:spcPct val="100000"/>
-              </a:lnSpc>
-              <a:buNone/>
-            </a:pPr>
-            <a:r>
-              <a:rPr lang="en-US" sz="1400" dirty="0">
-                <a:solidFill>
-                  <a:srgbClr val="5B6770"/>
-                </a:solidFill>
-                <a:latin typeface="Calibri" pitchFamily="34" charset="0"/>
-                <a:ea typeface="Calibri" pitchFamily="34" charset="-122"/>
-                <a:cs typeface="Calibri" pitchFamily="34" charset="-120"/>
-              </a:rPr>
-              <a:t>Tradicional</a:t>
-            </a:r>
-            <a:endParaRPr lang="en-US" sz="1400" dirty="0"/>
-          </a:p>
-        </p:txBody>
-      </p:sp>
-      <p:sp>
-        <p:nvSpPr>
-          <p:cNvPr id="7" name="Shape 5"/>
-          <p:cNvSpPr/>
-          <p:nvPr/>
-        </p:nvSpPr>
-        <p:spPr>
-          <a:xfrm>
-            <a:off x="4663440" y="1737360"/>
-            <a:ext cx="3794760" cy="749808"/>
-          </a:xfrm>
-          <a:prstGeom prst="roundRect">
-            <a:avLst>
-              <a:gd name="adj" fmla="val 9756"/>
-            </a:avLst>
-          </a:prstGeom>
-          <a:solidFill>
-            <a:srgbClr val="FFFFFF"/>
-          </a:solidFill>
-          <a:ln w="12700">
-            <a:solidFill>
-              <a:srgbClr val="DCD5C1"/>
-            </a:solidFill>
-            <a:prstDash val="solid"/>
-          </a:ln>
-        </p:spPr>
-      </p:sp>
-      <p:sp>
-        <p:nvSpPr>
-          <p:cNvPr id="8" name="Text 6"/>
-          <p:cNvSpPr txBox="1"/>
-          <p:nvPr/>
-        </p:nvSpPr>
-        <p:spPr>
-          <a:xfrm>
-            <a:off x="4791456" y="1901952"/>
-            <a:ext cx="420624" cy="420624"/>
-          </a:xfrm>
-          <a:prstGeom prst="roundRect">
-            <a:avLst>
-              <a:gd name="adj" fmla="val 50000"/>
-            </a:avLst>
-          </a:prstGeom>
-          <a:solidFill>
-            <a:srgbClr val="9AA3AB"/>
-          </a:solidFill>
-          <a:ln/>
-        </p:spPr>
-        <p:txBody>
-          <a:bodyPr wrap="square" lIns="0" tIns="0" rIns="0" bIns="0" rtlCol="0" anchor="ctr"/>
-          <a:lstStyle/>
-          <a:p>
-            <a:pPr algn="ctr" indent="0" marL="0">
-              <a:lnSpc>
-                <a:spcPct val="100000"/>
-              </a:lnSpc>
-              <a:buNone/>
-            </a:pPr>
-            <a:r>
-              <a:rPr lang="en-US" sz="1600" b="1" dirty="0">
-                <a:solidFill>
-                  <a:srgbClr val="FFFFFF"/>
-                </a:solidFill>
-                <a:latin typeface="Calibri" pitchFamily="34" charset="0"/>
-                <a:ea typeface="Calibri" pitchFamily="34" charset="-122"/>
-                <a:cs typeface="Calibri" pitchFamily="34" charset="-120"/>
-              </a:rPr>
-              <a:t>b</a:t>
-            </a:r>
-            <a:endParaRPr lang="en-US" sz="1600" dirty="0"/>
-          </a:p>
-        </p:txBody>
-      </p:sp>
-      <p:sp>
-        <p:nvSpPr>
-          <p:cNvPr id="9" name="Text 7"/>
-          <p:cNvSpPr txBox="1"/>
-          <p:nvPr/>
-        </p:nvSpPr>
-        <p:spPr>
-          <a:xfrm>
-            <a:off x="5321808" y="1773936"/>
-            <a:ext cx="3044952" cy="676656"/>
-          </a:xfrm>
-          <a:prstGeom prst="rect">
-            <a:avLst/>
-          </a:prstGeom>
-          <a:noFill/>
-          <a:ln/>
-        </p:spPr>
-        <p:txBody>
-          <a:bodyPr wrap="square" lIns="25400" tIns="25400" rIns="25400" bIns="25400" rtlCol="0" anchor="ctr"/>
-          <a:lstStyle/>
-          <a:p>
-            <a:pPr algn="l" indent="0" marL="0">
-              <a:lnSpc>
-                <a:spcPct val="100000"/>
-              </a:lnSpc>
-              <a:buNone/>
-            </a:pPr>
-            <a:r>
-              <a:rPr lang="en-US" sz="1400" dirty="0">
-                <a:solidFill>
-                  <a:srgbClr val="5B6770"/>
-                </a:solidFill>
-                <a:latin typeface="Calibri" pitchFamily="34" charset="0"/>
-                <a:ea typeface="Calibri" pitchFamily="34" charset="-122"/>
-                <a:cs typeface="Calibri" pitchFamily="34" charset="-120"/>
-              </a:rPr>
-              <a:t>Carismática</a:t>
-            </a:r>
-            <a:endParaRPr lang="en-US" sz="1400" dirty="0"/>
-          </a:p>
-        </p:txBody>
-      </p:sp>
-      <p:sp>
-        <p:nvSpPr>
-          <p:cNvPr id="10" name="Shape 8"/>
-          <p:cNvSpPr/>
-          <p:nvPr/>
-        </p:nvSpPr>
-        <p:spPr>
-          <a:xfrm>
-            <a:off x="685800" y="2633472"/>
-            <a:ext cx="3794760" cy="749808"/>
-          </a:xfrm>
-          <a:prstGeom prst="roundRect">
-            <a:avLst>
-              <a:gd name="adj" fmla="val 9756"/>
-            </a:avLst>
-          </a:prstGeom>
-          <a:solidFill>
-            <a:srgbClr val="E3F2E8"/>
-          </a:solidFill>
-          <a:ln w="25400">
-            <a:solidFill>
-              <a:srgbClr val="2E7D4F"/>
-            </a:solidFill>
-            <a:prstDash val="solid"/>
-          </a:ln>
-        </p:spPr>
-      </p:sp>
-      <p:sp>
-        <p:nvSpPr>
-          <p:cNvPr id="11" name="Text 9"/>
-          <p:cNvSpPr txBox="1"/>
-          <p:nvPr/>
-        </p:nvSpPr>
-        <p:spPr>
-          <a:xfrm>
-            <a:off x="813816" y="2798064"/>
-            <a:ext cx="420624" cy="420624"/>
-          </a:xfrm>
-          <a:prstGeom prst="roundRect">
-            <a:avLst>
-              <a:gd name="adj" fmla="val 50000"/>
-            </a:avLst>
-          </a:prstGeom>
-          <a:solidFill>
-            <a:srgbClr val="2E7D4F"/>
-          </a:solidFill>
-          <a:ln/>
-        </p:spPr>
-        <p:txBody>
-          <a:bodyPr wrap="square" lIns="0" tIns="0" rIns="0" bIns="0" rtlCol="0" anchor="ctr"/>
-          <a:lstStyle/>
-          <a:p>
-            <a:pPr algn="ctr" indent="0" marL="0">
-              <a:lnSpc>
-                <a:spcPct val="100000"/>
-              </a:lnSpc>
-              <a:buNone/>
-            </a:pPr>
-            <a:r>
-              <a:rPr lang="en-US" sz="1600" b="1" dirty="0">
-                <a:solidFill>
-                  <a:srgbClr val="FFFFFF"/>
-                </a:solidFill>
-                <a:latin typeface="Calibri" pitchFamily="34" charset="0"/>
-                <a:ea typeface="Calibri" pitchFamily="34" charset="-122"/>
-                <a:cs typeface="Calibri" pitchFamily="34" charset="-120"/>
-              </a:rPr>
-              <a:t>c</a:t>
-            </a:r>
-            <a:endParaRPr lang="en-US" sz="1600" dirty="0"/>
-          </a:p>
-        </p:txBody>
-      </p:sp>
-      <p:sp>
-        <p:nvSpPr>
-          <p:cNvPr id="12" name="Text 10"/>
-          <p:cNvSpPr txBox="1"/>
-          <p:nvPr/>
-        </p:nvSpPr>
-        <p:spPr>
-          <a:xfrm>
-            <a:off x="1344168" y="2670048"/>
-            <a:ext cx="3044952" cy="676656"/>
-          </a:xfrm>
-          <a:prstGeom prst="rect">
-            <a:avLst/>
-          </a:prstGeom>
-          <a:noFill/>
-          <a:ln/>
-        </p:spPr>
-        <p:txBody>
-          <a:bodyPr wrap="square" lIns="25400" tIns="25400" rIns="25400" bIns="25400" rtlCol="0" anchor="ctr"/>
-          <a:lstStyle/>
-          <a:p>
-            <a:pPr algn="l" indent="0" marL="0">
-              <a:lnSpc>
-                <a:spcPct val="100000"/>
-              </a:lnSpc>
-              <a:buNone/>
-            </a:pPr>
-            <a:r>
-              <a:rPr lang="en-US" sz="1400" b="1" dirty="0">
-                <a:solidFill>
-                  <a:srgbClr val="1F2A37"/>
-                </a:solidFill>
-                <a:latin typeface="Calibri" pitchFamily="34" charset="0"/>
-                <a:ea typeface="Calibri" pitchFamily="34" charset="-122"/>
-                <a:cs typeface="Calibri" pitchFamily="34" charset="-120"/>
-              </a:rPr>
-              <a:t>Legal-racional</a:t>
-            </a:r>
-            <a:endParaRPr lang="en-US" sz="1400" dirty="0"/>
-          </a:p>
-        </p:txBody>
-      </p:sp>
-      <p:sp>
-        <p:nvSpPr>
-          <p:cNvPr id="13" name="Shape 11"/>
-          <p:cNvSpPr/>
-          <p:nvPr/>
-        </p:nvSpPr>
-        <p:spPr>
-          <a:xfrm>
-            <a:off x="4663440" y="2633472"/>
-            <a:ext cx="3794760" cy="749808"/>
-          </a:xfrm>
-          <a:prstGeom prst="roundRect">
-            <a:avLst>
-              <a:gd name="adj" fmla="val 9756"/>
-            </a:avLst>
-          </a:prstGeom>
-          <a:solidFill>
-            <a:srgbClr val="FFFFFF"/>
-          </a:solidFill>
-          <a:ln w="12700">
-            <a:solidFill>
-              <a:srgbClr val="DCD5C1"/>
-            </a:solidFill>
-            <a:prstDash val="solid"/>
-          </a:ln>
-        </p:spPr>
-      </p:sp>
-      <p:sp>
-        <p:nvSpPr>
-          <p:cNvPr id="14" name="Text 12"/>
-          <p:cNvSpPr txBox="1"/>
-          <p:nvPr/>
-        </p:nvSpPr>
-        <p:spPr>
-          <a:xfrm>
-            <a:off x="4791456" y="2798064"/>
-            <a:ext cx="420624" cy="420624"/>
-          </a:xfrm>
-          <a:prstGeom prst="roundRect">
-            <a:avLst>
-              <a:gd name="adj" fmla="val 50000"/>
-            </a:avLst>
-          </a:prstGeom>
-          <a:solidFill>
-            <a:srgbClr val="9AA3AB"/>
-          </a:solidFill>
-          <a:ln/>
-        </p:spPr>
-        <p:txBody>
-          <a:bodyPr wrap="square" lIns="0" tIns="0" rIns="0" bIns="0" rtlCol="0" anchor="ctr"/>
-          <a:lstStyle/>
-          <a:p>
-            <a:pPr algn="ctr" indent="0" marL="0">
-              <a:lnSpc>
-                <a:spcPct val="100000"/>
-              </a:lnSpc>
-              <a:buNone/>
-            </a:pPr>
-            <a:r>
-              <a:rPr lang="en-US" sz="1600" b="1" dirty="0">
-                <a:solidFill>
-                  <a:srgbClr val="FFFFFF"/>
-                </a:solidFill>
-                <a:latin typeface="Calibri" pitchFamily="34" charset="0"/>
-                <a:ea typeface="Calibri" pitchFamily="34" charset="-122"/>
-                <a:cs typeface="Calibri" pitchFamily="34" charset="-120"/>
-              </a:rPr>
-              <a:t>d</a:t>
-            </a:r>
-            <a:endParaRPr lang="en-US" sz="1600" dirty="0"/>
-          </a:p>
-        </p:txBody>
-      </p:sp>
-      <p:sp>
-        <p:nvSpPr>
-          <p:cNvPr id="15" name="Text 13"/>
-          <p:cNvSpPr txBox="1"/>
-          <p:nvPr/>
-        </p:nvSpPr>
-        <p:spPr>
-          <a:xfrm>
-            <a:off x="5321808" y="2670048"/>
-            <a:ext cx="3044952" cy="676656"/>
-          </a:xfrm>
-          <a:prstGeom prst="rect">
-            <a:avLst/>
-          </a:prstGeom>
-          <a:noFill/>
-          <a:ln/>
-        </p:spPr>
-        <p:txBody>
-          <a:bodyPr wrap="square" lIns="25400" tIns="25400" rIns="25400" bIns="25400" rtlCol="0" anchor="ctr"/>
-          <a:lstStyle/>
-          <a:p>
-            <a:pPr algn="l" indent="0" marL="0">
-              <a:lnSpc>
-                <a:spcPct val="100000"/>
-              </a:lnSpc>
-              <a:buNone/>
-            </a:pPr>
-            <a:r>
-              <a:rPr lang="en-US" sz="1400" dirty="0">
-                <a:solidFill>
-                  <a:srgbClr val="5B6770"/>
-                </a:solidFill>
-                <a:latin typeface="Calibri" pitchFamily="34" charset="0"/>
-                <a:ea typeface="Calibri" pitchFamily="34" charset="-122"/>
-                <a:cs typeface="Calibri" pitchFamily="34" charset="-120"/>
-              </a:rPr>
-              <a:t>Patrimonial</a:t>
-            </a:r>
-            <a:endParaRPr lang="en-US" sz="1400" dirty="0"/>
-          </a:p>
-        </p:txBody>
-      </p:sp>
-      <p:sp>
-        <p:nvSpPr>
-          <p:cNvPr id="16" name="Text 14"/>
-          <p:cNvSpPr txBox="1"/>
-          <p:nvPr/>
-        </p:nvSpPr>
-        <p:spPr>
-          <a:xfrm>
-            <a:off x="685800" y="3566160"/>
-            <a:ext cx="7772400" cy="841248"/>
-          </a:xfrm>
-          <a:prstGeom prst="roundRect">
-            <a:avLst>
-              <a:gd name="adj" fmla="val 8696"/>
+              <a:gd name="adj" fmla="val 15094"/>
             </a:avLst>
           </a:prstGeom>
           <a:solidFill>
@@ -26811,675 +23749,33 @@
           <a:ln/>
         </p:spPr>
         <p:txBody>
-          <a:bodyPr wrap="square" lIns="114300" tIns="114300" rIns="114300" bIns="114300" rtlCol="0" anchor="ctr"/>
+          <a:bodyPr wrap="square" lIns="127000" tIns="127000" rIns="127000" bIns="127000" rtlCol="0" anchor="ctr"/>
           <a:lstStyle/>
           <a:p>
-            <a:pPr algn="l" indent="0" marL="0">
+            <a:pPr algn="ctr" indent="0" marL="0">
               <a:lnSpc>
                 <a:spcPct val="100000"/>
               </a:lnSpc>
               <a:buNone/>
             </a:pPr>
             <a:r>
-              <a:rPr lang="en-US" sz="1350" b="1" dirty="0">
-                <a:solidFill>
-                  <a:srgbClr val="2E7D4F"/>
-                </a:solidFill>
-                <a:latin typeface="Calibri" pitchFamily="34" charset="0"/>
-                <a:ea typeface="Calibri" pitchFamily="34" charset="-122"/>
-                <a:cs typeface="Calibri" pitchFamily="34" charset="-120"/>
-              </a:rPr>
-              <a:t>Resposta: c) </a:t>
-            </a:r>
-            <a:pPr algn="l" indent="0" marL="0">
-              <a:lnSpc>
-                <a:spcPct val="100000"/>
-              </a:lnSpc>
-              <a:buNone/>
-            </a:pPr>
-            <a:r>
-              <a:rPr lang="en-US" sz="1350" dirty="0">
-                <a:solidFill>
-                  <a:srgbClr val="1F2A37"/>
-                </a:solidFill>
-                <a:latin typeface="Calibri" pitchFamily="34" charset="0"/>
-                <a:ea typeface="Calibri" pitchFamily="34" charset="-122"/>
-                <a:cs typeface="Calibri" pitchFamily="34" charset="-120"/>
-              </a:rPr>
-              <a:t>A dominação legal-racional baseia-se na obediência a normas impessoais: é a base da burocracia moderna e do art. 37 da Constituição.</a:t>
-            </a:r>
-            <a:endParaRPr lang="en-US" sz="1350" dirty="0"/>
+              <a:rPr lang="en-US" sz="1300" b="1" dirty="0">
+                <a:solidFill>
+                  <a:srgbClr val="13294B"/>
+                </a:solidFill>
+                <a:latin typeface="Calibri" pitchFamily="34" charset="0"/>
+                <a:ea typeface="Calibri" pitchFamily="34" charset="-122"/>
+                <a:cs typeface="Calibri" pitchFamily="34" charset="-120"/>
+              </a:rPr>
+              <a:t>Próxima unidade: a dinâmica pendular entre Estado e mercado e a matriz liberal.</a:t>
+            </a:r>
+            <a:endParaRPr lang="en-US" sz="1300" dirty="0"/>
           </a:p>
         </p:txBody>
       </p:sp>
       <p:sp>
         <p:nvSpPr>
-          <p:cNvPr id="17" name="Text 15"/>
-          <p:cNvSpPr txBox="1"/>
-          <p:nvPr/>
-        </p:nvSpPr>
-        <p:spPr>
-          <a:xfrm>
-            <a:off x="4206240" y="36576"/>
-            <a:ext cx="4800600" cy="219456"/>
-          </a:xfrm>
-          <a:prstGeom prst="rect">
-            <a:avLst/>
-          </a:prstGeom>
-          <a:noFill/>
-          <a:ln/>
-        </p:spPr>
-        <p:txBody>
-          <a:bodyPr wrap="square" lIns="0" tIns="0" rIns="0" bIns="0" rtlCol="0" anchor="ctr"/>
-          <a:lstStyle/>
-          <a:p>
-            <a:pPr algn="r" indent="0" marL="0">
-              <a:lnSpc>
-                <a:spcPct val="100000"/>
-              </a:lnSpc>
-              <a:buNone/>
-            </a:pPr>
-            <a:r>
-              <a:rPr lang="en-US" sz="950" dirty="0">
-                <a:solidFill>
-                  <a:srgbClr val="5B6770"/>
-                </a:solidFill>
-                <a:latin typeface="Calibri" pitchFamily="34" charset="0"/>
-                <a:ea typeface="Calibri" pitchFamily="34" charset="-122"/>
-                <a:cs typeface="Calibri" pitchFamily="34" charset="-120"/>
-              </a:rPr>
-              <a:t>Estado, Governo e Mercado · Unidade 1</a:t>
-            </a:r>
-            <a:endParaRPr lang="en-US" sz="950" dirty="0"/>
-          </a:p>
-        </p:txBody>
-      </p:sp>
-    </p:spTree>
-  </p:cSld>
-  <p:clrMapOvr>
-    <a:masterClrMapping/>
-  </p:clrMapOvr>
-</p:sld>
-</file>
-
-<file path=ppt/slides/slide39.xml><?xml version="1.0" encoding="utf-8"?>
-<p:sld xmlns:a="http://schemas.openxmlformats.org/drawingml/2006/main" xmlns:r="http://schemas.openxmlformats.org/officeDocument/2006/relationships" xmlns:p="http://schemas.openxmlformats.org/presentationml/2006/main">
-  <p:cSld name="Slide 39">
-    <p:bg>
-      <p:bgPr>
-        <a:blipFill dpi="0" rotWithShape="1">
-          <a:blip r:embed="rId1">
-            <a:lum/>
-          </a:blip>
-          <a:srcRect/>
-          <a:stretch>
-            <a:fillRect/>
-          </a:stretch>
-        </a:blipFill>
-        <a:effectLst/>
-      </p:bgPr>
-    </p:bg>
-    <p:spTree>
-      <p:nvGrpSpPr>
-        <p:cNvPr id="1" name=""/>
-        <p:cNvGrpSpPr/>
-        <p:nvPr/>
-      </p:nvGrpSpPr>
-      <p:grpSpPr>
-        <a:xfrm>
-          <a:off x="0" y="0"/>
-          <a:ext cx="0" cy="0"/>
-          <a:chOff x="0" y="0"/>
-          <a:chExt cx="0" cy="0"/>
-        </a:xfrm>
-      </p:grpSpPr>
-      <p:sp>
-        <p:nvSpPr>
-          <p:cNvPr id="2" name="Text 0"/>
-          <p:cNvSpPr txBox="1"/>
-          <p:nvPr/>
-        </p:nvSpPr>
-        <p:spPr>
-          <a:xfrm>
-            <a:off x="731520" y="274320"/>
-            <a:ext cx="7680960" cy="365760"/>
-          </a:xfrm>
-          <a:prstGeom prst="rect">
-            <a:avLst/>
-          </a:prstGeom>
-          <a:noFill/>
-          <a:ln/>
-        </p:spPr>
-        <p:txBody>
-          <a:bodyPr wrap="square" lIns="0" tIns="0" rIns="0" bIns="0" rtlCol="0" anchor="ctr"/>
-          <a:lstStyle/>
-          <a:p>
-            <a:pPr algn="ctr" indent="0" marL="0">
-              <a:lnSpc>
-                <a:spcPct val="100000"/>
-              </a:lnSpc>
-              <a:buNone/>
-            </a:pPr>
-            <a:r>
-              <a:rPr lang="en-US" sz="1250" b="1" dirty="0">
-                <a:solidFill>
-                  <a:srgbClr val="2A8C85"/>
-                </a:solidFill>
-                <a:latin typeface="Calibri" pitchFamily="34" charset="0"/>
-                <a:ea typeface="Calibri" pitchFamily="34" charset="-122"/>
-                <a:cs typeface="Calibri" pitchFamily="34" charset="-120"/>
-              </a:rPr>
-              <a:t>QUIZ DA UNIDADE 1 · PERGUNTA 3 DE 5</a:t>
-            </a:r>
-            <a:endParaRPr lang="en-US" sz="1250" dirty="0"/>
-          </a:p>
-        </p:txBody>
-      </p:sp>
-      <p:sp>
-        <p:nvSpPr>
-          <p:cNvPr id="3" name="Text 1"/>
-          <p:cNvSpPr txBox="1"/>
-          <p:nvPr/>
-        </p:nvSpPr>
-        <p:spPr>
-          <a:xfrm>
-            <a:off x="731520" y="658368"/>
-            <a:ext cx="7680960" cy="960120"/>
-          </a:xfrm>
-          <a:prstGeom prst="rect">
-            <a:avLst/>
-          </a:prstGeom>
-          <a:noFill/>
-          <a:ln/>
-        </p:spPr>
-        <p:txBody>
-          <a:bodyPr wrap="square" lIns="0" tIns="0" rIns="0" bIns="0" rtlCol="0" anchor="ctr"/>
-          <a:lstStyle/>
-          <a:p>
-            <a:pPr algn="ctr" indent="0" marL="0">
-              <a:lnSpc>
-                <a:spcPct val="100000"/>
-              </a:lnSpc>
-              <a:buNone/>
-            </a:pPr>
-            <a:r>
-              <a:rPr lang="en-US" sz="1900" b="1" dirty="0">
-                <a:solidFill>
-                  <a:srgbClr val="13294B"/>
-                </a:solidFill>
-                <a:latin typeface="Calibri" pitchFamily="34" charset="0"/>
-                <a:ea typeface="Calibri" pitchFamily="34" charset="-122"/>
-                <a:cs typeface="Calibri" pitchFamily="34" charset="-120"/>
-              </a:rPr>
-              <a:t>A iluminação das ruas de uma cidade é um exemplo de bem:</a:t>
-            </a:r>
-            <a:endParaRPr lang="en-US" sz="1900" dirty="0"/>
-          </a:p>
-        </p:txBody>
-      </p:sp>
-      <p:sp>
-        <p:nvSpPr>
-          <p:cNvPr id="4" name="Shape 2"/>
-          <p:cNvSpPr/>
-          <p:nvPr/>
-        </p:nvSpPr>
-        <p:spPr>
-          <a:xfrm>
-            <a:off x="685800" y="1737360"/>
-            <a:ext cx="3794760" cy="914400"/>
-          </a:xfrm>
-          <a:prstGeom prst="roundRect">
-            <a:avLst>
-              <a:gd name="adj" fmla="val 8000"/>
-            </a:avLst>
-          </a:prstGeom>
-          <a:solidFill>
-            <a:srgbClr val="FFFFFF"/>
-          </a:solidFill>
-          <a:ln w="12700">
-            <a:solidFill>
-              <a:srgbClr val="DCD5C1"/>
-            </a:solidFill>
-            <a:prstDash val="solid"/>
-          </a:ln>
-        </p:spPr>
-      </p:sp>
-      <p:sp>
-        <p:nvSpPr>
-          <p:cNvPr id="5" name="Text 3"/>
-          <p:cNvSpPr txBox="1"/>
-          <p:nvPr/>
-        </p:nvSpPr>
-        <p:spPr>
-          <a:xfrm>
-            <a:off x="813816" y="1984248"/>
-            <a:ext cx="420624" cy="420624"/>
-          </a:xfrm>
-          <a:prstGeom prst="roundRect">
-            <a:avLst>
-              <a:gd name="adj" fmla="val 50000"/>
-            </a:avLst>
-          </a:prstGeom>
-          <a:solidFill>
-            <a:srgbClr val="13294B"/>
-          </a:solidFill>
-          <a:ln/>
-        </p:spPr>
-        <p:txBody>
-          <a:bodyPr wrap="square" lIns="0" tIns="0" rIns="0" bIns="0" rtlCol="0" anchor="ctr"/>
-          <a:lstStyle/>
-          <a:p>
-            <a:pPr algn="ctr" indent="0" marL="0">
-              <a:lnSpc>
-                <a:spcPct val="100000"/>
-              </a:lnSpc>
-              <a:buNone/>
-            </a:pPr>
-            <a:r>
-              <a:rPr lang="en-US" sz="1600" b="1" dirty="0">
-                <a:solidFill>
-                  <a:srgbClr val="FFFFFF"/>
-                </a:solidFill>
-                <a:latin typeface="Calibri" pitchFamily="34" charset="0"/>
-                <a:ea typeface="Calibri" pitchFamily="34" charset="-122"/>
-                <a:cs typeface="Calibri" pitchFamily="34" charset="-120"/>
-              </a:rPr>
-              <a:t>a</a:t>
-            </a:r>
-            <a:endParaRPr lang="en-US" sz="1600" dirty="0"/>
-          </a:p>
-        </p:txBody>
-      </p:sp>
-      <p:sp>
-        <p:nvSpPr>
-          <p:cNvPr id="6" name="Text 4"/>
-          <p:cNvSpPr txBox="1"/>
-          <p:nvPr/>
-        </p:nvSpPr>
-        <p:spPr>
-          <a:xfrm>
-            <a:off x="1344168" y="1773936"/>
-            <a:ext cx="3044952" cy="841248"/>
-          </a:xfrm>
-          <a:prstGeom prst="rect">
-            <a:avLst/>
-          </a:prstGeom>
-          <a:noFill/>
-          <a:ln/>
-        </p:spPr>
-        <p:txBody>
-          <a:bodyPr wrap="square" lIns="25400" tIns="25400" rIns="25400" bIns="25400" rtlCol="0" anchor="ctr"/>
-          <a:lstStyle/>
-          <a:p>
-            <a:pPr algn="l" indent="0" marL="0">
-              <a:lnSpc>
-                <a:spcPct val="100000"/>
-              </a:lnSpc>
-              <a:buNone/>
-            </a:pPr>
-            <a:r>
-              <a:rPr lang="en-US" sz="1400" dirty="0">
-                <a:solidFill>
-                  <a:srgbClr val="1F2A37"/>
-                </a:solidFill>
-                <a:latin typeface="Calibri" pitchFamily="34" charset="0"/>
-                <a:ea typeface="Calibri" pitchFamily="34" charset="-122"/>
-                <a:cs typeface="Calibri" pitchFamily="34" charset="-120"/>
-              </a:rPr>
-              <a:t>Privado</a:t>
-            </a:r>
-            <a:endParaRPr lang="en-US" sz="1400" dirty="0"/>
-          </a:p>
-        </p:txBody>
-      </p:sp>
-      <p:sp>
-        <p:nvSpPr>
-          <p:cNvPr id="7" name="Shape 5"/>
-          <p:cNvSpPr/>
-          <p:nvPr/>
-        </p:nvSpPr>
-        <p:spPr>
-          <a:xfrm>
-            <a:off x="4663440" y="1737360"/>
-            <a:ext cx="3794760" cy="914400"/>
-          </a:xfrm>
-          <a:prstGeom prst="roundRect">
-            <a:avLst>
-              <a:gd name="adj" fmla="val 8000"/>
-            </a:avLst>
-          </a:prstGeom>
-          <a:solidFill>
-            <a:srgbClr val="FFFFFF"/>
-          </a:solidFill>
-          <a:ln w="12700">
-            <a:solidFill>
-              <a:srgbClr val="DCD5C1"/>
-            </a:solidFill>
-            <a:prstDash val="solid"/>
-          </a:ln>
-        </p:spPr>
-      </p:sp>
-      <p:sp>
-        <p:nvSpPr>
-          <p:cNvPr id="8" name="Text 6"/>
-          <p:cNvSpPr txBox="1"/>
-          <p:nvPr/>
-        </p:nvSpPr>
-        <p:spPr>
-          <a:xfrm>
-            <a:off x="4791456" y="1984248"/>
-            <a:ext cx="420624" cy="420624"/>
-          </a:xfrm>
-          <a:prstGeom prst="roundRect">
-            <a:avLst>
-              <a:gd name="adj" fmla="val 50000"/>
-            </a:avLst>
-          </a:prstGeom>
-          <a:solidFill>
-            <a:srgbClr val="13294B"/>
-          </a:solidFill>
-          <a:ln/>
-        </p:spPr>
-        <p:txBody>
-          <a:bodyPr wrap="square" lIns="0" tIns="0" rIns="0" bIns="0" rtlCol="0" anchor="ctr"/>
-          <a:lstStyle/>
-          <a:p>
-            <a:pPr algn="ctr" indent="0" marL="0">
-              <a:lnSpc>
-                <a:spcPct val="100000"/>
-              </a:lnSpc>
-              <a:buNone/>
-            </a:pPr>
-            <a:r>
-              <a:rPr lang="en-US" sz="1600" b="1" dirty="0">
-                <a:solidFill>
-                  <a:srgbClr val="FFFFFF"/>
-                </a:solidFill>
-                <a:latin typeface="Calibri" pitchFamily="34" charset="0"/>
-                <a:ea typeface="Calibri" pitchFamily="34" charset="-122"/>
-                <a:cs typeface="Calibri" pitchFamily="34" charset="-120"/>
-              </a:rPr>
-              <a:t>b</a:t>
-            </a:r>
-            <a:endParaRPr lang="en-US" sz="1600" dirty="0"/>
-          </a:p>
-        </p:txBody>
-      </p:sp>
-      <p:sp>
-        <p:nvSpPr>
-          <p:cNvPr id="9" name="Text 7"/>
-          <p:cNvSpPr txBox="1"/>
-          <p:nvPr/>
-        </p:nvSpPr>
-        <p:spPr>
-          <a:xfrm>
-            <a:off x="5321808" y="1773936"/>
-            <a:ext cx="3044952" cy="841248"/>
-          </a:xfrm>
-          <a:prstGeom prst="rect">
-            <a:avLst/>
-          </a:prstGeom>
-          <a:noFill/>
-          <a:ln/>
-        </p:spPr>
-        <p:txBody>
-          <a:bodyPr wrap="square" lIns="25400" tIns="25400" rIns="25400" bIns="25400" rtlCol="0" anchor="ctr"/>
-          <a:lstStyle/>
-          <a:p>
-            <a:pPr algn="l" indent="0" marL="0">
-              <a:lnSpc>
-                <a:spcPct val="100000"/>
-              </a:lnSpc>
-              <a:buNone/>
-            </a:pPr>
-            <a:r>
-              <a:rPr lang="en-US" sz="1400" dirty="0">
-                <a:solidFill>
-                  <a:srgbClr val="1F2A37"/>
-                </a:solidFill>
-                <a:latin typeface="Calibri" pitchFamily="34" charset="0"/>
-                <a:ea typeface="Calibri" pitchFamily="34" charset="-122"/>
-                <a:cs typeface="Calibri" pitchFamily="34" charset="-120"/>
-              </a:rPr>
-              <a:t>De clube</a:t>
-            </a:r>
-            <a:endParaRPr lang="en-US" sz="1400" dirty="0"/>
-          </a:p>
-        </p:txBody>
-      </p:sp>
-      <p:sp>
-        <p:nvSpPr>
-          <p:cNvPr id="10" name="Shape 8"/>
-          <p:cNvSpPr/>
-          <p:nvPr/>
-        </p:nvSpPr>
-        <p:spPr>
-          <a:xfrm>
-            <a:off x="685800" y="2798064"/>
-            <a:ext cx="3794760" cy="914400"/>
-          </a:xfrm>
-          <a:prstGeom prst="roundRect">
-            <a:avLst>
-              <a:gd name="adj" fmla="val 8000"/>
-            </a:avLst>
-          </a:prstGeom>
-          <a:solidFill>
-            <a:srgbClr val="FFFFFF"/>
-          </a:solidFill>
-          <a:ln w="12700">
-            <a:solidFill>
-              <a:srgbClr val="DCD5C1"/>
-            </a:solidFill>
-            <a:prstDash val="solid"/>
-          </a:ln>
-        </p:spPr>
-      </p:sp>
-      <p:sp>
-        <p:nvSpPr>
-          <p:cNvPr id="11" name="Text 9"/>
-          <p:cNvSpPr txBox="1"/>
-          <p:nvPr/>
-        </p:nvSpPr>
-        <p:spPr>
-          <a:xfrm>
-            <a:off x="813816" y="3044952"/>
-            <a:ext cx="420624" cy="420624"/>
-          </a:xfrm>
-          <a:prstGeom prst="roundRect">
-            <a:avLst>
-              <a:gd name="adj" fmla="val 50000"/>
-            </a:avLst>
-          </a:prstGeom>
-          <a:solidFill>
-            <a:srgbClr val="13294B"/>
-          </a:solidFill>
-          <a:ln/>
-        </p:spPr>
-        <p:txBody>
-          <a:bodyPr wrap="square" lIns="0" tIns="0" rIns="0" bIns="0" rtlCol="0" anchor="ctr"/>
-          <a:lstStyle/>
-          <a:p>
-            <a:pPr algn="ctr" indent="0" marL="0">
-              <a:lnSpc>
-                <a:spcPct val="100000"/>
-              </a:lnSpc>
-              <a:buNone/>
-            </a:pPr>
-            <a:r>
-              <a:rPr lang="en-US" sz="1600" b="1" dirty="0">
-                <a:solidFill>
-                  <a:srgbClr val="FFFFFF"/>
-                </a:solidFill>
-                <a:latin typeface="Calibri" pitchFamily="34" charset="0"/>
-                <a:ea typeface="Calibri" pitchFamily="34" charset="-122"/>
-                <a:cs typeface="Calibri" pitchFamily="34" charset="-120"/>
-              </a:rPr>
-              <a:t>c</a:t>
-            </a:r>
-            <a:endParaRPr lang="en-US" sz="1600" dirty="0"/>
-          </a:p>
-        </p:txBody>
-      </p:sp>
-      <p:sp>
-        <p:nvSpPr>
-          <p:cNvPr id="12" name="Text 10"/>
-          <p:cNvSpPr txBox="1"/>
-          <p:nvPr/>
-        </p:nvSpPr>
-        <p:spPr>
-          <a:xfrm>
-            <a:off x="1344168" y="2834640"/>
-            <a:ext cx="3044952" cy="841248"/>
-          </a:xfrm>
-          <a:prstGeom prst="rect">
-            <a:avLst/>
-          </a:prstGeom>
-          <a:noFill/>
-          <a:ln/>
-        </p:spPr>
-        <p:txBody>
-          <a:bodyPr wrap="square" lIns="25400" tIns="25400" rIns="25400" bIns="25400" rtlCol="0" anchor="ctr"/>
-          <a:lstStyle/>
-          <a:p>
-            <a:pPr algn="l" indent="0" marL="0">
-              <a:lnSpc>
-                <a:spcPct val="100000"/>
-              </a:lnSpc>
-              <a:buNone/>
-            </a:pPr>
-            <a:r>
-              <a:rPr lang="en-US" sz="1400" dirty="0">
-                <a:solidFill>
-                  <a:srgbClr val="1F2A37"/>
-                </a:solidFill>
-                <a:latin typeface="Calibri" pitchFamily="34" charset="0"/>
-                <a:ea typeface="Calibri" pitchFamily="34" charset="-122"/>
-                <a:cs typeface="Calibri" pitchFamily="34" charset="-120"/>
-              </a:rPr>
-              <a:t>Comum</a:t>
-            </a:r>
-            <a:endParaRPr lang="en-US" sz="1400" dirty="0"/>
-          </a:p>
-        </p:txBody>
-      </p:sp>
-      <p:sp>
-        <p:nvSpPr>
-          <p:cNvPr id="13" name="Shape 11"/>
-          <p:cNvSpPr/>
-          <p:nvPr/>
-        </p:nvSpPr>
-        <p:spPr>
-          <a:xfrm>
-            <a:off x="4663440" y="2798064"/>
-            <a:ext cx="3794760" cy="914400"/>
-          </a:xfrm>
-          <a:prstGeom prst="roundRect">
-            <a:avLst>
-              <a:gd name="adj" fmla="val 8000"/>
-            </a:avLst>
-          </a:prstGeom>
-          <a:solidFill>
-            <a:srgbClr val="FFFFFF"/>
-          </a:solidFill>
-          <a:ln w="12700">
-            <a:solidFill>
-              <a:srgbClr val="DCD5C1"/>
-            </a:solidFill>
-            <a:prstDash val="solid"/>
-          </a:ln>
-        </p:spPr>
-      </p:sp>
-      <p:sp>
-        <p:nvSpPr>
-          <p:cNvPr id="14" name="Text 12"/>
-          <p:cNvSpPr txBox="1"/>
-          <p:nvPr/>
-        </p:nvSpPr>
-        <p:spPr>
-          <a:xfrm>
-            <a:off x="4791456" y="3044952"/>
-            <a:ext cx="420624" cy="420624"/>
-          </a:xfrm>
-          <a:prstGeom prst="roundRect">
-            <a:avLst>
-              <a:gd name="adj" fmla="val 50000"/>
-            </a:avLst>
-          </a:prstGeom>
-          <a:solidFill>
-            <a:srgbClr val="13294B"/>
-          </a:solidFill>
-          <a:ln/>
-        </p:spPr>
-        <p:txBody>
-          <a:bodyPr wrap="square" lIns="0" tIns="0" rIns="0" bIns="0" rtlCol="0" anchor="ctr"/>
-          <a:lstStyle/>
-          <a:p>
-            <a:pPr algn="ctr" indent="0" marL="0">
-              <a:lnSpc>
-                <a:spcPct val="100000"/>
-              </a:lnSpc>
-              <a:buNone/>
-            </a:pPr>
-            <a:r>
-              <a:rPr lang="en-US" sz="1600" b="1" dirty="0">
-                <a:solidFill>
-                  <a:srgbClr val="FFFFFF"/>
-                </a:solidFill>
-                <a:latin typeface="Calibri" pitchFamily="34" charset="0"/>
-                <a:ea typeface="Calibri" pitchFamily="34" charset="-122"/>
-                <a:cs typeface="Calibri" pitchFamily="34" charset="-120"/>
-              </a:rPr>
-              <a:t>d</a:t>
-            </a:r>
-            <a:endParaRPr lang="en-US" sz="1600" dirty="0"/>
-          </a:p>
-        </p:txBody>
-      </p:sp>
-      <p:sp>
-        <p:nvSpPr>
-          <p:cNvPr id="15" name="Text 13"/>
-          <p:cNvSpPr txBox="1"/>
-          <p:nvPr/>
-        </p:nvSpPr>
-        <p:spPr>
-          <a:xfrm>
-            <a:off x="5321808" y="2834640"/>
-            <a:ext cx="3044952" cy="841248"/>
-          </a:xfrm>
-          <a:prstGeom prst="rect">
-            <a:avLst/>
-          </a:prstGeom>
-          <a:noFill/>
-          <a:ln/>
-        </p:spPr>
-        <p:txBody>
-          <a:bodyPr wrap="square" lIns="25400" tIns="25400" rIns="25400" bIns="25400" rtlCol="0" anchor="ctr"/>
-          <a:lstStyle/>
-          <a:p>
-            <a:pPr algn="l" indent="0" marL="0">
-              <a:lnSpc>
-                <a:spcPct val="100000"/>
-              </a:lnSpc>
-              <a:buNone/>
-            </a:pPr>
-            <a:r>
-              <a:rPr lang="en-US" sz="1400" dirty="0">
-                <a:solidFill>
-                  <a:srgbClr val="1F2A37"/>
-                </a:solidFill>
-                <a:latin typeface="Calibri" pitchFamily="34" charset="0"/>
-                <a:ea typeface="Calibri" pitchFamily="34" charset="-122"/>
-                <a:cs typeface="Calibri" pitchFamily="34" charset="-120"/>
-              </a:rPr>
-              <a:t>Público</a:t>
-            </a:r>
-            <a:endParaRPr lang="en-US" sz="1400" dirty="0"/>
-          </a:p>
-        </p:txBody>
-      </p:sp>
-      <p:sp>
-        <p:nvSpPr>
-          <p:cNvPr id="16" name="Text 14"/>
+          <p:cNvPr id="7" name="Text 5"/>
           <p:cNvSpPr txBox="1"/>
           <p:nvPr/>
         </p:nvSpPr>
@@ -28018,3919 +24314,6 @@
                 <a:cs typeface="Calibri" pitchFamily="34" charset="-120"/>
               </a:rPr>
               <a:t>Estado, Governo e Mercado · Unidade 1 · Tópico 1 do sumário</a:t>
-            </a:r>
-            <a:endParaRPr lang="en-US" sz="950" dirty="0"/>
-          </a:p>
-        </p:txBody>
-      </p:sp>
-    </p:spTree>
-  </p:cSld>
-  <p:clrMapOvr>
-    <a:masterClrMapping/>
-  </p:clrMapOvr>
-</p:sld>
-</file>
-
-<file path=ppt/slides/slide40.xml><?xml version="1.0" encoding="utf-8"?>
-<p:sld xmlns:a="http://schemas.openxmlformats.org/drawingml/2006/main" xmlns:r="http://schemas.openxmlformats.org/officeDocument/2006/relationships" xmlns:p="http://schemas.openxmlformats.org/presentationml/2006/main">
-  <p:cSld name="Slide 40">
-    <p:bg>
-      <p:bgPr>
-        <a:blipFill dpi="0" rotWithShape="1">
-          <a:blip r:embed="rId1">
-            <a:lum/>
-          </a:blip>
-          <a:srcRect/>
-          <a:stretch>
-            <a:fillRect/>
-          </a:stretch>
-        </a:blipFill>
-        <a:effectLst/>
-      </p:bgPr>
-    </p:bg>
-    <p:spTree>
-      <p:nvGrpSpPr>
-        <p:cNvPr id="1" name=""/>
-        <p:cNvGrpSpPr/>
-        <p:nvPr/>
-      </p:nvGrpSpPr>
-      <p:grpSpPr>
-        <a:xfrm>
-          <a:off x="0" y="0"/>
-          <a:ext cx="0" cy="0"/>
-          <a:chOff x="0" y="0"/>
-          <a:chExt cx="0" cy="0"/>
-        </a:xfrm>
-      </p:grpSpPr>
-      <p:sp>
-        <p:nvSpPr>
-          <p:cNvPr id="2" name="Text 0"/>
-          <p:cNvSpPr txBox="1"/>
-          <p:nvPr/>
-        </p:nvSpPr>
-        <p:spPr>
-          <a:xfrm>
-            <a:off x="731520" y="274320"/>
-            <a:ext cx="7680960" cy="365760"/>
-          </a:xfrm>
-          <a:prstGeom prst="rect">
-            <a:avLst/>
-          </a:prstGeom>
-          <a:noFill/>
-          <a:ln/>
-        </p:spPr>
-        <p:txBody>
-          <a:bodyPr wrap="square" lIns="0" tIns="0" rIns="0" bIns="0" rtlCol="0" anchor="ctr"/>
-          <a:lstStyle/>
-          <a:p>
-            <a:pPr algn="ctr" indent="0" marL="0">
-              <a:lnSpc>
-                <a:spcPct val="100000"/>
-              </a:lnSpc>
-              <a:buNone/>
-            </a:pPr>
-            <a:r>
-              <a:rPr lang="en-US" sz="1250" b="1" dirty="0">
-                <a:solidFill>
-                  <a:srgbClr val="2A8C85"/>
-                </a:solidFill>
-                <a:latin typeface="Calibri" pitchFamily="34" charset="0"/>
-                <a:ea typeface="Calibri" pitchFamily="34" charset="-122"/>
-                <a:cs typeface="Calibri" pitchFamily="34" charset="-120"/>
-              </a:rPr>
-              <a:t>QUIZ DA UNIDADE 1 · PERGUNTA 3 DE 5 · RESPOSTA</a:t>
-            </a:r>
-            <a:endParaRPr lang="en-US" sz="1250" dirty="0"/>
-          </a:p>
-        </p:txBody>
-      </p:sp>
-      <p:sp>
-        <p:nvSpPr>
-          <p:cNvPr id="3" name="Text 1"/>
-          <p:cNvSpPr txBox="1"/>
-          <p:nvPr/>
-        </p:nvSpPr>
-        <p:spPr>
-          <a:xfrm>
-            <a:off x="731520" y="658368"/>
-            <a:ext cx="7680960" cy="960120"/>
-          </a:xfrm>
-          <a:prstGeom prst="rect">
-            <a:avLst/>
-          </a:prstGeom>
-          <a:noFill/>
-          <a:ln/>
-        </p:spPr>
-        <p:txBody>
-          <a:bodyPr wrap="square" lIns="0" tIns="0" rIns="0" bIns="0" rtlCol="0" anchor="ctr"/>
-          <a:lstStyle/>
-          <a:p>
-            <a:pPr algn="ctr" indent="0" marL="0">
-              <a:lnSpc>
-                <a:spcPct val="100000"/>
-              </a:lnSpc>
-              <a:buNone/>
-            </a:pPr>
-            <a:r>
-              <a:rPr lang="en-US" sz="1900" b="1" dirty="0">
-                <a:solidFill>
-                  <a:srgbClr val="13294B"/>
-                </a:solidFill>
-                <a:latin typeface="Calibri" pitchFamily="34" charset="0"/>
-                <a:ea typeface="Calibri" pitchFamily="34" charset="-122"/>
-                <a:cs typeface="Calibri" pitchFamily="34" charset="-120"/>
-              </a:rPr>
-              <a:t>A iluminação das ruas de uma cidade é um exemplo de bem:</a:t>
-            </a:r>
-            <a:endParaRPr lang="en-US" sz="1900" dirty="0"/>
-          </a:p>
-        </p:txBody>
-      </p:sp>
-      <p:sp>
-        <p:nvSpPr>
-          <p:cNvPr id="4" name="Shape 2"/>
-          <p:cNvSpPr/>
-          <p:nvPr/>
-        </p:nvSpPr>
-        <p:spPr>
-          <a:xfrm>
-            <a:off x="685800" y="1737360"/>
-            <a:ext cx="3794760" cy="749808"/>
-          </a:xfrm>
-          <a:prstGeom prst="roundRect">
-            <a:avLst>
-              <a:gd name="adj" fmla="val 9756"/>
-            </a:avLst>
-          </a:prstGeom>
-          <a:solidFill>
-            <a:srgbClr val="FFFFFF"/>
-          </a:solidFill>
-          <a:ln w="12700">
-            <a:solidFill>
-              <a:srgbClr val="DCD5C1"/>
-            </a:solidFill>
-            <a:prstDash val="solid"/>
-          </a:ln>
-        </p:spPr>
-      </p:sp>
-      <p:sp>
-        <p:nvSpPr>
-          <p:cNvPr id="5" name="Text 3"/>
-          <p:cNvSpPr txBox="1"/>
-          <p:nvPr/>
-        </p:nvSpPr>
-        <p:spPr>
-          <a:xfrm>
-            <a:off x="813816" y="1901952"/>
-            <a:ext cx="420624" cy="420624"/>
-          </a:xfrm>
-          <a:prstGeom prst="roundRect">
-            <a:avLst>
-              <a:gd name="adj" fmla="val 50000"/>
-            </a:avLst>
-          </a:prstGeom>
-          <a:solidFill>
-            <a:srgbClr val="9AA3AB"/>
-          </a:solidFill>
-          <a:ln/>
-        </p:spPr>
-        <p:txBody>
-          <a:bodyPr wrap="square" lIns="0" tIns="0" rIns="0" bIns="0" rtlCol="0" anchor="ctr"/>
-          <a:lstStyle/>
-          <a:p>
-            <a:pPr algn="ctr" indent="0" marL="0">
-              <a:lnSpc>
-                <a:spcPct val="100000"/>
-              </a:lnSpc>
-              <a:buNone/>
-            </a:pPr>
-            <a:r>
-              <a:rPr lang="en-US" sz="1600" b="1" dirty="0">
-                <a:solidFill>
-                  <a:srgbClr val="FFFFFF"/>
-                </a:solidFill>
-                <a:latin typeface="Calibri" pitchFamily="34" charset="0"/>
-                <a:ea typeface="Calibri" pitchFamily="34" charset="-122"/>
-                <a:cs typeface="Calibri" pitchFamily="34" charset="-120"/>
-              </a:rPr>
-              <a:t>a</a:t>
-            </a:r>
-            <a:endParaRPr lang="en-US" sz="1600" dirty="0"/>
-          </a:p>
-        </p:txBody>
-      </p:sp>
-      <p:sp>
-        <p:nvSpPr>
-          <p:cNvPr id="6" name="Text 4"/>
-          <p:cNvSpPr txBox="1"/>
-          <p:nvPr/>
-        </p:nvSpPr>
-        <p:spPr>
-          <a:xfrm>
-            <a:off x="1344168" y="1773936"/>
-            <a:ext cx="3044952" cy="676656"/>
-          </a:xfrm>
-          <a:prstGeom prst="rect">
-            <a:avLst/>
-          </a:prstGeom>
-          <a:noFill/>
-          <a:ln/>
-        </p:spPr>
-        <p:txBody>
-          <a:bodyPr wrap="square" lIns="25400" tIns="25400" rIns="25400" bIns="25400" rtlCol="0" anchor="ctr"/>
-          <a:lstStyle/>
-          <a:p>
-            <a:pPr algn="l" indent="0" marL="0">
-              <a:lnSpc>
-                <a:spcPct val="100000"/>
-              </a:lnSpc>
-              <a:buNone/>
-            </a:pPr>
-            <a:r>
-              <a:rPr lang="en-US" sz="1400" dirty="0">
-                <a:solidFill>
-                  <a:srgbClr val="5B6770"/>
-                </a:solidFill>
-                <a:latin typeface="Calibri" pitchFamily="34" charset="0"/>
-                <a:ea typeface="Calibri" pitchFamily="34" charset="-122"/>
-                <a:cs typeface="Calibri" pitchFamily="34" charset="-120"/>
-              </a:rPr>
-              <a:t>Privado</a:t>
-            </a:r>
-            <a:endParaRPr lang="en-US" sz="1400" dirty="0"/>
-          </a:p>
-        </p:txBody>
-      </p:sp>
-      <p:sp>
-        <p:nvSpPr>
-          <p:cNvPr id="7" name="Shape 5"/>
-          <p:cNvSpPr/>
-          <p:nvPr/>
-        </p:nvSpPr>
-        <p:spPr>
-          <a:xfrm>
-            <a:off x="4663440" y="1737360"/>
-            <a:ext cx="3794760" cy="749808"/>
-          </a:xfrm>
-          <a:prstGeom prst="roundRect">
-            <a:avLst>
-              <a:gd name="adj" fmla="val 9756"/>
-            </a:avLst>
-          </a:prstGeom>
-          <a:solidFill>
-            <a:srgbClr val="FFFFFF"/>
-          </a:solidFill>
-          <a:ln w="12700">
-            <a:solidFill>
-              <a:srgbClr val="DCD5C1"/>
-            </a:solidFill>
-            <a:prstDash val="solid"/>
-          </a:ln>
-        </p:spPr>
-      </p:sp>
-      <p:sp>
-        <p:nvSpPr>
-          <p:cNvPr id="8" name="Text 6"/>
-          <p:cNvSpPr txBox="1"/>
-          <p:nvPr/>
-        </p:nvSpPr>
-        <p:spPr>
-          <a:xfrm>
-            <a:off x="4791456" y="1901952"/>
-            <a:ext cx="420624" cy="420624"/>
-          </a:xfrm>
-          <a:prstGeom prst="roundRect">
-            <a:avLst>
-              <a:gd name="adj" fmla="val 50000"/>
-            </a:avLst>
-          </a:prstGeom>
-          <a:solidFill>
-            <a:srgbClr val="9AA3AB"/>
-          </a:solidFill>
-          <a:ln/>
-        </p:spPr>
-        <p:txBody>
-          <a:bodyPr wrap="square" lIns="0" tIns="0" rIns="0" bIns="0" rtlCol="0" anchor="ctr"/>
-          <a:lstStyle/>
-          <a:p>
-            <a:pPr algn="ctr" indent="0" marL="0">
-              <a:lnSpc>
-                <a:spcPct val="100000"/>
-              </a:lnSpc>
-              <a:buNone/>
-            </a:pPr>
-            <a:r>
-              <a:rPr lang="en-US" sz="1600" b="1" dirty="0">
-                <a:solidFill>
-                  <a:srgbClr val="FFFFFF"/>
-                </a:solidFill>
-                <a:latin typeface="Calibri" pitchFamily="34" charset="0"/>
-                <a:ea typeface="Calibri" pitchFamily="34" charset="-122"/>
-                <a:cs typeface="Calibri" pitchFamily="34" charset="-120"/>
-              </a:rPr>
-              <a:t>b</a:t>
-            </a:r>
-            <a:endParaRPr lang="en-US" sz="1600" dirty="0"/>
-          </a:p>
-        </p:txBody>
-      </p:sp>
-      <p:sp>
-        <p:nvSpPr>
-          <p:cNvPr id="9" name="Text 7"/>
-          <p:cNvSpPr txBox="1"/>
-          <p:nvPr/>
-        </p:nvSpPr>
-        <p:spPr>
-          <a:xfrm>
-            <a:off x="5321808" y="1773936"/>
-            <a:ext cx="3044952" cy="676656"/>
-          </a:xfrm>
-          <a:prstGeom prst="rect">
-            <a:avLst/>
-          </a:prstGeom>
-          <a:noFill/>
-          <a:ln/>
-        </p:spPr>
-        <p:txBody>
-          <a:bodyPr wrap="square" lIns="25400" tIns="25400" rIns="25400" bIns="25400" rtlCol="0" anchor="ctr"/>
-          <a:lstStyle/>
-          <a:p>
-            <a:pPr algn="l" indent="0" marL="0">
-              <a:lnSpc>
-                <a:spcPct val="100000"/>
-              </a:lnSpc>
-              <a:buNone/>
-            </a:pPr>
-            <a:r>
-              <a:rPr lang="en-US" sz="1400" dirty="0">
-                <a:solidFill>
-                  <a:srgbClr val="5B6770"/>
-                </a:solidFill>
-                <a:latin typeface="Calibri" pitchFamily="34" charset="0"/>
-                <a:ea typeface="Calibri" pitchFamily="34" charset="-122"/>
-                <a:cs typeface="Calibri" pitchFamily="34" charset="-120"/>
-              </a:rPr>
-              <a:t>De clube</a:t>
-            </a:r>
-            <a:endParaRPr lang="en-US" sz="1400" dirty="0"/>
-          </a:p>
-        </p:txBody>
-      </p:sp>
-      <p:sp>
-        <p:nvSpPr>
-          <p:cNvPr id="10" name="Shape 8"/>
-          <p:cNvSpPr/>
-          <p:nvPr/>
-        </p:nvSpPr>
-        <p:spPr>
-          <a:xfrm>
-            <a:off x="685800" y="2633472"/>
-            <a:ext cx="3794760" cy="749808"/>
-          </a:xfrm>
-          <a:prstGeom prst="roundRect">
-            <a:avLst>
-              <a:gd name="adj" fmla="val 9756"/>
-            </a:avLst>
-          </a:prstGeom>
-          <a:solidFill>
-            <a:srgbClr val="FFFFFF"/>
-          </a:solidFill>
-          <a:ln w="12700">
-            <a:solidFill>
-              <a:srgbClr val="DCD5C1"/>
-            </a:solidFill>
-            <a:prstDash val="solid"/>
-          </a:ln>
-        </p:spPr>
-      </p:sp>
-      <p:sp>
-        <p:nvSpPr>
-          <p:cNvPr id="11" name="Text 9"/>
-          <p:cNvSpPr txBox="1"/>
-          <p:nvPr/>
-        </p:nvSpPr>
-        <p:spPr>
-          <a:xfrm>
-            <a:off x="813816" y="2798064"/>
-            <a:ext cx="420624" cy="420624"/>
-          </a:xfrm>
-          <a:prstGeom prst="roundRect">
-            <a:avLst>
-              <a:gd name="adj" fmla="val 50000"/>
-            </a:avLst>
-          </a:prstGeom>
-          <a:solidFill>
-            <a:srgbClr val="9AA3AB"/>
-          </a:solidFill>
-          <a:ln/>
-        </p:spPr>
-        <p:txBody>
-          <a:bodyPr wrap="square" lIns="0" tIns="0" rIns="0" bIns="0" rtlCol="0" anchor="ctr"/>
-          <a:lstStyle/>
-          <a:p>
-            <a:pPr algn="ctr" indent="0" marL="0">
-              <a:lnSpc>
-                <a:spcPct val="100000"/>
-              </a:lnSpc>
-              <a:buNone/>
-            </a:pPr>
-            <a:r>
-              <a:rPr lang="en-US" sz="1600" b="1" dirty="0">
-                <a:solidFill>
-                  <a:srgbClr val="FFFFFF"/>
-                </a:solidFill>
-                <a:latin typeface="Calibri" pitchFamily="34" charset="0"/>
-                <a:ea typeface="Calibri" pitchFamily="34" charset="-122"/>
-                <a:cs typeface="Calibri" pitchFamily="34" charset="-120"/>
-              </a:rPr>
-              <a:t>c</a:t>
-            </a:r>
-            <a:endParaRPr lang="en-US" sz="1600" dirty="0"/>
-          </a:p>
-        </p:txBody>
-      </p:sp>
-      <p:sp>
-        <p:nvSpPr>
-          <p:cNvPr id="12" name="Text 10"/>
-          <p:cNvSpPr txBox="1"/>
-          <p:nvPr/>
-        </p:nvSpPr>
-        <p:spPr>
-          <a:xfrm>
-            <a:off x="1344168" y="2670048"/>
-            <a:ext cx="3044952" cy="676656"/>
-          </a:xfrm>
-          <a:prstGeom prst="rect">
-            <a:avLst/>
-          </a:prstGeom>
-          <a:noFill/>
-          <a:ln/>
-        </p:spPr>
-        <p:txBody>
-          <a:bodyPr wrap="square" lIns="25400" tIns="25400" rIns="25400" bIns="25400" rtlCol="0" anchor="ctr"/>
-          <a:lstStyle/>
-          <a:p>
-            <a:pPr algn="l" indent="0" marL="0">
-              <a:lnSpc>
-                <a:spcPct val="100000"/>
-              </a:lnSpc>
-              <a:buNone/>
-            </a:pPr>
-            <a:r>
-              <a:rPr lang="en-US" sz="1400" dirty="0">
-                <a:solidFill>
-                  <a:srgbClr val="5B6770"/>
-                </a:solidFill>
-                <a:latin typeface="Calibri" pitchFamily="34" charset="0"/>
-                <a:ea typeface="Calibri" pitchFamily="34" charset="-122"/>
-                <a:cs typeface="Calibri" pitchFamily="34" charset="-120"/>
-              </a:rPr>
-              <a:t>Comum</a:t>
-            </a:r>
-            <a:endParaRPr lang="en-US" sz="1400" dirty="0"/>
-          </a:p>
-        </p:txBody>
-      </p:sp>
-      <p:sp>
-        <p:nvSpPr>
-          <p:cNvPr id="13" name="Shape 11"/>
-          <p:cNvSpPr/>
-          <p:nvPr/>
-        </p:nvSpPr>
-        <p:spPr>
-          <a:xfrm>
-            <a:off x="4663440" y="2633472"/>
-            <a:ext cx="3794760" cy="749808"/>
-          </a:xfrm>
-          <a:prstGeom prst="roundRect">
-            <a:avLst>
-              <a:gd name="adj" fmla="val 9756"/>
-            </a:avLst>
-          </a:prstGeom>
-          <a:solidFill>
-            <a:srgbClr val="E3F2E8"/>
-          </a:solidFill>
-          <a:ln w="25400">
-            <a:solidFill>
-              <a:srgbClr val="2E7D4F"/>
-            </a:solidFill>
-            <a:prstDash val="solid"/>
-          </a:ln>
-        </p:spPr>
-      </p:sp>
-      <p:sp>
-        <p:nvSpPr>
-          <p:cNvPr id="14" name="Text 12"/>
-          <p:cNvSpPr txBox="1"/>
-          <p:nvPr/>
-        </p:nvSpPr>
-        <p:spPr>
-          <a:xfrm>
-            <a:off x="4791456" y="2798064"/>
-            <a:ext cx="420624" cy="420624"/>
-          </a:xfrm>
-          <a:prstGeom prst="roundRect">
-            <a:avLst>
-              <a:gd name="adj" fmla="val 50000"/>
-            </a:avLst>
-          </a:prstGeom>
-          <a:solidFill>
-            <a:srgbClr val="2E7D4F"/>
-          </a:solidFill>
-          <a:ln/>
-        </p:spPr>
-        <p:txBody>
-          <a:bodyPr wrap="square" lIns="0" tIns="0" rIns="0" bIns="0" rtlCol="0" anchor="ctr"/>
-          <a:lstStyle/>
-          <a:p>
-            <a:pPr algn="ctr" indent="0" marL="0">
-              <a:lnSpc>
-                <a:spcPct val="100000"/>
-              </a:lnSpc>
-              <a:buNone/>
-            </a:pPr>
-            <a:r>
-              <a:rPr lang="en-US" sz="1600" b="1" dirty="0">
-                <a:solidFill>
-                  <a:srgbClr val="FFFFFF"/>
-                </a:solidFill>
-                <a:latin typeface="Calibri" pitchFamily="34" charset="0"/>
-                <a:ea typeface="Calibri" pitchFamily="34" charset="-122"/>
-                <a:cs typeface="Calibri" pitchFamily="34" charset="-120"/>
-              </a:rPr>
-              <a:t>d</a:t>
-            </a:r>
-            <a:endParaRPr lang="en-US" sz="1600" dirty="0"/>
-          </a:p>
-        </p:txBody>
-      </p:sp>
-      <p:sp>
-        <p:nvSpPr>
-          <p:cNvPr id="15" name="Text 13"/>
-          <p:cNvSpPr txBox="1"/>
-          <p:nvPr/>
-        </p:nvSpPr>
-        <p:spPr>
-          <a:xfrm>
-            <a:off x="5321808" y="2670048"/>
-            <a:ext cx="3044952" cy="676656"/>
-          </a:xfrm>
-          <a:prstGeom prst="rect">
-            <a:avLst/>
-          </a:prstGeom>
-          <a:noFill/>
-          <a:ln/>
-        </p:spPr>
-        <p:txBody>
-          <a:bodyPr wrap="square" lIns="25400" tIns="25400" rIns="25400" bIns="25400" rtlCol="0" anchor="ctr"/>
-          <a:lstStyle/>
-          <a:p>
-            <a:pPr algn="l" indent="0" marL="0">
-              <a:lnSpc>
-                <a:spcPct val="100000"/>
-              </a:lnSpc>
-              <a:buNone/>
-            </a:pPr>
-            <a:r>
-              <a:rPr lang="en-US" sz="1400" b="1" dirty="0">
-                <a:solidFill>
-                  <a:srgbClr val="1F2A37"/>
-                </a:solidFill>
-                <a:latin typeface="Calibri" pitchFamily="34" charset="0"/>
-                <a:ea typeface="Calibri" pitchFamily="34" charset="-122"/>
-                <a:cs typeface="Calibri" pitchFamily="34" charset="-120"/>
-              </a:rPr>
-              <a:t>Público</a:t>
-            </a:r>
-            <a:endParaRPr lang="en-US" sz="1400" dirty="0"/>
-          </a:p>
-        </p:txBody>
-      </p:sp>
-      <p:sp>
-        <p:nvSpPr>
-          <p:cNvPr id="16" name="Text 14"/>
-          <p:cNvSpPr txBox="1"/>
-          <p:nvPr/>
-        </p:nvSpPr>
-        <p:spPr>
-          <a:xfrm>
-            <a:off x="685800" y="3566160"/>
-            <a:ext cx="7772400" cy="841248"/>
-          </a:xfrm>
-          <a:prstGeom prst="roundRect">
-            <a:avLst>
-              <a:gd name="adj" fmla="val 8696"/>
-            </a:avLst>
-          </a:prstGeom>
-          <a:solidFill>
-            <a:srgbClr val="E6F2F0"/>
-          </a:solidFill>
-          <a:ln/>
-        </p:spPr>
-        <p:txBody>
-          <a:bodyPr wrap="square" lIns="114300" tIns="114300" rIns="114300" bIns="114300" rtlCol="0" anchor="ctr"/>
-          <a:lstStyle/>
-          <a:p>
-            <a:pPr algn="l" indent="0" marL="0">
-              <a:lnSpc>
-                <a:spcPct val="100000"/>
-              </a:lnSpc>
-              <a:buNone/>
-            </a:pPr>
-            <a:r>
-              <a:rPr lang="en-US" sz="1350" b="1" dirty="0">
-                <a:solidFill>
-                  <a:srgbClr val="2E7D4F"/>
-                </a:solidFill>
-                <a:latin typeface="Calibri" pitchFamily="34" charset="0"/>
-                <a:ea typeface="Calibri" pitchFamily="34" charset="-122"/>
-                <a:cs typeface="Calibri" pitchFamily="34" charset="-120"/>
-              </a:rPr>
-              <a:t>Resposta: d) </a:t>
-            </a:r>
-            <a:pPr algn="l" indent="0" marL="0">
-              <a:lnSpc>
-                <a:spcPct val="100000"/>
-              </a:lnSpc>
-              <a:buNone/>
-            </a:pPr>
-            <a:r>
-              <a:rPr lang="en-US" sz="1350" dirty="0">
-                <a:solidFill>
-                  <a:srgbClr val="1F2A37"/>
-                </a:solidFill>
-                <a:latin typeface="Calibri" pitchFamily="34" charset="0"/>
-                <a:ea typeface="Calibri" pitchFamily="34" charset="-122"/>
-                <a:cs typeface="Calibri" pitchFamily="34" charset="-120"/>
-              </a:rPr>
-              <a:t>É não rival (todos usam ao mesmo tempo) e não excludente (ninguém é impedido de usar). Por isso o mercado não a oferece sozinho.</a:t>
-            </a:r>
-            <a:endParaRPr lang="en-US" sz="1350" dirty="0"/>
-          </a:p>
-        </p:txBody>
-      </p:sp>
-      <p:sp>
-        <p:nvSpPr>
-          <p:cNvPr id="17" name="Text 15"/>
-          <p:cNvSpPr txBox="1"/>
-          <p:nvPr/>
-        </p:nvSpPr>
-        <p:spPr>
-          <a:xfrm>
-            <a:off x="4206240" y="36576"/>
-            <a:ext cx="4800600" cy="219456"/>
-          </a:xfrm>
-          <a:prstGeom prst="rect">
-            <a:avLst/>
-          </a:prstGeom>
-          <a:noFill/>
-          <a:ln/>
-        </p:spPr>
-        <p:txBody>
-          <a:bodyPr wrap="square" lIns="0" tIns="0" rIns="0" bIns="0" rtlCol="0" anchor="ctr"/>
-          <a:lstStyle/>
-          <a:p>
-            <a:pPr algn="r" indent="0" marL="0">
-              <a:lnSpc>
-                <a:spcPct val="100000"/>
-              </a:lnSpc>
-              <a:buNone/>
-            </a:pPr>
-            <a:r>
-              <a:rPr lang="en-US" sz="950" dirty="0">
-                <a:solidFill>
-                  <a:srgbClr val="5B6770"/>
-                </a:solidFill>
-                <a:latin typeface="Calibri" pitchFamily="34" charset="0"/>
-                <a:ea typeface="Calibri" pitchFamily="34" charset="-122"/>
-                <a:cs typeface="Calibri" pitchFamily="34" charset="-120"/>
-              </a:rPr>
-              <a:t>Estado, Governo e Mercado · Unidade 1</a:t>
-            </a:r>
-            <a:endParaRPr lang="en-US" sz="950" dirty="0"/>
-          </a:p>
-        </p:txBody>
-      </p:sp>
-    </p:spTree>
-  </p:cSld>
-  <p:clrMapOvr>
-    <a:masterClrMapping/>
-  </p:clrMapOvr>
-</p:sld>
-</file>
-
-<file path=ppt/slides/slide41.xml><?xml version="1.0" encoding="utf-8"?>
-<p:sld xmlns:a="http://schemas.openxmlformats.org/drawingml/2006/main" xmlns:r="http://schemas.openxmlformats.org/officeDocument/2006/relationships" xmlns:p="http://schemas.openxmlformats.org/presentationml/2006/main">
-  <p:cSld name="Slide 41">
-    <p:bg>
-      <p:bgPr>
-        <a:blipFill dpi="0" rotWithShape="1">
-          <a:blip r:embed="rId1">
-            <a:lum/>
-          </a:blip>
-          <a:srcRect/>
-          <a:stretch>
-            <a:fillRect/>
-          </a:stretch>
-        </a:blipFill>
-        <a:effectLst/>
-      </p:bgPr>
-    </p:bg>
-    <p:spTree>
-      <p:nvGrpSpPr>
-        <p:cNvPr id="1" name=""/>
-        <p:cNvGrpSpPr/>
-        <p:nvPr/>
-      </p:nvGrpSpPr>
-      <p:grpSpPr>
-        <a:xfrm>
-          <a:off x="0" y="0"/>
-          <a:ext cx="0" cy="0"/>
-          <a:chOff x="0" y="0"/>
-          <a:chExt cx="0" cy="0"/>
-        </a:xfrm>
-      </p:grpSpPr>
-      <p:sp>
-        <p:nvSpPr>
-          <p:cNvPr id="2" name="Text 0"/>
-          <p:cNvSpPr txBox="1"/>
-          <p:nvPr/>
-        </p:nvSpPr>
-        <p:spPr>
-          <a:xfrm>
-            <a:off x="731520" y="274320"/>
-            <a:ext cx="7680960" cy="365760"/>
-          </a:xfrm>
-          <a:prstGeom prst="rect">
-            <a:avLst/>
-          </a:prstGeom>
-          <a:noFill/>
-          <a:ln/>
-        </p:spPr>
-        <p:txBody>
-          <a:bodyPr wrap="square" lIns="0" tIns="0" rIns="0" bIns="0" rtlCol="0" anchor="ctr"/>
-          <a:lstStyle/>
-          <a:p>
-            <a:pPr algn="ctr" indent="0" marL="0">
-              <a:lnSpc>
-                <a:spcPct val="100000"/>
-              </a:lnSpc>
-              <a:buNone/>
-            </a:pPr>
-            <a:r>
-              <a:rPr lang="en-US" sz="1250" b="1" dirty="0">
-                <a:solidFill>
-                  <a:srgbClr val="2A8C85"/>
-                </a:solidFill>
-                <a:latin typeface="Calibri" pitchFamily="34" charset="0"/>
-                <a:ea typeface="Calibri" pitchFamily="34" charset="-122"/>
-                <a:cs typeface="Calibri" pitchFamily="34" charset="-120"/>
-              </a:rPr>
-              <a:t>QUIZ DA UNIDADE 1 · PERGUNTA 4 DE 5</a:t>
-            </a:r>
-            <a:endParaRPr lang="en-US" sz="1250" dirty="0"/>
-          </a:p>
-        </p:txBody>
-      </p:sp>
-      <p:sp>
-        <p:nvSpPr>
-          <p:cNvPr id="3" name="Text 1"/>
-          <p:cNvSpPr txBox="1"/>
-          <p:nvPr/>
-        </p:nvSpPr>
-        <p:spPr>
-          <a:xfrm>
-            <a:off x="731520" y="658368"/>
-            <a:ext cx="7680960" cy="960120"/>
-          </a:xfrm>
-          <a:prstGeom prst="rect">
-            <a:avLst/>
-          </a:prstGeom>
-          <a:noFill/>
-          <a:ln/>
-        </p:spPr>
-        <p:txBody>
-          <a:bodyPr wrap="square" lIns="0" tIns="0" rIns="0" bIns="0" rtlCol="0" anchor="ctr"/>
-          <a:lstStyle/>
-          <a:p>
-            <a:pPr algn="ctr" indent="0" marL="0">
-              <a:lnSpc>
-                <a:spcPct val="100000"/>
-              </a:lnSpc>
-              <a:buNone/>
-            </a:pPr>
-            <a:r>
-              <a:rPr lang="en-US" sz="1900" b="1" dirty="0">
-                <a:solidFill>
-                  <a:srgbClr val="13294B"/>
-                </a:solidFill>
-                <a:latin typeface="Calibri" pitchFamily="34" charset="0"/>
-                <a:ea typeface="Calibri" pitchFamily="34" charset="-122"/>
-                <a:cs typeface="Calibri" pitchFamily="34" charset="-120"/>
-              </a:rPr>
-              <a:t>A fumaça das queimadas que prejudica a saúde de moradores de outras cidades é:</a:t>
-            </a:r>
-            <a:endParaRPr lang="en-US" sz="1900" dirty="0"/>
-          </a:p>
-        </p:txBody>
-      </p:sp>
-      <p:sp>
-        <p:nvSpPr>
-          <p:cNvPr id="4" name="Shape 2"/>
-          <p:cNvSpPr/>
-          <p:nvPr/>
-        </p:nvSpPr>
-        <p:spPr>
-          <a:xfrm>
-            <a:off x="685800" y="1737360"/>
-            <a:ext cx="3794760" cy="914400"/>
-          </a:xfrm>
-          <a:prstGeom prst="roundRect">
-            <a:avLst>
-              <a:gd name="adj" fmla="val 8000"/>
-            </a:avLst>
-          </a:prstGeom>
-          <a:solidFill>
-            <a:srgbClr val="FFFFFF"/>
-          </a:solidFill>
-          <a:ln w="12700">
-            <a:solidFill>
-              <a:srgbClr val="DCD5C1"/>
-            </a:solidFill>
-            <a:prstDash val="solid"/>
-          </a:ln>
-        </p:spPr>
-      </p:sp>
-      <p:sp>
-        <p:nvSpPr>
-          <p:cNvPr id="5" name="Text 3"/>
-          <p:cNvSpPr txBox="1"/>
-          <p:nvPr/>
-        </p:nvSpPr>
-        <p:spPr>
-          <a:xfrm>
-            <a:off x="813816" y="1984248"/>
-            <a:ext cx="420624" cy="420624"/>
-          </a:xfrm>
-          <a:prstGeom prst="roundRect">
-            <a:avLst>
-              <a:gd name="adj" fmla="val 50000"/>
-            </a:avLst>
-          </a:prstGeom>
-          <a:solidFill>
-            <a:srgbClr val="13294B"/>
-          </a:solidFill>
-          <a:ln/>
-        </p:spPr>
-        <p:txBody>
-          <a:bodyPr wrap="square" lIns="0" tIns="0" rIns="0" bIns="0" rtlCol="0" anchor="ctr"/>
-          <a:lstStyle/>
-          <a:p>
-            <a:pPr algn="ctr" indent="0" marL="0">
-              <a:lnSpc>
-                <a:spcPct val="100000"/>
-              </a:lnSpc>
-              <a:buNone/>
-            </a:pPr>
-            <a:r>
-              <a:rPr lang="en-US" sz="1600" b="1" dirty="0">
-                <a:solidFill>
-                  <a:srgbClr val="FFFFFF"/>
-                </a:solidFill>
-                <a:latin typeface="Calibri" pitchFamily="34" charset="0"/>
-                <a:ea typeface="Calibri" pitchFamily="34" charset="-122"/>
-                <a:cs typeface="Calibri" pitchFamily="34" charset="-120"/>
-              </a:rPr>
-              <a:t>a</a:t>
-            </a:r>
-            <a:endParaRPr lang="en-US" sz="1600" dirty="0"/>
-          </a:p>
-        </p:txBody>
-      </p:sp>
-      <p:sp>
-        <p:nvSpPr>
-          <p:cNvPr id="6" name="Text 4"/>
-          <p:cNvSpPr txBox="1"/>
-          <p:nvPr/>
-        </p:nvSpPr>
-        <p:spPr>
-          <a:xfrm>
-            <a:off x="1344168" y="1773936"/>
-            <a:ext cx="3044952" cy="841248"/>
-          </a:xfrm>
-          <a:prstGeom prst="rect">
-            <a:avLst/>
-          </a:prstGeom>
-          <a:noFill/>
-          <a:ln/>
-        </p:spPr>
-        <p:txBody>
-          <a:bodyPr wrap="square" lIns="25400" tIns="25400" rIns="25400" bIns="25400" rtlCol="0" anchor="ctr"/>
-          <a:lstStyle/>
-          <a:p>
-            <a:pPr algn="l" indent="0" marL="0">
-              <a:lnSpc>
-                <a:spcPct val="100000"/>
-              </a:lnSpc>
-              <a:buNone/>
-            </a:pPr>
-            <a:r>
-              <a:rPr lang="en-US" sz="1400" dirty="0">
-                <a:solidFill>
-                  <a:srgbClr val="1F2A37"/>
-                </a:solidFill>
-                <a:latin typeface="Calibri" pitchFamily="34" charset="0"/>
-                <a:ea typeface="Calibri" pitchFamily="34" charset="-122"/>
-                <a:cs typeface="Calibri" pitchFamily="34" charset="-120"/>
-              </a:rPr>
-              <a:t>Uma externalidade negativa</a:t>
-            </a:r>
-            <a:endParaRPr lang="en-US" sz="1400" dirty="0"/>
-          </a:p>
-        </p:txBody>
-      </p:sp>
-      <p:sp>
-        <p:nvSpPr>
-          <p:cNvPr id="7" name="Shape 5"/>
-          <p:cNvSpPr/>
-          <p:nvPr/>
-        </p:nvSpPr>
-        <p:spPr>
-          <a:xfrm>
-            <a:off x="4663440" y="1737360"/>
-            <a:ext cx="3794760" cy="914400"/>
-          </a:xfrm>
-          <a:prstGeom prst="roundRect">
-            <a:avLst>
-              <a:gd name="adj" fmla="val 8000"/>
-            </a:avLst>
-          </a:prstGeom>
-          <a:solidFill>
-            <a:srgbClr val="FFFFFF"/>
-          </a:solidFill>
-          <a:ln w="12700">
-            <a:solidFill>
-              <a:srgbClr val="DCD5C1"/>
-            </a:solidFill>
-            <a:prstDash val="solid"/>
-          </a:ln>
-        </p:spPr>
-      </p:sp>
-      <p:sp>
-        <p:nvSpPr>
-          <p:cNvPr id="8" name="Text 6"/>
-          <p:cNvSpPr txBox="1"/>
-          <p:nvPr/>
-        </p:nvSpPr>
-        <p:spPr>
-          <a:xfrm>
-            <a:off x="4791456" y="1984248"/>
-            <a:ext cx="420624" cy="420624"/>
-          </a:xfrm>
-          <a:prstGeom prst="roundRect">
-            <a:avLst>
-              <a:gd name="adj" fmla="val 50000"/>
-            </a:avLst>
-          </a:prstGeom>
-          <a:solidFill>
-            <a:srgbClr val="13294B"/>
-          </a:solidFill>
-          <a:ln/>
-        </p:spPr>
-        <p:txBody>
-          <a:bodyPr wrap="square" lIns="0" tIns="0" rIns="0" bIns="0" rtlCol="0" anchor="ctr"/>
-          <a:lstStyle/>
-          <a:p>
-            <a:pPr algn="ctr" indent="0" marL="0">
-              <a:lnSpc>
-                <a:spcPct val="100000"/>
-              </a:lnSpc>
-              <a:buNone/>
-            </a:pPr>
-            <a:r>
-              <a:rPr lang="en-US" sz="1600" b="1" dirty="0">
-                <a:solidFill>
-                  <a:srgbClr val="FFFFFF"/>
-                </a:solidFill>
-                <a:latin typeface="Calibri" pitchFamily="34" charset="0"/>
-                <a:ea typeface="Calibri" pitchFamily="34" charset="-122"/>
-                <a:cs typeface="Calibri" pitchFamily="34" charset="-120"/>
-              </a:rPr>
-              <a:t>b</a:t>
-            </a:r>
-            <a:endParaRPr lang="en-US" sz="1600" dirty="0"/>
-          </a:p>
-        </p:txBody>
-      </p:sp>
-      <p:sp>
-        <p:nvSpPr>
-          <p:cNvPr id="9" name="Text 7"/>
-          <p:cNvSpPr txBox="1"/>
-          <p:nvPr/>
-        </p:nvSpPr>
-        <p:spPr>
-          <a:xfrm>
-            <a:off x="5321808" y="1773936"/>
-            <a:ext cx="3044952" cy="841248"/>
-          </a:xfrm>
-          <a:prstGeom prst="rect">
-            <a:avLst/>
-          </a:prstGeom>
-          <a:noFill/>
-          <a:ln/>
-        </p:spPr>
-        <p:txBody>
-          <a:bodyPr wrap="square" lIns="25400" tIns="25400" rIns="25400" bIns="25400" rtlCol="0" anchor="ctr"/>
-          <a:lstStyle/>
-          <a:p>
-            <a:pPr algn="l" indent="0" marL="0">
-              <a:lnSpc>
-                <a:spcPct val="100000"/>
-              </a:lnSpc>
-              <a:buNone/>
-            </a:pPr>
-            <a:r>
-              <a:rPr lang="en-US" sz="1400" dirty="0">
-                <a:solidFill>
-                  <a:srgbClr val="1F2A37"/>
-                </a:solidFill>
-                <a:latin typeface="Calibri" pitchFamily="34" charset="0"/>
-                <a:ea typeface="Calibri" pitchFamily="34" charset="-122"/>
-                <a:cs typeface="Calibri" pitchFamily="34" charset="-120"/>
-              </a:rPr>
-              <a:t>Um bem público</a:t>
-            </a:r>
-            <a:endParaRPr lang="en-US" sz="1400" dirty="0"/>
-          </a:p>
-        </p:txBody>
-      </p:sp>
-      <p:sp>
-        <p:nvSpPr>
-          <p:cNvPr id="10" name="Shape 8"/>
-          <p:cNvSpPr/>
-          <p:nvPr/>
-        </p:nvSpPr>
-        <p:spPr>
-          <a:xfrm>
-            <a:off x="685800" y="2798064"/>
-            <a:ext cx="3794760" cy="914400"/>
-          </a:xfrm>
-          <a:prstGeom prst="roundRect">
-            <a:avLst>
-              <a:gd name="adj" fmla="val 8000"/>
-            </a:avLst>
-          </a:prstGeom>
-          <a:solidFill>
-            <a:srgbClr val="FFFFFF"/>
-          </a:solidFill>
-          <a:ln w="12700">
-            <a:solidFill>
-              <a:srgbClr val="DCD5C1"/>
-            </a:solidFill>
-            <a:prstDash val="solid"/>
-          </a:ln>
-        </p:spPr>
-      </p:sp>
-      <p:sp>
-        <p:nvSpPr>
-          <p:cNvPr id="11" name="Text 9"/>
-          <p:cNvSpPr txBox="1"/>
-          <p:nvPr/>
-        </p:nvSpPr>
-        <p:spPr>
-          <a:xfrm>
-            <a:off x="813816" y="3044952"/>
-            <a:ext cx="420624" cy="420624"/>
-          </a:xfrm>
-          <a:prstGeom prst="roundRect">
-            <a:avLst>
-              <a:gd name="adj" fmla="val 50000"/>
-            </a:avLst>
-          </a:prstGeom>
-          <a:solidFill>
-            <a:srgbClr val="13294B"/>
-          </a:solidFill>
-          <a:ln/>
-        </p:spPr>
-        <p:txBody>
-          <a:bodyPr wrap="square" lIns="0" tIns="0" rIns="0" bIns="0" rtlCol="0" anchor="ctr"/>
-          <a:lstStyle/>
-          <a:p>
-            <a:pPr algn="ctr" indent="0" marL="0">
-              <a:lnSpc>
-                <a:spcPct val="100000"/>
-              </a:lnSpc>
-              <a:buNone/>
-            </a:pPr>
-            <a:r>
-              <a:rPr lang="en-US" sz="1600" b="1" dirty="0">
-                <a:solidFill>
-                  <a:srgbClr val="FFFFFF"/>
-                </a:solidFill>
-                <a:latin typeface="Calibri" pitchFamily="34" charset="0"/>
-                <a:ea typeface="Calibri" pitchFamily="34" charset="-122"/>
-                <a:cs typeface="Calibri" pitchFamily="34" charset="-120"/>
-              </a:rPr>
-              <a:t>c</a:t>
-            </a:r>
-            <a:endParaRPr lang="en-US" sz="1600" dirty="0"/>
-          </a:p>
-        </p:txBody>
-      </p:sp>
-      <p:sp>
-        <p:nvSpPr>
-          <p:cNvPr id="12" name="Text 10"/>
-          <p:cNvSpPr txBox="1"/>
-          <p:nvPr/>
-        </p:nvSpPr>
-        <p:spPr>
-          <a:xfrm>
-            <a:off x="1344168" y="2834640"/>
-            <a:ext cx="3044952" cy="841248"/>
-          </a:xfrm>
-          <a:prstGeom prst="rect">
-            <a:avLst/>
-          </a:prstGeom>
-          <a:noFill/>
-          <a:ln/>
-        </p:spPr>
-        <p:txBody>
-          <a:bodyPr wrap="square" lIns="25400" tIns="25400" rIns="25400" bIns="25400" rtlCol="0" anchor="ctr"/>
-          <a:lstStyle/>
-          <a:p>
-            <a:pPr algn="l" indent="0" marL="0">
-              <a:lnSpc>
-                <a:spcPct val="100000"/>
-              </a:lnSpc>
-              <a:buNone/>
-            </a:pPr>
-            <a:r>
-              <a:rPr lang="en-US" sz="1400" dirty="0">
-                <a:solidFill>
-                  <a:srgbClr val="1F2A37"/>
-                </a:solidFill>
-                <a:latin typeface="Calibri" pitchFamily="34" charset="0"/>
-                <a:ea typeface="Calibri" pitchFamily="34" charset="-122"/>
-                <a:cs typeface="Calibri" pitchFamily="34" charset="-120"/>
-              </a:rPr>
-              <a:t>Assimetria de informação</a:t>
-            </a:r>
-            <a:endParaRPr lang="en-US" sz="1400" dirty="0"/>
-          </a:p>
-        </p:txBody>
-      </p:sp>
-      <p:sp>
-        <p:nvSpPr>
-          <p:cNvPr id="13" name="Shape 11"/>
-          <p:cNvSpPr/>
-          <p:nvPr/>
-        </p:nvSpPr>
-        <p:spPr>
-          <a:xfrm>
-            <a:off x="4663440" y="2798064"/>
-            <a:ext cx="3794760" cy="914400"/>
-          </a:xfrm>
-          <a:prstGeom prst="roundRect">
-            <a:avLst>
-              <a:gd name="adj" fmla="val 8000"/>
-            </a:avLst>
-          </a:prstGeom>
-          <a:solidFill>
-            <a:srgbClr val="FFFFFF"/>
-          </a:solidFill>
-          <a:ln w="12700">
-            <a:solidFill>
-              <a:srgbClr val="DCD5C1"/>
-            </a:solidFill>
-            <a:prstDash val="solid"/>
-          </a:ln>
-        </p:spPr>
-      </p:sp>
-      <p:sp>
-        <p:nvSpPr>
-          <p:cNvPr id="14" name="Text 12"/>
-          <p:cNvSpPr txBox="1"/>
-          <p:nvPr/>
-        </p:nvSpPr>
-        <p:spPr>
-          <a:xfrm>
-            <a:off x="4791456" y="3044952"/>
-            <a:ext cx="420624" cy="420624"/>
-          </a:xfrm>
-          <a:prstGeom prst="roundRect">
-            <a:avLst>
-              <a:gd name="adj" fmla="val 50000"/>
-            </a:avLst>
-          </a:prstGeom>
-          <a:solidFill>
-            <a:srgbClr val="13294B"/>
-          </a:solidFill>
-          <a:ln/>
-        </p:spPr>
-        <p:txBody>
-          <a:bodyPr wrap="square" lIns="0" tIns="0" rIns="0" bIns="0" rtlCol="0" anchor="ctr"/>
-          <a:lstStyle/>
-          <a:p>
-            <a:pPr algn="ctr" indent="0" marL="0">
-              <a:lnSpc>
-                <a:spcPct val="100000"/>
-              </a:lnSpc>
-              <a:buNone/>
-            </a:pPr>
-            <a:r>
-              <a:rPr lang="en-US" sz="1600" b="1" dirty="0">
-                <a:solidFill>
-                  <a:srgbClr val="FFFFFF"/>
-                </a:solidFill>
-                <a:latin typeface="Calibri" pitchFamily="34" charset="0"/>
-                <a:ea typeface="Calibri" pitchFamily="34" charset="-122"/>
-                <a:cs typeface="Calibri" pitchFamily="34" charset="-120"/>
-              </a:rPr>
-              <a:t>d</a:t>
-            </a:r>
-            <a:endParaRPr lang="en-US" sz="1600" dirty="0"/>
-          </a:p>
-        </p:txBody>
-      </p:sp>
-      <p:sp>
-        <p:nvSpPr>
-          <p:cNvPr id="15" name="Text 13"/>
-          <p:cNvSpPr txBox="1"/>
-          <p:nvPr/>
-        </p:nvSpPr>
-        <p:spPr>
-          <a:xfrm>
-            <a:off x="5321808" y="2834640"/>
-            <a:ext cx="3044952" cy="841248"/>
-          </a:xfrm>
-          <a:prstGeom prst="rect">
-            <a:avLst/>
-          </a:prstGeom>
-          <a:noFill/>
-          <a:ln/>
-        </p:spPr>
-        <p:txBody>
-          <a:bodyPr wrap="square" lIns="25400" tIns="25400" rIns="25400" bIns="25400" rtlCol="0" anchor="ctr"/>
-          <a:lstStyle/>
-          <a:p>
-            <a:pPr algn="l" indent="0" marL="0">
-              <a:lnSpc>
-                <a:spcPct val="100000"/>
-              </a:lnSpc>
-              <a:buNone/>
-            </a:pPr>
-            <a:r>
-              <a:rPr lang="en-US" sz="1400" dirty="0">
-                <a:solidFill>
-                  <a:srgbClr val="1F2A37"/>
-                </a:solidFill>
-                <a:latin typeface="Calibri" pitchFamily="34" charset="0"/>
-                <a:ea typeface="Calibri" pitchFamily="34" charset="-122"/>
-                <a:cs typeface="Calibri" pitchFamily="34" charset="-120"/>
-              </a:rPr>
-              <a:t>Um monopólio natural</a:t>
-            </a:r>
-            <a:endParaRPr lang="en-US" sz="1400" dirty="0"/>
-          </a:p>
-        </p:txBody>
-      </p:sp>
-      <p:sp>
-        <p:nvSpPr>
-          <p:cNvPr id="16" name="Text 14"/>
-          <p:cNvSpPr txBox="1"/>
-          <p:nvPr/>
-        </p:nvSpPr>
-        <p:spPr>
-          <a:xfrm>
-            <a:off x="4206240" y="36576"/>
-            <a:ext cx="4800600" cy="219456"/>
-          </a:xfrm>
-          <a:prstGeom prst="rect">
-            <a:avLst/>
-          </a:prstGeom>
-          <a:noFill/>
-          <a:ln/>
-        </p:spPr>
-        <p:txBody>
-          <a:bodyPr wrap="square" lIns="0" tIns="0" rIns="0" bIns="0" rtlCol="0" anchor="ctr"/>
-          <a:lstStyle/>
-          <a:p>
-            <a:pPr algn="r" indent="0" marL="0">
-              <a:lnSpc>
-                <a:spcPct val="100000"/>
-              </a:lnSpc>
-              <a:buNone/>
-            </a:pPr>
-            <a:r>
-              <a:rPr lang="en-US" sz="950" dirty="0">
-                <a:solidFill>
-                  <a:srgbClr val="5B6770"/>
-                </a:solidFill>
-                <a:latin typeface="Calibri" pitchFamily="34" charset="0"/>
-                <a:ea typeface="Calibri" pitchFamily="34" charset="-122"/>
-                <a:cs typeface="Calibri" pitchFamily="34" charset="-120"/>
-              </a:rPr>
-              <a:t>Estado, Governo e Mercado · Unidade 1</a:t>
-            </a:r>
-            <a:endParaRPr lang="en-US" sz="950" dirty="0"/>
-          </a:p>
-        </p:txBody>
-      </p:sp>
-    </p:spTree>
-  </p:cSld>
-  <p:clrMapOvr>
-    <a:masterClrMapping/>
-  </p:clrMapOvr>
-</p:sld>
-</file>
-
-<file path=ppt/slides/slide42.xml><?xml version="1.0" encoding="utf-8"?>
-<p:sld xmlns:a="http://schemas.openxmlformats.org/drawingml/2006/main" xmlns:r="http://schemas.openxmlformats.org/officeDocument/2006/relationships" xmlns:p="http://schemas.openxmlformats.org/presentationml/2006/main">
-  <p:cSld name="Slide 42">
-    <p:bg>
-      <p:bgPr>
-        <a:blipFill dpi="0" rotWithShape="1">
-          <a:blip r:embed="rId1">
-            <a:lum/>
-          </a:blip>
-          <a:srcRect/>
-          <a:stretch>
-            <a:fillRect/>
-          </a:stretch>
-        </a:blipFill>
-        <a:effectLst/>
-      </p:bgPr>
-    </p:bg>
-    <p:spTree>
-      <p:nvGrpSpPr>
-        <p:cNvPr id="1" name=""/>
-        <p:cNvGrpSpPr/>
-        <p:nvPr/>
-      </p:nvGrpSpPr>
-      <p:grpSpPr>
-        <a:xfrm>
-          <a:off x="0" y="0"/>
-          <a:ext cx="0" cy="0"/>
-          <a:chOff x="0" y="0"/>
-          <a:chExt cx="0" cy="0"/>
-        </a:xfrm>
-      </p:grpSpPr>
-      <p:sp>
-        <p:nvSpPr>
-          <p:cNvPr id="2" name="Text 0"/>
-          <p:cNvSpPr txBox="1"/>
-          <p:nvPr/>
-        </p:nvSpPr>
-        <p:spPr>
-          <a:xfrm>
-            <a:off x="731520" y="274320"/>
-            <a:ext cx="7680960" cy="365760"/>
-          </a:xfrm>
-          <a:prstGeom prst="rect">
-            <a:avLst/>
-          </a:prstGeom>
-          <a:noFill/>
-          <a:ln/>
-        </p:spPr>
-        <p:txBody>
-          <a:bodyPr wrap="square" lIns="0" tIns="0" rIns="0" bIns="0" rtlCol="0" anchor="ctr"/>
-          <a:lstStyle/>
-          <a:p>
-            <a:pPr algn="ctr" indent="0" marL="0">
-              <a:lnSpc>
-                <a:spcPct val="100000"/>
-              </a:lnSpc>
-              <a:buNone/>
-            </a:pPr>
-            <a:r>
-              <a:rPr lang="en-US" sz="1250" b="1" dirty="0">
-                <a:solidFill>
-                  <a:srgbClr val="2A8C85"/>
-                </a:solidFill>
-                <a:latin typeface="Calibri" pitchFamily="34" charset="0"/>
-                <a:ea typeface="Calibri" pitchFamily="34" charset="-122"/>
-                <a:cs typeface="Calibri" pitchFamily="34" charset="-120"/>
-              </a:rPr>
-              <a:t>QUIZ DA UNIDADE 1 · PERGUNTA 4 DE 5 · RESPOSTA</a:t>
-            </a:r>
-            <a:endParaRPr lang="en-US" sz="1250" dirty="0"/>
-          </a:p>
-        </p:txBody>
-      </p:sp>
-      <p:sp>
-        <p:nvSpPr>
-          <p:cNvPr id="3" name="Text 1"/>
-          <p:cNvSpPr txBox="1"/>
-          <p:nvPr/>
-        </p:nvSpPr>
-        <p:spPr>
-          <a:xfrm>
-            <a:off x="731520" y="658368"/>
-            <a:ext cx="7680960" cy="960120"/>
-          </a:xfrm>
-          <a:prstGeom prst="rect">
-            <a:avLst/>
-          </a:prstGeom>
-          <a:noFill/>
-          <a:ln/>
-        </p:spPr>
-        <p:txBody>
-          <a:bodyPr wrap="square" lIns="0" tIns="0" rIns="0" bIns="0" rtlCol="0" anchor="ctr"/>
-          <a:lstStyle/>
-          <a:p>
-            <a:pPr algn="ctr" indent="0" marL="0">
-              <a:lnSpc>
-                <a:spcPct val="100000"/>
-              </a:lnSpc>
-              <a:buNone/>
-            </a:pPr>
-            <a:r>
-              <a:rPr lang="en-US" sz="1900" b="1" dirty="0">
-                <a:solidFill>
-                  <a:srgbClr val="13294B"/>
-                </a:solidFill>
-                <a:latin typeface="Calibri" pitchFamily="34" charset="0"/>
-                <a:ea typeface="Calibri" pitchFamily="34" charset="-122"/>
-                <a:cs typeface="Calibri" pitchFamily="34" charset="-120"/>
-              </a:rPr>
-              <a:t>A fumaça das queimadas que prejudica a saúde de moradores de outras cidades é:</a:t>
-            </a:r>
-            <a:endParaRPr lang="en-US" sz="1900" dirty="0"/>
-          </a:p>
-        </p:txBody>
-      </p:sp>
-      <p:sp>
-        <p:nvSpPr>
-          <p:cNvPr id="4" name="Shape 2"/>
-          <p:cNvSpPr/>
-          <p:nvPr/>
-        </p:nvSpPr>
-        <p:spPr>
-          <a:xfrm>
-            <a:off x="685800" y="1737360"/>
-            <a:ext cx="3794760" cy="749808"/>
-          </a:xfrm>
-          <a:prstGeom prst="roundRect">
-            <a:avLst>
-              <a:gd name="adj" fmla="val 9756"/>
-            </a:avLst>
-          </a:prstGeom>
-          <a:solidFill>
-            <a:srgbClr val="E3F2E8"/>
-          </a:solidFill>
-          <a:ln w="25400">
-            <a:solidFill>
-              <a:srgbClr val="2E7D4F"/>
-            </a:solidFill>
-            <a:prstDash val="solid"/>
-          </a:ln>
-        </p:spPr>
-      </p:sp>
-      <p:sp>
-        <p:nvSpPr>
-          <p:cNvPr id="5" name="Text 3"/>
-          <p:cNvSpPr txBox="1"/>
-          <p:nvPr/>
-        </p:nvSpPr>
-        <p:spPr>
-          <a:xfrm>
-            <a:off x="813816" y="1901952"/>
-            <a:ext cx="420624" cy="420624"/>
-          </a:xfrm>
-          <a:prstGeom prst="roundRect">
-            <a:avLst>
-              <a:gd name="adj" fmla="val 50000"/>
-            </a:avLst>
-          </a:prstGeom>
-          <a:solidFill>
-            <a:srgbClr val="2E7D4F"/>
-          </a:solidFill>
-          <a:ln/>
-        </p:spPr>
-        <p:txBody>
-          <a:bodyPr wrap="square" lIns="0" tIns="0" rIns="0" bIns="0" rtlCol="0" anchor="ctr"/>
-          <a:lstStyle/>
-          <a:p>
-            <a:pPr algn="ctr" indent="0" marL="0">
-              <a:lnSpc>
-                <a:spcPct val="100000"/>
-              </a:lnSpc>
-              <a:buNone/>
-            </a:pPr>
-            <a:r>
-              <a:rPr lang="en-US" sz="1600" b="1" dirty="0">
-                <a:solidFill>
-                  <a:srgbClr val="FFFFFF"/>
-                </a:solidFill>
-                <a:latin typeface="Calibri" pitchFamily="34" charset="0"/>
-                <a:ea typeface="Calibri" pitchFamily="34" charset="-122"/>
-                <a:cs typeface="Calibri" pitchFamily="34" charset="-120"/>
-              </a:rPr>
-              <a:t>a</a:t>
-            </a:r>
-            <a:endParaRPr lang="en-US" sz="1600" dirty="0"/>
-          </a:p>
-        </p:txBody>
-      </p:sp>
-      <p:sp>
-        <p:nvSpPr>
-          <p:cNvPr id="6" name="Text 4"/>
-          <p:cNvSpPr txBox="1"/>
-          <p:nvPr/>
-        </p:nvSpPr>
-        <p:spPr>
-          <a:xfrm>
-            <a:off x="1344168" y="1773936"/>
-            <a:ext cx="3044952" cy="676656"/>
-          </a:xfrm>
-          <a:prstGeom prst="rect">
-            <a:avLst/>
-          </a:prstGeom>
-          <a:noFill/>
-          <a:ln/>
-        </p:spPr>
-        <p:txBody>
-          <a:bodyPr wrap="square" lIns="25400" tIns="25400" rIns="25400" bIns="25400" rtlCol="0" anchor="ctr"/>
-          <a:lstStyle/>
-          <a:p>
-            <a:pPr algn="l" indent="0" marL="0">
-              <a:lnSpc>
-                <a:spcPct val="100000"/>
-              </a:lnSpc>
-              <a:buNone/>
-            </a:pPr>
-            <a:r>
-              <a:rPr lang="en-US" sz="1400" b="1" dirty="0">
-                <a:solidFill>
-                  <a:srgbClr val="1F2A37"/>
-                </a:solidFill>
-                <a:latin typeface="Calibri" pitchFamily="34" charset="0"/>
-                <a:ea typeface="Calibri" pitchFamily="34" charset="-122"/>
-                <a:cs typeface="Calibri" pitchFamily="34" charset="-120"/>
-              </a:rPr>
-              <a:t>Uma externalidade negativa</a:t>
-            </a:r>
-            <a:endParaRPr lang="en-US" sz="1400" dirty="0"/>
-          </a:p>
-        </p:txBody>
-      </p:sp>
-      <p:sp>
-        <p:nvSpPr>
-          <p:cNvPr id="7" name="Shape 5"/>
-          <p:cNvSpPr/>
-          <p:nvPr/>
-        </p:nvSpPr>
-        <p:spPr>
-          <a:xfrm>
-            <a:off x="4663440" y="1737360"/>
-            <a:ext cx="3794760" cy="749808"/>
-          </a:xfrm>
-          <a:prstGeom prst="roundRect">
-            <a:avLst>
-              <a:gd name="adj" fmla="val 9756"/>
-            </a:avLst>
-          </a:prstGeom>
-          <a:solidFill>
-            <a:srgbClr val="FFFFFF"/>
-          </a:solidFill>
-          <a:ln w="12700">
-            <a:solidFill>
-              <a:srgbClr val="DCD5C1"/>
-            </a:solidFill>
-            <a:prstDash val="solid"/>
-          </a:ln>
-        </p:spPr>
-      </p:sp>
-      <p:sp>
-        <p:nvSpPr>
-          <p:cNvPr id="8" name="Text 6"/>
-          <p:cNvSpPr txBox="1"/>
-          <p:nvPr/>
-        </p:nvSpPr>
-        <p:spPr>
-          <a:xfrm>
-            <a:off x="4791456" y="1901952"/>
-            <a:ext cx="420624" cy="420624"/>
-          </a:xfrm>
-          <a:prstGeom prst="roundRect">
-            <a:avLst>
-              <a:gd name="adj" fmla="val 50000"/>
-            </a:avLst>
-          </a:prstGeom>
-          <a:solidFill>
-            <a:srgbClr val="9AA3AB"/>
-          </a:solidFill>
-          <a:ln/>
-        </p:spPr>
-        <p:txBody>
-          <a:bodyPr wrap="square" lIns="0" tIns="0" rIns="0" bIns="0" rtlCol="0" anchor="ctr"/>
-          <a:lstStyle/>
-          <a:p>
-            <a:pPr algn="ctr" indent="0" marL="0">
-              <a:lnSpc>
-                <a:spcPct val="100000"/>
-              </a:lnSpc>
-              <a:buNone/>
-            </a:pPr>
-            <a:r>
-              <a:rPr lang="en-US" sz="1600" b="1" dirty="0">
-                <a:solidFill>
-                  <a:srgbClr val="FFFFFF"/>
-                </a:solidFill>
-                <a:latin typeface="Calibri" pitchFamily="34" charset="0"/>
-                <a:ea typeface="Calibri" pitchFamily="34" charset="-122"/>
-                <a:cs typeface="Calibri" pitchFamily="34" charset="-120"/>
-              </a:rPr>
-              <a:t>b</a:t>
-            </a:r>
-            <a:endParaRPr lang="en-US" sz="1600" dirty="0"/>
-          </a:p>
-        </p:txBody>
-      </p:sp>
-      <p:sp>
-        <p:nvSpPr>
-          <p:cNvPr id="9" name="Text 7"/>
-          <p:cNvSpPr txBox="1"/>
-          <p:nvPr/>
-        </p:nvSpPr>
-        <p:spPr>
-          <a:xfrm>
-            <a:off x="5321808" y="1773936"/>
-            <a:ext cx="3044952" cy="676656"/>
-          </a:xfrm>
-          <a:prstGeom prst="rect">
-            <a:avLst/>
-          </a:prstGeom>
-          <a:noFill/>
-          <a:ln/>
-        </p:spPr>
-        <p:txBody>
-          <a:bodyPr wrap="square" lIns="25400" tIns="25400" rIns="25400" bIns="25400" rtlCol="0" anchor="ctr"/>
-          <a:lstStyle/>
-          <a:p>
-            <a:pPr algn="l" indent="0" marL="0">
-              <a:lnSpc>
-                <a:spcPct val="100000"/>
-              </a:lnSpc>
-              <a:buNone/>
-            </a:pPr>
-            <a:r>
-              <a:rPr lang="en-US" sz="1400" dirty="0">
-                <a:solidFill>
-                  <a:srgbClr val="5B6770"/>
-                </a:solidFill>
-                <a:latin typeface="Calibri" pitchFamily="34" charset="0"/>
-                <a:ea typeface="Calibri" pitchFamily="34" charset="-122"/>
-                <a:cs typeface="Calibri" pitchFamily="34" charset="-120"/>
-              </a:rPr>
-              <a:t>Um bem público</a:t>
-            </a:r>
-            <a:endParaRPr lang="en-US" sz="1400" dirty="0"/>
-          </a:p>
-        </p:txBody>
-      </p:sp>
-      <p:sp>
-        <p:nvSpPr>
-          <p:cNvPr id="10" name="Shape 8"/>
-          <p:cNvSpPr/>
-          <p:nvPr/>
-        </p:nvSpPr>
-        <p:spPr>
-          <a:xfrm>
-            <a:off x="685800" y="2633472"/>
-            <a:ext cx="3794760" cy="749808"/>
-          </a:xfrm>
-          <a:prstGeom prst="roundRect">
-            <a:avLst>
-              <a:gd name="adj" fmla="val 9756"/>
-            </a:avLst>
-          </a:prstGeom>
-          <a:solidFill>
-            <a:srgbClr val="FFFFFF"/>
-          </a:solidFill>
-          <a:ln w="12700">
-            <a:solidFill>
-              <a:srgbClr val="DCD5C1"/>
-            </a:solidFill>
-            <a:prstDash val="solid"/>
-          </a:ln>
-        </p:spPr>
-      </p:sp>
-      <p:sp>
-        <p:nvSpPr>
-          <p:cNvPr id="11" name="Text 9"/>
-          <p:cNvSpPr txBox="1"/>
-          <p:nvPr/>
-        </p:nvSpPr>
-        <p:spPr>
-          <a:xfrm>
-            <a:off x="813816" y="2798064"/>
-            <a:ext cx="420624" cy="420624"/>
-          </a:xfrm>
-          <a:prstGeom prst="roundRect">
-            <a:avLst>
-              <a:gd name="adj" fmla="val 50000"/>
-            </a:avLst>
-          </a:prstGeom>
-          <a:solidFill>
-            <a:srgbClr val="9AA3AB"/>
-          </a:solidFill>
-          <a:ln/>
-        </p:spPr>
-        <p:txBody>
-          <a:bodyPr wrap="square" lIns="0" tIns="0" rIns="0" bIns="0" rtlCol="0" anchor="ctr"/>
-          <a:lstStyle/>
-          <a:p>
-            <a:pPr algn="ctr" indent="0" marL="0">
-              <a:lnSpc>
-                <a:spcPct val="100000"/>
-              </a:lnSpc>
-              <a:buNone/>
-            </a:pPr>
-            <a:r>
-              <a:rPr lang="en-US" sz="1600" b="1" dirty="0">
-                <a:solidFill>
-                  <a:srgbClr val="FFFFFF"/>
-                </a:solidFill>
-                <a:latin typeface="Calibri" pitchFamily="34" charset="0"/>
-                <a:ea typeface="Calibri" pitchFamily="34" charset="-122"/>
-                <a:cs typeface="Calibri" pitchFamily="34" charset="-120"/>
-              </a:rPr>
-              <a:t>c</a:t>
-            </a:r>
-            <a:endParaRPr lang="en-US" sz="1600" dirty="0"/>
-          </a:p>
-        </p:txBody>
-      </p:sp>
-      <p:sp>
-        <p:nvSpPr>
-          <p:cNvPr id="12" name="Text 10"/>
-          <p:cNvSpPr txBox="1"/>
-          <p:nvPr/>
-        </p:nvSpPr>
-        <p:spPr>
-          <a:xfrm>
-            <a:off x="1344168" y="2670048"/>
-            <a:ext cx="3044952" cy="676656"/>
-          </a:xfrm>
-          <a:prstGeom prst="rect">
-            <a:avLst/>
-          </a:prstGeom>
-          <a:noFill/>
-          <a:ln/>
-        </p:spPr>
-        <p:txBody>
-          <a:bodyPr wrap="square" lIns="25400" tIns="25400" rIns="25400" bIns="25400" rtlCol="0" anchor="ctr"/>
-          <a:lstStyle/>
-          <a:p>
-            <a:pPr algn="l" indent="0" marL="0">
-              <a:lnSpc>
-                <a:spcPct val="100000"/>
-              </a:lnSpc>
-              <a:buNone/>
-            </a:pPr>
-            <a:r>
-              <a:rPr lang="en-US" sz="1400" dirty="0">
-                <a:solidFill>
-                  <a:srgbClr val="5B6770"/>
-                </a:solidFill>
-                <a:latin typeface="Calibri" pitchFamily="34" charset="0"/>
-                <a:ea typeface="Calibri" pitchFamily="34" charset="-122"/>
-                <a:cs typeface="Calibri" pitchFamily="34" charset="-120"/>
-              </a:rPr>
-              <a:t>Assimetria de informação</a:t>
-            </a:r>
-            <a:endParaRPr lang="en-US" sz="1400" dirty="0"/>
-          </a:p>
-        </p:txBody>
-      </p:sp>
-      <p:sp>
-        <p:nvSpPr>
-          <p:cNvPr id="13" name="Shape 11"/>
-          <p:cNvSpPr/>
-          <p:nvPr/>
-        </p:nvSpPr>
-        <p:spPr>
-          <a:xfrm>
-            <a:off x="4663440" y="2633472"/>
-            <a:ext cx="3794760" cy="749808"/>
-          </a:xfrm>
-          <a:prstGeom prst="roundRect">
-            <a:avLst>
-              <a:gd name="adj" fmla="val 9756"/>
-            </a:avLst>
-          </a:prstGeom>
-          <a:solidFill>
-            <a:srgbClr val="FFFFFF"/>
-          </a:solidFill>
-          <a:ln w="12700">
-            <a:solidFill>
-              <a:srgbClr val="DCD5C1"/>
-            </a:solidFill>
-            <a:prstDash val="solid"/>
-          </a:ln>
-        </p:spPr>
-      </p:sp>
-      <p:sp>
-        <p:nvSpPr>
-          <p:cNvPr id="14" name="Text 12"/>
-          <p:cNvSpPr txBox="1"/>
-          <p:nvPr/>
-        </p:nvSpPr>
-        <p:spPr>
-          <a:xfrm>
-            <a:off x="4791456" y="2798064"/>
-            <a:ext cx="420624" cy="420624"/>
-          </a:xfrm>
-          <a:prstGeom prst="roundRect">
-            <a:avLst>
-              <a:gd name="adj" fmla="val 50000"/>
-            </a:avLst>
-          </a:prstGeom>
-          <a:solidFill>
-            <a:srgbClr val="9AA3AB"/>
-          </a:solidFill>
-          <a:ln/>
-        </p:spPr>
-        <p:txBody>
-          <a:bodyPr wrap="square" lIns="0" tIns="0" rIns="0" bIns="0" rtlCol="0" anchor="ctr"/>
-          <a:lstStyle/>
-          <a:p>
-            <a:pPr algn="ctr" indent="0" marL="0">
-              <a:lnSpc>
-                <a:spcPct val="100000"/>
-              </a:lnSpc>
-              <a:buNone/>
-            </a:pPr>
-            <a:r>
-              <a:rPr lang="en-US" sz="1600" b="1" dirty="0">
-                <a:solidFill>
-                  <a:srgbClr val="FFFFFF"/>
-                </a:solidFill>
-                <a:latin typeface="Calibri" pitchFamily="34" charset="0"/>
-                <a:ea typeface="Calibri" pitchFamily="34" charset="-122"/>
-                <a:cs typeface="Calibri" pitchFamily="34" charset="-120"/>
-              </a:rPr>
-              <a:t>d</a:t>
-            </a:r>
-            <a:endParaRPr lang="en-US" sz="1600" dirty="0"/>
-          </a:p>
-        </p:txBody>
-      </p:sp>
-      <p:sp>
-        <p:nvSpPr>
-          <p:cNvPr id="15" name="Text 13"/>
-          <p:cNvSpPr txBox="1"/>
-          <p:nvPr/>
-        </p:nvSpPr>
-        <p:spPr>
-          <a:xfrm>
-            <a:off x="5321808" y="2670048"/>
-            <a:ext cx="3044952" cy="676656"/>
-          </a:xfrm>
-          <a:prstGeom prst="rect">
-            <a:avLst/>
-          </a:prstGeom>
-          <a:noFill/>
-          <a:ln/>
-        </p:spPr>
-        <p:txBody>
-          <a:bodyPr wrap="square" lIns="25400" tIns="25400" rIns="25400" bIns="25400" rtlCol="0" anchor="ctr"/>
-          <a:lstStyle/>
-          <a:p>
-            <a:pPr algn="l" indent="0" marL="0">
-              <a:lnSpc>
-                <a:spcPct val="100000"/>
-              </a:lnSpc>
-              <a:buNone/>
-            </a:pPr>
-            <a:r>
-              <a:rPr lang="en-US" sz="1400" dirty="0">
-                <a:solidFill>
-                  <a:srgbClr val="5B6770"/>
-                </a:solidFill>
-                <a:latin typeface="Calibri" pitchFamily="34" charset="0"/>
-                <a:ea typeface="Calibri" pitchFamily="34" charset="-122"/>
-                <a:cs typeface="Calibri" pitchFamily="34" charset="-120"/>
-              </a:rPr>
-              <a:t>Um monopólio natural</a:t>
-            </a:r>
-            <a:endParaRPr lang="en-US" sz="1400" dirty="0"/>
-          </a:p>
-        </p:txBody>
-      </p:sp>
-      <p:sp>
-        <p:nvSpPr>
-          <p:cNvPr id="16" name="Text 14"/>
-          <p:cNvSpPr txBox="1"/>
-          <p:nvPr/>
-        </p:nvSpPr>
-        <p:spPr>
-          <a:xfrm>
-            <a:off x="685800" y="3566160"/>
-            <a:ext cx="7772400" cy="841248"/>
-          </a:xfrm>
-          <a:prstGeom prst="roundRect">
-            <a:avLst>
-              <a:gd name="adj" fmla="val 8696"/>
-            </a:avLst>
-          </a:prstGeom>
-          <a:solidFill>
-            <a:srgbClr val="E6F2F0"/>
-          </a:solidFill>
-          <a:ln/>
-        </p:spPr>
-        <p:txBody>
-          <a:bodyPr wrap="square" lIns="114300" tIns="114300" rIns="114300" bIns="114300" rtlCol="0" anchor="ctr"/>
-          <a:lstStyle/>
-          <a:p>
-            <a:pPr algn="l" indent="0" marL="0">
-              <a:lnSpc>
-                <a:spcPct val="100000"/>
-              </a:lnSpc>
-              <a:buNone/>
-            </a:pPr>
-            <a:r>
-              <a:rPr lang="en-US" sz="1350" b="1" dirty="0">
-                <a:solidFill>
-                  <a:srgbClr val="2E7D4F"/>
-                </a:solidFill>
-                <a:latin typeface="Calibri" pitchFamily="34" charset="0"/>
-                <a:ea typeface="Calibri" pitchFamily="34" charset="-122"/>
-                <a:cs typeface="Calibri" pitchFamily="34" charset="-120"/>
-              </a:rPr>
-              <a:t>Resposta: a) </a:t>
-            </a:r>
-            <a:pPr algn="l" indent="0" marL="0">
-              <a:lnSpc>
-                <a:spcPct val="100000"/>
-              </a:lnSpc>
-              <a:buNone/>
-            </a:pPr>
-            <a:r>
-              <a:rPr lang="en-US" sz="1350" dirty="0">
-                <a:solidFill>
-                  <a:srgbClr val="1F2A37"/>
-                </a:solidFill>
-                <a:latin typeface="Calibri" pitchFamily="34" charset="0"/>
-                <a:ea typeface="Calibri" pitchFamily="34" charset="-122"/>
-                <a:cs typeface="Calibri" pitchFamily="34" charset="-120"/>
-              </a:rPr>
-              <a:t>É um custo imposto a terceiros que não aparece no preço de nenhum produto: uma externalidade negativa, que justifica fiscalização e multas.</a:t>
-            </a:r>
-            <a:endParaRPr lang="en-US" sz="1350" dirty="0"/>
-          </a:p>
-        </p:txBody>
-      </p:sp>
-      <p:sp>
-        <p:nvSpPr>
-          <p:cNvPr id="17" name="Text 15"/>
-          <p:cNvSpPr txBox="1"/>
-          <p:nvPr/>
-        </p:nvSpPr>
-        <p:spPr>
-          <a:xfrm>
-            <a:off x="4206240" y="36576"/>
-            <a:ext cx="4800600" cy="219456"/>
-          </a:xfrm>
-          <a:prstGeom prst="rect">
-            <a:avLst/>
-          </a:prstGeom>
-          <a:noFill/>
-          <a:ln/>
-        </p:spPr>
-        <p:txBody>
-          <a:bodyPr wrap="square" lIns="0" tIns="0" rIns="0" bIns="0" rtlCol="0" anchor="ctr"/>
-          <a:lstStyle/>
-          <a:p>
-            <a:pPr algn="r" indent="0" marL="0">
-              <a:lnSpc>
-                <a:spcPct val="100000"/>
-              </a:lnSpc>
-              <a:buNone/>
-            </a:pPr>
-            <a:r>
-              <a:rPr lang="en-US" sz="950" dirty="0">
-                <a:solidFill>
-                  <a:srgbClr val="5B6770"/>
-                </a:solidFill>
-                <a:latin typeface="Calibri" pitchFamily="34" charset="0"/>
-                <a:ea typeface="Calibri" pitchFamily="34" charset="-122"/>
-                <a:cs typeface="Calibri" pitchFamily="34" charset="-120"/>
-              </a:rPr>
-              <a:t>Estado, Governo e Mercado · Unidade 1</a:t>
-            </a:r>
-            <a:endParaRPr lang="en-US" sz="950" dirty="0"/>
-          </a:p>
-        </p:txBody>
-      </p:sp>
-    </p:spTree>
-  </p:cSld>
-  <p:clrMapOvr>
-    <a:masterClrMapping/>
-  </p:clrMapOvr>
-</p:sld>
-</file>
-
-<file path=ppt/slides/slide43.xml><?xml version="1.0" encoding="utf-8"?>
-<p:sld xmlns:a="http://schemas.openxmlformats.org/drawingml/2006/main" xmlns:r="http://schemas.openxmlformats.org/officeDocument/2006/relationships" xmlns:p="http://schemas.openxmlformats.org/presentationml/2006/main">
-  <p:cSld name="Slide 43">
-    <p:bg>
-      <p:bgPr>
-        <a:blipFill dpi="0" rotWithShape="1">
-          <a:blip r:embed="rId1">
-            <a:lum/>
-          </a:blip>
-          <a:srcRect/>
-          <a:stretch>
-            <a:fillRect/>
-          </a:stretch>
-        </a:blipFill>
-        <a:effectLst/>
-      </p:bgPr>
-    </p:bg>
-    <p:spTree>
-      <p:nvGrpSpPr>
-        <p:cNvPr id="1" name=""/>
-        <p:cNvGrpSpPr/>
-        <p:nvPr/>
-      </p:nvGrpSpPr>
-      <p:grpSpPr>
-        <a:xfrm>
-          <a:off x="0" y="0"/>
-          <a:ext cx="0" cy="0"/>
-          <a:chOff x="0" y="0"/>
-          <a:chExt cx="0" cy="0"/>
-        </a:xfrm>
-      </p:grpSpPr>
-      <p:sp>
-        <p:nvSpPr>
-          <p:cNvPr id="2" name="Text 0"/>
-          <p:cNvSpPr txBox="1"/>
-          <p:nvPr/>
-        </p:nvSpPr>
-        <p:spPr>
-          <a:xfrm>
-            <a:off x="731520" y="274320"/>
-            <a:ext cx="7680960" cy="365760"/>
-          </a:xfrm>
-          <a:prstGeom prst="rect">
-            <a:avLst/>
-          </a:prstGeom>
-          <a:noFill/>
-          <a:ln/>
-        </p:spPr>
-        <p:txBody>
-          <a:bodyPr wrap="square" lIns="0" tIns="0" rIns="0" bIns="0" rtlCol="0" anchor="ctr"/>
-          <a:lstStyle/>
-          <a:p>
-            <a:pPr algn="ctr" indent="0" marL="0">
-              <a:lnSpc>
-                <a:spcPct val="100000"/>
-              </a:lnSpc>
-              <a:buNone/>
-            </a:pPr>
-            <a:r>
-              <a:rPr lang="en-US" sz="1250" b="1" dirty="0">
-                <a:solidFill>
-                  <a:srgbClr val="2A8C85"/>
-                </a:solidFill>
-                <a:latin typeface="Calibri" pitchFamily="34" charset="0"/>
-                <a:ea typeface="Calibri" pitchFamily="34" charset="-122"/>
-                <a:cs typeface="Calibri" pitchFamily="34" charset="-120"/>
-              </a:rPr>
-              <a:t>QUIZ DA UNIDADE 1 · PERGUNTA 5 DE 5</a:t>
-            </a:r>
-            <a:endParaRPr lang="en-US" sz="1250" dirty="0"/>
-          </a:p>
-        </p:txBody>
-      </p:sp>
-      <p:sp>
-        <p:nvSpPr>
-          <p:cNvPr id="3" name="Text 1"/>
-          <p:cNvSpPr txBox="1"/>
-          <p:nvPr/>
-        </p:nvSpPr>
-        <p:spPr>
-          <a:xfrm>
-            <a:off x="731520" y="658368"/>
-            <a:ext cx="7680960" cy="960120"/>
-          </a:xfrm>
-          <a:prstGeom prst="rect">
-            <a:avLst/>
-          </a:prstGeom>
-          <a:noFill/>
-          <a:ln/>
-        </p:spPr>
-        <p:txBody>
-          <a:bodyPr wrap="square" lIns="0" tIns="0" rIns="0" bIns="0" rtlCol="0" anchor="ctr"/>
-          <a:lstStyle/>
-          <a:p>
-            <a:pPr algn="ctr" indent="0" marL="0">
-              <a:lnSpc>
-                <a:spcPct val="100000"/>
-              </a:lnSpc>
-              <a:buNone/>
-            </a:pPr>
-            <a:r>
-              <a:rPr lang="en-US" sz="1900" b="1" dirty="0">
-                <a:solidFill>
-                  <a:srgbClr val="13294B"/>
-                </a:solidFill>
-                <a:latin typeface="Calibri" pitchFamily="34" charset="0"/>
-                <a:ea typeface="Calibri" pitchFamily="34" charset="-122"/>
-                <a:cs typeface="Calibri" pitchFamily="34" charset="-120"/>
-              </a:rPr>
-              <a:t>IPTU progressivo e tarifa social de água cumprem qual função econômica do Estado?</a:t>
-            </a:r>
-            <a:endParaRPr lang="en-US" sz="1900" dirty="0"/>
-          </a:p>
-        </p:txBody>
-      </p:sp>
-      <p:sp>
-        <p:nvSpPr>
-          <p:cNvPr id="4" name="Shape 2"/>
-          <p:cNvSpPr/>
-          <p:nvPr/>
-        </p:nvSpPr>
-        <p:spPr>
-          <a:xfrm>
-            <a:off x="685800" y="1737360"/>
-            <a:ext cx="3794760" cy="914400"/>
-          </a:xfrm>
-          <a:prstGeom prst="roundRect">
-            <a:avLst>
-              <a:gd name="adj" fmla="val 8000"/>
-            </a:avLst>
-          </a:prstGeom>
-          <a:solidFill>
-            <a:srgbClr val="FFFFFF"/>
-          </a:solidFill>
-          <a:ln w="12700">
-            <a:solidFill>
-              <a:srgbClr val="DCD5C1"/>
-            </a:solidFill>
-            <a:prstDash val="solid"/>
-          </a:ln>
-        </p:spPr>
-      </p:sp>
-      <p:sp>
-        <p:nvSpPr>
-          <p:cNvPr id="5" name="Text 3"/>
-          <p:cNvSpPr txBox="1"/>
-          <p:nvPr/>
-        </p:nvSpPr>
-        <p:spPr>
-          <a:xfrm>
-            <a:off x="813816" y="1984248"/>
-            <a:ext cx="420624" cy="420624"/>
-          </a:xfrm>
-          <a:prstGeom prst="roundRect">
-            <a:avLst>
-              <a:gd name="adj" fmla="val 50000"/>
-            </a:avLst>
-          </a:prstGeom>
-          <a:solidFill>
-            <a:srgbClr val="13294B"/>
-          </a:solidFill>
-          <a:ln/>
-        </p:spPr>
-        <p:txBody>
-          <a:bodyPr wrap="square" lIns="0" tIns="0" rIns="0" bIns="0" rtlCol="0" anchor="ctr"/>
-          <a:lstStyle/>
-          <a:p>
-            <a:pPr algn="ctr" indent="0" marL="0">
-              <a:lnSpc>
-                <a:spcPct val="100000"/>
-              </a:lnSpc>
-              <a:buNone/>
-            </a:pPr>
-            <a:r>
-              <a:rPr lang="en-US" sz="1600" b="1" dirty="0">
-                <a:solidFill>
-                  <a:srgbClr val="FFFFFF"/>
-                </a:solidFill>
-                <a:latin typeface="Calibri" pitchFamily="34" charset="0"/>
-                <a:ea typeface="Calibri" pitchFamily="34" charset="-122"/>
-                <a:cs typeface="Calibri" pitchFamily="34" charset="-120"/>
-              </a:rPr>
-              <a:t>a</a:t>
-            </a:r>
-            <a:endParaRPr lang="en-US" sz="1600" dirty="0"/>
-          </a:p>
-        </p:txBody>
-      </p:sp>
-      <p:sp>
-        <p:nvSpPr>
-          <p:cNvPr id="6" name="Text 4"/>
-          <p:cNvSpPr txBox="1"/>
-          <p:nvPr/>
-        </p:nvSpPr>
-        <p:spPr>
-          <a:xfrm>
-            <a:off x="1344168" y="1773936"/>
-            <a:ext cx="3044952" cy="841248"/>
-          </a:xfrm>
-          <a:prstGeom prst="rect">
-            <a:avLst/>
-          </a:prstGeom>
-          <a:noFill/>
-          <a:ln/>
-        </p:spPr>
-        <p:txBody>
-          <a:bodyPr wrap="square" lIns="25400" tIns="25400" rIns="25400" bIns="25400" rtlCol="0" anchor="ctr"/>
-          <a:lstStyle/>
-          <a:p>
-            <a:pPr algn="l" indent="0" marL="0">
-              <a:lnSpc>
-                <a:spcPct val="100000"/>
-              </a:lnSpc>
-              <a:buNone/>
-            </a:pPr>
-            <a:r>
-              <a:rPr lang="en-US" sz="1400" dirty="0">
-                <a:solidFill>
-                  <a:srgbClr val="1F2A37"/>
-                </a:solidFill>
-                <a:latin typeface="Calibri" pitchFamily="34" charset="0"/>
-                <a:ea typeface="Calibri" pitchFamily="34" charset="-122"/>
-                <a:cs typeface="Calibri" pitchFamily="34" charset="-120"/>
-              </a:rPr>
-              <a:t>Alocativa</a:t>
-            </a:r>
-            <a:endParaRPr lang="en-US" sz="1400" dirty="0"/>
-          </a:p>
-        </p:txBody>
-      </p:sp>
-      <p:sp>
-        <p:nvSpPr>
-          <p:cNvPr id="7" name="Shape 5"/>
-          <p:cNvSpPr/>
-          <p:nvPr/>
-        </p:nvSpPr>
-        <p:spPr>
-          <a:xfrm>
-            <a:off x="4663440" y="1737360"/>
-            <a:ext cx="3794760" cy="914400"/>
-          </a:xfrm>
-          <a:prstGeom prst="roundRect">
-            <a:avLst>
-              <a:gd name="adj" fmla="val 8000"/>
-            </a:avLst>
-          </a:prstGeom>
-          <a:solidFill>
-            <a:srgbClr val="FFFFFF"/>
-          </a:solidFill>
-          <a:ln w="12700">
-            <a:solidFill>
-              <a:srgbClr val="DCD5C1"/>
-            </a:solidFill>
-            <a:prstDash val="solid"/>
-          </a:ln>
-        </p:spPr>
-      </p:sp>
-      <p:sp>
-        <p:nvSpPr>
-          <p:cNvPr id="8" name="Text 6"/>
-          <p:cNvSpPr txBox="1"/>
-          <p:nvPr/>
-        </p:nvSpPr>
-        <p:spPr>
-          <a:xfrm>
-            <a:off x="4791456" y="1984248"/>
-            <a:ext cx="420624" cy="420624"/>
-          </a:xfrm>
-          <a:prstGeom prst="roundRect">
-            <a:avLst>
-              <a:gd name="adj" fmla="val 50000"/>
-            </a:avLst>
-          </a:prstGeom>
-          <a:solidFill>
-            <a:srgbClr val="13294B"/>
-          </a:solidFill>
-          <a:ln/>
-        </p:spPr>
-        <p:txBody>
-          <a:bodyPr wrap="square" lIns="0" tIns="0" rIns="0" bIns="0" rtlCol="0" anchor="ctr"/>
-          <a:lstStyle/>
-          <a:p>
-            <a:pPr algn="ctr" indent="0" marL="0">
-              <a:lnSpc>
-                <a:spcPct val="100000"/>
-              </a:lnSpc>
-              <a:buNone/>
-            </a:pPr>
-            <a:r>
-              <a:rPr lang="en-US" sz="1600" b="1" dirty="0">
-                <a:solidFill>
-                  <a:srgbClr val="FFFFFF"/>
-                </a:solidFill>
-                <a:latin typeface="Calibri" pitchFamily="34" charset="0"/>
-                <a:ea typeface="Calibri" pitchFamily="34" charset="-122"/>
-                <a:cs typeface="Calibri" pitchFamily="34" charset="-120"/>
-              </a:rPr>
-              <a:t>b</a:t>
-            </a:r>
-            <a:endParaRPr lang="en-US" sz="1600" dirty="0"/>
-          </a:p>
-        </p:txBody>
-      </p:sp>
-      <p:sp>
-        <p:nvSpPr>
-          <p:cNvPr id="9" name="Text 7"/>
-          <p:cNvSpPr txBox="1"/>
-          <p:nvPr/>
-        </p:nvSpPr>
-        <p:spPr>
-          <a:xfrm>
-            <a:off x="5321808" y="1773936"/>
-            <a:ext cx="3044952" cy="841248"/>
-          </a:xfrm>
-          <a:prstGeom prst="rect">
-            <a:avLst/>
-          </a:prstGeom>
-          <a:noFill/>
-          <a:ln/>
-        </p:spPr>
-        <p:txBody>
-          <a:bodyPr wrap="square" lIns="25400" tIns="25400" rIns="25400" bIns="25400" rtlCol="0" anchor="ctr"/>
-          <a:lstStyle/>
-          <a:p>
-            <a:pPr algn="l" indent="0" marL="0">
-              <a:lnSpc>
-                <a:spcPct val="100000"/>
-              </a:lnSpc>
-              <a:buNone/>
-            </a:pPr>
-            <a:r>
-              <a:rPr lang="en-US" sz="1400" dirty="0">
-                <a:solidFill>
-                  <a:srgbClr val="1F2A37"/>
-                </a:solidFill>
-                <a:latin typeface="Calibri" pitchFamily="34" charset="0"/>
-                <a:ea typeface="Calibri" pitchFamily="34" charset="-122"/>
-                <a:cs typeface="Calibri" pitchFamily="34" charset="-120"/>
-              </a:rPr>
-              <a:t>Distributiva</a:t>
-            </a:r>
-            <a:endParaRPr lang="en-US" sz="1400" dirty="0"/>
-          </a:p>
-        </p:txBody>
-      </p:sp>
-      <p:sp>
-        <p:nvSpPr>
-          <p:cNvPr id="10" name="Shape 8"/>
-          <p:cNvSpPr/>
-          <p:nvPr/>
-        </p:nvSpPr>
-        <p:spPr>
-          <a:xfrm>
-            <a:off x="685800" y="2798064"/>
-            <a:ext cx="3794760" cy="914400"/>
-          </a:xfrm>
-          <a:prstGeom prst="roundRect">
-            <a:avLst>
-              <a:gd name="adj" fmla="val 8000"/>
-            </a:avLst>
-          </a:prstGeom>
-          <a:solidFill>
-            <a:srgbClr val="FFFFFF"/>
-          </a:solidFill>
-          <a:ln w="12700">
-            <a:solidFill>
-              <a:srgbClr val="DCD5C1"/>
-            </a:solidFill>
-            <a:prstDash val="solid"/>
-          </a:ln>
-        </p:spPr>
-      </p:sp>
-      <p:sp>
-        <p:nvSpPr>
-          <p:cNvPr id="11" name="Text 9"/>
-          <p:cNvSpPr txBox="1"/>
-          <p:nvPr/>
-        </p:nvSpPr>
-        <p:spPr>
-          <a:xfrm>
-            <a:off x="813816" y="3044952"/>
-            <a:ext cx="420624" cy="420624"/>
-          </a:xfrm>
-          <a:prstGeom prst="roundRect">
-            <a:avLst>
-              <a:gd name="adj" fmla="val 50000"/>
-            </a:avLst>
-          </a:prstGeom>
-          <a:solidFill>
-            <a:srgbClr val="13294B"/>
-          </a:solidFill>
-          <a:ln/>
-        </p:spPr>
-        <p:txBody>
-          <a:bodyPr wrap="square" lIns="0" tIns="0" rIns="0" bIns="0" rtlCol="0" anchor="ctr"/>
-          <a:lstStyle/>
-          <a:p>
-            <a:pPr algn="ctr" indent="0" marL="0">
-              <a:lnSpc>
-                <a:spcPct val="100000"/>
-              </a:lnSpc>
-              <a:buNone/>
-            </a:pPr>
-            <a:r>
-              <a:rPr lang="en-US" sz="1600" b="1" dirty="0">
-                <a:solidFill>
-                  <a:srgbClr val="FFFFFF"/>
-                </a:solidFill>
-                <a:latin typeface="Calibri" pitchFamily="34" charset="0"/>
-                <a:ea typeface="Calibri" pitchFamily="34" charset="-122"/>
-                <a:cs typeface="Calibri" pitchFamily="34" charset="-120"/>
-              </a:rPr>
-              <a:t>c</a:t>
-            </a:r>
-            <a:endParaRPr lang="en-US" sz="1600" dirty="0"/>
-          </a:p>
-        </p:txBody>
-      </p:sp>
-      <p:sp>
-        <p:nvSpPr>
-          <p:cNvPr id="12" name="Text 10"/>
-          <p:cNvSpPr txBox="1"/>
-          <p:nvPr/>
-        </p:nvSpPr>
-        <p:spPr>
-          <a:xfrm>
-            <a:off x="1344168" y="2834640"/>
-            <a:ext cx="3044952" cy="841248"/>
-          </a:xfrm>
-          <a:prstGeom prst="rect">
-            <a:avLst/>
-          </a:prstGeom>
-          <a:noFill/>
-          <a:ln/>
-        </p:spPr>
-        <p:txBody>
-          <a:bodyPr wrap="square" lIns="25400" tIns="25400" rIns="25400" bIns="25400" rtlCol="0" anchor="ctr"/>
-          <a:lstStyle/>
-          <a:p>
-            <a:pPr algn="l" indent="0" marL="0">
-              <a:lnSpc>
-                <a:spcPct val="100000"/>
-              </a:lnSpc>
-              <a:buNone/>
-            </a:pPr>
-            <a:r>
-              <a:rPr lang="en-US" sz="1400" dirty="0">
-                <a:solidFill>
-                  <a:srgbClr val="1F2A37"/>
-                </a:solidFill>
-                <a:latin typeface="Calibri" pitchFamily="34" charset="0"/>
-                <a:ea typeface="Calibri" pitchFamily="34" charset="-122"/>
-                <a:cs typeface="Calibri" pitchFamily="34" charset="-120"/>
-              </a:rPr>
-              <a:t>Estabilizadora</a:t>
-            </a:r>
-            <a:endParaRPr lang="en-US" sz="1400" dirty="0"/>
-          </a:p>
-        </p:txBody>
-      </p:sp>
-      <p:sp>
-        <p:nvSpPr>
-          <p:cNvPr id="13" name="Shape 11"/>
-          <p:cNvSpPr/>
-          <p:nvPr/>
-        </p:nvSpPr>
-        <p:spPr>
-          <a:xfrm>
-            <a:off x="4663440" y="2798064"/>
-            <a:ext cx="3794760" cy="914400"/>
-          </a:xfrm>
-          <a:prstGeom prst="roundRect">
-            <a:avLst>
-              <a:gd name="adj" fmla="val 8000"/>
-            </a:avLst>
-          </a:prstGeom>
-          <a:solidFill>
-            <a:srgbClr val="FFFFFF"/>
-          </a:solidFill>
-          <a:ln w="12700">
-            <a:solidFill>
-              <a:srgbClr val="DCD5C1"/>
-            </a:solidFill>
-            <a:prstDash val="solid"/>
-          </a:ln>
-        </p:spPr>
-      </p:sp>
-      <p:sp>
-        <p:nvSpPr>
-          <p:cNvPr id="14" name="Text 12"/>
-          <p:cNvSpPr txBox="1"/>
-          <p:nvPr/>
-        </p:nvSpPr>
-        <p:spPr>
-          <a:xfrm>
-            <a:off x="4791456" y="3044952"/>
-            <a:ext cx="420624" cy="420624"/>
-          </a:xfrm>
-          <a:prstGeom prst="roundRect">
-            <a:avLst>
-              <a:gd name="adj" fmla="val 50000"/>
-            </a:avLst>
-          </a:prstGeom>
-          <a:solidFill>
-            <a:srgbClr val="13294B"/>
-          </a:solidFill>
-          <a:ln/>
-        </p:spPr>
-        <p:txBody>
-          <a:bodyPr wrap="square" lIns="0" tIns="0" rIns="0" bIns="0" rtlCol="0" anchor="ctr"/>
-          <a:lstStyle/>
-          <a:p>
-            <a:pPr algn="ctr" indent="0" marL="0">
-              <a:lnSpc>
-                <a:spcPct val="100000"/>
-              </a:lnSpc>
-              <a:buNone/>
-            </a:pPr>
-            <a:r>
-              <a:rPr lang="en-US" sz="1600" b="1" dirty="0">
-                <a:solidFill>
-                  <a:srgbClr val="FFFFFF"/>
-                </a:solidFill>
-                <a:latin typeface="Calibri" pitchFamily="34" charset="0"/>
-                <a:ea typeface="Calibri" pitchFamily="34" charset="-122"/>
-                <a:cs typeface="Calibri" pitchFamily="34" charset="-120"/>
-              </a:rPr>
-              <a:t>d</a:t>
-            </a:r>
-            <a:endParaRPr lang="en-US" sz="1600" dirty="0"/>
-          </a:p>
-        </p:txBody>
-      </p:sp>
-      <p:sp>
-        <p:nvSpPr>
-          <p:cNvPr id="15" name="Text 13"/>
-          <p:cNvSpPr txBox="1"/>
-          <p:nvPr/>
-        </p:nvSpPr>
-        <p:spPr>
-          <a:xfrm>
-            <a:off x="5321808" y="2834640"/>
-            <a:ext cx="3044952" cy="841248"/>
-          </a:xfrm>
-          <a:prstGeom prst="rect">
-            <a:avLst/>
-          </a:prstGeom>
-          <a:noFill/>
-          <a:ln/>
-        </p:spPr>
-        <p:txBody>
-          <a:bodyPr wrap="square" lIns="25400" tIns="25400" rIns="25400" bIns="25400" rtlCol="0" anchor="ctr"/>
-          <a:lstStyle/>
-          <a:p>
-            <a:pPr algn="l" indent="0" marL="0">
-              <a:lnSpc>
-                <a:spcPct val="100000"/>
-              </a:lnSpc>
-              <a:buNone/>
-            </a:pPr>
-            <a:r>
-              <a:rPr lang="en-US" sz="1400" dirty="0">
-                <a:solidFill>
-                  <a:srgbClr val="1F2A37"/>
-                </a:solidFill>
-                <a:latin typeface="Calibri" pitchFamily="34" charset="0"/>
-                <a:ea typeface="Calibri" pitchFamily="34" charset="-122"/>
-                <a:cs typeface="Calibri" pitchFamily="34" charset="-120"/>
-              </a:rPr>
-              <a:t>Fixação de preços</a:t>
-            </a:r>
-            <a:endParaRPr lang="en-US" sz="1400" dirty="0"/>
-          </a:p>
-        </p:txBody>
-      </p:sp>
-      <p:sp>
-        <p:nvSpPr>
-          <p:cNvPr id="16" name="Text 14"/>
-          <p:cNvSpPr txBox="1"/>
-          <p:nvPr/>
-        </p:nvSpPr>
-        <p:spPr>
-          <a:xfrm>
-            <a:off x="4206240" y="36576"/>
-            <a:ext cx="4800600" cy="219456"/>
-          </a:xfrm>
-          <a:prstGeom prst="rect">
-            <a:avLst/>
-          </a:prstGeom>
-          <a:noFill/>
-          <a:ln/>
-        </p:spPr>
-        <p:txBody>
-          <a:bodyPr wrap="square" lIns="0" tIns="0" rIns="0" bIns="0" rtlCol="0" anchor="ctr"/>
-          <a:lstStyle/>
-          <a:p>
-            <a:pPr algn="r" indent="0" marL="0">
-              <a:lnSpc>
-                <a:spcPct val="100000"/>
-              </a:lnSpc>
-              <a:buNone/>
-            </a:pPr>
-            <a:r>
-              <a:rPr lang="en-US" sz="950" dirty="0">
-                <a:solidFill>
-                  <a:srgbClr val="5B6770"/>
-                </a:solidFill>
-                <a:latin typeface="Calibri" pitchFamily="34" charset="0"/>
-                <a:ea typeface="Calibri" pitchFamily="34" charset="-122"/>
-                <a:cs typeface="Calibri" pitchFamily="34" charset="-120"/>
-              </a:rPr>
-              <a:t>Estado, Governo e Mercado · Unidade 1</a:t>
-            </a:r>
-            <a:endParaRPr lang="en-US" sz="950" dirty="0"/>
-          </a:p>
-        </p:txBody>
-      </p:sp>
-    </p:spTree>
-  </p:cSld>
-  <p:clrMapOvr>
-    <a:masterClrMapping/>
-  </p:clrMapOvr>
-</p:sld>
-</file>
-
-<file path=ppt/slides/slide44.xml><?xml version="1.0" encoding="utf-8"?>
-<p:sld xmlns:a="http://schemas.openxmlformats.org/drawingml/2006/main" xmlns:r="http://schemas.openxmlformats.org/officeDocument/2006/relationships" xmlns:p="http://schemas.openxmlformats.org/presentationml/2006/main">
-  <p:cSld name="Slide 44">
-    <p:bg>
-      <p:bgPr>
-        <a:blipFill dpi="0" rotWithShape="1">
-          <a:blip r:embed="rId1">
-            <a:lum/>
-          </a:blip>
-          <a:srcRect/>
-          <a:stretch>
-            <a:fillRect/>
-          </a:stretch>
-        </a:blipFill>
-        <a:effectLst/>
-      </p:bgPr>
-    </p:bg>
-    <p:spTree>
-      <p:nvGrpSpPr>
-        <p:cNvPr id="1" name=""/>
-        <p:cNvGrpSpPr/>
-        <p:nvPr/>
-      </p:nvGrpSpPr>
-      <p:grpSpPr>
-        <a:xfrm>
-          <a:off x="0" y="0"/>
-          <a:ext cx="0" cy="0"/>
-          <a:chOff x="0" y="0"/>
-          <a:chExt cx="0" cy="0"/>
-        </a:xfrm>
-      </p:grpSpPr>
-      <p:sp>
-        <p:nvSpPr>
-          <p:cNvPr id="2" name="Text 0"/>
-          <p:cNvSpPr txBox="1"/>
-          <p:nvPr/>
-        </p:nvSpPr>
-        <p:spPr>
-          <a:xfrm>
-            <a:off x="731520" y="274320"/>
-            <a:ext cx="7680960" cy="365760"/>
-          </a:xfrm>
-          <a:prstGeom prst="rect">
-            <a:avLst/>
-          </a:prstGeom>
-          <a:noFill/>
-          <a:ln/>
-        </p:spPr>
-        <p:txBody>
-          <a:bodyPr wrap="square" lIns="0" tIns="0" rIns="0" bIns="0" rtlCol="0" anchor="ctr"/>
-          <a:lstStyle/>
-          <a:p>
-            <a:pPr algn="ctr" indent="0" marL="0">
-              <a:lnSpc>
-                <a:spcPct val="100000"/>
-              </a:lnSpc>
-              <a:buNone/>
-            </a:pPr>
-            <a:r>
-              <a:rPr lang="en-US" sz="1250" b="1" dirty="0">
-                <a:solidFill>
-                  <a:srgbClr val="2A8C85"/>
-                </a:solidFill>
-                <a:latin typeface="Calibri" pitchFamily="34" charset="0"/>
-                <a:ea typeface="Calibri" pitchFamily="34" charset="-122"/>
-                <a:cs typeface="Calibri" pitchFamily="34" charset="-120"/>
-              </a:rPr>
-              <a:t>QUIZ DA UNIDADE 1 · PERGUNTA 5 DE 5 · RESPOSTA</a:t>
-            </a:r>
-            <a:endParaRPr lang="en-US" sz="1250" dirty="0"/>
-          </a:p>
-        </p:txBody>
-      </p:sp>
-      <p:sp>
-        <p:nvSpPr>
-          <p:cNvPr id="3" name="Text 1"/>
-          <p:cNvSpPr txBox="1"/>
-          <p:nvPr/>
-        </p:nvSpPr>
-        <p:spPr>
-          <a:xfrm>
-            <a:off x="731520" y="658368"/>
-            <a:ext cx="7680960" cy="960120"/>
-          </a:xfrm>
-          <a:prstGeom prst="rect">
-            <a:avLst/>
-          </a:prstGeom>
-          <a:noFill/>
-          <a:ln/>
-        </p:spPr>
-        <p:txBody>
-          <a:bodyPr wrap="square" lIns="0" tIns="0" rIns="0" bIns="0" rtlCol="0" anchor="ctr"/>
-          <a:lstStyle/>
-          <a:p>
-            <a:pPr algn="ctr" indent="0" marL="0">
-              <a:lnSpc>
-                <a:spcPct val="100000"/>
-              </a:lnSpc>
-              <a:buNone/>
-            </a:pPr>
-            <a:r>
-              <a:rPr lang="en-US" sz="1900" b="1" dirty="0">
-                <a:solidFill>
-                  <a:srgbClr val="13294B"/>
-                </a:solidFill>
-                <a:latin typeface="Calibri" pitchFamily="34" charset="0"/>
-                <a:ea typeface="Calibri" pitchFamily="34" charset="-122"/>
-                <a:cs typeface="Calibri" pitchFamily="34" charset="-120"/>
-              </a:rPr>
-              <a:t>IPTU progressivo e tarifa social de água cumprem qual função econômica do Estado?</a:t>
-            </a:r>
-            <a:endParaRPr lang="en-US" sz="1900" dirty="0"/>
-          </a:p>
-        </p:txBody>
-      </p:sp>
-      <p:sp>
-        <p:nvSpPr>
-          <p:cNvPr id="4" name="Shape 2"/>
-          <p:cNvSpPr/>
-          <p:nvPr/>
-        </p:nvSpPr>
-        <p:spPr>
-          <a:xfrm>
-            <a:off x="685800" y="1737360"/>
-            <a:ext cx="3794760" cy="749808"/>
-          </a:xfrm>
-          <a:prstGeom prst="roundRect">
-            <a:avLst>
-              <a:gd name="adj" fmla="val 9756"/>
-            </a:avLst>
-          </a:prstGeom>
-          <a:solidFill>
-            <a:srgbClr val="FFFFFF"/>
-          </a:solidFill>
-          <a:ln w="12700">
-            <a:solidFill>
-              <a:srgbClr val="DCD5C1"/>
-            </a:solidFill>
-            <a:prstDash val="solid"/>
-          </a:ln>
-        </p:spPr>
-      </p:sp>
-      <p:sp>
-        <p:nvSpPr>
-          <p:cNvPr id="5" name="Text 3"/>
-          <p:cNvSpPr txBox="1"/>
-          <p:nvPr/>
-        </p:nvSpPr>
-        <p:spPr>
-          <a:xfrm>
-            <a:off x="813816" y="1901952"/>
-            <a:ext cx="420624" cy="420624"/>
-          </a:xfrm>
-          <a:prstGeom prst="roundRect">
-            <a:avLst>
-              <a:gd name="adj" fmla="val 50000"/>
-            </a:avLst>
-          </a:prstGeom>
-          <a:solidFill>
-            <a:srgbClr val="9AA3AB"/>
-          </a:solidFill>
-          <a:ln/>
-        </p:spPr>
-        <p:txBody>
-          <a:bodyPr wrap="square" lIns="0" tIns="0" rIns="0" bIns="0" rtlCol="0" anchor="ctr"/>
-          <a:lstStyle/>
-          <a:p>
-            <a:pPr algn="ctr" indent="0" marL="0">
-              <a:lnSpc>
-                <a:spcPct val="100000"/>
-              </a:lnSpc>
-              <a:buNone/>
-            </a:pPr>
-            <a:r>
-              <a:rPr lang="en-US" sz="1600" b="1" dirty="0">
-                <a:solidFill>
-                  <a:srgbClr val="FFFFFF"/>
-                </a:solidFill>
-                <a:latin typeface="Calibri" pitchFamily="34" charset="0"/>
-                <a:ea typeface="Calibri" pitchFamily="34" charset="-122"/>
-                <a:cs typeface="Calibri" pitchFamily="34" charset="-120"/>
-              </a:rPr>
-              <a:t>a</a:t>
-            </a:r>
-            <a:endParaRPr lang="en-US" sz="1600" dirty="0"/>
-          </a:p>
-        </p:txBody>
-      </p:sp>
-      <p:sp>
-        <p:nvSpPr>
-          <p:cNvPr id="6" name="Text 4"/>
-          <p:cNvSpPr txBox="1"/>
-          <p:nvPr/>
-        </p:nvSpPr>
-        <p:spPr>
-          <a:xfrm>
-            <a:off x="1344168" y="1773936"/>
-            <a:ext cx="3044952" cy="676656"/>
-          </a:xfrm>
-          <a:prstGeom prst="rect">
-            <a:avLst/>
-          </a:prstGeom>
-          <a:noFill/>
-          <a:ln/>
-        </p:spPr>
-        <p:txBody>
-          <a:bodyPr wrap="square" lIns="25400" tIns="25400" rIns="25400" bIns="25400" rtlCol="0" anchor="ctr"/>
-          <a:lstStyle/>
-          <a:p>
-            <a:pPr algn="l" indent="0" marL="0">
-              <a:lnSpc>
-                <a:spcPct val="100000"/>
-              </a:lnSpc>
-              <a:buNone/>
-            </a:pPr>
-            <a:r>
-              <a:rPr lang="en-US" sz="1400" dirty="0">
-                <a:solidFill>
-                  <a:srgbClr val="5B6770"/>
-                </a:solidFill>
-                <a:latin typeface="Calibri" pitchFamily="34" charset="0"/>
-                <a:ea typeface="Calibri" pitchFamily="34" charset="-122"/>
-                <a:cs typeface="Calibri" pitchFamily="34" charset="-120"/>
-              </a:rPr>
-              <a:t>Alocativa</a:t>
-            </a:r>
-            <a:endParaRPr lang="en-US" sz="1400" dirty="0"/>
-          </a:p>
-        </p:txBody>
-      </p:sp>
-      <p:sp>
-        <p:nvSpPr>
-          <p:cNvPr id="7" name="Shape 5"/>
-          <p:cNvSpPr/>
-          <p:nvPr/>
-        </p:nvSpPr>
-        <p:spPr>
-          <a:xfrm>
-            <a:off x="4663440" y="1737360"/>
-            <a:ext cx="3794760" cy="749808"/>
-          </a:xfrm>
-          <a:prstGeom prst="roundRect">
-            <a:avLst>
-              <a:gd name="adj" fmla="val 9756"/>
-            </a:avLst>
-          </a:prstGeom>
-          <a:solidFill>
-            <a:srgbClr val="E3F2E8"/>
-          </a:solidFill>
-          <a:ln w="25400">
-            <a:solidFill>
-              <a:srgbClr val="2E7D4F"/>
-            </a:solidFill>
-            <a:prstDash val="solid"/>
-          </a:ln>
-        </p:spPr>
-      </p:sp>
-      <p:sp>
-        <p:nvSpPr>
-          <p:cNvPr id="8" name="Text 6"/>
-          <p:cNvSpPr txBox="1"/>
-          <p:nvPr/>
-        </p:nvSpPr>
-        <p:spPr>
-          <a:xfrm>
-            <a:off x="4791456" y="1901952"/>
-            <a:ext cx="420624" cy="420624"/>
-          </a:xfrm>
-          <a:prstGeom prst="roundRect">
-            <a:avLst>
-              <a:gd name="adj" fmla="val 50000"/>
-            </a:avLst>
-          </a:prstGeom>
-          <a:solidFill>
-            <a:srgbClr val="2E7D4F"/>
-          </a:solidFill>
-          <a:ln/>
-        </p:spPr>
-        <p:txBody>
-          <a:bodyPr wrap="square" lIns="0" tIns="0" rIns="0" bIns="0" rtlCol="0" anchor="ctr"/>
-          <a:lstStyle/>
-          <a:p>
-            <a:pPr algn="ctr" indent="0" marL="0">
-              <a:lnSpc>
-                <a:spcPct val="100000"/>
-              </a:lnSpc>
-              <a:buNone/>
-            </a:pPr>
-            <a:r>
-              <a:rPr lang="en-US" sz="1600" b="1" dirty="0">
-                <a:solidFill>
-                  <a:srgbClr val="FFFFFF"/>
-                </a:solidFill>
-                <a:latin typeface="Calibri" pitchFamily="34" charset="0"/>
-                <a:ea typeface="Calibri" pitchFamily="34" charset="-122"/>
-                <a:cs typeface="Calibri" pitchFamily="34" charset="-120"/>
-              </a:rPr>
-              <a:t>b</a:t>
-            </a:r>
-            <a:endParaRPr lang="en-US" sz="1600" dirty="0"/>
-          </a:p>
-        </p:txBody>
-      </p:sp>
-      <p:sp>
-        <p:nvSpPr>
-          <p:cNvPr id="9" name="Text 7"/>
-          <p:cNvSpPr txBox="1"/>
-          <p:nvPr/>
-        </p:nvSpPr>
-        <p:spPr>
-          <a:xfrm>
-            <a:off x="5321808" y="1773936"/>
-            <a:ext cx="3044952" cy="676656"/>
-          </a:xfrm>
-          <a:prstGeom prst="rect">
-            <a:avLst/>
-          </a:prstGeom>
-          <a:noFill/>
-          <a:ln/>
-        </p:spPr>
-        <p:txBody>
-          <a:bodyPr wrap="square" lIns="25400" tIns="25400" rIns="25400" bIns="25400" rtlCol="0" anchor="ctr"/>
-          <a:lstStyle/>
-          <a:p>
-            <a:pPr algn="l" indent="0" marL="0">
-              <a:lnSpc>
-                <a:spcPct val="100000"/>
-              </a:lnSpc>
-              <a:buNone/>
-            </a:pPr>
-            <a:r>
-              <a:rPr lang="en-US" sz="1400" b="1" dirty="0">
-                <a:solidFill>
-                  <a:srgbClr val="1F2A37"/>
-                </a:solidFill>
-                <a:latin typeface="Calibri" pitchFamily="34" charset="0"/>
-                <a:ea typeface="Calibri" pitchFamily="34" charset="-122"/>
-                <a:cs typeface="Calibri" pitchFamily="34" charset="-120"/>
-              </a:rPr>
-              <a:t>Distributiva</a:t>
-            </a:r>
-            <a:endParaRPr lang="en-US" sz="1400" dirty="0"/>
-          </a:p>
-        </p:txBody>
-      </p:sp>
-      <p:sp>
-        <p:nvSpPr>
-          <p:cNvPr id="10" name="Shape 8"/>
-          <p:cNvSpPr/>
-          <p:nvPr/>
-        </p:nvSpPr>
-        <p:spPr>
-          <a:xfrm>
-            <a:off x="685800" y="2633472"/>
-            <a:ext cx="3794760" cy="749808"/>
-          </a:xfrm>
-          <a:prstGeom prst="roundRect">
-            <a:avLst>
-              <a:gd name="adj" fmla="val 9756"/>
-            </a:avLst>
-          </a:prstGeom>
-          <a:solidFill>
-            <a:srgbClr val="FFFFFF"/>
-          </a:solidFill>
-          <a:ln w="12700">
-            <a:solidFill>
-              <a:srgbClr val="DCD5C1"/>
-            </a:solidFill>
-            <a:prstDash val="solid"/>
-          </a:ln>
-        </p:spPr>
-      </p:sp>
-      <p:sp>
-        <p:nvSpPr>
-          <p:cNvPr id="11" name="Text 9"/>
-          <p:cNvSpPr txBox="1"/>
-          <p:nvPr/>
-        </p:nvSpPr>
-        <p:spPr>
-          <a:xfrm>
-            <a:off x="813816" y="2798064"/>
-            <a:ext cx="420624" cy="420624"/>
-          </a:xfrm>
-          <a:prstGeom prst="roundRect">
-            <a:avLst>
-              <a:gd name="adj" fmla="val 50000"/>
-            </a:avLst>
-          </a:prstGeom>
-          <a:solidFill>
-            <a:srgbClr val="9AA3AB"/>
-          </a:solidFill>
-          <a:ln/>
-        </p:spPr>
-        <p:txBody>
-          <a:bodyPr wrap="square" lIns="0" tIns="0" rIns="0" bIns="0" rtlCol="0" anchor="ctr"/>
-          <a:lstStyle/>
-          <a:p>
-            <a:pPr algn="ctr" indent="0" marL="0">
-              <a:lnSpc>
-                <a:spcPct val="100000"/>
-              </a:lnSpc>
-              <a:buNone/>
-            </a:pPr>
-            <a:r>
-              <a:rPr lang="en-US" sz="1600" b="1" dirty="0">
-                <a:solidFill>
-                  <a:srgbClr val="FFFFFF"/>
-                </a:solidFill>
-                <a:latin typeface="Calibri" pitchFamily="34" charset="0"/>
-                <a:ea typeface="Calibri" pitchFamily="34" charset="-122"/>
-                <a:cs typeface="Calibri" pitchFamily="34" charset="-120"/>
-              </a:rPr>
-              <a:t>c</a:t>
-            </a:r>
-            <a:endParaRPr lang="en-US" sz="1600" dirty="0"/>
-          </a:p>
-        </p:txBody>
-      </p:sp>
-      <p:sp>
-        <p:nvSpPr>
-          <p:cNvPr id="12" name="Text 10"/>
-          <p:cNvSpPr txBox="1"/>
-          <p:nvPr/>
-        </p:nvSpPr>
-        <p:spPr>
-          <a:xfrm>
-            <a:off x="1344168" y="2670048"/>
-            <a:ext cx="3044952" cy="676656"/>
-          </a:xfrm>
-          <a:prstGeom prst="rect">
-            <a:avLst/>
-          </a:prstGeom>
-          <a:noFill/>
-          <a:ln/>
-        </p:spPr>
-        <p:txBody>
-          <a:bodyPr wrap="square" lIns="25400" tIns="25400" rIns="25400" bIns="25400" rtlCol="0" anchor="ctr"/>
-          <a:lstStyle/>
-          <a:p>
-            <a:pPr algn="l" indent="0" marL="0">
-              <a:lnSpc>
-                <a:spcPct val="100000"/>
-              </a:lnSpc>
-              <a:buNone/>
-            </a:pPr>
-            <a:r>
-              <a:rPr lang="en-US" sz="1400" dirty="0">
-                <a:solidFill>
-                  <a:srgbClr val="5B6770"/>
-                </a:solidFill>
-                <a:latin typeface="Calibri" pitchFamily="34" charset="0"/>
-                <a:ea typeface="Calibri" pitchFamily="34" charset="-122"/>
-                <a:cs typeface="Calibri" pitchFamily="34" charset="-120"/>
-              </a:rPr>
-              <a:t>Estabilizadora</a:t>
-            </a:r>
-            <a:endParaRPr lang="en-US" sz="1400" dirty="0"/>
-          </a:p>
-        </p:txBody>
-      </p:sp>
-      <p:sp>
-        <p:nvSpPr>
-          <p:cNvPr id="13" name="Shape 11"/>
-          <p:cNvSpPr/>
-          <p:nvPr/>
-        </p:nvSpPr>
-        <p:spPr>
-          <a:xfrm>
-            <a:off x="4663440" y="2633472"/>
-            <a:ext cx="3794760" cy="749808"/>
-          </a:xfrm>
-          <a:prstGeom prst="roundRect">
-            <a:avLst>
-              <a:gd name="adj" fmla="val 9756"/>
-            </a:avLst>
-          </a:prstGeom>
-          <a:solidFill>
-            <a:srgbClr val="FFFFFF"/>
-          </a:solidFill>
-          <a:ln w="12700">
-            <a:solidFill>
-              <a:srgbClr val="DCD5C1"/>
-            </a:solidFill>
-            <a:prstDash val="solid"/>
-          </a:ln>
-        </p:spPr>
-      </p:sp>
-      <p:sp>
-        <p:nvSpPr>
-          <p:cNvPr id="14" name="Text 12"/>
-          <p:cNvSpPr txBox="1"/>
-          <p:nvPr/>
-        </p:nvSpPr>
-        <p:spPr>
-          <a:xfrm>
-            <a:off x="4791456" y="2798064"/>
-            <a:ext cx="420624" cy="420624"/>
-          </a:xfrm>
-          <a:prstGeom prst="roundRect">
-            <a:avLst>
-              <a:gd name="adj" fmla="val 50000"/>
-            </a:avLst>
-          </a:prstGeom>
-          <a:solidFill>
-            <a:srgbClr val="9AA3AB"/>
-          </a:solidFill>
-          <a:ln/>
-        </p:spPr>
-        <p:txBody>
-          <a:bodyPr wrap="square" lIns="0" tIns="0" rIns="0" bIns="0" rtlCol="0" anchor="ctr"/>
-          <a:lstStyle/>
-          <a:p>
-            <a:pPr algn="ctr" indent="0" marL="0">
-              <a:lnSpc>
-                <a:spcPct val="100000"/>
-              </a:lnSpc>
-              <a:buNone/>
-            </a:pPr>
-            <a:r>
-              <a:rPr lang="en-US" sz="1600" b="1" dirty="0">
-                <a:solidFill>
-                  <a:srgbClr val="FFFFFF"/>
-                </a:solidFill>
-                <a:latin typeface="Calibri" pitchFamily="34" charset="0"/>
-                <a:ea typeface="Calibri" pitchFamily="34" charset="-122"/>
-                <a:cs typeface="Calibri" pitchFamily="34" charset="-120"/>
-              </a:rPr>
-              <a:t>d</a:t>
-            </a:r>
-            <a:endParaRPr lang="en-US" sz="1600" dirty="0"/>
-          </a:p>
-        </p:txBody>
-      </p:sp>
-      <p:sp>
-        <p:nvSpPr>
-          <p:cNvPr id="15" name="Text 13"/>
-          <p:cNvSpPr txBox="1"/>
-          <p:nvPr/>
-        </p:nvSpPr>
-        <p:spPr>
-          <a:xfrm>
-            <a:off x="5321808" y="2670048"/>
-            <a:ext cx="3044952" cy="676656"/>
-          </a:xfrm>
-          <a:prstGeom prst="rect">
-            <a:avLst/>
-          </a:prstGeom>
-          <a:noFill/>
-          <a:ln/>
-        </p:spPr>
-        <p:txBody>
-          <a:bodyPr wrap="square" lIns="25400" tIns="25400" rIns="25400" bIns="25400" rtlCol="0" anchor="ctr"/>
-          <a:lstStyle/>
-          <a:p>
-            <a:pPr algn="l" indent="0" marL="0">
-              <a:lnSpc>
-                <a:spcPct val="100000"/>
-              </a:lnSpc>
-              <a:buNone/>
-            </a:pPr>
-            <a:r>
-              <a:rPr lang="en-US" sz="1400" dirty="0">
-                <a:solidFill>
-                  <a:srgbClr val="5B6770"/>
-                </a:solidFill>
-                <a:latin typeface="Calibri" pitchFamily="34" charset="0"/>
-                <a:ea typeface="Calibri" pitchFamily="34" charset="-122"/>
-                <a:cs typeface="Calibri" pitchFamily="34" charset="-120"/>
-              </a:rPr>
-              <a:t>Fixação de preços</a:t>
-            </a:r>
-            <a:endParaRPr lang="en-US" sz="1400" dirty="0"/>
-          </a:p>
-        </p:txBody>
-      </p:sp>
-      <p:sp>
-        <p:nvSpPr>
-          <p:cNvPr id="16" name="Text 14"/>
-          <p:cNvSpPr txBox="1"/>
-          <p:nvPr/>
-        </p:nvSpPr>
-        <p:spPr>
-          <a:xfrm>
-            <a:off x="685800" y="3566160"/>
-            <a:ext cx="7772400" cy="841248"/>
-          </a:xfrm>
-          <a:prstGeom prst="roundRect">
-            <a:avLst>
-              <a:gd name="adj" fmla="val 8696"/>
-            </a:avLst>
-          </a:prstGeom>
-          <a:solidFill>
-            <a:srgbClr val="E6F2F0"/>
-          </a:solidFill>
-          <a:ln/>
-        </p:spPr>
-        <p:txBody>
-          <a:bodyPr wrap="square" lIns="114300" tIns="114300" rIns="114300" bIns="114300" rtlCol="0" anchor="ctr"/>
-          <a:lstStyle/>
-          <a:p>
-            <a:pPr algn="l" indent="0" marL="0">
-              <a:lnSpc>
-                <a:spcPct val="100000"/>
-              </a:lnSpc>
-              <a:buNone/>
-            </a:pPr>
-            <a:r>
-              <a:rPr lang="en-US" sz="1350" b="1" dirty="0">
-                <a:solidFill>
-                  <a:srgbClr val="2E7D4F"/>
-                </a:solidFill>
-                <a:latin typeface="Calibri" pitchFamily="34" charset="0"/>
-                <a:ea typeface="Calibri" pitchFamily="34" charset="-122"/>
-                <a:cs typeface="Calibri" pitchFamily="34" charset="-120"/>
-              </a:rPr>
-              <a:t>Resposta: b) </a:t>
-            </a:r>
-            <a:pPr algn="l" indent="0" marL="0">
-              <a:lnSpc>
-                <a:spcPct val="100000"/>
-              </a:lnSpc>
-              <a:buNone/>
-            </a:pPr>
-            <a:r>
-              <a:rPr lang="en-US" sz="1350" dirty="0">
-                <a:solidFill>
-                  <a:srgbClr val="1F2A37"/>
-                </a:solidFill>
-                <a:latin typeface="Calibri" pitchFamily="34" charset="0"/>
-                <a:ea typeface="Calibri" pitchFamily="34" charset="-122"/>
-                <a:cs typeface="Calibri" pitchFamily="34" charset="-120"/>
-              </a:rPr>
-              <a:t>São instrumentos da função distributiva: cobram mais de quem tem mais e reduzem o custo para as famílias de baixa renda.</a:t>
-            </a:r>
-            <a:endParaRPr lang="en-US" sz="1350" dirty="0"/>
-          </a:p>
-        </p:txBody>
-      </p:sp>
-      <p:sp>
-        <p:nvSpPr>
-          <p:cNvPr id="17" name="Text 15"/>
-          <p:cNvSpPr txBox="1"/>
-          <p:nvPr/>
-        </p:nvSpPr>
-        <p:spPr>
-          <a:xfrm>
-            <a:off x="4206240" y="36576"/>
-            <a:ext cx="4800600" cy="219456"/>
-          </a:xfrm>
-          <a:prstGeom prst="rect">
-            <a:avLst/>
-          </a:prstGeom>
-          <a:noFill/>
-          <a:ln/>
-        </p:spPr>
-        <p:txBody>
-          <a:bodyPr wrap="square" lIns="0" tIns="0" rIns="0" bIns="0" rtlCol="0" anchor="ctr"/>
-          <a:lstStyle/>
-          <a:p>
-            <a:pPr algn="r" indent="0" marL="0">
-              <a:lnSpc>
-                <a:spcPct val="100000"/>
-              </a:lnSpc>
-              <a:buNone/>
-            </a:pPr>
-            <a:r>
-              <a:rPr lang="en-US" sz="950" dirty="0">
-                <a:solidFill>
-                  <a:srgbClr val="5B6770"/>
-                </a:solidFill>
-                <a:latin typeface="Calibri" pitchFamily="34" charset="0"/>
-                <a:ea typeface="Calibri" pitchFamily="34" charset="-122"/>
-                <a:cs typeface="Calibri" pitchFamily="34" charset="-120"/>
-              </a:rPr>
-              <a:t>Estado, Governo e Mercado · Unidade 1</a:t>
-            </a:r>
-            <a:endParaRPr lang="en-US" sz="950" dirty="0"/>
-          </a:p>
-        </p:txBody>
-      </p:sp>
-    </p:spTree>
-  </p:cSld>
-  <p:clrMapOvr>
-    <a:masterClrMapping/>
-  </p:clrMapOvr>
-</p:sld>
-</file>
-
-<file path=ppt/slides/slide45.xml><?xml version="1.0" encoding="utf-8"?>
-<p:sld xmlns:a="http://schemas.openxmlformats.org/drawingml/2006/main" xmlns:r="http://schemas.openxmlformats.org/officeDocument/2006/relationships" xmlns:p="http://schemas.openxmlformats.org/presentationml/2006/main">
-  <p:cSld name="Slide 45">
-    <p:bg>
-      <p:bgPr>
-        <a:blipFill dpi="0" rotWithShape="1">
-          <a:blip r:embed="rId1">
-            <a:lum/>
-          </a:blip>
-          <a:srcRect/>
-          <a:stretch>
-            <a:fillRect/>
-          </a:stretch>
-        </a:blipFill>
-        <a:effectLst/>
-      </p:bgPr>
-    </p:bg>
-    <p:spTree>
-      <p:nvGrpSpPr>
-        <p:cNvPr id="1" name=""/>
-        <p:cNvGrpSpPr/>
-        <p:nvPr/>
-      </p:nvGrpSpPr>
-      <p:grpSpPr>
-        <a:xfrm>
-          <a:off x="0" y="0"/>
-          <a:ext cx="0" cy="0"/>
-          <a:chOff x="0" y="0"/>
-          <a:chExt cx="0" cy="0"/>
-        </a:xfrm>
-      </p:grpSpPr>
-      <p:sp>
-        <p:nvSpPr>
-          <p:cNvPr id="2" name="Text 0"/>
-          <p:cNvSpPr txBox="1"/>
-          <p:nvPr/>
-        </p:nvSpPr>
-        <p:spPr>
-          <a:xfrm>
-            <a:off x="731520" y="256032"/>
-            <a:ext cx="7680960" cy="566928"/>
-          </a:xfrm>
-          <a:prstGeom prst="rect">
-            <a:avLst/>
-          </a:prstGeom>
-          <a:noFill/>
-          <a:ln/>
-        </p:spPr>
-        <p:txBody>
-          <a:bodyPr wrap="square" lIns="0" tIns="0" rIns="0" bIns="0" rtlCol="0" anchor="ctr"/>
-          <a:lstStyle/>
-          <a:p>
-            <a:pPr algn="ctr" indent="0" marL="0">
-              <a:lnSpc>
-                <a:spcPct val="100000"/>
-              </a:lnSpc>
-              <a:buNone/>
-            </a:pPr>
-            <a:r>
-              <a:rPr lang="en-US" sz="2800" b="1" dirty="0">
-                <a:solidFill>
-                  <a:srgbClr val="13294B"/>
-                </a:solidFill>
-                <a:latin typeface="Calibri" pitchFamily="34" charset="0"/>
-                <a:ea typeface="Calibri" pitchFamily="34" charset="-122"/>
-                <a:cs typeface="Calibri" pitchFamily="34" charset="-120"/>
-              </a:rPr>
-              <a:t>Resumo da Unidade 1</a:t>
-            </a:r>
-            <a:endParaRPr lang="en-US" sz="2800" dirty="0"/>
-          </a:p>
-        </p:txBody>
-      </p:sp>
-      <p:sp>
-        <p:nvSpPr>
-          <p:cNvPr id="3" name="Text 1"/>
-          <p:cNvSpPr txBox="1"/>
-          <p:nvPr/>
-        </p:nvSpPr>
-        <p:spPr>
-          <a:xfrm>
-            <a:off x="1005840" y="804672"/>
-            <a:ext cx="7132320" cy="329184"/>
-          </a:xfrm>
-          <a:prstGeom prst="rect">
-            <a:avLst/>
-          </a:prstGeom>
-          <a:noFill/>
-          <a:ln/>
-        </p:spPr>
-        <p:txBody>
-          <a:bodyPr wrap="square" lIns="0" tIns="0" rIns="0" bIns="0" rtlCol="0" anchor="ctr"/>
-          <a:lstStyle/>
-          <a:p>
-            <a:pPr algn="ctr" indent="0" marL="0">
-              <a:lnSpc>
-                <a:spcPct val="100000"/>
-              </a:lnSpc>
-              <a:buNone/>
-            </a:pPr>
-            <a:r>
-              <a:rPr lang="en-US" sz="1400" dirty="0">
-                <a:solidFill>
-                  <a:srgbClr val="5B6770"/>
-                </a:solidFill>
-                <a:latin typeface="Calibri" pitchFamily="34" charset="0"/>
-                <a:ea typeface="Calibri" pitchFamily="34" charset="-122"/>
-                <a:cs typeface="Calibri" pitchFamily="34" charset="-120"/>
-              </a:rPr>
-              <a:t>O que discutimos nesta unidade</a:t>
-            </a:r>
-            <a:endParaRPr lang="en-US" sz="1400" dirty="0"/>
-          </a:p>
-        </p:txBody>
-      </p:sp>
-      <p:sp>
-        <p:nvSpPr>
-          <p:cNvPr id="4" name="Text 2"/>
-          <p:cNvSpPr txBox="1"/>
-          <p:nvPr/>
-        </p:nvSpPr>
-        <p:spPr>
-          <a:xfrm>
-            <a:off x="685800" y="1170432"/>
-            <a:ext cx="3794760" cy="2743200"/>
-          </a:xfrm>
-          <a:prstGeom prst="roundRect">
-            <a:avLst>
-              <a:gd name="adj" fmla="val 2000"/>
-            </a:avLst>
-          </a:prstGeom>
-          <a:solidFill>
-            <a:srgbClr val="FFFFFF"/>
-          </a:solidFill>
-          <a:ln w="12700">
-            <a:solidFill>
-              <a:srgbClr val="DCD5C1"/>
-            </a:solidFill>
-          </a:ln>
-        </p:spPr>
-        <p:txBody>
-          <a:bodyPr wrap="square" lIns="114300" tIns="114300" rIns="114300" bIns="114300" rtlCol="0" anchor="t"/>
-          <a:lstStyle/>
-          <a:p>
-            <a:pPr algn="l" indent="0" marL="0">
-              <a:lnSpc>
-                <a:spcPct val="100000"/>
-              </a:lnSpc>
-              <a:spcAft>
-                <a:spcPts val="200"/>
-              </a:spcAft>
-              <a:buNone/>
-            </a:pPr>
-            <a:r>
-              <a:rPr lang="en-US" sz="1100" b="1" dirty="0">
-                <a:solidFill>
-                  <a:srgbClr val="2A8C85"/>
-                </a:solidFill>
-                <a:latin typeface="Calibri" pitchFamily="34" charset="0"/>
-                <a:ea typeface="Calibri" pitchFamily="34" charset="-122"/>
-                <a:cs typeface="Calibri" pitchFamily="34" charset="-120"/>
-              </a:rPr>
-              <a:t>PARTE 1 · TÓPICO 1</a:t>
-            </a:r>
-            <a:endParaRPr lang="en-US" sz="1100" dirty="0"/>
-          </a:p>
-          <a:p>
-            <a:pPr algn="l" indent="0" marL="0">
-              <a:lnSpc>
-                <a:spcPct val="100000"/>
-              </a:lnSpc>
-              <a:spcAft>
-                <a:spcPts val="400"/>
-              </a:spcAft>
-              <a:buNone/>
-            </a:pPr>
-            <a:r>
-              <a:rPr lang="en-US" sz="1450" b="1" dirty="0">
-                <a:solidFill>
-                  <a:srgbClr val="13294B"/>
-                </a:solidFill>
-                <a:latin typeface="Calibri" pitchFamily="34" charset="0"/>
-                <a:ea typeface="Calibri" pitchFamily="34" charset="-122"/>
-                <a:cs typeface="Calibri" pitchFamily="34" charset="-120"/>
-              </a:rPr>
-              <a:t>Introdução à economia</a:t>
-            </a:r>
-            <a:endParaRPr lang="en-US" sz="1100" dirty="0"/>
-          </a:p>
-          <a:p>
-            <a:pPr algn="l" marL="177800" indent="-177800">
-              <a:lnSpc>
-                <a:spcPct val="100000"/>
-              </a:lnSpc>
-              <a:spcAft>
-                <a:spcPts val="300"/>
-              </a:spcAft>
-              <a:buSzPct val="100000"/>
-              <a:buChar char="•"/>
-            </a:pPr>
-            <a:r>
-              <a:rPr lang="en-US" sz="1200" dirty="0">
-                <a:solidFill>
-                  <a:srgbClr val="1F2A37"/>
-                </a:solidFill>
-                <a:latin typeface="Calibri" pitchFamily="34" charset="0"/>
-                <a:ea typeface="Calibri" pitchFamily="34" charset="-122"/>
-                <a:cs typeface="Calibri" pitchFamily="34" charset="-120"/>
-              </a:rPr>
-              <a:t>Economia estuda escolhas com recursos escassos; toda escolha tem custo de oportunidade.</a:t>
-            </a:r>
-            <a:endParaRPr lang="en-US" sz="1100" dirty="0"/>
-          </a:p>
-          <a:p>
-            <a:pPr algn="l" marL="177800" indent="-177800">
-              <a:lnSpc>
-                <a:spcPct val="100000"/>
-              </a:lnSpc>
-              <a:spcAft>
-                <a:spcPts val="300"/>
-              </a:spcAft>
-              <a:buSzPct val="100000"/>
-              <a:buChar char="•"/>
-            </a:pPr>
-            <a:r>
-              <a:rPr lang="en-US" sz="1200" dirty="0">
-                <a:solidFill>
-                  <a:srgbClr val="1F2A37"/>
-                </a:solidFill>
-                <a:latin typeface="Calibri" pitchFamily="34" charset="0"/>
-                <a:ea typeface="Calibri" pitchFamily="34" charset="-122"/>
-                <a:cs typeface="Calibri" pitchFamily="34" charset="-120"/>
-              </a:rPr>
-              <a:t>Três problemas: o que, como e para quem produzir.</a:t>
-            </a:r>
-            <a:endParaRPr lang="en-US" sz="1100" dirty="0"/>
-          </a:p>
-          <a:p>
-            <a:pPr algn="l" marL="177800" indent="-177800">
-              <a:lnSpc>
-                <a:spcPct val="100000"/>
-              </a:lnSpc>
-              <a:spcAft>
-                <a:spcPts val="300"/>
-              </a:spcAft>
-              <a:buSzPct val="100000"/>
-              <a:buChar char="•"/>
-            </a:pPr>
-            <a:r>
-              <a:rPr lang="en-US" sz="1200" dirty="0">
-                <a:solidFill>
-                  <a:srgbClr val="1F2A37"/>
-                </a:solidFill>
-                <a:latin typeface="Calibri" pitchFamily="34" charset="0"/>
-                <a:ea typeface="Calibri" pitchFamily="34" charset="-122"/>
-                <a:cs typeface="Calibri" pitchFamily="34" charset="-120"/>
-              </a:rPr>
-              <a:t>Fatores (terra, trabalho, capital, capacidade empresarial) e agentes (famílias, empresas, governo, setor externo).</a:t>
-            </a:r>
-            <a:endParaRPr lang="en-US" sz="1100" dirty="0"/>
-          </a:p>
-          <a:p>
-            <a:pPr algn="l" marL="177800" indent="-177800">
-              <a:lnSpc>
-                <a:spcPct val="100000"/>
-              </a:lnSpc>
-              <a:spcAft>
-                <a:spcPts val="300"/>
-              </a:spcAft>
-              <a:buSzPct val="100000"/>
-              <a:buChar char="•"/>
-            </a:pPr>
-            <a:r>
-              <a:rPr lang="en-US" sz="1200" dirty="0">
-                <a:solidFill>
-                  <a:srgbClr val="1F2A37"/>
-                </a:solidFill>
-                <a:latin typeface="Calibri" pitchFamily="34" charset="0"/>
-                <a:ea typeface="Calibri" pitchFamily="34" charset="-122"/>
-                <a:cs typeface="Calibri" pitchFamily="34" charset="-120"/>
-              </a:rPr>
-              <a:t>Os preços coordenam o mercado; todas as economias são mistas.</a:t>
-            </a:r>
-            <a:endParaRPr lang="en-US" sz="1100" dirty="0"/>
-          </a:p>
-          <a:p>
-            <a:pPr algn="l" marL="177800" indent="-177800">
-              <a:lnSpc>
-                <a:spcPct val="100000"/>
-              </a:lnSpc>
-              <a:spcAft>
-                <a:spcPts val="300"/>
-              </a:spcAft>
-              <a:buSzPct val="100000"/>
-              <a:buChar char="•"/>
-            </a:pPr>
-            <a:r>
-              <a:rPr lang="en-US" sz="1200" dirty="0">
-                <a:solidFill>
-                  <a:srgbClr val="1F2A37"/>
-                </a:solidFill>
-                <a:latin typeface="Calibri" pitchFamily="34" charset="0"/>
-                <a:ea typeface="Calibri" pitchFamily="34" charset="-122"/>
-                <a:cs typeface="Calibri" pitchFamily="34" charset="-120"/>
-              </a:rPr>
-              <a:t>Elasticidade: quanto a quantidade reage ao preço; micro × macro.</a:t>
-            </a:r>
-            <a:endParaRPr lang="en-US" sz="1100" dirty="0"/>
-          </a:p>
-        </p:txBody>
-      </p:sp>
-      <p:sp>
-        <p:nvSpPr>
-          <p:cNvPr id="5" name="Text 3"/>
-          <p:cNvSpPr txBox="1"/>
-          <p:nvPr/>
-        </p:nvSpPr>
-        <p:spPr>
-          <a:xfrm>
-            <a:off x="4663440" y="1170432"/>
-            <a:ext cx="3794760" cy="2743200"/>
-          </a:xfrm>
-          <a:prstGeom prst="roundRect">
-            <a:avLst>
-              <a:gd name="adj" fmla="val 2000"/>
-            </a:avLst>
-          </a:prstGeom>
-          <a:solidFill>
-            <a:srgbClr val="E6F2F0"/>
-          </a:solidFill>
-          <a:ln/>
-        </p:spPr>
-        <p:txBody>
-          <a:bodyPr wrap="square" lIns="114300" tIns="114300" rIns="114300" bIns="114300" rtlCol="0" anchor="t"/>
-          <a:lstStyle/>
-          <a:p>
-            <a:pPr algn="l" indent="0" marL="0">
-              <a:lnSpc>
-                <a:spcPct val="100000"/>
-              </a:lnSpc>
-              <a:spcAft>
-                <a:spcPts val="200"/>
-              </a:spcAft>
-              <a:buNone/>
-            </a:pPr>
-            <a:r>
-              <a:rPr lang="en-US" sz="1100" b="1" dirty="0">
-                <a:solidFill>
-                  <a:srgbClr val="2A8C85"/>
-                </a:solidFill>
-                <a:latin typeface="Calibri" pitchFamily="34" charset="0"/>
-                <a:ea typeface="Calibri" pitchFamily="34" charset="-122"/>
-                <a:cs typeface="Calibri" pitchFamily="34" charset="-120"/>
-              </a:rPr>
-              <a:t>PARTE 2 · TÓPICO 2</a:t>
-            </a:r>
-            <a:endParaRPr lang="en-US" sz="1100" dirty="0"/>
-          </a:p>
-          <a:p>
-            <a:pPr algn="l" indent="0" marL="0">
-              <a:lnSpc>
-                <a:spcPct val="100000"/>
-              </a:lnSpc>
-              <a:spcAft>
-                <a:spcPts val="400"/>
-              </a:spcAft>
-              <a:buNone/>
-            </a:pPr>
-            <a:r>
-              <a:rPr lang="en-US" sz="1450" b="1" dirty="0">
-                <a:solidFill>
-                  <a:srgbClr val="13294B"/>
-                </a:solidFill>
-                <a:latin typeface="Calibri" pitchFamily="34" charset="0"/>
-                <a:ea typeface="Calibri" pitchFamily="34" charset="-122"/>
-                <a:cs typeface="Calibri" pitchFamily="34" charset="-120"/>
-              </a:rPr>
-              <a:t>Estado, governo e mercado</a:t>
-            </a:r>
-            <a:endParaRPr lang="en-US" sz="1100" dirty="0"/>
-          </a:p>
-          <a:p>
-            <a:pPr algn="l" marL="177800" indent="-177800">
-              <a:lnSpc>
-                <a:spcPct val="100000"/>
-              </a:lnSpc>
-              <a:spcAft>
-                <a:spcPts val="300"/>
-              </a:spcAft>
-              <a:buSzPct val="100000"/>
-              <a:buChar char="•"/>
-            </a:pPr>
-            <a:r>
-              <a:rPr lang="en-US" sz="1200" dirty="0">
-                <a:solidFill>
-                  <a:srgbClr val="1F2A37"/>
-                </a:solidFill>
-                <a:latin typeface="Calibri" pitchFamily="34" charset="0"/>
-                <a:ea typeface="Calibri" pitchFamily="34" charset="-122"/>
-                <a:cs typeface="Calibri" pitchFamily="34" charset="-120"/>
-              </a:rPr>
-              <a:t>Estado (povo, território, soberania) é permanente; governo é transitório.</a:t>
-            </a:r>
-            <a:endParaRPr lang="en-US" sz="1100" dirty="0"/>
-          </a:p>
-          <a:p>
-            <a:pPr algn="l" marL="177800" indent="-177800">
-              <a:lnSpc>
-                <a:spcPct val="100000"/>
-              </a:lnSpc>
-              <a:spcAft>
-                <a:spcPts val="300"/>
-              </a:spcAft>
-              <a:buSzPct val="100000"/>
-              <a:buChar char="•"/>
-            </a:pPr>
-            <a:r>
-              <a:rPr lang="en-US" sz="1200" dirty="0">
-                <a:solidFill>
-                  <a:srgbClr val="1F2A37"/>
-                </a:solidFill>
-                <a:latin typeface="Calibri" pitchFamily="34" charset="0"/>
-                <a:ea typeface="Calibri" pitchFamily="34" charset="-122"/>
-                <a:cs typeface="Calibri" pitchFamily="34" charset="-120"/>
-              </a:rPr>
-              <a:t>Weber: monopólio do uso legítimo da força; dominação legal-racional.</a:t>
-            </a:r>
-            <a:endParaRPr lang="en-US" sz="1100" dirty="0"/>
-          </a:p>
-          <a:p>
-            <a:pPr algn="l" marL="177800" indent="-177800">
-              <a:lnSpc>
-                <a:spcPct val="100000"/>
-              </a:lnSpc>
-              <a:spcAft>
-                <a:spcPts val="300"/>
-              </a:spcAft>
-              <a:buSzPct val="100000"/>
-              <a:buChar char="•"/>
-            </a:pPr>
-            <a:r>
-              <a:rPr lang="en-US" sz="1200" dirty="0">
-                <a:solidFill>
-                  <a:srgbClr val="1F2A37"/>
-                </a:solidFill>
-                <a:latin typeface="Calibri" pitchFamily="34" charset="0"/>
-                <a:ea typeface="Calibri" pitchFamily="34" charset="-122"/>
-                <a:cs typeface="Calibri" pitchFamily="34" charset="-120"/>
-              </a:rPr>
-              <a:t>O mercado depende de instituições garantidas pelo Estado.</a:t>
-            </a:r>
-            <a:endParaRPr lang="en-US" sz="1100" dirty="0"/>
-          </a:p>
-          <a:p>
-            <a:pPr algn="l" marL="177800" indent="-177800">
-              <a:lnSpc>
-                <a:spcPct val="100000"/>
-              </a:lnSpc>
-              <a:spcAft>
-                <a:spcPts val="300"/>
-              </a:spcAft>
-              <a:buSzPct val="100000"/>
-              <a:buChar char="•"/>
-            </a:pPr>
-            <a:r>
-              <a:rPr lang="en-US" sz="1200" dirty="0">
-                <a:solidFill>
-                  <a:srgbClr val="1F2A37"/>
-                </a:solidFill>
-                <a:latin typeface="Calibri" pitchFamily="34" charset="0"/>
-                <a:ea typeface="Calibri" pitchFamily="34" charset="-122"/>
-                <a:cs typeface="Calibri" pitchFamily="34" charset="-120"/>
-              </a:rPr>
-              <a:t>Falhas de mercado justificam a ação do Estado, que também pode falhar.</a:t>
-            </a:r>
-            <a:endParaRPr lang="en-US" sz="1100" dirty="0"/>
-          </a:p>
-          <a:p>
-            <a:pPr algn="l" marL="177800" indent="-177800">
-              <a:lnSpc>
-                <a:spcPct val="100000"/>
-              </a:lnSpc>
-              <a:spcAft>
-                <a:spcPts val="300"/>
-              </a:spcAft>
-              <a:buSzPct val="100000"/>
-              <a:buChar char="•"/>
-            </a:pPr>
-            <a:r>
-              <a:rPr lang="en-US" sz="1200" dirty="0">
-                <a:solidFill>
-                  <a:srgbClr val="1F2A37"/>
-                </a:solidFill>
-                <a:latin typeface="Calibri" pitchFamily="34" charset="0"/>
-                <a:ea typeface="Calibri" pitchFamily="34" charset="-122"/>
-                <a:cs typeface="Calibri" pitchFamily="34" charset="-120"/>
-              </a:rPr>
-              <a:t>Musgrave: funções alocativa, distributiva e estabilizadora.</a:t>
-            </a:r>
-            <a:endParaRPr lang="en-US" sz="1100" dirty="0"/>
-          </a:p>
-        </p:txBody>
-      </p:sp>
-      <p:sp>
-        <p:nvSpPr>
-          <p:cNvPr id="6" name="Text 4"/>
-          <p:cNvSpPr txBox="1"/>
-          <p:nvPr/>
-        </p:nvSpPr>
-        <p:spPr>
-          <a:xfrm>
-            <a:off x="685800" y="3995928"/>
-            <a:ext cx="7772400" cy="484632"/>
-          </a:xfrm>
-          <a:prstGeom prst="roundRect">
-            <a:avLst>
-              <a:gd name="adj" fmla="val 15094"/>
-            </a:avLst>
-          </a:prstGeom>
-          <a:solidFill>
-            <a:srgbClr val="E6F2F0"/>
-          </a:solidFill>
-          <a:ln/>
-        </p:spPr>
-        <p:txBody>
-          <a:bodyPr wrap="square" lIns="127000" tIns="127000" rIns="127000" bIns="127000" rtlCol="0" anchor="ctr"/>
-          <a:lstStyle/>
-          <a:p>
-            <a:pPr algn="ctr" indent="0" marL="0">
-              <a:lnSpc>
-                <a:spcPct val="100000"/>
-              </a:lnSpc>
-              <a:buNone/>
-            </a:pPr>
-            <a:r>
-              <a:rPr lang="en-US" sz="1300" b="1" dirty="0">
-                <a:solidFill>
-                  <a:srgbClr val="13294B"/>
-                </a:solidFill>
-                <a:latin typeface="Calibri" pitchFamily="34" charset="0"/>
-                <a:ea typeface="Calibri" pitchFamily="34" charset="-122"/>
-                <a:cs typeface="Calibri" pitchFamily="34" charset="-120"/>
-              </a:rPr>
-              <a:t>Próxima unidade: a dinâmica pendular entre Estado e mercado e a matriz liberal.</a:t>
-            </a:r>
-            <a:endParaRPr lang="en-US" sz="1300" dirty="0"/>
-          </a:p>
-        </p:txBody>
-      </p:sp>
-      <p:sp>
-        <p:nvSpPr>
-          <p:cNvPr id="7" name="Text 5"/>
-          <p:cNvSpPr txBox="1"/>
-          <p:nvPr/>
-        </p:nvSpPr>
-        <p:spPr>
-          <a:xfrm>
-            <a:off x="4206240" y="36576"/>
-            <a:ext cx="4800600" cy="219456"/>
-          </a:xfrm>
-          <a:prstGeom prst="rect">
-            <a:avLst/>
-          </a:prstGeom>
-          <a:noFill/>
-          <a:ln/>
-        </p:spPr>
-        <p:txBody>
-          <a:bodyPr wrap="square" lIns="0" tIns="0" rIns="0" bIns="0" rtlCol="0" anchor="ctr"/>
-          <a:lstStyle/>
-          <a:p>
-            <a:pPr algn="r" indent="0" marL="0">
-              <a:lnSpc>
-                <a:spcPct val="100000"/>
-              </a:lnSpc>
-              <a:buNone/>
-            </a:pPr>
-            <a:r>
-              <a:rPr lang="en-US" sz="950" dirty="0">
-                <a:solidFill>
-                  <a:srgbClr val="5B6770"/>
-                </a:solidFill>
-                <a:latin typeface="Calibri" pitchFamily="34" charset="0"/>
-                <a:ea typeface="Calibri" pitchFamily="34" charset="-122"/>
-                <a:cs typeface="Calibri" pitchFamily="34" charset="-120"/>
-              </a:rPr>
-              <a:t>Estado, Governo e Mercado · Unidade 1</a:t>
             </a:r>
             <a:endParaRPr lang="en-US" sz="950" dirty="0"/>
           </a:p>
